--- a/slides/pedrad_ai_slides.pptx
+++ b/slides/pedrad_ai_slides.pptx
@@ -65,7 +65,6 @@
     <p:sldId id="313" r:id="rId64"/>
     <p:sldId id="314" r:id="rId65"/>
     <p:sldId id="315" r:id="rId66"/>
-    <p:sldId id="316" r:id="rId67"/>
   </p:sldIdLst>
   <p:sldSz cx="12191695" cy="6858000" type="screen4x3"/>
   <p:notesSz cx="6858000" cy="9144000"/>
@@ -3335,7 +3334,7 @@
                 </a:solidFill>
                 <a:latin typeface="Calibri"/>
               </a:rPr>
-              <a:t>1 / 61</a:t>
+              <a:t>1 / 60</a:t>
             </a:r>
           </a:p>
         </p:txBody>
@@ -3349,285 +3348,6 @@
 </file>
 
 <file path=ppt/slides/slide10.xml><?xml version="1.0" encoding="utf-8"?>
-<p:sld xmlns:a="http://schemas.openxmlformats.org/drawingml/2006/main" xmlns:p="http://schemas.openxmlformats.org/presentationml/2006/main" xmlns:r="http://schemas.openxmlformats.org/officeDocument/2006/relationships">
-  <p:cSld>
-    <p:spTree>
-      <p:nvGrpSpPr>
-        <p:cNvPr id="1" name=""/>
-        <p:cNvGrpSpPr/>
-        <p:nvPr/>
-      </p:nvGrpSpPr>
-      <p:grpSpPr/>
-      <p:sp>
-        <p:nvSpPr>
-          <p:cNvPr id="2" name="title band"/>
-          <p:cNvSpPr/>
-          <p:nvPr/>
-        </p:nvSpPr>
-        <p:spPr>
-          <a:xfrm>
-            <a:off x="0" y="0"/>
-            <a:ext cx="12191695" cy="713232"/>
-          </a:xfrm>
-          <a:prstGeom prst="rect">
-            <a:avLst/>
-          </a:prstGeom>
-          <a:solidFill>
-            <a:srgbClr val="3333B3"/>
-          </a:solidFill>
-          <a:ln>
-            <a:noFill/>
-          </a:ln>
-        </p:spPr>
-        <p:style>
-          <a:lnRef idx="1">
-            <a:schemeClr val="accent1"/>
-          </a:lnRef>
-          <a:fillRef idx="3">
-            <a:schemeClr val="accent1"/>
-          </a:fillRef>
-          <a:effectRef idx="2">
-            <a:schemeClr val="accent1"/>
-          </a:effectRef>
-          <a:fontRef idx="minor">
-            <a:schemeClr val="lt1"/>
-          </a:fontRef>
-        </p:style>
-        <p:txBody>
-          <a:bodyPr rtlCol="0" anchor="ctr" lIns="411480" wrap="square"/>
-          <a:lstStyle/>
-          <a:p>
-            <a:pPr algn="l"/>
-            <a:r>
-              <a:rPr sz="2200">
-                <a:solidFill>
-                  <a:srgbClr val="FFFFFF"/>
-                </a:solidFill>
-                <a:latin typeface="Calibri"/>
-              </a:rPr>
-              <a:t>Reading the whole pediatric literature, not a sample of it</a:t>
-            </a:r>
-          </a:p>
-        </p:txBody>
-      </p:sp>
-      <p:sp>
-        <p:nvSpPr>
-          <p:cNvPr id="3" name="TextBox 2"/>
-          <p:cNvSpPr txBox="1"/>
-          <p:nvPr/>
-        </p:nvSpPr>
-        <p:spPr>
-          <a:xfrm>
-            <a:off x="411480" y="877824"/>
-            <a:ext cx="11368735" cy="643255"/>
-          </a:xfrm>
-          <a:prstGeom prst="rect">
-            <a:avLst/>
-          </a:prstGeom>
-          <a:noFill/>
-        </p:spPr>
-        <p:txBody>
-          <a:bodyPr wrap="square" lIns="45720" rIns="45720" tIns="27432" bIns="27432" anchor="t">
-            <a:spAutoFit/>
-          </a:bodyPr>
-          <a:lstStyle/>
-          <a:p>
-            <a:pPr algn="l">
-              <a:spcAft>
-                <a:spcPts val="384"/>
-              </a:spcAft>
-            </a:pPr>
-            <a:r>
-              <a:rPr sz="1100" b="0" i="0">
-                <a:solidFill>
-                  <a:srgbClr val="1A1A1A"/>
-                </a:solidFill>
-                <a:latin typeface="Calibri"/>
-              </a:rPr>
-              <a:t>Counting publications says how much is being published; it does not say what was built, for which children, or how well it was tested. So every pediatric radiology-AI record from 2005 onward was retrieved from </a:t>
-            </a:r>
-            <a:r>
-              <a:rPr sz="1100" b="1" i="0">
-                <a:solidFill>
-                  <a:srgbClr val="1A1A1A"/>
-                </a:solidFill>
-                <a:latin typeface="Calibri"/>
-              </a:rPr>
-              <a:t>PubMed/MEDLINE and Embase</a:t>
-            </a:r>
-            <a:r>
-              <a:rPr sz="1100" b="0" i="0">
-                <a:solidFill>
-                  <a:srgbClr val="1A1A1A"/>
-                </a:solidFill>
-                <a:latin typeface="Calibri"/>
-              </a:rPr>
-              <a:t>, screened against prespecified criteria, and read into a structured row — model, modality, body region, age group, task, dataset size, data source, validation, availability — under one fixed schema.</a:t>
-            </a:r>
-          </a:p>
-        </p:txBody>
-      </p:sp>
-      <p:sp>
-        <p:nvSpPr>
-          <p:cNvPr id="4" name="TextBox 3"/>
-          <p:cNvSpPr txBox="1"/>
-          <p:nvPr/>
-        </p:nvSpPr>
-        <p:spPr>
-          <a:xfrm>
-            <a:off x="411480" y="1594230"/>
-            <a:ext cx="11368735" cy="1844674"/>
-          </a:xfrm>
-          <a:prstGeom prst="rect">
-            <a:avLst/>
-          </a:prstGeom>
-          <a:noFill/>
-        </p:spPr>
-        <p:txBody>
-          <a:bodyPr wrap="square" lIns="45720" rIns="45720" tIns="27432" bIns="27432" anchor="t">
-            <a:spAutoFit/>
-          </a:bodyPr>
-          <a:lstStyle/>
-          <a:p>
-            <a:pPr algn="l" marL="256032" indent="-256032">
-              <a:spcAft>
-                <a:spcPts val="384"/>
-              </a:spcAft>
-              <a:buChar char="•"/>
-            </a:pPr>
-            <a:r>
-              <a:rPr sz="1100" b="0" i="0">
-                <a:solidFill>
-                  <a:srgbClr val="1A1A1A"/>
-                </a:solidFill>
-                <a:latin typeface="Calibri"/>
-              </a:rPr>
-              <a:t>6,995 records retrieved, 393 conference proceedings set aside, 6,602 screened, 2,650 off-topic and 456 non-primary removed, 3,496 primary studies included (PubMed 3,122, Embase 365, OpenAlex 9).</a:t>
-            </a:r>
-          </a:p>
-          <a:p>
-            <a:pPr algn="l" marL="256032" indent="-256032">
-              <a:spcAft>
-                <a:spcPts val="384"/>
-              </a:spcAft>
-              <a:buChar char="•"/>
-            </a:pPr>
-            <a:r>
-              <a:rPr sz="1100" b="1" i="0">
-                <a:solidFill>
-                  <a:srgbClr val="1A1A1A"/>
-                </a:solidFill>
-                <a:latin typeface="Calibri"/>
-              </a:rPr>
-              <a:t>Embase earns its place</a:t>
-            </a:r>
-            <a:r>
-              <a:rPr sz="1100" b="0" i="0">
-                <a:solidFill>
-                  <a:srgbClr val="1A1A1A"/>
-                </a:solidFill>
-                <a:latin typeface="Calibri"/>
-              </a:rPr>
-              <a:t>: 365 of the included studies are not in PubMed at all. They have no PMID, so no NIH relative citation ratio; ranking them at all is why the impact column below is OpenAlex's field-weighted score.</a:t>
-            </a:r>
-          </a:p>
-          <a:p>
-            <a:pPr algn="l" marL="256032" indent="-256032">
-              <a:spcAft>
-                <a:spcPts val="384"/>
-              </a:spcAft>
-              <a:buChar char="•"/>
-            </a:pPr>
-            <a:r>
-              <a:rPr sz="1100" b="0" i="0">
-                <a:solidFill>
-                  <a:srgbClr val="1A1A1A"/>
-                </a:solidFill>
-                <a:latin typeface="Calibri"/>
-              </a:rPr>
-              <a:t>Conference proceedings are retrieved and reported but not screened: an abstract cannot support a judgement about study design, and it carries no DOI linking it to the later full paper.</a:t>
-            </a:r>
-          </a:p>
-          <a:p>
-            <a:pPr algn="l" marL="256032" indent="-256032">
-              <a:spcAft>
-                <a:spcPts val="384"/>
-              </a:spcAft>
-              <a:buChar char="•"/>
-            </a:pPr>
-            <a:r>
-              <a:rPr sz="1100" b="0" i="0">
-                <a:solidFill>
-                  <a:srgbClr val="1A1A1A"/>
-                </a:solidFill>
-                <a:latin typeface="Calibri"/>
-              </a:rPr>
-              <a:t>Screening and extraction were done by a constrained model under a fixed schema, with a blinded second-model re-screen of 150 records (94.7% agreement, kappa = 0.885). Dual-human validation is outstanding.</a:t>
-            </a:r>
-          </a:p>
-          <a:p>
-            <a:pPr algn="l" marL="256032" indent="-256032">
-              <a:spcAft>
-                <a:spcPts val="384"/>
-              </a:spcAft>
-              <a:buChar char="•"/>
-            </a:pPr>
-            <a:r>
-              <a:rPr sz="1100" b="0" i="0">
-                <a:solidFill>
-                  <a:srgbClr val="1A1A1A"/>
-                </a:solidFill>
-                <a:latin typeface="Calibri"/>
-              </a:rPr>
-              <a:t>The same corpus is the paper database (reports/04_paper_database.md) and the systematic review manuscript, so the three never disagree.</a:t>
-            </a:r>
-          </a:p>
-        </p:txBody>
-      </p:sp>
-      <p:sp>
-        <p:nvSpPr>
-          <p:cNvPr id="5" name="page number"/>
-          <p:cNvSpPr txBox="1"/>
-          <p:nvPr/>
-        </p:nvSpPr>
-        <p:spPr>
-          <a:xfrm>
-            <a:off x="10728655" y="6510528"/>
-            <a:ext cx="1188720" cy="274320"/>
-          </a:xfrm>
-          <a:prstGeom prst="rect">
-            <a:avLst/>
-          </a:prstGeom>
-          <a:noFill/>
-        </p:spPr>
-        <p:txBody>
-          <a:bodyPr wrap="none">
-            <a:spAutoFit/>
-          </a:bodyPr>
-          <a:lstStyle/>
-          <a:p>
-            <a:pPr algn="r"/>
-            <a:r>
-              <a:rPr sz="1000">
-                <a:solidFill>
-                  <a:srgbClr val="6B6B6B"/>
-                </a:solidFill>
-                <a:latin typeface="Calibri"/>
-              </a:rPr>
-              <a:t>10 / 61</a:t>
-            </a:r>
-          </a:p>
-        </p:txBody>
-      </p:sp>
-    </p:spTree>
-  </p:cSld>
-  <p:clrMapOvr>
-    <a:masterClrMapping/>
-  </p:clrMapOvr>
-</p:sld>
-</file>
-
-<file path=ppt/slides/slide11.xml><?xml version="1.0" encoding="utf-8"?>
 <p:sld xmlns:a="http://schemas.openxmlformats.org/drawingml/2006/main" xmlns:p="http://schemas.openxmlformats.org/presentationml/2006/main" xmlns:r="http://schemas.openxmlformats.org/officeDocument/2006/relationships">
   <p:cSld>
     <p:spTree>
@@ -3743,7 +3463,7 @@
                 </a:solidFill>
                 <a:latin typeface="Calibri"/>
               </a:rPr>
-              <a:t>11 / 61</a:t>
+              <a:t>10 / 60</a:t>
             </a:r>
           </a:p>
         </p:txBody>
@@ -3756,7 +3476,7 @@
 </p:sld>
 </file>
 
-<file path=ppt/slides/slide12.xml><?xml version="1.0" encoding="utf-8"?>
+<file path=ppt/slides/slide11.xml><?xml version="1.0" encoding="utf-8"?>
 <p:sld xmlns:a="http://schemas.openxmlformats.org/drawingml/2006/main" xmlns:p="http://schemas.openxmlformats.org/presentationml/2006/main" xmlns:r="http://schemas.openxmlformats.org/officeDocument/2006/relationships">
   <p:cSld>
     <p:spTree>
@@ -3911,7 +3631,7 @@
                 </a:solidFill>
                 <a:latin typeface="Calibri"/>
               </a:rPr>
-              <a:t>12 / 61</a:t>
+              <a:t>11 / 60</a:t>
             </a:r>
           </a:p>
         </p:txBody>
@@ -3924,7 +3644,7 @@
 </p:sld>
 </file>
 
-<file path=ppt/slides/slide13.xml><?xml version="1.0" encoding="utf-8"?>
+<file path=ppt/slides/slide12.xml><?xml version="1.0" encoding="utf-8"?>
 <p:sld xmlns:a="http://schemas.openxmlformats.org/drawingml/2006/main" xmlns:p="http://schemas.openxmlformats.org/presentationml/2006/main" xmlns:r="http://schemas.openxmlformats.org/officeDocument/2006/relationships">
   <p:cSld>
     <p:spTree>
@@ -4124,7 +3844,7 @@
                 </a:solidFill>
                 <a:latin typeface="Calibri"/>
               </a:rPr>
-              <a:t>13 / 61</a:t>
+              <a:t>12 / 60</a:t>
             </a:r>
           </a:p>
         </p:txBody>
@@ -4137,7 +3857,7 @@
 </p:sld>
 </file>
 
-<file path=ppt/slides/slide14.xml><?xml version="1.0" encoding="utf-8"?>
+<file path=ppt/slides/slide13.xml><?xml version="1.0" encoding="utf-8"?>
 <p:sld xmlns:a="http://schemas.openxmlformats.org/drawingml/2006/main" xmlns:p="http://schemas.openxmlformats.org/presentationml/2006/main" xmlns:r="http://schemas.openxmlformats.org/officeDocument/2006/relationships">
   <p:cSld>
     <p:spTree>
@@ -4253,7 +3973,7 @@
                 </a:solidFill>
                 <a:latin typeface="Calibri"/>
               </a:rPr>
-              <a:t>14 / 61</a:t>
+              <a:t>13 / 60</a:t>
             </a:r>
           </a:p>
         </p:txBody>
@@ -4266,7 +3986,7 @@
 </p:sld>
 </file>
 
-<file path=ppt/slides/slide15.xml><?xml version="1.0" encoding="utf-8"?>
+<file path=ppt/slides/slide14.xml><?xml version="1.0" encoding="utf-8"?>
 <p:sld xmlns:a="http://schemas.openxmlformats.org/drawingml/2006/main" xmlns:p="http://schemas.openxmlformats.org/presentationml/2006/main" xmlns:r="http://schemas.openxmlformats.org/officeDocument/2006/relationships">
   <p:cSld>
     <p:spTree>
@@ -4421,7 +4141,7 @@
                 </a:solidFill>
                 <a:latin typeface="Calibri"/>
               </a:rPr>
-              <a:t>15 / 61</a:t>
+              <a:t>14 / 60</a:t>
             </a:r>
           </a:p>
         </p:txBody>
@@ -4434,7 +4154,7 @@
 </p:sld>
 </file>
 
-<file path=ppt/slides/slide16.xml><?xml version="1.0" encoding="utf-8"?>
+<file path=ppt/slides/slide15.xml><?xml version="1.0" encoding="utf-8"?>
 <p:sld xmlns:a="http://schemas.openxmlformats.org/drawingml/2006/main" xmlns:p="http://schemas.openxmlformats.org/presentationml/2006/main" xmlns:r="http://schemas.openxmlformats.org/officeDocument/2006/relationships">
   <p:cSld>
     <p:spTree>
@@ -4550,7 +4270,7 @@
                 </a:solidFill>
                 <a:latin typeface="Calibri"/>
               </a:rPr>
-              <a:t>16 / 61</a:t>
+              <a:t>15 / 60</a:t>
             </a:r>
           </a:p>
         </p:txBody>
@@ -4563,7 +4283,7 @@
 </p:sld>
 </file>
 
-<file path=ppt/slides/slide17.xml><?xml version="1.0" encoding="utf-8"?>
+<file path=ppt/slides/slide16.xml><?xml version="1.0" encoding="utf-8"?>
 <p:sld xmlns:a="http://schemas.openxmlformats.org/drawingml/2006/main" xmlns:p="http://schemas.openxmlformats.org/presentationml/2006/main" xmlns:r="http://schemas.openxmlformats.org/officeDocument/2006/relationships">
   <p:cSld>
     <p:spTree>
@@ -4770,7 +4490,7 @@
                 </a:solidFill>
                 <a:latin typeface="Calibri"/>
               </a:rPr>
-              <a:t>17 / 61</a:t>
+              <a:t>16 / 60</a:t>
             </a:r>
           </a:p>
         </p:txBody>
@@ -4783,7 +4503,7 @@
 </p:sld>
 </file>
 
-<file path=ppt/slides/slide18.xml><?xml version="1.0" encoding="utf-8"?>
+<file path=ppt/slides/slide17.xml><?xml version="1.0" encoding="utf-8"?>
 <p:sld xmlns:a="http://schemas.openxmlformats.org/drawingml/2006/main" xmlns:p="http://schemas.openxmlformats.org/presentationml/2006/main" xmlns:r="http://schemas.openxmlformats.org/officeDocument/2006/relationships">
   <p:cSld>
     <p:spTree>
@@ -4938,7 +4658,7 @@
                 </a:solidFill>
                 <a:latin typeface="Calibri"/>
               </a:rPr>
-              <a:t>18 / 61</a:t>
+              <a:t>17 / 60</a:t>
             </a:r>
           </a:p>
         </p:txBody>
@@ -4951,7 +4671,7 @@
 </p:sld>
 </file>
 
-<file path=ppt/slides/slide19.xml><?xml version="1.0" encoding="utf-8"?>
+<file path=ppt/slides/slide18.xml><?xml version="1.0" encoding="utf-8"?>
 <p:sld xmlns:a="http://schemas.openxmlformats.org/drawingml/2006/main" xmlns:p="http://schemas.openxmlformats.org/presentationml/2006/main" xmlns:r="http://schemas.openxmlformats.org/officeDocument/2006/relationships">
   <p:cSld>
     <p:spTree>
@@ -6242,7 +5962,1120 @@
                 </a:solidFill>
                 <a:latin typeface="Calibri"/>
               </a:rPr>
-              <a:t>19 / 61</a:t>
+              <a:t>18 / 60</a:t>
+            </a:r>
+          </a:p>
+        </p:txBody>
+      </p:sp>
+    </p:spTree>
+  </p:cSld>
+  <p:clrMapOvr>
+    <a:masterClrMapping/>
+  </p:clrMapOvr>
+</p:sld>
+</file>
+
+<file path=ppt/slides/slide19.xml><?xml version="1.0" encoding="utf-8"?>
+<p:sld xmlns:a="http://schemas.openxmlformats.org/drawingml/2006/main" xmlns:p="http://schemas.openxmlformats.org/presentationml/2006/main" xmlns:r="http://schemas.openxmlformats.org/officeDocument/2006/relationships">
+  <p:cSld>
+    <p:spTree>
+      <p:nvGrpSpPr>
+        <p:cNvPr id="1" name=""/>
+        <p:cNvGrpSpPr/>
+        <p:nvPr/>
+      </p:nvGrpSpPr>
+      <p:grpSpPr/>
+      <p:sp>
+        <p:nvSpPr>
+          <p:cNvPr id="2" name="title band"/>
+          <p:cNvSpPr/>
+          <p:nvPr/>
+        </p:nvSpPr>
+        <p:spPr>
+          <a:xfrm>
+            <a:off x="0" y="0"/>
+            <a:ext cx="12191695" cy="713232"/>
+          </a:xfrm>
+          <a:prstGeom prst="rect">
+            <a:avLst/>
+          </a:prstGeom>
+          <a:solidFill>
+            <a:srgbClr val="3333B3"/>
+          </a:solidFill>
+          <a:ln>
+            <a:noFill/>
+          </a:ln>
+        </p:spPr>
+        <p:style>
+          <a:lnRef idx="1">
+            <a:schemeClr val="accent1"/>
+          </a:lnRef>
+          <a:fillRef idx="3">
+            <a:schemeClr val="accent1"/>
+          </a:fillRef>
+          <a:effectRef idx="2">
+            <a:schemeClr val="accent1"/>
+          </a:effectRef>
+          <a:fontRef idx="minor">
+            <a:schemeClr val="lt1"/>
+          </a:fontRef>
+        </p:style>
+        <p:txBody>
+          <a:bodyPr rtlCol="0" anchor="ctr" lIns="411480" wrap="square"/>
+          <a:lstStyle/>
+          <a:p>
+            <a:pPr algn="l"/>
+            <a:r>
+              <a:rPr sz="2200">
+                <a:solidFill>
+                  <a:srgbClr val="FFFFFF"/>
+                </a:solidFill>
+                <a:latin typeface="Calibri"/>
+              </a:rPr>
+              <a:t>Highest-impact pediatric radiology AI studies, 2023</a:t>
+            </a:r>
+          </a:p>
+        </p:txBody>
+      </p:sp>
+      <p:graphicFrame>
+        <p:nvGraphicFramePr>
+          <p:cNvPr id="3" name="Table 2"/>
+          <p:cNvGraphicFramePr>
+            <a:graphicFrameLocks noGrp="1"/>
+          </p:cNvGraphicFramePr>
+          <p:nvPr/>
+        </p:nvGraphicFramePr>
+        <p:xfrm>
+          <a:off x="411480" y="877824"/>
+          <a:ext cx="11368734" cy="3429000"/>
+        </p:xfrm>
+        <a:graphic>
+          <a:graphicData uri="http://schemas.openxmlformats.org/drawingml/2006/table">
+            <a:tbl>
+              <a:tblPr firstRow="1" bandRow="1">
+                <a:tableStyleId>{5C22544A-7EE6-4342-B048-85BDC9FD1C3A}</a:tableStyleId>
+              </a:tblPr>
+              <a:tblGrid>
+                <a:gridCol w="685800"/>
+                <a:gridCol w="685800"/>
+                <a:gridCol w="4781238"/>
+                <a:gridCol w="2028404"/>
+                <a:gridCol w="3187492"/>
+              </a:tblGrid>
+              <a:tr h="219456">
+                <a:tc>
+                  <a:txBody>
+                    <a:bodyPr wrap="square"/>
+                    <a:lstStyle/>
+                    <a:p>
+                      <a:pPr algn="r"/>
+                      <a:r>
+                        <a:rPr sz="900" b="1" i="0">
+                          <a:solidFill>
+                            <a:srgbClr val="FFFFFF"/>
+                          </a:solidFill>
+                          <a:latin typeface="Calibri"/>
+                        </a:rPr>
+                        <a:t>Impact</a:t>
+                      </a:r>
+                    </a:p>
+                  </a:txBody>
+                  <a:tcPr marL="45720" marR="45720" marT="18288" marB="18288" anchor="t"/>
+                </a:tc>
+                <a:tc>
+                  <a:txBody>
+                    <a:bodyPr wrap="square"/>
+                    <a:lstStyle/>
+                    <a:p>
+                      <a:pPr algn="r"/>
+                      <a:r>
+                        <a:rPr sz="900" b="1" i="0">
+                          <a:solidFill>
+                            <a:srgbClr val="FFFFFF"/>
+                          </a:solidFill>
+                          <a:latin typeface="Calibri"/>
+                        </a:rPr>
+                        <a:t>Cites</a:t>
+                      </a:r>
+                    </a:p>
+                  </a:txBody>
+                  <a:tcPr marL="45720" marR="45720" marT="18288" marB="18288" anchor="t"/>
+                </a:tc>
+                <a:tc>
+                  <a:txBody>
+                    <a:bodyPr wrap="square"/>
+                    <a:lstStyle/>
+                    <a:p>
+                      <a:r>
+                        <a:rPr sz="900" b="1" i="0">
+                          <a:solidFill>
+                            <a:srgbClr val="FFFFFF"/>
+                          </a:solidFill>
+                          <a:latin typeface="Calibri"/>
+                        </a:rPr>
+                        <a:t>Study</a:t>
+                      </a:r>
+                    </a:p>
+                  </a:txBody>
+                  <a:tcPr marL="45720" marR="45720" marT="18288" marB="18288" anchor="t"/>
+                </a:tc>
+                <a:tc>
+                  <a:txBody>
+                    <a:bodyPr wrap="square"/>
+                    <a:lstStyle/>
+                    <a:p>
+                      <a:r>
+                        <a:rPr sz="900" b="1" i="0">
+                          <a:solidFill>
+                            <a:srgbClr val="FFFFFF"/>
+                          </a:solidFill>
+                          <a:latin typeface="Calibri"/>
+                        </a:rPr>
+                        <a:t>Venue</a:t>
+                      </a:r>
+                    </a:p>
+                  </a:txBody>
+                  <a:tcPr marL="45720" marR="45720" marT="18288" marB="18288" anchor="t"/>
+                </a:tc>
+                <a:tc>
+                  <a:txBody>
+                    <a:bodyPr wrap="square"/>
+                    <a:lstStyle/>
+                    <a:p>
+                      <a:r>
+                        <a:rPr sz="900" b="1" i="0">
+                          <a:solidFill>
+                            <a:srgbClr val="FFFFFF"/>
+                          </a:solidFill>
+                          <a:latin typeface="Calibri"/>
+                        </a:rPr>
+                        <a:t>What it does</a:t>
+                      </a:r>
+                    </a:p>
+                  </a:txBody>
+                  <a:tcPr marL="45720" marR="45720" marT="18288" marB="18288" anchor="t"/>
+                </a:tc>
+              </a:tr>
+              <a:tr h="356616">
+                <a:tc>
+                  <a:txBody>
+                    <a:bodyPr wrap="square"/>
+                    <a:lstStyle/>
+                    <a:p>
+                      <a:pPr algn="r"/>
+                      <a:r>
+                        <a:rPr sz="900" b="0" i="0">
+                          <a:solidFill>
+                            <a:srgbClr val="1A1A1A"/>
+                          </a:solidFill>
+                          <a:latin typeface="Calibri"/>
+                        </a:rPr>
+                        <a:t>69x</a:t>
+                      </a:r>
+                    </a:p>
+                  </a:txBody>
+                  <a:tcPr marL="45720" marR="45720" marT="18288" marB="18288" anchor="t"/>
+                </a:tc>
+                <a:tc>
+                  <a:txBody>
+                    <a:bodyPr wrap="square"/>
+                    <a:lstStyle/>
+                    <a:p>
+                      <a:pPr algn="r"/>
+                      <a:r>
+                        <a:rPr sz="900" b="0" i="0">
+                          <a:solidFill>
+                            <a:srgbClr val="1A1A1A"/>
+                          </a:solidFill>
+                          <a:latin typeface="Calibri"/>
+                        </a:rPr>
+                        <a:t>106</a:t>
+                      </a:r>
+                    </a:p>
+                  </a:txBody>
+                  <a:tcPr marL="45720" marR="45720" marT="18288" marB="18288" anchor="t"/>
+                </a:tc>
+                <a:tc>
+                  <a:txBody>
+                    <a:bodyPr wrap="square"/>
+                    <a:lstStyle/>
+                    <a:p>
+                      <a:r>
+                        <a:rPr sz="900" b="0" i="0">
+                          <a:solidFill>
+                            <a:srgbClr val="1A1A1A"/>
+                          </a:solidFill>
+                          <a:latin typeface="Calibri"/>
+                        </a:rPr>
+                        <a:t>iBEAT V2.0</a:t>
+                      </a:r>
+                    </a:p>
+                  </a:txBody>
+                  <a:tcPr marL="45720" marR="45720" marT="18288" marB="18288" anchor="t"/>
+                </a:tc>
+                <a:tc>
+                  <a:txBody>
+                    <a:bodyPr wrap="square"/>
+                    <a:lstStyle/>
+                    <a:p>
+                      <a:r>
+                        <a:rPr sz="900" b="0" i="0">
+                          <a:solidFill>
+                            <a:srgbClr val="1A1A1A"/>
+                          </a:solidFill>
+                          <a:latin typeface="Calibri"/>
+                        </a:rPr>
+                        <a:t>Nature protocols</a:t>
+                      </a:r>
+                    </a:p>
+                  </a:txBody>
+                  <a:tcPr marL="45720" marR="45720" marT="18288" marB="18288" anchor="t"/>
+                </a:tc>
+                <a:tc>
+                  <a:txBody>
+                    <a:bodyPr wrap="square"/>
+                    <a:lstStyle/>
+                    <a:p>
+                      <a:r>
+                        <a:rPr sz="900" b="0" i="0">
+                          <a:solidFill>
+                            <a:srgbClr val="1A1A1A"/>
+                          </a:solidFill>
+                          <a:latin typeface="Calibri"/>
+                        </a:rPr>
+                        <a:t>measuring cortical development in infants, whose brain MRI de...</a:t>
+                      </a:r>
+                    </a:p>
+                  </a:txBody>
+                  <a:tcPr marL="45720" marR="45720" marT="18288" marB="18288" anchor="t"/>
+                </a:tc>
+              </a:tr>
+              <a:tr h="356616">
+                <a:tc>
+                  <a:txBody>
+                    <a:bodyPr wrap="square"/>
+                    <a:lstStyle/>
+                    <a:p>
+                      <a:pPr algn="r"/>
+                      <a:r>
+                        <a:rPr sz="900" b="0" i="0">
+                          <a:solidFill>
+                            <a:srgbClr val="1A1A1A"/>
+                          </a:solidFill>
+                          <a:latin typeface="Calibri"/>
+                        </a:rPr>
+                        <a:t>37x</a:t>
+                      </a:r>
+                    </a:p>
+                  </a:txBody>
+                  <a:tcPr marL="45720" marR="45720" marT="18288" marB="18288" anchor="t"/>
+                </a:tc>
+                <a:tc>
+                  <a:txBody>
+                    <a:bodyPr wrap="square"/>
+                    <a:lstStyle/>
+                    <a:p>
+                      <a:pPr algn="r"/>
+                      <a:r>
+                        <a:rPr sz="900" b="0" i="0">
+                          <a:solidFill>
+                            <a:srgbClr val="1A1A1A"/>
+                          </a:solidFill>
+                          <a:latin typeface="Calibri"/>
+                        </a:rPr>
+                        <a:t>20</a:t>
+                      </a:r>
+                    </a:p>
+                  </a:txBody>
+                  <a:tcPr marL="45720" marR="45720" marT="18288" marB="18288" anchor="t"/>
+                </a:tc>
+                <a:tc>
+                  <a:txBody>
+                    <a:bodyPr wrap="square"/>
+                    <a:lstStyle/>
+                    <a:p>
+                      <a:r>
+                        <a:rPr sz="900" b="0" i="0">
+                          <a:solidFill>
+                            <a:srgbClr val="1A1A1A"/>
+                          </a:solidFill>
+                          <a:latin typeface="Calibri"/>
+                        </a:rPr>
+                        <a:t>Bone Age Assessment Using Artificial Intelligence in Korean Pediatric P...</a:t>
+                      </a:r>
+                    </a:p>
+                  </a:txBody>
+                  <a:tcPr marL="45720" marR="45720" marT="18288" marB="18288" anchor="t"/>
+                </a:tc>
+                <a:tc>
+                  <a:txBody>
+                    <a:bodyPr wrap="square"/>
+                    <a:lstStyle/>
+                    <a:p>
+                      <a:r>
+                        <a:rPr sz="900" b="0" i="0">
+                          <a:solidFill>
+                            <a:srgbClr val="1A1A1A"/>
+                          </a:solidFill>
+                          <a:latin typeface="Calibri"/>
+                        </a:rPr>
+                        <a:t>Korean journal of radiolo...</a:t>
+                      </a:r>
+                    </a:p>
+                  </a:txBody>
+                  <a:tcPr marL="45720" marR="45720" marT="18288" marB="18288" anchor="t"/>
+                </a:tc>
+                <a:tc>
+                  <a:txBody>
+                    <a:bodyPr wrap="square"/>
+                    <a:lstStyle/>
+                    <a:p>
+                      <a:r>
+                        <a:rPr sz="900" b="0" i="0">
+                          <a:solidFill>
+                            <a:srgbClr val="1A1A1A"/>
+                          </a:solidFill>
+                          <a:latin typeface="Calibri"/>
+                        </a:rPr>
+                        <a:t>whether bone age in a given population should be predicted ag...</a:t>
+                      </a:r>
+                    </a:p>
+                  </a:txBody>
+                  <a:tcPr marL="45720" marR="45720" marT="18288" marB="18288" anchor="t"/>
+                </a:tc>
+              </a:tr>
+              <a:tr h="356616">
+                <a:tc>
+                  <a:txBody>
+                    <a:bodyPr wrap="square"/>
+                    <a:lstStyle/>
+                    <a:p>
+                      <a:pPr algn="r"/>
+                      <a:r>
+                        <a:rPr sz="900" b="0" i="0">
+                          <a:solidFill>
+                            <a:srgbClr val="1A1A1A"/>
+                          </a:solidFill>
+                          <a:latin typeface="Calibri"/>
+                        </a:rPr>
+                        <a:t>34x</a:t>
+                      </a:r>
+                    </a:p>
+                  </a:txBody>
+                  <a:tcPr marL="45720" marR="45720" marT="18288" marB="18288" anchor="t"/>
+                </a:tc>
+                <a:tc>
+                  <a:txBody>
+                    <a:bodyPr wrap="square"/>
+                    <a:lstStyle/>
+                    <a:p>
+                      <a:pPr algn="r"/>
+                      <a:r>
+                        <a:rPr sz="900" b="0" i="0">
+                          <a:solidFill>
+                            <a:srgbClr val="1A1A1A"/>
+                          </a:solidFill>
+                          <a:latin typeface="Calibri"/>
+                        </a:rPr>
+                        <a:t>9</a:t>
+                      </a:r>
+                    </a:p>
+                  </a:txBody>
+                  <a:tcPr marL="45720" marR="45720" marT="18288" marB="18288" anchor="t"/>
+                </a:tc>
+                <a:tc>
+                  <a:txBody>
+                    <a:bodyPr wrap="square"/>
+                    <a:lstStyle/>
+                    <a:p>
+                      <a:r>
+                        <a:rPr sz="900" b="0" i="0">
+                          <a:solidFill>
+                            <a:srgbClr val="1A1A1A"/>
+                          </a:solidFill>
+                          <a:latin typeface="Calibri"/>
+                        </a:rPr>
+                        <a:t>Bone age assessment based on deep neural networks with annotation-free...</a:t>
+                      </a:r>
+                    </a:p>
+                  </a:txBody>
+                  <a:tcPr marL="45720" marR="45720" marT="18288" marB="18288" anchor="t"/>
+                </a:tc>
+                <a:tc>
+                  <a:txBody>
+                    <a:bodyPr wrap="square"/>
+                    <a:lstStyle/>
+                    <a:p>
+                      <a:r>
+                        <a:rPr sz="900" b="0" i="0">
+                          <a:solidFill>
+                            <a:srgbClr val="1A1A1A"/>
+                          </a:solidFill>
+                          <a:latin typeface="Calibri"/>
+                        </a:rPr>
+                        <a:t>Frontiers in artificial i...</a:t>
+                      </a:r>
+                    </a:p>
+                  </a:txBody>
+                  <a:tcPr marL="45720" marR="45720" marT="18288" marB="18288" anchor="t"/>
+                </a:tc>
+                <a:tc>
+                  <a:txBody>
+                    <a:bodyPr wrap="square"/>
+                    <a:lstStyle/>
+                    <a:p>
+                      <a:r>
+                        <a:rPr sz="900" b="0" i="0">
+                          <a:solidFill>
+                            <a:srgbClr val="1A1A1A"/>
+                          </a:solidFill>
+                          <a:latin typeface="Calibri"/>
+                        </a:rPr>
+                        <a:t>automated bone age assessment from hand radiographs without m...</a:t>
+                      </a:r>
+                    </a:p>
+                  </a:txBody>
+                  <a:tcPr marL="45720" marR="45720" marT="18288" marB="18288" anchor="t"/>
+                </a:tc>
+              </a:tr>
+              <a:tr h="356616">
+                <a:tc>
+                  <a:txBody>
+                    <a:bodyPr wrap="square"/>
+                    <a:lstStyle/>
+                    <a:p>
+                      <a:pPr algn="r"/>
+                      <a:r>
+                        <a:rPr sz="900" b="0" i="0">
+                          <a:solidFill>
+                            <a:srgbClr val="1A1A1A"/>
+                          </a:solidFill>
+                          <a:latin typeface="Calibri"/>
+                        </a:rPr>
+                        <a:t>30x</a:t>
+                      </a:r>
+                    </a:p>
+                  </a:txBody>
+                  <a:tcPr marL="45720" marR="45720" marT="18288" marB="18288" anchor="t"/>
+                </a:tc>
+                <a:tc>
+                  <a:txBody>
+                    <a:bodyPr wrap="square"/>
+                    <a:lstStyle/>
+                    <a:p>
+                      <a:pPr algn="r"/>
+                      <a:r>
+                        <a:rPr sz="900" b="0" i="0">
+                          <a:solidFill>
+                            <a:srgbClr val="1A1A1A"/>
+                          </a:solidFill>
+                          <a:latin typeface="Calibri"/>
+                        </a:rPr>
+                        <a:t>39</a:t>
+                      </a:r>
+                    </a:p>
+                  </a:txBody>
+                  <a:tcPr marL="45720" marR="45720" marT="18288" marB="18288" anchor="t"/>
+                </a:tc>
+                <a:tc>
+                  <a:txBody>
+                    <a:bodyPr wrap="square"/>
+                    <a:lstStyle/>
+                    <a:p>
+                      <a:r>
+                        <a:rPr sz="900" b="0" i="0">
+                          <a:solidFill>
+                            <a:srgbClr val="1A1A1A"/>
+                          </a:solidFill>
+                          <a:latin typeface="Calibri"/>
+                        </a:rPr>
+                        <a:t>FeTA</a:t>
+                      </a:r>
+                    </a:p>
+                  </a:txBody>
+                  <a:tcPr marL="45720" marR="45720" marT="18288" marB="18288" anchor="t"/>
+                </a:tc>
+                <a:tc>
+                  <a:txBody>
+                    <a:bodyPr wrap="square"/>
+                    <a:lstStyle/>
+                    <a:p>
+                      <a:r>
+                        <a:rPr sz="900" b="0" i="0">
+                          <a:solidFill>
+                            <a:srgbClr val="1A1A1A"/>
+                          </a:solidFill>
+                          <a:latin typeface="Calibri"/>
+                        </a:rPr>
+                        <a:t>Medical image analysis</a:t>
+                      </a:r>
+                    </a:p>
+                  </a:txBody>
+                  <a:tcPr marL="45720" marR="45720" marT="18288" marB="18288" anchor="t"/>
+                </a:tc>
+                <a:tc>
+                  <a:txBody>
+                    <a:bodyPr wrap="square"/>
+                    <a:lstStyle/>
+                    <a:p>
+                      <a:r>
+                        <a:rPr sz="900" b="0" i="0">
+                          <a:solidFill>
+                            <a:srgbClr val="1A1A1A"/>
+                          </a:solidFill>
+                          <a:latin typeface="Calibri"/>
+                        </a:rPr>
+                        <a:t>segmenting the developing fetal brain into tissues, the step...</a:t>
+                      </a:r>
+                    </a:p>
+                  </a:txBody>
+                  <a:tcPr marL="45720" marR="45720" marT="18288" marB="18288" anchor="t"/>
+                </a:tc>
+              </a:tr>
+              <a:tr h="356616">
+                <a:tc>
+                  <a:txBody>
+                    <a:bodyPr wrap="square"/>
+                    <a:lstStyle/>
+                    <a:p>
+                      <a:pPr algn="r"/>
+                      <a:r>
+                        <a:rPr sz="900" b="0" i="0">
+                          <a:solidFill>
+                            <a:srgbClr val="1A1A1A"/>
+                          </a:solidFill>
+                          <a:latin typeface="Calibri"/>
+                        </a:rPr>
+                        <a:t>28x</a:t>
+                      </a:r>
+                    </a:p>
+                  </a:txBody>
+                  <a:tcPr marL="45720" marR="45720" marT="18288" marB="18288" anchor="t"/>
+                </a:tc>
+                <a:tc>
+                  <a:txBody>
+                    <a:bodyPr wrap="square"/>
+                    <a:lstStyle/>
+                    <a:p>
+                      <a:pPr algn="r"/>
+                      <a:r>
+                        <a:rPr sz="900" b="0" i="0">
+                          <a:solidFill>
+                            <a:srgbClr val="1A1A1A"/>
+                          </a:solidFill>
+                          <a:latin typeface="Calibri"/>
+                        </a:rPr>
+                        <a:t>20</a:t>
+                      </a:r>
+                    </a:p>
+                  </a:txBody>
+                  <a:tcPr marL="45720" marR="45720" marT="18288" marB="18288" anchor="t"/>
+                </a:tc>
+                <a:tc>
+                  <a:txBody>
+                    <a:bodyPr wrap="square"/>
+                    <a:lstStyle/>
+                    <a:p>
+                      <a:r>
+                        <a:rPr sz="900" b="0" i="0">
+                          <a:solidFill>
+                            <a:srgbClr val="1A1A1A"/>
+                          </a:solidFill>
+                          <a:latin typeface="Calibri"/>
+                        </a:rPr>
+                        <a:t>Deep focus approach for accurate bone age estimation from lateral cepha...</a:t>
+                      </a:r>
+                    </a:p>
+                  </a:txBody>
+                  <a:tcPr marL="45720" marR="45720" marT="18288" marB="18288" anchor="t"/>
+                </a:tc>
+                <a:tc>
+                  <a:txBody>
+                    <a:bodyPr wrap="square"/>
+                    <a:lstStyle/>
+                    <a:p>
+                      <a:r>
+                        <a:rPr sz="900" b="0" i="0">
+                          <a:solidFill>
+                            <a:srgbClr val="1A1A1A"/>
+                          </a:solidFill>
+                          <a:latin typeface="Calibri"/>
+                        </a:rPr>
+                        <a:t>Journal of dental sciences</a:t>
+                      </a:r>
+                    </a:p>
+                  </a:txBody>
+                  <a:tcPr marL="45720" marR="45720" marT="18288" marB="18288" anchor="t"/>
+                </a:tc>
+                <a:tc>
+                  <a:txBody>
+                    <a:bodyPr wrap="square"/>
+                    <a:lstStyle/>
+                    <a:p>
+                      <a:r>
+                        <a:rPr sz="900" b="0" i="0">
+                          <a:solidFill>
+                            <a:srgbClr val="1A1A1A"/>
+                          </a:solidFill>
+                          <a:latin typeface="Calibri"/>
+                        </a:rPr>
+                        <a:t>estimating skeletal maturity from the lateral cephalogram a g...</a:t>
+                      </a:r>
+                    </a:p>
+                  </a:txBody>
+                  <a:tcPr marL="45720" marR="45720" marT="18288" marB="18288" anchor="t"/>
+                </a:tc>
+              </a:tr>
+              <a:tr h="356616">
+                <a:tc>
+                  <a:txBody>
+                    <a:bodyPr wrap="square"/>
+                    <a:lstStyle/>
+                    <a:p>
+                      <a:pPr algn="r"/>
+                      <a:r>
+                        <a:rPr sz="900" b="0" i="0">
+                          <a:solidFill>
+                            <a:srgbClr val="1A1A1A"/>
+                          </a:solidFill>
+                          <a:latin typeface="Calibri"/>
+                        </a:rPr>
+                        <a:t>27x</a:t>
+                      </a:r>
+                    </a:p>
+                  </a:txBody>
+                  <a:tcPr marL="45720" marR="45720" marT="18288" marB="18288" anchor="t"/>
+                </a:tc>
+                <a:tc>
+                  <a:txBody>
+                    <a:bodyPr wrap="square"/>
+                    <a:lstStyle/>
+                    <a:p>
+                      <a:pPr algn="r"/>
+                      <a:r>
+                        <a:rPr sz="900" b="0" i="0">
+                          <a:solidFill>
+                            <a:srgbClr val="1A1A1A"/>
+                          </a:solidFill>
+                          <a:latin typeface="Calibri"/>
+                        </a:rPr>
+                        <a:t>11</a:t>
+                      </a:r>
+                    </a:p>
+                  </a:txBody>
+                  <a:tcPr marL="45720" marR="45720" marT="18288" marB="18288" anchor="t"/>
+                </a:tc>
+                <a:tc>
+                  <a:txBody>
+                    <a:bodyPr wrap="square"/>
+                    <a:lstStyle/>
+                    <a:p>
+                      <a:r>
+                        <a:rPr sz="900" b="0" i="0">
+                          <a:solidFill>
+                            <a:srgbClr val="1A1A1A"/>
+                          </a:solidFill>
+                          <a:latin typeface="Calibri"/>
+                        </a:rPr>
+                        <a:t>Bone Age Estimation and Prediction of Final Adult Height Using Deep Lea...</a:t>
+                      </a:r>
+                    </a:p>
+                  </a:txBody>
+                  <a:tcPr marL="45720" marR="45720" marT="18288" marB="18288" anchor="t"/>
+                </a:tc>
+                <a:tc>
+                  <a:txBody>
+                    <a:bodyPr wrap="square"/>
+                    <a:lstStyle/>
+                    <a:p>
+                      <a:r>
+                        <a:rPr sz="900" b="0" i="0">
+                          <a:solidFill>
+                            <a:srgbClr val="1A1A1A"/>
+                          </a:solidFill>
+                          <a:latin typeface="Calibri"/>
+                        </a:rPr>
+                        <a:t>Yonsei medical journal</a:t>
+                      </a:r>
+                    </a:p>
+                  </a:txBody>
+                  <a:tcPr marL="45720" marR="45720" marT="18288" marB="18288" anchor="t"/>
+                </a:tc>
+                <a:tc>
+                  <a:txBody>
+                    <a:bodyPr wrap="square"/>
+                    <a:lstStyle/>
+                    <a:p>
+                      <a:r>
+                        <a:rPr sz="900" b="0" i="0">
+                          <a:solidFill>
+                            <a:srgbClr val="1A1A1A"/>
+                          </a:solidFill>
+                          <a:latin typeface="Calibri"/>
+                        </a:rPr>
+                        <a:t>automatically estimating bone age and predicting final adult...</a:t>
+                      </a:r>
+                    </a:p>
+                  </a:txBody>
+                  <a:tcPr marL="45720" marR="45720" marT="18288" marB="18288" anchor="t"/>
+                </a:tc>
+              </a:tr>
+              <a:tr h="356616">
+                <a:tc>
+                  <a:txBody>
+                    <a:bodyPr wrap="square"/>
+                    <a:lstStyle/>
+                    <a:p>
+                      <a:pPr algn="r"/>
+                      <a:r>
+                        <a:rPr sz="900" b="0" i="0">
+                          <a:solidFill>
+                            <a:srgbClr val="1A1A1A"/>
+                          </a:solidFill>
+                          <a:latin typeface="Calibri"/>
+                        </a:rPr>
+                        <a:t>26x</a:t>
+                      </a:r>
+                    </a:p>
+                  </a:txBody>
+                  <a:tcPr marL="45720" marR="45720" marT="18288" marB="18288" anchor="t"/>
+                </a:tc>
+                <a:tc>
+                  <a:txBody>
+                    <a:bodyPr wrap="square"/>
+                    <a:lstStyle/>
+                    <a:p>
+                      <a:pPr algn="r"/>
+                      <a:r>
+                        <a:rPr sz="900" b="0" i="0">
+                          <a:solidFill>
+                            <a:srgbClr val="1A1A1A"/>
+                          </a:solidFill>
+                          <a:latin typeface="Calibri"/>
+                        </a:rPr>
+                        <a:t>21</a:t>
+                      </a:r>
+                    </a:p>
+                  </a:txBody>
+                  <a:tcPr marL="45720" marR="45720" marT="18288" marB="18288" anchor="t"/>
+                </a:tc>
+                <a:tc>
+                  <a:txBody>
+                    <a:bodyPr wrap="square"/>
+                    <a:lstStyle/>
+                    <a:p>
+                      <a:r>
+                        <a:rPr sz="900" b="0" i="0">
+                          <a:solidFill>
+                            <a:srgbClr val="1A1A1A"/>
+                          </a:solidFill>
+                          <a:latin typeface="Calibri"/>
+                        </a:rPr>
+                        <a:t>Detection of ASD Children through Deep-Learning Application of fMRI.</a:t>
+                      </a:r>
+                    </a:p>
+                  </a:txBody>
+                  <a:tcPr marL="45720" marR="45720" marT="18288" marB="18288" anchor="t"/>
+                </a:tc>
+                <a:tc>
+                  <a:txBody>
+                    <a:bodyPr wrap="square"/>
+                    <a:lstStyle/>
+                    <a:p>
+                      <a:r>
+                        <a:rPr sz="900" b="0" i="0">
+                          <a:solidFill>
+                            <a:srgbClr val="1A1A1A"/>
+                          </a:solidFill>
+                          <a:latin typeface="Calibri"/>
+                        </a:rPr>
+                        <a:t>Children (Basel, Switzerl...</a:t>
+                      </a:r>
+                    </a:p>
+                  </a:txBody>
+                  <a:tcPr marL="45720" marR="45720" marT="18288" marB="18288" anchor="t"/>
+                </a:tc>
+                <a:tc>
+                  <a:txBody>
+                    <a:bodyPr wrap="square"/>
+                    <a:lstStyle/>
+                    <a:p>
+                      <a:r>
+                        <a:rPr sz="900" b="0" i="0">
+                          <a:solidFill>
+                            <a:srgbClr val="1A1A1A"/>
+                          </a:solidFill>
+                          <a:latin typeface="Calibri"/>
+                        </a:rPr>
+                        <a:t>early detection of autism spectrum disorder in children, wher...</a:t>
+                      </a:r>
+                    </a:p>
+                  </a:txBody>
+                  <a:tcPr marL="45720" marR="45720" marT="18288" marB="18288" anchor="t"/>
+                </a:tc>
+              </a:tr>
+              <a:tr h="356616">
+                <a:tc>
+                  <a:txBody>
+                    <a:bodyPr wrap="square"/>
+                    <a:lstStyle/>
+                    <a:p>
+                      <a:pPr algn="r"/>
+                      <a:r>
+                        <a:rPr sz="900" b="0" i="0">
+                          <a:solidFill>
+                            <a:srgbClr val="1A1A1A"/>
+                          </a:solidFill>
+                          <a:latin typeface="Calibri"/>
+                        </a:rPr>
+                        <a:t>26x</a:t>
+                      </a:r>
+                    </a:p>
+                  </a:txBody>
+                  <a:tcPr marL="45720" marR="45720" marT="18288" marB="18288" anchor="t"/>
+                </a:tc>
+                <a:tc>
+                  <a:txBody>
+                    <a:bodyPr wrap="square"/>
+                    <a:lstStyle/>
+                    <a:p>
+                      <a:pPr algn="r"/>
+                      <a:r>
+                        <a:rPr sz="900" b="0" i="0">
+                          <a:solidFill>
+                            <a:srgbClr val="1A1A1A"/>
+                          </a:solidFill>
+                          <a:latin typeface="Calibri"/>
+                        </a:rPr>
+                        <a:t>14</a:t>
+                      </a:r>
+                    </a:p>
+                  </a:txBody>
+                  <a:tcPr marL="45720" marR="45720" marT="18288" marB="18288" anchor="t"/>
+                </a:tc>
+                <a:tc>
+                  <a:txBody>
+                    <a:bodyPr wrap="square"/>
+                    <a:lstStyle/>
+                    <a:p>
+                      <a:r>
+                        <a:rPr sz="900" b="0" i="0">
+                          <a:solidFill>
+                            <a:srgbClr val="1A1A1A"/>
+                          </a:solidFill>
+                          <a:latin typeface="Calibri"/>
+                        </a:rPr>
+                        <a:t>High performance for bone age estimation with an artificial intelligenc...</a:t>
+                      </a:r>
+                    </a:p>
+                  </a:txBody>
+                  <a:tcPr marL="45720" marR="45720" marT="18288" marB="18288" anchor="t"/>
+                </a:tc>
+                <a:tc>
+                  <a:txBody>
+                    <a:bodyPr wrap="square"/>
+                    <a:lstStyle/>
+                    <a:p>
+                      <a:r>
+                        <a:rPr sz="900" b="0" i="0">
+                          <a:solidFill>
+                            <a:srgbClr val="1A1A1A"/>
+                          </a:solidFill>
+                          <a:latin typeface="Calibri"/>
+                        </a:rPr>
+                        <a:t>Diagnostic and interventi...</a:t>
+                      </a:r>
+                    </a:p>
+                  </a:txBody>
+                  <a:tcPr marL="45720" marR="45720" marT="18288" marB="18288" anchor="t"/>
+                </a:tc>
+                <a:tc>
+                  <a:txBody>
+                    <a:bodyPr wrap="square"/>
+                    <a:lstStyle/>
+                    <a:p>
+                      <a:r>
+                        <a:rPr sz="900" b="0" i="0">
+                          <a:solidFill>
+                            <a:srgbClr val="1A1A1A"/>
+                          </a:solidFill>
+                          <a:latin typeface="Calibri"/>
+                        </a:rPr>
+                        <a:t>How does an AI solution for bone age assessment compare in ac...</a:t>
+                      </a:r>
+                    </a:p>
+                  </a:txBody>
+                  <a:tcPr marL="45720" marR="45720" marT="18288" marB="18288" anchor="t"/>
+                </a:tc>
+              </a:tr>
+              <a:tr h="356616">
+                <a:tc>
+                  <a:txBody>
+                    <a:bodyPr wrap="square"/>
+                    <a:lstStyle/>
+                    <a:p>
+                      <a:pPr algn="r"/>
+                      <a:r>
+                        <a:rPr sz="900" b="0" i="0">
+                          <a:solidFill>
+                            <a:srgbClr val="1A1A1A"/>
+                          </a:solidFill>
+                          <a:latin typeface="Calibri"/>
+                        </a:rPr>
+                        <a:t>25x</a:t>
+                      </a:r>
+                    </a:p>
+                  </a:txBody>
+                  <a:tcPr marL="45720" marR="45720" marT="18288" marB="18288" anchor="t"/>
+                </a:tc>
+                <a:tc>
+                  <a:txBody>
+                    <a:bodyPr wrap="square"/>
+                    <a:lstStyle/>
+                    <a:p>
+                      <a:pPr algn="r"/>
+                      <a:r>
+                        <a:rPr sz="900" b="0" i="0">
+                          <a:solidFill>
+                            <a:srgbClr val="1A1A1A"/>
+                          </a:solidFill>
+                          <a:latin typeface="Calibri"/>
+                        </a:rPr>
+                        <a:t>49</a:t>
+                      </a:r>
+                    </a:p>
+                  </a:txBody>
+                  <a:tcPr marL="45720" marR="45720" marT="18288" marB="18288" anchor="t"/>
+                </a:tc>
+                <a:tc>
+                  <a:txBody>
+                    <a:bodyPr wrap="square"/>
+                    <a:lstStyle/>
+                    <a:p>
+                      <a:r>
+                        <a:rPr sz="900" b="0" i="0">
+                          <a:solidFill>
+                            <a:srgbClr val="1A1A1A"/>
+                          </a:solidFill>
+                          <a:latin typeface="Calibri"/>
+                        </a:rPr>
+                        <a:t>Automated classification of common maternal fetal ultrasound planes usi... dagger</a:t>
+                      </a:r>
+                    </a:p>
+                  </a:txBody>
+                  <a:tcPr marL="45720" marR="45720" marT="18288" marB="18288" anchor="t"/>
+                </a:tc>
+                <a:tc>
+                  <a:txBody>
+                    <a:bodyPr wrap="square"/>
+                    <a:lstStyle/>
+                    <a:p>
+                      <a:r>
+                        <a:rPr sz="900" b="0" i="0">
+                          <a:solidFill>
+                            <a:srgbClr val="1A1A1A"/>
+                          </a:solidFill>
+                          <a:latin typeface="Calibri"/>
+                        </a:rPr>
+                        <a:t>Biomedical Signal Process...</a:t>
+                      </a:r>
+                    </a:p>
+                  </a:txBody>
+                  <a:tcPr marL="45720" marR="45720" marT="18288" marB="18288" anchor="t"/>
+                </a:tc>
+                <a:tc>
+                  <a:txBody>
+                    <a:bodyPr wrap="square"/>
+                    <a:lstStyle/>
+                    <a:p>
+                      <a:r>
+                        <a:rPr sz="900" b="0" i="0">
+                          <a:solidFill>
+                            <a:srgbClr val="1A1A1A"/>
+                          </a:solidFill>
+                          <a:latin typeface="Calibri"/>
+                        </a:rPr>
+                        <a:t>automated identification of standard fetal ultrasound planes...</a:t>
+                      </a:r>
+                    </a:p>
+                  </a:txBody>
+                  <a:tcPr marL="45720" marR="45720" marT="18288" marB="18288" anchor="t"/>
+                </a:tc>
+              </a:tr>
+            </a:tbl>
+          </a:graphicData>
+        </a:graphic>
+      </p:graphicFrame>
+      <p:sp>
+        <p:nvSpPr>
+          <p:cNvPr id="4" name="TextBox 3"/>
+          <p:cNvSpPr txBox="1"/>
+          <p:nvPr/>
+        </p:nvSpPr>
+        <p:spPr>
+          <a:xfrm>
+            <a:off x="411480" y="4379976"/>
+            <a:ext cx="11368735" cy="405765"/>
+          </a:xfrm>
+          <a:prstGeom prst="rect">
+            <a:avLst/>
+          </a:prstGeom>
+          <a:noFill/>
+        </p:spPr>
+        <p:txBody>
+          <a:bodyPr wrap="square" lIns="45720" rIns="45720" tIns="27432" bIns="27432" anchor="t">
+            <a:spAutoFit/>
+          </a:bodyPr>
+          <a:lstStyle/>
+          <a:p>
+            <a:pPr algn="l">
+              <a:spcAft>
+                <a:spcPts val="315"/>
+              </a:spcAft>
+            </a:pPr>
+            <a:r>
+              <a:rPr sz="900" b="0" i="0">
+                <a:solidFill>
+                  <a:srgbClr val="1A1A1A"/>
+                </a:solidFill>
+                <a:latin typeface="Calibri"/>
+              </a:rPr>
+              <a:t>410 studies included from 2023; 289 have enough citations to be ranked. Impact = citations relative to the average paper of the same field and year (OpenAlex FWCI; iCite RCR where OpenAlex has none), shown once a study has 5 citations. dagger Embase-only; ast preprint.</a:t>
+            </a:r>
+          </a:p>
+        </p:txBody>
+      </p:sp>
+      <p:sp>
+        <p:nvSpPr>
+          <p:cNvPr id="5" name="page number"/>
+          <p:cNvSpPr txBox="1"/>
+          <p:nvPr/>
+        </p:nvSpPr>
+        <p:spPr>
+          <a:xfrm>
+            <a:off x="10728655" y="6510528"/>
+            <a:ext cx="1188720" cy="274320"/>
+          </a:xfrm>
+          <a:prstGeom prst="rect">
+            <a:avLst/>
+          </a:prstGeom>
+          <a:noFill/>
+        </p:spPr>
+        <p:txBody>
+          <a:bodyPr wrap="none">
+            <a:spAutoFit/>
+          </a:bodyPr>
+          <a:lstStyle/>
+          <a:p>
+            <a:pPr algn="r"/>
+            <a:r>
+              <a:rPr sz="1000">
+                <a:solidFill>
+                  <a:srgbClr val="6B6B6B"/>
+                </a:solidFill>
+                <a:latin typeface="Calibri"/>
+              </a:rPr>
+              <a:t>19 / 60</a:t>
             </a:r>
           </a:p>
         </p:txBody>
@@ -6404,7 +7237,7 @@
                 </a:solidFill>
                 <a:latin typeface="Calibri"/>
               </a:rPr>
-              <a:t>2 / 61</a:t>
+              <a:t>2 / 60</a:t>
             </a:r>
           </a:p>
         </p:txBody>
@@ -6418,1119 +7251,6 @@
 </file>
 
 <file path=ppt/slides/slide20.xml><?xml version="1.0" encoding="utf-8"?>
-<p:sld xmlns:a="http://schemas.openxmlformats.org/drawingml/2006/main" xmlns:p="http://schemas.openxmlformats.org/presentationml/2006/main" xmlns:r="http://schemas.openxmlformats.org/officeDocument/2006/relationships">
-  <p:cSld>
-    <p:spTree>
-      <p:nvGrpSpPr>
-        <p:cNvPr id="1" name=""/>
-        <p:cNvGrpSpPr/>
-        <p:nvPr/>
-      </p:nvGrpSpPr>
-      <p:grpSpPr/>
-      <p:sp>
-        <p:nvSpPr>
-          <p:cNvPr id="2" name="title band"/>
-          <p:cNvSpPr/>
-          <p:nvPr/>
-        </p:nvSpPr>
-        <p:spPr>
-          <a:xfrm>
-            <a:off x="0" y="0"/>
-            <a:ext cx="12191695" cy="713232"/>
-          </a:xfrm>
-          <a:prstGeom prst="rect">
-            <a:avLst/>
-          </a:prstGeom>
-          <a:solidFill>
-            <a:srgbClr val="3333B3"/>
-          </a:solidFill>
-          <a:ln>
-            <a:noFill/>
-          </a:ln>
-        </p:spPr>
-        <p:style>
-          <a:lnRef idx="1">
-            <a:schemeClr val="accent1"/>
-          </a:lnRef>
-          <a:fillRef idx="3">
-            <a:schemeClr val="accent1"/>
-          </a:fillRef>
-          <a:effectRef idx="2">
-            <a:schemeClr val="accent1"/>
-          </a:effectRef>
-          <a:fontRef idx="minor">
-            <a:schemeClr val="lt1"/>
-          </a:fontRef>
-        </p:style>
-        <p:txBody>
-          <a:bodyPr rtlCol="0" anchor="ctr" lIns="411480" wrap="square"/>
-          <a:lstStyle/>
-          <a:p>
-            <a:pPr algn="l"/>
-            <a:r>
-              <a:rPr sz="2200">
-                <a:solidFill>
-                  <a:srgbClr val="FFFFFF"/>
-                </a:solidFill>
-                <a:latin typeface="Calibri"/>
-              </a:rPr>
-              <a:t>Highest-impact pediatric radiology AI studies, 2023</a:t>
-            </a:r>
-          </a:p>
-        </p:txBody>
-      </p:sp>
-      <p:graphicFrame>
-        <p:nvGraphicFramePr>
-          <p:cNvPr id="3" name="Table 2"/>
-          <p:cNvGraphicFramePr>
-            <a:graphicFrameLocks noGrp="1"/>
-          </p:cNvGraphicFramePr>
-          <p:nvPr/>
-        </p:nvGraphicFramePr>
-        <p:xfrm>
-          <a:off x="411480" y="877824"/>
-          <a:ext cx="11368734" cy="3429000"/>
-        </p:xfrm>
-        <a:graphic>
-          <a:graphicData uri="http://schemas.openxmlformats.org/drawingml/2006/table">
-            <a:tbl>
-              <a:tblPr firstRow="1" bandRow="1">
-                <a:tableStyleId>{5C22544A-7EE6-4342-B048-85BDC9FD1C3A}</a:tableStyleId>
-              </a:tblPr>
-              <a:tblGrid>
-                <a:gridCol w="685800"/>
-                <a:gridCol w="685800"/>
-                <a:gridCol w="4781238"/>
-                <a:gridCol w="2028404"/>
-                <a:gridCol w="3187492"/>
-              </a:tblGrid>
-              <a:tr h="219456">
-                <a:tc>
-                  <a:txBody>
-                    <a:bodyPr wrap="square"/>
-                    <a:lstStyle/>
-                    <a:p>
-                      <a:pPr algn="r"/>
-                      <a:r>
-                        <a:rPr sz="900" b="1" i="0">
-                          <a:solidFill>
-                            <a:srgbClr val="FFFFFF"/>
-                          </a:solidFill>
-                          <a:latin typeface="Calibri"/>
-                        </a:rPr>
-                        <a:t>Impact</a:t>
-                      </a:r>
-                    </a:p>
-                  </a:txBody>
-                  <a:tcPr marL="45720" marR="45720" marT="18288" marB="18288" anchor="t"/>
-                </a:tc>
-                <a:tc>
-                  <a:txBody>
-                    <a:bodyPr wrap="square"/>
-                    <a:lstStyle/>
-                    <a:p>
-                      <a:pPr algn="r"/>
-                      <a:r>
-                        <a:rPr sz="900" b="1" i="0">
-                          <a:solidFill>
-                            <a:srgbClr val="FFFFFF"/>
-                          </a:solidFill>
-                          <a:latin typeface="Calibri"/>
-                        </a:rPr>
-                        <a:t>Cites</a:t>
-                      </a:r>
-                    </a:p>
-                  </a:txBody>
-                  <a:tcPr marL="45720" marR="45720" marT="18288" marB="18288" anchor="t"/>
-                </a:tc>
-                <a:tc>
-                  <a:txBody>
-                    <a:bodyPr wrap="square"/>
-                    <a:lstStyle/>
-                    <a:p>
-                      <a:r>
-                        <a:rPr sz="900" b="1" i="0">
-                          <a:solidFill>
-                            <a:srgbClr val="FFFFFF"/>
-                          </a:solidFill>
-                          <a:latin typeface="Calibri"/>
-                        </a:rPr>
-                        <a:t>Study</a:t>
-                      </a:r>
-                    </a:p>
-                  </a:txBody>
-                  <a:tcPr marL="45720" marR="45720" marT="18288" marB="18288" anchor="t"/>
-                </a:tc>
-                <a:tc>
-                  <a:txBody>
-                    <a:bodyPr wrap="square"/>
-                    <a:lstStyle/>
-                    <a:p>
-                      <a:r>
-                        <a:rPr sz="900" b="1" i="0">
-                          <a:solidFill>
-                            <a:srgbClr val="FFFFFF"/>
-                          </a:solidFill>
-                          <a:latin typeface="Calibri"/>
-                        </a:rPr>
-                        <a:t>Venue</a:t>
-                      </a:r>
-                    </a:p>
-                  </a:txBody>
-                  <a:tcPr marL="45720" marR="45720" marT="18288" marB="18288" anchor="t"/>
-                </a:tc>
-                <a:tc>
-                  <a:txBody>
-                    <a:bodyPr wrap="square"/>
-                    <a:lstStyle/>
-                    <a:p>
-                      <a:r>
-                        <a:rPr sz="900" b="1" i="0">
-                          <a:solidFill>
-                            <a:srgbClr val="FFFFFF"/>
-                          </a:solidFill>
-                          <a:latin typeface="Calibri"/>
-                        </a:rPr>
-                        <a:t>What it does</a:t>
-                      </a:r>
-                    </a:p>
-                  </a:txBody>
-                  <a:tcPr marL="45720" marR="45720" marT="18288" marB="18288" anchor="t"/>
-                </a:tc>
-              </a:tr>
-              <a:tr h="356616">
-                <a:tc>
-                  <a:txBody>
-                    <a:bodyPr wrap="square"/>
-                    <a:lstStyle/>
-                    <a:p>
-                      <a:pPr algn="r"/>
-                      <a:r>
-                        <a:rPr sz="900" b="0" i="0">
-                          <a:solidFill>
-                            <a:srgbClr val="1A1A1A"/>
-                          </a:solidFill>
-                          <a:latin typeface="Calibri"/>
-                        </a:rPr>
-                        <a:t>69x</a:t>
-                      </a:r>
-                    </a:p>
-                  </a:txBody>
-                  <a:tcPr marL="45720" marR="45720" marT="18288" marB="18288" anchor="t"/>
-                </a:tc>
-                <a:tc>
-                  <a:txBody>
-                    <a:bodyPr wrap="square"/>
-                    <a:lstStyle/>
-                    <a:p>
-                      <a:pPr algn="r"/>
-                      <a:r>
-                        <a:rPr sz="900" b="0" i="0">
-                          <a:solidFill>
-                            <a:srgbClr val="1A1A1A"/>
-                          </a:solidFill>
-                          <a:latin typeface="Calibri"/>
-                        </a:rPr>
-                        <a:t>106</a:t>
-                      </a:r>
-                    </a:p>
-                  </a:txBody>
-                  <a:tcPr marL="45720" marR="45720" marT="18288" marB="18288" anchor="t"/>
-                </a:tc>
-                <a:tc>
-                  <a:txBody>
-                    <a:bodyPr wrap="square"/>
-                    <a:lstStyle/>
-                    <a:p>
-                      <a:r>
-                        <a:rPr sz="900" b="0" i="0">
-                          <a:solidFill>
-                            <a:srgbClr val="1A1A1A"/>
-                          </a:solidFill>
-                          <a:latin typeface="Calibri"/>
-                        </a:rPr>
-                        <a:t>iBEAT V2.0</a:t>
-                      </a:r>
-                    </a:p>
-                  </a:txBody>
-                  <a:tcPr marL="45720" marR="45720" marT="18288" marB="18288" anchor="t"/>
-                </a:tc>
-                <a:tc>
-                  <a:txBody>
-                    <a:bodyPr wrap="square"/>
-                    <a:lstStyle/>
-                    <a:p>
-                      <a:r>
-                        <a:rPr sz="900" b="0" i="0">
-                          <a:solidFill>
-                            <a:srgbClr val="1A1A1A"/>
-                          </a:solidFill>
-                          <a:latin typeface="Calibri"/>
-                        </a:rPr>
-                        <a:t>Nature protocols</a:t>
-                      </a:r>
-                    </a:p>
-                  </a:txBody>
-                  <a:tcPr marL="45720" marR="45720" marT="18288" marB="18288" anchor="t"/>
-                </a:tc>
-                <a:tc>
-                  <a:txBody>
-                    <a:bodyPr wrap="square"/>
-                    <a:lstStyle/>
-                    <a:p>
-                      <a:r>
-                        <a:rPr sz="900" b="0" i="0">
-                          <a:solidFill>
-                            <a:srgbClr val="1A1A1A"/>
-                          </a:solidFill>
-                          <a:latin typeface="Calibri"/>
-                        </a:rPr>
-                        <a:t>measuring cortical development in infants, whose brain MRI de...</a:t>
-                      </a:r>
-                    </a:p>
-                  </a:txBody>
-                  <a:tcPr marL="45720" marR="45720" marT="18288" marB="18288" anchor="t"/>
-                </a:tc>
-              </a:tr>
-              <a:tr h="356616">
-                <a:tc>
-                  <a:txBody>
-                    <a:bodyPr wrap="square"/>
-                    <a:lstStyle/>
-                    <a:p>
-                      <a:pPr algn="r"/>
-                      <a:r>
-                        <a:rPr sz="900" b="0" i="0">
-                          <a:solidFill>
-                            <a:srgbClr val="1A1A1A"/>
-                          </a:solidFill>
-                          <a:latin typeface="Calibri"/>
-                        </a:rPr>
-                        <a:t>37x</a:t>
-                      </a:r>
-                    </a:p>
-                  </a:txBody>
-                  <a:tcPr marL="45720" marR="45720" marT="18288" marB="18288" anchor="t"/>
-                </a:tc>
-                <a:tc>
-                  <a:txBody>
-                    <a:bodyPr wrap="square"/>
-                    <a:lstStyle/>
-                    <a:p>
-                      <a:pPr algn="r"/>
-                      <a:r>
-                        <a:rPr sz="900" b="0" i="0">
-                          <a:solidFill>
-                            <a:srgbClr val="1A1A1A"/>
-                          </a:solidFill>
-                          <a:latin typeface="Calibri"/>
-                        </a:rPr>
-                        <a:t>20</a:t>
-                      </a:r>
-                    </a:p>
-                  </a:txBody>
-                  <a:tcPr marL="45720" marR="45720" marT="18288" marB="18288" anchor="t"/>
-                </a:tc>
-                <a:tc>
-                  <a:txBody>
-                    <a:bodyPr wrap="square"/>
-                    <a:lstStyle/>
-                    <a:p>
-                      <a:r>
-                        <a:rPr sz="900" b="0" i="0">
-                          <a:solidFill>
-                            <a:srgbClr val="1A1A1A"/>
-                          </a:solidFill>
-                          <a:latin typeface="Calibri"/>
-                        </a:rPr>
-                        <a:t>Bone Age Assessment Using Artificial Intelligence in Korean Pediatric P...</a:t>
-                      </a:r>
-                    </a:p>
-                  </a:txBody>
-                  <a:tcPr marL="45720" marR="45720" marT="18288" marB="18288" anchor="t"/>
-                </a:tc>
-                <a:tc>
-                  <a:txBody>
-                    <a:bodyPr wrap="square"/>
-                    <a:lstStyle/>
-                    <a:p>
-                      <a:r>
-                        <a:rPr sz="900" b="0" i="0">
-                          <a:solidFill>
-                            <a:srgbClr val="1A1A1A"/>
-                          </a:solidFill>
-                          <a:latin typeface="Calibri"/>
-                        </a:rPr>
-                        <a:t>Korean journal of radiolo...</a:t>
-                      </a:r>
-                    </a:p>
-                  </a:txBody>
-                  <a:tcPr marL="45720" marR="45720" marT="18288" marB="18288" anchor="t"/>
-                </a:tc>
-                <a:tc>
-                  <a:txBody>
-                    <a:bodyPr wrap="square"/>
-                    <a:lstStyle/>
-                    <a:p>
-                      <a:r>
-                        <a:rPr sz="900" b="0" i="0">
-                          <a:solidFill>
-                            <a:srgbClr val="1A1A1A"/>
-                          </a:solidFill>
-                          <a:latin typeface="Calibri"/>
-                        </a:rPr>
-                        <a:t>whether bone age in a given population should be predicted ag...</a:t>
-                      </a:r>
-                    </a:p>
-                  </a:txBody>
-                  <a:tcPr marL="45720" marR="45720" marT="18288" marB="18288" anchor="t"/>
-                </a:tc>
-              </a:tr>
-              <a:tr h="356616">
-                <a:tc>
-                  <a:txBody>
-                    <a:bodyPr wrap="square"/>
-                    <a:lstStyle/>
-                    <a:p>
-                      <a:pPr algn="r"/>
-                      <a:r>
-                        <a:rPr sz="900" b="0" i="0">
-                          <a:solidFill>
-                            <a:srgbClr val="1A1A1A"/>
-                          </a:solidFill>
-                          <a:latin typeface="Calibri"/>
-                        </a:rPr>
-                        <a:t>34x</a:t>
-                      </a:r>
-                    </a:p>
-                  </a:txBody>
-                  <a:tcPr marL="45720" marR="45720" marT="18288" marB="18288" anchor="t"/>
-                </a:tc>
-                <a:tc>
-                  <a:txBody>
-                    <a:bodyPr wrap="square"/>
-                    <a:lstStyle/>
-                    <a:p>
-                      <a:pPr algn="r"/>
-                      <a:r>
-                        <a:rPr sz="900" b="0" i="0">
-                          <a:solidFill>
-                            <a:srgbClr val="1A1A1A"/>
-                          </a:solidFill>
-                          <a:latin typeface="Calibri"/>
-                        </a:rPr>
-                        <a:t>9</a:t>
-                      </a:r>
-                    </a:p>
-                  </a:txBody>
-                  <a:tcPr marL="45720" marR="45720" marT="18288" marB="18288" anchor="t"/>
-                </a:tc>
-                <a:tc>
-                  <a:txBody>
-                    <a:bodyPr wrap="square"/>
-                    <a:lstStyle/>
-                    <a:p>
-                      <a:r>
-                        <a:rPr sz="900" b="0" i="0">
-                          <a:solidFill>
-                            <a:srgbClr val="1A1A1A"/>
-                          </a:solidFill>
-                          <a:latin typeface="Calibri"/>
-                        </a:rPr>
-                        <a:t>Bone age assessment based on deep neural networks with annotation-free...</a:t>
-                      </a:r>
-                    </a:p>
-                  </a:txBody>
-                  <a:tcPr marL="45720" marR="45720" marT="18288" marB="18288" anchor="t"/>
-                </a:tc>
-                <a:tc>
-                  <a:txBody>
-                    <a:bodyPr wrap="square"/>
-                    <a:lstStyle/>
-                    <a:p>
-                      <a:r>
-                        <a:rPr sz="900" b="0" i="0">
-                          <a:solidFill>
-                            <a:srgbClr val="1A1A1A"/>
-                          </a:solidFill>
-                          <a:latin typeface="Calibri"/>
-                        </a:rPr>
-                        <a:t>Frontiers in artificial i...</a:t>
-                      </a:r>
-                    </a:p>
-                  </a:txBody>
-                  <a:tcPr marL="45720" marR="45720" marT="18288" marB="18288" anchor="t"/>
-                </a:tc>
-                <a:tc>
-                  <a:txBody>
-                    <a:bodyPr wrap="square"/>
-                    <a:lstStyle/>
-                    <a:p>
-                      <a:r>
-                        <a:rPr sz="900" b="0" i="0">
-                          <a:solidFill>
-                            <a:srgbClr val="1A1A1A"/>
-                          </a:solidFill>
-                          <a:latin typeface="Calibri"/>
-                        </a:rPr>
-                        <a:t>automated bone age assessment from hand radiographs without m...</a:t>
-                      </a:r>
-                    </a:p>
-                  </a:txBody>
-                  <a:tcPr marL="45720" marR="45720" marT="18288" marB="18288" anchor="t"/>
-                </a:tc>
-              </a:tr>
-              <a:tr h="356616">
-                <a:tc>
-                  <a:txBody>
-                    <a:bodyPr wrap="square"/>
-                    <a:lstStyle/>
-                    <a:p>
-                      <a:pPr algn="r"/>
-                      <a:r>
-                        <a:rPr sz="900" b="0" i="0">
-                          <a:solidFill>
-                            <a:srgbClr val="1A1A1A"/>
-                          </a:solidFill>
-                          <a:latin typeface="Calibri"/>
-                        </a:rPr>
-                        <a:t>30x</a:t>
-                      </a:r>
-                    </a:p>
-                  </a:txBody>
-                  <a:tcPr marL="45720" marR="45720" marT="18288" marB="18288" anchor="t"/>
-                </a:tc>
-                <a:tc>
-                  <a:txBody>
-                    <a:bodyPr wrap="square"/>
-                    <a:lstStyle/>
-                    <a:p>
-                      <a:pPr algn="r"/>
-                      <a:r>
-                        <a:rPr sz="900" b="0" i="0">
-                          <a:solidFill>
-                            <a:srgbClr val="1A1A1A"/>
-                          </a:solidFill>
-                          <a:latin typeface="Calibri"/>
-                        </a:rPr>
-                        <a:t>39</a:t>
-                      </a:r>
-                    </a:p>
-                  </a:txBody>
-                  <a:tcPr marL="45720" marR="45720" marT="18288" marB="18288" anchor="t"/>
-                </a:tc>
-                <a:tc>
-                  <a:txBody>
-                    <a:bodyPr wrap="square"/>
-                    <a:lstStyle/>
-                    <a:p>
-                      <a:r>
-                        <a:rPr sz="900" b="0" i="0">
-                          <a:solidFill>
-                            <a:srgbClr val="1A1A1A"/>
-                          </a:solidFill>
-                          <a:latin typeface="Calibri"/>
-                        </a:rPr>
-                        <a:t>FeTA</a:t>
-                      </a:r>
-                    </a:p>
-                  </a:txBody>
-                  <a:tcPr marL="45720" marR="45720" marT="18288" marB="18288" anchor="t"/>
-                </a:tc>
-                <a:tc>
-                  <a:txBody>
-                    <a:bodyPr wrap="square"/>
-                    <a:lstStyle/>
-                    <a:p>
-                      <a:r>
-                        <a:rPr sz="900" b="0" i="0">
-                          <a:solidFill>
-                            <a:srgbClr val="1A1A1A"/>
-                          </a:solidFill>
-                          <a:latin typeface="Calibri"/>
-                        </a:rPr>
-                        <a:t>Medical image analysis</a:t>
-                      </a:r>
-                    </a:p>
-                  </a:txBody>
-                  <a:tcPr marL="45720" marR="45720" marT="18288" marB="18288" anchor="t"/>
-                </a:tc>
-                <a:tc>
-                  <a:txBody>
-                    <a:bodyPr wrap="square"/>
-                    <a:lstStyle/>
-                    <a:p>
-                      <a:r>
-                        <a:rPr sz="900" b="0" i="0">
-                          <a:solidFill>
-                            <a:srgbClr val="1A1A1A"/>
-                          </a:solidFill>
-                          <a:latin typeface="Calibri"/>
-                        </a:rPr>
-                        <a:t>segmenting the developing fetal brain into tissues, the step...</a:t>
-                      </a:r>
-                    </a:p>
-                  </a:txBody>
-                  <a:tcPr marL="45720" marR="45720" marT="18288" marB="18288" anchor="t"/>
-                </a:tc>
-              </a:tr>
-              <a:tr h="356616">
-                <a:tc>
-                  <a:txBody>
-                    <a:bodyPr wrap="square"/>
-                    <a:lstStyle/>
-                    <a:p>
-                      <a:pPr algn="r"/>
-                      <a:r>
-                        <a:rPr sz="900" b="0" i="0">
-                          <a:solidFill>
-                            <a:srgbClr val="1A1A1A"/>
-                          </a:solidFill>
-                          <a:latin typeface="Calibri"/>
-                        </a:rPr>
-                        <a:t>28x</a:t>
-                      </a:r>
-                    </a:p>
-                  </a:txBody>
-                  <a:tcPr marL="45720" marR="45720" marT="18288" marB="18288" anchor="t"/>
-                </a:tc>
-                <a:tc>
-                  <a:txBody>
-                    <a:bodyPr wrap="square"/>
-                    <a:lstStyle/>
-                    <a:p>
-                      <a:pPr algn="r"/>
-                      <a:r>
-                        <a:rPr sz="900" b="0" i="0">
-                          <a:solidFill>
-                            <a:srgbClr val="1A1A1A"/>
-                          </a:solidFill>
-                          <a:latin typeface="Calibri"/>
-                        </a:rPr>
-                        <a:t>20</a:t>
-                      </a:r>
-                    </a:p>
-                  </a:txBody>
-                  <a:tcPr marL="45720" marR="45720" marT="18288" marB="18288" anchor="t"/>
-                </a:tc>
-                <a:tc>
-                  <a:txBody>
-                    <a:bodyPr wrap="square"/>
-                    <a:lstStyle/>
-                    <a:p>
-                      <a:r>
-                        <a:rPr sz="900" b="0" i="0">
-                          <a:solidFill>
-                            <a:srgbClr val="1A1A1A"/>
-                          </a:solidFill>
-                          <a:latin typeface="Calibri"/>
-                        </a:rPr>
-                        <a:t>Deep focus approach for accurate bone age estimation from lateral cepha...</a:t>
-                      </a:r>
-                    </a:p>
-                  </a:txBody>
-                  <a:tcPr marL="45720" marR="45720" marT="18288" marB="18288" anchor="t"/>
-                </a:tc>
-                <a:tc>
-                  <a:txBody>
-                    <a:bodyPr wrap="square"/>
-                    <a:lstStyle/>
-                    <a:p>
-                      <a:r>
-                        <a:rPr sz="900" b="0" i="0">
-                          <a:solidFill>
-                            <a:srgbClr val="1A1A1A"/>
-                          </a:solidFill>
-                          <a:latin typeface="Calibri"/>
-                        </a:rPr>
-                        <a:t>Journal of dental sciences</a:t>
-                      </a:r>
-                    </a:p>
-                  </a:txBody>
-                  <a:tcPr marL="45720" marR="45720" marT="18288" marB="18288" anchor="t"/>
-                </a:tc>
-                <a:tc>
-                  <a:txBody>
-                    <a:bodyPr wrap="square"/>
-                    <a:lstStyle/>
-                    <a:p>
-                      <a:r>
-                        <a:rPr sz="900" b="0" i="0">
-                          <a:solidFill>
-                            <a:srgbClr val="1A1A1A"/>
-                          </a:solidFill>
-                          <a:latin typeface="Calibri"/>
-                        </a:rPr>
-                        <a:t>estimating skeletal maturity from the lateral cephalogram a g...</a:t>
-                      </a:r>
-                    </a:p>
-                  </a:txBody>
-                  <a:tcPr marL="45720" marR="45720" marT="18288" marB="18288" anchor="t"/>
-                </a:tc>
-              </a:tr>
-              <a:tr h="356616">
-                <a:tc>
-                  <a:txBody>
-                    <a:bodyPr wrap="square"/>
-                    <a:lstStyle/>
-                    <a:p>
-                      <a:pPr algn="r"/>
-                      <a:r>
-                        <a:rPr sz="900" b="0" i="0">
-                          <a:solidFill>
-                            <a:srgbClr val="1A1A1A"/>
-                          </a:solidFill>
-                          <a:latin typeface="Calibri"/>
-                        </a:rPr>
-                        <a:t>27x</a:t>
-                      </a:r>
-                    </a:p>
-                  </a:txBody>
-                  <a:tcPr marL="45720" marR="45720" marT="18288" marB="18288" anchor="t"/>
-                </a:tc>
-                <a:tc>
-                  <a:txBody>
-                    <a:bodyPr wrap="square"/>
-                    <a:lstStyle/>
-                    <a:p>
-                      <a:pPr algn="r"/>
-                      <a:r>
-                        <a:rPr sz="900" b="0" i="0">
-                          <a:solidFill>
-                            <a:srgbClr val="1A1A1A"/>
-                          </a:solidFill>
-                          <a:latin typeface="Calibri"/>
-                        </a:rPr>
-                        <a:t>11</a:t>
-                      </a:r>
-                    </a:p>
-                  </a:txBody>
-                  <a:tcPr marL="45720" marR="45720" marT="18288" marB="18288" anchor="t"/>
-                </a:tc>
-                <a:tc>
-                  <a:txBody>
-                    <a:bodyPr wrap="square"/>
-                    <a:lstStyle/>
-                    <a:p>
-                      <a:r>
-                        <a:rPr sz="900" b="0" i="0">
-                          <a:solidFill>
-                            <a:srgbClr val="1A1A1A"/>
-                          </a:solidFill>
-                          <a:latin typeface="Calibri"/>
-                        </a:rPr>
-                        <a:t>Bone Age Estimation and Prediction of Final Adult Height Using Deep Lea...</a:t>
-                      </a:r>
-                    </a:p>
-                  </a:txBody>
-                  <a:tcPr marL="45720" marR="45720" marT="18288" marB="18288" anchor="t"/>
-                </a:tc>
-                <a:tc>
-                  <a:txBody>
-                    <a:bodyPr wrap="square"/>
-                    <a:lstStyle/>
-                    <a:p>
-                      <a:r>
-                        <a:rPr sz="900" b="0" i="0">
-                          <a:solidFill>
-                            <a:srgbClr val="1A1A1A"/>
-                          </a:solidFill>
-                          <a:latin typeface="Calibri"/>
-                        </a:rPr>
-                        <a:t>Yonsei medical journal</a:t>
-                      </a:r>
-                    </a:p>
-                  </a:txBody>
-                  <a:tcPr marL="45720" marR="45720" marT="18288" marB="18288" anchor="t"/>
-                </a:tc>
-                <a:tc>
-                  <a:txBody>
-                    <a:bodyPr wrap="square"/>
-                    <a:lstStyle/>
-                    <a:p>
-                      <a:r>
-                        <a:rPr sz="900" b="0" i="0">
-                          <a:solidFill>
-                            <a:srgbClr val="1A1A1A"/>
-                          </a:solidFill>
-                          <a:latin typeface="Calibri"/>
-                        </a:rPr>
-                        <a:t>automatically estimating bone age and predicting final adult...</a:t>
-                      </a:r>
-                    </a:p>
-                  </a:txBody>
-                  <a:tcPr marL="45720" marR="45720" marT="18288" marB="18288" anchor="t"/>
-                </a:tc>
-              </a:tr>
-              <a:tr h="356616">
-                <a:tc>
-                  <a:txBody>
-                    <a:bodyPr wrap="square"/>
-                    <a:lstStyle/>
-                    <a:p>
-                      <a:pPr algn="r"/>
-                      <a:r>
-                        <a:rPr sz="900" b="0" i="0">
-                          <a:solidFill>
-                            <a:srgbClr val="1A1A1A"/>
-                          </a:solidFill>
-                          <a:latin typeface="Calibri"/>
-                        </a:rPr>
-                        <a:t>26x</a:t>
-                      </a:r>
-                    </a:p>
-                  </a:txBody>
-                  <a:tcPr marL="45720" marR="45720" marT="18288" marB="18288" anchor="t"/>
-                </a:tc>
-                <a:tc>
-                  <a:txBody>
-                    <a:bodyPr wrap="square"/>
-                    <a:lstStyle/>
-                    <a:p>
-                      <a:pPr algn="r"/>
-                      <a:r>
-                        <a:rPr sz="900" b="0" i="0">
-                          <a:solidFill>
-                            <a:srgbClr val="1A1A1A"/>
-                          </a:solidFill>
-                          <a:latin typeface="Calibri"/>
-                        </a:rPr>
-                        <a:t>21</a:t>
-                      </a:r>
-                    </a:p>
-                  </a:txBody>
-                  <a:tcPr marL="45720" marR="45720" marT="18288" marB="18288" anchor="t"/>
-                </a:tc>
-                <a:tc>
-                  <a:txBody>
-                    <a:bodyPr wrap="square"/>
-                    <a:lstStyle/>
-                    <a:p>
-                      <a:r>
-                        <a:rPr sz="900" b="0" i="0">
-                          <a:solidFill>
-                            <a:srgbClr val="1A1A1A"/>
-                          </a:solidFill>
-                          <a:latin typeface="Calibri"/>
-                        </a:rPr>
-                        <a:t>Detection of ASD Children through Deep-Learning Application of fMRI.</a:t>
-                      </a:r>
-                    </a:p>
-                  </a:txBody>
-                  <a:tcPr marL="45720" marR="45720" marT="18288" marB="18288" anchor="t"/>
-                </a:tc>
-                <a:tc>
-                  <a:txBody>
-                    <a:bodyPr wrap="square"/>
-                    <a:lstStyle/>
-                    <a:p>
-                      <a:r>
-                        <a:rPr sz="900" b="0" i="0">
-                          <a:solidFill>
-                            <a:srgbClr val="1A1A1A"/>
-                          </a:solidFill>
-                          <a:latin typeface="Calibri"/>
-                        </a:rPr>
-                        <a:t>Children (Basel, Switzerl...</a:t>
-                      </a:r>
-                    </a:p>
-                  </a:txBody>
-                  <a:tcPr marL="45720" marR="45720" marT="18288" marB="18288" anchor="t"/>
-                </a:tc>
-                <a:tc>
-                  <a:txBody>
-                    <a:bodyPr wrap="square"/>
-                    <a:lstStyle/>
-                    <a:p>
-                      <a:r>
-                        <a:rPr sz="900" b="0" i="0">
-                          <a:solidFill>
-                            <a:srgbClr val="1A1A1A"/>
-                          </a:solidFill>
-                          <a:latin typeface="Calibri"/>
-                        </a:rPr>
-                        <a:t>early detection of autism spectrum disorder in children, wher...</a:t>
-                      </a:r>
-                    </a:p>
-                  </a:txBody>
-                  <a:tcPr marL="45720" marR="45720" marT="18288" marB="18288" anchor="t"/>
-                </a:tc>
-              </a:tr>
-              <a:tr h="356616">
-                <a:tc>
-                  <a:txBody>
-                    <a:bodyPr wrap="square"/>
-                    <a:lstStyle/>
-                    <a:p>
-                      <a:pPr algn="r"/>
-                      <a:r>
-                        <a:rPr sz="900" b="0" i="0">
-                          <a:solidFill>
-                            <a:srgbClr val="1A1A1A"/>
-                          </a:solidFill>
-                          <a:latin typeface="Calibri"/>
-                        </a:rPr>
-                        <a:t>26x</a:t>
-                      </a:r>
-                    </a:p>
-                  </a:txBody>
-                  <a:tcPr marL="45720" marR="45720" marT="18288" marB="18288" anchor="t"/>
-                </a:tc>
-                <a:tc>
-                  <a:txBody>
-                    <a:bodyPr wrap="square"/>
-                    <a:lstStyle/>
-                    <a:p>
-                      <a:pPr algn="r"/>
-                      <a:r>
-                        <a:rPr sz="900" b="0" i="0">
-                          <a:solidFill>
-                            <a:srgbClr val="1A1A1A"/>
-                          </a:solidFill>
-                          <a:latin typeface="Calibri"/>
-                        </a:rPr>
-                        <a:t>14</a:t>
-                      </a:r>
-                    </a:p>
-                  </a:txBody>
-                  <a:tcPr marL="45720" marR="45720" marT="18288" marB="18288" anchor="t"/>
-                </a:tc>
-                <a:tc>
-                  <a:txBody>
-                    <a:bodyPr wrap="square"/>
-                    <a:lstStyle/>
-                    <a:p>
-                      <a:r>
-                        <a:rPr sz="900" b="0" i="0">
-                          <a:solidFill>
-                            <a:srgbClr val="1A1A1A"/>
-                          </a:solidFill>
-                          <a:latin typeface="Calibri"/>
-                        </a:rPr>
-                        <a:t>High performance for bone age estimation with an artificial intelligenc...</a:t>
-                      </a:r>
-                    </a:p>
-                  </a:txBody>
-                  <a:tcPr marL="45720" marR="45720" marT="18288" marB="18288" anchor="t"/>
-                </a:tc>
-                <a:tc>
-                  <a:txBody>
-                    <a:bodyPr wrap="square"/>
-                    <a:lstStyle/>
-                    <a:p>
-                      <a:r>
-                        <a:rPr sz="900" b="0" i="0">
-                          <a:solidFill>
-                            <a:srgbClr val="1A1A1A"/>
-                          </a:solidFill>
-                          <a:latin typeface="Calibri"/>
-                        </a:rPr>
-                        <a:t>Diagnostic and interventi...</a:t>
-                      </a:r>
-                    </a:p>
-                  </a:txBody>
-                  <a:tcPr marL="45720" marR="45720" marT="18288" marB="18288" anchor="t"/>
-                </a:tc>
-                <a:tc>
-                  <a:txBody>
-                    <a:bodyPr wrap="square"/>
-                    <a:lstStyle/>
-                    <a:p>
-                      <a:r>
-                        <a:rPr sz="900" b="0" i="0">
-                          <a:solidFill>
-                            <a:srgbClr val="1A1A1A"/>
-                          </a:solidFill>
-                          <a:latin typeface="Calibri"/>
-                        </a:rPr>
-                        <a:t>How does an AI solution for bone age assessment compare in ac...</a:t>
-                      </a:r>
-                    </a:p>
-                  </a:txBody>
-                  <a:tcPr marL="45720" marR="45720" marT="18288" marB="18288" anchor="t"/>
-                </a:tc>
-              </a:tr>
-              <a:tr h="356616">
-                <a:tc>
-                  <a:txBody>
-                    <a:bodyPr wrap="square"/>
-                    <a:lstStyle/>
-                    <a:p>
-                      <a:pPr algn="r"/>
-                      <a:r>
-                        <a:rPr sz="900" b="0" i="0">
-                          <a:solidFill>
-                            <a:srgbClr val="1A1A1A"/>
-                          </a:solidFill>
-                          <a:latin typeface="Calibri"/>
-                        </a:rPr>
-                        <a:t>25x</a:t>
-                      </a:r>
-                    </a:p>
-                  </a:txBody>
-                  <a:tcPr marL="45720" marR="45720" marT="18288" marB="18288" anchor="t"/>
-                </a:tc>
-                <a:tc>
-                  <a:txBody>
-                    <a:bodyPr wrap="square"/>
-                    <a:lstStyle/>
-                    <a:p>
-                      <a:pPr algn="r"/>
-                      <a:r>
-                        <a:rPr sz="900" b="0" i="0">
-                          <a:solidFill>
-                            <a:srgbClr val="1A1A1A"/>
-                          </a:solidFill>
-                          <a:latin typeface="Calibri"/>
-                        </a:rPr>
-                        <a:t>49</a:t>
-                      </a:r>
-                    </a:p>
-                  </a:txBody>
-                  <a:tcPr marL="45720" marR="45720" marT="18288" marB="18288" anchor="t"/>
-                </a:tc>
-                <a:tc>
-                  <a:txBody>
-                    <a:bodyPr wrap="square"/>
-                    <a:lstStyle/>
-                    <a:p>
-                      <a:r>
-                        <a:rPr sz="900" b="0" i="0">
-                          <a:solidFill>
-                            <a:srgbClr val="1A1A1A"/>
-                          </a:solidFill>
-                          <a:latin typeface="Calibri"/>
-                        </a:rPr>
-                        <a:t>Automated classification of common maternal fetal ultrasound planes usi... dagger</a:t>
-                      </a:r>
-                    </a:p>
-                  </a:txBody>
-                  <a:tcPr marL="45720" marR="45720" marT="18288" marB="18288" anchor="t"/>
-                </a:tc>
-                <a:tc>
-                  <a:txBody>
-                    <a:bodyPr wrap="square"/>
-                    <a:lstStyle/>
-                    <a:p>
-                      <a:r>
-                        <a:rPr sz="900" b="0" i="0">
-                          <a:solidFill>
-                            <a:srgbClr val="1A1A1A"/>
-                          </a:solidFill>
-                          <a:latin typeface="Calibri"/>
-                        </a:rPr>
-                        <a:t>Biomedical Signal Process...</a:t>
-                      </a:r>
-                    </a:p>
-                  </a:txBody>
-                  <a:tcPr marL="45720" marR="45720" marT="18288" marB="18288" anchor="t"/>
-                </a:tc>
-                <a:tc>
-                  <a:txBody>
-                    <a:bodyPr wrap="square"/>
-                    <a:lstStyle/>
-                    <a:p>
-                      <a:r>
-                        <a:rPr sz="900" b="0" i="0">
-                          <a:solidFill>
-                            <a:srgbClr val="1A1A1A"/>
-                          </a:solidFill>
-                          <a:latin typeface="Calibri"/>
-                        </a:rPr>
-                        <a:t>automated identification of standard fetal ultrasound planes...</a:t>
-                      </a:r>
-                    </a:p>
-                  </a:txBody>
-                  <a:tcPr marL="45720" marR="45720" marT="18288" marB="18288" anchor="t"/>
-                </a:tc>
-              </a:tr>
-            </a:tbl>
-          </a:graphicData>
-        </a:graphic>
-      </p:graphicFrame>
-      <p:sp>
-        <p:nvSpPr>
-          <p:cNvPr id="4" name="TextBox 3"/>
-          <p:cNvSpPr txBox="1"/>
-          <p:nvPr/>
-        </p:nvSpPr>
-        <p:spPr>
-          <a:xfrm>
-            <a:off x="411480" y="4379976"/>
-            <a:ext cx="11368735" cy="405765"/>
-          </a:xfrm>
-          <a:prstGeom prst="rect">
-            <a:avLst/>
-          </a:prstGeom>
-          <a:noFill/>
-        </p:spPr>
-        <p:txBody>
-          <a:bodyPr wrap="square" lIns="45720" rIns="45720" tIns="27432" bIns="27432" anchor="t">
-            <a:spAutoFit/>
-          </a:bodyPr>
-          <a:lstStyle/>
-          <a:p>
-            <a:pPr algn="l">
-              <a:spcAft>
-                <a:spcPts val="315"/>
-              </a:spcAft>
-            </a:pPr>
-            <a:r>
-              <a:rPr sz="900" b="0" i="0">
-                <a:solidFill>
-                  <a:srgbClr val="1A1A1A"/>
-                </a:solidFill>
-                <a:latin typeface="Calibri"/>
-              </a:rPr>
-              <a:t>410 studies included from 2023; 289 have enough citations to be ranked. Impact = citations relative to the average paper of the same field and year (OpenAlex FWCI; iCite RCR where OpenAlex has none), shown once a study has 5 citations. dagger Embase-only; ast preprint.</a:t>
-            </a:r>
-          </a:p>
-        </p:txBody>
-      </p:sp>
-      <p:sp>
-        <p:nvSpPr>
-          <p:cNvPr id="5" name="page number"/>
-          <p:cNvSpPr txBox="1"/>
-          <p:nvPr/>
-        </p:nvSpPr>
-        <p:spPr>
-          <a:xfrm>
-            <a:off x="10728655" y="6510528"/>
-            <a:ext cx="1188720" cy="274320"/>
-          </a:xfrm>
-          <a:prstGeom prst="rect">
-            <a:avLst/>
-          </a:prstGeom>
-          <a:noFill/>
-        </p:spPr>
-        <p:txBody>
-          <a:bodyPr wrap="none">
-            <a:spAutoFit/>
-          </a:bodyPr>
-          <a:lstStyle/>
-          <a:p>
-            <a:pPr algn="r"/>
-            <a:r>
-              <a:rPr sz="1000">
-                <a:solidFill>
-                  <a:srgbClr val="6B6B6B"/>
-                </a:solidFill>
-                <a:latin typeface="Calibri"/>
-              </a:rPr>
-              <a:t>20 / 61</a:t>
-            </a:r>
-          </a:p>
-        </p:txBody>
-      </p:sp>
-    </p:spTree>
-  </p:cSld>
-  <p:clrMapOvr>
-    <a:masterClrMapping/>
-  </p:clrMapOvr>
-</p:sld>
-</file>
-
-<file path=ppt/slides/slide21.xml><?xml version="1.0" encoding="utf-8"?>
 <p:sld xmlns:a="http://schemas.openxmlformats.org/drawingml/2006/main" xmlns:p="http://schemas.openxmlformats.org/presentationml/2006/main" xmlns:r="http://schemas.openxmlformats.org/officeDocument/2006/relationships">
   <p:cSld>
     <p:spTree>
@@ -8630,7 +8350,7 @@
                 </a:solidFill>
                 <a:latin typeface="Calibri"/>
               </a:rPr>
-              <a:t>21 / 61</a:t>
+              <a:t>20 / 60</a:t>
             </a:r>
           </a:p>
         </p:txBody>
@@ -8643,7 +8363,7 @@
 </p:sld>
 </file>
 
-<file path=ppt/slides/slide22.xml><?xml version="1.0" encoding="utf-8"?>
+<file path=ppt/slides/slide21.xml><?xml version="1.0" encoding="utf-8"?>
 <p:sld xmlns:a="http://schemas.openxmlformats.org/drawingml/2006/main" xmlns:p="http://schemas.openxmlformats.org/presentationml/2006/main" xmlns:r="http://schemas.openxmlformats.org/officeDocument/2006/relationships">
   <p:cSld>
     <p:spTree>
@@ -9743,7 +9463,7 @@
                 </a:solidFill>
                 <a:latin typeface="Calibri"/>
               </a:rPr>
-              <a:t>22 / 61</a:t>
+              <a:t>21 / 60</a:t>
             </a:r>
           </a:p>
         </p:txBody>
@@ -9756,7 +9476,7 @@
 </p:sld>
 </file>
 
-<file path=ppt/slides/slide23.xml><?xml version="1.0" encoding="utf-8"?>
+<file path=ppt/slides/slide22.xml><?xml version="1.0" encoding="utf-8"?>
 <p:sld xmlns:a="http://schemas.openxmlformats.org/drawingml/2006/main" xmlns:p="http://schemas.openxmlformats.org/presentationml/2006/main" xmlns:r="http://schemas.openxmlformats.org/officeDocument/2006/relationships">
   <p:cSld>
     <p:spTree>
@@ -10856,7 +10576,7 @@
                 </a:solidFill>
                 <a:latin typeface="Calibri"/>
               </a:rPr>
-              <a:t>23 / 61</a:t>
+              <a:t>22 / 60</a:t>
             </a:r>
           </a:p>
         </p:txBody>
@@ -10869,7 +10589,7 @@
 </p:sld>
 </file>
 
-<file path=ppt/slides/slide24.xml><?xml version="1.0" encoding="utf-8"?>
+<file path=ppt/slides/slide23.xml><?xml version="1.0" encoding="utf-8"?>
 <p:sld xmlns:a="http://schemas.openxmlformats.org/drawingml/2006/main" xmlns:p="http://schemas.openxmlformats.org/presentationml/2006/main" xmlns:r="http://schemas.openxmlformats.org/officeDocument/2006/relationships">
   <p:cSld>
     <p:spTree>
@@ -12584,7 +12304,7 @@
                 </a:solidFill>
                 <a:latin typeface="Calibri"/>
               </a:rPr>
-              <a:t>24 / 61</a:t>
+              <a:t>23 / 60</a:t>
             </a:r>
           </a:p>
         </p:txBody>
@@ -12597,7 +12317,7 @@
 </p:sld>
 </file>
 
-<file path=ppt/slides/slide25.xml><?xml version="1.0" encoding="utf-8"?>
+<file path=ppt/slides/slide24.xml><?xml version="1.0" encoding="utf-8"?>
 <p:sld xmlns:a="http://schemas.openxmlformats.org/drawingml/2006/main" xmlns:p="http://schemas.openxmlformats.org/presentationml/2006/main" xmlns:r="http://schemas.openxmlformats.org/officeDocument/2006/relationships">
   <p:cSld>
     <p:spTree>
@@ -13854,7 +13574,7 @@
                 </a:solidFill>
                 <a:latin typeface="Calibri"/>
               </a:rPr>
-              <a:t>25 / 61</a:t>
+              <a:t>24 / 60</a:t>
             </a:r>
           </a:p>
         </p:txBody>
@@ -13867,7 +13587,7 @@
 </p:sld>
 </file>
 
-<file path=ppt/slides/slide26.xml><?xml version="1.0" encoding="utf-8"?>
+<file path=ppt/slides/slide25.xml><?xml version="1.0" encoding="utf-8"?>
 <p:sld xmlns:a="http://schemas.openxmlformats.org/drawingml/2006/main" xmlns:p="http://schemas.openxmlformats.org/presentationml/2006/main" xmlns:r="http://schemas.openxmlformats.org/officeDocument/2006/relationships">
   <p:cSld>
     <p:spTree>
@@ -15097,7 +14817,7 @@
                 </a:solidFill>
                 <a:latin typeface="Calibri"/>
               </a:rPr>
-              <a:t>26 / 61</a:t>
+              <a:t>25 / 60</a:t>
             </a:r>
           </a:p>
         </p:txBody>
@@ -15110,7 +14830,7 @@
 </p:sld>
 </file>
 
-<file path=ppt/slides/slide27.xml><?xml version="1.0" encoding="utf-8"?>
+<file path=ppt/slides/slide26.xml><?xml version="1.0" encoding="utf-8"?>
 <p:sld xmlns:a="http://schemas.openxmlformats.org/drawingml/2006/main" xmlns:p="http://schemas.openxmlformats.org/presentationml/2006/main" xmlns:r="http://schemas.openxmlformats.org/officeDocument/2006/relationships">
   <p:cSld>
     <p:spTree>
@@ -16292,7 +16012,7 @@
                 </a:solidFill>
                 <a:latin typeface="Calibri"/>
               </a:rPr>
-              <a:t>27 / 61</a:t>
+              <a:t>26 / 60</a:t>
             </a:r>
           </a:p>
         </p:txBody>
@@ -16305,7 +16025,7 @@
 </p:sld>
 </file>
 
-<file path=ppt/slides/slide28.xml><?xml version="1.0" encoding="utf-8"?>
+<file path=ppt/slides/slide27.xml><?xml version="1.0" encoding="utf-8"?>
 <p:sld xmlns:a="http://schemas.openxmlformats.org/drawingml/2006/main" xmlns:p="http://schemas.openxmlformats.org/presentationml/2006/main" xmlns:r="http://schemas.openxmlformats.org/officeDocument/2006/relationships">
   <p:cSld>
     <p:spTree>
@@ -17517,7 +17237,7 @@
                 </a:solidFill>
                 <a:latin typeface="Calibri"/>
               </a:rPr>
-              <a:t>28 / 61</a:t>
+              <a:t>27 / 60</a:t>
             </a:r>
           </a:p>
         </p:txBody>
@@ -17530,7 +17250,7 @@
 </p:sld>
 </file>
 
-<file path=ppt/slides/slide29.xml><?xml version="1.0" encoding="utf-8"?>
+<file path=ppt/slides/slide28.xml><?xml version="1.0" encoding="utf-8"?>
 <p:sld xmlns:a="http://schemas.openxmlformats.org/drawingml/2006/main" xmlns:p="http://schemas.openxmlformats.org/presentationml/2006/main" xmlns:r="http://schemas.openxmlformats.org/officeDocument/2006/relationships">
   <p:cSld>
     <p:spTree>
@@ -18760,7 +18480,1259 @@
                 </a:solidFill>
                 <a:latin typeface="Calibri"/>
               </a:rPr>
-              <a:t>29 / 61</a:t>
+              <a:t>28 / 60</a:t>
+            </a:r>
+          </a:p>
+        </p:txBody>
+      </p:sp>
+    </p:spTree>
+  </p:cSld>
+  <p:clrMapOvr>
+    <a:masterClrMapping/>
+  </p:clrMapOvr>
+</p:sld>
+</file>
+
+<file path=ppt/slides/slide29.xml><?xml version="1.0" encoding="utf-8"?>
+<p:sld xmlns:a="http://schemas.openxmlformats.org/drawingml/2006/main" xmlns:p="http://schemas.openxmlformats.org/presentationml/2006/main" xmlns:r="http://schemas.openxmlformats.org/officeDocument/2006/relationships">
+  <p:cSld>
+    <p:spTree>
+      <p:nvGrpSpPr>
+        <p:cNvPr id="1" name=""/>
+        <p:cNvGrpSpPr/>
+        <p:nvPr/>
+      </p:nvGrpSpPr>
+      <p:grpSpPr/>
+      <p:sp>
+        <p:nvSpPr>
+          <p:cNvPr id="2" name="title band"/>
+          <p:cNvSpPr/>
+          <p:nvPr/>
+        </p:nvSpPr>
+        <p:spPr>
+          <a:xfrm>
+            <a:off x="0" y="0"/>
+            <a:ext cx="12191695" cy="713232"/>
+          </a:xfrm>
+          <a:prstGeom prst="rect">
+            <a:avLst/>
+          </a:prstGeom>
+          <a:solidFill>
+            <a:srgbClr val="3333B3"/>
+          </a:solidFill>
+          <a:ln>
+            <a:noFill/>
+          </a:ln>
+        </p:spPr>
+        <p:style>
+          <a:lnRef idx="1">
+            <a:schemeClr val="accent1"/>
+          </a:lnRef>
+          <a:fillRef idx="3">
+            <a:schemeClr val="accent1"/>
+          </a:fillRef>
+          <a:effectRef idx="2">
+            <a:schemeClr val="accent1"/>
+          </a:effectRef>
+          <a:fontRef idx="minor">
+            <a:schemeClr val="lt1"/>
+          </a:fontRef>
+        </p:style>
+        <p:txBody>
+          <a:bodyPr rtlCol="0" anchor="ctr" lIns="411480" wrap="square"/>
+          <a:lstStyle/>
+          <a:p>
+            <a:pPr algn="l"/>
+            <a:r>
+              <a:rPr sz="2200">
+                <a:solidFill>
+                  <a:srgbClr val="FFFFFF"/>
+                </a:solidFill>
+                <a:latin typeface="Calibri"/>
+              </a:rPr>
+              <a:t>Most-cited pediatric radiology AI papers, 2008-2022</a:t>
+            </a:r>
+          </a:p>
+        </p:txBody>
+      </p:sp>
+      <p:graphicFrame>
+        <p:nvGraphicFramePr>
+          <p:cNvPr id="3" name="Table 2"/>
+          <p:cNvGraphicFramePr>
+            <a:graphicFrameLocks noGrp="1"/>
+          </p:cNvGraphicFramePr>
+          <p:nvPr/>
+        </p:nvGraphicFramePr>
+        <p:xfrm>
+          <a:off x="411480" y="877824"/>
+          <a:ext cx="11368734" cy="3648456"/>
+        </p:xfrm>
+        <a:graphic>
+          <a:graphicData uri="http://schemas.openxmlformats.org/drawingml/2006/table">
+            <a:tbl>
+              <a:tblPr firstRow="1" bandRow="1">
+                <a:tableStyleId>{5C22544A-7EE6-4342-B048-85BDC9FD1C3A}</a:tableStyleId>
+              </a:tblPr>
+              <a:tblGrid>
+                <a:gridCol w="685800"/>
+                <a:gridCol w="685800"/>
+                <a:gridCol w="4593278"/>
+                <a:gridCol w="2026446"/>
+                <a:gridCol w="3377410"/>
+              </a:tblGrid>
+              <a:tr h="219456">
+                <a:tc>
+                  <a:txBody>
+                    <a:bodyPr wrap="square"/>
+                    <a:lstStyle/>
+                    <a:p>
+                      <a:pPr algn="r"/>
+                      <a:r>
+                        <a:rPr sz="900" b="1" i="0">
+                          <a:solidFill>
+                            <a:srgbClr val="FFFFFF"/>
+                          </a:solidFill>
+                          <a:latin typeface="Calibri"/>
+                        </a:rPr>
+                        <a:t>Cites</a:t>
+                      </a:r>
+                    </a:p>
+                  </a:txBody>
+                  <a:tcPr marL="45720" marR="45720" marT="18288" marB="18288" anchor="t"/>
+                </a:tc>
+                <a:tc>
+                  <a:txBody>
+                    <a:bodyPr wrap="square"/>
+                    <a:lstStyle/>
+                    <a:p>
+                      <a:pPr algn="r"/>
+                      <a:r>
+                        <a:rPr sz="900" b="1" i="0">
+                          <a:solidFill>
+                            <a:srgbClr val="FFFFFF"/>
+                          </a:solidFill>
+                          <a:latin typeface="Calibri"/>
+                        </a:rPr>
+                        <a:t>FWCI</a:t>
+                      </a:r>
+                    </a:p>
+                  </a:txBody>
+                  <a:tcPr marL="45720" marR="45720" marT="18288" marB="18288" anchor="t"/>
+                </a:tc>
+                <a:tc>
+                  <a:txBody>
+                    <a:bodyPr wrap="square"/>
+                    <a:lstStyle/>
+                    <a:p>
+                      <a:r>
+                        <a:rPr sz="900" b="1" i="0">
+                          <a:solidFill>
+                            <a:srgbClr val="FFFFFF"/>
+                          </a:solidFill>
+                          <a:latin typeface="Calibri"/>
+                        </a:rPr>
+                        <a:t>Paper</a:t>
+                      </a:r>
+                    </a:p>
+                  </a:txBody>
+                  <a:tcPr marL="45720" marR="45720" marT="18288" marB="18288" anchor="t"/>
+                </a:tc>
+                <a:tc>
+                  <a:txBody>
+                    <a:bodyPr wrap="square"/>
+                    <a:lstStyle/>
+                    <a:p>
+                      <a:r>
+                        <a:rPr sz="900" b="1" i="0">
+                          <a:solidFill>
+                            <a:srgbClr val="FFFFFF"/>
+                          </a:solidFill>
+                          <a:latin typeface="Calibri"/>
+                        </a:rPr>
+                        <a:t>Venue</a:t>
+                      </a:r>
+                    </a:p>
+                  </a:txBody>
+                  <a:tcPr marL="45720" marR="45720" marT="18288" marB="18288" anchor="t"/>
+                </a:tc>
+                <a:tc>
+                  <a:txBody>
+                    <a:bodyPr wrap="square"/>
+                    <a:lstStyle/>
+                    <a:p>
+                      <a:r>
+                        <a:rPr sz="900" b="1" i="0">
+                          <a:solidFill>
+                            <a:srgbClr val="FFFFFF"/>
+                          </a:solidFill>
+                          <a:latin typeface="Calibri"/>
+                        </a:rPr>
+                        <a:t>What it answers</a:t>
+                      </a:r>
+                    </a:p>
+                  </a:txBody>
+                  <a:tcPr marL="45720" marR="45720" marT="18288" marB="18288" anchor="t"/>
+                </a:tc>
+              </a:tr>
+              <a:tr h="356616">
+                <a:tc>
+                  <a:txBody>
+                    <a:bodyPr wrap="square"/>
+                    <a:lstStyle/>
+                    <a:p>
+                      <a:pPr algn="r"/>
+                      <a:r>
+                        <a:rPr sz="900" b="0" i="0">
+                          <a:solidFill>
+                            <a:srgbClr val="1A1A1A"/>
+                          </a:solidFill>
+                          <a:latin typeface="Calibri"/>
+                        </a:rPr>
+                        <a:t>426</a:t>
+                      </a:r>
+                    </a:p>
+                  </a:txBody>
+                  <a:tcPr marL="45720" marR="45720" marT="18288" marB="18288" anchor="t"/>
+                </a:tc>
+                <a:tc>
+                  <a:txBody>
+                    <a:bodyPr wrap="square"/>
+                    <a:lstStyle/>
+                    <a:p>
+                      <a:pPr algn="r"/>
+                      <a:r>
+                        <a:rPr sz="900" b="0" i="0">
+                          <a:solidFill>
+                            <a:srgbClr val="1A1A1A"/>
+                          </a:solidFill>
+                          <a:latin typeface="Calibri"/>
+                        </a:rPr>
+                        <a:t>328.6</a:t>
+                      </a:r>
+                    </a:p>
+                  </a:txBody>
+                  <a:tcPr marL="45720" marR="45720" marT="18288" marB="18288" anchor="t"/>
+                </a:tc>
+                <a:tc>
+                  <a:txBody>
+                    <a:bodyPr wrap="square"/>
+                    <a:lstStyle/>
+                    <a:p>
+                      <a:r>
+                        <a:rPr sz="900" b="0" i="0">
+                          <a:solidFill>
+                            <a:srgbClr val="1A1A1A"/>
+                          </a:solidFill>
+                          <a:latin typeface="Calibri"/>
+                        </a:rPr>
+                        <a:t>Performance of a Deep-Learning Neural Network Model in Assessing Skeletal Mat... (2017)</a:t>
+                      </a:r>
+                    </a:p>
+                  </a:txBody>
+                  <a:tcPr marL="45720" marR="45720" marT="18288" marB="18288" anchor="t"/>
+                </a:tc>
+                <a:tc>
+                  <a:txBody>
+                    <a:bodyPr wrap="square"/>
+                    <a:lstStyle/>
+                    <a:p>
+                      <a:r>
+                        <a:rPr sz="900" b="0" i="0">
+                          <a:solidFill>
+                            <a:srgbClr val="1A1A1A"/>
+                          </a:solidFill>
+                          <a:latin typeface="Calibri"/>
+                        </a:rPr>
+                        <a:t>Radiology</a:t>
+                      </a:r>
+                    </a:p>
+                  </a:txBody>
+                  <a:tcPr marL="45720" marR="45720" marT="18288" marB="18288" anchor="t"/>
+                </a:tc>
+                <a:tc>
+                  <a:txBody>
+                    <a:bodyPr wrap="square"/>
+                    <a:lstStyle/>
+                    <a:p>
+                      <a:r>
+                        <a:rPr sz="900" b="0" i="1">
+                          <a:solidFill>
+                            <a:srgbClr val="1A1A1A"/>
+                          </a:solidFill>
+                          <a:latin typeface="Calibri"/>
+                        </a:rPr>
+                        <a:t>bone age</a:t>
+                      </a:r>
+                      <a:r>
+                        <a:rPr sz="900" b="0" i="0">
+                          <a:solidFill>
+                            <a:srgbClr val="1A1A1A"/>
+                          </a:solidFill>
+                          <a:latin typeface="Calibri"/>
+                        </a:rPr>
+                        <a:t>: Can a CNN assess skeletal maturity as accurately as radiologists?</a:t>
+                      </a:r>
+                    </a:p>
+                  </a:txBody>
+                  <a:tcPr marL="45720" marR="45720" marT="18288" marB="18288" anchor="t"/>
+                </a:tc>
+              </a:tr>
+              <a:tr h="219456">
+                <a:tc>
+                  <a:txBody>
+                    <a:bodyPr wrap="square"/>
+                    <a:lstStyle/>
+                    <a:p>
+                      <a:pPr algn="r"/>
+                      <a:r>
+                        <a:rPr sz="900" b="0" i="0">
+                          <a:solidFill>
+                            <a:srgbClr val="1A1A1A"/>
+                          </a:solidFill>
+                          <a:latin typeface="Calibri"/>
+                        </a:rPr>
+                        <a:t>431</a:t>
+                      </a:r>
+                    </a:p>
+                  </a:txBody>
+                  <a:tcPr marL="45720" marR="45720" marT="18288" marB="18288" anchor="t"/>
+                </a:tc>
+                <a:tc>
+                  <a:txBody>
+                    <a:bodyPr wrap="square"/>
+                    <a:lstStyle/>
+                    <a:p>
+                      <a:pPr algn="r"/>
+                      <a:r>
+                        <a:rPr sz="900" b="0" i="0">
+                          <a:solidFill>
+                            <a:srgbClr val="1A1A1A"/>
+                          </a:solidFill>
+                          <a:latin typeface="Calibri"/>
+                        </a:rPr>
+                        <a:t>321.5</a:t>
+                      </a:r>
+                    </a:p>
+                  </a:txBody>
+                  <a:tcPr marL="45720" marR="45720" marT="18288" marB="18288" anchor="t"/>
+                </a:tc>
+                <a:tc>
+                  <a:txBody>
+                    <a:bodyPr wrap="square"/>
+                    <a:lstStyle/>
+                    <a:p>
+                      <a:r>
+                        <a:rPr sz="900" b="0" i="0">
+                          <a:solidFill>
+                            <a:srgbClr val="1A1A1A"/>
+                          </a:solidFill>
+                          <a:latin typeface="Calibri"/>
+                        </a:rPr>
+                        <a:t>Fully Automated Deep Learning System for Bone Age Assessment (2017)</a:t>
+                      </a:r>
+                    </a:p>
+                  </a:txBody>
+                  <a:tcPr marL="45720" marR="45720" marT="18288" marB="18288" anchor="t"/>
+                </a:tc>
+                <a:tc>
+                  <a:txBody>
+                    <a:bodyPr wrap="square"/>
+                    <a:lstStyle/>
+                    <a:p>
+                      <a:r>
+                        <a:rPr sz="900" b="0" i="0">
+                          <a:solidFill>
+                            <a:srgbClr val="1A1A1A"/>
+                          </a:solidFill>
+                          <a:latin typeface="Calibri"/>
+                        </a:rPr>
+                        <a:t>Journal of digital imaging</a:t>
+                      </a:r>
+                    </a:p>
+                  </a:txBody>
+                  <a:tcPr marL="45720" marR="45720" marT="18288" marB="18288" anchor="t"/>
+                </a:tc>
+                <a:tc>
+                  <a:txBody>
+                    <a:bodyPr wrap="square"/>
+                    <a:lstStyle/>
+                    <a:p>
+                      <a:r>
+                        <a:rPr sz="900" b="0" i="1">
+                          <a:solidFill>
+                            <a:srgbClr val="1A1A1A"/>
+                          </a:solidFill>
+                          <a:latin typeface="Calibri"/>
+                        </a:rPr>
+                        <a:t>bone age</a:t>
+                      </a:r>
+                      <a:r>
+                        <a:rPr sz="900" b="0" i="0">
+                          <a:solidFill>
+                            <a:srgbClr val="1A1A1A"/>
+                          </a:solidFill>
+                          <a:latin typeface="Calibri"/>
+                        </a:rPr>
+                        <a:t>: Fully automated bone age from hand radiographs</a:t>
+                      </a:r>
+                    </a:p>
+                  </a:txBody>
+                  <a:tcPr marL="45720" marR="45720" marT="18288" marB="18288" anchor="t"/>
+                </a:tc>
+              </a:tr>
+              <a:tr h="356616">
+                <a:tc>
+                  <a:txBody>
+                    <a:bodyPr wrap="square"/>
+                    <a:lstStyle/>
+                    <a:p>
+                      <a:pPr algn="r"/>
+                      <a:r>
+                        <a:rPr sz="900" b="0" i="0">
+                          <a:solidFill>
+                            <a:srgbClr val="1A1A1A"/>
+                          </a:solidFill>
+                          <a:latin typeface="Calibri"/>
+                        </a:rPr>
+                        <a:t>403</a:t>
+                      </a:r>
+                    </a:p>
+                  </a:txBody>
+                  <a:tcPr marL="45720" marR="45720" marT="18288" marB="18288" anchor="t"/>
+                </a:tc>
+                <a:tc>
+                  <a:txBody>
+                    <a:bodyPr wrap="square"/>
+                    <a:lstStyle/>
+                    <a:p>
+                      <a:pPr algn="r"/>
+                      <a:r>
+                        <a:rPr sz="900" b="0" i="0">
+                          <a:solidFill>
+                            <a:srgbClr val="1A1A1A"/>
+                          </a:solidFill>
+                          <a:latin typeface="Calibri"/>
+                        </a:rPr>
+                        <a:t>221.2</a:t>
+                      </a:r>
+                    </a:p>
+                  </a:txBody>
+                  <a:tcPr marL="45720" marR="45720" marT="18288" marB="18288" anchor="t"/>
+                </a:tc>
+                <a:tc>
+                  <a:txBody>
+                    <a:bodyPr wrap="square"/>
+                    <a:lstStyle/>
+                    <a:p>
+                      <a:r>
+                        <a:rPr sz="900" b="0" i="0">
+                          <a:solidFill>
+                            <a:srgbClr val="1A1A1A"/>
+                          </a:solidFill>
+                          <a:latin typeface="Calibri"/>
+                        </a:rPr>
+                        <a:t>Deep learning for automated skeletal bone age assessment in X-ray images (2017)</a:t>
+                      </a:r>
+                    </a:p>
+                  </a:txBody>
+                  <a:tcPr marL="45720" marR="45720" marT="18288" marB="18288" anchor="t"/>
+                </a:tc>
+                <a:tc>
+                  <a:txBody>
+                    <a:bodyPr wrap="square"/>
+                    <a:lstStyle/>
+                    <a:p>
+                      <a:r>
+                        <a:rPr sz="900" b="0" i="0">
+                          <a:solidFill>
+                            <a:srgbClr val="1A1A1A"/>
+                          </a:solidFill>
+                          <a:latin typeface="Calibri"/>
+                        </a:rPr>
+                        <a:t>Medical Image Anal.</a:t>
+                      </a:r>
+                    </a:p>
+                  </a:txBody>
+                  <a:tcPr marL="45720" marR="45720" marT="18288" marB="18288" anchor="t"/>
+                </a:tc>
+                <a:tc>
+                  <a:txBody>
+                    <a:bodyPr wrap="square"/>
+                    <a:lstStyle/>
+                    <a:p>
+                      <a:r>
+                        <a:rPr sz="900" b="0" i="1">
+                          <a:solidFill>
+                            <a:srgbClr val="1A1A1A"/>
+                          </a:solidFill>
+                          <a:latin typeface="Calibri"/>
+                        </a:rPr>
+                        <a:t>bone age</a:t>
+                      </a:r>
+                      <a:r>
+                        <a:rPr sz="900" b="0" i="0">
+                          <a:solidFill>
+                            <a:srgbClr val="1A1A1A"/>
+                          </a:solidFill>
+                          <a:latin typeface="Calibri"/>
+                        </a:rPr>
+                        <a:t>: Deep learning for automated bone age (BoNet)</a:t>
+                      </a:r>
+                    </a:p>
+                  </a:txBody>
+                  <a:tcPr marL="45720" marR="45720" marT="18288" marB="18288" anchor="t"/>
+                </a:tc>
+              </a:tr>
+              <a:tr h="356616">
+                <a:tc>
+                  <a:txBody>
+                    <a:bodyPr wrap="square"/>
+                    <a:lstStyle/>
+                    <a:p>
+                      <a:pPr algn="r"/>
+                      <a:r>
+                        <a:rPr sz="900" b="0" i="0">
+                          <a:solidFill>
+                            <a:srgbClr val="1A1A1A"/>
+                          </a:solidFill>
+                          <a:latin typeface="Calibri"/>
+                        </a:rPr>
+                        <a:t>143</a:t>
+                      </a:r>
+                    </a:p>
+                  </a:txBody>
+                  <a:tcPr marL="45720" marR="45720" marT="18288" marB="18288" anchor="t"/>
+                </a:tc>
+                <a:tc>
+                  <a:txBody>
+                    <a:bodyPr wrap="square"/>
+                    <a:lstStyle/>
+                    <a:p>
+                      <a:pPr algn="r"/>
+                      <a:r>
+                        <a:rPr sz="900" b="0" i="0">
+                          <a:solidFill>
+                            <a:srgbClr val="1A1A1A"/>
+                          </a:solidFill>
+                          <a:latin typeface="Calibri"/>
+                        </a:rPr>
+                        <a:t>73.0</a:t>
+                      </a:r>
+                    </a:p>
+                  </a:txBody>
+                  <a:tcPr marL="45720" marR="45720" marT="18288" marB="18288" anchor="t"/>
+                </a:tc>
+                <a:tc>
+                  <a:txBody>
+                    <a:bodyPr wrap="square"/>
+                    <a:lstStyle/>
+                    <a:p>
+                      <a:r>
+                        <a:rPr sz="900" b="0" i="0">
+                          <a:solidFill>
+                            <a:srgbClr val="1A1A1A"/>
+                          </a:solidFill>
+                          <a:latin typeface="Calibri"/>
+                        </a:rPr>
+                        <a:t>Computerized Bone Age Estimation Using Deep Learning Based Program: Evaluatio... (2017)</a:t>
+                      </a:r>
+                    </a:p>
+                  </a:txBody>
+                  <a:tcPr marL="45720" marR="45720" marT="18288" marB="18288" anchor="t"/>
+                </a:tc>
+                <a:tc>
+                  <a:txBody>
+                    <a:bodyPr wrap="square"/>
+                    <a:lstStyle/>
+                    <a:p>
+                      <a:r>
+                        <a:rPr sz="900" b="0" i="0">
+                          <a:solidFill>
+                            <a:srgbClr val="1A1A1A"/>
+                          </a:solidFill>
+                          <a:latin typeface="Calibri"/>
+                        </a:rPr>
+                        <a:t>AJR. American journal of ro...</a:t>
+                      </a:r>
+                    </a:p>
+                  </a:txBody>
+                  <a:tcPr marL="45720" marR="45720" marT="18288" marB="18288" anchor="t"/>
+                </a:tc>
+                <a:tc>
+                  <a:txBody>
+                    <a:bodyPr wrap="square"/>
+                    <a:lstStyle/>
+                    <a:p>
+                      <a:r>
+                        <a:rPr sz="900" b="0" i="1">
+                          <a:solidFill>
+                            <a:srgbClr val="1A1A1A"/>
+                          </a:solidFill>
+                          <a:latin typeface="Calibri"/>
+                        </a:rPr>
+                        <a:t>bone age</a:t>
+                      </a:r>
+                      <a:r>
+                        <a:rPr sz="900" b="0" i="0">
+                          <a:solidFill>
+                            <a:srgbClr val="1A1A1A"/>
+                          </a:solidFill>
+                          <a:latin typeface="Calibri"/>
+                        </a:rPr>
+                        <a:t>: Is a commercial deep-learning bone-age program accurate and faster in practic...</a:t>
+                      </a:r>
+                    </a:p>
+                  </a:txBody>
+                  <a:tcPr marL="45720" marR="45720" marT="18288" marB="18288" anchor="t"/>
+                </a:tc>
+              </a:tr>
+              <a:tr h="356616">
+                <a:tc>
+                  <a:txBody>
+                    <a:bodyPr wrap="square"/>
+                    <a:lstStyle/>
+                    <a:p>
+                      <a:pPr algn="r"/>
+                      <a:r>
+                        <a:rPr sz="900" b="0" i="0">
+                          <a:solidFill>
+                            <a:srgbClr val="1A1A1A"/>
+                          </a:solidFill>
+                          <a:latin typeface="Calibri"/>
+                        </a:rPr>
+                        <a:t>191</a:t>
+                      </a:r>
+                    </a:p>
+                  </a:txBody>
+                  <a:tcPr marL="45720" marR="45720" marT="18288" marB="18288" anchor="t"/>
+                </a:tc>
+                <a:tc>
+                  <a:txBody>
+                    <a:bodyPr wrap="square"/>
+                    <a:lstStyle/>
+                    <a:p>
+                      <a:pPr algn="r"/>
+                      <a:r>
+                        <a:rPr sz="900" b="0" i="0">
+                          <a:solidFill>
+                            <a:srgbClr val="1A1A1A"/>
+                          </a:solidFill>
+                          <a:latin typeface="Calibri"/>
+                        </a:rPr>
+                        <a:t>57.8</a:t>
+                      </a:r>
+                    </a:p>
+                  </a:txBody>
+                  <a:tcPr marL="45720" marR="45720" marT="18288" marB="18288" anchor="t"/>
+                </a:tc>
+                <a:tc>
+                  <a:txBody>
+                    <a:bodyPr wrap="square"/>
+                    <a:lstStyle/>
+                    <a:p>
+                      <a:r>
+                        <a:rPr sz="900" b="0" i="0">
+                          <a:solidFill>
+                            <a:srgbClr val="1A1A1A"/>
+                          </a:solidFill>
+                          <a:latin typeface="Calibri"/>
+                        </a:rPr>
+                        <a:t>A Review on Deep-Learning Algorithms for Fetal Ultrasound-Image Analysis (2022)</a:t>
+                      </a:r>
+                    </a:p>
+                  </a:txBody>
+                  <a:tcPr marL="45720" marR="45720" marT="18288" marB="18288" anchor="t"/>
+                </a:tc>
+                <a:tc>
+                  <a:txBody>
+                    <a:bodyPr wrap="square"/>
+                    <a:lstStyle/>
+                    <a:p>
+                      <a:r>
+                        <a:rPr sz="900" b="0" i="0">
+                          <a:solidFill>
+                            <a:srgbClr val="1A1A1A"/>
+                          </a:solidFill>
+                          <a:latin typeface="Calibri"/>
+                        </a:rPr>
+                        <a:t>Medical Image Anal.</a:t>
+                      </a:r>
+                    </a:p>
+                  </a:txBody>
+                  <a:tcPr marL="45720" marR="45720" marT="18288" marB="18288" anchor="t"/>
+                </a:tc>
+                <a:tc>
+                  <a:txBody>
+                    <a:bodyPr wrap="square"/>
+                    <a:lstStyle/>
+                    <a:p>
+                      <a:r>
+                        <a:rPr sz="900" b="0" i="1">
+                          <a:solidFill>
+                            <a:srgbClr val="1A1A1A"/>
+                          </a:solidFill>
+                          <a:latin typeface="Calibri"/>
+                        </a:rPr>
+                        <a:t>survey / review</a:t>
+                      </a:r>
+                    </a:p>
+                  </a:txBody>
+                  <a:tcPr marL="45720" marR="45720" marT="18288" marB="18288" anchor="t"/>
+                </a:tc>
+              </a:tr>
+              <a:tr h="356616">
+                <a:tc>
+                  <a:txBody>
+                    <a:bodyPr wrap="square"/>
+                    <a:lstStyle/>
+                    <a:p>
+                      <a:pPr algn="r"/>
+                      <a:r>
+                        <a:rPr sz="900" b="0" i="0">
+                          <a:solidFill>
+                            <a:srgbClr val="1A1A1A"/>
+                          </a:solidFill>
+                          <a:latin typeface="Calibri"/>
+                        </a:rPr>
+                        <a:t>352</a:t>
+                      </a:r>
+                    </a:p>
+                  </a:txBody>
+                  <a:tcPr marL="45720" marR="45720" marT="18288" marB="18288" anchor="t"/>
+                </a:tc>
+                <a:tc>
+                  <a:txBody>
+                    <a:bodyPr wrap="square"/>
+                    <a:lstStyle/>
+                    <a:p>
+                      <a:pPr algn="r"/>
+                      <a:r>
+                        <a:rPr sz="900" b="0" i="0">
+                          <a:solidFill>
+                            <a:srgbClr val="1A1A1A"/>
+                          </a:solidFill>
+                          <a:latin typeface="Calibri"/>
+                        </a:rPr>
+                        <a:t>57.4</a:t>
+                      </a:r>
+                    </a:p>
+                  </a:txBody>
+                  <a:tcPr marL="45720" marR="45720" marT="18288" marB="18288" anchor="t"/>
+                </a:tc>
+                <a:tc>
+                  <a:txBody>
+                    <a:bodyPr wrap="square"/>
+                    <a:lstStyle/>
+                    <a:p>
+                      <a:r>
+                        <a:rPr sz="900" b="0" i="0">
+                          <a:solidFill>
+                            <a:srgbClr val="1A1A1A"/>
+                          </a:solidFill>
+                          <a:latin typeface="Calibri"/>
+                        </a:rPr>
+                        <a:t>Standard Plane Localization in Fetal Ultrasound via Domain Transferred Deep N... (2015)</a:t>
+                      </a:r>
+                    </a:p>
+                  </a:txBody>
+                  <a:tcPr marL="45720" marR="45720" marT="18288" marB="18288" anchor="t"/>
+                </a:tc>
+                <a:tc>
+                  <a:txBody>
+                    <a:bodyPr wrap="square"/>
+                    <a:lstStyle/>
+                    <a:p>
+                      <a:r>
+                        <a:rPr sz="900" b="0" i="0">
+                          <a:solidFill>
+                            <a:srgbClr val="1A1A1A"/>
+                          </a:solidFill>
+                          <a:latin typeface="Calibri"/>
+                        </a:rPr>
+                        <a:t>IEEE journal of biomedical...</a:t>
+                      </a:r>
+                    </a:p>
+                  </a:txBody>
+                  <a:tcPr marL="45720" marR="45720" marT="18288" marB="18288" anchor="t"/>
+                </a:tc>
+                <a:tc>
+                  <a:txBody>
+                    <a:bodyPr wrap="square"/>
+                    <a:lstStyle/>
+                    <a:p>
+                      <a:r>
+                        <a:rPr sz="900" b="0" i="1">
+                          <a:solidFill>
+                            <a:srgbClr val="1A1A1A"/>
+                          </a:solidFill>
+                          <a:latin typeface="Calibri"/>
+                        </a:rPr>
+                        <a:t>fetal MRI</a:t>
+                      </a:r>
+                    </a:p>
+                  </a:txBody>
+                  <a:tcPr marL="45720" marR="45720" marT="18288" marB="18288" anchor="t"/>
+                </a:tc>
+              </a:tr>
+              <a:tr h="356616">
+                <a:tc>
+                  <a:txBody>
+                    <a:bodyPr wrap="square"/>
+                    <a:lstStyle/>
+                    <a:p>
+                      <a:pPr algn="r"/>
+                      <a:r>
+                        <a:rPr sz="900" b="0" i="0">
+                          <a:solidFill>
+                            <a:srgbClr val="1A1A1A"/>
+                          </a:solidFill>
+                          <a:latin typeface="Calibri"/>
+                        </a:rPr>
+                        <a:t>194</a:t>
+                      </a:r>
+                    </a:p>
+                  </a:txBody>
+                  <a:tcPr marL="45720" marR="45720" marT="18288" marB="18288" anchor="t"/>
+                </a:tc>
+                <a:tc>
+                  <a:txBody>
+                    <a:bodyPr wrap="square"/>
+                    <a:lstStyle/>
+                    <a:p>
+                      <a:pPr algn="r"/>
+                      <a:r>
+                        <a:rPr sz="900" b="0" i="0">
+                          <a:solidFill>
+                            <a:srgbClr val="1A1A1A"/>
+                          </a:solidFill>
+                          <a:latin typeface="Calibri"/>
+                        </a:rPr>
+                        <a:t>57.0</a:t>
+                      </a:r>
+                    </a:p>
+                  </a:txBody>
+                  <a:tcPr marL="45720" marR="45720" marT="18288" marB="18288" anchor="t"/>
+                </a:tc>
+                <a:tc>
+                  <a:txBody>
+                    <a:bodyPr wrap="square"/>
+                    <a:lstStyle/>
+                    <a:p>
+                      <a:r>
+                        <a:rPr sz="900" b="0" i="0">
+                          <a:solidFill>
+                            <a:srgbClr val="1A1A1A"/>
+                          </a:solidFill>
+                          <a:latin typeface="Calibri"/>
+                        </a:rPr>
+                        <a:t>Automatic Fetal Ultrasound Standard Plane Recognition Based on Deep Learning... (2021)</a:t>
+                      </a:r>
+                    </a:p>
+                  </a:txBody>
+                  <a:tcPr marL="45720" marR="45720" marT="18288" marB="18288" anchor="t"/>
+                </a:tc>
+                <a:tc>
+                  <a:txBody>
+                    <a:bodyPr wrap="square"/>
+                    <a:lstStyle/>
+                    <a:p>
+                      <a:r>
+                        <a:rPr sz="900" b="0" i="0">
+                          <a:solidFill>
+                            <a:srgbClr val="1A1A1A"/>
+                          </a:solidFill>
+                          <a:latin typeface="Calibri"/>
+                        </a:rPr>
+                        <a:t>IEEE Transactions on Indust...</a:t>
+                      </a:r>
+                    </a:p>
+                  </a:txBody>
+                  <a:tcPr marL="45720" marR="45720" marT="18288" marB="18288" anchor="t"/>
+                </a:tc>
+                <a:tc>
+                  <a:txBody>
+                    <a:bodyPr wrap="square"/>
+                    <a:lstStyle/>
+                    <a:p>
+                      <a:r>
+                        <a:rPr sz="900" b="0" i="1">
+                          <a:solidFill>
+                            <a:srgbClr val="1A1A1A"/>
+                          </a:solidFill>
+                          <a:latin typeface="Calibri"/>
+                        </a:rPr>
+                        <a:t>fetal MRI</a:t>
+                      </a:r>
+                    </a:p>
+                  </a:txBody>
+                  <a:tcPr marL="45720" marR="45720" marT="18288" marB="18288" anchor="t"/>
+                </a:tc>
+              </a:tr>
+              <a:tr h="356616">
+                <a:tc>
+                  <a:txBody>
+                    <a:bodyPr wrap="square"/>
+                    <a:lstStyle/>
+                    <a:p>
+                      <a:pPr algn="r"/>
+                      <a:r>
+                        <a:rPr sz="900" b="0" i="0">
+                          <a:solidFill>
+                            <a:srgbClr val="1A1A1A"/>
+                          </a:solidFill>
+                          <a:latin typeface="Calibri"/>
+                        </a:rPr>
+                        <a:t>233</a:t>
+                      </a:r>
+                    </a:p>
+                  </a:txBody>
+                  <a:tcPr marL="45720" marR="45720" marT="18288" marB="18288" anchor="t"/>
+                </a:tc>
+                <a:tc>
+                  <a:txBody>
+                    <a:bodyPr wrap="square"/>
+                    <a:lstStyle/>
+                    <a:p>
+                      <a:pPr algn="r"/>
+                      <a:r>
+                        <a:rPr sz="900" b="0" i="0">
+                          <a:solidFill>
+                            <a:srgbClr val="1A1A1A"/>
+                          </a:solidFill>
+                          <a:latin typeface="Calibri"/>
+                        </a:rPr>
+                        <a:t>30.3</a:t>
+                      </a:r>
+                    </a:p>
+                  </a:txBody>
+                  <a:tcPr marL="45720" marR="45720" marT="18288" marB="18288" anchor="t"/>
+                </a:tc>
+                <a:tc>
+                  <a:txBody>
+                    <a:bodyPr wrap="square"/>
+                    <a:lstStyle/>
+                    <a:p>
+                      <a:r>
+                        <a:rPr sz="900" b="0" i="0">
+                          <a:solidFill>
+                            <a:srgbClr val="1A1A1A"/>
+                          </a:solidFill>
+                          <a:latin typeface="Calibri"/>
+                        </a:rPr>
+                        <a:t>Evaluation of deep convolutional neural networks for automatic classification... (2020)</a:t>
+                      </a:r>
+                    </a:p>
+                  </a:txBody>
+                  <a:tcPr marL="45720" marR="45720" marT="18288" marB="18288" anchor="t"/>
+                </a:tc>
+                <a:tc>
+                  <a:txBody>
+                    <a:bodyPr wrap="square"/>
+                    <a:lstStyle/>
+                    <a:p>
+                      <a:r>
+                        <a:rPr sz="900" b="0" i="0">
+                          <a:solidFill>
+                            <a:srgbClr val="1A1A1A"/>
+                          </a:solidFill>
+                          <a:latin typeface="Calibri"/>
+                        </a:rPr>
+                        <a:t>Scientific Reports</a:t>
+                      </a:r>
+                    </a:p>
+                  </a:txBody>
+                  <a:tcPr marL="45720" marR="45720" marT="18288" marB="18288" anchor="t"/>
+                </a:tc>
+                <a:tc>
+                  <a:txBody>
+                    <a:bodyPr wrap="square"/>
+                    <a:lstStyle/>
+                    <a:p>
+                      <a:r>
+                        <a:rPr sz="900" b="0" i="1">
+                          <a:solidFill>
+                            <a:srgbClr val="1A1A1A"/>
+                          </a:solidFill>
+                          <a:latin typeface="Calibri"/>
+                        </a:rPr>
+                        <a:t>fetal MRI</a:t>
+                      </a:r>
+                    </a:p>
+                  </a:txBody>
+                  <a:tcPr marL="45720" marR="45720" marT="18288" marB="18288" anchor="t"/>
+                </a:tc>
+              </a:tr>
+              <a:tr h="356616">
+                <a:tc>
+                  <a:txBody>
+                    <a:bodyPr wrap="square"/>
+                    <a:lstStyle/>
+                    <a:p>
+                      <a:pPr algn="r"/>
+                      <a:r>
+                        <a:rPr sz="900" b="0" i="0">
+                          <a:solidFill>
+                            <a:srgbClr val="1A1A1A"/>
+                          </a:solidFill>
+                          <a:latin typeface="Calibri"/>
+                        </a:rPr>
+                        <a:t>458</a:t>
+                      </a:r>
+                    </a:p>
+                  </a:txBody>
+                  <a:tcPr marL="45720" marR="45720" marT="18288" marB="18288" anchor="t"/>
+                </a:tc>
+                <a:tc>
+                  <a:txBody>
+                    <a:bodyPr wrap="square"/>
+                    <a:lstStyle/>
+                    <a:p>
+                      <a:pPr algn="r"/>
+                      <a:r>
+                        <a:rPr sz="900" b="0" i="0">
+                          <a:solidFill>
+                            <a:srgbClr val="1A1A1A"/>
+                          </a:solidFill>
+                          <a:latin typeface="Calibri"/>
+                        </a:rPr>
+                        <a:t>27.0</a:t>
+                      </a:r>
+                    </a:p>
+                  </a:txBody>
+                  <a:tcPr marL="45720" marR="45720" marT="18288" marB="18288" anchor="t"/>
+                </a:tc>
+                <a:tc>
+                  <a:txBody>
+                    <a:bodyPr wrap="square"/>
+                    <a:lstStyle/>
+                    <a:p>
+                      <a:r>
+                        <a:rPr sz="900" b="0" i="0">
+                          <a:solidFill>
+                            <a:srgbClr val="1A1A1A"/>
+                          </a:solidFill>
+                          <a:latin typeface="Calibri"/>
+                        </a:rPr>
+                        <a:t>The RSNA Pediatric Bone Age Machine Learning Challenge. (2019)</a:t>
+                      </a:r>
+                    </a:p>
+                  </a:txBody>
+                  <a:tcPr marL="45720" marR="45720" marT="18288" marB="18288" anchor="t"/>
+                </a:tc>
+                <a:tc>
+                  <a:txBody>
+                    <a:bodyPr wrap="square"/>
+                    <a:lstStyle/>
+                    <a:p>
+                      <a:r>
+                        <a:rPr sz="900" b="0" i="0">
+                          <a:solidFill>
+                            <a:srgbClr val="1A1A1A"/>
+                          </a:solidFill>
+                          <a:latin typeface="Calibri"/>
+                        </a:rPr>
+                        <a:t>Radiology</a:t>
+                      </a:r>
+                    </a:p>
+                  </a:txBody>
+                  <a:tcPr marL="45720" marR="45720" marT="18288" marB="18288" anchor="t"/>
+                </a:tc>
+                <a:tc>
+                  <a:txBody>
+                    <a:bodyPr wrap="square"/>
+                    <a:lstStyle/>
+                    <a:p>
+                      <a:r>
+                        <a:rPr sz="900" b="0" i="1">
+                          <a:solidFill>
+                            <a:srgbClr val="1A1A1A"/>
+                          </a:solidFill>
+                          <a:latin typeface="Calibri"/>
+                        </a:rPr>
+                        <a:t>bone age</a:t>
+                      </a:r>
+                      <a:r>
+                        <a:rPr sz="900" b="0" i="0">
+                          <a:solidFill>
+                            <a:srgbClr val="1A1A1A"/>
+                          </a:solidFill>
+                          <a:latin typeface="Calibri"/>
+                        </a:rPr>
+                        <a:t>: How well can crowdsourced AI estimate bone age? (RSNA challenge, 260 teams)</a:t>
+                      </a:r>
+                    </a:p>
+                  </a:txBody>
+                  <a:tcPr marL="45720" marR="45720" marT="18288" marB="18288" anchor="t"/>
+                </a:tc>
+              </a:tr>
+              <a:tr h="356616">
+                <a:tc>
+                  <a:txBody>
+                    <a:bodyPr wrap="square"/>
+                    <a:lstStyle/>
+                    <a:p>
+                      <a:pPr algn="r"/>
+                      <a:r>
+                        <a:rPr sz="900" b="0" i="0">
+                          <a:solidFill>
+                            <a:srgbClr val="1A1A1A"/>
+                          </a:solidFill>
+                          <a:latin typeface="Calibri"/>
+                        </a:rPr>
+                        <a:t>253</a:t>
+                      </a:r>
+                    </a:p>
+                  </a:txBody>
+                  <a:tcPr marL="45720" marR="45720" marT="18288" marB="18288" anchor="t"/>
+                </a:tc>
+                <a:tc>
+                  <a:txBody>
+                    <a:bodyPr wrap="square"/>
+                    <a:lstStyle/>
+                    <a:p>
+                      <a:pPr algn="r"/>
+                      <a:r>
+                        <a:rPr sz="900" b="0" i="0">
+                          <a:solidFill>
+                            <a:srgbClr val="1A1A1A"/>
+                          </a:solidFill>
+                          <a:latin typeface="Calibri"/>
+                        </a:rPr>
+                        <a:t>25.8</a:t>
+                      </a:r>
+                    </a:p>
+                  </a:txBody>
+                  <a:tcPr marL="45720" marR="45720" marT="18288" marB="18288" anchor="t"/>
+                </a:tc>
+                <a:tc>
+                  <a:txBody>
+                    <a:bodyPr wrap="square"/>
+                    <a:lstStyle/>
+                    <a:p>
+                      <a:r>
+                        <a:rPr sz="900" b="0" i="0">
+                          <a:solidFill>
+                            <a:srgbClr val="1A1A1A"/>
+                          </a:solidFill>
+                          <a:latin typeface="Calibri"/>
+                        </a:rPr>
+                        <a:t>An ensemble of neural networks provides expert-level prenatal detection of co... (2021)</a:t>
+                      </a:r>
+                    </a:p>
+                  </a:txBody>
+                  <a:tcPr marL="45720" marR="45720" marT="18288" marB="18288" anchor="t"/>
+                </a:tc>
+                <a:tc>
+                  <a:txBody>
+                    <a:bodyPr wrap="square"/>
+                    <a:lstStyle/>
+                    <a:p>
+                      <a:r>
+                        <a:rPr sz="900" b="0" i="0">
+                          <a:solidFill>
+                            <a:srgbClr val="1A1A1A"/>
+                          </a:solidFill>
+                          <a:latin typeface="Calibri"/>
+                        </a:rPr>
+                        <a:t>Nature Medicine</a:t>
+                      </a:r>
+                    </a:p>
+                  </a:txBody>
+                  <a:tcPr marL="45720" marR="45720" marT="18288" marB="18288" anchor="t"/>
+                </a:tc>
+                <a:tc>
+                  <a:txBody>
+                    <a:bodyPr wrap="square"/>
+                    <a:lstStyle/>
+                    <a:p>
+                      <a:r>
+                        <a:rPr sz="900" b="0" i="1">
+                          <a:solidFill>
+                            <a:srgbClr val="1A1A1A"/>
+                          </a:solidFill>
+                          <a:latin typeface="Calibri"/>
+                        </a:rPr>
+                        <a:t>detection</a:t>
+                      </a:r>
+                    </a:p>
+                  </a:txBody>
+                  <a:tcPr marL="45720" marR="45720" marT="18288" marB="18288" anchor="t"/>
+                </a:tc>
+              </a:tr>
+            </a:tbl>
+          </a:graphicData>
+        </a:graphic>
+      </p:graphicFrame>
+      <p:sp>
+        <p:nvSpPr>
+          <p:cNvPr id="4" name="TextBox 3"/>
+          <p:cNvSpPr txBox="1"/>
+          <p:nvPr/>
+        </p:nvSpPr>
+        <p:spPr>
+          <a:xfrm>
+            <a:off x="411480" y="4599432"/>
+            <a:ext cx="11368735" cy="405765"/>
+          </a:xfrm>
+          <a:prstGeom prst="rect">
+            <a:avLst/>
+          </a:prstGeom>
+          <a:noFill/>
+        </p:spPr>
+        <p:txBody>
+          <a:bodyPr wrap="square" lIns="45720" rIns="45720" tIns="27432" bIns="27432" anchor="t">
+            <a:spAutoFit/>
+          </a:bodyPr>
+          <a:lstStyle/>
+          <a:p>
+            <a:pPr algn="l">
+              <a:spcAft>
+                <a:spcPts val="315"/>
+              </a:spcAft>
+            </a:pPr>
+            <a:r>
+              <a:rPr sz="900" b="0" i="0">
+                <a:solidFill>
+                  <a:srgbClr val="1A1A1A"/>
+                </a:solidFill>
+                <a:latin typeface="Calibri"/>
+              </a:rPr>
+              <a:t>A different corpus from the systematic-review tables earlier in the deck: this is a citation search of Semantic Scholar over radiology AI with a pediatric title filter, so it includes conference papers and is not screened for eligibility. The review tables rank the screened corpus. Both are shown because neither contains the other.</a:t>
+            </a:r>
+          </a:p>
+        </p:txBody>
+      </p:sp>
+      <p:sp>
+        <p:nvSpPr>
+          <p:cNvPr id="5" name="page number"/>
+          <p:cNvSpPr txBox="1"/>
+          <p:nvPr/>
+        </p:nvSpPr>
+        <p:spPr>
+          <a:xfrm>
+            <a:off x="10728655" y="6510528"/>
+            <a:ext cx="1188720" cy="274320"/>
+          </a:xfrm>
+          <a:prstGeom prst="rect">
+            <a:avLst/>
+          </a:prstGeom>
+          <a:noFill/>
+        </p:spPr>
+        <p:txBody>
+          <a:bodyPr wrap="none">
+            <a:spAutoFit/>
+          </a:bodyPr>
+          <a:lstStyle/>
+          <a:p>
+            <a:pPr algn="r"/>
+            <a:r>
+              <a:rPr sz="1000">
+                <a:solidFill>
+                  <a:srgbClr val="6B6B6B"/>
+                </a:solidFill>
+                <a:latin typeface="Calibri"/>
+              </a:rPr>
+              <a:t>29 / 60</a:t>
             </a:r>
           </a:p>
         </p:txBody>
@@ -18914,7 +19886,43 @@
                 </a:solidFill>
                 <a:latin typeface="Calibri"/>
               </a:rPr>
-              <a:t> (OpenAlex type:preprint: arXiv, medRxiv, bioRxiv, …) counted with the same queries, because PubMed does not index arXiv (4,426 radiology-AI preprints in 2025). </a:t>
+              <a:t> (</a:t>
+            </a:r>
+            <a:r>
+              <a:rPr sz="900" b="1" i="0">
+                <a:solidFill>
+                  <a:srgbClr val="1A1A1A"/>
+                </a:solidFill>
+                <a:latin typeface="Calibri"/>
+              </a:rPr>
+              <a:t>arXiv API</a:t>
+            </a:r>
+            <a:r>
+              <a:rPr sz="900" b="0" i="0">
+                <a:solidFill>
+                  <a:srgbClr val="1A1A1A"/>
+                </a:solidFill>
+                <a:latin typeface="Calibri"/>
+              </a:rPr>
+              <a:t> and </a:t>
+            </a:r>
+            <a:r>
+              <a:rPr sz="900" b="1" i="0">
+                <a:solidFill>
+                  <a:srgbClr val="1A1A1A"/>
+                </a:solidFill>
+                <a:latin typeface="Calibri"/>
+              </a:rPr>
+              <a:t>medRxiv via Europe PMC</a:t>
+            </a:r>
+            <a:r>
+              <a:rPr sz="900" b="0" i="0">
+                <a:solidFill>
+                  <a:srgbClr val="1A1A1A"/>
+                </a:solidFill>
+                <a:latin typeface="Calibri"/>
+              </a:rPr>
+              <a:t>) counted with the same queries, because PubMed does not index arXiv and covers medRxiv only partially (4,777 radiology-AI preprints in 2025). </a:t>
             </a:r>
             <a:r>
               <a:rPr sz="900" b="1" i="0">
@@ -19264,7 +20272,7 @@
                 </a:solidFill>
                 <a:latin typeface="Calibri"/>
               </a:rPr>
-              <a:t>3 / 61</a:t>
+              <a:t>3 / 60</a:t>
             </a:r>
           </a:p>
         </p:txBody>
@@ -19278,1258 +20286,6 @@
 </file>
 
 <file path=ppt/slides/slide30.xml><?xml version="1.0" encoding="utf-8"?>
-<p:sld xmlns:a="http://schemas.openxmlformats.org/drawingml/2006/main" xmlns:p="http://schemas.openxmlformats.org/presentationml/2006/main" xmlns:r="http://schemas.openxmlformats.org/officeDocument/2006/relationships">
-  <p:cSld>
-    <p:spTree>
-      <p:nvGrpSpPr>
-        <p:cNvPr id="1" name=""/>
-        <p:cNvGrpSpPr/>
-        <p:nvPr/>
-      </p:nvGrpSpPr>
-      <p:grpSpPr/>
-      <p:sp>
-        <p:nvSpPr>
-          <p:cNvPr id="2" name="title band"/>
-          <p:cNvSpPr/>
-          <p:nvPr/>
-        </p:nvSpPr>
-        <p:spPr>
-          <a:xfrm>
-            <a:off x="0" y="0"/>
-            <a:ext cx="12191695" cy="713232"/>
-          </a:xfrm>
-          <a:prstGeom prst="rect">
-            <a:avLst/>
-          </a:prstGeom>
-          <a:solidFill>
-            <a:srgbClr val="3333B3"/>
-          </a:solidFill>
-          <a:ln>
-            <a:noFill/>
-          </a:ln>
-        </p:spPr>
-        <p:style>
-          <a:lnRef idx="1">
-            <a:schemeClr val="accent1"/>
-          </a:lnRef>
-          <a:fillRef idx="3">
-            <a:schemeClr val="accent1"/>
-          </a:fillRef>
-          <a:effectRef idx="2">
-            <a:schemeClr val="accent1"/>
-          </a:effectRef>
-          <a:fontRef idx="minor">
-            <a:schemeClr val="lt1"/>
-          </a:fontRef>
-        </p:style>
-        <p:txBody>
-          <a:bodyPr rtlCol="0" anchor="ctr" lIns="411480" wrap="square"/>
-          <a:lstStyle/>
-          <a:p>
-            <a:pPr algn="l"/>
-            <a:r>
-              <a:rPr sz="2200">
-                <a:solidFill>
-                  <a:srgbClr val="FFFFFF"/>
-                </a:solidFill>
-                <a:latin typeface="Calibri"/>
-              </a:rPr>
-              <a:t>Most-cited pediatric radiology AI papers, 2008-2022</a:t>
-            </a:r>
-          </a:p>
-        </p:txBody>
-      </p:sp>
-      <p:graphicFrame>
-        <p:nvGraphicFramePr>
-          <p:cNvPr id="3" name="Table 2"/>
-          <p:cNvGraphicFramePr>
-            <a:graphicFrameLocks noGrp="1"/>
-          </p:cNvGraphicFramePr>
-          <p:nvPr/>
-        </p:nvGraphicFramePr>
-        <p:xfrm>
-          <a:off x="411480" y="877824"/>
-          <a:ext cx="11368734" cy="3648456"/>
-        </p:xfrm>
-        <a:graphic>
-          <a:graphicData uri="http://schemas.openxmlformats.org/drawingml/2006/table">
-            <a:tbl>
-              <a:tblPr firstRow="1" bandRow="1">
-                <a:tableStyleId>{5C22544A-7EE6-4342-B048-85BDC9FD1C3A}</a:tableStyleId>
-              </a:tblPr>
-              <a:tblGrid>
-                <a:gridCol w="685800"/>
-                <a:gridCol w="685800"/>
-                <a:gridCol w="4593278"/>
-                <a:gridCol w="2026446"/>
-                <a:gridCol w="3377410"/>
-              </a:tblGrid>
-              <a:tr h="219456">
-                <a:tc>
-                  <a:txBody>
-                    <a:bodyPr wrap="square"/>
-                    <a:lstStyle/>
-                    <a:p>
-                      <a:pPr algn="r"/>
-                      <a:r>
-                        <a:rPr sz="900" b="1" i="0">
-                          <a:solidFill>
-                            <a:srgbClr val="FFFFFF"/>
-                          </a:solidFill>
-                          <a:latin typeface="Calibri"/>
-                        </a:rPr>
-                        <a:t>Cites</a:t>
-                      </a:r>
-                    </a:p>
-                  </a:txBody>
-                  <a:tcPr marL="45720" marR="45720" marT="18288" marB="18288" anchor="t"/>
-                </a:tc>
-                <a:tc>
-                  <a:txBody>
-                    <a:bodyPr wrap="square"/>
-                    <a:lstStyle/>
-                    <a:p>
-                      <a:pPr algn="r"/>
-                      <a:r>
-                        <a:rPr sz="900" b="1" i="0">
-                          <a:solidFill>
-                            <a:srgbClr val="FFFFFF"/>
-                          </a:solidFill>
-                          <a:latin typeface="Calibri"/>
-                        </a:rPr>
-                        <a:t>FWCI</a:t>
-                      </a:r>
-                    </a:p>
-                  </a:txBody>
-                  <a:tcPr marL="45720" marR="45720" marT="18288" marB="18288" anchor="t"/>
-                </a:tc>
-                <a:tc>
-                  <a:txBody>
-                    <a:bodyPr wrap="square"/>
-                    <a:lstStyle/>
-                    <a:p>
-                      <a:r>
-                        <a:rPr sz="900" b="1" i="0">
-                          <a:solidFill>
-                            <a:srgbClr val="FFFFFF"/>
-                          </a:solidFill>
-                          <a:latin typeface="Calibri"/>
-                        </a:rPr>
-                        <a:t>Paper</a:t>
-                      </a:r>
-                    </a:p>
-                  </a:txBody>
-                  <a:tcPr marL="45720" marR="45720" marT="18288" marB="18288" anchor="t"/>
-                </a:tc>
-                <a:tc>
-                  <a:txBody>
-                    <a:bodyPr wrap="square"/>
-                    <a:lstStyle/>
-                    <a:p>
-                      <a:r>
-                        <a:rPr sz="900" b="1" i="0">
-                          <a:solidFill>
-                            <a:srgbClr val="FFFFFF"/>
-                          </a:solidFill>
-                          <a:latin typeface="Calibri"/>
-                        </a:rPr>
-                        <a:t>Venue</a:t>
-                      </a:r>
-                    </a:p>
-                  </a:txBody>
-                  <a:tcPr marL="45720" marR="45720" marT="18288" marB="18288" anchor="t"/>
-                </a:tc>
-                <a:tc>
-                  <a:txBody>
-                    <a:bodyPr wrap="square"/>
-                    <a:lstStyle/>
-                    <a:p>
-                      <a:r>
-                        <a:rPr sz="900" b="1" i="0">
-                          <a:solidFill>
-                            <a:srgbClr val="FFFFFF"/>
-                          </a:solidFill>
-                          <a:latin typeface="Calibri"/>
-                        </a:rPr>
-                        <a:t>What it answers</a:t>
-                      </a:r>
-                    </a:p>
-                  </a:txBody>
-                  <a:tcPr marL="45720" marR="45720" marT="18288" marB="18288" anchor="t"/>
-                </a:tc>
-              </a:tr>
-              <a:tr h="356616">
-                <a:tc>
-                  <a:txBody>
-                    <a:bodyPr wrap="square"/>
-                    <a:lstStyle/>
-                    <a:p>
-                      <a:pPr algn="r"/>
-                      <a:r>
-                        <a:rPr sz="900" b="0" i="0">
-                          <a:solidFill>
-                            <a:srgbClr val="1A1A1A"/>
-                          </a:solidFill>
-                          <a:latin typeface="Calibri"/>
-                        </a:rPr>
-                        <a:t>426</a:t>
-                      </a:r>
-                    </a:p>
-                  </a:txBody>
-                  <a:tcPr marL="45720" marR="45720" marT="18288" marB="18288" anchor="t"/>
-                </a:tc>
-                <a:tc>
-                  <a:txBody>
-                    <a:bodyPr wrap="square"/>
-                    <a:lstStyle/>
-                    <a:p>
-                      <a:pPr algn="r"/>
-                      <a:r>
-                        <a:rPr sz="900" b="0" i="0">
-                          <a:solidFill>
-                            <a:srgbClr val="1A1A1A"/>
-                          </a:solidFill>
-                          <a:latin typeface="Calibri"/>
-                        </a:rPr>
-                        <a:t>328.6</a:t>
-                      </a:r>
-                    </a:p>
-                  </a:txBody>
-                  <a:tcPr marL="45720" marR="45720" marT="18288" marB="18288" anchor="t"/>
-                </a:tc>
-                <a:tc>
-                  <a:txBody>
-                    <a:bodyPr wrap="square"/>
-                    <a:lstStyle/>
-                    <a:p>
-                      <a:r>
-                        <a:rPr sz="900" b="0" i="0">
-                          <a:solidFill>
-                            <a:srgbClr val="1A1A1A"/>
-                          </a:solidFill>
-                          <a:latin typeface="Calibri"/>
-                        </a:rPr>
-                        <a:t>Performance of a Deep-Learning Neural Network Model in Assessing Skeletal Mat... (2017)</a:t>
-                      </a:r>
-                    </a:p>
-                  </a:txBody>
-                  <a:tcPr marL="45720" marR="45720" marT="18288" marB="18288" anchor="t"/>
-                </a:tc>
-                <a:tc>
-                  <a:txBody>
-                    <a:bodyPr wrap="square"/>
-                    <a:lstStyle/>
-                    <a:p>
-                      <a:r>
-                        <a:rPr sz="900" b="0" i="0">
-                          <a:solidFill>
-                            <a:srgbClr val="1A1A1A"/>
-                          </a:solidFill>
-                          <a:latin typeface="Calibri"/>
-                        </a:rPr>
-                        <a:t>Radiology</a:t>
-                      </a:r>
-                    </a:p>
-                  </a:txBody>
-                  <a:tcPr marL="45720" marR="45720" marT="18288" marB="18288" anchor="t"/>
-                </a:tc>
-                <a:tc>
-                  <a:txBody>
-                    <a:bodyPr wrap="square"/>
-                    <a:lstStyle/>
-                    <a:p>
-                      <a:r>
-                        <a:rPr sz="900" b="0" i="1">
-                          <a:solidFill>
-                            <a:srgbClr val="1A1A1A"/>
-                          </a:solidFill>
-                          <a:latin typeface="Calibri"/>
-                        </a:rPr>
-                        <a:t>bone age</a:t>
-                      </a:r>
-                      <a:r>
-                        <a:rPr sz="900" b="0" i="0">
-                          <a:solidFill>
-                            <a:srgbClr val="1A1A1A"/>
-                          </a:solidFill>
-                          <a:latin typeface="Calibri"/>
-                        </a:rPr>
-                        <a:t>: Can a CNN assess skeletal maturity as accurately as radiologists?</a:t>
-                      </a:r>
-                    </a:p>
-                  </a:txBody>
-                  <a:tcPr marL="45720" marR="45720" marT="18288" marB="18288" anchor="t"/>
-                </a:tc>
-              </a:tr>
-              <a:tr h="219456">
-                <a:tc>
-                  <a:txBody>
-                    <a:bodyPr wrap="square"/>
-                    <a:lstStyle/>
-                    <a:p>
-                      <a:pPr algn="r"/>
-                      <a:r>
-                        <a:rPr sz="900" b="0" i="0">
-                          <a:solidFill>
-                            <a:srgbClr val="1A1A1A"/>
-                          </a:solidFill>
-                          <a:latin typeface="Calibri"/>
-                        </a:rPr>
-                        <a:t>431</a:t>
-                      </a:r>
-                    </a:p>
-                  </a:txBody>
-                  <a:tcPr marL="45720" marR="45720" marT="18288" marB="18288" anchor="t"/>
-                </a:tc>
-                <a:tc>
-                  <a:txBody>
-                    <a:bodyPr wrap="square"/>
-                    <a:lstStyle/>
-                    <a:p>
-                      <a:pPr algn="r"/>
-                      <a:r>
-                        <a:rPr sz="900" b="0" i="0">
-                          <a:solidFill>
-                            <a:srgbClr val="1A1A1A"/>
-                          </a:solidFill>
-                          <a:latin typeface="Calibri"/>
-                        </a:rPr>
-                        <a:t>321.5</a:t>
-                      </a:r>
-                    </a:p>
-                  </a:txBody>
-                  <a:tcPr marL="45720" marR="45720" marT="18288" marB="18288" anchor="t"/>
-                </a:tc>
-                <a:tc>
-                  <a:txBody>
-                    <a:bodyPr wrap="square"/>
-                    <a:lstStyle/>
-                    <a:p>
-                      <a:r>
-                        <a:rPr sz="900" b="0" i="0">
-                          <a:solidFill>
-                            <a:srgbClr val="1A1A1A"/>
-                          </a:solidFill>
-                          <a:latin typeface="Calibri"/>
-                        </a:rPr>
-                        <a:t>Fully Automated Deep Learning System for Bone Age Assessment (2017)</a:t>
-                      </a:r>
-                    </a:p>
-                  </a:txBody>
-                  <a:tcPr marL="45720" marR="45720" marT="18288" marB="18288" anchor="t"/>
-                </a:tc>
-                <a:tc>
-                  <a:txBody>
-                    <a:bodyPr wrap="square"/>
-                    <a:lstStyle/>
-                    <a:p>
-                      <a:r>
-                        <a:rPr sz="900" b="0" i="0">
-                          <a:solidFill>
-                            <a:srgbClr val="1A1A1A"/>
-                          </a:solidFill>
-                          <a:latin typeface="Calibri"/>
-                        </a:rPr>
-                        <a:t>Journal of digital imaging</a:t>
-                      </a:r>
-                    </a:p>
-                  </a:txBody>
-                  <a:tcPr marL="45720" marR="45720" marT="18288" marB="18288" anchor="t"/>
-                </a:tc>
-                <a:tc>
-                  <a:txBody>
-                    <a:bodyPr wrap="square"/>
-                    <a:lstStyle/>
-                    <a:p>
-                      <a:r>
-                        <a:rPr sz="900" b="0" i="1">
-                          <a:solidFill>
-                            <a:srgbClr val="1A1A1A"/>
-                          </a:solidFill>
-                          <a:latin typeface="Calibri"/>
-                        </a:rPr>
-                        <a:t>bone age</a:t>
-                      </a:r>
-                      <a:r>
-                        <a:rPr sz="900" b="0" i="0">
-                          <a:solidFill>
-                            <a:srgbClr val="1A1A1A"/>
-                          </a:solidFill>
-                          <a:latin typeface="Calibri"/>
-                        </a:rPr>
-                        <a:t>: Fully automated bone age from hand radiographs</a:t>
-                      </a:r>
-                    </a:p>
-                  </a:txBody>
-                  <a:tcPr marL="45720" marR="45720" marT="18288" marB="18288" anchor="t"/>
-                </a:tc>
-              </a:tr>
-              <a:tr h="356616">
-                <a:tc>
-                  <a:txBody>
-                    <a:bodyPr wrap="square"/>
-                    <a:lstStyle/>
-                    <a:p>
-                      <a:pPr algn="r"/>
-                      <a:r>
-                        <a:rPr sz="900" b="0" i="0">
-                          <a:solidFill>
-                            <a:srgbClr val="1A1A1A"/>
-                          </a:solidFill>
-                          <a:latin typeface="Calibri"/>
-                        </a:rPr>
-                        <a:t>403</a:t>
-                      </a:r>
-                    </a:p>
-                  </a:txBody>
-                  <a:tcPr marL="45720" marR="45720" marT="18288" marB="18288" anchor="t"/>
-                </a:tc>
-                <a:tc>
-                  <a:txBody>
-                    <a:bodyPr wrap="square"/>
-                    <a:lstStyle/>
-                    <a:p>
-                      <a:pPr algn="r"/>
-                      <a:r>
-                        <a:rPr sz="900" b="0" i="0">
-                          <a:solidFill>
-                            <a:srgbClr val="1A1A1A"/>
-                          </a:solidFill>
-                          <a:latin typeface="Calibri"/>
-                        </a:rPr>
-                        <a:t>221.2</a:t>
-                      </a:r>
-                    </a:p>
-                  </a:txBody>
-                  <a:tcPr marL="45720" marR="45720" marT="18288" marB="18288" anchor="t"/>
-                </a:tc>
-                <a:tc>
-                  <a:txBody>
-                    <a:bodyPr wrap="square"/>
-                    <a:lstStyle/>
-                    <a:p>
-                      <a:r>
-                        <a:rPr sz="900" b="0" i="0">
-                          <a:solidFill>
-                            <a:srgbClr val="1A1A1A"/>
-                          </a:solidFill>
-                          <a:latin typeface="Calibri"/>
-                        </a:rPr>
-                        <a:t>Deep learning for automated skeletal bone age assessment in X-ray images (2017)</a:t>
-                      </a:r>
-                    </a:p>
-                  </a:txBody>
-                  <a:tcPr marL="45720" marR="45720" marT="18288" marB="18288" anchor="t"/>
-                </a:tc>
-                <a:tc>
-                  <a:txBody>
-                    <a:bodyPr wrap="square"/>
-                    <a:lstStyle/>
-                    <a:p>
-                      <a:r>
-                        <a:rPr sz="900" b="0" i="0">
-                          <a:solidFill>
-                            <a:srgbClr val="1A1A1A"/>
-                          </a:solidFill>
-                          <a:latin typeface="Calibri"/>
-                        </a:rPr>
-                        <a:t>Medical Image Anal.</a:t>
-                      </a:r>
-                    </a:p>
-                  </a:txBody>
-                  <a:tcPr marL="45720" marR="45720" marT="18288" marB="18288" anchor="t"/>
-                </a:tc>
-                <a:tc>
-                  <a:txBody>
-                    <a:bodyPr wrap="square"/>
-                    <a:lstStyle/>
-                    <a:p>
-                      <a:r>
-                        <a:rPr sz="900" b="0" i="1">
-                          <a:solidFill>
-                            <a:srgbClr val="1A1A1A"/>
-                          </a:solidFill>
-                          <a:latin typeface="Calibri"/>
-                        </a:rPr>
-                        <a:t>bone age</a:t>
-                      </a:r>
-                      <a:r>
-                        <a:rPr sz="900" b="0" i="0">
-                          <a:solidFill>
-                            <a:srgbClr val="1A1A1A"/>
-                          </a:solidFill>
-                          <a:latin typeface="Calibri"/>
-                        </a:rPr>
-                        <a:t>: Deep learning for automated bone age (BoNet)</a:t>
-                      </a:r>
-                    </a:p>
-                  </a:txBody>
-                  <a:tcPr marL="45720" marR="45720" marT="18288" marB="18288" anchor="t"/>
-                </a:tc>
-              </a:tr>
-              <a:tr h="356616">
-                <a:tc>
-                  <a:txBody>
-                    <a:bodyPr wrap="square"/>
-                    <a:lstStyle/>
-                    <a:p>
-                      <a:pPr algn="r"/>
-                      <a:r>
-                        <a:rPr sz="900" b="0" i="0">
-                          <a:solidFill>
-                            <a:srgbClr val="1A1A1A"/>
-                          </a:solidFill>
-                          <a:latin typeface="Calibri"/>
-                        </a:rPr>
-                        <a:t>143</a:t>
-                      </a:r>
-                    </a:p>
-                  </a:txBody>
-                  <a:tcPr marL="45720" marR="45720" marT="18288" marB="18288" anchor="t"/>
-                </a:tc>
-                <a:tc>
-                  <a:txBody>
-                    <a:bodyPr wrap="square"/>
-                    <a:lstStyle/>
-                    <a:p>
-                      <a:pPr algn="r"/>
-                      <a:r>
-                        <a:rPr sz="900" b="0" i="0">
-                          <a:solidFill>
-                            <a:srgbClr val="1A1A1A"/>
-                          </a:solidFill>
-                          <a:latin typeface="Calibri"/>
-                        </a:rPr>
-                        <a:t>73.0</a:t>
-                      </a:r>
-                    </a:p>
-                  </a:txBody>
-                  <a:tcPr marL="45720" marR="45720" marT="18288" marB="18288" anchor="t"/>
-                </a:tc>
-                <a:tc>
-                  <a:txBody>
-                    <a:bodyPr wrap="square"/>
-                    <a:lstStyle/>
-                    <a:p>
-                      <a:r>
-                        <a:rPr sz="900" b="0" i="0">
-                          <a:solidFill>
-                            <a:srgbClr val="1A1A1A"/>
-                          </a:solidFill>
-                          <a:latin typeface="Calibri"/>
-                        </a:rPr>
-                        <a:t>Computerized Bone Age Estimation Using Deep Learning Based Program: Evaluatio... (2017)</a:t>
-                      </a:r>
-                    </a:p>
-                  </a:txBody>
-                  <a:tcPr marL="45720" marR="45720" marT="18288" marB="18288" anchor="t"/>
-                </a:tc>
-                <a:tc>
-                  <a:txBody>
-                    <a:bodyPr wrap="square"/>
-                    <a:lstStyle/>
-                    <a:p>
-                      <a:r>
-                        <a:rPr sz="900" b="0" i="0">
-                          <a:solidFill>
-                            <a:srgbClr val="1A1A1A"/>
-                          </a:solidFill>
-                          <a:latin typeface="Calibri"/>
-                        </a:rPr>
-                        <a:t>AJR. American journal of ro...</a:t>
-                      </a:r>
-                    </a:p>
-                  </a:txBody>
-                  <a:tcPr marL="45720" marR="45720" marT="18288" marB="18288" anchor="t"/>
-                </a:tc>
-                <a:tc>
-                  <a:txBody>
-                    <a:bodyPr wrap="square"/>
-                    <a:lstStyle/>
-                    <a:p>
-                      <a:r>
-                        <a:rPr sz="900" b="0" i="1">
-                          <a:solidFill>
-                            <a:srgbClr val="1A1A1A"/>
-                          </a:solidFill>
-                          <a:latin typeface="Calibri"/>
-                        </a:rPr>
-                        <a:t>bone age</a:t>
-                      </a:r>
-                      <a:r>
-                        <a:rPr sz="900" b="0" i="0">
-                          <a:solidFill>
-                            <a:srgbClr val="1A1A1A"/>
-                          </a:solidFill>
-                          <a:latin typeface="Calibri"/>
-                        </a:rPr>
-                        <a:t>: Is a commercial deep-learning bone-age program accurate and faster in practic...</a:t>
-                      </a:r>
-                    </a:p>
-                  </a:txBody>
-                  <a:tcPr marL="45720" marR="45720" marT="18288" marB="18288" anchor="t"/>
-                </a:tc>
-              </a:tr>
-              <a:tr h="356616">
-                <a:tc>
-                  <a:txBody>
-                    <a:bodyPr wrap="square"/>
-                    <a:lstStyle/>
-                    <a:p>
-                      <a:pPr algn="r"/>
-                      <a:r>
-                        <a:rPr sz="900" b="0" i="0">
-                          <a:solidFill>
-                            <a:srgbClr val="1A1A1A"/>
-                          </a:solidFill>
-                          <a:latin typeface="Calibri"/>
-                        </a:rPr>
-                        <a:t>191</a:t>
-                      </a:r>
-                    </a:p>
-                  </a:txBody>
-                  <a:tcPr marL="45720" marR="45720" marT="18288" marB="18288" anchor="t"/>
-                </a:tc>
-                <a:tc>
-                  <a:txBody>
-                    <a:bodyPr wrap="square"/>
-                    <a:lstStyle/>
-                    <a:p>
-                      <a:pPr algn="r"/>
-                      <a:r>
-                        <a:rPr sz="900" b="0" i="0">
-                          <a:solidFill>
-                            <a:srgbClr val="1A1A1A"/>
-                          </a:solidFill>
-                          <a:latin typeface="Calibri"/>
-                        </a:rPr>
-                        <a:t>57.8</a:t>
-                      </a:r>
-                    </a:p>
-                  </a:txBody>
-                  <a:tcPr marL="45720" marR="45720" marT="18288" marB="18288" anchor="t"/>
-                </a:tc>
-                <a:tc>
-                  <a:txBody>
-                    <a:bodyPr wrap="square"/>
-                    <a:lstStyle/>
-                    <a:p>
-                      <a:r>
-                        <a:rPr sz="900" b="0" i="0">
-                          <a:solidFill>
-                            <a:srgbClr val="1A1A1A"/>
-                          </a:solidFill>
-                          <a:latin typeface="Calibri"/>
-                        </a:rPr>
-                        <a:t>A Review on Deep-Learning Algorithms for Fetal Ultrasound-Image Analysis (2022)</a:t>
-                      </a:r>
-                    </a:p>
-                  </a:txBody>
-                  <a:tcPr marL="45720" marR="45720" marT="18288" marB="18288" anchor="t"/>
-                </a:tc>
-                <a:tc>
-                  <a:txBody>
-                    <a:bodyPr wrap="square"/>
-                    <a:lstStyle/>
-                    <a:p>
-                      <a:r>
-                        <a:rPr sz="900" b="0" i="0">
-                          <a:solidFill>
-                            <a:srgbClr val="1A1A1A"/>
-                          </a:solidFill>
-                          <a:latin typeface="Calibri"/>
-                        </a:rPr>
-                        <a:t>Medical Image Anal.</a:t>
-                      </a:r>
-                    </a:p>
-                  </a:txBody>
-                  <a:tcPr marL="45720" marR="45720" marT="18288" marB="18288" anchor="t"/>
-                </a:tc>
-                <a:tc>
-                  <a:txBody>
-                    <a:bodyPr wrap="square"/>
-                    <a:lstStyle/>
-                    <a:p>
-                      <a:r>
-                        <a:rPr sz="900" b="0" i="1">
-                          <a:solidFill>
-                            <a:srgbClr val="1A1A1A"/>
-                          </a:solidFill>
-                          <a:latin typeface="Calibri"/>
-                        </a:rPr>
-                        <a:t>survey / review</a:t>
-                      </a:r>
-                    </a:p>
-                  </a:txBody>
-                  <a:tcPr marL="45720" marR="45720" marT="18288" marB="18288" anchor="t"/>
-                </a:tc>
-              </a:tr>
-              <a:tr h="356616">
-                <a:tc>
-                  <a:txBody>
-                    <a:bodyPr wrap="square"/>
-                    <a:lstStyle/>
-                    <a:p>
-                      <a:pPr algn="r"/>
-                      <a:r>
-                        <a:rPr sz="900" b="0" i="0">
-                          <a:solidFill>
-                            <a:srgbClr val="1A1A1A"/>
-                          </a:solidFill>
-                          <a:latin typeface="Calibri"/>
-                        </a:rPr>
-                        <a:t>352</a:t>
-                      </a:r>
-                    </a:p>
-                  </a:txBody>
-                  <a:tcPr marL="45720" marR="45720" marT="18288" marB="18288" anchor="t"/>
-                </a:tc>
-                <a:tc>
-                  <a:txBody>
-                    <a:bodyPr wrap="square"/>
-                    <a:lstStyle/>
-                    <a:p>
-                      <a:pPr algn="r"/>
-                      <a:r>
-                        <a:rPr sz="900" b="0" i="0">
-                          <a:solidFill>
-                            <a:srgbClr val="1A1A1A"/>
-                          </a:solidFill>
-                          <a:latin typeface="Calibri"/>
-                        </a:rPr>
-                        <a:t>57.4</a:t>
-                      </a:r>
-                    </a:p>
-                  </a:txBody>
-                  <a:tcPr marL="45720" marR="45720" marT="18288" marB="18288" anchor="t"/>
-                </a:tc>
-                <a:tc>
-                  <a:txBody>
-                    <a:bodyPr wrap="square"/>
-                    <a:lstStyle/>
-                    <a:p>
-                      <a:r>
-                        <a:rPr sz="900" b="0" i="0">
-                          <a:solidFill>
-                            <a:srgbClr val="1A1A1A"/>
-                          </a:solidFill>
-                          <a:latin typeface="Calibri"/>
-                        </a:rPr>
-                        <a:t>Standard Plane Localization in Fetal Ultrasound via Domain Transferred Deep N... (2015)</a:t>
-                      </a:r>
-                    </a:p>
-                  </a:txBody>
-                  <a:tcPr marL="45720" marR="45720" marT="18288" marB="18288" anchor="t"/>
-                </a:tc>
-                <a:tc>
-                  <a:txBody>
-                    <a:bodyPr wrap="square"/>
-                    <a:lstStyle/>
-                    <a:p>
-                      <a:r>
-                        <a:rPr sz="900" b="0" i="0">
-                          <a:solidFill>
-                            <a:srgbClr val="1A1A1A"/>
-                          </a:solidFill>
-                          <a:latin typeface="Calibri"/>
-                        </a:rPr>
-                        <a:t>IEEE journal of biomedical...</a:t>
-                      </a:r>
-                    </a:p>
-                  </a:txBody>
-                  <a:tcPr marL="45720" marR="45720" marT="18288" marB="18288" anchor="t"/>
-                </a:tc>
-                <a:tc>
-                  <a:txBody>
-                    <a:bodyPr wrap="square"/>
-                    <a:lstStyle/>
-                    <a:p>
-                      <a:r>
-                        <a:rPr sz="900" b="0" i="1">
-                          <a:solidFill>
-                            <a:srgbClr val="1A1A1A"/>
-                          </a:solidFill>
-                          <a:latin typeface="Calibri"/>
-                        </a:rPr>
-                        <a:t>fetal MRI</a:t>
-                      </a:r>
-                    </a:p>
-                  </a:txBody>
-                  <a:tcPr marL="45720" marR="45720" marT="18288" marB="18288" anchor="t"/>
-                </a:tc>
-              </a:tr>
-              <a:tr h="356616">
-                <a:tc>
-                  <a:txBody>
-                    <a:bodyPr wrap="square"/>
-                    <a:lstStyle/>
-                    <a:p>
-                      <a:pPr algn="r"/>
-                      <a:r>
-                        <a:rPr sz="900" b="0" i="0">
-                          <a:solidFill>
-                            <a:srgbClr val="1A1A1A"/>
-                          </a:solidFill>
-                          <a:latin typeface="Calibri"/>
-                        </a:rPr>
-                        <a:t>194</a:t>
-                      </a:r>
-                    </a:p>
-                  </a:txBody>
-                  <a:tcPr marL="45720" marR="45720" marT="18288" marB="18288" anchor="t"/>
-                </a:tc>
-                <a:tc>
-                  <a:txBody>
-                    <a:bodyPr wrap="square"/>
-                    <a:lstStyle/>
-                    <a:p>
-                      <a:pPr algn="r"/>
-                      <a:r>
-                        <a:rPr sz="900" b="0" i="0">
-                          <a:solidFill>
-                            <a:srgbClr val="1A1A1A"/>
-                          </a:solidFill>
-                          <a:latin typeface="Calibri"/>
-                        </a:rPr>
-                        <a:t>57.0</a:t>
-                      </a:r>
-                    </a:p>
-                  </a:txBody>
-                  <a:tcPr marL="45720" marR="45720" marT="18288" marB="18288" anchor="t"/>
-                </a:tc>
-                <a:tc>
-                  <a:txBody>
-                    <a:bodyPr wrap="square"/>
-                    <a:lstStyle/>
-                    <a:p>
-                      <a:r>
-                        <a:rPr sz="900" b="0" i="0">
-                          <a:solidFill>
-                            <a:srgbClr val="1A1A1A"/>
-                          </a:solidFill>
-                          <a:latin typeface="Calibri"/>
-                        </a:rPr>
-                        <a:t>Automatic Fetal Ultrasound Standard Plane Recognition Based on Deep Learning... (2021)</a:t>
-                      </a:r>
-                    </a:p>
-                  </a:txBody>
-                  <a:tcPr marL="45720" marR="45720" marT="18288" marB="18288" anchor="t"/>
-                </a:tc>
-                <a:tc>
-                  <a:txBody>
-                    <a:bodyPr wrap="square"/>
-                    <a:lstStyle/>
-                    <a:p>
-                      <a:r>
-                        <a:rPr sz="900" b="0" i="0">
-                          <a:solidFill>
-                            <a:srgbClr val="1A1A1A"/>
-                          </a:solidFill>
-                          <a:latin typeface="Calibri"/>
-                        </a:rPr>
-                        <a:t>IEEE Transactions on Indust...</a:t>
-                      </a:r>
-                    </a:p>
-                  </a:txBody>
-                  <a:tcPr marL="45720" marR="45720" marT="18288" marB="18288" anchor="t"/>
-                </a:tc>
-                <a:tc>
-                  <a:txBody>
-                    <a:bodyPr wrap="square"/>
-                    <a:lstStyle/>
-                    <a:p>
-                      <a:r>
-                        <a:rPr sz="900" b="0" i="1">
-                          <a:solidFill>
-                            <a:srgbClr val="1A1A1A"/>
-                          </a:solidFill>
-                          <a:latin typeface="Calibri"/>
-                        </a:rPr>
-                        <a:t>fetal MRI</a:t>
-                      </a:r>
-                    </a:p>
-                  </a:txBody>
-                  <a:tcPr marL="45720" marR="45720" marT="18288" marB="18288" anchor="t"/>
-                </a:tc>
-              </a:tr>
-              <a:tr h="356616">
-                <a:tc>
-                  <a:txBody>
-                    <a:bodyPr wrap="square"/>
-                    <a:lstStyle/>
-                    <a:p>
-                      <a:pPr algn="r"/>
-                      <a:r>
-                        <a:rPr sz="900" b="0" i="0">
-                          <a:solidFill>
-                            <a:srgbClr val="1A1A1A"/>
-                          </a:solidFill>
-                          <a:latin typeface="Calibri"/>
-                        </a:rPr>
-                        <a:t>233</a:t>
-                      </a:r>
-                    </a:p>
-                  </a:txBody>
-                  <a:tcPr marL="45720" marR="45720" marT="18288" marB="18288" anchor="t"/>
-                </a:tc>
-                <a:tc>
-                  <a:txBody>
-                    <a:bodyPr wrap="square"/>
-                    <a:lstStyle/>
-                    <a:p>
-                      <a:pPr algn="r"/>
-                      <a:r>
-                        <a:rPr sz="900" b="0" i="0">
-                          <a:solidFill>
-                            <a:srgbClr val="1A1A1A"/>
-                          </a:solidFill>
-                          <a:latin typeface="Calibri"/>
-                        </a:rPr>
-                        <a:t>30.3</a:t>
-                      </a:r>
-                    </a:p>
-                  </a:txBody>
-                  <a:tcPr marL="45720" marR="45720" marT="18288" marB="18288" anchor="t"/>
-                </a:tc>
-                <a:tc>
-                  <a:txBody>
-                    <a:bodyPr wrap="square"/>
-                    <a:lstStyle/>
-                    <a:p>
-                      <a:r>
-                        <a:rPr sz="900" b="0" i="0">
-                          <a:solidFill>
-                            <a:srgbClr val="1A1A1A"/>
-                          </a:solidFill>
-                          <a:latin typeface="Calibri"/>
-                        </a:rPr>
-                        <a:t>Evaluation of deep convolutional neural networks for automatic classification... (2020)</a:t>
-                      </a:r>
-                    </a:p>
-                  </a:txBody>
-                  <a:tcPr marL="45720" marR="45720" marT="18288" marB="18288" anchor="t"/>
-                </a:tc>
-                <a:tc>
-                  <a:txBody>
-                    <a:bodyPr wrap="square"/>
-                    <a:lstStyle/>
-                    <a:p>
-                      <a:r>
-                        <a:rPr sz="900" b="0" i="0">
-                          <a:solidFill>
-                            <a:srgbClr val="1A1A1A"/>
-                          </a:solidFill>
-                          <a:latin typeface="Calibri"/>
-                        </a:rPr>
-                        <a:t>Scientific Reports</a:t>
-                      </a:r>
-                    </a:p>
-                  </a:txBody>
-                  <a:tcPr marL="45720" marR="45720" marT="18288" marB="18288" anchor="t"/>
-                </a:tc>
-                <a:tc>
-                  <a:txBody>
-                    <a:bodyPr wrap="square"/>
-                    <a:lstStyle/>
-                    <a:p>
-                      <a:r>
-                        <a:rPr sz="900" b="0" i="1">
-                          <a:solidFill>
-                            <a:srgbClr val="1A1A1A"/>
-                          </a:solidFill>
-                          <a:latin typeface="Calibri"/>
-                        </a:rPr>
-                        <a:t>fetal MRI</a:t>
-                      </a:r>
-                    </a:p>
-                  </a:txBody>
-                  <a:tcPr marL="45720" marR="45720" marT="18288" marB="18288" anchor="t"/>
-                </a:tc>
-              </a:tr>
-              <a:tr h="356616">
-                <a:tc>
-                  <a:txBody>
-                    <a:bodyPr wrap="square"/>
-                    <a:lstStyle/>
-                    <a:p>
-                      <a:pPr algn="r"/>
-                      <a:r>
-                        <a:rPr sz="900" b="0" i="0">
-                          <a:solidFill>
-                            <a:srgbClr val="1A1A1A"/>
-                          </a:solidFill>
-                          <a:latin typeface="Calibri"/>
-                        </a:rPr>
-                        <a:t>458</a:t>
-                      </a:r>
-                    </a:p>
-                  </a:txBody>
-                  <a:tcPr marL="45720" marR="45720" marT="18288" marB="18288" anchor="t"/>
-                </a:tc>
-                <a:tc>
-                  <a:txBody>
-                    <a:bodyPr wrap="square"/>
-                    <a:lstStyle/>
-                    <a:p>
-                      <a:pPr algn="r"/>
-                      <a:r>
-                        <a:rPr sz="900" b="0" i="0">
-                          <a:solidFill>
-                            <a:srgbClr val="1A1A1A"/>
-                          </a:solidFill>
-                          <a:latin typeface="Calibri"/>
-                        </a:rPr>
-                        <a:t>27.0</a:t>
-                      </a:r>
-                    </a:p>
-                  </a:txBody>
-                  <a:tcPr marL="45720" marR="45720" marT="18288" marB="18288" anchor="t"/>
-                </a:tc>
-                <a:tc>
-                  <a:txBody>
-                    <a:bodyPr wrap="square"/>
-                    <a:lstStyle/>
-                    <a:p>
-                      <a:r>
-                        <a:rPr sz="900" b="0" i="0">
-                          <a:solidFill>
-                            <a:srgbClr val="1A1A1A"/>
-                          </a:solidFill>
-                          <a:latin typeface="Calibri"/>
-                        </a:rPr>
-                        <a:t>The RSNA Pediatric Bone Age Machine Learning Challenge. (2019)</a:t>
-                      </a:r>
-                    </a:p>
-                  </a:txBody>
-                  <a:tcPr marL="45720" marR="45720" marT="18288" marB="18288" anchor="t"/>
-                </a:tc>
-                <a:tc>
-                  <a:txBody>
-                    <a:bodyPr wrap="square"/>
-                    <a:lstStyle/>
-                    <a:p>
-                      <a:r>
-                        <a:rPr sz="900" b="0" i="0">
-                          <a:solidFill>
-                            <a:srgbClr val="1A1A1A"/>
-                          </a:solidFill>
-                          <a:latin typeface="Calibri"/>
-                        </a:rPr>
-                        <a:t>Radiology</a:t>
-                      </a:r>
-                    </a:p>
-                  </a:txBody>
-                  <a:tcPr marL="45720" marR="45720" marT="18288" marB="18288" anchor="t"/>
-                </a:tc>
-                <a:tc>
-                  <a:txBody>
-                    <a:bodyPr wrap="square"/>
-                    <a:lstStyle/>
-                    <a:p>
-                      <a:r>
-                        <a:rPr sz="900" b="0" i="1">
-                          <a:solidFill>
-                            <a:srgbClr val="1A1A1A"/>
-                          </a:solidFill>
-                          <a:latin typeface="Calibri"/>
-                        </a:rPr>
-                        <a:t>bone age</a:t>
-                      </a:r>
-                      <a:r>
-                        <a:rPr sz="900" b="0" i="0">
-                          <a:solidFill>
-                            <a:srgbClr val="1A1A1A"/>
-                          </a:solidFill>
-                          <a:latin typeface="Calibri"/>
-                        </a:rPr>
-                        <a:t>: How well can crowdsourced AI estimate bone age? (RSNA challenge, 260 teams)</a:t>
-                      </a:r>
-                    </a:p>
-                  </a:txBody>
-                  <a:tcPr marL="45720" marR="45720" marT="18288" marB="18288" anchor="t"/>
-                </a:tc>
-              </a:tr>
-              <a:tr h="356616">
-                <a:tc>
-                  <a:txBody>
-                    <a:bodyPr wrap="square"/>
-                    <a:lstStyle/>
-                    <a:p>
-                      <a:pPr algn="r"/>
-                      <a:r>
-                        <a:rPr sz="900" b="0" i="0">
-                          <a:solidFill>
-                            <a:srgbClr val="1A1A1A"/>
-                          </a:solidFill>
-                          <a:latin typeface="Calibri"/>
-                        </a:rPr>
-                        <a:t>253</a:t>
-                      </a:r>
-                    </a:p>
-                  </a:txBody>
-                  <a:tcPr marL="45720" marR="45720" marT="18288" marB="18288" anchor="t"/>
-                </a:tc>
-                <a:tc>
-                  <a:txBody>
-                    <a:bodyPr wrap="square"/>
-                    <a:lstStyle/>
-                    <a:p>
-                      <a:pPr algn="r"/>
-                      <a:r>
-                        <a:rPr sz="900" b="0" i="0">
-                          <a:solidFill>
-                            <a:srgbClr val="1A1A1A"/>
-                          </a:solidFill>
-                          <a:latin typeface="Calibri"/>
-                        </a:rPr>
-                        <a:t>25.8</a:t>
-                      </a:r>
-                    </a:p>
-                  </a:txBody>
-                  <a:tcPr marL="45720" marR="45720" marT="18288" marB="18288" anchor="t"/>
-                </a:tc>
-                <a:tc>
-                  <a:txBody>
-                    <a:bodyPr wrap="square"/>
-                    <a:lstStyle/>
-                    <a:p>
-                      <a:r>
-                        <a:rPr sz="900" b="0" i="0">
-                          <a:solidFill>
-                            <a:srgbClr val="1A1A1A"/>
-                          </a:solidFill>
-                          <a:latin typeface="Calibri"/>
-                        </a:rPr>
-                        <a:t>An ensemble of neural networks provides expert-level prenatal detection of co... (2021)</a:t>
-                      </a:r>
-                    </a:p>
-                  </a:txBody>
-                  <a:tcPr marL="45720" marR="45720" marT="18288" marB="18288" anchor="t"/>
-                </a:tc>
-                <a:tc>
-                  <a:txBody>
-                    <a:bodyPr wrap="square"/>
-                    <a:lstStyle/>
-                    <a:p>
-                      <a:r>
-                        <a:rPr sz="900" b="0" i="0">
-                          <a:solidFill>
-                            <a:srgbClr val="1A1A1A"/>
-                          </a:solidFill>
-                          <a:latin typeface="Calibri"/>
-                        </a:rPr>
-                        <a:t>Nature Medicine</a:t>
-                      </a:r>
-                    </a:p>
-                  </a:txBody>
-                  <a:tcPr marL="45720" marR="45720" marT="18288" marB="18288" anchor="t"/>
-                </a:tc>
-                <a:tc>
-                  <a:txBody>
-                    <a:bodyPr wrap="square"/>
-                    <a:lstStyle/>
-                    <a:p>
-                      <a:r>
-                        <a:rPr sz="900" b="0" i="1">
-                          <a:solidFill>
-                            <a:srgbClr val="1A1A1A"/>
-                          </a:solidFill>
-                          <a:latin typeface="Calibri"/>
-                        </a:rPr>
-                        <a:t>detection</a:t>
-                      </a:r>
-                    </a:p>
-                  </a:txBody>
-                  <a:tcPr marL="45720" marR="45720" marT="18288" marB="18288" anchor="t"/>
-                </a:tc>
-              </a:tr>
-            </a:tbl>
-          </a:graphicData>
-        </a:graphic>
-      </p:graphicFrame>
-      <p:sp>
-        <p:nvSpPr>
-          <p:cNvPr id="4" name="TextBox 3"/>
-          <p:cNvSpPr txBox="1"/>
-          <p:nvPr/>
-        </p:nvSpPr>
-        <p:spPr>
-          <a:xfrm>
-            <a:off x="411480" y="4599432"/>
-            <a:ext cx="11368735" cy="405765"/>
-          </a:xfrm>
-          <a:prstGeom prst="rect">
-            <a:avLst/>
-          </a:prstGeom>
-          <a:noFill/>
-        </p:spPr>
-        <p:txBody>
-          <a:bodyPr wrap="square" lIns="45720" rIns="45720" tIns="27432" bIns="27432" anchor="t">
-            <a:spAutoFit/>
-          </a:bodyPr>
-          <a:lstStyle/>
-          <a:p>
-            <a:pPr algn="l">
-              <a:spcAft>
-                <a:spcPts val="315"/>
-              </a:spcAft>
-            </a:pPr>
-            <a:r>
-              <a:rPr sz="900" b="0" i="0">
-                <a:solidFill>
-                  <a:srgbClr val="1A1A1A"/>
-                </a:solidFill>
-                <a:latin typeface="Calibri"/>
-              </a:rPr>
-              <a:t>A different corpus from the systematic-review tables earlier in the deck: this is a citation search of Semantic Scholar over radiology AI with a pediatric title filter, so it includes conference papers and is not screened for eligibility. The review tables rank the screened corpus. Both are shown because neither contains the other.</a:t>
-            </a:r>
-          </a:p>
-        </p:txBody>
-      </p:sp>
-      <p:sp>
-        <p:nvSpPr>
-          <p:cNvPr id="5" name="page number"/>
-          <p:cNvSpPr txBox="1"/>
-          <p:nvPr/>
-        </p:nvSpPr>
-        <p:spPr>
-          <a:xfrm>
-            <a:off x="10728655" y="6510528"/>
-            <a:ext cx="1188720" cy="274320"/>
-          </a:xfrm>
-          <a:prstGeom prst="rect">
-            <a:avLst/>
-          </a:prstGeom>
-          <a:noFill/>
-        </p:spPr>
-        <p:txBody>
-          <a:bodyPr wrap="none">
-            <a:spAutoFit/>
-          </a:bodyPr>
-          <a:lstStyle/>
-          <a:p>
-            <a:pPr algn="r"/>
-            <a:r>
-              <a:rPr sz="1000">
-                <a:solidFill>
-                  <a:srgbClr val="6B6B6B"/>
-                </a:solidFill>
-                <a:latin typeface="Calibri"/>
-              </a:rPr>
-              <a:t>30 / 61</a:t>
-            </a:r>
-          </a:p>
-        </p:txBody>
-      </p:sp>
-    </p:spTree>
-  </p:cSld>
-  <p:clrMapOvr>
-    <a:masterClrMapping/>
-  </p:clrMapOvr>
-</p:sld>
-</file>
-
-<file path=ppt/slides/slide31.xml><?xml version="1.0" encoding="utf-8"?>
 <p:sld xmlns:a="http://schemas.openxmlformats.org/drawingml/2006/main" xmlns:p="http://schemas.openxmlformats.org/presentationml/2006/main" xmlns:r="http://schemas.openxmlformats.org/officeDocument/2006/relationships">
   <p:cSld>
     <p:spTree>
@@ -21741,7 +21497,7 @@
                 </a:solidFill>
                 <a:latin typeface="Calibri"/>
               </a:rPr>
-              <a:t>31 / 61</a:t>
+              <a:t>30 / 60</a:t>
             </a:r>
           </a:p>
         </p:txBody>
@@ -21754,7 +21510,7 @@
 </p:sld>
 </file>
 
-<file path=ppt/slides/slide32.xml><?xml version="1.0" encoding="utf-8"?>
+<file path=ppt/slides/slide31.xml><?xml version="1.0" encoding="utf-8"?>
 <p:sld xmlns:a="http://schemas.openxmlformats.org/drawingml/2006/main" xmlns:p="http://schemas.openxmlformats.org/presentationml/2006/main" xmlns:r="http://schemas.openxmlformats.org/officeDocument/2006/relationships">
   <p:cSld>
     <p:spTree>
@@ -22927,7 +22683,7 @@
                 </a:solidFill>
                 <a:latin typeface="Calibri"/>
               </a:rPr>
-              <a:t>32 / 61</a:t>
+              <a:t>31 / 60</a:t>
             </a:r>
           </a:p>
         </p:txBody>
@@ -22940,7 +22696,7 @@
 </p:sld>
 </file>
 
-<file path=ppt/slides/slide33.xml><?xml version="1.0" encoding="utf-8"?>
+<file path=ppt/slides/slide32.xml><?xml version="1.0" encoding="utf-8"?>
 <p:sld xmlns:a="http://schemas.openxmlformats.org/drawingml/2006/main" xmlns:p="http://schemas.openxmlformats.org/presentationml/2006/main" xmlns:r="http://schemas.openxmlformats.org/officeDocument/2006/relationships">
   <p:cSld>
     <p:spTree>
@@ -24104,7 +23860,7 @@
                 </a:solidFill>
                 <a:latin typeface="Calibri"/>
               </a:rPr>
-              <a:t>33 / 61</a:t>
+              <a:t>32 / 60</a:t>
             </a:r>
           </a:p>
         </p:txBody>
@@ -24117,7 +23873,7 @@
 </p:sld>
 </file>
 
-<file path=ppt/slides/slide34.xml><?xml version="1.0" encoding="utf-8"?>
+<file path=ppt/slides/slide33.xml><?xml version="1.0" encoding="utf-8"?>
 <p:sld xmlns:a="http://schemas.openxmlformats.org/drawingml/2006/main" xmlns:p="http://schemas.openxmlformats.org/presentationml/2006/main" xmlns:r="http://schemas.openxmlformats.org/officeDocument/2006/relationships">
   <p:cSld>
     <p:spTree>
@@ -25365,7 +25121,7 @@
                 </a:solidFill>
                 <a:latin typeface="Calibri"/>
               </a:rPr>
-              <a:t>34 / 61</a:t>
+              <a:t>33 / 60</a:t>
             </a:r>
           </a:p>
         </p:txBody>
@@ -25378,7 +25134,7 @@
 </p:sld>
 </file>
 
-<file path=ppt/slides/slide35.xml><?xml version="1.0" encoding="utf-8"?>
+<file path=ppt/slides/slide34.xml><?xml version="1.0" encoding="utf-8"?>
 <p:sld xmlns:a="http://schemas.openxmlformats.org/drawingml/2006/main" xmlns:p="http://schemas.openxmlformats.org/presentationml/2006/main" xmlns:r="http://schemas.openxmlformats.org/officeDocument/2006/relationships">
   <p:cSld>
     <p:spTree>
@@ -26586,7 +26342,7 @@
                 </a:solidFill>
                 <a:latin typeface="Calibri"/>
               </a:rPr>
-              <a:t>35 / 61</a:t>
+              <a:t>34 / 60</a:t>
             </a:r>
           </a:p>
         </p:txBody>
@@ -26599,7 +26355,7 @@
 </p:sld>
 </file>
 
-<file path=ppt/slides/slide36.xml><?xml version="1.0" encoding="utf-8"?>
+<file path=ppt/slides/slide35.xml><?xml version="1.0" encoding="utf-8"?>
 <p:sld xmlns:a="http://schemas.openxmlformats.org/drawingml/2006/main" xmlns:p="http://schemas.openxmlformats.org/presentationml/2006/main" xmlns:r="http://schemas.openxmlformats.org/officeDocument/2006/relationships">
   <p:cSld>
     <p:spTree>
@@ -27807,7 +27563,7 @@
                 </a:solidFill>
                 <a:latin typeface="Calibri"/>
               </a:rPr>
-              <a:t>36 / 61</a:t>
+              <a:t>35 / 60</a:t>
             </a:r>
           </a:p>
         </p:txBody>
@@ -27820,7 +27576,7 @@
 </p:sld>
 </file>
 
-<file path=ppt/slides/slide37.xml><?xml version="1.0" encoding="utf-8"?>
+<file path=ppt/slides/slide36.xml><?xml version="1.0" encoding="utf-8"?>
 <p:sld xmlns:a="http://schemas.openxmlformats.org/drawingml/2006/main" xmlns:p="http://schemas.openxmlformats.org/presentationml/2006/main" xmlns:r="http://schemas.openxmlformats.org/officeDocument/2006/relationships">
   <p:cSld>
     <p:spTree>
@@ -29028,7 +28784,7 @@
                 </a:solidFill>
                 <a:latin typeface="Calibri"/>
               </a:rPr>
-              <a:t>37 / 61</a:t>
+              <a:t>36 / 60</a:t>
             </a:r>
           </a:p>
         </p:txBody>
@@ -29041,7 +28797,7 @@
 </p:sld>
 </file>
 
-<file path=ppt/slides/slide38.xml><?xml version="1.0" encoding="utf-8"?>
+<file path=ppt/slides/slide37.xml><?xml version="1.0" encoding="utf-8"?>
 <p:sld xmlns:a="http://schemas.openxmlformats.org/drawingml/2006/main" xmlns:p="http://schemas.openxmlformats.org/presentationml/2006/main" xmlns:r="http://schemas.openxmlformats.org/officeDocument/2006/relationships">
   <p:cSld>
     <p:spTree>
@@ -30249,7 +30005,7 @@
                 </a:solidFill>
                 <a:latin typeface="Calibri"/>
               </a:rPr>
-              <a:t>38 / 61</a:t>
+              <a:t>37 / 60</a:t>
             </a:r>
           </a:p>
         </p:txBody>
@@ -30262,7 +30018,7 @@
 </p:sld>
 </file>
 
-<file path=ppt/slides/slide39.xml><?xml version="1.0" encoding="utf-8"?>
+<file path=ppt/slides/slide38.xml><?xml version="1.0" encoding="utf-8"?>
 <p:sld xmlns:a="http://schemas.openxmlformats.org/drawingml/2006/main" xmlns:p="http://schemas.openxmlformats.org/presentationml/2006/main" xmlns:r="http://schemas.openxmlformats.org/officeDocument/2006/relationships">
   <p:cSld>
     <p:spTree>
@@ -31470,7 +31226,7 @@
                 </a:solidFill>
                 <a:latin typeface="Calibri"/>
               </a:rPr>
-              <a:t>39 / 61</a:t>
+              <a:t>38 / 60</a:t>
             </a:r>
           </a:p>
         </p:txBody>
@@ -31483,136 +31239,7 @@
 </p:sld>
 </file>
 
-<file path=ppt/slides/slide4.xml><?xml version="1.0" encoding="utf-8"?>
-<p:sld xmlns:a="http://schemas.openxmlformats.org/drawingml/2006/main" xmlns:p="http://schemas.openxmlformats.org/presentationml/2006/main" xmlns:r="http://schemas.openxmlformats.org/officeDocument/2006/relationships">
-  <p:cSld>
-    <p:spTree>
-      <p:nvGrpSpPr>
-        <p:cNvPr id="1" name=""/>
-        <p:cNvGrpSpPr/>
-        <p:nvPr/>
-      </p:nvGrpSpPr>
-      <p:grpSpPr/>
-      <p:sp>
-        <p:nvSpPr>
-          <p:cNvPr id="2" name="title band"/>
-          <p:cNvSpPr/>
-          <p:nvPr/>
-        </p:nvSpPr>
-        <p:spPr>
-          <a:xfrm>
-            <a:off x="0" y="0"/>
-            <a:ext cx="12191695" cy="713232"/>
-          </a:xfrm>
-          <a:prstGeom prst="rect">
-            <a:avLst/>
-          </a:prstGeom>
-          <a:solidFill>
-            <a:srgbClr val="3333B3"/>
-          </a:solidFill>
-          <a:ln>
-            <a:noFill/>
-          </a:ln>
-        </p:spPr>
-        <p:style>
-          <a:lnRef idx="1">
-            <a:schemeClr val="accent1"/>
-          </a:lnRef>
-          <a:fillRef idx="3">
-            <a:schemeClr val="accent1"/>
-          </a:fillRef>
-          <a:effectRef idx="2">
-            <a:schemeClr val="accent1"/>
-          </a:effectRef>
-          <a:fontRef idx="minor">
-            <a:schemeClr val="lt1"/>
-          </a:fontRef>
-        </p:style>
-        <p:txBody>
-          <a:bodyPr rtlCol="0" anchor="ctr" lIns="411480" wrap="square"/>
-          <a:lstStyle/>
-          <a:p>
-            <a:pPr algn="l"/>
-            <a:r>
-              <a:rPr sz="2200">
-                <a:solidFill>
-                  <a:srgbClr val="FFFFFF"/>
-                </a:solidFill>
-                <a:latin typeface="Calibri"/>
-              </a:rPr>
-              <a:t>Radiology AI publication counts</a:t>
-            </a:r>
-          </a:p>
-        </p:txBody>
-      </p:sp>
-      <p:pic>
-        <p:nvPicPr>
-          <p:cNvPr id="3" name="radiology_ai_trend" descr="radiology_ai_trend.png"/>
-          <p:cNvPicPr>
-            <a:picLocks noChangeAspect="1"/>
-          </p:cNvPicPr>
-          <p:nvPr/>
-        </p:nvPicPr>
-        <p:blipFill>
-          <a:blip r:embed="rId2"/>
-          <a:stretch>
-            <a:fillRect/>
-          </a:stretch>
-        </p:blipFill>
-        <p:spPr>
-          <a:xfrm>
-            <a:off x="2053468" y="877824"/>
-            <a:ext cx="8084758" cy="4491532"/>
-          </a:xfrm>
-          <a:prstGeom prst="rect">
-            <a:avLst/>
-          </a:prstGeom>
-        </p:spPr>
-      </p:pic>
-      <p:sp>
-        <p:nvSpPr>
-          <p:cNvPr id="4" name="page number"/>
-          <p:cNvSpPr txBox="1"/>
-          <p:nvPr/>
-        </p:nvSpPr>
-        <p:spPr>
-          <a:xfrm>
-            <a:off x="10728655" y="6510528"/>
-            <a:ext cx="1188720" cy="274320"/>
-          </a:xfrm>
-          <a:prstGeom prst="rect">
-            <a:avLst/>
-          </a:prstGeom>
-          <a:noFill/>
-        </p:spPr>
-        <p:txBody>
-          <a:bodyPr wrap="none">
-            <a:spAutoFit/>
-          </a:bodyPr>
-          <a:lstStyle/>
-          <a:p>
-            <a:pPr algn="r"/>
-            <a:r>
-              <a:rPr sz="1000">
-                <a:solidFill>
-                  <a:srgbClr val="6B6B6B"/>
-                </a:solidFill>
-                <a:latin typeface="Calibri"/>
-              </a:rPr>
-              <a:t>4 / 61</a:t>
-            </a:r>
-          </a:p>
-        </p:txBody>
-      </p:sp>
-    </p:spTree>
-  </p:cSld>
-  <p:clrMapOvr>
-    <a:masterClrMapping/>
-  </p:clrMapOvr>
-</p:sld>
-</file>
-
-<file path=ppt/slides/slide40.xml><?xml version="1.0" encoding="utf-8"?>
+<file path=ppt/slides/slide39.xml><?xml version="1.0" encoding="utf-8"?>
 <p:sld xmlns:a="http://schemas.openxmlformats.org/drawingml/2006/main" xmlns:p="http://schemas.openxmlformats.org/presentationml/2006/main" xmlns:r="http://schemas.openxmlformats.org/officeDocument/2006/relationships">
   <p:cSld>
     <p:spTree>
@@ -32820,7 +32447,7 @@
                 </a:solidFill>
                 <a:latin typeface="Calibri"/>
               </a:rPr>
-              <a:t>40 / 61</a:t>
+              <a:t>39 / 60</a:t>
             </a:r>
           </a:p>
         </p:txBody>
@@ -32833,7 +32460,136 @@
 </p:sld>
 </file>
 
-<file path=ppt/slides/slide41.xml><?xml version="1.0" encoding="utf-8"?>
+<file path=ppt/slides/slide4.xml><?xml version="1.0" encoding="utf-8"?>
+<p:sld xmlns:a="http://schemas.openxmlformats.org/drawingml/2006/main" xmlns:p="http://schemas.openxmlformats.org/presentationml/2006/main" xmlns:r="http://schemas.openxmlformats.org/officeDocument/2006/relationships">
+  <p:cSld>
+    <p:spTree>
+      <p:nvGrpSpPr>
+        <p:cNvPr id="1" name=""/>
+        <p:cNvGrpSpPr/>
+        <p:nvPr/>
+      </p:nvGrpSpPr>
+      <p:grpSpPr/>
+      <p:sp>
+        <p:nvSpPr>
+          <p:cNvPr id="2" name="title band"/>
+          <p:cNvSpPr/>
+          <p:nvPr/>
+        </p:nvSpPr>
+        <p:spPr>
+          <a:xfrm>
+            <a:off x="0" y="0"/>
+            <a:ext cx="12191695" cy="713232"/>
+          </a:xfrm>
+          <a:prstGeom prst="rect">
+            <a:avLst/>
+          </a:prstGeom>
+          <a:solidFill>
+            <a:srgbClr val="3333B3"/>
+          </a:solidFill>
+          <a:ln>
+            <a:noFill/>
+          </a:ln>
+        </p:spPr>
+        <p:style>
+          <a:lnRef idx="1">
+            <a:schemeClr val="accent1"/>
+          </a:lnRef>
+          <a:fillRef idx="3">
+            <a:schemeClr val="accent1"/>
+          </a:fillRef>
+          <a:effectRef idx="2">
+            <a:schemeClr val="accent1"/>
+          </a:effectRef>
+          <a:fontRef idx="minor">
+            <a:schemeClr val="lt1"/>
+          </a:fontRef>
+        </p:style>
+        <p:txBody>
+          <a:bodyPr rtlCol="0" anchor="ctr" lIns="411480" wrap="square"/>
+          <a:lstStyle/>
+          <a:p>
+            <a:pPr algn="l"/>
+            <a:r>
+              <a:rPr sz="2200">
+                <a:solidFill>
+                  <a:srgbClr val="FFFFFF"/>
+                </a:solidFill>
+                <a:latin typeface="Calibri"/>
+              </a:rPr>
+              <a:t>Radiology AI publication counts</a:t>
+            </a:r>
+          </a:p>
+        </p:txBody>
+      </p:sp>
+      <p:pic>
+        <p:nvPicPr>
+          <p:cNvPr id="3" name="radiology_ai_trend" descr="radiology_ai_trend.png"/>
+          <p:cNvPicPr>
+            <a:picLocks noChangeAspect="1"/>
+          </p:cNvPicPr>
+          <p:nvPr/>
+        </p:nvPicPr>
+        <p:blipFill>
+          <a:blip r:embed="rId2"/>
+          <a:stretch>
+            <a:fillRect/>
+          </a:stretch>
+        </p:blipFill>
+        <p:spPr>
+          <a:xfrm>
+            <a:off x="2053468" y="877824"/>
+            <a:ext cx="8084758" cy="4491532"/>
+          </a:xfrm>
+          <a:prstGeom prst="rect">
+            <a:avLst/>
+          </a:prstGeom>
+        </p:spPr>
+      </p:pic>
+      <p:sp>
+        <p:nvSpPr>
+          <p:cNvPr id="4" name="page number"/>
+          <p:cNvSpPr txBox="1"/>
+          <p:nvPr/>
+        </p:nvSpPr>
+        <p:spPr>
+          <a:xfrm>
+            <a:off x="10728655" y="6510528"/>
+            <a:ext cx="1188720" cy="274320"/>
+          </a:xfrm>
+          <a:prstGeom prst="rect">
+            <a:avLst/>
+          </a:prstGeom>
+          <a:noFill/>
+        </p:spPr>
+        <p:txBody>
+          <a:bodyPr wrap="none">
+            <a:spAutoFit/>
+          </a:bodyPr>
+          <a:lstStyle/>
+          <a:p>
+            <a:pPr algn="r"/>
+            <a:r>
+              <a:rPr sz="1000">
+                <a:solidFill>
+                  <a:srgbClr val="6B6B6B"/>
+                </a:solidFill>
+                <a:latin typeface="Calibri"/>
+              </a:rPr>
+              <a:t>4 / 60</a:t>
+            </a:r>
+          </a:p>
+        </p:txBody>
+      </p:sp>
+    </p:spTree>
+  </p:cSld>
+  <p:clrMapOvr>
+    <a:masterClrMapping/>
+  </p:clrMapOvr>
+</p:sld>
+</file>
+
+<file path=ppt/slides/slide40.xml><?xml version="1.0" encoding="utf-8"?>
 <p:sld xmlns:a="http://schemas.openxmlformats.org/drawingml/2006/main" xmlns:p="http://schemas.openxmlformats.org/presentationml/2006/main" xmlns:r="http://schemas.openxmlformats.org/officeDocument/2006/relationships">
   <p:cSld>
     <p:spTree>
@@ -34041,7 +33797,7 @@
                 </a:solidFill>
                 <a:latin typeface="Calibri"/>
               </a:rPr>
-              <a:t>41 / 61</a:t>
+              <a:t>40 / 60</a:t>
             </a:r>
           </a:p>
         </p:txBody>
@@ -34054,7 +33810,7 @@
 </p:sld>
 </file>
 
-<file path=ppt/slides/slide42.xml><?xml version="1.0" encoding="utf-8"?>
+<file path=ppt/slides/slide41.xml><?xml version="1.0" encoding="utf-8"?>
 <p:sld xmlns:a="http://schemas.openxmlformats.org/drawingml/2006/main" xmlns:p="http://schemas.openxmlformats.org/presentationml/2006/main" xmlns:r="http://schemas.openxmlformats.org/officeDocument/2006/relationships">
   <p:cSld>
     <p:spTree>
@@ -35262,7 +35018,7 @@
                 </a:solidFill>
                 <a:latin typeface="Calibri"/>
               </a:rPr>
-              <a:t>42 / 61</a:t>
+              <a:t>41 / 60</a:t>
             </a:r>
           </a:p>
         </p:txBody>
@@ -35275,7 +35031,7 @@
 </p:sld>
 </file>
 
-<file path=ppt/slides/slide43.xml><?xml version="1.0" encoding="utf-8"?>
+<file path=ppt/slides/slide42.xml><?xml version="1.0" encoding="utf-8"?>
 <p:sld xmlns:a="http://schemas.openxmlformats.org/drawingml/2006/main" xmlns:p="http://schemas.openxmlformats.org/presentationml/2006/main" xmlns:r="http://schemas.openxmlformats.org/officeDocument/2006/relationships">
   <p:cSld>
     <p:spTree>
@@ -35391,7 +35147,7 @@
                 </a:solidFill>
                 <a:latin typeface="Calibri"/>
               </a:rPr>
-              <a:t>43 / 61</a:t>
+              <a:t>42 / 60</a:t>
             </a:r>
           </a:p>
         </p:txBody>
@@ -35404,7 +35160,7 @@
 </p:sld>
 </file>
 
-<file path=ppt/slides/slide44.xml><?xml version="1.0" encoding="utf-8"?>
+<file path=ppt/slides/slide43.xml><?xml version="1.0" encoding="utf-8"?>
 <p:sld xmlns:a="http://schemas.openxmlformats.org/drawingml/2006/main" xmlns:p="http://schemas.openxmlformats.org/presentationml/2006/main" xmlns:r="http://schemas.openxmlformats.org/officeDocument/2006/relationships">
   <p:cSld>
     <p:spTree>
@@ -35829,7 +35585,7 @@
                 </a:solidFill>
                 <a:latin typeface="Calibri"/>
               </a:rPr>
-              <a:t>44 / 61</a:t>
+              <a:t>43 / 60</a:t>
             </a:r>
           </a:p>
         </p:txBody>
@@ -35842,7 +35598,7 @@
 </p:sld>
 </file>
 
-<file path=ppt/slides/slide45.xml><?xml version="1.0" encoding="utf-8"?>
+<file path=ppt/slides/slide44.xml><?xml version="1.0" encoding="utf-8"?>
 <p:sld xmlns:a="http://schemas.openxmlformats.org/drawingml/2006/main" xmlns:p="http://schemas.openxmlformats.org/presentationml/2006/main" xmlns:r="http://schemas.openxmlformats.org/officeDocument/2006/relationships">
   <p:cSld>
     <p:spTree>
@@ -36267,7 +36023,7 @@
                 </a:solidFill>
                 <a:latin typeface="Calibri"/>
               </a:rPr>
-              <a:t>45 / 61</a:t>
+              <a:t>44 / 60</a:t>
             </a:r>
           </a:p>
         </p:txBody>
@@ -36280,7 +36036,7 @@
 </p:sld>
 </file>
 
-<file path=ppt/slides/slide46.xml><?xml version="1.0" encoding="utf-8"?>
+<file path=ppt/slides/slide45.xml><?xml version="1.0" encoding="utf-8"?>
 <p:sld xmlns:a="http://schemas.openxmlformats.org/drawingml/2006/main" xmlns:p="http://schemas.openxmlformats.org/presentationml/2006/main" xmlns:r="http://schemas.openxmlformats.org/officeDocument/2006/relationships">
   <p:cSld>
     <p:spTree>
@@ -36705,7 +36461,7 @@
                 </a:solidFill>
                 <a:latin typeface="Calibri"/>
               </a:rPr>
-              <a:t>46 / 61</a:t>
+              <a:t>45 / 60</a:t>
             </a:r>
           </a:p>
         </p:txBody>
@@ -36718,7 +36474,7 @@
 </p:sld>
 </file>
 
-<file path=ppt/slides/slide47.xml><?xml version="1.0" encoding="utf-8"?>
+<file path=ppt/slides/slide46.xml><?xml version="1.0" encoding="utf-8"?>
 <p:sld xmlns:a="http://schemas.openxmlformats.org/drawingml/2006/main" xmlns:p="http://schemas.openxmlformats.org/presentationml/2006/main" xmlns:r="http://schemas.openxmlformats.org/officeDocument/2006/relationships">
   <p:cSld>
     <p:spTree>
@@ -37143,7 +36899,7 @@
                 </a:solidFill>
                 <a:latin typeface="Calibri"/>
               </a:rPr>
-              <a:t>47 / 61</a:t>
+              <a:t>46 / 60</a:t>
             </a:r>
           </a:p>
         </p:txBody>
@@ -37156,7 +36912,7 @@
 </p:sld>
 </file>
 
-<file path=ppt/slides/slide48.xml><?xml version="1.0" encoding="utf-8"?>
+<file path=ppt/slides/slide47.xml><?xml version="1.0" encoding="utf-8"?>
 <p:sld xmlns:a="http://schemas.openxmlformats.org/drawingml/2006/main" xmlns:p="http://schemas.openxmlformats.org/presentationml/2006/main" xmlns:r="http://schemas.openxmlformats.org/officeDocument/2006/relationships">
   <p:cSld>
     <p:spTree>
@@ -37581,7 +37337,7 @@
                 </a:solidFill>
                 <a:latin typeface="Calibri"/>
               </a:rPr>
-              <a:t>48 / 61</a:t>
+              <a:t>47 / 60</a:t>
             </a:r>
           </a:p>
         </p:txBody>
@@ -37594,7 +37350,7 @@
 </p:sld>
 </file>
 
-<file path=ppt/slides/slide49.xml><?xml version="1.0" encoding="utf-8"?>
+<file path=ppt/slides/slide48.xml><?xml version="1.0" encoding="utf-8"?>
 <p:sld xmlns:a="http://schemas.openxmlformats.org/drawingml/2006/main" xmlns:p="http://schemas.openxmlformats.org/presentationml/2006/main" xmlns:r="http://schemas.openxmlformats.org/officeDocument/2006/relationships">
   <p:cSld>
     <p:spTree>
@@ -38019,7 +37775,136 @@
                 </a:solidFill>
                 <a:latin typeface="Calibri"/>
               </a:rPr>
-              <a:t>49 / 61</a:t>
+              <a:t>48 / 60</a:t>
+            </a:r>
+          </a:p>
+        </p:txBody>
+      </p:sp>
+    </p:spTree>
+  </p:cSld>
+  <p:clrMapOvr>
+    <a:masterClrMapping/>
+  </p:clrMapOvr>
+</p:sld>
+</file>
+
+<file path=ppt/slides/slide49.xml><?xml version="1.0" encoding="utf-8"?>
+<p:sld xmlns:a="http://schemas.openxmlformats.org/drawingml/2006/main" xmlns:p="http://schemas.openxmlformats.org/presentationml/2006/main" xmlns:r="http://schemas.openxmlformats.org/officeDocument/2006/relationships">
+  <p:cSld>
+    <p:spTree>
+      <p:nvGrpSpPr>
+        <p:cNvPr id="1" name=""/>
+        <p:cNvGrpSpPr/>
+        <p:nvPr/>
+      </p:nvGrpSpPr>
+      <p:grpSpPr/>
+      <p:sp>
+        <p:nvSpPr>
+          <p:cNvPr id="2" name="title band"/>
+          <p:cNvSpPr/>
+          <p:nvPr/>
+        </p:nvSpPr>
+        <p:spPr>
+          <a:xfrm>
+            <a:off x="0" y="0"/>
+            <a:ext cx="12191695" cy="713232"/>
+          </a:xfrm>
+          <a:prstGeom prst="rect">
+            <a:avLst/>
+          </a:prstGeom>
+          <a:solidFill>
+            <a:srgbClr val="3333B3"/>
+          </a:solidFill>
+          <a:ln>
+            <a:noFill/>
+          </a:ln>
+        </p:spPr>
+        <p:style>
+          <a:lnRef idx="1">
+            <a:schemeClr val="accent1"/>
+          </a:lnRef>
+          <a:fillRef idx="3">
+            <a:schemeClr val="accent1"/>
+          </a:fillRef>
+          <a:effectRef idx="2">
+            <a:schemeClr val="accent1"/>
+          </a:effectRef>
+          <a:fontRef idx="minor">
+            <a:schemeClr val="lt1"/>
+          </a:fontRef>
+        </p:style>
+        <p:txBody>
+          <a:bodyPr rtlCol="0" anchor="ctr" lIns="411480" wrap="square"/>
+          <a:lstStyle/>
+          <a:p>
+            <a:pPr algn="l"/>
+            <a:r>
+              <a:rPr sz="2200">
+                <a:solidFill>
+                  <a:srgbClr val="FFFFFF"/>
+                </a:solidFill>
+                <a:latin typeface="Calibri"/>
+              </a:rPr>
+              <a:t>Newsletters — radiology AI stories, all ages</a:t>
+            </a:r>
+          </a:p>
+        </p:txBody>
+      </p:sp>
+      <p:pic>
+        <p:nvPicPr>
+          <p:cNvPr id="3" name="newsletter_radiology_ai" descr="newsletter_radiology_ai.png"/>
+          <p:cNvPicPr>
+            <a:picLocks noChangeAspect="1"/>
+          </p:cNvPicPr>
+          <p:nvPr/>
+        </p:nvPicPr>
+        <p:blipFill>
+          <a:blip r:embed="rId2"/>
+          <a:stretch>
+            <a:fillRect/>
+          </a:stretch>
+        </p:blipFill>
+        <p:spPr>
+          <a:xfrm>
+            <a:off x="1952408" y="877824"/>
+            <a:ext cx="8286878" cy="4603821"/>
+          </a:xfrm>
+          <a:prstGeom prst="rect">
+            <a:avLst/>
+          </a:prstGeom>
+        </p:spPr>
+      </p:pic>
+      <p:sp>
+        <p:nvSpPr>
+          <p:cNvPr id="4" name="page number"/>
+          <p:cNvSpPr txBox="1"/>
+          <p:nvPr/>
+        </p:nvSpPr>
+        <p:spPr>
+          <a:xfrm>
+            <a:off x="10728655" y="6510528"/>
+            <a:ext cx="1188720" cy="274320"/>
+          </a:xfrm>
+          <a:prstGeom prst="rect">
+            <a:avLst/>
+          </a:prstGeom>
+          <a:noFill/>
+        </p:spPr>
+        <p:txBody>
+          <a:bodyPr wrap="none">
+            <a:spAutoFit/>
+          </a:bodyPr>
+          <a:lstStyle/>
+          <a:p>
+            <a:pPr algn="r"/>
+            <a:r>
+              <a:rPr sz="1000">
+                <a:solidFill>
+                  <a:srgbClr val="6B6B6B"/>
+                </a:solidFill>
+                <a:latin typeface="Calibri"/>
+              </a:rPr>
+              <a:t>49 / 60</a:t>
             </a:r>
           </a:p>
         </p:txBody>
@@ -38089,14 +37974,14 @@
                 </a:solidFill>
                 <a:latin typeface="Calibri"/>
               </a:rPr>
-              <a:t>Radiology AI publications, stratified by modality and task</a:t>
+              <a:t>Pediatric radiology AI publications, stratified by modality and task</a:t>
             </a:r>
           </a:p>
         </p:txBody>
       </p:sp>
       <p:pic>
         <p:nvPicPr>
-          <p:cNvPr id="3" name="modality_by_task" descr="modality_by_task.png"/>
+          <p:cNvPr id="3" name="ped_modality_by_task" descr="ped_modality_by_task.png"/>
           <p:cNvPicPr>
             <a:picLocks noChangeAspect="1"/>
           </p:cNvPicPr>
@@ -38152,7 +38037,7 @@
                 </a:solidFill>
                 <a:latin typeface="Calibri"/>
               </a:rPr>
-              <a:t>Bar = percentage of radiology-AI papers (123,413 = 98,842 PubMed + 24,571 preprints, 2008–present) whose title/abstract names the modality; segments = which task terms those papers use (overlapping). What each task means, by what the model produces:</a:t>
+              <a:t>Same construction, restricted to the pediatric subset (10,737 papers incl. 596 preprints). Top pediatric modalities: MRI 41%, CT 16%, ultrasound 13%, x-ray / radiography 12%. Mammography is omitted: its 79 pediatric-query hits (of 10,737) are adult breast-imaging papers whose abstracts mention children.</a:t>
             </a:r>
           </a:p>
         </p:txBody>
@@ -38490,7 +38375,7 @@
                 </a:solidFill>
                 <a:latin typeface="Calibri"/>
               </a:rPr>
-              <a:t>5 / 61</a:t>
+              <a:t>5 / 60</a:t>
             </a:r>
           </a:p>
         </p:txBody>
@@ -38504,135 +38389,6 @@
 </file>
 
 <file path=ppt/slides/slide50.xml><?xml version="1.0" encoding="utf-8"?>
-<p:sld xmlns:a="http://schemas.openxmlformats.org/drawingml/2006/main" xmlns:p="http://schemas.openxmlformats.org/presentationml/2006/main" xmlns:r="http://schemas.openxmlformats.org/officeDocument/2006/relationships">
-  <p:cSld>
-    <p:spTree>
-      <p:nvGrpSpPr>
-        <p:cNvPr id="1" name=""/>
-        <p:cNvGrpSpPr/>
-        <p:nvPr/>
-      </p:nvGrpSpPr>
-      <p:grpSpPr/>
-      <p:sp>
-        <p:nvSpPr>
-          <p:cNvPr id="2" name="title band"/>
-          <p:cNvSpPr/>
-          <p:nvPr/>
-        </p:nvSpPr>
-        <p:spPr>
-          <a:xfrm>
-            <a:off x="0" y="0"/>
-            <a:ext cx="12191695" cy="713232"/>
-          </a:xfrm>
-          <a:prstGeom prst="rect">
-            <a:avLst/>
-          </a:prstGeom>
-          <a:solidFill>
-            <a:srgbClr val="3333B3"/>
-          </a:solidFill>
-          <a:ln>
-            <a:noFill/>
-          </a:ln>
-        </p:spPr>
-        <p:style>
-          <a:lnRef idx="1">
-            <a:schemeClr val="accent1"/>
-          </a:lnRef>
-          <a:fillRef idx="3">
-            <a:schemeClr val="accent1"/>
-          </a:fillRef>
-          <a:effectRef idx="2">
-            <a:schemeClr val="accent1"/>
-          </a:effectRef>
-          <a:fontRef idx="minor">
-            <a:schemeClr val="lt1"/>
-          </a:fontRef>
-        </p:style>
-        <p:txBody>
-          <a:bodyPr rtlCol="0" anchor="ctr" lIns="411480" wrap="square"/>
-          <a:lstStyle/>
-          <a:p>
-            <a:pPr algn="l"/>
-            <a:r>
-              <a:rPr sz="2200">
-                <a:solidFill>
-                  <a:srgbClr val="FFFFFF"/>
-                </a:solidFill>
-                <a:latin typeface="Calibri"/>
-              </a:rPr>
-              <a:t>Newsletters — radiology AI stories, all ages</a:t>
-            </a:r>
-          </a:p>
-        </p:txBody>
-      </p:sp>
-      <p:pic>
-        <p:nvPicPr>
-          <p:cNvPr id="3" name="newsletter_radiology_ai" descr="newsletter_radiology_ai.png"/>
-          <p:cNvPicPr>
-            <a:picLocks noChangeAspect="1"/>
-          </p:cNvPicPr>
-          <p:nvPr/>
-        </p:nvPicPr>
-        <p:blipFill>
-          <a:blip r:embed="rId2"/>
-          <a:stretch>
-            <a:fillRect/>
-          </a:stretch>
-        </p:blipFill>
-        <p:spPr>
-          <a:xfrm>
-            <a:off x="1952408" y="877824"/>
-            <a:ext cx="8286878" cy="4603821"/>
-          </a:xfrm>
-          <a:prstGeom prst="rect">
-            <a:avLst/>
-          </a:prstGeom>
-        </p:spPr>
-      </p:pic>
-      <p:sp>
-        <p:nvSpPr>
-          <p:cNvPr id="4" name="page number"/>
-          <p:cNvSpPr txBox="1"/>
-          <p:nvPr/>
-        </p:nvSpPr>
-        <p:spPr>
-          <a:xfrm>
-            <a:off x="10728655" y="6510528"/>
-            <a:ext cx="1188720" cy="274320"/>
-          </a:xfrm>
-          <a:prstGeom prst="rect">
-            <a:avLst/>
-          </a:prstGeom>
-          <a:noFill/>
-        </p:spPr>
-        <p:txBody>
-          <a:bodyPr wrap="none">
-            <a:spAutoFit/>
-          </a:bodyPr>
-          <a:lstStyle/>
-          <a:p>
-            <a:pPr algn="r"/>
-            <a:r>
-              <a:rPr sz="1000">
-                <a:solidFill>
-                  <a:srgbClr val="6B6B6B"/>
-                </a:solidFill>
-                <a:latin typeface="Calibri"/>
-              </a:rPr>
-              <a:t>50 / 61</a:t>
-            </a:r>
-          </a:p>
-        </p:txBody>
-      </p:sp>
-    </p:spTree>
-  </p:cSld>
-  <p:clrMapOvr>
-    <a:masterClrMapping/>
-  </p:clrMapOvr>
-</p:sld>
-</file>
-
-<file path=ppt/slides/slide51.xml><?xml version="1.0" encoding="utf-8"?>
 <p:sld xmlns:a="http://schemas.openxmlformats.org/drawingml/2006/main" xmlns:p="http://schemas.openxmlformats.org/presentationml/2006/main" xmlns:r="http://schemas.openxmlformats.org/officeDocument/2006/relationships">
   <p:cSld>
     <p:spTree>
@@ -38748,7 +38504,7 @@
                 </a:solidFill>
                 <a:latin typeface="Calibri"/>
               </a:rPr>
-              <a:t>51 / 61</a:t>
+              <a:t>50 / 60</a:t>
             </a:r>
           </a:p>
         </p:txBody>
@@ -38761,7 +38517,7 @@
 </p:sld>
 </file>
 
-<file path=ppt/slides/slide52.xml><?xml version="1.0" encoding="utf-8"?>
+<file path=ppt/slides/slide51.xml><?xml version="1.0" encoding="utf-8"?>
 <p:sld xmlns:a="http://schemas.openxmlformats.org/drawingml/2006/main" xmlns:p="http://schemas.openxmlformats.org/presentationml/2006/main" xmlns:r="http://schemas.openxmlformats.org/officeDocument/2006/relationships">
   <p:cSld>
     <p:spTree>
@@ -40515,7 +40271,7 @@
                 </a:solidFill>
                 <a:latin typeface="Calibri"/>
               </a:rPr>
-              <a:t>52 / 61</a:t>
+              <a:t>51 / 60</a:t>
             </a:r>
           </a:p>
         </p:txBody>
@@ -40528,7 +40284,7 @@
 </p:sld>
 </file>
 
-<file path=ppt/slides/slide53.xml><?xml version="1.0" encoding="utf-8"?>
+<file path=ppt/slides/slide52.xml><?xml version="1.0" encoding="utf-8"?>
 <p:sld xmlns:a="http://schemas.openxmlformats.org/drawingml/2006/main" xmlns:p="http://schemas.openxmlformats.org/presentationml/2006/main" xmlns:r="http://schemas.openxmlformats.org/officeDocument/2006/relationships">
   <p:cSld>
     <p:spTree>
@@ -42414,7 +42170,7 @@
                 </a:solidFill>
                 <a:latin typeface="Calibri"/>
               </a:rPr>
-              <a:t>53 / 61</a:t>
+              <a:t>52 / 60</a:t>
             </a:r>
           </a:p>
         </p:txBody>
@@ -42427,7 +42183,7 @@
 </p:sld>
 </file>
 
-<file path=ppt/slides/slide54.xml><?xml version="1.0" encoding="utf-8"?>
+<file path=ppt/slides/slide53.xml><?xml version="1.0" encoding="utf-8"?>
 <p:sld xmlns:a="http://schemas.openxmlformats.org/drawingml/2006/main" xmlns:p="http://schemas.openxmlformats.org/presentationml/2006/main" xmlns:r="http://schemas.openxmlformats.org/officeDocument/2006/relationships">
   <p:cSld>
     <p:spTree>
@@ -44085,7 +43841,7 @@
                 </a:solidFill>
                 <a:latin typeface="Calibri"/>
               </a:rPr>
-              <a:t>54 / 61</a:t>
+              <a:t>53 / 60</a:t>
             </a:r>
           </a:p>
         </p:txBody>
@@ -44098,7 +43854,7 @@
 </p:sld>
 </file>
 
-<file path=ppt/slides/slide55.xml><?xml version="1.0" encoding="utf-8"?>
+<file path=ppt/slides/slide54.xml><?xml version="1.0" encoding="utf-8"?>
 <p:sld xmlns:a="http://schemas.openxmlformats.org/drawingml/2006/main" xmlns:p="http://schemas.openxmlformats.org/presentationml/2006/main" xmlns:r="http://schemas.openxmlformats.org/officeDocument/2006/relationships">
   <p:cSld>
     <p:spTree>
@@ -45182,7 +44938,7 @@
                 </a:solidFill>
                 <a:latin typeface="Calibri"/>
               </a:rPr>
-              <a:t>55 / 61</a:t>
+              <a:t>54 / 60</a:t>
             </a:r>
           </a:p>
         </p:txBody>
@@ -45195,7 +44951,7 @@
 </p:sld>
 </file>
 
-<file path=ppt/slides/slide56.xml><?xml version="1.0" encoding="utf-8"?>
+<file path=ppt/slides/slide55.xml><?xml version="1.0" encoding="utf-8"?>
 <p:sld xmlns:a="http://schemas.openxmlformats.org/drawingml/2006/main" xmlns:p="http://schemas.openxmlformats.org/presentationml/2006/main" xmlns:r="http://schemas.openxmlformats.org/officeDocument/2006/relationships">
   <p:cSld>
     <p:spTree>
@@ -46367,7 +46123,7 @@
                 </a:solidFill>
                 <a:latin typeface="Calibri"/>
               </a:rPr>
-              <a:t>56 / 61</a:t>
+              <a:t>55 / 60</a:t>
             </a:r>
           </a:p>
         </p:txBody>
@@ -46380,7 +46136,7 @@
 </p:sld>
 </file>
 
-<file path=ppt/slides/slide57.xml><?xml version="1.0" encoding="utf-8"?>
+<file path=ppt/slides/slide56.xml><?xml version="1.0" encoding="utf-8"?>
 <p:sld xmlns:a="http://schemas.openxmlformats.org/drawingml/2006/main" xmlns:p="http://schemas.openxmlformats.org/presentationml/2006/main" xmlns:r="http://schemas.openxmlformats.org/officeDocument/2006/relationships">
   <p:cSld>
     <p:spTree>
@@ -46755,7 +46511,7 @@
                 </a:solidFill>
                 <a:latin typeface="Calibri"/>
               </a:rPr>
-              <a:t>57 / 61</a:t>
+              <a:t>56 / 60</a:t>
             </a:r>
           </a:p>
         </p:txBody>
@@ -46768,7 +46524,7 @@
 </p:sld>
 </file>
 
-<file path=ppt/slides/slide58.xml><?xml version="1.0" encoding="utf-8"?>
+<file path=ppt/slides/slide57.xml><?xml version="1.0" encoding="utf-8"?>
 <p:sld xmlns:a="http://schemas.openxmlformats.org/drawingml/2006/main" xmlns:p="http://schemas.openxmlformats.org/presentationml/2006/main" xmlns:r="http://schemas.openxmlformats.org/officeDocument/2006/relationships">
   <p:cSld>
     <p:spTree>
@@ -46874,7 +46630,7 @@
                 </a:solidFill>
                 <a:latin typeface="Calibri"/>
               </a:rPr>
-              <a:t> Detection / diagnosis is the bulk of the literature (45% of radiology-AI papers, 46% of pediatric); in adults it has become deployed worklist triage, the largest block of the 1,164 FDA-listed radiology AI devices.</a:t>
+              <a:t> Detection / diagnosis is the bulk of the literature (44% of radiology-AI papers, 46% of pediatric); in adults it has become deployed worklist triage, the largest block of the 1,164 FDA-listed radiology AI devices.</a:t>
             </a:r>
           </a:p>
           <a:p>
@@ -46926,7 +46682,7 @@
                 </a:solidFill>
                 <a:latin typeface="Calibri"/>
               </a:rPr>
-              <a:t> Reconstruction / imputation is 23% of radiology AI and 12% of pediatric work; deep-learning reconstruction is on today's scanners and cut pediatric CT dose by about half at equal or better image quality.</a:t>
+              <a:t> Reconstruction / imputation is 22% of radiology AI and 12% of pediatric work; deep-learning reconstruction is on today's scanners and cut pediatric CT dose by about half at equal or better image quality.</a:t>
             </a:r>
           </a:p>
           <a:p>
@@ -46987,7 +46743,7 @@
                 </a:solidFill>
                 <a:latin typeface="Calibri"/>
               </a:rPr>
-              <a:t>58 / 61</a:t>
+              <a:t>57 / 60</a:t>
             </a:r>
           </a:p>
         </p:txBody>
@@ -47000,7 +46756,7 @@
 </p:sld>
 </file>
 
-<file path=ppt/slides/slide59.xml><?xml version="1.0" encoding="utf-8"?>
+<file path=ppt/slides/slide58.xml><?xml version="1.0" encoding="utf-8"?>
 <p:sld xmlns:a="http://schemas.openxmlformats.org/drawingml/2006/main" xmlns:p="http://schemas.openxmlformats.org/presentationml/2006/main" xmlns:r="http://schemas.openxmlformats.org/officeDocument/2006/relationships">
   <p:cSld>
     <p:spTree>
@@ -47106,7 +46862,7 @@
                 </a:solidFill>
                 <a:latin typeface="Calibri"/>
               </a:rPr>
-              <a:t>: 7.2% of radiology-AI papers (3.9% pediatric); segment-anything style tools (MedSAM) and generalist radiology models are replacing task-specific training.</a:t>
+              <a:t>: 7.2% of radiology-AI papers (4.0% pediatric); segment-anything style tools (MedSAM) and generalist radiology models are replacing task-specific training.</a:t>
             </a:r>
           </a:p>
           <a:p>
@@ -47245,7 +47001,7 @@
                 </a:solidFill>
                 <a:latin typeface="Calibri"/>
               </a:rPr>
-              <a:t>59 / 61</a:t>
+              <a:t>58 / 60</a:t>
             </a:r>
           </a:p>
         </p:txBody>
@@ -47258,478 +47014,7 @@
 </p:sld>
 </file>
 
-<file path=ppt/slides/slide6.xml><?xml version="1.0" encoding="utf-8"?>
-<p:sld xmlns:a="http://schemas.openxmlformats.org/drawingml/2006/main" xmlns:p="http://schemas.openxmlformats.org/presentationml/2006/main" xmlns:r="http://schemas.openxmlformats.org/officeDocument/2006/relationships">
-  <p:cSld>
-    <p:spTree>
-      <p:nvGrpSpPr>
-        <p:cNvPr id="1" name=""/>
-        <p:cNvGrpSpPr/>
-        <p:nvPr/>
-      </p:nvGrpSpPr>
-      <p:grpSpPr/>
-      <p:sp>
-        <p:nvSpPr>
-          <p:cNvPr id="2" name="title band"/>
-          <p:cNvSpPr/>
-          <p:nvPr/>
-        </p:nvSpPr>
-        <p:spPr>
-          <a:xfrm>
-            <a:off x="0" y="0"/>
-            <a:ext cx="12191695" cy="713232"/>
-          </a:xfrm>
-          <a:prstGeom prst="rect">
-            <a:avLst/>
-          </a:prstGeom>
-          <a:solidFill>
-            <a:srgbClr val="3333B3"/>
-          </a:solidFill>
-          <a:ln>
-            <a:noFill/>
-          </a:ln>
-        </p:spPr>
-        <p:style>
-          <a:lnRef idx="1">
-            <a:schemeClr val="accent1"/>
-          </a:lnRef>
-          <a:fillRef idx="3">
-            <a:schemeClr val="accent1"/>
-          </a:fillRef>
-          <a:effectRef idx="2">
-            <a:schemeClr val="accent1"/>
-          </a:effectRef>
-          <a:fontRef idx="minor">
-            <a:schemeClr val="lt1"/>
-          </a:fontRef>
-        </p:style>
-        <p:txBody>
-          <a:bodyPr rtlCol="0" anchor="ctr" lIns="411480" wrap="square"/>
-          <a:lstStyle/>
-          <a:p>
-            <a:pPr algn="l"/>
-            <a:r>
-              <a:rPr sz="2200">
-                <a:solidFill>
-                  <a:srgbClr val="FFFFFF"/>
-                </a:solidFill>
-                <a:latin typeface="Calibri"/>
-              </a:rPr>
-              <a:t>Pediatric radiology AI publications, stratified by modality and task</a:t>
-            </a:r>
-          </a:p>
-        </p:txBody>
-      </p:sp>
-      <p:pic>
-        <p:nvPicPr>
-          <p:cNvPr id="3" name="ped_modality_by_task" descr="ped_modality_by_task.png"/>
-          <p:cNvPicPr>
-            <a:picLocks noChangeAspect="1"/>
-          </p:cNvPicPr>
-          <p:nvPr/>
-        </p:nvPicPr>
-        <p:blipFill>
-          <a:blip r:embed="rId2"/>
-          <a:stretch>
-            <a:fillRect/>
-          </a:stretch>
-        </p:blipFill>
-        <p:spPr>
-          <a:xfrm>
-            <a:off x="3558563" y="877824"/>
-            <a:ext cx="5074567" cy="2638775"/>
-          </a:xfrm>
-          <a:prstGeom prst="rect">
-            <a:avLst/>
-          </a:prstGeom>
-        </p:spPr>
-      </p:pic>
-      <p:sp>
-        <p:nvSpPr>
-          <p:cNvPr id="4" name="TextBox 3"/>
-          <p:cNvSpPr txBox="1"/>
-          <p:nvPr/>
-        </p:nvSpPr>
-        <p:spPr>
-          <a:xfrm>
-            <a:off x="411480" y="3589751"/>
-            <a:ext cx="11368735" cy="405765"/>
-          </a:xfrm>
-          <a:prstGeom prst="rect">
-            <a:avLst/>
-          </a:prstGeom>
-          <a:noFill/>
-        </p:spPr>
-        <p:txBody>
-          <a:bodyPr wrap="square" lIns="45720" rIns="45720" tIns="27432" bIns="27432" anchor="t">
-            <a:spAutoFit/>
-          </a:bodyPr>
-          <a:lstStyle/>
-          <a:p>
-            <a:pPr algn="l">
-              <a:spcAft>
-                <a:spcPts val="315"/>
-              </a:spcAft>
-            </a:pPr>
-            <a:r>
-              <a:rPr sz="900" b="0" i="0">
-                <a:solidFill>
-                  <a:srgbClr val="1A1A1A"/>
-                </a:solidFill>
-                <a:latin typeface="Calibri"/>
-              </a:rPr>
-              <a:t>Same construction, restricted to the pediatric subset (10,620 papers incl. 479 preprints). Top pediatric modalities: MRI 41%, CT 16%, ultrasound 13%, x-ray / radiography 13%. Mammography is omitted: its 79 pediatric-query hits (of 10,620) are adult breast-imaging papers whose abstracts mention children.</a:t>
-            </a:r>
-          </a:p>
-        </p:txBody>
-      </p:sp>
-      <p:sp>
-        <p:nvSpPr>
-          <p:cNvPr id="5" name="TextBox 4"/>
-          <p:cNvSpPr txBox="1"/>
-          <p:nvPr/>
-        </p:nvSpPr>
-        <p:spPr>
-          <a:xfrm>
-            <a:off x="411480" y="4068668"/>
-            <a:ext cx="3630981" cy="1034415"/>
-          </a:xfrm>
-          <a:prstGeom prst="rect">
-            <a:avLst/>
-          </a:prstGeom>
-          <a:noFill/>
-        </p:spPr>
-        <p:txBody>
-          <a:bodyPr wrap="square" lIns="45720" rIns="45720" tIns="27432" bIns="27432" anchor="t">
-            <a:spAutoFit/>
-          </a:bodyPr>
-          <a:lstStyle/>
-          <a:p>
-            <a:pPr algn="l" marL="256032" indent="-256032">
-              <a:spcAft>
-                <a:spcPts val="315"/>
-              </a:spcAft>
-              <a:buChar char="•"/>
-            </a:pPr>
-            <a:r>
-              <a:rPr sz="900" b="1" i="0">
-                <a:solidFill>
-                  <a:srgbClr val="1A1A1A"/>
-                </a:solidFill>
-                <a:latin typeface="Calibri"/>
-              </a:rPr>
-              <a:t>detection / diagnosis</a:t>
-            </a:r>
-            <a:r>
-              <a:rPr sz="900" b="0" i="0">
-                <a:solidFill>
-                  <a:srgbClr val="1A1A1A"/>
-                </a:solidFill>
-                <a:latin typeface="Calibri"/>
-              </a:rPr>
-              <a:t>: is a finding present now, and which one (label or box): fracture, pneumonia, tumor; includes triage and screening</a:t>
-            </a:r>
-          </a:p>
-          <a:p>
-            <a:pPr algn="l" marL="256032" indent="-256032">
-              <a:spcAft>
-                <a:spcPts val="315"/>
-              </a:spcAft>
-              <a:buChar char="•"/>
-            </a:pPr>
-            <a:r>
-              <a:rPr sz="900" b="1" i="0">
-                <a:solidFill>
-                  <a:srgbClr val="1A1A1A"/>
-                </a:solidFill>
-                <a:latin typeface="Calibri"/>
-              </a:rPr>
-              <a:t>segmentation</a:t>
-            </a:r>
-            <a:r>
-              <a:rPr sz="900" b="0" i="0">
-                <a:solidFill>
-                  <a:srgbClr val="1A1A1A"/>
-                </a:solidFill>
-                <a:latin typeface="Calibri"/>
-              </a:rPr>
-              <a:t>: outline a structure or lesion (a mask)</a:t>
-            </a:r>
-          </a:p>
-          <a:p>
-            <a:pPr algn="l" marL="256032" indent="-256032">
-              <a:spcAft>
-                <a:spcPts val="315"/>
-              </a:spcAft>
-              <a:buChar char="•"/>
-            </a:pPr>
-            <a:r>
-              <a:rPr sz="900" b="1" i="0">
-                <a:solidFill>
-                  <a:srgbClr val="1A1A1A"/>
-                </a:solidFill>
-                <a:latin typeface="Calibri"/>
-              </a:rPr>
-              <a:t>measurement / quantification</a:t>
-            </a:r>
-            <a:r>
-              <a:rPr sz="900" b="0" i="0">
-                <a:solidFill>
-                  <a:srgbClr val="1A1A1A"/>
-                </a:solidFill>
-                <a:latin typeface="Calibri"/>
-              </a:rPr>
-              <a:t>: a number from the image: bone age, Cobb angle, organ volume, fetal biometry</a:t>
-            </a:r>
-          </a:p>
-        </p:txBody>
-      </p:sp>
-      <p:sp>
-        <p:nvSpPr>
-          <p:cNvPr id="6" name="TextBox 5"/>
-          <p:cNvSpPr txBox="1"/>
-          <p:nvPr/>
-        </p:nvSpPr>
-        <p:spPr>
-          <a:xfrm>
-            <a:off x="4225341" y="4068668"/>
-            <a:ext cx="3630981" cy="1171575"/>
-          </a:xfrm>
-          <a:prstGeom prst="rect">
-            <a:avLst/>
-          </a:prstGeom>
-          <a:noFill/>
-        </p:spPr>
-        <p:txBody>
-          <a:bodyPr wrap="square" lIns="45720" rIns="45720" tIns="27432" bIns="27432" anchor="t">
-            <a:spAutoFit/>
-          </a:bodyPr>
-          <a:lstStyle/>
-          <a:p>
-            <a:pPr algn="l" marL="256032" indent="-256032">
-              <a:spcAft>
-                <a:spcPts val="315"/>
-              </a:spcAft>
-              <a:buChar char="•"/>
-            </a:pPr>
-            <a:r>
-              <a:rPr sz="900" b="1" i="0">
-                <a:solidFill>
-                  <a:srgbClr val="1A1A1A"/>
-                </a:solidFill>
-                <a:latin typeface="Calibri"/>
-              </a:rPr>
-              <a:t>outcome prediction</a:t>
-            </a:r>
-            <a:r>
-              <a:rPr sz="900" b="0" i="0">
-                <a:solidFill>
-                  <a:srgbClr val="1A1A1A"/>
-                </a:solidFill>
-                <a:latin typeface="Calibri"/>
-              </a:rPr>
-              <a:t>: a future risk, response, or survival estimate from the image (prognosis, radiomics signatures)</a:t>
-            </a:r>
-          </a:p>
-          <a:p>
-            <a:pPr algn="l" marL="256032" indent="-256032">
-              <a:spcAft>
-                <a:spcPts val="315"/>
-              </a:spcAft>
-              <a:buChar char="•"/>
-            </a:pPr>
-            <a:r>
-              <a:rPr sz="900" b="1" i="0">
-                <a:solidFill>
-                  <a:srgbClr val="1A1A1A"/>
-                </a:solidFill>
-                <a:latin typeface="Calibri"/>
-              </a:rPr>
-              <a:t>reconstruction / imputation</a:t>
-            </a:r>
-            <a:r>
-              <a:rPr sz="900" b="0" i="0">
-                <a:solidFill>
-                  <a:srgbClr val="1A1A1A"/>
-                </a:solidFill>
-                <a:latin typeface="Calibri"/>
-              </a:rPr>
-              <a:t>: a better or missing image: lower dose, faster scans, denoising, synthetic CT/MR</a:t>
-            </a:r>
-          </a:p>
-          <a:p>
-            <a:pPr algn="l" marL="256032" indent="-256032">
-              <a:spcAft>
-                <a:spcPts val="315"/>
-              </a:spcAft>
-              <a:buChar char="•"/>
-            </a:pPr>
-            <a:r>
-              <a:rPr sz="900" b="1" i="0">
-                <a:solidFill>
-                  <a:srgbClr val="1A1A1A"/>
-                </a:solidFill>
-                <a:latin typeface="Calibri"/>
-              </a:rPr>
-              <a:t>report generation / LLM</a:t>
-            </a:r>
-            <a:r>
-              <a:rPr sz="900" b="0" i="0">
-                <a:solidFill>
-                  <a:srgbClr val="1A1A1A"/>
-                </a:solidFill>
-                <a:latin typeface="Calibri"/>
-              </a:rPr>
-              <a:t>: text: draft, summarize, or extract from radiology reports</a:t>
-            </a:r>
-          </a:p>
-        </p:txBody>
-      </p:sp>
-      <p:sp>
-        <p:nvSpPr>
-          <p:cNvPr id="7" name="TextBox 6"/>
-          <p:cNvSpPr txBox="1"/>
-          <p:nvPr/>
-        </p:nvSpPr>
-        <p:spPr>
-          <a:xfrm>
-            <a:off x="8039203" y="4068668"/>
-            <a:ext cx="3630981" cy="1171575"/>
-          </a:xfrm>
-          <a:prstGeom prst="rect">
-            <a:avLst/>
-          </a:prstGeom>
-          <a:noFill/>
-        </p:spPr>
-        <p:txBody>
-          <a:bodyPr wrap="square" lIns="45720" rIns="45720" tIns="27432" bIns="27432" anchor="t">
-            <a:spAutoFit/>
-          </a:bodyPr>
-          <a:lstStyle/>
-          <a:p>
-            <a:pPr algn="l" marL="256032" indent="-256032">
-              <a:spcAft>
-                <a:spcPts val="315"/>
-              </a:spcAft>
-              <a:buChar char="•"/>
-            </a:pPr>
-            <a:r>
-              <a:rPr sz="900" b="1" i="0">
-                <a:solidFill>
-                  <a:srgbClr val="1A1A1A"/>
-                </a:solidFill>
-                <a:latin typeface="Calibri"/>
-              </a:rPr>
-              <a:t>foundation model / vision-language</a:t>
-            </a:r>
-            <a:r>
-              <a:rPr sz="900" b="0" i="0">
-                <a:solidFill>
-                  <a:srgbClr val="1A1A1A"/>
-                </a:solidFill>
-                <a:latin typeface="Calibri"/>
-              </a:rPr>
-              <a:t>: a large pretrained model reused across tasks (segment-anything, self-supervised)</a:t>
-            </a:r>
-          </a:p>
-          <a:p>
-            <a:pPr algn="l" marL="256032" indent="-256032">
-              <a:spcAft>
-                <a:spcPts val="315"/>
-              </a:spcAft>
-              <a:buChar char="•"/>
-            </a:pPr>
-            <a:r>
-              <a:rPr sz="900" b="1" i="0">
-                <a:solidFill>
-                  <a:srgbClr val="1A1A1A"/>
-                </a:solidFill>
-                <a:latin typeface="Calibri"/>
-              </a:rPr>
-              <a:t>agent / autonomous</a:t>
-            </a:r>
-            <a:r>
-              <a:rPr sz="900" b="0" i="0">
-                <a:solidFill>
-                  <a:srgbClr val="1A1A1A"/>
-                </a:solidFill>
-                <a:latin typeface="Calibri"/>
-              </a:rPr>
-              <a:t>: multi-step actions taken without a human in the loop</a:t>
-            </a:r>
-          </a:p>
-          <a:p>
-            <a:pPr algn="l" marL="256032" indent="-256032">
-              <a:spcAft>
-                <a:spcPts val="315"/>
-              </a:spcAft>
-              <a:buChar char="•"/>
-            </a:pPr>
-            <a:r>
-              <a:rPr sz="900" b="1" i="0">
-                <a:solidFill>
-                  <a:srgbClr val="1A1A1A"/>
-                </a:solidFill>
-                <a:latin typeface="Calibri"/>
-              </a:rPr>
-              <a:t>workflow / non-interpretive</a:t>
-            </a:r>
-            <a:r>
-              <a:rPr sz="900" b="0" i="0">
-                <a:solidFill>
-                  <a:srgbClr val="1A1A1A"/>
-                </a:solidFill>
-                <a:latin typeface="Calibri"/>
-              </a:rPr>
-              <a:t>: protocoling, scheduling, ordering, decision support, education</a:t>
-            </a:r>
-          </a:p>
-        </p:txBody>
-      </p:sp>
-      <p:sp>
-        <p:nvSpPr>
-          <p:cNvPr id="8" name="page number"/>
-          <p:cNvSpPr txBox="1"/>
-          <p:nvPr/>
-        </p:nvSpPr>
-        <p:spPr>
-          <a:xfrm>
-            <a:off x="10728655" y="6510528"/>
-            <a:ext cx="1188720" cy="274320"/>
-          </a:xfrm>
-          <a:prstGeom prst="rect">
-            <a:avLst/>
-          </a:prstGeom>
-          <a:noFill/>
-        </p:spPr>
-        <p:txBody>
-          <a:bodyPr wrap="none">
-            <a:spAutoFit/>
-          </a:bodyPr>
-          <a:lstStyle/>
-          <a:p>
-            <a:pPr algn="r"/>
-            <a:r>
-              <a:rPr sz="1000">
-                <a:solidFill>
-                  <a:srgbClr val="6B6B6B"/>
-                </a:solidFill>
-                <a:latin typeface="Calibri"/>
-              </a:rPr>
-              <a:t>6 / 61</a:t>
-            </a:r>
-          </a:p>
-        </p:txBody>
-      </p:sp>
-    </p:spTree>
-  </p:cSld>
-  <p:clrMapOvr>
-    <a:masterClrMapping/>
-  </p:clrMapOvr>
-</p:sld>
-</file>
-
-<file path=ppt/slides/slide60.xml><?xml version="1.0" encoding="utf-8"?>
+<file path=ppt/slides/slide59.xml><?xml version="1.0" encoding="utf-8"?>
 <p:sld xmlns:a="http://schemas.openxmlformats.org/drawingml/2006/main" xmlns:p="http://schemas.openxmlformats.org/presentationml/2006/main" xmlns:r="http://schemas.openxmlformats.org/officeDocument/2006/relationships">
   <p:cSld>
     <p:spTree>
@@ -47835,7 +47120,7 @@
                 </a:solidFill>
                 <a:latin typeface="Calibri"/>
               </a:rPr>
-              <a:t> Since 2023 the pediatric corpus (6,723 papers) leans to autism / ADHD / neurodevelopment (697); fetal anomalies / prenatal (534); brain tumors (325); congenital heart disease / cardiac (295). Barely studied: testicular / ovarian torsion (8); inflammatory bowel disease (22); lines and tubes / NICU support devices (54); neonatal jaundice / biliary atresia / liver (56); craniosynostosis / craniofacial (72); appendicitis / intussusception / NEC (72). Which of these deserve a model first is an open question for this group.</a:t>
+              <a:t> Since 2023 the pediatric corpus (6,812 papers) leans to autism / ADHD / neurodevelopment (710); fetal anomalies / prenatal (541); brain tumors (337); congenital heart disease / cardiac (302). Barely studied: testicular / ovarian torsion (8); inflammatory bowel disease (23); lines and tubes / NICU support devices (54); neonatal jaundice / biliary atresia / liver (56); craniosynostosis / craniofacial (72); chronic lung disease of prematurity / neonatal lung (74). Which of these deserve a model first is an open question for this group.</a:t>
             </a:r>
           </a:p>
           <a:p>
@@ -47974,7 +47259,7 @@
                 </a:solidFill>
                 <a:latin typeface="Calibri"/>
               </a:rPr>
-              <a:t>60 / 61</a:t>
+              <a:t>59 / 60</a:t>
             </a:r>
           </a:p>
         </p:txBody>
@@ -47987,7 +47272,175 @@
 </p:sld>
 </file>
 
-<file path=ppt/slides/slide61.xml><?xml version="1.0" encoding="utf-8"?>
+<file path=ppt/slides/slide6.xml><?xml version="1.0" encoding="utf-8"?>
+<p:sld xmlns:a="http://schemas.openxmlformats.org/drawingml/2006/main" xmlns:p="http://schemas.openxmlformats.org/presentationml/2006/main" xmlns:r="http://schemas.openxmlformats.org/officeDocument/2006/relationships">
+  <p:cSld>
+    <p:spTree>
+      <p:nvGrpSpPr>
+        <p:cNvPr id="1" name=""/>
+        <p:cNvGrpSpPr/>
+        <p:nvPr/>
+      </p:nvGrpSpPr>
+      <p:grpSpPr/>
+      <p:sp>
+        <p:nvSpPr>
+          <p:cNvPr id="2" name="title band"/>
+          <p:cNvSpPr/>
+          <p:nvPr/>
+        </p:nvSpPr>
+        <p:spPr>
+          <a:xfrm>
+            <a:off x="0" y="0"/>
+            <a:ext cx="12191695" cy="713232"/>
+          </a:xfrm>
+          <a:prstGeom prst="rect">
+            <a:avLst/>
+          </a:prstGeom>
+          <a:solidFill>
+            <a:srgbClr val="3333B3"/>
+          </a:solidFill>
+          <a:ln>
+            <a:noFill/>
+          </a:ln>
+        </p:spPr>
+        <p:style>
+          <a:lnRef idx="1">
+            <a:schemeClr val="accent1"/>
+          </a:lnRef>
+          <a:fillRef idx="3">
+            <a:schemeClr val="accent1"/>
+          </a:fillRef>
+          <a:effectRef idx="2">
+            <a:schemeClr val="accent1"/>
+          </a:effectRef>
+          <a:fontRef idx="minor">
+            <a:schemeClr val="lt1"/>
+          </a:fontRef>
+        </p:style>
+        <p:txBody>
+          <a:bodyPr rtlCol="0" anchor="ctr" lIns="411480" wrap="square"/>
+          <a:lstStyle/>
+          <a:p>
+            <a:pPr algn="l"/>
+            <a:r>
+              <a:rPr sz="2200">
+                <a:solidFill>
+                  <a:srgbClr val="FFFFFF"/>
+                </a:solidFill>
+                <a:latin typeface="Calibri"/>
+              </a:rPr>
+              <a:t>Which journals publish pediatric radiology AI</a:t>
+            </a:r>
+          </a:p>
+        </p:txBody>
+      </p:sp>
+      <p:pic>
+        <p:nvPicPr>
+          <p:cNvPr id="3" name="journal_impact" descr="journal_impact.png"/>
+          <p:cNvPicPr>
+            <a:picLocks noChangeAspect="1"/>
+          </p:cNvPicPr>
+          <p:nvPr/>
+        </p:nvPicPr>
+        <p:blipFill>
+          <a:blip r:embed="rId2"/>
+          <a:stretch>
+            <a:fillRect/>
+          </a:stretch>
+        </p:blipFill>
+        <p:spPr>
+          <a:xfrm>
+            <a:off x="2713830" y="877824"/>
+            <a:ext cx="6764033" cy="3705514"/>
+          </a:xfrm>
+          <a:prstGeom prst="rect">
+            <a:avLst/>
+          </a:prstGeom>
+        </p:spPr>
+      </p:pic>
+      <p:sp>
+        <p:nvSpPr>
+          <p:cNvPr id="4" name="TextBox 3"/>
+          <p:cNvSpPr txBox="1"/>
+          <p:nvPr/>
+        </p:nvSpPr>
+        <p:spPr>
+          <a:xfrm>
+            <a:off x="411480" y="4656490"/>
+            <a:ext cx="11368735" cy="680084"/>
+          </a:xfrm>
+          <a:prstGeom prst="rect">
+            <a:avLst/>
+          </a:prstGeom>
+          <a:noFill/>
+        </p:spPr>
+        <p:txBody>
+          <a:bodyPr wrap="square" lIns="45720" rIns="45720" tIns="27432" bIns="27432" anchor="t">
+            <a:spAutoFit/>
+          </a:bodyPr>
+          <a:lstStyle/>
+          <a:p>
+            <a:pPr algn="l">
+              <a:spcAft>
+                <a:spcPts val="315"/>
+              </a:spcAft>
+            </a:pPr>
+            <a:r>
+              <a:rPr sz="900" b="0" i="0">
+                <a:solidFill>
+                  <a:srgbClr val="1A1A1A"/>
+                </a:solidFill>
+                <a:latin typeface="Calibri"/>
+              </a:rPr>
+              <a:t>x = OpenAlex 2-year mean citedness (a free JIF analogue; runs below the published JIF). y = cumulative pediatric radiology-AI papers 2015-2026 (PubMed, strict title/abstract query). The 33 journals with at least 25 of them are shown, carrying 1,807 of 5,099; the rest is a long tail. Largest: Pediatric Radiology (196); median impact 3.7, 1 at 10 or above – this work lands mostly in mid-impact specialty and technical journals. A further 3 conference proceedings and preprint servers clear the threshold (94 papers) but have no impact number of any kind and are not plotted. The same chart animated year by year: figures/journal_impact.gif.</a:t>
+            </a:r>
+          </a:p>
+        </p:txBody>
+      </p:sp>
+      <p:sp>
+        <p:nvSpPr>
+          <p:cNvPr id="5" name="page number"/>
+          <p:cNvSpPr txBox="1"/>
+          <p:nvPr/>
+        </p:nvSpPr>
+        <p:spPr>
+          <a:xfrm>
+            <a:off x="10728655" y="6510528"/>
+            <a:ext cx="1188720" cy="274320"/>
+          </a:xfrm>
+          <a:prstGeom prst="rect">
+            <a:avLst/>
+          </a:prstGeom>
+          <a:noFill/>
+        </p:spPr>
+        <p:txBody>
+          <a:bodyPr wrap="none">
+            <a:spAutoFit/>
+          </a:bodyPr>
+          <a:lstStyle/>
+          <a:p>
+            <a:pPr algn="r"/>
+            <a:r>
+              <a:rPr sz="1000">
+                <a:solidFill>
+                  <a:srgbClr val="6B6B6B"/>
+                </a:solidFill>
+                <a:latin typeface="Calibri"/>
+              </a:rPr>
+              <a:t>6 / 60</a:t>
+            </a:r>
+          </a:p>
+        </p:txBody>
+      </p:sp>
+    </p:spTree>
+  </p:cSld>
+  <p:clrMapOvr>
+    <a:masterClrMapping/>
+  </p:clrMapOvr>
+</p:sld>
+</file>
+
+<file path=ppt/slides/slide60.xml><?xml version="1.0" encoding="utf-8"?>
 <p:sld xmlns:a="http://schemas.openxmlformats.org/drawingml/2006/main" xmlns:p="http://schemas.openxmlformats.org/presentationml/2006/main" xmlns:r="http://schemas.openxmlformats.org/officeDocument/2006/relationships">
   <p:cSld>
     <p:spTree>
@@ -48206,7 +47659,7 @@
                 </a:solidFill>
                 <a:latin typeface="Calibri"/>
               </a:rPr>
-              <a:t>61 / 61</a:t>
+              <a:t>60 / 60</a:t>
             </a:r>
           </a:p>
         </p:txBody>
@@ -48220,174 +47673,6 @@
 </file>
 
 <file path=ppt/slides/slide7.xml><?xml version="1.0" encoding="utf-8"?>
-<p:sld xmlns:a="http://schemas.openxmlformats.org/drawingml/2006/main" xmlns:p="http://schemas.openxmlformats.org/presentationml/2006/main" xmlns:r="http://schemas.openxmlformats.org/officeDocument/2006/relationships">
-  <p:cSld>
-    <p:spTree>
-      <p:nvGrpSpPr>
-        <p:cNvPr id="1" name=""/>
-        <p:cNvGrpSpPr/>
-        <p:nvPr/>
-      </p:nvGrpSpPr>
-      <p:grpSpPr/>
-      <p:sp>
-        <p:nvSpPr>
-          <p:cNvPr id="2" name="title band"/>
-          <p:cNvSpPr/>
-          <p:nvPr/>
-        </p:nvSpPr>
-        <p:spPr>
-          <a:xfrm>
-            <a:off x="0" y="0"/>
-            <a:ext cx="12191695" cy="713232"/>
-          </a:xfrm>
-          <a:prstGeom prst="rect">
-            <a:avLst/>
-          </a:prstGeom>
-          <a:solidFill>
-            <a:srgbClr val="3333B3"/>
-          </a:solidFill>
-          <a:ln>
-            <a:noFill/>
-          </a:ln>
-        </p:spPr>
-        <p:style>
-          <a:lnRef idx="1">
-            <a:schemeClr val="accent1"/>
-          </a:lnRef>
-          <a:fillRef idx="3">
-            <a:schemeClr val="accent1"/>
-          </a:fillRef>
-          <a:effectRef idx="2">
-            <a:schemeClr val="accent1"/>
-          </a:effectRef>
-          <a:fontRef idx="minor">
-            <a:schemeClr val="lt1"/>
-          </a:fontRef>
-        </p:style>
-        <p:txBody>
-          <a:bodyPr rtlCol="0" anchor="ctr" lIns="411480" wrap="square"/>
-          <a:lstStyle/>
-          <a:p>
-            <a:pPr algn="l"/>
-            <a:r>
-              <a:rPr sz="2200">
-                <a:solidFill>
-                  <a:srgbClr val="FFFFFF"/>
-                </a:solidFill>
-                <a:latin typeface="Calibri"/>
-              </a:rPr>
-              <a:t>Which journals publish pediatric radiology AI</a:t>
-            </a:r>
-          </a:p>
-        </p:txBody>
-      </p:sp>
-      <p:pic>
-        <p:nvPicPr>
-          <p:cNvPr id="3" name="journal_impact" descr="journal_impact.png"/>
-          <p:cNvPicPr>
-            <a:picLocks noChangeAspect="1"/>
-          </p:cNvPicPr>
-          <p:nvPr/>
-        </p:nvPicPr>
-        <p:blipFill>
-          <a:blip r:embed="rId2"/>
-          <a:stretch>
-            <a:fillRect/>
-          </a:stretch>
-        </p:blipFill>
-        <p:spPr>
-          <a:xfrm>
-            <a:off x="2713830" y="877824"/>
-            <a:ext cx="6764033" cy="3705514"/>
-          </a:xfrm>
-          <a:prstGeom prst="rect">
-            <a:avLst/>
-          </a:prstGeom>
-        </p:spPr>
-      </p:pic>
-      <p:sp>
-        <p:nvSpPr>
-          <p:cNvPr id="4" name="TextBox 3"/>
-          <p:cNvSpPr txBox="1"/>
-          <p:nvPr/>
-        </p:nvSpPr>
-        <p:spPr>
-          <a:xfrm>
-            <a:off x="411480" y="4656490"/>
-            <a:ext cx="11368735" cy="680084"/>
-          </a:xfrm>
-          <a:prstGeom prst="rect">
-            <a:avLst/>
-          </a:prstGeom>
-          <a:noFill/>
-        </p:spPr>
-        <p:txBody>
-          <a:bodyPr wrap="square" lIns="45720" rIns="45720" tIns="27432" bIns="27432" anchor="t">
-            <a:spAutoFit/>
-          </a:bodyPr>
-          <a:lstStyle/>
-          <a:p>
-            <a:pPr algn="l">
-              <a:spcAft>
-                <a:spcPts val="315"/>
-              </a:spcAft>
-            </a:pPr>
-            <a:r>
-              <a:rPr sz="900" b="0" i="0">
-                <a:solidFill>
-                  <a:srgbClr val="1A1A1A"/>
-                </a:solidFill>
-                <a:latin typeface="Calibri"/>
-              </a:rPr>
-              <a:t>x = OpenAlex 2-year mean citedness (a free JIF analogue; runs below the published JIF). y = cumulative pediatric radiology-AI papers 2015-2026 (PubMed, strict title/abstract query). The 33 journals with at least 25 of them are shown, carrying 1,807 of 5,099; the rest is a long tail. Largest: Pediatric Radiology (196); median impact 3.7, 1 at 10 or above – this work lands mostly in mid-impact specialty and technical journals. A further 3 conference proceedings and preprint servers clear the threshold (94 papers) but have no impact number of any kind and are not plotted. The same chart animated year by year: figures/journal_impact.gif.</a:t>
-            </a:r>
-          </a:p>
-        </p:txBody>
-      </p:sp>
-      <p:sp>
-        <p:nvSpPr>
-          <p:cNvPr id="5" name="page number"/>
-          <p:cNvSpPr txBox="1"/>
-          <p:nvPr/>
-        </p:nvSpPr>
-        <p:spPr>
-          <a:xfrm>
-            <a:off x="10728655" y="6510528"/>
-            <a:ext cx="1188720" cy="274320"/>
-          </a:xfrm>
-          <a:prstGeom prst="rect">
-            <a:avLst/>
-          </a:prstGeom>
-          <a:noFill/>
-        </p:spPr>
-        <p:txBody>
-          <a:bodyPr wrap="none">
-            <a:spAutoFit/>
-          </a:bodyPr>
-          <a:lstStyle/>
-          <a:p>
-            <a:pPr algn="r"/>
-            <a:r>
-              <a:rPr sz="1000">
-                <a:solidFill>
-                  <a:srgbClr val="6B6B6B"/>
-                </a:solidFill>
-                <a:latin typeface="Calibri"/>
-              </a:rPr>
-              <a:t>7 / 61</a:t>
-            </a:r>
-          </a:p>
-        </p:txBody>
-      </p:sp>
-    </p:spTree>
-  </p:cSld>
-  <p:clrMapOvr>
-    <a:masterClrMapping/>
-  </p:clrMapOvr>
-</p:sld>
-</file>
-
-<file path=ppt/slides/slide8.xml><?xml version="1.0" encoding="utf-8"?>
 <p:sld xmlns:a="http://schemas.openxmlformats.org/drawingml/2006/main" xmlns:p="http://schemas.openxmlformats.org/presentationml/2006/main" xmlns:r="http://schemas.openxmlformats.org/officeDocument/2006/relationships">
   <p:cSld>
     <p:spTree>
@@ -48542,7 +47827,7 @@
                 </a:solidFill>
                 <a:latin typeface="Calibri"/>
               </a:rPr>
-              <a:t>8 / 61</a:t>
+              <a:t>7 / 60</a:t>
             </a:r>
           </a:p>
         </p:txBody>
@@ -48555,7 +47840,7 @@
 </p:sld>
 </file>
 
-<file path=ppt/slides/slide9.xml><?xml version="1.0" encoding="utf-8"?>
+<file path=ppt/slides/slide8.xml><?xml version="1.0" encoding="utf-8"?>
 <p:sld xmlns:a="http://schemas.openxmlformats.org/drawingml/2006/main" xmlns:p="http://schemas.openxmlformats.org/presentationml/2006/main" xmlns:r="http://schemas.openxmlformats.org/officeDocument/2006/relationships">
   <p:cSld>
     <p:spTree>
@@ -48718,7 +48003,7 @@
                 </a:solidFill>
                 <a:latin typeface="Calibri"/>
               </a:rPr>
-              <a:t>: radiography 38%, MRI 33%, ultrasound 14%, CT 11%, nuclear 2%. Our pediatric query ranks MRI first (MRI 41%, CT 16%, ultrasound 13%, x-ray / radiography 13%) because MRI-heavy neurodevelopment papers mention children.</a:t>
+              <a:t>: radiography 38%, MRI 33%, ultrasound 14%, CT 11%, nuclear 2%. Our pediatric query ranks MRI first (MRI 41%, CT 16%, ultrasound 13%, x-ray / radiography 12%) because MRI-heavy neurodevelopment papers mention children.</a:t>
             </a:r>
           </a:p>
           <a:p>
@@ -48958,7 +48243,286 @@
                 </a:solidFill>
                 <a:latin typeface="Calibri"/>
               </a:rPr>
-              <a:t>9 / 61</a:t>
+              <a:t>8 / 60</a:t>
+            </a:r>
+          </a:p>
+        </p:txBody>
+      </p:sp>
+    </p:spTree>
+  </p:cSld>
+  <p:clrMapOvr>
+    <a:masterClrMapping/>
+  </p:clrMapOvr>
+</p:sld>
+</file>
+
+<file path=ppt/slides/slide9.xml><?xml version="1.0" encoding="utf-8"?>
+<p:sld xmlns:a="http://schemas.openxmlformats.org/drawingml/2006/main" xmlns:p="http://schemas.openxmlformats.org/presentationml/2006/main" xmlns:r="http://schemas.openxmlformats.org/officeDocument/2006/relationships">
+  <p:cSld>
+    <p:spTree>
+      <p:nvGrpSpPr>
+        <p:cNvPr id="1" name=""/>
+        <p:cNvGrpSpPr/>
+        <p:nvPr/>
+      </p:nvGrpSpPr>
+      <p:grpSpPr/>
+      <p:sp>
+        <p:nvSpPr>
+          <p:cNvPr id="2" name="title band"/>
+          <p:cNvSpPr/>
+          <p:nvPr/>
+        </p:nvSpPr>
+        <p:spPr>
+          <a:xfrm>
+            <a:off x="0" y="0"/>
+            <a:ext cx="12191695" cy="713232"/>
+          </a:xfrm>
+          <a:prstGeom prst="rect">
+            <a:avLst/>
+          </a:prstGeom>
+          <a:solidFill>
+            <a:srgbClr val="3333B3"/>
+          </a:solidFill>
+          <a:ln>
+            <a:noFill/>
+          </a:ln>
+        </p:spPr>
+        <p:style>
+          <a:lnRef idx="1">
+            <a:schemeClr val="accent1"/>
+          </a:lnRef>
+          <a:fillRef idx="3">
+            <a:schemeClr val="accent1"/>
+          </a:fillRef>
+          <a:effectRef idx="2">
+            <a:schemeClr val="accent1"/>
+          </a:effectRef>
+          <a:fontRef idx="minor">
+            <a:schemeClr val="lt1"/>
+          </a:fontRef>
+        </p:style>
+        <p:txBody>
+          <a:bodyPr rtlCol="0" anchor="ctr" lIns="411480" wrap="square"/>
+          <a:lstStyle/>
+          <a:p>
+            <a:pPr algn="l"/>
+            <a:r>
+              <a:rPr sz="2200">
+                <a:solidFill>
+                  <a:srgbClr val="FFFFFF"/>
+                </a:solidFill>
+                <a:latin typeface="Calibri"/>
+              </a:rPr>
+              <a:t>Reading the whole pediatric literature, not a sample of it</a:t>
+            </a:r>
+          </a:p>
+        </p:txBody>
+      </p:sp>
+      <p:sp>
+        <p:nvSpPr>
+          <p:cNvPr id="3" name="TextBox 2"/>
+          <p:cNvSpPr txBox="1"/>
+          <p:nvPr/>
+        </p:nvSpPr>
+        <p:spPr>
+          <a:xfrm>
+            <a:off x="411480" y="877824"/>
+            <a:ext cx="11368735" cy="643255"/>
+          </a:xfrm>
+          <a:prstGeom prst="rect">
+            <a:avLst/>
+          </a:prstGeom>
+          <a:noFill/>
+        </p:spPr>
+        <p:txBody>
+          <a:bodyPr wrap="square" lIns="45720" rIns="45720" tIns="27432" bIns="27432" anchor="t">
+            <a:spAutoFit/>
+          </a:bodyPr>
+          <a:lstStyle/>
+          <a:p>
+            <a:pPr algn="l">
+              <a:spcAft>
+                <a:spcPts val="384"/>
+              </a:spcAft>
+            </a:pPr>
+            <a:r>
+              <a:rPr sz="1100" b="0" i="0">
+                <a:solidFill>
+                  <a:srgbClr val="1A1A1A"/>
+                </a:solidFill>
+                <a:latin typeface="Calibri"/>
+              </a:rPr>
+              <a:t>Counting publications says how much is being published; it does not say what was built, for which children, or how well it was tested. So every pediatric radiology-AI record from 2005 onward was retrieved from </a:t>
+            </a:r>
+            <a:r>
+              <a:rPr sz="1100" b="1" i="0">
+                <a:solidFill>
+                  <a:srgbClr val="1A1A1A"/>
+                </a:solidFill>
+                <a:latin typeface="Calibri"/>
+              </a:rPr>
+              <a:t>PubMed/MEDLINE and Embase</a:t>
+            </a:r>
+            <a:r>
+              <a:rPr sz="1100" b="0" i="0">
+                <a:solidFill>
+                  <a:srgbClr val="1A1A1A"/>
+                </a:solidFill>
+                <a:latin typeface="Calibri"/>
+              </a:rPr>
+              <a:t>, screened against prespecified criteria, and read into a structured row — model, modality, body region, age group, task, dataset size, data source, validation, availability — under one fixed schema.</a:t>
+            </a:r>
+          </a:p>
+        </p:txBody>
+      </p:sp>
+      <p:sp>
+        <p:nvSpPr>
+          <p:cNvPr id="4" name="TextBox 3"/>
+          <p:cNvSpPr txBox="1"/>
+          <p:nvPr/>
+        </p:nvSpPr>
+        <p:spPr>
+          <a:xfrm>
+            <a:off x="411480" y="1594230"/>
+            <a:ext cx="11368735" cy="1844674"/>
+          </a:xfrm>
+          <a:prstGeom prst="rect">
+            <a:avLst/>
+          </a:prstGeom>
+          <a:noFill/>
+        </p:spPr>
+        <p:txBody>
+          <a:bodyPr wrap="square" lIns="45720" rIns="45720" tIns="27432" bIns="27432" anchor="t">
+            <a:spAutoFit/>
+          </a:bodyPr>
+          <a:lstStyle/>
+          <a:p>
+            <a:pPr algn="l" marL="256032" indent="-256032">
+              <a:spcAft>
+                <a:spcPts val="384"/>
+              </a:spcAft>
+              <a:buChar char="•"/>
+            </a:pPr>
+            <a:r>
+              <a:rPr sz="1100" b="0" i="0">
+                <a:solidFill>
+                  <a:srgbClr val="1A1A1A"/>
+                </a:solidFill>
+                <a:latin typeface="Calibri"/>
+              </a:rPr>
+              <a:t>6,995 records retrieved, 393 conference proceedings set aside, 6,602 screened, 2,650 off-topic and 456 non-primary removed, 3,496 primary studies included (PubMed 3,122, Embase 365, OpenAlex 9).</a:t>
+            </a:r>
+          </a:p>
+          <a:p>
+            <a:pPr algn="l" marL="256032" indent="-256032">
+              <a:spcAft>
+                <a:spcPts val="384"/>
+              </a:spcAft>
+              <a:buChar char="•"/>
+            </a:pPr>
+            <a:r>
+              <a:rPr sz="1100" b="1" i="0">
+                <a:solidFill>
+                  <a:srgbClr val="1A1A1A"/>
+                </a:solidFill>
+                <a:latin typeface="Calibri"/>
+              </a:rPr>
+              <a:t>Embase earns its place</a:t>
+            </a:r>
+            <a:r>
+              <a:rPr sz="1100" b="0" i="0">
+                <a:solidFill>
+                  <a:srgbClr val="1A1A1A"/>
+                </a:solidFill>
+                <a:latin typeface="Calibri"/>
+              </a:rPr>
+              <a:t>: 365 of the included studies are not in PubMed at all. They have no PMID, so no NIH relative citation ratio; ranking them at all is why the impact column below is OpenAlex's field-weighted score.</a:t>
+            </a:r>
+          </a:p>
+          <a:p>
+            <a:pPr algn="l" marL="256032" indent="-256032">
+              <a:spcAft>
+                <a:spcPts val="384"/>
+              </a:spcAft>
+              <a:buChar char="•"/>
+            </a:pPr>
+            <a:r>
+              <a:rPr sz="1100" b="0" i="0">
+                <a:solidFill>
+                  <a:srgbClr val="1A1A1A"/>
+                </a:solidFill>
+                <a:latin typeface="Calibri"/>
+              </a:rPr>
+              <a:t>Conference proceedings are retrieved and reported but not screened: an abstract cannot support a judgement about study design, and it carries no DOI linking it to the later full paper.</a:t>
+            </a:r>
+          </a:p>
+          <a:p>
+            <a:pPr algn="l" marL="256032" indent="-256032">
+              <a:spcAft>
+                <a:spcPts val="384"/>
+              </a:spcAft>
+              <a:buChar char="•"/>
+            </a:pPr>
+            <a:r>
+              <a:rPr sz="1100" b="0" i="0">
+                <a:solidFill>
+                  <a:srgbClr val="1A1A1A"/>
+                </a:solidFill>
+                <a:latin typeface="Calibri"/>
+              </a:rPr>
+              <a:t>Screening and extraction were done by a constrained model under a fixed schema, with a blinded second-model re-screen of 150 records (94.7% agreement, kappa = 0.885). Dual-human validation is outstanding.</a:t>
+            </a:r>
+          </a:p>
+          <a:p>
+            <a:pPr algn="l" marL="256032" indent="-256032">
+              <a:spcAft>
+                <a:spcPts val="384"/>
+              </a:spcAft>
+              <a:buChar char="•"/>
+            </a:pPr>
+            <a:r>
+              <a:rPr sz="1100" b="0" i="0">
+                <a:solidFill>
+                  <a:srgbClr val="1A1A1A"/>
+                </a:solidFill>
+                <a:latin typeface="Calibri"/>
+              </a:rPr>
+              <a:t>The same corpus is the paper database (reports/04_paper_database.md) and the systematic review manuscript, so the three never disagree.</a:t>
+            </a:r>
+          </a:p>
+        </p:txBody>
+      </p:sp>
+      <p:sp>
+        <p:nvSpPr>
+          <p:cNvPr id="5" name="page number"/>
+          <p:cNvSpPr txBox="1"/>
+          <p:nvPr/>
+        </p:nvSpPr>
+        <p:spPr>
+          <a:xfrm>
+            <a:off x="10728655" y="6510528"/>
+            <a:ext cx="1188720" cy="274320"/>
+          </a:xfrm>
+          <a:prstGeom prst="rect">
+            <a:avLst/>
+          </a:prstGeom>
+          <a:noFill/>
+        </p:spPr>
+        <p:txBody>
+          <a:bodyPr wrap="none">
+            <a:spAutoFit/>
+          </a:bodyPr>
+          <a:lstStyle/>
+          <a:p>
+            <a:pPr algn="r"/>
+            <a:r>
+              <a:rPr sz="1000">
+                <a:solidFill>
+                  <a:srgbClr val="6B6B6B"/>
+                </a:solidFill>
+                <a:latin typeface="Calibri"/>
+              </a:rPr>
+              <a:t>9 / 60</a:t>
             </a:r>
           </a:p>
         </p:txBody>

--- a/slides/pedrad_ai_slides.pptx
+++ b/slides/pedrad_ai_slides.pptx
@@ -59,6 +59,10 @@
     <p:sldId id="307" r:id="rId58"/>
     <p:sldId id="308" r:id="rId59"/>
     <p:sldId id="309" r:id="rId60"/>
+    <p:sldId id="310" r:id="rId61"/>
+    <p:sldId id="311" r:id="rId62"/>
+    <p:sldId id="312" r:id="rId63"/>
+    <p:sldId id="313" r:id="rId64"/>
   </p:sldIdLst>
   <p:sldSz cx="12191695" cy="6858000" type="screen4x3"/>
   <p:notesSz cx="6858000" cy="9144000"/>
@@ -3328,7 +3332,7 @@
                 </a:solidFill>
                 <a:latin typeface="Helvetica Neue"/>
               </a:rPr>
-              <a:t>1 / 54</a:t>
+              <a:t>1 / 58</a:t>
             </a:r>
           </a:p>
         </p:txBody>
@@ -4567,7 +4571,7 @@
                 </a:solidFill>
                 <a:latin typeface="Helvetica Neue"/>
               </a:rPr>
-              <a:t>10 / 54</a:t>
+              <a:t>10 / 58</a:t>
             </a:r>
           </a:p>
         </p:txBody>
@@ -5797,7 +5801,7 @@
                 </a:solidFill>
                 <a:latin typeface="Helvetica Neue"/>
               </a:rPr>
-              <a:t>11 / 54</a:t>
+              <a:t>11 / 58</a:t>
             </a:r>
           </a:p>
         </p:txBody>
@@ -7018,7 +7022,7 @@
                 </a:solidFill>
                 <a:latin typeface="Helvetica Neue"/>
               </a:rPr>
-              <a:t>12 / 54</a:t>
+              <a:t>12 / 58</a:t>
             </a:r>
           </a:p>
         </p:txBody>
@@ -8257,7 +8261,7 @@
                 </a:solidFill>
                 <a:latin typeface="Helvetica Neue"/>
               </a:rPr>
-              <a:t>13 / 54</a:t>
+              <a:t>13 / 58</a:t>
             </a:r>
           </a:p>
         </p:txBody>
@@ -9505,7 +9509,7 @@
                 </a:solidFill>
                 <a:latin typeface="Helvetica Neue"/>
               </a:rPr>
-              <a:t>14 / 54</a:t>
+              <a:t>14 / 58</a:t>
             </a:r>
           </a:p>
         </p:txBody>
@@ -10726,7 +10730,7 @@
                 </a:solidFill>
                 <a:latin typeface="Helvetica Neue"/>
               </a:rPr>
-              <a:t>15 / 54</a:t>
+              <a:t>15 / 58</a:t>
             </a:r>
           </a:p>
         </p:txBody>
@@ -11947,7 +11951,7 @@
                 </a:solidFill>
                 <a:latin typeface="Helvetica Neue"/>
               </a:rPr>
-              <a:t>16 / 54</a:t>
+              <a:t>16 / 58</a:t>
             </a:r>
           </a:p>
         </p:txBody>
@@ -13159,7 +13163,7 @@
                 </a:solidFill>
                 <a:latin typeface="Helvetica Neue"/>
               </a:rPr>
-              <a:t>17 / 54</a:t>
+              <a:t>17 / 58</a:t>
             </a:r>
           </a:p>
         </p:txBody>
@@ -14416,7 +14420,7 @@
                 </a:solidFill>
                 <a:latin typeface="Helvetica Neue"/>
               </a:rPr>
-              <a:t>18 / 54</a:t>
+              <a:t>18 / 58</a:t>
             </a:r>
           </a:p>
         </p:txBody>
@@ -14580,7 +14584,7 @@
                 </a:solidFill>
                 <a:latin typeface="Helvetica Neue"/>
               </a:rPr>
-              <a:t>19 / 54</a:t>
+              <a:t>19 / 58</a:t>
             </a:r>
           </a:p>
         </p:txBody>
@@ -14742,7 +14746,7 @@
                 </a:solidFill>
                 <a:latin typeface="Helvetica Neue"/>
               </a:rPr>
-              <a:t>2 / 54</a:t>
+              <a:t>2 / 58</a:t>
             </a:r>
           </a:p>
         </p:txBody>
@@ -15959,7 +15963,7 @@
                 </a:solidFill>
                 <a:latin typeface="Helvetica Neue"/>
               </a:rPr>
-              <a:t>20 / 54</a:t>
+              <a:t>20 / 58</a:t>
             </a:r>
           </a:p>
         </p:txBody>
@@ -17253,7 +17257,7 @@
                 </a:solidFill>
                 <a:latin typeface="Helvetica Neue"/>
               </a:rPr>
-              <a:t>21 / 54</a:t>
+              <a:t>21 / 58</a:t>
             </a:r>
           </a:p>
         </p:txBody>
@@ -18470,7 +18474,7 @@
                 </a:solidFill>
                 <a:latin typeface="Helvetica Neue"/>
               </a:rPr>
-              <a:t>22 / 54</a:t>
+              <a:t>22 / 58</a:t>
             </a:r>
           </a:p>
         </p:txBody>
@@ -19764,7 +19768,7 @@
                 </a:solidFill>
                 <a:latin typeface="Helvetica Neue"/>
               </a:rPr>
-              <a:t>23 / 54</a:t>
+              <a:t>23 / 58</a:t>
             </a:r>
           </a:p>
         </p:txBody>
@@ -20981,7 +20985,7 @@
                 </a:solidFill>
                 <a:latin typeface="Helvetica Neue"/>
               </a:rPr>
-              <a:t>24 / 54</a:t>
+              <a:t>24 / 58</a:t>
             </a:r>
           </a:p>
         </p:txBody>
@@ -22250,7 +22254,7 @@
                 </a:solidFill>
                 <a:latin typeface="Helvetica Neue"/>
               </a:rPr>
-              <a:t>25 / 54</a:t>
+              <a:t>25 / 58</a:t>
             </a:r>
           </a:p>
         </p:txBody>
@@ -23467,7 +23471,7 @@
                 </a:solidFill>
                 <a:latin typeface="Helvetica Neue"/>
               </a:rPr>
-              <a:t>26 / 54</a:t>
+              <a:t>26 / 58</a:t>
             </a:r>
           </a:p>
         </p:txBody>
@@ -24214,7 +24218,7 @@
                 </a:solidFill>
                 <a:latin typeface="Helvetica Neue"/>
               </a:rPr>
-              <a:t>27 / 54</a:t>
+              <a:t>27 / 58</a:t>
             </a:r>
           </a:p>
         </p:txBody>
@@ -24648,7 +24652,7 @@
                 </a:solidFill>
                 <a:latin typeface="Helvetica Neue"/>
               </a:rPr>
-              <a:t>28 / 54</a:t>
+              <a:t>28 / 58</a:t>
             </a:r>
           </a:p>
         </p:txBody>
@@ -25082,7 +25086,7 @@
                 </a:solidFill>
                 <a:latin typeface="Helvetica Neue"/>
               </a:rPr>
-              <a:t>29 / 54</a:t>
+              <a:t>29 / 58</a:t>
             </a:r>
           </a:p>
         </p:txBody>
@@ -25529,7 +25533,7 @@
                 </a:solidFill>
                 <a:latin typeface="Helvetica Neue"/>
               </a:rPr>
-              <a:t>3 / 54</a:t>
+              <a:t>3 / 58</a:t>
             </a:r>
           </a:p>
         </p:txBody>
@@ -25963,7 +25967,7 @@
                 </a:solidFill>
                 <a:latin typeface="Helvetica Neue"/>
               </a:rPr>
-              <a:t>30 / 54</a:t>
+              <a:t>30 / 58</a:t>
             </a:r>
           </a:p>
         </p:txBody>
@@ -26397,7 +26401,7 @@
                 </a:solidFill>
                 <a:latin typeface="Helvetica Neue"/>
               </a:rPr>
-              <a:t>31 / 54</a:t>
+              <a:t>31 / 58</a:t>
             </a:r>
           </a:p>
         </p:txBody>
@@ -26831,7 +26835,7 @@
                 </a:solidFill>
                 <a:latin typeface="Helvetica Neue"/>
               </a:rPr>
-              <a:t>32 / 54</a:t>
+              <a:t>32 / 58</a:t>
             </a:r>
           </a:p>
         </p:txBody>
@@ -27265,7 +27269,7 @@
                 </a:solidFill>
                 <a:latin typeface="Helvetica Neue"/>
               </a:rPr>
-              <a:t>33 / 54</a:t>
+              <a:t>33 / 58</a:t>
             </a:r>
           </a:p>
         </p:txBody>
@@ -28989,7 +28993,7 @@
                 </a:solidFill>
                 <a:latin typeface="Helvetica Neue"/>
               </a:rPr>
-              <a:t>34 / 54</a:t>
+              <a:t>34 / 58</a:t>
             </a:r>
           </a:p>
         </p:txBody>
@@ -29153,7 +29157,7 @@
                 </a:solidFill>
                 <a:latin typeface="Helvetica Neue"/>
               </a:rPr>
-              <a:t>35 / 54</a:t>
+              <a:t>35 / 58</a:t>
             </a:r>
           </a:p>
         </p:txBody>
@@ -30955,7 +30959,7 @@
                 </a:solidFill>
                 <a:latin typeface="Helvetica Neue"/>
               </a:rPr>
-              <a:t>36 / 54</a:t>
+              <a:t>36 / 58</a:t>
             </a:r>
           </a:p>
         </p:txBody>
@@ -32889,7 +32893,7 @@
                 </a:solidFill>
                 <a:latin typeface="Helvetica Neue"/>
               </a:rPr>
-              <a:t>37 / 54</a:t>
+              <a:t>37 / 58</a:t>
             </a:r>
           </a:p>
         </p:txBody>
@@ -34595,7 +34599,7 @@
                 </a:solidFill>
                 <a:latin typeface="Helvetica Neue"/>
               </a:rPr>
-              <a:t>38 / 54</a:t>
+              <a:t>38 / 58</a:t>
             </a:r>
           </a:p>
         </p:txBody>
@@ -35727,7 +35731,7 @@
                 </a:solidFill>
                 <a:latin typeface="Helvetica Neue"/>
               </a:rPr>
-              <a:t>39 / 54</a:t>
+              <a:t>39 / 58</a:t>
             </a:r>
           </a:p>
         </p:txBody>
@@ -35891,7 +35895,7 @@
                 </a:solidFill>
                 <a:latin typeface="Helvetica Neue"/>
               </a:rPr>
-              <a:t>4 / 54</a:t>
+              <a:t>4 / 58</a:t>
             </a:r>
           </a:p>
         </p:txBody>
@@ -36263,7 +36267,7 @@
                 </a:solidFill>
                 <a:latin typeface="Helvetica Neue"/>
               </a:rPr>
-              <a:t>40 / 54</a:t>
+              <a:t>40 / 58</a:t>
             </a:r>
           </a:p>
         </p:txBody>
@@ -36671,7 +36675,7 @@
                 </a:solidFill>
                 <a:latin typeface="Helvetica Neue"/>
               </a:rPr>
-              <a:t>41 / 54</a:t>
+              <a:t>41 / 58</a:t>
             </a:r>
           </a:p>
         </p:txBody>
@@ -37079,7 +37083,7 @@
                 </a:solidFill>
                 <a:latin typeface="Helvetica Neue"/>
               </a:rPr>
-              <a:t>42 / 54</a:t>
+              <a:t>42 / 58</a:t>
             </a:r>
           </a:p>
         </p:txBody>
@@ -37469,7 +37473,7 @@
                 </a:solidFill>
                 <a:latin typeface="Helvetica Neue"/>
               </a:rPr>
-              <a:t>43 / 54</a:t>
+              <a:t>43 / 58</a:t>
             </a:r>
           </a:p>
         </p:txBody>
@@ -37893,7 +37897,7 @@
                 </a:solidFill>
                 <a:latin typeface="Helvetica Neue"/>
               </a:rPr>
-              <a:t>44 / 54</a:t>
+              <a:t>44 / 58</a:t>
             </a:r>
           </a:p>
         </p:txBody>
@@ -38096,7 +38100,7 @@
                 </a:solidFill>
                 <a:latin typeface="Helvetica Neue"/>
               </a:rPr>
-              <a:t>45 / 54</a:t>
+              <a:t>45 / 58</a:t>
             </a:r>
           </a:p>
         </p:txBody>
@@ -38260,7 +38264,7 @@
                 </a:solidFill>
                 <a:latin typeface="Helvetica Neue"/>
               </a:rPr>
-              <a:t>46 / 54</a:t>
+              <a:t>46 / 58</a:t>
             </a:r>
           </a:p>
         </p:txBody>
@@ -38424,7 +38428,7 @@
                 </a:solidFill>
                 <a:latin typeface="Helvetica Neue"/>
               </a:rPr>
-              <a:t>47 / 54</a:t>
+              <a:t>47 / 58</a:t>
             </a:r>
           </a:p>
         </p:txBody>
@@ -40063,7 +40067,7 @@
                 </a:solidFill>
                 <a:latin typeface="Helvetica Neue"/>
               </a:rPr>
-              <a:t>48 / 54</a:t>
+              <a:t>48 / 58</a:t>
             </a:r>
           </a:p>
         </p:txBody>
@@ -41702,7 +41706,7 @@
                 </a:solidFill>
                 <a:latin typeface="Helvetica Neue"/>
               </a:rPr>
-              <a:t>49 / 54</a:t>
+              <a:t>49 / 58</a:t>
             </a:r>
           </a:p>
         </p:txBody>
@@ -41866,7 +41870,7 @@
                 </a:solidFill>
                 <a:latin typeface="Helvetica Neue"/>
               </a:rPr>
-              <a:t>5 / 54</a:t>
+              <a:t>5 / 58</a:t>
             </a:r>
           </a:p>
         </p:txBody>
@@ -41936,7 +41940,7 @@
                 </a:solidFill>
                 <a:latin typeface="Helvetica Neue"/>
               </a:rPr>
-              <a:t>Kamran review: broader research, stronger validation</a:t>
+              <a:t>Product 1: BoneXpert — the most-validated pediatric AI you cannot buy</a:t>
             </a:r>
           </a:p>
         </p:txBody>
@@ -41971,7 +41975,7 @@
                 </a:solidFill>
                 <a:latin typeface="Helvetica Neue"/>
               </a:rPr>
-              <a:t>REVIEWS</a:t>
+              <a:t>COMMERCIAL SOFTWARE</a:t>
             </a:r>
           </a:p>
         </p:txBody>
@@ -42010,25 +42014,7 @@
                 </a:solidFill>
                 <a:latin typeface="Helvetica Neue"/>
               </a:rPr>
-              <a:t>Kamran et al., </a:t>
-            </a:r>
-            <a:r>
-              <a:rPr sz="1100" b="0" i="1">
-                <a:solidFill>
-                  <a:srgbClr val="1A1A1A"/>
-                </a:solidFill>
-                <a:latin typeface="Helvetica Neue"/>
-              </a:rPr>
-              <a:t>Pediatric Radiology</a:t>
-            </a:r>
-            <a:r>
-              <a:rPr sz="1100" b="0" i="0">
-                <a:solidFill>
-                  <a:srgbClr val="1A1A1A"/>
-                </a:solidFill>
-                <a:latin typeface="Helvetica Neue"/>
-              </a:rPr>
-              <a:t> 2026 (https://doi.org/10.1007/s00247-025-06462-5doi 10.1007/s00247-025-06462-5)</a:t>
+              <a:t>Visiana, Denmark (https://bonexpert.com/bonexpert.com) — bone age / growth</a:t>
             </a:r>
           </a:p>
         </p:txBody>
@@ -42042,7 +42028,7 @@
         <p:spPr>
           <a:xfrm>
             <a:off x="411480" y="1258951"/>
-            <a:ext cx="11368735" cy="1558290"/>
+            <a:ext cx="11368735" cy="2473959"/>
           </a:xfrm>
           <a:prstGeom prst="rect">
             <a:avLst/>
@@ -42068,7 +42054,7 @@
                 </a:solidFill>
                 <a:latin typeface="Helvetica Neue"/>
               </a:rPr>
-              <a:t>A large but concentrated literature</a:t>
+              <a:t>What it does</a:t>
             </a:r>
             <a:r>
               <a:rPr sz="1400" b="0" i="0">
@@ -42077,7 +42063,25 @@
                 </a:solidFill>
                 <a:latin typeface="Helvetica Neue"/>
               </a:rPr>
-              <a:t>: 789 pediatric-focused original articles (2005–August 2024); 91% addressed image interpretation/diagnosis. Leading applications were bone age (88), pneumonia (65), and brain lesions/tumors (54).</a:t>
+              <a:t>: automated Greulich–Pyle and Tanner–Whitehouse bone age from a single hand radiograph, plus a </a:t>
+            </a:r>
+            <a:r>
+              <a:rPr sz="1400" b="1" i="0">
+                <a:solidFill>
+                  <a:srgbClr val="1A1A1A"/>
+                </a:solidFill>
+                <a:latin typeface="Helvetica Neue"/>
+              </a:rPr>
+              <a:t>Bone Health Index</a:t>
+            </a:r>
+            <a:r>
+              <a:rPr sz="1400" b="0" i="0">
+                <a:solidFill>
+                  <a:srgbClr val="1A1A1A"/>
+                </a:solidFill>
+                <a:latin typeface="Helvetica Neue"/>
+              </a:rPr>
+              <a:t> from cortical thickness and an adult-height predictor. Not a second reader — it replaces the manual rating.</a:t>
             </a:r>
           </a:p>
           <a:p>
@@ -42094,7 +42098,7 @@
                 </a:solidFill>
                 <a:latin typeface="Helvetica Neue"/>
               </a:rPr>
-              <a:t>Generalizability needs stronger evidence</a:t>
+              <a:t>Why it is the benchmark</a:t>
             </a:r>
             <a:r>
               <a:rPr sz="1400" b="0" i="0">
@@ -42103,7 +42107,7 @@
                 </a:solidFill>
                 <a:latin typeface="Helvetica Neue"/>
               </a:rPr>
-              <a:t>: 65% relied on local hospital datasets. The authors call for diverse, multicenter datasets and prospective validation across pediatric ages, sites, and disease-prevalence settings.</a:t>
+              <a:t>: designed for children from the start, in routine European clinical use since 2009, and the comparator nearly every academic bone-age paper measures itself against. It is the one pediatric AI with a decade of unglamorous production experience behind it.</a:t>
             </a:r>
           </a:p>
           <a:p>
@@ -42120,7 +42124,7 @@
                 </a:solidFill>
                 <a:latin typeface="Helvetica Neue"/>
               </a:rPr>
-              <a:t>Broaden the research agenda</a:t>
+              <a:t>The catch</a:t>
             </a:r>
             <a:r>
               <a:rPr sz="1400" b="0" i="0">
@@ -42129,7 +42133,51 @@
                 </a:solidFill>
                 <a:latin typeface="Helvetica Neue"/>
               </a:rPr>
-              <a:t>: communication, education, policy, and stakeholder perspectives were underrepresented. Include children, families, and clinical teams in development and evaluation.</a:t>
+              <a:t>: CE-marked in Europe; in the United States the vendor labels it </a:t>
+            </a:r>
+            <a:r>
+              <a:rPr sz="1400" b="1" i="0">
+                <a:solidFill>
+                  <a:srgbClr val="1A1A1A"/>
+                </a:solidFill>
+                <a:latin typeface="Helvetica Neue"/>
+              </a:rPr>
+              <a:t>research use only</a:t>
+            </a:r>
+            <a:r>
+              <a:rPr sz="1400" b="0" i="0">
+                <a:solidFill>
+                  <a:srgbClr val="1A1A1A"/>
+                </a:solidFill>
+                <a:latin typeface="Helvetica Neue"/>
+              </a:rPr>
+              <a:t>. There is no FDA authorization. The only pediatric-specific US bone-age clearance is a different product, EFAI Bonesuite XR Bone Age Pro (ages 2–16, K234042, 2024).</a:t>
+            </a:r>
+          </a:p>
+          <a:p>
+            <a:pPr algn="l" marL="256032" indent="-256032">
+              <a:spcAft>
+                <a:spcPts val="489"/>
+              </a:spcAft>
+              <a:buChar char="•"/>
+            </a:pPr>
+            <a:r>
+              <a:rPr sz="1400" b="1" i="0">
+                <a:solidFill>
+                  <a:srgbClr val="1A1A1A"/>
+                </a:solidFill>
+                <a:latin typeface="Helvetica Neue"/>
+              </a:rPr>
+              <a:t>What it tells us about the market</a:t>
+            </a:r>
+            <a:r>
+              <a:rPr sz="1400" b="0" i="0">
+                <a:solidFill>
+                  <a:srgbClr val="1A1A1A"/>
+                </a:solidFill>
+                <a:latin typeface="Helvetica Neue"/>
+              </a:rPr>
+              <a:t>: pediatric-native tools exist and work. The bottleneck is a US regulatory and commercial path, not the science.</a:t>
             </a:r>
           </a:p>
         </p:txBody>
@@ -42142,7 +42190,7 @@
         </p:nvSpPr>
         <p:spPr>
           <a:xfrm>
-            <a:off x="411480" y="2890393"/>
+            <a:off x="411480" y="3806063"/>
             <a:ext cx="11368735" cy="580390"/>
           </a:xfrm>
           <a:prstGeom prst="rect">
@@ -42177,7 +42225,7 @@
                 </a:solidFill>
                 <a:latin typeface="Helvetica Neue"/>
               </a:rPr>
-              <a:t>: prioritize representative data, validation, and neglected clinical needs. This review maps research activity; it does not compare model accuracy or establish clinical readiness.</a:t>
+              <a:t>: when someone says “there is no pediatric AI”, the accurate statement is that the best pediatric AI is not licensed here.</a:t>
             </a:r>
           </a:p>
         </p:txBody>
@@ -42212,7 +42260,7 @@
                 </a:solidFill>
                 <a:latin typeface="Helvetica Neue"/>
               </a:rPr>
-              <a:t>50 / 54</a:t>
+              <a:t>50 / 58</a:t>
             </a:r>
           </a:p>
         </p:txBody>
@@ -42282,7 +42330,7 @@
                 </a:solidFill>
                 <a:latin typeface="Helvetica Neue"/>
               </a:rPr>
-              <a:t>ACR white paper: the pediatric AI gap</a:t>
+              <a:t>Product 2: BoneView — read the anatomy, not just the age range</a:t>
             </a:r>
           </a:p>
         </p:txBody>
@@ -42317,7 +42365,7 @@
                 </a:solidFill>
                 <a:latin typeface="Helvetica Neue"/>
               </a:rPr>
-              <a:t>REVIEWS</a:t>
+              <a:t>COMMERCIAL SOFTWARE</a:t>
             </a:r>
           </a:p>
         </p:txBody>
@@ -42356,25 +42404,7 @@
                 </a:solidFill>
                 <a:latin typeface="Helvetica Neue"/>
               </a:rPr>
-              <a:t>Sammer et al., </a:t>
-            </a:r>
-            <a:r>
-              <a:rPr sz="1100" b="0" i="1">
-                <a:solidFill>
-                  <a:srgbClr val="1A1A1A"/>
-                </a:solidFill>
-                <a:latin typeface="Helvetica Neue"/>
-              </a:rPr>
-              <a:t>J Am Coll Radiol</a:t>
-            </a:r>
-            <a:r>
-              <a:rPr sz="1100" b="0" i="0">
-                <a:solidFill>
-                  <a:srgbClr val="1A1A1A"/>
-                </a:solidFill>
-                <a:latin typeface="Helvetica Neue"/>
-              </a:rPr>
-              <a:t> 2023;20:730–737 (https://doi.org/10.1016/j.jacr.2023.06.003doi 10.1016/j.jacr.2023.06.003)</a:t>
+              <a:t>Gleamer, France — fracture / trauma; US clearance K222176 (BoneView 1.1-US, 2023)</a:t>
             </a:r>
           </a:p>
         </p:txBody>
@@ -42388,7 +42418,7 @@
         <p:spPr>
           <a:xfrm>
             <a:off x="411480" y="1258951"/>
-            <a:ext cx="11368735" cy="2322830"/>
+            <a:ext cx="11368735" cy="2260599"/>
           </a:xfrm>
           <a:prstGeom prst="rect">
             <a:avLst/>
@@ -42414,7 +42444,7 @@
                 </a:solidFill>
                 <a:latin typeface="Helvetica Neue"/>
               </a:rPr>
-              <a:t>Scope</a:t>
+              <a:t>What it does</a:t>
             </a:r>
             <a:r>
               <a:rPr sz="1400" b="0" i="0">
@@ -42423,7 +42453,25 @@
                 </a:solidFill>
                 <a:latin typeface="Helvetica Neue"/>
               </a:rPr>
-              <a:t>: ACR Pediatric AI Workgroup white paper framing limited access to pediatric AI as a health equity issue.</a:t>
+              <a:t>: flags suspected fractures on trauma radiographs as regions of interest beside the image. The international suite also covers dislocations, effusions and focal bone lesions; </a:t>
+            </a:r>
+            <a:r>
+              <a:rPr sz="1400" b="1" i="0">
+                <a:solidFill>
+                  <a:srgbClr val="1A1A1A"/>
+                </a:solidFill>
+                <a:latin typeface="Helvetica Neue"/>
+              </a:rPr>
+              <a:t>the US clearance is fracture detection only</a:t>
+            </a:r>
+            <a:r>
+              <a:rPr sz="1400" b="0" i="0">
+                <a:solidFill>
+                  <a:srgbClr val="1A1A1A"/>
+                </a:solidFill>
+                <a:latin typeface="Helvetica Neue"/>
+              </a:rPr>
+              <a:t>.</a:t>
             </a:r>
           </a:p>
           <a:p>
@@ -42440,7 +42488,7 @@
                 </a:solidFill>
                 <a:latin typeface="Helvetica Neue"/>
               </a:rPr>
-              <a:t>Availability</a:t>
+              <a:t>The indication is narrower than “ages 2–21”</a:t>
             </a:r>
             <a:r>
               <a:rPr sz="1400" b="0" i="0">
@@ -42449,7 +42497,43 @@
                 </a:solidFill>
                 <a:latin typeface="Helvetica Neue"/>
               </a:rPr>
-              <a:t>: at the time of the review, only 6 of more than 200 FDA-cleared tools in the ACR catalog indicated pediatric use (about 3%).</a:t>
+              <a:t>: K222176 permits ages 2–21 for </a:t>
+            </a:r>
+            <a:r>
+              <a:rPr sz="1400" b="1" i="0">
+                <a:solidFill>
+                  <a:srgbClr val="1A1A1A"/>
+                </a:solidFill>
+                <a:latin typeface="Helvetica Neue"/>
+              </a:rPr>
+              <a:t>specified extremity views</a:t>
+            </a:r>
+            <a:r>
+              <a:rPr sz="1400" b="0" i="0">
+                <a:solidFill>
+                  <a:srgbClr val="1A1A1A"/>
+                </a:solidFill>
+                <a:latin typeface="Helvetica Neue"/>
+              </a:rPr>
+              <a:t>, clavicle included. Pelvis, hip, femur, ribs and spine are </a:t>
+            </a:r>
+            <a:r>
+              <a:rPr sz="1400" b="1" i="0">
+                <a:solidFill>
+                  <a:srgbClr val="1A1A1A"/>
+                </a:solidFill>
+                <a:latin typeface="Helvetica Neue"/>
+              </a:rPr>
+              <a:t>adult-only</a:t>
+            </a:r>
+            <a:r>
+              <a:rPr sz="1400" b="0" i="0">
+                <a:solidFill>
+                  <a:srgbClr val="1A1A1A"/>
+                </a:solidFill>
+                <a:latin typeface="Helvetica Neue"/>
+              </a:rPr>
+              <a:t> in that summary — a child with a suspected hip or rib fracture is outside the pediatric indication.</a:t>
             </a:r>
           </a:p>
           <a:p>
@@ -42466,7 +42550,7 @@
                 </a:solidFill>
                 <a:latin typeface="Helvetica Neue"/>
               </a:rPr>
-              <a:t>Why adult AI may fail</a:t>
+              <a:t>What the real-life pediatric evidence shows</a:t>
             </a:r>
             <a:r>
               <a:rPr sz="1400" b="0" i="0">
@@ -42475,7 +42559,43 @@
                 </a:solidFill>
                 <a:latin typeface="Helvetica Neue"/>
               </a:rPr>
-              <a:t>: growth, disease patterns, and imaging protocols differ; published studies show uneven performance across pediatric subgroups.</a:t>
+              <a:t>: the one pediatric ED evaluation of a cleared fracture detector (Ziegner et al., </a:t>
+            </a:r>
+            <a:r>
+              <a:rPr sz="1400" b="0" i="1">
+                <a:solidFill>
+                  <a:srgbClr val="1A1A1A"/>
+                </a:solidFill>
+                <a:latin typeface="Helvetica Neue"/>
+              </a:rPr>
+              <a:t>Eur Radiol</a:t>
+            </a:r>
+            <a:r>
+              <a:rPr sz="1400" b="0" i="0">
+                <a:solidFill>
+                  <a:srgbClr val="1A1A1A"/>
+                </a:solidFill>
+                <a:latin typeface="Helvetica Neue"/>
+              </a:rPr>
+              <a:t> 2025, 1,672 radiographs) found 92% stand-alone sensitivity but only </a:t>
+            </a:r>
+            <a:r>
+              <a:rPr sz="1400" b="1" i="0">
+                <a:solidFill>
+                  <a:srgbClr val="1A1A1A"/>
+                </a:solidFill>
+                <a:latin typeface="Helvetica Neue"/>
+              </a:rPr>
+              <a:t>68% for radial condyle fractures</a:t>
+            </a:r>
+            <a:r>
+              <a:rPr sz="1400" b="0" i="0">
+                <a:solidFill>
+                  <a:srgbClr val="1A1A1A"/>
+                </a:solidFill>
+                <a:latin typeface="Helvetica Neue"/>
+              </a:rPr>
+              <a:t>, and residents' accuracy rose 88% → 90%.</a:t>
             </a:r>
           </a:p>
           <a:p>
@@ -42492,7 +42612,7 @@
                 </a:solidFill>
                 <a:latin typeface="Helvetica Neue"/>
               </a:rPr>
-              <a:t>Barriers</a:t>
+              <a:t>The failure mode to watch</a:t>
             </a:r>
             <a:r>
               <a:rPr sz="1400" b="0" i="0">
@@ -42501,58 +42621,62 @@
                 </a:solidFill>
                 <a:latin typeface="Helvetica Neue"/>
               </a:rPr>
-              <a:t>: scarce labeled pediatric data, consent and privacy concerns, and weak financial incentives for smaller pediatric markets.</a:t>
-            </a:r>
-          </a:p>
-          <a:p>
-            <a:pPr algn="l" marL="256032" indent="-256032">
-              <a:spcAft>
-                <a:spcPts val="489"/>
-              </a:spcAft>
-              <a:buChar char="•"/>
-            </a:pPr>
-            <a:r>
-              <a:rPr sz="1400" b="1" i="0">
-                <a:solidFill>
-                  <a:srgbClr val="1A1A1A"/>
-                </a:solidFill>
-                <a:latin typeface="Helvetica Neue"/>
-              </a:rPr>
-              <a:t>Recommendations</a:t>
-            </a:r>
-            <a:r>
-              <a:rPr sz="1400" b="0" i="0">
-                <a:solidFill>
-                  <a:srgbClr val="1A1A1A"/>
-                </a:solidFill>
-                <a:latin typeface="Helvetica Neue"/>
-              </a:rPr>
-              <a:t>: validate in children, disclose age-specific evidence, fund pediatric development, involve families, and protect pediatric workflows. The authors introduce </a:t>
-            </a:r>
-            <a:r>
-              <a:rPr sz="1400" b="0" i="1">
-                <a:solidFill>
-                  <a:srgbClr val="1A1A1A"/>
-                </a:solidFill>
-                <a:latin typeface="Helvetica Neue"/>
-              </a:rPr>
-              <a:t>Image IntelliGently</a:t>
-            </a:r>
-            <a:r>
-              <a:rPr sz="1400" b="0" i="0">
-                <a:solidFill>
-                  <a:srgbClr val="1A1A1A"/>
-                </a:solidFill>
-                <a:latin typeface="Helvetica Neue"/>
-              </a:rPr>
-              <a:t> to advance this work.</a:t>
+              <a:t>: in 2% of cases readers abandoned a correct diagnosis after seeing the AI.</a:t>
             </a:r>
           </a:p>
         </p:txBody>
       </p:sp>
       <p:sp>
         <p:nvSpPr>
-          <p:cNvPr id="6" name="page number"/>
+          <p:cNvPr id="6" name="TextBox 5"/>
+          <p:cNvSpPr txBox="1"/>
+          <p:nvPr/>
+        </p:nvSpPr>
+        <p:spPr>
+          <a:xfrm>
+            <a:off x="411480" y="3592703"/>
+            <a:ext cx="11368735" cy="367030"/>
+          </a:xfrm>
+          <a:prstGeom prst="rect">
+            <a:avLst/>
+          </a:prstGeom>
+          <a:noFill/>
+        </p:spPr>
+        <p:txBody>
+          <a:bodyPr wrap="square" lIns="45720" rIns="45720" tIns="27432" bIns="27432" anchor="t">
+            <a:spAutoFit/>
+          </a:bodyPr>
+          <a:lstStyle/>
+          <a:p>
+            <a:pPr algn="l">
+              <a:spcAft>
+                <a:spcPts val="489"/>
+              </a:spcAft>
+            </a:pPr>
+            <a:r>
+              <a:rPr sz="1400" b="1" i="0">
+                <a:solidFill>
+                  <a:srgbClr val="1A1A1A"/>
+                </a:solidFill>
+                <a:latin typeface="Helvetica Neue"/>
+              </a:rPr>
+              <a:t>Take-home</a:t>
+            </a:r>
+            <a:r>
+              <a:rPr sz="1400" b="0" i="0">
+                <a:solidFill>
+                  <a:srgbClr val="1A1A1A"/>
+                </a:solidFill>
+                <a:latin typeface="Helvetica Neue"/>
+              </a:rPr>
+              <a:t>: the most mature pediatric AI market still needs local validation by anatomy, and a reader policy for disagreement.</a:t>
+            </a:r>
+          </a:p>
+        </p:txBody>
+      </p:sp>
+      <p:sp>
+        <p:nvSpPr>
+          <p:cNvPr id="7" name="page number"/>
           <p:cNvSpPr txBox="1"/>
           <p:nvPr/>
         </p:nvSpPr>
@@ -42580,7 +42704,7 @@
                 </a:solidFill>
                 <a:latin typeface="Helvetica Neue"/>
               </a:rPr>
-              <a:t>51 / 54</a:t>
+              <a:t>51 / 58</a:t>
             </a:r>
           </a:p>
         </p:txBody>
@@ -42650,7 +42774,7 @@
                 </a:solidFill>
                 <a:latin typeface="Helvetica Neue"/>
               </a:rPr>
-              <a:t>Multisociety statement: safe pediatric AI implementation</a:t>
+              <a:t>Product 3: Aidoc BriefCase — a pediatric label is not pediatric evidence</a:t>
             </a:r>
           </a:p>
         </p:txBody>
@@ -42685,7 +42809,7 @@
                 </a:solidFill>
                 <a:latin typeface="Helvetica Neue"/>
               </a:rPr>
-              <a:t>REVIEWS</a:t>
+              <a:t>COMMERCIAL SOFTWARE</a:t>
             </a:r>
           </a:p>
         </p:txBody>
@@ -42724,25 +42848,7 @@
                 </a:solidFill>
                 <a:latin typeface="Helvetica Neue"/>
               </a:rPr>
-              <a:t>Shelmerdine et al., </a:t>
-            </a:r>
-            <a:r>
-              <a:rPr sz="1100" b="0" i="1">
-                <a:solidFill>
-                  <a:srgbClr val="1A1A1A"/>
-                </a:solidFill>
-                <a:latin typeface="Helvetica Neue"/>
-              </a:rPr>
-              <a:t>J Am Coll Radiol</a:t>
-            </a:r>
-            <a:r>
-              <a:rPr sz="1100" b="0" i="0">
-                <a:solidFill>
-                  <a:srgbClr val="1A1A1A"/>
-                </a:solidFill>
-                <a:latin typeface="Helvetica Neue"/>
-              </a:rPr>
-              <a:t> 2026;23:89–101 (https://doi.org/10.1016/j.jacr.2025.08.019doi 10.1016/j.jacr.2025.08.019)</a:t>
+              <a:t>Aidoc, Israel — CT/CTA triage and worklist prioritization; e.g.\ K253578 (2026)</a:t>
             </a:r>
           </a:p>
         </p:txBody>
@@ -42756,46 +42862,7 @@
         <p:spPr>
           <a:xfrm>
             <a:off x="411480" y="1258951"/>
-            <a:ext cx="11368735" cy="367030"/>
-          </a:xfrm>
-          <a:prstGeom prst="rect">
-            <a:avLst/>
-          </a:prstGeom>
-          <a:noFill/>
-        </p:spPr>
-        <p:txBody>
-          <a:bodyPr wrap="square" lIns="45720" rIns="45720" tIns="27432" bIns="27432" anchor="t">
-            <a:spAutoFit/>
-          </a:bodyPr>
-          <a:lstStyle/>
-          <a:p>
-            <a:pPr algn="l">
-              <a:spcAft>
-                <a:spcPts val="489"/>
-              </a:spcAft>
-            </a:pPr>
-            <a:r>
-              <a:rPr sz="1400" b="0" i="0">
-                <a:solidFill>
-                  <a:srgbClr val="1A1A1A"/>
-                </a:solidFill>
-                <a:latin typeface="Helvetica Neue"/>
-              </a:rPr>
-              <a:t>ACR, ESPR, SPR, SLARP, AOSPR, and SPIN propose four pillars for safe adoption:</a:t>
-            </a:r>
-          </a:p>
-        </p:txBody>
-      </p:sp>
-      <p:sp>
-        <p:nvSpPr>
-          <p:cNvPr id="6" name="TextBox 5"/>
-          <p:cNvSpPr txBox="1"/>
-          <p:nvPr/>
-        </p:nvSpPr>
-        <p:spPr>
-          <a:xfrm>
-            <a:off x="411480" y="1699133"/>
-            <a:ext cx="11368735" cy="2047240"/>
+            <a:ext cx="11368735" cy="2260600"/>
           </a:xfrm>
           <a:prstGeom prst="rect">
             <a:avLst/>
@@ -42821,7 +42888,7 @@
                 </a:solidFill>
                 <a:latin typeface="Helvetica Neue"/>
               </a:rPr>
-              <a:t>Regulation and purchasing</a:t>
+              <a:t>What it does</a:t>
             </a:r>
             <a:r>
               <a:rPr sz="1400" b="0" i="0">
@@ -42830,7 +42897,7 @@
                 </a:solidFill>
                 <a:latin typeface="Helvetica Neue"/>
               </a:rPr>
-              <a:t>: pediatric labeling and proposed safety ratings; diverse datasets, subgroup performance, transparency, and cybersecurity.</a:t>
+              <a:t>: reads CT and CTA as they arrive and reorders the worklist — intracranial hemorrhage, pulmonary embolism, pneumothorax, cervical-spine and rib fractures, free gas. Triage, not diagnosis, is the product.</a:t>
             </a:r>
           </a:p>
           <a:p>
@@ -42847,7 +42914,7 @@
                 </a:solidFill>
                 <a:latin typeface="Helvetica Neue"/>
               </a:rPr>
-              <a:t>Implementation and integration</a:t>
+              <a:t>The number that matters here</a:t>
             </a:r>
             <a:r>
               <a:rPr sz="1400" b="0" i="0">
@@ -42856,7 +42923,25 @@
                 </a:solidFill>
                 <a:latin typeface="Helvetica Neue"/>
               </a:rPr>
-              <a:t>: define a local clinical need, select tools validated in children, pilot before scaling, and involve pediatric specialists and families.</a:t>
+              <a:t>: Aidoc holds </a:t>
+            </a:r>
+            <a:r>
+              <a:rPr sz="1400" b="1" i="0">
+                <a:solidFill>
+                  <a:srgbClr val="1A1A1A"/>
+                </a:solidFill>
+                <a:latin typeface="Helvetica Neue"/>
+              </a:rPr>
+              <a:t>23 of the 230 pediatric-label-positive</a:t>
+            </a:r>
+            <a:r>
+              <a:rPr sz="1400" b="0" i="0">
+                <a:solidFill>
+                  <a:srgbClr val="1A1A1A"/>
+                </a:solidFill>
+                <a:latin typeface="Helvetica Neue"/>
+              </a:rPr>
+              <a:t> radiology authorizations in our FDA screen, more than any other company.</a:t>
             </a:r>
           </a:p>
           <a:p>
@@ -42873,7 +42958,7 @@
                 </a:solidFill>
                 <a:latin typeface="Helvetica Neue"/>
               </a:rPr>
-              <a:t>Interpretation and postmarket surveillance</a:t>
+              <a:t>What that does and does not mean</a:t>
             </a:r>
             <a:r>
               <a:rPr sz="1400" b="0" i="0">
@@ -42882,7 +42967,25 @@
                 </a:solidFill>
                 <a:latin typeface="Helvetica Neue"/>
               </a:rPr>
-              <a:t>: retain human oversight; audit performance and patient outcomes; manage discrepancies, report adverse events, and address automation bias.</a:t>
+              <a:t>: the decision summaries state a pediatric patient population, but the </a:t>
+            </a:r>
+            <a:r>
+              <a:rPr sz="1400" b="1" i="0">
+                <a:solidFill>
+                  <a:srgbClr val="1A1A1A"/>
+                </a:solidFill>
+                <a:latin typeface="Helvetica Neue"/>
+              </a:rPr>
+              <a:t>performance data behind them is adult</a:t>
+            </a:r>
+            <a:r>
+              <a:rPr sz="1400" b="0" i="0">
+                <a:solidFill>
+                  <a:srgbClr val="1A1A1A"/>
+                </a:solidFill>
+                <a:latin typeface="Helvetica Neue"/>
+              </a:rPr>
+              <a:t>. A population statement in an intended-use paragraph is a candidate for label review, not evidence of testing in children.</a:t>
             </a:r>
           </a:p>
           <a:p>
@@ -42899,7 +43002,7 @@
                 </a:solidFill>
                 <a:latin typeface="Helvetica Neue"/>
               </a:rPr>
-              <a:t>Education</a:t>
+              <a:t>Why it matters operationally</a:t>
             </a:r>
             <a:r>
               <a:rPr sz="1400" b="0" i="0">
@@ -42908,7 +43011,55 @@
                 </a:solidFill>
                 <a:latin typeface="Helvetica Neue"/>
               </a:rPr>
-              <a:t>: foundational AI literacy for all staff, pediatric-specific training, continuing education, and patient/public engagement.</a:t>
+              <a:t>: triage silently changes the order a pediatric radiologist sees cases in. A model tuned on adult prevalence will mis-prioritize a pediatric list, and nobody sees the ranking it produced.</a:t>
+            </a:r>
+          </a:p>
+        </p:txBody>
+      </p:sp>
+      <p:sp>
+        <p:nvSpPr>
+          <p:cNvPr id="6" name="TextBox 5"/>
+          <p:cNvSpPr txBox="1"/>
+          <p:nvPr/>
+        </p:nvSpPr>
+        <p:spPr>
+          <a:xfrm>
+            <a:off x="411480" y="3592703"/>
+            <a:ext cx="11368735" cy="580390"/>
+          </a:xfrm>
+          <a:prstGeom prst="rect">
+            <a:avLst/>
+          </a:prstGeom>
+          <a:noFill/>
+        </p:spPr>
+        <p:txBody>
+          <a:bodyPr wrap="square" lIns="45720" rIns="45720" tIns="27432" bIns="27432" anchor="t">
+            <a:spAutoFit/>
+          </a:bodyPr>
+          <a:lstStyle/>
+          <a:p>
+            <a:pPr algn="l">
+              <a:spcAft>
+                <a:spcPts val="489"/>
+              </a:spcAft>
+            </a:pPr>
+            <a:r>
+              <a:rPr sz="1400" b="1" i="0">
+                <a:solidFill>
+                  <a:srgbClr val="1A1A1A"/>
+                </a:solidFill>
+                <a:latin typeface="Helvetica Neue"/>
+              </a:rPr>
+              <a:t>Take-home</a:t>
+            </a:r>
+            <a:r>
+              <a:rPr sz="1400" b="0" i="0">
+                <a:solidFill>
+                  <a:srgbClr val="1A1A1A"/>
+                </a:solidFill>
+                <a:latin typeface="Helvetica Neue"/>
+              </a:rPr>
+              <a:t>: “FDA-cleared, pediatric population included” is this market's most common and most misleading claim. Ask for pediatric subgroup performance; usually there is none.</a:t>
             </a:r>
           </a:p>
         </p:txBody>
@@ -42943,7 +43094,7 @@
                 </a:solidFill>
                 <a:latin typeface="Helvetica Neue"/>
               </a:rPr>
-              <a:t>52 / 54</a:t>
+              <a:t>52 / 58</a:t>
             </a:r>
           </a:p>
         </p:txBody>
@@ -43013,21 +43164,95 @@
                 </a:solidFill>
                 <a:latin typeface="Helvetica Neue"/>
               </a:rPr>
-              <a:t>Worth knowing as a radiologist</a:t>
+              <a:t>Product 4: deep-learning reconstruction — the AI children actually meet</a:t>
             </a:r>
           </a:p>
         </p:txBody>
       </p:sp>
       <p:sp>
         <p:nvSpPr>
-          <p:cNvPr id="3" name="TextBox 2"/>
+          <p:cNvPr id="3" name="category"/>
+          <p:cNvSpPr txBox="1"/>
+          <p:nvPr/>
+        </p:nvSpPr>
+        <p:spPr>
+          <a:xfrm>
+            <a:off x="8259775" y="18288"/>
+            <a:ext cx="3657600" cy="274320"/>
+          </a:xfrm>
+          <a:prstGeom prst="rect">
+            <a:avLst/>
+          </a:prstGeom>
+          <a:noFill/>
+        </p:spPr>
+        <p:txBody>
+          <a:bodyPr wrap="none">
+            <a:spAutoFit/>
+          </a:bodyPr>
+          <a:lstStyle/>
+          <a:p>
+            <a:pPr algn="r"/>
+            <a:r>
+              <a:rPr sz="1100" b="1">
+                <a:solidFill>
+                  <a:srgbClr val="FFFFFF"/>
+                </a:solidFill>
+                <a:latin typeface="Helvetica Neue"/>
+              </a:rPr>
+              <a:t>COMMERCIAL SOFTWARE</a:t>
+            </a:r>
+          </a:p>
+        </p:txBody>
+      </p:sp>
+      <p:sp>
+        <p:nvSpPr>
+          <p:cNvPr id="4" name="TextBox 3"/>
           <p:cNvSpPr txBox="1"/>
           <p:nvPr/>
         </p:nvSpPr>
         <p:spPr>
           <a:xfrm>
             <a:off x="411480" y="877824"/>
-            <a:ext cx="11368735" cy="3213735"/>
+            <a:ext cx="11368735" cy="307975"/>
+          </a:xfrm>
+          <a:prstGeom prst="rect">
+            <a:avLst/>
+          </a:prstGeom>
+          <a:noFill/>
+        </p:spPr>
+        <p:txBody>
+          <a:bodyPr wrap="square" lIns="45720" rIns="45720" tIns="27432" bIns="27432" anchor="t">
+            <a:spAutoFit/>
+          </a:bodyPr>
+          <a:lstStyle/>
+          <a:p>
+            <a:pPr algn="l">
+              <a:spcAft>
+                <a:spcPts val="384"/>
+              </a:spcAft>
+            </a:pPr>
+            <a:r>
+              <a:rPr sz="1100" b="0" i="0">
+                <a:solidFill>
+                  <a:srgbClr val="1A1A1A"/>
+                </a:solidFill>
+                <a:latin typeface="Helvetica Neue"/>
+              </a:rPr>
+              <a:t>GE AIR Recon DL / TrueFidelity; Siemens Deep Resolve; Canon AiCE; Philips SmartSpeed / Precise Image</a:t>
+            </a:r>
+          </a:p>
+        </p:txBody>
+      </p:sp>
+      <p:sp>
+        <p:nvSpPr>
+          <p:cNvPr id="5" name="TextBox 4"/>
+          <p:cNvSpPr txBox="1"/>
+          <p:nvPr/>
+        </p:nvSpPr>
+        <p:spPr>
+          <a:xfrm>
+            <a:off x="411480" y="1258951"/>
+            <a:ext cx="11368735" cy="2260600"/>
           </a:xfrm>
           <a:prstGeom prst="rect">
             <a:avLst/>
@@ -43042,242 +43267,214 @@
           <a:p>
             <a:pPr algn="l" marL="256032" indent="-256032">
               <a:spcAft>
-                <a:spcPts val="384"/>
+                <a:spcPts val="489"/>
               </a:spcAft>
               <a:buChar char="•"/>
             </a:pPr>
             <a:r>
-              <a:rPr sz="1100" b="1" i="0">
+              <a:rPr sz="1400" b="1" i="0">
                 <a:solidFill>
                   <a:srgbClr val="1A1A1A"/>
                 </a:solidFill>
                 <a:latin typeface="Helvetica Neue"/>
               </a:rPr>
-              <a:t>Deep Learning: A Primer for Radiologists</a:t>
-            </a:r>
-            <a:r>
-              <a:rPr sz="1100" b="0" i="0">
+              <a:t>What it does</a:t>
+            </a:r>
+            <a:r>
+              <a:rPr sz="1400" b="0" i="0">
                 <a:solidFill>
                   <a:srgbClr val="1A1A1A"/>
                 </a:solidFill>
                 <a:latin typeface="Helvetica Neue"/>
               </a:rPr>
-              <a:t> (Radiographics paper, 2017): a helpful introduction to the principles and applications of deep learning in radiology; essential for understanding how AI tools work and their limitations</a:t>
+              <a:t>: reconstructs MRI and CT from noisier, faster or lower-dose raw data — shorter MRI at comparable quality, CT at reduced dose. It is not interpretive: it makes the picture the radiologist then reads.</a:t>
             </a:r>
           </a:p>
           <a:p>
             <a:pPr algn="l" marL="256032" indent="-256032">
               <a:spcAft>
-                <a:spcPts val="384"/>
+                <a:spcPts val="489"/>
               </a:spcAft>
               <a:buChar char="•"/>
             </a:pPr>
             <a:r>
-              <a:rPr sz="1100" b="1" i="0">
+              <a:rPr sz="1400" b="1" i="0">
                 <a:solidFill>
                   <a:srgbClr val="1A1A1A"/>
                 </a:solidFill>
                 <a:latin typeface="Helvetica Neue"/>
               </a:rPr>
-              <a:t>RSNA Pediatric Bone Age Challenge (2017)</a:t>
-            </a:r>
-            <a:r>
-              <a:rPr sz="1100" b="0" i="0">
+              <a:t>Why it is the biggest pediatric win on this list</a:t>
+            </a:r>
+            <a:r>
+              <a:rPr sz="1400" b="0" i="0">
                 <a:solidFill>
                   <a:srgbClr val="1A1A1A"/>
                 </a:solidFill>
                 <a:latin typeface="Helvetica Neue"/>
               </a:rPr>
-              <a:t> (benchmark / dataset): a landmark pediatric benchmark; useful for understanding automated bone-age accuracy and its limits</a:t>
+              <a:t>: a shorter MRI is </a:t>
+            </a:r>
+            <a:r>
+              <a:rPr sz="1400" b="1" i="0">
+                <a:solidFill>
+                  <a:srgbClr val="1A1A1A"/>
+                </a:solidFill>
+                <a:latin typeface="Helvetica Neue"/>
+              </a:rPr>
+              <a:t>fewer sedations</a:t>
+            </a:r>
+            <a:r>
+              <a:rPr sz="1400" b="0" i="0">
+                <a:solidFill>
+                  <a:srgbClr val="1A1A1A"/>
+                </a:solidFill>
+                <a:latin typeface="Helvetica Neue"/>
+              </a:rPr>
+              <a:t>; a lower-dose CT is </a:t>
+            </a:r>
+            <a:r>
+              <a:rPr sz="1400" b="1" i="0">
+                <a:solidFill>
+                  <a:srgbClr val="1A1A1A"/>
+                </a:solidFill>
+                <a:latin typeface="Helvetica Neue"/>
+              </a:rPr>
+              <a:t>less radiation to a growing child</a:t>
+            </a:r>
+            <a:r>
+              <a:rPr sz="1400" b="0" i="0">
+                <a:solidFill>
+                  <a:srgbClr val="1A1A1A"/>
+                </a:solidFill>
+                <a:latin typeface="Helvetica Neue"/>
+              </a:rPr>
+              <a:t>. Neither requires anyone to trust a diagnostic model.</a:t>
             </a:r>
           </a:p>
           <a:p>
             <a:pPr algn="l" marL="256032" indent="-256032">
               <a:spcAft>
-                <a:spcPts val="384"/>
+                <a:spcPts val="489"/>
               </a:spcAft>
               <a:buChar char="•"/>
             </a:pPr>
             <a:r>
-              <a:rPr sz="1100" b="1" i="0">
+              <a:rPr sz="1400" b="1" i="0">
                 <a:solidFill>
                   <a:srgbClr val="1A1A1A"/>
                 </a:solidFill>
                 <a:latin typeface="Helvetica Neue"/>
               </a:rPr>
-              <a:t>Gleamer BoneView / AZmed Rayvolve</a:t>
-            </a:r>
-            <a:r>
-              <a:rPr sz="1100" b="0" i="0">
+              <a:t>The regulatory shape is different</a:t>
+            </a:r>
+            <a:r>
+              <a:rPr sz="1400" b="0" i="0">
                 <a:solidFill>
                   <a:srgbClr val="1A1A1A"/>
                 </a:solidFill>
                 <a:latin typeface="Helvetica Neue"/>
               </a:rPr>
-              <a:t> (clinical products): examples of fracture-detection assistance with pediatric indications; eligibility depends on age, anatomy, and product version</a:t>
+              <a:t>: these are sold across ages as part of the scanner, with vendor-published pediatric protocols rather than a pediatric indication. Philips holds 28 pediatric-label-positive entries, </a:t>
+            </a:r>
+            <a:r>
+              <a:rPr sz="1400" b="1" i="0">
+                <a:solidFill>
+                  <a:srgbClr val="1A1A1A"/>
+                </a:solidFill>
+                <a:latin typeface="Helvetica Neue"/>
+              </a:rPr>
+              <a:t>one</a:t>
+            </a:r>
+            <a:r>
+              <a:rPr sz="1400" b="0" i="0">
+                <a:solidFill>
+                  <a:srgbClr val="1A1A1A"/>
+                </a:solidFill>
+                <a:latin typeface="Helvetica Neue"/>
+              </a:rPr>
+              <a:t> of which is software; the rest are scanner labels listing pediatric imaging as an application.</a:t>
             </a:r>
           </a:p>
           <a:p>
             <a:pPr algn="l" marL="256032" indent="-256032">
               <a:spcAft>
-                <a:spcPts val="384"/>
+                <a:spcPts val="489"/>
               </a:spcAft>
               <a:buChar char="•"/>
             </a:pPr>
             <a:r>
-              <a:rPr sz="1100" b="1" i="0">
+              <a:rPr sz="1400" b="1" i="0">
                 <a:solidFill>
                   <a:srgbClr val="1A1A1A"/>
                 </a:solidFill>
                 <a:latin typeface="Helvetica Neue"/>
               </a:rPr>
-              <a:t>FDA AI-enabled device list and linked labeling</a:t>
-            </a:r>
-            <a:r>
-              <a:rPr sz="1100" b="0" i="0">
+              <a:t>The caveat</a:t>
+            </a:r>
+            <a:r>
+              <a:rPr sz="1400" b="0" i="0">
                 <a:solidFill>
                   <a:srgbClr val="1A1A1A"/>
                 </a:solidFill>
                 <a:latin typeface="Helvetica Neue"/>
               </a:rPr>
-              <a:t> (regulatory resource): a starting point for checking authorized use and pediatric age ranges; the list is not exhaustive</a:t>
-            </a:r>
-          </a:p>
-          <a:p>
-            <a:pPr algn="l" marL="256032" indent="-256032">
-              <a:spcAft>
-                <a:spcPts val="384"/>
-              </a:spcAft>
-              <a:buChar char="•"/>
-            </a:pPr>
-            <a:r>
-              <a:rPr sz="1100" b="1" i="0">
-                <a:solidFill>
-                  <a:srgbClr val="1A1A1A"/>
-                </a:solidFill>
-                <a:latin typeface="Helvetica Neue"/>
-              </a:rPr>
-              <a:t>CLAIM checklist (2024 update)</a:t>
-            </a:r>
-            <a:r>
-              <a:rPr sz="1100" b="0" i="0">
-                <a:solidFill>
-                  <a:srgbClr val="1A1A1A"/>
-                </a:solidFill>
-                <a:latin typeface="Helvetica Neue"/>
-              </a:rPr>
-              <a:t> (reporting guideline): check whether data, reference standards, and testing are adequately described; reporting completeness alone does not establish clinical benefit</a:t>
-            </a:r>
-          </a:p>
-          <a:p>
-            <a:pPr algn="l" marL="256032" indent="-256032">
-              <a:spcAft>
-                <a:spcPts val="384"/>
-              </a:spcAft>
-              <a:buChar char="•"/>
-            </a:pPr>
-            <a:r>
-              <a:rPr sz="1100" b="1" i="0">
-                <a:solidFill>
-                  <a:srgbClr val="1A1A1A"/>
-                </a:solidFill>
-                <a:latin typeface="Helvetica Neue"/>
-              </a:rPr>
-              <a:t>TotalSegmentator</a:t>
-            </a:r>
-            <a:r>
-              <a:rPr sz="1100" b="0" i="0">
-                <a:solidFill>
-                  <a:srgbClr val="1A1A1A"/>
-                </a:solidFill>
-                <a:latin typeface="Helvetica Neue"/>
-              </a:rPr>
-              <a:t> (research tool): automated CT / MR organ segmentation for volumes and body composition; check accuracy in children before trusting measurements</a:t>
-            </a:r>
-          </a:p>
-          <a:p>
-            <a:pPr algn="l" marL="256032" indent="-256032">
-              <a:spcAft>
-                <a:spcPts val="384"/>
-              </a:spcAft>
-              <a:buChar char="•"/>
-            </a:pPr>
-            <a:r>
-              <a:rPr sz="1100" b="1" i="0">
-                <a:solidFill>
-                  <a:srgbClr val="1A1A1A"/>
-                </a:solidFill>
-                <a:latin typeface="Helvetica Neue"/>
-              </a:rPr>
-              <a:t>nnU-Net</a:t>
-            </a:r>
-            <a:r>
-              <a:rPr sz="1100" b="0" i="0">
-                <a:solidFill>
-                  <a:srgbClr val="1A1A1A"/>
-                </a:solidFill>
-                <a:latin typeface="Helvetica Neue"/>
-              </a:rPr>
-              <a:t> (research framework): a strong baseline for training segmentation models; ask whether a new method improves on an appropriate comparator</a:t>
-            </a:r>
-          </a:p>
-          <a:p>
-            <a:pPr algn="l" marL="256032" indent="-256032">
-              <a:spcAft>
-                <a:spcPts val="384"/>
-              </a:spcAft>
-              <a:buChar char="•"/>
-            </a:pPr>
-            <a:r>
-              <a:rPr sz="1100" b="1" i="0">
-                <a:solidFill>
-                  <a:srgbClr val="1A1A1A"/>
-                </a:solidFill>
-                <a:latin typeface="Helvetica Neue"/>
-              </a:rPr>
-              <a:t>MedSAM / segment-anything models</a:t>
-            </a:r>
-            <a:r>
-              <a:rPr sz="1100" b="0" i="0">
-                <a:solidFill>
-                  <a:srgbClr val="1A1A1A"/>
-                </a:solidFill>
-                <a:latin typeface="Helvetica Neue"/>
-              </a:rPr>
-              <a:t> (research models): prompt-guided contours can assist annotation; radiologists still need to review and correct the output</a:t>
-            </a:r>
-          </a:p>
-          <a:p>
-            <a:pPr algn="l" marL="256032" indent="-256032">
-              <a:spcAft>
-                <a:spcPts val="384"/>
-              </a:spcAft>
-              <a:buChar char="•"/>
-            </a:pPr>
-            <a:r>
-              <a:rPr sz="1100" b="1" i="0">
-                <a:solidFill>
-                  <a:srgbClr val="1A1A1A"/>
-                </a:solidFill>
-                <a:latin typeface="Helvetica Neue"/>
-              </a:rPr>
-              <a:t>MONAI</a:t>
-            </a:r>
-            <a:r>
-              <a:rPr sz="1100" b="0" i="0">
-                <a:solidFill>
-                  <a:srgbClr val="1A1A1A"/>
-                </a:solidFill>
-                <a:latin typeface="Helvetica Neue"/>
-              </a:rPr>
-              <a:t> (research framework): infrastructure for imaging-AI development; useful when collaborating with a research team, rather than a ready-to-use diagnostic tool</a:t>
+              <a:t>: dose and time reductions are not fixed properties of the product name — they depend on task, patient size and configuration, and must be measured locally.</a:t>
             </a:r>
           </a:p>
         </p:txBody>
       </p:sp>
       <p:sp>
         <p:nvSpPr>
-          <p:cNvPr id="4" name="page number"/>
+          <p:cNvPr id="6" name="TextBox 5"/>
+          <p:cNvSpPr txBox="1"/>
+          <p:nvPr/>
+        </p:nvSpPr>
+        <p:spPr>
+          <a:xfrm>
+            <a:off x="411480" y="3592703"/>
+            <a:ext cx="11368735" cy="580390"/>
+          </a:xfrm>
+          <a:prstGeom prst="rect">
+            <a:avLst/>
+          </a:prstGeom>
+          <a:noFill/>
+        </p:spPr>
+        <p:txBody>
+          <a:bodyPr wrap="square" lIns="45720" rIns="45720" tIns="27432" bIns="27432" anchor="t">
+            <a:spAutoFit/>
+          </a:bodyPr>
+          <a:lstStyle/>
+          <a:p>
+            <a:pPr algn="l">
+              <a:spcAft>
+                <a:spcPts val="489"/>
+              </a:spcAft>
+            </a:pPr>
+            <a:r>
+              <a:rPr sz="1400" b="1" i="0">
+                <a:solidFill>
+                  <a:srgbClr val="1A1A1A"/>
+                </a:solidFill>
+                <a:latin typeface="Helvetica Neue"/>
+              </a:rPr>
+              <a:t>Take-home</a:t>
+            </a:r>
+            <a:r>
+              <a:rPr sz="1400" b="0" i="0">
+                <a:solidFill>
+                  <a:srgbClr val="1A1A1A"/>
+                </a:solidFill>
+                <a:latin typeface="Helvetica Neue"/>
+              </a:rPr>
+              <a:t>: most of the pediatric benefit already installed here is non-interpretive AI nobody calls AI, and it is where a validation program should start.</a:t>
+            </a:r>
+          </a:p>
+        </p:txBody>
+      </p:sp>
+      <p:sp>
+        <p:nvSpPr>
+          <p:cNvPr id="7" name="page number"/>
           <p:cNvSpPr txBox="1"/>
           <p:nvPr/>
         </p:nvSpPr>
@@ -43305,7 +43502,7 @@
                 </a:solidFill>
                 <a:latin typeface="Helvetica Neue"/>
               </a:rPr>
-              <a:t>53 / 54</a:t>
+              <a:t>53 / 58</a:t>
             </a:r>
           </a:p>
         </p:txBody>
@@ -43375,6 +43572,1445 @@
                 </a:solidFill>
                 <a:latin typeface="Helvetica Neue"/>
               </a:rPr>
+              <a:t>Kamran review: broader research, stronger validation</a:t>
+            </a:r>
+          </a:p>
+        </p:txBody>
+      </p:sp>
+      <p:sp>
+        <p:nvSpPr>
+          <p:cNvPr id="3" name="category"/>
+          <p:cNvSpPr txBox="1"/>
+          <p:nvPr/>
+        </p:nvSpPr>
+        <p:spPr>
+          <a:xfrm>
+            <a:off x="8259775" y="18288"/>
+            <a:ext cx="3657600" cy="274320"/>
+          </a:xfrm>
+          <a:prstGeom prst="rect">
+            <a:avLst/>
+          </a:prstGeom>
+          <a:noFill/>
+        </p:spPr>
+        <p:txBody>
+          <a:bodyPr wrap="none">
+            <a:spAutoFit/>
+          </a:bodyPr>
+          <a:lstStyle/>
+          <a:p>
+            <a:pPr algn="r"/>
+            <a:r>
+              <a:rPr sz="1100" b="1">
+                <a:solidFill>
+                  <a:srgbClr val="FFFFFF"/>
+                </a:solidFill>
+                <a:latin typeface="Helvetica Neue"/>
+              </a:rPr>
+              <a:t>REVIEWS</a:t>
+            </a:r>
+          </a:p>
+        </p:txBody>
+      </p:sp>
+      <p:sp>
+        <p:nvSpPr>
+          <p:cNvPr id="4" name="TextBox 3"/>
+          <p:cNvSpPr txBox="1"/>
+          <p:nvPr/>
+        </p:nvSpPr>
+        <p:spPr>
+          <a:xfrm>
+            <a:off x="411480" y="877824"/>
+            <a:ext cx="11368735" cy="307975"/>
+          </a:xfrm>
+          <a:prstGeom prst="rect">
+            <a:avLst/>
+          </a:prstGeom>
+          <a:noFill/>
+        </p:spPr>
+        <p:txBody>
+          <a:bodyPr wrap="square" lIns="45720" rIns="45720" tIns="27432" bIns="27432" anchor="t">
+            <a:spAutoFit/>
+          </a:bodyPr>
+          <a:lstStyle/>
+          <a:p>
+            <a:pPr algn="l">
+              <a:spcAft>
+                <a:spcPts val="384"/>
+              </a:spcAft>
+            </a:pPr>
+            <a:r>
+              <a:rPr sz="1100" b="0" i="0">
+                <a:solidFill>
+                  <a:srgbClr val="1A1A1A"/>
+                </a:solidFill>
+                <a:latin typeface="Helvetica Neue"/>
+              </a:rPr>
+              <a:t>Kamran et al., </a:t>
+            </a:r>
+            <a:r>
+              <a:rPr sz="1100" b="0" i="1">
+                <a:solidFill>
+                  <a:srgbClr val="1A1A1A"/>
+                </a:solidFill>
+                <a:latin typeface="Helvetica Neue"/>
+              </a:rPr>
+              <a:t>Pediatric Radiology</a:t>
+            </a:r>
+            <a:r>
+              <a:rPr sz="1100" b="0" i="0">
+                <a:solidFill>
+                  <a:srgbClr val="1A1A1A"/>
+                </a:solidFill>
+                <a:latin typeface="Helvetica Neue"/>
+              </a:rPr>
+              <a:t> 2026 (https://doi.org/10.1007/s00247-025-06462-5doi 10.1007/s00247-025-06462-5)</a:t>
+            </a:r>
+          </a:p>
+        </p:txBody>
+      </p:sp>
+      <p:sp>
+        <p:nvSpPr>
+          <p:cNvPr id="5" name="TextBox 4"/>
+          <p:cNvSpPr txBox="1"/>
+          <p:nvPr/>
+        </p:nvSpPr>
+        <p:spPr>
+          <a:xfrm>
+            <a:off x="411480" y="1258951"/>
+            <a:ext cx="11368735" cy="1558290"/>
+          </a:xfrm>
+          <a:prstGeom prst="rect">
+            <a:avLst/>
+          </a:prstGeom>
+          <a:noFill/>
+        </p:spPr>
+        <p:txBody>
+          <a:bodyPr wrap="square" lIns="45720" rIns="45720" tIns="27432" bIns="27432" anchor="t">
+            <a:spAutoFit/>
+          </a:bodyPr>
+          <a:lstStyle/>
+          <a:p>
+            <a:pPr algn="l" marL="256032" indent="-256032">
+              <a:spcAft>
+                <a:spcPts val="489"/>
+              </a:spcAft>
+              <a:buChar char="•"/>
+            </a:pPr>
+            <a:r>
+              <a:rPr sz="1400" b="1" i="0">
+                <a:solidFill>
+                  <a:srgbClr val="1A1A1A"/>
+                </a:solidFill>
+                <a:latin typeface="Helvetica Neue"/>
+              </a:rPr>
+              <a:t>A large but concentrated literature</a:t>
+            </a:r>
+            <a:r>
+              <a:rPr sz="1400" b="0" i="0">
+                <a:solidFill>
+                  <a:srgbClr val="1A1A1A"/>
+                </a:solidFill>
+                <a:latin typeface="Helvetica Neue"/>
+              </a:rPr>
+              <a:t>: 789 pediatric-focused original articles (2005–August 2024); 91% addressed image interpretation/diagnosis. Leading applications were bone age (88), pneumonia (65), and brain lesions/tumors (54).</a:t>
+            </a:r>
+          </a:p>
+          <a:p>
+            <a:pPr algn="l" marL="256032" indent="-256032">
+              <a:spcAft>
+                <a:spcPts val="489"/>
+              </a:spcAft>
+              <a:buChar char="•"/>
+            </a:pPr>
+            <a:r>
+              <a:rPr sz="1400" b="1" i="0">
+                <a:solidFill>
+                  <a:srgbClr val="1A1A1A"/>
+                </a:solidFill>
+                <a:latin typeface="Helvetica Neue"/>
+              </a:rPr>
+              <a:t>Generalizability needs stronger evidence</a:t>
+            </a:r>
+            <a:r>
+              <a:rPr sz="1400" b="0" i="0">
+                <a:solidFill>
+                  <a:srgbClr val="1A1A1A"/>
+                </a:solidFill>
+                <a:latin typeface="Helvetica Neue"/>
+              </a:rPr>
+              <a:t>: 65% relied on local hospital datasets. The authors call for diverse, multicenter datasets and prospective validation across pediatric ages, sites, and disease-prevalence settings.</a:t>
+            </a:r>
+          </a:p>
+          <a:p>
+            <a:pPr algn="l" marL="256032" indent="-256032">
+              <a:spcAft>
+                <a:spcPts val="489"/>
+              </a:spcAft>
+              <a:buChar char="•"/>
+            </a:pPr>
+            <a:r>
+              <a:rPr sz="1400" b="1" i="0">
+                <a:solidFill>
+                  <a:srgbClr val="1A1A1A"/>
+                </a:solidFill>
+                <a:latin typeface="Helvetica Neue"/>
+              </a:rPr>
+              <a:t>Broaden the research agenda</a:t>
+            </a:r>
+            <a:r>
+              <a:rPr sz="1400" b="0" i="0">
+                <a:solidFill>
+                  <a:srgbClr val="1A1A1A"/>
+                </a:solidFill>
+                <a:latin typeface="Helvetica Neue"/>
+              </a:rPr>
+              <a:t>: communication, education, policy, and stakeholder perspectives were underrepresented. Include children, families, and clinical teams in development and evaluation.</a:t>
+            </a:r>
+          </a:p>
+        </p:txBody>
+      </p:sp>
+      <p:sp>
+        <p:nvSpPr>
+          <p:cNvPr id="6" name="TextBox 5"/>
+          <p:cNvSpPr txBox="1"/>
+          <p:nvPr/>
+        </p:nvSpPr>
+        <p:spPr>
+          <a:xfrm>
+            <a:off x="411480" y="2890393"/>
+            <a:ext cx="11368735" cy="580390"/>
+          </a:xfrm>
+          <a:prstGeom prst="rect">
+            <a:avLst/>
+          </a:prstGeom>
+          <a:noFill/>
+        </p:spPr>
+        <p:txBody>
+          <a:bodyPr wrap="square" lIns="45720" rIns="45720" tIns="27432" bIns="27432" anchor="t">
+            <a:spAutoFit/>
+          </a:bodyPr>
+          <a:lstStyle/>
+          <a:p>
+            <a:pPr algn="l">
+              <a:spcAft>
+                <a:spcPts val="489"/>
+              </a:spcAft>
+            </a:pPr>
+            <a:r>
+              <a:rPr sz="1400" b="1" i="0">
+                <a:solidFill>
+                  <a:srgbClr val="1A1A1A"/>
+                </a:solidFill>
+                <a:latin typeface="Helvetica Neue"/>
+              </a:rPr>
+              <a:t>Take-home</a:t>
+            </a:r>
+            <a:r>
+              <a:rPr sz="1400" b="0" i="0">
+                <a:solidFill>
+                  <a:srgbClr val="1A1A1A"/>
+                </a:solidFill>
+                <a:latin typeface="Helvetica Neue"/>
+              </a:rPr>
+              <a:t>: prioritize representative data, validation, and neglected clinical needs. This review maps research activity; it does not compare model accuracy or establish clinical readiness.</a:t>
+            </a:r>
+          </a:p>
+        </p:txBody>
+      </p:sp>
+      <p:sp>
+        <p:nvSpPr>
+          <p:cNvPr id="7" name="page number"/>
+          <p:cNvSpPr txBox="1"/>
+          <p:nvPr/>
+        </p:nvSpPr>
+        <p:spPr>
+          <a:xfrm>
+            <a:off x="10728655" y="6510528"/>
+            <a:ext cx="1188720" cy="274320"/>
+          </a:xfrm>
+          <a:prstGeom prst="rect">
+            <a:avLst/>
+          </a:prstGeom>
+          <a:noFill/>
+        </p:spPr>
+        <p:txBody>
+          <a:bodyPr wrap="none">
+            <a:spAutoFit/>
+          </a:bodyPr>
+          <a:lstStyle/>
+          <a:p>
+            <a:pPr algn="r"/>
+            <a:r>
+              <a:rPr sz="1000">
+                <a:solidFill>
+                  <a:srgbClr val="6B6B6B"/>
+                </a:solidFill>
+                <a:latin typeface="Helvetica Neue"/>
+              </a:rPr>
+              <a:t>54 / 58</a:t>
+            </a:r>
+          </a:p>
+        </p:txBody>
+      </p:sp>
+    </p:spTree>
+  </p:cSld>
+  <p:clrMapOvr>
+    <a:masterClrMapping/>
+  </p:clrMapOvr>
+</p:sld>
+</file>
+
+<file path=ppt/slides/slide55.xml><?xml version="1.0" encoding="utf-8"?>
+<p:sld xmlns:a="http://schemas.openxmlformats.org/drawingml/2006/main" xmlns:p="http://schemas.openxmlformats.org/presentationml/2006/main" xmlns:r="http://schemas.openxmlformats.org/officeDocument/2006/relationships">
+  <p:cSld>
+    <p:spTree>
+      <p:nvGrpSpPr>
+        <p:cNvPr id="1" name=""/>
+        <p:cNvGrpSpPr/>
+        <p:nvPr/>
+      </p:nvGrpSpPr>
+      <p:grpSpPr/>
+      <p:sp>
+        <p:nvSpPr>
+          <p:cNvPr id="2" name="title band"/>
+          <p:cNvSpPr/>
+          <p:nvPr/>
+        </p:nvSpPr>
+        <p:spPr>
+          <a:xfrm>
+            <a:off x="0" y="0"/>
+            <a:ext cx="12191695" cy="713232"/>
+          </a:xfrm>
+          <a:prstGeom prst="rect">
+            <a:avLst/>
+          </a:prstGeom>
+          <a:solidFill>
+            <a:srgbClr val="3333B3"/>
+          </a:solidFill>
+          <a:ln>
+            <a:noFill/>
+          </a:ln>
+        </p:spPr>
+        <p:style>
+          <a:lnRef idx="1">
+            <a:schemeClr val="accent1"/>
+          </a:lnRef>
+          <a:fillRef idx="3">
+            <a:schemeClr val="accent1"/>
+          </a:fillRef>
+          <a:effectRef idx="2">
+            <a:schemeClr val="accent1"/>
+          </a:effectRef>
+          <a:fontRef idx="minor">
+            <a:schemeClr val="lt1"/>
+          </a:fontRef>
+        </p:style>
+        <p:txBody>
+          <a:bodyPr rtlCol="0" anchor="b" lIns="411480" bIns="73152" wrap="square"/>
+          <a:lstStyle/>
+          <a:p>
+            <a:pPr algn="l"/>
+            <a:r>
+              <a:rPr sz="2200">
+                <a:solidFill>
+                  <a:srgbClr val="FFFFFF"/>
+                </a:solidFill>
+                <a:latin typeface="Helvetica Neue"/>
+              </a:rPr>
+              <a:t>ACR white paper: the pediatric AI gap</a:t>
+            </a:r>
+          </a:p>
+        </p:txBody>
+      </p:sp>
+      <p:sp>
+        <p:nvSpPr>
+          <p:cNvPr id="3" name="category"/>
+          <p:cNvSpPr txBox="1"/>
+          <p:nvPr/>
+        </p:nvSpPr>
+        <p:spPr>
+          <a:xfrm>
+            <a:off x="8259775" y="18288"/>
+            <a:ext cx="3657600" cy="274320"/>
+          </a:xfrm>
+          <a:prstGeom prst="rect">
+            <a:avLst/>
+          </a:prstGeom>
+          <a:noFill/>
+        </p:spPr>
+        <p:txBody>
+          <a:bodyPr wrap="none">
+            <a:spAutoFit/>
+          </a:bodyPr>
+          <a:lstStyle/>
+          <a:p>
+            <a:pPr algn="r"/>
+            <a:r>
+              <a:rPr sz="1100" b="1">
+                <a:solidFill>
+                  <a:srgbClr val="FFFFFF"/>
+                </a:solidFill>
+                <a:latin typeface="Helvetica Neue"/>
+              </a:rPr>
+              <a:t>REVIEWS</a:t>
+            </a:r>
+          </a:p>
+        </p:txBody>
+      </p:sp>
+      <p:sp>
+        <p:nvSpPr>
+          <p:cNvPr id="4" name="TextBox 3"/>
+          <p:cNvSpPr txBox="1"/>
+          <p:nvPr/>
+        </p:nvSpPr>
+        <p:spPr>
+          <a:xfrm>
+            <a:off x="411480" y="877824"/>
+            <a:ext cx="11368735" cy="307975"/>
+          </a:xfrm>
+          <a:prstGeom prst="rect">
+            <a:avLst/>
+          </a:prstGeom>
+          <a:noFill/>
+        </p:spPr>
+        <p:txBody>
+          <a:bodyPr wrap="square" lIns="45720" rIns="45720" tIns="27432" bIns="27432" anchor="t">
+            <a:spAutoFit/>
+          </a:bodyPr>
+          <a:lstStyle/>
+          <a:p>
+            <a:pPr algn="l">
+              <a:spcAft>
+                <a:spcPts val="384"/>
+              </a:spcAft>
+            </a:pPr>
+            <a:r>
+              <a:rPr sz="1100" b="0" i="0">
+                <a:solidFill>
+                  <a:srgbClr val="1A1A1A"/>
+                </a:solidFill>
+                <a:latin typeface="Helvetica Neue"/>
+              </a:rPr>
+              <a:t>Sammer et al., </a:t>
+            </a:r>
+            <a:r>
+              <a:rPr sz="1100" b="0" i="1">
+                <a:solidFill>
+                  <a:srgbClr val="1A1A1A"/>
+                </a:solidFill>
+                <a:latin typeface="Helvetica Neue"/>
+              </a:rPr>
+              <a:t>J Am Coll Radiol</a:t>
+            </a:r>
+            <a:r>
+              <a:rPr sz="1100" b="0" i="0">
+                <a:solidFill>
+                  <a:srgbClr val="1A1A1A"/>
+                </a:solidFill>
+                <a:latin typeface="Helvetica Neue"/>
+              </a:rPr>
+              <a:t> 2023;20:730–737 (https://doi.org/10.1016/j.jacr.2023.06.003doi 10.1016/j.jacr.2023.06.003)</a:t>
+            </a:r>
+          </a:p>
+        </p:txBody>
+      </p:sp>
+      <p:sp>
+        <p:nvSpPr>
+          <p:cNvPr id="5" name="TextBox 4"/>
+          <p:cNvSpPr txBox="1"/>
+          <p:nvPr/>
+        </p:nvSpPr>
+        <p:spPr>
+          <a:xfrm>
+            <a:off x="411480" y="1258951"/>
+            <a:ext cx="11368735" cy="2322830"/>
+          </a:xfrm>
+          <a:prstGeom prst="rect">
+            <a:avLst/>
+          </a:prstGeom>
+          <a:noFill/>
+        </p:spPr>
+        <p:txBody>
+          <a:bodyPr wrap="square" lIns="45720" rIns="45720" tIns="27432" bIns="27432" anchor="t">
+            <a:spAutoFit/>
+          </a:bodyPr>
+          <a:lstStyle/>
+          <a:p>
+            <a:pPr algn="l" marL="256032" indent="-256032">
+              <a:spcAft>
+                <a:spcPts val="489"/>
+              </a:spcAft>
+              <a:buChar char="•"/>
+            </a:pPr>
+            <a:r>
+              <a:rPr sz="1400" b="1" i="0">
+                <a:solidFill>
+                  <a:srgbClr val="1A1A1A"/>
+                </a:solidFill>
+                <a:latin typeface="Helvetica Neue"/>
+              </a:rPr>
+              <a:t>Scope</a:t>
+            </a:r>
+            <a:r>
+              <a:rPr sz="1400" b="0" i="0">
+                <a:solidFill>
+                  <a:srgbClr val="1A1A1A"/>
+                </a:solidFill>
+                <a:latin typeface="Helvetica Neue"/>
+              </a:rPr>
+              <a:t>: ACR Pediatric AI Workgroup white paper framing limited access to pediatric AI as a health equity issue.</a:t>
+            </a:r>
+          </a:p>
+          <a:p>
+            <a:pPr algn="l" marL="256032" indent="-256032">
+              <a:spcAft>
+                <a:spcPts val="489"/>
+              </a:spcAft>
+              <a:buChar char="•"/>
+            </a:pPr>
+            <a:r>
+              <a:rPr sz="1400" b="1" i="0">
+                <a:solidFill>
+                  <a:srgbClr val="1A1A1A"/>
+                </a:solidFill>
+                <a:latin typeface="Helvetica Neue"/>
+              </a:rPr>
+              <a:t>Availability</a:t>
+            </a:r>
+            <a:r>
+              <a:rPr sz="1400" b="0" i="0">
+                <a:solidFill>
+                  <a:srgbClr val="1A1A1A"/>
+                </a:solidFill>
+                <a:latin typeface="Helvetica Neue"/>
+              </a:rPr>
+              <a:t>: at the time of the review, only 6 of more than 200 FDA-cleared tools in the ACR catalog indicated pediatric use (about 3%).</a:t>
+            </a:r>
+          </a:p>
+          <a:p>
+            <a:pPr algn="l" marL="256032" indent="-256032">
+              <a:spcAft>
+                <a:spcPts val="489"/>
+              </a:spcAft>
+              <a:buChar char="•"/>
+            </a:pPr>
+            <a:r>
+              <a:rPr sz="1400" b="1" i="0">
+                <a:solidFill>
+                  <a:srgbClr val="1A1A1A"/>
+                </a:solidFill>
+                <a:latin typeface="Helvetica Neue"/>
+              </a:rPr>
+              <a:t>Why adult AI may fail</a:t>
+            </a:r>
+            <a:r>
+              <a:rPr sz="1400" b="0" i="0">
+                <a:solidFill>
+                  <a:srgbClr val="1A1A1A"/>
+                </a:solidFill>
+                <a:latin typeface="Helvetica Neue"/>
+              </a:rPr>
+              <a:t>: growth, disease patterns, and imaging protocols differ; published studies show uneven performance across pediatric subgroups.</a:t>
+            </a:r>
+          </a:p>
+          <a:p>
+            <a:pPr algn="l" marL="256032" indent="-256032">
+              <a:spcAft>
+                <a:spcPts val="489"/>
+              </a:spcAft>
+              <a:buChar char="•"/>
+            </a:pPr>
+            <a:r>
+              <a:rPr sz="1400" b="1" i="0">
+                <a:solidFill>
+                  <a:srgbClr val="1A1A1A"/>
+                </a:solidFill>
+                <a:latin typeface="Helvetica Neue"/>
+              </a:rPr>
+              <a:t>Barriers</a:t>
+            </a:r>
+            <a:r>
+              <a:rPr sz="1400" b="0" i="0">
+                <a:solidFill>
+                  <a:srgbClr val="1A1A1A"/>
+                </a:solidFill>
+                <a:latin typeface="Helvetica Neue"/>
+              </a:rPr>
+              <a:t>: scarce labeled pediatric data, consent and privacy concerns, and weak financial incentives for smaller pediatric markets.</a:t>
+            </a:r>
+          </a:p>
+          <a:p>
+            <a:pPr algn="l" marL="256032" indent="-256032">
+              <a:spcAft>
+                <a:spcPts val="489"/>
+              </a:spcAft>
+              <a:buChar char="•"/>
+            </a:pPr>
+            <a:r>
+              <a:rPr sz="1400" b="1" i="0">
+                <a:solidFill>
+                  <a:srgbClr val="1A1A1A"/>
+                </a:solidFill>
+                <a:latin typeface="Helvetica Neue"/>
+              </a:rPr>
+              <a:t>Recommendations</a:t>
+            </a:r>
+            <a:r>
+              <a:rPr sz="1400" b="0" i="0">
+                <a:solidFill>
+                  <a:srgbClr val="1A1A1A"/>
+                </a:solidFill>
+                <a:latin typeface="Helvetica Neue"/>
+              </a:rPr>
+              <a:t>: validate in children, disclose age-specific evidence, fund pediatric development, involve families, and protect pediatric workflows. The authors introduce </a:t>
+            </a:r>
+            <a:r>
+              <a:rPr sz="1400" b="0" i="1">
+                <a:solidFill>
+                  <a:srgbClr val="1A1A1A"/>
+                </a:solidFill>
+                <a:latin typeface="Helvetica Neue"/>
+              </a:rPr>
+              <a:t>Image IntelliGently</a:t>
+            </a:r>
+            <a:r>
+              <a:rPr sz="1400" b="0" i="0">
+                <a:solidFill>
+                  <a:srgbClr val="1A1A1A"/>
+                </a:solidFill>
+                <a:latin typeface="Helvetica Neue"/>
+              </a:rPr>
+              <a:t> to advance this work.</a:t>
+            </a:r>
+          </a:p>
+        </p:txBody>
+      </p:sp>
+      <p:sp>
+        <p:nvSpPr>
+          <p:cNvPr id="6" name="page number"/>
+          <p:cNvSpPr txBox="1"/>
+          <p:nvPr/>
+        </p:nvSpPr>
+        <p:spPr>
+          <a:xfrm>
+            <a:off x="10728655" y="6510528"/>
+            <a:ext cx="1188720" cy="274320"/>
+          </a:xfrm>
+          <a:prstGeom prst="rect">
+            <a:avLst/>
+          </a:prstGeom>
+          <a:noFill/>
+        </p:spPr>
+        <p:txBody>
+          <a:bodyPr wrap="none">
+            <a:spAutoFit/>
+          </a:bodyPr>
+          <a:lstStyle/>
+          <a:p>
+            <a:pPr algn="r"/>
+            <a:r>
+              <a:rPr sz="1000">
+                <a:solidFill>
+                  <a:srgbClr val="6B6B6B"/>
+                </a:solidFill>
+                <a:latin typeface="Helvetica Neue"/>
+              </a:rPr>
+              <a:t>55 / 58</a:t>
+            </a:r>
+          </a:p>
+        </p:txBody>
+      </p:sp>
+    </p:spTree>
+  </p:cSld>
+  <p:clrMapOvr>
+    <a:masterClrMapping/>
+  </p:clrMapOvr>
+</p:sld>
+</file>
+
+<file path=ppt/slides/slide56.xml><?xml version="1.0" encoding="utf-8"?>
+<p:sld xmlns:a="http://schemas.openxmlformats.org/drawingml/2006/main" xmlns:p="http://schemas.openxmlformats.org/presentationml/2006/main" xmlns:r="http://schemas.openxmlformats.org/officeDocument/2006/relationships">
+  <p:cSld>
+    <p:spTree>
+      <p:nvGrpSpPr>
+        <p:cNvPr id="1" name=""/>
+        <p:cNvGrpSpPr/>
+        <p:nvPr/>
+      </p:nvGrpSpPr>
+      <p:grpSpPr/>
+      <p:sp>
+        <p:nvSpPr>
+          <p:cNvPr id="2" name="title band"/>
+          <p:cNvSpPr/>
+          <p:nvPr/>
+        </p:nvSpPr>
+        <p:spPr>
+          <a:xfrm>
+            <a:off x="0" y="0"/>
+            <a:ext cx="12191695" cy="713232"/>
+          </a:xfrm>
+          <a:prstGeom prst="rect">
+            <a:avLst/>
+          </a:prstGeom>
+          <a:solidFill>
+            <a:srgbClr val="3333B3"/>
+          </a:solidFill>
+          <a:ln>
+            <a:noFill/>
+          </a:ln>
+        </p:spPr>
+        <p:style>
+          <a:lnRef idx="1">
+            <a:schemeClr val="accent1"/>
+          </a:lnRef>
+          <a:fillRef idx="3">
+            <a:schemeClr val="accent1"/>
+          </a:fillRef>
+          <a:effectRef idx="2">
+            <a:schemeClr val="accent1"/>
+          </a:effectRef>
+          <a:fontRef idx="minor">
+            <a:schemeClr val="lt1"/>
+          </a:fontRef>
+        </p:style>
+        <p:txBody>
+          <a:bodyPr rtlCol="0" anchor="b" lIns="411480" bIns="73152" wrap="square"/>
+          <a:lstStyle/>
+          <a:p>
+            <a:pPr algn="l"/>
+            <a:r>
+              <a:rPr sz="2200">
+                <a:solidFill>
+                  <a:srgbClr val="FFFFFF"/>
+                </a:solidFill>
+                <a:latin typeface="Helvetica Neue"/>
+              </a:rPr>
+              <a:t>Multisociety statement: safe pediatric AI implementation</a:t>
+            </a:r>
+          </a:p>
+        </p:txBody>
+      </p:sp>
+      <p:sp>
+        <p:nvSpPr>
+          <p:cNvPr id="3" name="category"/>
+          <p:cNvSpPr txBox="1"/>
+          <p:nvPr/>
+        </p:nvSpPr>
+        <p:spPr>
+          <a:xfrm>
+            <a:off x="8259775" y="18288"/>
+            <a:ext cx="3657600" cy="274320"/>
+          </a:xfrm>
+          <a:prstGeom prst="rect">
+            <a:avLst/>
+          </a:prstGeom>
+          <a:noFill/>
+        </p:spPr>
+        <p:txBody>
+          <a:bodyPr wrap="none">
+            <a:spAutoFit/>
+          </a:bodyPr>
+          <a:lstStyle/>
+          <a:p>
+            <a:pPr algn="r"/>
+            <a:r>
+              <a:rPr sz="1100" b="1">
+                <a:solidFill>
+                  <a:srgbClr val="FFFFFF"/>
+                </a:solidFill>
+                <a:latin typeface="Helvetica Neue"/>
+              </a:rPr>
+              <a:t>REVIEWS</a:t>
+            </a:r>
+          </a:p>
+        </p:txBody>
+      </p:sp>
+      <p:sp>
+        <p:nvSpPr>
+          <p:cNvPr id="4" name="TextBox 3"/>
+          <p:cNvSpPr txBox="1"/>
+          <p:nvPr/>
+        </p:nvSpPr>
+        <p:spPr>
+          <a:xfrm>
+            <a:off x="411480" y="877824"/>
+            <a:ext cx="11368735" cy="307975"/>
+          </a:xfrm>
+          <a:prstGeom prst="rect">
+            <a:avLst/>
+          </a:prstGeom>
+          <a:noFill/>
+        </p:spPr>
+        <p:txBody>
+          <a:bodyPr wrap="square" lIns="45720" rIns="45720" tIns="27432" bIns="27432" anchor="t">
+            <a:spAutoFit/>
+          </a:bodyPr>
+          <a:lstStyle/>
+          <a:p>
+            <a:pPr algn="l">
+              <a:spcAft>
+                <a:spcPts val="384"/>
+              </a:spcAft>
+            </a:pPr>
+            <a:r>
+              <a:rPr sz="1100" b="0" i="0">
+                <a:solidFill>
+                  <a:srgbClr val="1A1A1A"/>
+                </a:solidFill>
+                <a:latin typeface="Helvetica Neue"/>
+              </a:rPr>
+              <a:t>Shelmerdine et al., </a:t>
+            </a:r>
+            <a:r>
+              <a:rPr sz="1100" b="0" i="1">
+                <a:solidFill>
+                  <a:srgbClr val="1A1A1A"/>
+                </a:solidFill>
+                <a:latin typeface="Helvetica Neue"/>
+              </a:rPr>
+              <a:t>J Am Coll Radiol</a:t>
+            </a:r>
+            <a:r>
+              <a:rPr sz="1100" b="0" i="0">
+                <a:solidFill>
+                  <a:srgbClr val="1A1A1A"/>
+                </a:solidFill>
+                <a:latin typeface="Helvetica Neue"/>
+              </a:rPr>
+              <a:t> 2026;23:89–101 (https://doi.org/10.1016/j.jacr.2025.08.019doi 10.1016/j.jacr.2025.08.019)</a:t>
+            </a:r>
+          </a:p>
+        </p:txBody>
+      </p:sp>
+      <p:sp>
+        <p:nvSpPr>
+          <p:cNvPr id="5" name="TextBox 4"/>
+          <p:cNvSpPr txBox="1"/>
+          <p:nvPr/>
+        </p:nvSpPr>
+        <p:spPr>
+          <a:xfrm>
+            <a:off x="411480" y="1258951"/>
+            <a:ext cx="11368735" cy="367030"/>
+          </a:xfrm>
+          <a:prstGeom prst="rect">
+            <a:avLst/>
+          </a:prstGeom>
+          <a:noFill/>
+        </p:spPr>
+        <p:txBody>
+          <a:bodyPr wrap="square" lIns="45720" rIns="45720" tIns="27432" bIns="27432" anchor="t">
+            <a:spAutoFit/>
+          </a:bodyPr>
+          <a:lstStyle/>
+          <a:p>
+            <a:pPr algn="l">
+              <a:spcAft>
+                <a:spcPts val="489"/>
+              </a:spcAft>
+            </a:pPr>
+            <a:r>
+              <a:rPr sz="1400" b="0" i="0">
+                <a:solidFill>
+                  <a:srgbClr val="1A1A1A"/>
+                </a:solidFill>
+                <a:latin typeface="Helvetica Neue"/>
+              </a:rPr>
+              <a:t>ACR, ESPR, SPR, SLARP, AOSPR, and SPIN propose four pillars for safe adoption:</a:t>
+            </a:r>
+          </a:p>
+        </p:txBody>
+      </p:sp>
+      <p:sp>
+        <p:nvSpPr>
+          <p:cNvPr id="6" name="TextBox 5"/>
+          <p:cNvSpPr txBox="1"/>
+          <p:nvPr/>
+        </p:nvSpPr>
+        <p:spPr>
+          <a:xfrm>
+            <a:off x="411480" y="1699133"/>
+            <a:ext cx="11368735" cy="2047240"/>
+          </a:xfrm>
+          <a:prstGeom prst="rect">
+            <a:avLst/>
+          </a:prstGeom>
+          <a:noFill/>
+        </p:spPr>
+        <p:txBody>
+          <a:bodyPr wrap="square" lIns="45720" rIns="45720" tIns="27432" bIns="27432" anchor="t">
+            <a:spAutoFit/>
+          </a:bodyPr>
+          <a:lstStyle/>
+          <a:p>
+            <a:pPr algn="l" marL="256032" indent="-256032">
+              <a:spcAft>
+                <a:spcPts val="489"/>
+              </a:spcAft>
+              <a:buChar char="•"/>
+            </a:pPr>
+            <a:r>
+              <a:rPr sz="1400" b="1" i="0">
+                <a:solidFill>
+                  <a:srgbClr val="1A1A1A"/>
+                </a:solidFill>
+                <a:latin typeface="Helvetica Neue"/>
+              </a:rPr>
+              <a:t>Regulation and purchasing</a:t>
+            </a:r>
+            <a:r>
+              <a:rPr sz="1400" b="0" i="0">
+                <a:solidFill>
+                  <a:srgbClr val="1A1A1A"/>
+                </a:solidFill>
+                <a:latin typeface="Helvetica Neue"/>
+              </a:rPr>
+              <a:t>: pediatric labeling and proposed safety ratings; diverse datasets, subgroup performance, transparency, and cybersecurity.</a:t>
+            </a:r>
+          </a:p>
+          <a:p>
+            <a:pPr algn="l" marL="256032" indent="-256032">
+              <a:spcAft>
+                <a:spcPts val="489"/>
+              </a:spcAft>
+              <a:buChar char="•"/>
+            </a:pPr>
+            <a:r>
+              <a:rPr sz="1400" b="1" i="0">
+                <a:solidFill>
+                  <a:srgbClr val="1A1A1A"/>
+                </a:solidFill>
+                <a:latin typeface="Helvetica Neue"/>
+              </a:rPr>
+              <a:t>Implementation and integration</a:t>
+            </a:r>
+            <a:r>
+              <a:rPr sz="1400" b="0" i="0">
+                <a:solidFill>
+                  <a:srgbClr val="1A1A1A"/>
+                </a:solidFill>
+                <a:latin typeface="Helvetica Neue"/>
+              </a:rPr>
+              <a:t>: define a local clinical need, select tools validated in children, pilot before scaling, and involve pediatric specialists and families.</a:t>
+            </a:r>
+          </a:p>
+          <a:p>
+            <a:pPr algn="l" marL="256032" indent="-256032">
+              <a:spcAft>
+                <a:spcPts val="489"/>
+              </a:spcAft>
+              <a:buChar char="•"/>
+            </a:pPr>
+            <a:r>
+              <a:rPr sz="1400" b="1" i="0">
+                <a:solidFill>
+                  <a:srgbClr val="1A1A1A"/>
+                </a:solidFill>
+                <a:latin typeface="Helvetica Neue"/>
+              </a:rPr>
+              <a:t>Interpretation and postmarket surveillance</a:t>
+            </a:r>
+            <a:r>
+              <a:rPr sz="1400" b="0" i="0">
+                <a:solidFill>
+                  <a:srgbClr val="1A1A1A"/>
+                </a:solidFill>
+                <a:latin typeface="Helvetica Neue"/>
+              </a:rPr>
+              <a:t>: retain human oversight; audit performance and patient outcomes; manage discrepancies, report adverse events, and address automation bias.</a:t>
+            </a:r>
+          </a:p>
+          <a:p>
+            <a:pPr algn="l" marL="256032" indent="-256032">
+              <a:spcAft>
+                <a:spcPts val="489"/>
+              </a:spcAft>
+              <a:buChar char="•"/>
+            </a:pPr>
+            <a:r>
+              <a:rPr sz="1400" b="1" i="0">
+                <a:solidFill>
+                  <a:srgbClr val="1A1A1A"/>
+                </a:solidFill>
+                <a:latin typeface="Helvetica Neue"/>
+              </a:rPr>
+              <a:t>Education</a:t>
+            </a:r>
+            <a:r>
+              <a:rPr sz="1400" b="0" i="0">
+                <a:solidFill>
+                  <a:srgbClr val="1A1A1A"/>
+                </a:solidFill>
+                <a:latin typeface="Helvetica Neue"/>
+              </a:rPr>
+              <a:t>: foundational AI literacy for all staff, pediatric-specific training, continuing education, and patient/public engagement.</a:t>
+            </a:r>
+          </a:p>
+        </p:txBody>
+      </p:sp>
+      <p:sp>
+        <p:nvSpPr>
+          <p:cNvPr id="7" name="page number"/>
+          <p:cNvSpPr txBox="1"/>
+          <p:nvPr/>
+        </p:nvSpPr>
+        <p:spPr>
+          <a:xfrm>
+            <a:off x="10728655" y="6510528"/>
+            <a:ext cx="1188720" cy="274320"/>
+          </a:xfrm>
+          <a:prstGeom prst="rect">
+            <a:avLst/>
+          </a:prstGeom>
+          <a:noFill/>
+        </p:spPr>
+        <p:txBody>
+          <a:bodyPr wrap="none">
+            <a:spAutoFit/>
+          </a:bodyPr>
+          <a:lstStyle/>
+          <a:p>
+            <a:pPr algn="r"/>
+            <a:r>
+              <a:rPr sz="1000">
+                <a:solidFill>
+                  <a:srgbClr val="6B6B6B"/>
+                </a:solidFill>
+                <a:latin typeface="Helvetica Neue"/>
+              </a:rPr>
+              <a:t>56 / 58</a:t>
+            </a:r>
+          </a:p>
+        </p:txBody>
+      </p:sp>
+    </p:spTree>
+  </p:cSld>
+  <p:clrMapOvr>
+    <a:masterClrMapping/>
+  </p:clrMapOvr>
+</p:sld>
+</file>
+
+<file path=ppt/slides/slide57.xml><?xml version="1.0" encoding="utf-8"?>
+<p:sld xmlns:a="http://schemas.openxmlformats.org/drawingml/2006/main" xmlns:p="http://schemas.openxmlformats.org/presentationml/2006/main" xmlns:r="http://schemas.openxmlformats.org/officeDocument/2006/relationships">
+  <p:cSld>
+    <p:spTree>
+      <p:nvGrpSpPr>
+        <p:cNvPr id="1" name=""/>
+        <p:cNvGrpSpPr/>
+        <p:nvPr/>
+      </p:nvGrpSpPr>
+      <p:grpSpPr/>
+      <p:sp>
+        <p:nvSpPr>
+          <p:cNvPr id="2" name="title band"/>
+          <p:cNvSpPr/>
+          <p:nvPr/>
+        </p:nvSpPr>
+        <p:spPr>
+          <a:xfrm>
+            <a:off x="0" y="0"/>
+            <a:ext cx="12191695" cy="713232"/>
+          </a:xfrm>
+          <a:prstGeom prst="rect">
+            <a:avLst/>
+          </a:prstGeom>
+          <a:solidFill>
+            <a:srgbClr val="3333B3"/>
+          </a:solidFill>
+          <a:ln>
+            <a:noFill/>
+          </a:ln>
+        </p:spPr>
+        <p:style>
+          <a:lnRef idx="1">
+            <a:schemeClr val="accent1"/>
+          </a:lnRef>
+          <a:fillRef idx="3">
+            <a:schemeClr val="accent1"/>
+          </a:fillRef>
+          <a:effectRef idx="2">
+            <a:schemeClr val="accent1"/>
+          </a:effectRef>
+          <a:fontRef idx="minor">
+            <a:schemeClr val="lt1"/>
+          </a:fontRef>
+        </p:style>
+        <p:txBody>
+          <a:bodyPr rtlCol="0" anchor="b" lIns="411480" bIns="73152" wrap="square"/>
+          <a:lstStyle/>
+          <a:p>
+            <a:pPr algn="l"/>
+            <a:r>
+              <a:rPr sz="2200">
+                <a:solidFill>
+                  <a:srgbClr val="FFFFFF"/>
+                </a:solidFill>
+                <a:latin typeface="Helvetica Neue"/>
+              </a:rPr>
+              <a:t>Worth knowing as a radiologist</a:t>
+            </a:r>
+          </a:p>
+        </p:txBody>
+      </p:sp>
+      <p:sp>
+        <p:nvSpPr>
+          <p:cNvPr id="3" name="TextBox 2"/>
+          <p:cNvSpPr txBox="1"/>
+          <p:nvPr/>
+        </p:nvSpPr>
+        <p:spPr>
+          <a:xfrm>
+            <a:off x="411480" y="877824"/>
+            <a:ext cx="11368735" cy="3213735"/>
+          </a:xfrm>
+          <a:prstGeom prst="rect">
+            <a:avLst/>
+          </a:prstGeom>
+          <a:noFill/>
+        </p:spPr>
+        <p:txBody>
+          <a:bodyPr wrap="square" lIns="45720" rIns="45720" tIns="27432" bIns="27432" anchor="t">
+            <a:spAutoFit/>
+          </a:bodyPr>
+          <a:lstStyle/>
+          <a:p>
+            <a:pPr algn="l" marL="256032" indent="-256032">
+              <a:spcAft>
+                <a:spcPts val="384"/>
+              </a:spcAft>
+              <a:buChar char="•"/>
+            </a:pPr>
+            <a:r>
+              <a:rPr sz="1100" b="1" i="0">
+                <a:solidFill>
+                  <a:srgbClr val="1A1A1A"/>
+                </a:solidFill>
+                <a:latin typeface="Helvetica Neue"/>
+              </a:rPr>
+              <a:t>Deep Learning: A Primer for Radiologists</a:t>
+            </a:r>
+            <a:r>
+              <a:rPr sz="1100" b="0" i="0">
+                <a:solidFill>
+                  <a:srgbClr val="1A1A1A"/>
+                </a:solidFill>
+                <a:latin typeface="Helvetica Neue"/>
+              </a:rPr>
+              <a:t> (Radiographics paper, 2017): a helpful introduction to the principles and applications of deep learning in radiology; essential for understanding how AI tools work and their limitations</a:t>
+            </a:r>
+          </a:p>
+          <a:p>
+            <a:pPr algn="l" marL="256032" indent="-256032">
+              <a:spcAft>
+                <a:spcPts val="384"/>
+              </a:spcAft>
+              <a:buChar char="•"/>
+            </a:pPr>
+            <a:r>
+              <a:rPr sz="1100" b="1" i="0">
+                <a:solidFill>
+                  <a:srgbClr val="1A1A1A"/>
+                </a:solidFill>
+                <a:latin typeface="Helvetica Neue"/>
+              </a:rPr>
+              <a:t>RSNA Pediatric Bone Age Challenge (2017)</a:t>
+            </a:r>
+            <a:r>
+              <a:rPr sz="1100" b="0" i="0">
+                <a:solidFill>
+                  <a:srgbClr val="1A1A1A"/>
+                </a:solidFill>
+                <a:latin typeface="Helvetica Neue"/>
+              </a:rPr>
+              <a:t> (benchmark / dataset): a landmark pediatric benchmark; useful for understanding automated bone-age accuracy and its limits</a:t>
+            </a:r>
+          </a:p>
+          <a:p>
+            <a:pPr algn="l" marL="256032" indent="-256032">
+              <a:spcAft>
+                <a:spcPts val="384"/>
+              </a:spcAft>
+              <a:buChar char="•"/>
+            </a:pPr>
+            <a:r>
+              <a:rPr sz="1100" b="1" i="0">
+                <a:solidFill>
+                  <a:srgbClr val="1A1A1A"/>
+                </a:solidFill>
+                <a:latin typeface="Helvetica Neue"/>
+              </a:rPr>
+              <a:t>Gleamer BoneView / AZmed Rayvolve</a:t>
+            </a:r>
+            <a:r>
+              <a:rPr sz="1100" b="0" i="0">
+                <a:solidFill>
+                  <a:srgbClr val="1A1A1A"/>
+                </a:solidFill>
+                <a:latin typeface="Helvetica Neue"/>
+              </a:rPr>
+              <a:t> (clinical products): examples of fracture-detection assistance with pediatric indications; eligibility depends on age, anatomy, and product version</a:t>
+            </a:r>
+          </a:p>
+          <a:p>
+            <a:pPr algn="l" marL="256032" indent="-256032">
+              <a:spcAft>
+                <a:spcPts val="384"/>
+              </a:spcAft>
+              <a:buChar char="•"/>
+            </a:pPr>
+            <a:r>
+              <a:rPr sz="1100" b="1" i="0">
+                <a:solidFill>
+                  <a:srgbClr val="1A1A1A"/>
+                </a:solidFill>
+                <a:latin typeface="Helvetica Neue"/>
+              </a:rPr>
+              <a:t>FDA AI-enabled device list and linked labeling</a:t>
+            </a:r>
+            <a:r>
+              <a:rPr sz="1100" b="0" i="0">
+                <a:solidFill>
+                  <a:srgbClr val="1A1A1A"/>
+                </a:solidFill>
+                <a:latin typeface="Helvetica Neue"/>
+              </a:rPr>
+              <a:t> (regulatory resource): a starting point for checking authorized use and pediatric age ranges; the list is not exhaustive</a:t>
+            </a:r>
+          </a:p>
+          <a:p>
+            <a:pPr algn="l" marL="256032" indent="-256032">
+              <a:spcAft>
+                <a:spcPts val="384"/>
+              </a:spcAft>
+              <a:buChar char="•"/>
+            </a:pPr>
+            <a:r>
+              <a:rPr sz="1100" b="1" i="0">
+                <a:solidFill>
+                  <a:srgbClr val="1A1A1A"/>
+                </a:solidFill>
+                <a:latin typeface="Helvetica Neue"/>
+              </a:rPr>
+              <a:t>CLAIM checklist (2024 update)</a:t>
+            </a:r>
+            <a:r>
+              <a:rPr sz="1100" b="0" i="0">
+                <a:solidFill>
+                  <a:srgbClr val="1A1A1A"/>
+                </a:solidFill>
+                <a:latin typeface="Helvetica Neue"/>
+              </a:rPr>
+              <a:t> (reporting guideline): check whether data, reference standards, and testing are adequately described; reporting completeness alone does not establish clinical benefit</a:t>
+            </a:r>
+          </a:p>
+          <a:p>
+            <a:pPr algn="l" marL="256032" indent="-256032">
+              <a:spcAft>
+                <a:spcPts val="384"/>
+              </a:spcAft>
+              <a:buChar char="•"/>
+            </a:pPr>
+            <a:r>
+              <a:rPr sz="1100" b="1" i="0">
+                <a:solidFill>
+                  <a:srgbClr val="1A1A1A"/>
+                </a:solidFill>
+                <a:latin typeface="Helvetica Neue"/>
+              </a:rPr>
+              <a:t>TotalSegmentator</a:t>
+            </a:r>
+            <a:r>
+              <a:rPr sz="1100" b="0" i="0">
+                <a:solidFill>
+                  <a:srgbClr val="1A1A1A"/>
+                </a:solidFill>
+                <a:latin typeface="Helvetica Neue"/>
+              </a:rPr>
+              <a:t> (research tool): automated CT / MR organ segmentation for volumes and body composition; check accuracy in children before trusting measurements</a:t>
+            </a:r>
+          </a:p>
+          <a:p>
+            <a:pPr algn="l" marL="256032" indent="-256032">
+              <a:spcAft>
+                <a:spcPts val="384"/>
+              </a:spcAft>
+              <a:buChar char="•"/>
+            </a:pPr>
+            <a:r>
+              <a:rPr sz="1100" b="1" i="0">
+                <a:solidFill>
+                  <a:srgbClr val="1A1A1A"/>
+                </a:solidFill>
+                <a:latin typeface="Helvetica Neue"/>
+              </a:rPr>
+              <a:t>nnU-Net</a:t>
+            </a:r>
+            <a:r>
+              <a:rPr sz="1100" b="0" i="0">
+                <a:solidFill>
+                  <a:srgbClr val="1A1A1A"/>
+                </a:solidFill>
+                <a:latin typeface="Helvetica Neue"/>
+              </a:rPr>
+              <a:t> (research framework): a strong baseline for training segmentation models; ask whether a new method improves on an appropriate comparator</a:t>
+            </a:r>
+          </a:p>
+          <a:p>
+            <a:pPr algn="l" marL="256032" indent="-256032">
+              <a:spcAft>
+                <a:spcPts val="384"/>
+              </a:spcAft>
+              <a:buChar char="•"/>
+            </a:pPr>
+            <a:r>
+              <a:rPr sz="1100" b="1" i="0">
+                <a:solidFill>
+                  <a:srgbClr val="1A1A1A"/>
+                </a:solidFill>
+                <a:latin typeface="Helvetica Neue"/>
+              </a:rPr>
+              <a:t>MedSAM / segment-anything models</a:t>
+            </a:r>
+            <a:r>
+              <a:rPr sz="1100" b="0" i="0">
+                <a:solidFill>
+                  <a:srgbClr val="1A1A1A"/>
+                </a:solidFill>
+                <a:latin typeface="Helvetica Neue"/>
+              </a:rPr>
+              <a:t> (research models): prompt-guided contours can assist annotation; radiologists still need to review and correct the output</a:t>
+            </a:r>
+          </a:p>
+          <a:p>
+            <a:pPr algn="l" marL="256032" indent="-256032">
+              <a:spcAft>
+                <a:spcPts val="384"/>
+              </a:spcAft>
+              <a:buChar char="•"/>
+            </a:pPr>
+            <a:r>
+              <a:rPr sz="1100" b="1" i="0">
+                <a:solidFill>
+                  <a:srgbClr val="1A1A1A"/>
+                </a:solidFill>
+                <a:latin typeface="Helvetica Neue"/>
+              </a:rPr>
+              <a:t>MONAI</a:t>
+            </a:r>
+            <a:r>
+              <a:rPr sz="1100" b="0" i="0">
+                <a:solidFill>
+                  <a:srgbClr val="1A1A1A"/>
+                </a:solidFill>
+                <a:latin typeface="Helvetica Neue"/>
+              </a:rPr>
+              <a:t> (research framework): infrastructure for imaging-AI development; useful when collaborating with a research team, rather than a ready-to-use diagnostic tool</a:t>
+            </a:r>
+          </a:p>
+        </p:txBody>
+      </p:sp>
+      <p:sp>
+        <p:nvSpPr>
+          <p:cNvPr id="4" name="page number"/>
+          <p:cNvSpPr txBox="1"/>
+          <p:nvPr/>
+        </p:nvSpPr>
+        <p:spPr>
+          <a:xfrm>
+            <a:off x="10728655" y="6510528"/>
+            <a:ext cx="1188720" cy="274320"/>
+          </a:xfrm>
+          <a:prstGeom prst="rect">
+            <a:avLst/>
+          </a:prstGeom>
+          <a:noFill/>
+        </p:spPr>
+        <p:txBody>
+          <a:bodyPr wrap="none">
+            <a:spAutoFit/>
+          </a:bodyPr>
+          <a:lstStyle/>
+          <a:p>
+            <a:pPr algn="r"/>
+            <a:r>
+              <a:rPr sz="1000">
+                <a:solidFill>
+                  <a:srgbClr val="6B6B6B"/>
+                </a:solidFill>
+                <a:latin typeface="Helvetica Neue"/>
+              </a:rPr>
+              <a:t>57 / 58</a:t>
+            </a:r>
+          </a:p>
+        </p:txBody>
+      </p:sp>
+    </p:spTree>
+  </p:cSld>
+  <p:clrMapOvr>
+    <a:masterClrMapping/>
+  </p:clrMapOvr>
+</p:sld>
+</file>
+
+<file path=ppt/slides/slide58.xml><?xml version="1.0" encoding="utf-8"?>
+<p:sld xmlns:a="http://schemas.openxmlformats.org/drawingml/2006/main" xmlns:p="http://schemas.openxmlformats.org/presentationml/2006/main" xmlns:r="http://schemas.openxmlformats.org/officeDocument/2006/relationships">
+  <p:cSld>
+    <p:spTree>
+      <p:nvGrpSpPr>
+        <p:cNvPr id="1" name=""/>
+        <p:cNvGrpSpPr/>
+        <p:nvPr/>
+      </p:nvGrpSpPr>
+      <p:grpSpPr/>
+      <p:sp>
+        <p:nvSpPr>
+          <p:cNvPr id="2" name="title band"/>
+          <p:cNvSpPr/>
+          <p:nvPr/>
+        </p:nvSpPr>
+        <p:spPr>
+          <a:xfrm>
+            <a:off x="0" y="0"/>
+            <a:ext cx="12191695" cy="713232"/>
+          </a:xfrm>
+          <a:prstGeom prst="rect">
+            <a:avLst/>
+          </a:prstGeom>
+          <a:solidFill>
+            <a:srgbClr val="3333B3"/>
+          </a:solidFill>
+          <a:ln>
+            <a:noFill/>
+          </a:ln>
+        </p:spPr>
+        <p:style>
+          <a:lnRef idx="1">
+            <a:schemeClr val="accent1"/>
+          </a:lnRef>
+          <a:fillRef idx="3">
+            <a:schemeClr val="accent1"/>
+          </a:fillRef>
+          <a:effectRef idx="2">
+            <a:schemeClr val="accent1"/>
+          </a:effectRef>
+          <a:fontRef idx="minor">
+            <a:schemeClr val="lt1"/>
+          </a:fontRef>
+        </p:style>
+        <p:txBody>
+          <a:bodyPr rtlCol="0" anchor="b" lIns="411480" bIns="73152" wrap="square"/>
+          <a:lstStyle/>
+          <a:p>
+            <a:pPr algn="l"/>
+            <a:r>
+              <a:rPr sz="2200">
+                <a:solidFill>
+                  <a:srgbClr val="FFFFFF"/>
+                </a:solidFill>
+                <a:latin typeface="Helvetica Neue"/>
+              </a:rPr>
               <a:t>Recommendations for pediatric radiologists</a:t>
             </a:r>
           </a:p>
@@ -43518,7 +45154,7 @@
                 </a:solidFill>
                 <a:latin typeface="Helvetica Neue"/>
               </a:rPr>
-              <a:t>54 / 54</a:t>
+              <a:t>58 / 58</a:t>
             </a:r>
           </a:p>
         </p:txBody>
@@ -43721,7 +45357,7 @@
                 </a:solidFill>
                 <a:latin typeface="Helvetica Neue"/>
               </a:rPr>
-              <a:t>6 / 54</a:t>
+              <a:t>6 / 58</a:t>
             </a:r>
           </a:p>
         </p:txBody>
@@ -44227,7 +45863,7 @@
                 </a:solidFill>
                 <a:latin typeface="Helvetica Neue"/>
               </a:rPr>
-              <a:t>7 / 54</a:t>
+              <a:t>7 / 58</a:t>
             </a:r>
           </a:p>
         </p:txBody>
@@ -44391,7 +46027,7 @@
                 </a:solidFill>
                 <a:latin typeface="Helvetica Neue"/>
               </a:rPr>
-              <a:t>8 / 54</a:t>
+              <a:t>8 / 58</a:t>
             </a:r>
           </a:p>
         </p:txBody>
@@ -45696,7 +47332,7 @@
                 </a:solidFill>
                 <a:latin typeface="Helvetica Neue"/>
               </a:rPr>
-              <a:t>9 / 54</a:t>
+              <a:t>9 / 58</a:t>
             </a:r>
           </a:p>
         </p:txBody>

--- a/slides/pedrad_ai_slides.pptx
+++ b/slides/pedrad_ai_slides.pptx
@@ -3263,7 +3263,7 @@
                 </a:solidFill>
                 <a:latin typeface="Helvetica Neue"/>
               </a:rPr>
-              <a:t>Joseph Rich, Dr. Amit Sura</a:t>
+              <a:t>Joseph Rich; Amit Sura, MD</a:t>
             </a:r>
           </a:p>
         </p:txBody>
@@ -3333,7 +3333,7 @@
                 </a:solidFill>
                 <a:latin typeface="Helvetica Neue"/>
               </a:rPr>
-              <a:t>1 / 34</a:t>
+              <a:t>1 / 36</a:t>
             </a:r>
           </a:p>
         </p:txBody>
@@ -7020,7 +7020,7 @@
         </p:nvGraphicFramePr>
         <p:xfrm>
           <a:off x="411480" y="877824"/>
-          <a:ext cx="11368734" cy="3209544"/>
+          <a:ext cx="11368733" cy="4855463"/>
         </p:xfrm>
         <a:graphic>
           <a:graphicData uri="http://schemas.openxmlformats.org/drawingml/2006/table">
@@ -7031,9 +7031,10 @@
               <a:tblGrid>
                 <a:gridCol w="480060"/>
                 <a:gridCol w="448056"/>
-                <a:gridCol w="4792244"/>
-                <a:gridCol w="2119445"/>
-                <a:gridCol w="3528929"/>
+                <a:gridCol w="3413279"/>
+                <a:gridCol w="1505858"/>
+                <a:gridCol w="1505858"/>
+                <a:gridCol w="4015622"/>
               </a:tblGrid>
               <a:tr h="192024">
                 <a:tc>
@@ -7122,6 +7123,24 @@
                           </a:solidFill>
                           <a:latin typeface="Helvetica Neue"/>
                         </a:rPr>
+                        <a:t>Clinical problem</a:t>
+                      </a:r>
+                    </a:p>
+                  </a:txBody>
+                  <a:tcPr marL="45720" marR="45720" marT="18288" marB="18288" anchor="t"/>
+                </a:tc>
+                <a:tc>
+                  <a:txBody>
+                    <a:bodyPr wrap="square"/>
+                    <a:lstStyle/>
+                    <a:p>
+                      <a:r>
+                        <a:rPr sz="900" b="1" i="0">
+                          <a:solidFill>
+                            <a:srgbClr val="FFFFFF"/>
+                          </a:solidFill>
+                          <a:latin typeface="Helvetica Neue"/>
+                        </a:rPr>
                         <a:t>What it answers</a:t>
                       </a:r>
                     </a:p>
@@ -7129,7 +7148,7 @@
                   <a:tcPr marL="45720" marR="45720" marT="18288" marB="18288" anchor="t"/>
                 </a:tc>
               </a:tr>
-              <a:tr h="192024">
+              <a:tr h="466344">
                 <a:tc>
                   <a:txBody>
                     <a:bodyPr wrap="square"/>
@@ -7210,13 +7229,403 @@
                     <a:lstStyle/>
                     <a:p>
                       <a:r>
+                        <a:rPr sz="900" b="0" i="0">
+                          <a:solidFill>
+                            <a:srgbClr val="1A1A1A"/>
+                          </a:solidFill>
+                          <a:latin typeface="Helvetica Neue"/>
+                        </a:rPr>
+                        <a:t>brain (multiple disorders)</a:t>
+                      </a:r>
+                    </a:p>
+                  </a:txBody>
+                  <a:tcPr marL="45720" marR="45720" marT="18288" marB="18288" anchor="t"/>
+                </a:tc>
+                <a:tc>
+                  <a:txBody>
+                    <a:bodyPr wrap="square"/>
+                    <a:lstStyle/>
+                    <a:p>
+                      <a:r>
                         <a:rPr sz="900" b="0" i="1">
                           <a:solidFill>
                             <a:srgbClr val="1A1A1A"/>
                           </a:solidFill>
                           <a:latin typeface="Helvetica Neue"/>
                         </a:rPr>
-                        <a:t>other</a:t>
+                        <a:t>foundation model</a:t>
+                      </a:r>
+                      <a:r>
+                        <a:rPr sz="900" b="0" i="0">
+                          <a:solidFill>
+                            <a:srgbClr val="1A1A1A"/>
+                          </a:solidFill>
+                          <a:latin typeface="Helvetica Neue"/>
+                        </a:rPr>
+                        <a:t>: Can one model pretrained on large unlabeled brain MRI collections be adapted to many downstream brain tasks with little labeled data?</a:t>
+                      </a:r>
+                    </a:p>
+                  </a:txBody>
+                  <a:tcPr marL="45720" marR="45720" marT="18288" marB="18288" anchor="t"/>
+                </a:tc>
+              </a:tr>
+              <a:tr h="466344">
+                <a:tc>
+                  <a:txBody>
+                    <a:bodyPr wrap="square"/>
+                    <a:lstStyle/>
+                    <a:p>
+                      <a:pPr algn="r"/>
+                      <a:r>
+                        <a:rPr sz="900" b="0" i="0">
+                          <a:solidFill>
+                            <a:srgbClr val="1A1A1A"/>
+                          </a:solidFill>
+                          <a:latin typeface="Helvetica Neue"/>
+                        </a:rPr>
+                        <a:t>12</a:t>
+                      </a:r>
+                    </a:p>
+                  </a:txBody>
+                  <a:tcPr marL="45720" marR="45720" marT="18288" marB="18288" anchor="t"/>
+                </a:tc>
+                <a:tc>
+                  <a:txBody>
+                    <a:bodyPr wrap="square"/>
+                    <a:lstStyle/>
+                    <a:p>
+                      <a:pPr algn="r"/>
+                      <a:r>
+                        <a:rPr sz="900" b="0" i="0">
+                          <a:solidFill>
+                            <a:srgbClr val="1A1A1A"/>
+                          </a:solidFill>
+                          <a:latin typeface="Helvetica Neue"/>
+                        </a:rPr>
+                        <a:t>61.4</a:t>
+                      </a:r>
+                    </a:p>
+                  </a:txBody>
+                  <a:tcPr marL="45720" marR="45720" marT="18288" marB="18288" anchor="t"/>
+                </a:tc>
+                <a:tc>
+                  <a:txBody>
+                    <a:bodyPr wrap="square"/>
+                    <a:lstStyle/>
+                    <a:p>
+                      <a:r>
+                        <a:rPr sz="900" b="0" i="0">
+                          <a:solidFill>
+                            <a:srgbClr val="1A1A1A"/>
+                          </a:solidFill>
+                          <a:latin typeface="Helvetica Neue"/>
+                        </a:rPr>
+                        <a:t>Explainability-Aligned Reliability-Weighted Fuzzy Ensemble for Automated Cervical Cancer Classification</a:t>
+                      </a:r>
+                    </a:p>
+                  </a:txBody>
+                  <a:tcPr marL="45720" marR="45720" marT="18288" marB="18288" anchor="t"/>
+                </a:tc>
+                <a:tc>
+                  <a:txBody>
+                    <a:bodyPr wrap="square"/>
+                    <a:lstStyle/>
+                    <a:p>
+                      <a:r>
+                        <a:rPr sz="900" b="0" i="0">
+                          <a:solidFill>
+                            <a:srgbClr val="1A1A1A"/>
+                          </a:solidFill>
+                          <a:latin typeface="Helvetica Neue"/>
+                        </a:rPr>
+                        <a:t>International Journal of Intelligent Systems</a:t>
+                      </a:r>
+                    </a:p>
+                  </a:txBody>
+                  <a:tcPr marL="45720" marR="45720" marT="18288" marB="18288" anchor="t"/>
+                </a:tc>
+                <a:tc>
+                  <a:txBody>
+                    <a:bodyPr wrap="square"/>
+                    <a:lstStyle/>
+                    <a:p>
+                      <a:r>
+                        <a:rPr sz="900" b="0" i="0">
+                          <a:solidFill>
+                            <a:srgbClr val="1A1A1A"/>
+                          </a:solidFill>
+                          <a:latin typeface="Helvetica Neue"/>
+                        </a:rPr>
+                        <a:t>cervical cancer</a:t>
+                      </a:r>
+                    </a:p>
+                  </a:txBody>
+                  <a:tcPr marL="45720" marR="45720" marT="18288" marB="18288" anchor="t"/>
+                </a:tc>
+                <a:tc>
+                  <a:txBody>
+                    <a:bodyPr wrap="square"/>
+                    <a:lstStyle/>
+                    <a:p>
+                      <a:r>
+                        <a:rPr sz="900" b="0" i="1">
+                          <a:solidFill>
+                            <a:srgbClr val="1A1A1A"/>
+                          </a:solidFill>
+                          <a:latin typeface="Helvetica Neue"/>
+                        </a:rPr>
+                        <a:t>diagnosis</a:t>
+                      </a:r>
+                      <a:r>
+                        <a:rPr sz="900" b="0" i="0">
+                          <a:solidFill>
+                            <a:srgbClr val="1A1A1A"/>
+                          </a:solidFill>
+                          <a:latin typeface="Helvetica Neue"/>
+                        </a:rPr>
+                        <a:t>: Can a reliability-weighted ensemble of CNNs classify cervical cancer images and show which image regions drove each call?</a:t>
+                      </a:r>
+                    </a:p>
+                  </a:txBody>
+                  <a:tcPr marL="45720" marR="45720" marT="18288" marB="18288" anchor="t"/>
+                </a:tc>
+              </a:tr>
+              <a:tr h="466344">
+                <a:tc>
+                  <a:txBody>
+                    <a:bodyPr wrap="square"/>
+                    <a:lstStyle/>
+                    <a:p>
+                      <a:pPr algn="r"/>
+                      <a:r>
+                        <a:rPr sz="900" b="0" i="0">
+                          <a:solidFill>
+                            <a:srgbClr val="1A1A1A"/>
+                          </a:solidFill>
+                          <a:latin typeface="Helvetica Neue"/>
+                        </a:rPr>
+                        <a:t>21</a:t>
+                      </a:r>
+                    </a:p>
+                  </a:txBody>
+                  <a:tcPr marL="45720" marR="45720" marT="18288" marB="18288" anchor="t"/>
+                </a:tc>
+                <a:tc>
+                  <a:txBody>
+                    <a:bodyPr wrap="square"/>
+                    <a:lstStyle/>
+                    <a:p>
+                      <a:pPr algn="r"/>
+                      <a:r>
+                        <a:rPr sz="900" b="0" i="0">
+                          <a:solidFill>
+                            <a:srgbClr val="1A1A1A"/>
+                          </a:solidFill>
+                          <a:latin typeface="Helvetica Neue"/>
+                        </a:rPr>
+                        <a:t>58.8</a:t>
+                      </a:r>
+                    </a:p>
+                  </a:txBody>
+                  <a:tcPr marL="45720" marR="45720" marT="18288" marB="18288" anchor="t"/>
+                </a:tc>
+                <a:tc>
+                  <a:txBody>
+                    <a:bodyPr wrap="square"/>
+                    <a:lstStyle/>
+                    <a:p>
+                      <a:r>
+                        <a:rPr sz="900" b="0" i="0">
+                          <a:solidFill>
+                            <a:srgbClr val="1A1A1A"/>
+                          </a:solidFill>
+                          <a:latin typeface="Helvetica Neue"/>
+                        </a:rPr>
+                        <a:t>A hybrid deep learning framework based on VGG19 and U-Net for accurate brain tumor segmentation in MRI images</a:t>
+                      </a:r>
+                    </a:p>
+                  </a:txBody>
+                  <a:tcPr marL="45720" marR="45720" marT="18288" marB="18288" anchor="t"/>
+                </a:tc>
+                <a:tc>
+                  <a:txBody>
+                    <a:bodyPr wrap="square"/>
+                    <a:lstStyle/>
+                    <a:p>
+                      <a:r>
+                        <a:rPr sz="900" b="0" i="0">
+                          <a:solidFill>
+                            <a:srgbClr val="1A1A1A"/>
+                          </a:solidFill>
+                          <a:latin typeface="Helvetica Neue"/>
+                        </a:rPr>
+                        <a:t>Magnetic Resonance Letters</a:t>
+                      </a:r>
+                    </a:p>
+                  </a:txBody>
+                  <a:tcPr marL="45720" marR="45720" marT="18288" marB="18288" anchor="t"/>
+                </a:tc>
+                <a:tc>
+                  <a:txBody>
+                    <a:bodyPr wrap="square"/>
+                    <a:lstStyle/>
+                    <a:p>
+                      <a:r>
+                        <a:rPr sz="900" b="0" i="0">
+                          <a:solidFill>
+                            <a:srgbClr val="1A1A1A"/>
+                          </a:solidFill>
+                          <a:latin typeface="Helvetica Neue"/>
+                        </a:rPr>
+                        <a:t>brain tumors</a:t>
+                      </a:r>
+                    </a:p>
+                  </a:txBody>
+                  <a:tcPr marL="45720" marR="45720" marT="18288" marB="18288" anchor="t"/>
+                </a:tc>
+                <a:tc>
+                  <a:txBody>
+                    <a:bodyPr wrap="square"/>
+                    <a:lstStyle/>
+                    <a:p>
+                      <a:r>
+                        <a:rPr sz="900" b="0" i="1">
+                          <a:solidFill>
+                            <a:srgbClr val="1A1A1A"/>
+                          </a:solidFill>
+                          <a:latin typeface="Helvetica Neue"/>
+                        </a:rPr>
+                        <a:t>segmentation</a:t>
+                      </a:r>
+                      <a:r>
+                        <a:rPr sz="900" b="0" i="0">
+                          <a:solidFill>
+                            <a:srgbClr val="1A1A1A"/>
+                          </a:solidFill>
+                          <a:latin typeface="Helvetica Neue"/>
+                        </a:rPr>
+                        <a:t>: Does pairing a pretrained VGG19 encoder with a U-Net decoder give more accurate brain tumor outlines on MRI?</a:t>
+                      </a:r>
+                    </a:p>
+                  </a:txBody>
+                  <a:tcPr marL="45720" marR="45720" marT="18288" marB="18288" anchor="t"/>
+                </a:tc>
+              </a:tr>
+              <a:tr h="466344">
+                <a:tc>
+                  <a:txBody>
+                    <a:bodyPr wrap="square"/>
+                    <a:lstStyle/>
+                    <a:p>
+                      <a:pPr algn="r"/>
+                      <a:r>
+                        <a:rPr sz="900" b="0" i="0">
+                          <a:solidFill>
+                            <a:srgbClr val="1A1A1A"/>
+                          </a:solidFill>
+                          <a:latin typeface="Helvetica Neue"/>
+                        </a:rPr>
+                        <a:t>14</a:t>
+                      </a:r>
+                    </a:p>
+                  </a:txBody>
+                  <a:tcPr marL="45720" marR="45720" marT="18288" marB="18288" anchor="t"/>
+                </a:tc>
+                <a:tc>
+                  <a:txBody>
+                    <a:bodyPr wrap="square"/>
+                    <a:lstStyle/>
+                    <a:p>
+                      <a:pPr algn="r"/>
+                      <a:r>
+                        <a:rPr sz="900" b="0" i="0">
+                          <a:solidFill>
+                            <a:srgbClr val="1A1A1A"/>
+                          </a:solidFill>
+                          <a:latin typeface="Helvetica Neue"/>
+                        </a:rPr>
+                        <a:t>50.1</a:t>
+                      </a:r>
+                    </a:p>
+                  </a:txBody>
+                  <a:tcPr marL="45720" marR="45720" marT="18288" marB="18288" anchor="t"/>
+                </a:tc>
+                <a:tc>
+                  <a:txBody>
+                    <a:bodyPr wrap="square"/>
+                    <a:lstStyle/>
+                    <a:p>
+                      <a:r>
+                        <a:rPr sz="900" b="0" i="0">
+                          <a:solidFill>
+                            <a:srgbClr val="1A1A1A"/>
+                          </a:solidFill>
+                          <a:latin typeface="Helvetica Neue"/>
+                        </a:rPr>
+                        <a:t>MedVersa: A Generalist Foundation Model for Diverse Medical Imaging Tasks</a:t>
+                      </a:r>
+                    </a:p>
+                  </a:txBody>
+                  <a:tcPr marL="45720" marR="45720" marT="18288" marB="18288" anchor="t"/>
+                </a:tc>
+                <a:tc>
+                  <a:txBody>
+                    <a:bodyPr wrap="square"/>
+                    <a:lstStyle/>
+                    <a:p>
+                      <a:r>
+                        <a:rPr sz="900" b="0" i="0">
+                          <a:solidFill>
+                            <a:srgbClr val="1A1A1A"/>
+                          </a:solidFill>
+                          <a:latin typeface="Helvetica Neue"/>
+                        </a:rPr>
+                        <a:t>NEJM AI</a:t>
+                      </a:r>
+                    </a:p>
+                  </a:txBody>
+                  <a:tcPr marL="45720" marR="45720" marT="18288" marB="18288" anchor="t"/>
+                </a:tc>
+                <a:tc>
+                  <a:txBody>
+                    <a:bodyPr wrap="square"/>
+                    <a:lstStyle/>
+                    <a:p>
+                      <a:r>
+                        <a:rPr sz="900" b="0" i="0">
+                          <a:solidFill>
+                            <a:srgbClr val="1A1A1A"/>
+                          </a:solidFill>
+                          <a:latin typeface="Helvetica Neue"/>
+                        </a:rPr>
+                        <a:t>general (multiple modalities)</a:t>
+                      </a:r>
+                    </a:p>
+                  </a:txBody>
+                  <a:tcPr marL="45720" marR="45720" marT="18288" marB="18288" anchor="t"/>
+                </a:tc>
+                <a:tc>
+                  <a:txBody>
+                    <a:bodyPr wrap="square"/>
+                    <a:lstStyle/>
+                    <a:p>
+                      <a:r>
+                        <a:rPr sz="900" b="0" i="1">
+                          <a:solidFill>
+                            <a:srgbClr val="1A1A1A"/>
+                          </a:solidFill>
+                          <a:latin typeface="Helvetica Neue"/>
+                        </a:rPr>
+                        <a:t>foundation model</a:t>
+                      </a:r>
+                      <a:r>
+                        <a:rPr sz="900" b="0" i="0">
+                          <a:solidFill>
+                            <a:srgbClr val="1A1A1A"/>
+                          </a:solidFill>
+                          <a:latin typeface="Helvetica Neue"/>
+                        </a:rPr>
+                        <a:t>: Can a single generalist model handle many imaging tasks (report drafting, detection, segmentation) across chest X-ray, CT, MRI and dermatology images?</a:t>
                       </a:r>
                     </a:p>
                   </a:txBody>
@@ -7237,6 +7646,369 @@
                           </a:solidFill>
                           <a:latin typeface="Helvetica Neue"/>
                         </a:rPr>
+                        <a:t>15</a:t>
+                      </a:r>
+                    </a:p>
+                  </a:txBody>
+                  <a:tcPr marL="45720" marR="45720" marT="18288" marB="18288" anchor="t"/>
+                </a:tc>
+                <a:tc>
+                  <a:txBody>
+                    <a:bodyPr wrap="square"/>
+                    <a:lstStyle/>
+                    <a:p>
+                      <a:pPr algn="r"/>
+                      <a:r>
+                        <a:rPr sz="900" b="0" i="0">
+                          <a:solidFill>
+                            <a:srgbClr val="1A1A1A"/>
+                          </a:solidFill>
+                          <a:latin typeface="Helvetica Neue"/>
+                        </a:rPr>
+                        <a:t>49.5</a:t>
+                      </a:r>
+                    </a:p>
+                  </a:txBody>
+                  <a:tcPr marL="45720" marR="45720" marT="18288" marB="18288" anchor="t"/>
+                </a:tc>
+                <a:tc>
+                  <a:txBody>
+                    <a:bodyPr wrap="square"/>
+                    <a:lstStyle/>
+                    <a:p>
+                      <a:r>
+                        <a:rPr sz="900" b="0" i="0">
+                          <a:solidFill>
+                            <a:srgbClr val="1A1A1A"/>
+                          </a:solidFill>
+                          <a:latin typeface="Helvetica Neue"/>
+                        </a:rPr>
+                        <a:t>Explainable AI-driven MRI-based brain tumor classification: a novel deep learning approach</a:t>
+                      </a:r>
+                    </a:p>
+                  </a:txBody>
+                  <a:tcPr marL="45720" marR="45720" marT="18288" marB="18288" anchor="t"/>
+                </a:tc>
+                <a:tc>
+                  <a:txBody>
+                    <a:bodyPr wrap="square"/>
+                    <a:lstStyle/>
+                    <a:p>
+                      <a:r>
+                        <a:rPr sz="900" b="0" i="0">
+                          <a:solidFill>
+                            <a:srgbClr val="1A1A1A"/>
+                          </a:solidFill>
+                          <a:latin typeface="Helvetica Neue"/>
+                        </a:rPr>
+                        <a:t>Frontiers Artif. Intell.</a:t>
+                      </a:r>
+                    </a:p>
+                  </a:txBody>
+                  <a:tcPr marL="45720" marR="45720" marT="18288" marB="18288" anchor="t"/>
+                </a:tc>
+                <a:tc>
+                  <a:txBody>
+                    <a:bodyPr wrap="square"/>
+                    <a:lstStyle/>
+                    <a:p>
+                      <a:r>
+                        <a:rPr sz="900" b="0" i="0">
+                          <a:solidFill>
+                            <a:srgbClr val="1A1A1A"/>
+                          </a:solidFill>
+                          <a:latin typeface="Helvetica Neue"/>
+                        </a:rPr>
+                        <a:t>brain tumors</a:t>
+                      </a:r>
+                    </a:p>
+                  </a:txBody>
+                  <a:tcPr marL="45720" marR="45720" marT="18288" marB="18288" anchor="t"/>
+                </a:tc>
+                <a:tc>
+                  <a:txBody>
+                    <a:bodyPr wrap="square"/>
+                    <a:lstStyle/>
+                    <a:p>
+                      <a:r>
+                        <a:rPr sz="900" b="0" i="1">
+                          <a:solidFill>
+                            <a:srgbClr val="1A1A1A"/>
+                          </a:solidFill>
+                          <a:latin typeface="Helvetica Neue"/>
+                        </a:rPr>
+                        <a:t>diagnosis</a:t>
+                      </a:r>
+                      <a:r>
+                        <a:rPr sz="900" b="0" i="0">
+                          <a:solidFill>
+                            <a:srgbClr val="1A1A1A"/>
+                          </a:solidFill>
+                          <a:latin typeface="Helvetica Neue"/>
+                        </a:rPr>
+                        <a:t>: Can a CNN classify brain tumor type on MRI and highlight the image regions behind each prediction?</a:t>
+                      </a:r>
+                    </a:p>
+                  </a:txBody>
+                  <a:tcPr marL="45720" marR="45720" marT="18288" marB="18288" anchor="t"/>
+                </a:tc>
+              </a:tr>
+              <a:tr h="466344">
+                <a:tc>
+                  <a:txBody>
+                    <a:bodyPr wrap="square"/>
+                    <a:lstStyle/>
+                    <a:p>
+                      <a:pPr algn="r"/>
+                      <a:r>
+                        <a:rPr sz="900" b="0" i="0">
+                          <a:solidFill>
+                            <a:srgbClr val="1A1A1A"/>
+                          </a:solidFill>
+                          <a:latin typeface="Helvetica Neue"/>
+                        </a:rPr>
+                        <a:t>13</a:t>
+                      </a:r>
+                    </a:p>
+                  </a:txBody>
+                  <a:tcPr marL="45720" marR="45720" marT="18288" marB="18288" anchor="t"/>
+                </a:tc>
+                <a:tc>
+                  <a:txBody>
+                    <a:bodyPr wrap="square"/>
+                    <a:lstStyle/>
+                    <a:p>
+                      <a:pPr algn="r"/>
+                      <a:r>
+                        <a:rPr sz="900" b="0" i="0">
+                          <a:solidFill>
+                            <a:srgbClr val="1A1A1A"/>
+                          </a:solidFill>
+                          <a:latin typeface="Helvetica Neue"/>
+                        </a:rPr>
+                        <a:t>46.0</a:t>
+                      </a:r>
+                    </a:p>
+                  </a:txBody>
+                  <a:tcPr marL="45720" marR="45720" marT="18288" marB="18288" anchor="t"/>
+                </a:tc>
+                <a:tc>
+                  <a:txBody>
+                    <a:bodyPr wrap="square"/>
+                    <a:lstStyle/>
+                    <a:p>
+                      <a:r>
+                        <a:rPr sz="900" b="0" i="0">
+                          <a:solidFill>
+                            <a:srgbClr val="1A1A1A"/>
+                          </a:solidFill>
+                          <a:latin typeface="Helvetica Neue"/>
+                        </a:rPr>
+                        <a:t>A deep learning framework for breast cancer diagnosis using Swin Transformer and Dual-Attention Multi-scale Fusion Network</a:t>
+                      </a:r>
+                    </a:p>
+                  </a:txBody>
+                  <a:tcPr marL="45720" marR="45720" marT="18288" marB="18288" anchor="t"/>
+                </a:tc>
+                <a:tc>
+                  <a:txBody>
+                    <a:bodyPr wrap="square"/>
+                    <a:lstStyle/>
+                    <a:p>
+                      <a:r>
+                        <a:rPr sz="900" b="0" i="0">
+                          <a:solidFill>
+                            <a:srgbClr val="1A1A1A"/>
+                          </a:solidFill>
+                          <a:latin typeface="Helvetica Neue"/>
+                        </a:rPr>
+                        <a:t>Scientific Reports</a:t>
+                      </a:r>
+                    </a:p>
+                  </a:txBody>
+                  <a:tcPr marL="45720" marR="45720" marT="18288" marB="18288" anchor="t"/>
+                </a:tc>
+                <a:tc>
+                  <a:txBody>
+                    <a:bodyPr wrap="square"/>
+                    <a:lstStyle/>
+                    <a:p>
+                      <a:r>
+                        <a:rPr sz="900" b="0" i="0">
+                          <a:solidFill>
+                            <a:srgbClr val="1A1A1A"/>
+                          </a:solidFill>
+                          <a:latin typeface="Helvetica Neue"/>
+                        </a:rPr>
+                        <a:t>breast cancer</a:t>
+                      </a:r>
+                    </a:p>
+                  </a:txBody>
+                  <a:tcPr marL="45720" marR="45720" marT="18288" marB="18288" anchor="t"/>
+                </a:tc>
+                <a:tc>
+                  <a:txBody>
+                    <a:bodyPr wrap="square"/>
+                    <a:lstStyle/>
+                    <a:p>
+                      <a:r>
+                        <a:rPr sz="900" b="0" i="1">
+                          <a:solidFill>
+                            <a:srgbClr val="1A1A1A"/>
+                          </a:solidFill>
+                          <a:latin typeface="Helvetica Neue"/>
+                        </a:rPr>
+                        <a:t>diagnosis</a:t>
+                      </a:r>
+                      <a:r>
+                        <a:rPr sz="900" b="0" i="0">
+                          <a:solidFill>
+                            <a:srgbClr val="1A1A1A"/>
+                          </a:solidFill>
+                          <a:latin typeface="Helvetica Neue"/>
+                        </a:rPr>
+                        <a:t>: Can a Swin Transformer with multi-scale attention fusion separate benign from malignant breast lesions on imaging?</a:t>
+                      </a:r>
+                    </a:p>
+                  </a:txBody>
+                  <a:tcPr marL="45720" marR="45720" marT="18288" marB="18288" anchor="t"/>
+                </a:tc>
+              </a:tr>
+              <a:tr h="466344">
+                <a:tc>
+                  <a:txBody>
+                    <a:bodyPr wrap="square"/>
+                    <a:lstStyle/>
+                    <a:p>
+                      <a:pPr algn="r"/>
+                      <a:r>
+                        <a:rPr sz="900" b="0" i="0">
+                          <a:solidFill>
+                            <a:srgbClr val="1A1A1A"/>
+                          </a:solidFill>
+                          <a:latin typeface="Helvetica Neue"/>
+                        </a:rPr>
+                        <a:t>13</a:t>
+                      </a:r>
+                    </a:p>
+                  </a:txBody>
+                  <a:tcPr marL="45720" marR="45720" marT="18288" marB="18288" anchor="t"/>
+                </a:tc>
+                <a:tc>
+                  <a:txBody>
+                    <a:bodyPr wrap="square"/>
+                    <a:lstStyle/>
+                    <a:p>
+                      <a:pPr algn="r"/>
+                      <a:r>
+                        <a:rPr sz="900" b="0" i="0">
+                          <a:solidFill>
+                            <a:srgbClr val="1A1A1A"/>
+                          </a:solidFill>
+                          <a:latin typeface="Helvetica Neue"/>
+                        </a:rPr>
+                        <a:t>44.2</a:t>
+                      </a:r>
+                    </a:p>
+                  </a:txBody>
+                  <a:tcPr marL="45720" marR="45720" marT="18288" marB="18288" anchor="t"/>
+                </a:tc>
+                <a:tc>
+                  <a:txBody>
+                    <a:bodyPr wrap="square"/>
+                    <a:lstStyle/>
+                    <a:p>
+                      <a:r>
+                        <a:rPr sz="900" b="0" i="0">
+                          <a:solidFill>
+                            <a:srgbClr val="1A1A1A"/>
+                          </a:solidFill>
+                          <a:latin typeface="Helvetica Neue"/>
+                        </a:rPr>
+                        <a:t>Multi-class eye disease classification using deep learning EfficientNetB0 fusion techniques</a:t>
+                      </a:r>
+                    </a:p>
+                  </a:txBody>
+                  <a:tcPr marL="45720" marR="45720" marT="18288" marB="18288" anchor="t"/>
+                </a:tc>
+                <a:tc>
+                  <a:txBody>
+                    <a:bodyPr wrap="square"/>
+                    <a:lstStyle/>
+                    <a:p>
+                      <a:r>
+                        <a:rPr sz="900" b="0" i="0">
+                          <a:solidFill>
+                            <a:srgbClr val="1A1A1A"/>
+                          </a:solidFill>
+                          <a:latin typeface="Helvetica Neue"/>
+                        </a:rPr>
+                        <a:t>Scientific Reports</a:t>
+                      </a:r>
+                    </a:p>
+                  </a:txBody>
+                  <a:tcPr marL="45720" marR="45720" marT="18288" marB="18288" anchor="t"/>
+                </a:tc>
+                <a:tc>
+                  <a:txBody>
+                    <a:bodyPr wrap="square"/>
+                    <a:lstStyle/>
+                    <a:p>
+                      <a:r>
+                        <a:rPr sz="900" b="0" i="0">
+                          <a:solidFill>
+                            <a:srgbClr val="1A1A1A"/>
+                          </a:solidFill>
+                          <a:latin typeface="Helvetica Neue"/>
+                        </a:rPr>
+                        <a:t>eye disease (retinal images)</a:t>
+                      </a:r>
+                    </a:p>
+                  </a:txBody>
+                  <a:tcPr marL="45720" marR="45720" marT="18288" marB="18288" anchor="t"/>
+                </a:tc>
+                <a:tc>
+                  <a:txBody>
+                    <a:bodyPr wrap="square"/>
+                    <a:lstStyle/>
+                    <a:p>
+                      <a:r>
+                        <a:rPr sz="900" b="0" i="1">
+                          <a:solidFill>
+                            <a:srgbClr val="1A1A1A"/>
+                          </a:solidFill>
+                          <a:latin typeface="Helvetica Neue"/>
+                        </a:rPr>
+                        <a:t>diagnosis</a:t>
+                      </a:r>
+                      <a:r>
+                        <a:rPr sz="900" b="0" i="0">
+                          <a:solidFill>
+                            <a:srgbClr val="1A1A1A"/>
+                          </a:solidFill>
+                          <a:latin typeface="Helvetica Neue"/>
+                        </a:rPr>
+                        <a:t>: Can fused EfficientNet models classify several eye diseases from retinal images? (Ophthalmic, outside radiology proper)</a:t>
+                      </a:r>
+                    </a:p>
+                  </a:txBody>
+                  <a:tcPr marL="45720" marR="45720" marT="18288" marB="18288" anchor="t"/>
+                </a:tc>
+              </a:tr>
+              <a:tr h="466344">
+                <a:tc>
+                  <a:txBody>
+                    <a:bodyPr wrap="square"/>
+                    <a:lstStyle/>
+                    <a:p>
+                      <a:pPr algn="r"/>
+                      <a:r>
+                        <a:rPr sz="900" b="0" i="0">
+                          <a:solidFill>
+                            <a:srgbClr val="1A1A1A"/>
+                          </a:solidFill>
+                          <a:latin typeface="Helvetica Neue"/>
+                        </a:rPr>
                         <a:t>12</a:t>
                       </a:r>
                     </a:p>
@@ -7256,43 +8028,61 @@
                           </a:solidFill>
                           <a:latin typeface="Helvetica Neue"/>
                         </a:rPr>
-                        <a:t>61.4</a:t>
-                      </a:r>
-                    </a:p>
-                  </a:txBody>
-                  <a:tcPr marL="45720" marR="45720" marT="18288" marB="18288" anchor="t"/>
-                </a:tc>
-                <a:tc>
-                  <a:txBody>
-                    <a:bodyPr wrap="square"/>
-                    <a:lstStyle/>
-                    <a:p>
-                      <a:r>
-                        <a:rPr sz="900" b="0" i="0">
-                          <a:solidFill>
-                            <a:srgbClr val="1A1A1A"/>
-                          </a:solidFill>
-                          <a:latin typeface="Helvetica Neue"/>
-                        </a:rPr>
-                        <a:t>Explainability-Aligned Reliability-Weighted Fuzzy Ensemble for Automated Cervical Cancer Classification</a:t>
-                      </a:r>
-                    </a:p>
-                  </a:txBody>
-                  <a:tcPr marL="45720" marR="45720" marT="18288" marB="18288" anchor="t"/>
-                </a:tc>
-                <a:tc>
-                  <a:txBody>
-                    <a:bodyPr wrap="square"/>
-                    <a:lstStyle/>
-                    <a:p>
-                      <a:r>
-                        <a:rPr sz="900" b="0" i="0">
-                          <a:solidFill>
-                            <a:srgbClr val="1A1A1A"/>
-                          </a:solidFill>
-                          <a:latin typeface="Helvetica Neue"/>
-                        </a:rPr>
-                        <a:t>International Journal of Intelligent Systems</a:t>
+                        <a:t>39.6</a:t>
+                      </a:r>
+                    </a:p>
+                  </a:txBody>
+                  <a:tcPr marL="45720" marR="45720" marT="18288" marB="18288" anchor="t"/>
+                </a:tc>
+                <a:tc>
+                  <a:txBody>
+                    <a:bodyPr wrap="square"/>
+                    <a:lstStyle/>
+                    <a:p>
+                      <a:r>
+                        <a:rPr sz="900" b="0" i="0">
+                          <a:solidFill>
+                            <a:srgbClr val="1A1A1A"/>
+                          </a:solidFill>
+                          <a:latin typeface="Helvetica Neue"/>
+                        </a:rPr>
+                        <a:t>3D-UNet+: An enhanced 3D U-Net framework for brain tumor segmentation with systematic hyperparameter tuning</a:t>
+                      </a:r>
+                    </a:p>
+                  </a:txBody>
+                  <a:tcPr marL="45720" marR="45720" marT="18288" marB="18288" anchor="t"/>
+                </a:tc>
+                <a:tc>
+                  <a:txBody>
+                    <a:bodyPr wrap="square"/>
+                    <a:lstStyle/>
+                    <a:p>
+                      <a:r>
+                        <a:rPr sz="900" b="0" i="0">
+                          <a:solidFill>
+                            <a:srgbClr val="1A1A1A"/>
+                          </a:solidFill>
+                          <a:latin typeface="Helvetica Neue"/>
+                        </a:rPr>
+                        <a:t>Neural computing &amp; applications (Print)</a:t>
+                      </a:r>
+                    </a:p>
+                  </a:txBody>
+                  <a:tcPr marL="45720" marR="45720" marT="18288" marB="18288" anchor="t"/>
+                </a:tc>
+                <a:tc>
+                  <a:txBody>
+                    <a:bodyPr wrap="square"/>
+                    <a:lstStyle/>
+                    <a:p>
+                      <a:r>
+                        <a:rPr sz="900" b="0" i="0">
+                          <a:solidFill>
+                            <a:srgbClr val="1A1A1A"/>
+                          </a:solidFill>
+                          <a:latin typeface="Helvetica Neue"/>
+                        </a:rPr>
+                        <a:t>brain tumors</a:t>
                       </a:r>
                     </a:p>
                   </a:txBody>
@@ -7310,83 +8100,110 @@
                           </a:solidFill>
                           <a:latin typeface="Helvetica Neue"/>
                         </a:rPr>
-                        <a:t>oncology</a:t>
+                        <a:t>segmentation</a:t>
+                      </a:r>
+                      <a:r>
+                        <a:rPr sz="900" b="0" i="0">
+                          <a:solidFill>
+                            <a:srgbClr val="1A1A1A"/>
+                          </a:solidFill>
+                          <a:latin typeface="Helvetica Neue"/>
+                        </a:rPr>
+                        <a:t>: Does systematic hyperparameter tuning of a 3D U-Net improve brain tumor segmentation on multiparametric MRI?</a:t>
                       </a:r>
                     </a:p>
                   </a:txBody>
                   <a:tcPr marL="45720" marR="45720" marT="18288" marB="18288" anchor="t"/>
                 </a:tc>
               </a:tr>
-              <a:tr h="329184">
-                <a:tc>
-                  <a:txBody>
-                    <a:bodyPr wrap="square"/>
-                    <a:lstStyle/>
-                    <a:p>
-                      <a:pPr algn="r"/>
-                      <a:r>
-                        <a:rPr sz="900" b="0" i="0">
-                          <a:solidFill>
-                            <a:srgbClr val="1A1A1A"/>
-                          </a:solidFill>
-                          <a:latin typeface="Helvetica Neue"/>
-                        </a:rPr>
-                        <a:t>21</a:t>
-                      </a:r>
-                    </a:p>
-                  </a:txBody>
-                  <a:tcPr marL="45720" marR="45720" marT="18288" marB="18288" anchor="t"/>
-                </a:tc>
-                <a:tc>
-                  <a:txBody>
-                    <a:bodyPr wrap="square"/>
-                    <a:lstStyle/>
-                    <a:p>
-                      <a:pPr algn="r"/>
-                      <a:r>
-                        <a:rPr sz="900" b="0" i="0">
-                          <a:solidFill>
-                            <a:srgbClr val="1A1A1A"/>
-                          </a:solidFill>
-                          <a:latin typeface="Helvetica Neue"/>
-                        </a:rPr>
-                        <a:t>58.8</a:t>
-                      </a:r>
-                    </a:p>
-                  </a:txBody>
-                  <a:tcPr marL="45720" marR="45720" marT="18288" marB="18288" anchor="t"/>
-                </a:tc>
-                <a:tc>
-                  <a:txBody>
-                    <a:bodyPr wrap="square"/>
-                    <a:lstStyle/>
-                    <a:p>
-                      <a:r>
-                        <a:rPr sz="900" b="0" i="0">
-                          <a:solidFill>
-                            <a:srgbClr val="1A1A1A"/>
-                          </a:solidFill>
-                          <a:latin typeface="Helvetica Neue"/>
-                        </a:rPr>
-                        <a:t>A hybrid deep learning framework based on VGG19 and U-Net for accurate brain tumor segmentation in MRI images</a:t>
-                      </a:r>
-                    </a:p>
-                  </a:txBody>
-                  <a:tcPr marL="45720" marR="45720" marT="18288" marB="18288" anchor="t"/>
-                </a:tc>
-                <a:tc>
-                  <a:txBody>
-                    <a:bodyPr wrap="square"/>
-                    <a:lstStyle/>
-                    <a:p>
-                      <a:r>
-                        <a:rPr sz="900" b="0" i="0">
-                          <a:solidFill>
-                            <a:srgbClr val="1A1A1A"/>
-                          </a:solidFill>
-                          <a:latin typeface="Helvetica Neue"/>
-                        </a:rPr>
-                        <a:t>Magnetic Resonance Letters</a:t>
+              <a:tr h="466344">
+                <a:tc>
+                  <a:txBody>
+                    <a:bodyPr wrap="square"/>
+                    <a:lstStyle/>
+                    <a:p>
+                      <a:pPr algn="r"/>
+                      <a:r>
+                        <a:rPr sz="900" b="0" i="0">
+                          <a:solidFill>
+                            <a:srgbClr val="1A1A1A"/>
+                          </a:solidFill>
+                          <a:latin typeface="Helvetica Neue"/>
+                        </a:rPr>
+                        <a:t>13</a:t>
+                      </a:r>
+                    </a:p>
+                  </a:txBody>
+                  <a:tcPr marL="45720" marR="45720" marT="18288" marB="18288" anchor="t"/>
+                </a:tc>
+                <a:tc>
+                  <a:txBody>
+                    <a:bodyPr wrap="square"/>
+                    <a:lstStyle/>
+                    <a:p>
+                      <a:pPr algn="r"/>
+                      <a:r>
+                        <a:rPr sz="900" b="0" i="0">
+                          <a:solidFill>
+                            <a:srgbClr val="1A1A1A"/>
+                          </a:solidFill>
+                          <a:latin typeface="Helvetica Neue"/>
+                        </a:rPr>
+                        <a:t>30.9</a:t>
+                      </a:r>
+                    </a:p>
+                  </a:txBody>
+                  <a:tcPr marL="45720" marR="45720" marT="18288" marB="18288" anchor="t"/>
+                </a:tc>
+                <a:tc>
+                  <a:txBody>
+                    <a:bodyPr wrap="square"/>
+                    <a:lstStyle/>
+                    <a:p>
+                      <a:r>
+                        <a:rPr sz="900" b="0" i="0">
+                          <a:solidFill>
+                            <a:srgbClr val="1A1A1A"/>
+                          </a:solidFill>
+                          <a:latin typeface="Helvetica Neue"/>
+                        </a:rPr>
+                        <a:t>Deep Learning Approaches for Brain Tumor Classification in MRI Scans: An Analysis of Model Interpretability</a:t>
+                      </a:r>
+                    </a:p>
+                  </a:txBody>
+                  <a:tcPr marL="45720" marR="45720" marT="18288" marB="18288" anchor="t"/>
+                </a:tc>
+                <a:tc>
+                  <a:txBody>
+                    <a:bodyPr wrap="square"/>
+                    <a:lstStyle/>
+                    <a:p>
+                      <a:r>
+                        <a:rPr sz="900" b="0" i="0">
+                          <a:solidFill>
+                            <a:srgbClr val="1A1A1A"/>
+                          </a:solidFill>
+                          <a:latin typeface="Helvetica Neue"/>
+                        </a:rPr>
+                        <a:t>Applied Sciences</a:t>
+                      </a:r>
+                    </a:p>
+                  </a:txBody>
+                  <a:tcPr marL="45720" marR="45720" marT="18288" marB="18288" anchor="t"/>
+                </a:tc>
+                <a:tc>
+                  <a:txBody>
+                    <a:bodyPr wrap="square"/>
+                    <a:lstStyle/>
+                    <a:p>
+                      <a:r>
+                        <a:rPr sz="900" b="0" i="0">
+                          <a:solidFill>
+                            <a:srgbClr val="1A1A1A"/>
+                          </a:solidFill>
+                          <a:latin typeface="Helvetica Neue"/>
+                        </a:rPr>
+                        <a:t>brain tumors</a:t>
                       </a:r>
                     </a:p>
                   </a:txBody>
@@ -7404,674 +8221,137 @@
                           </a:solidFill>
                           <a:latin typeface="Helvetica Neue"/>
                         </a:rPr>
+                        <a:t>diagnosis</a:t>
+                      </a:r>
+                      <a:r>
+                        <a:rPr sz="900" b="0" i="0">
+                          <a:solidFill>
+                            <a:srgbClr val="1A1A1A"/>
+                          </a:solidFill>
+                          <a:latin typeface="Helvetica Neue"/>
+                        </a:rPr>
+                        <a:t>: Which CNN brain tumor classifiers on MRI give explanations that point at the tumor rather than at irrelevant parts of the image?</a:t>
+                      </a:r>
+                    </a:p>
+                  </a:txBody>
+                  <a:tcPr marL="45720" marR="45720" marT="18288" marB="18288" anchor="t"/>
+                </a:tc>
+              </a:tr>
+              <a:tr h="603503">
+                <a:tc>
+                  <a:txBody>
+                    <a:bodyPr wrap="square"/>
+                    <a:lstStyle/>
+                    <a:p>
+                      <a:pPr algn="r"/>
+                      <a:r>
+                        <a:rPr sz="900" b="0" i="0">
+                          <a:solidFill>
+                            <a:srgbClr val="1A1A1A"/>
+                          </a:solidFill>
+                          <a:latin typeface="Helvetica Neue"/>
+                        </a:rPr>
+                        <a:t>19</a:t>
+                      </a:r>
+                    </a:p>
+                  </a:txBody>
+                  <a:tcPr marL="45720" marR="45720" marT="18288" marB="18288" anchor="t"/>
+                </a:tc>
+                <a:tc>
+                  <a:txBody>
+                    <a:bodyPr wrap="square"/>
+                    <a:lstStyle/>
+                    <a:p>
+                      <a:pPr algn="r"/>
+                      <a:r>
+                        <a:rPr sz="900" b="0" i="0">
+                          <a:solidFill>
+                            <a:srgbClr val="1A1A1A"/>
+                          </a:solidFill>
+                          <a:latin typeface="Helvetica Neue"/>
+                        </a:rPr>
+                        <a:t>27.1</a:t>
+                      </a:r>
+                    </a:p>
+                  </a:txBody>
+                  <a:tcPr marL="45720" marR="45720" marT="18288" marB="18288" anchor="t"/>
+                </a:tc>
+                <a:tc>
+                  <a:txBody>
+                    <a:bodyPr wrap="square"/>
+                    <a:lstStyle/>
+                    <a:p>
+                      <a:r>
+                        <a:rPr sz="900" b="0" i="0">
+                          <a:solidFill>
+                            <a:srgbClr val="1A1A1A"/>
+                          </a:solidFill>
+                          <a:latin typeface="Helvetica Neue"/>
+                        </a:rPr>
+                        <a:t>BIBSNet: A deep learning baby image brain segmentation network for MRI scans</a:t>
+                      </a:r>
+                    </a:p>
+                  </a:txBody>
+                  <a:tcPr marL="45720" marR="45720" marT="18288" marB="18288" anchor="t"/>
+                </a:tc>
+                <a:tc>
+                  <a:txBody>
+                    <a:bodyPr wrap="square"/>
+                    <a:lstStyle/>
+                    <a:p>
+                      <a:r>
+                        <a:rPr sz="900" b="0" i="0">
+                          <a:solidFill>
+                            <a:srgbClr val="1A1A1A"/>
+                          </a:solidFill>
+                          <a:latin typeface="Helvetica Neue"/>
+                        </a:rPr>
+                        <a:t>Developmental Cognitive Neuroscience</a:t>
+                      </a:r>
+                    </a:p>
+                  </a:txBody>
+                  <a:tcPr marL="45720" marR="45720" marT="18288" marB="18288" anchor="t"/>
+                </a:tc>
+                <a:tc>
+                  <a:txBody>
+                    <a:bodyPr wrap="square"/>
+                    <a:lstStyle/>
+                    <a:p>
+                      <a:r>
+                        <a:rPr sz="900" b="0" i="0">
+                          <a:solidFill>
+                            <a:srgbClr val="1A1A1A"/>
+                          </a:solidFill>
+                          <a:latin typeface="Helvetica Neue"/>
+                        </a:rPr>
+                        <a:t>neurodevelopment (infant brain)</a:t>
+                      </a:r>
+                    </a:p>
+                  </a:txBody>
+                  <a:tcPr marL="45720" marR="45720" marT="18288" marB="18288" anchor="t"/>
+                </a:tc>
+                <a:tc>
+                  <a:txBody>
+                    <a:bodyPr wrap="square"/>
+                    <a:lstStyle/>
+                    <a:p>
+                      <a:r>
+                        <a:rPr sz="900" b="0" i="1">
+                          <a:solidFill>
+                            <a:srgbClr val="1A1A1A"/>
+                          </a:solidFill>
+                          <a:latin typeface="Helvetica Neue"/>
+                        </a:rPr>
                         <a:t>segmentation</a:t>
                       </a:r>
-                    </a:p>
-                  </a:txBody>
-                  <a:tcPr marL="45720" marR="45720" marT="18288" marB="18288" anchor="t"/>
-                </a:tc>
-              </a:tr>
-              <a:tr h="192024">
-                <a:tc>
-                  <a:txBody>
-                    <a:bodyPr wrap="square"/>
-                    <a:lstStyle/>
-                    <a:p>
-                      <a:pPr algn="r"/>
-                      <a:r>
-                        <a:rPr sz="900" b="0" i="0">
-                          <a:solidFill>
-                            <a:srgbClr val="1A1A1A"/>
-                          </a:solidFill>
-                          <a:latin typeface="Helvetica Neue"/>
-                        </a:rPr>
-                        <a:t>14</a:t>
-                      </a:r>
-                    </a:p>
-                  </a:txBody>
-                  <a:tcPr marL="45720" marR="45720" marT="18288" marB="18288" anchor="t"/>
-                </a:tc>
-                <a:tc>
-                  <a:txBody>
-                    <a:bodyPr wrap="square"/>
-                    <a:lstStyle/>
-                    <a:p>
-                      <a:pPr algn="r"/>
-                      <a:r>
-                        <a:rPr sz="900" b="0" i="0">
-                          <a:solidFill>
-                            <a:srgbClr val="1A1A1A"/>
-                          </a:solidFill>
-                          <a:latin typeface="Helvetica Neue"/>
-                        </a:rPr>
-                        <a:t>50.1</a:t>
-                      </a:r>
-                    </a:p>
-                  </a:txBody>
-                  <a:tcPr marL="45720" marR="45720" marT="18288" marB="18288" anchor="t"/>
-                </a:tc>
-                <a:tc>
-                  <a:txBody>
-                    <a:bodyPr wrap="square"/>
-                    <a:lstStyle/>
-                    <a:p>
-                      <a:r>
-                        <a:rPr sz="900" b="0" i="0">
-                          <a:solidFill>
-                            <a:srgbClr val="1A1A1A"/>
-                          </a:solidFill>
-                          <a:latin typeface="Helvetica Neue"/>
-                        </a:rPr>
-                        <a:t>MedVersa: A Generalist Foundation Model for Diverse Medical Imaging Tasks</a:t>
-                      </a:r>
-                    </a:p>
-                  </a:txBody>
-                  <a:tcPr marL="45720" marR="45720" marT="18288" marB="18288" anchor="t"/>
-                </a:tc>
-                <a:tc>
-                  <a:txBody>
-                    <a:bodyPr wrap="square"/>
-                    <a:lstStyle/>
-                    <a:p>
-                      <a:r>
-                        <a:rPr sz="900" b="0" i="0">
-                          <a:solidFill>
-                            <a:srgbClr val="1A1A1A"/>
-                          </a:solidFill>
-                          <a:latin typeface="Helvetica Neue"/>
-                        </a:rPr>
-                        <a:t>NEJM AI</a:t>
-                      </a:r>
-                    </a:p>
-                  </a:txBody>
-                  <a:tcPr marL="45720" marR="45720" marT="18288" marB="18288" anchor="t"/>
-                </a:tc>
-                <a:tc>
-                  <a:txBody>
-                    <a:bodyPr wrap="square"/>
-                    <a:lstStyle/>
-                    <a:p>
-                      <a:r>
-                        <a:rPr sz="900" b="0" i="1">
-                          <a:solidFill>
-                            <a:srgbClr val="1A1A1A"/>
-                          </a:solidFill>
-                          <a:latin typeface="Helvetica Neue"/>
-                        </a:rPr>
-                        <a:t>other</a:t>
-                      </a:r>
-                    </a:p>
-                  </a:txBody>
-                  <a:tcPr marL="45720" marR="45720" marT="18288" marB="18288" anchor="t"/>
-                </a:tc>
-              </a:tr>
-              <a:tr h="329184">
-                <a:tc>
-                  <a:txBody>
-                    <a:bodyPr wrap="square"/>
-                    <a:lstStyle/>
-                    <a:p>
-                      <a:pPr algn="r"/>
-                      <a:r>
-                        <a:rPr sz="900" b="0" i="0">
-                          <a:solidFill>
-                            <a:srgbClr val="1A1A1A"/>
-                          </a:solidFill>
-                          <a:latin typeface="Helvetica Neue"/>
-                        </a:rPr>
-                        <a:t>15</a:t>
-                      </a:r>
-                    </a:p>
-                  </a:txBody>
-                  <a:tcPr marL="45720" marR="45720" marT="18288" marB="18288" anchor="t"/>
-                </a:tc>
-                <a:tc>
-                  <a:txBody>
-                    <a:bodyPr wrap="square"/>
-                    <a:lstStyle/>
-                    <a:p>
-                      <a:pPr algn="r"/>
-                      <a:r>
-                        <a:rPr sz="900" b="0" i="0">
-                          <a:solidFill>
-                            <a:srgbClr val="1A1A1A"/>
-                          </a:solidFill>
-                          <a:latin typeface="Helvetica Neue"/>
-                        </a:rPr>
-                        <a:t>49.5</a:t>
-                      </a:r>
-                    </a:p>
-                  </a:txBody>
-                  <a:tcPr marL="45720" marR="45720" marT="18288" marB="18288" anchor="t"/>
-                </a:tc>
-                <a:tc>
-                  <a:txBody>
-                    <a:bodyPr wrap="square"/>
-                    <a:lstStyle/>
-                    <a:p>
-                      <a:r>
-                        <a:rPr sz="900" b="0" i="0">
-                          <a:solidFill>
-                            <a:srgbClr val="1A1A1A"/>
-                          </a:solidFill>
-                          <a:latin typeface="Helvetica Neue"/>
-                        </a:rPr>
-                        <a:t>Explainable AI-driven MRI-based brain tumor classification: a novel deep learning approach</a:t>
-                      </a:r>
-                    </a:p>
-                  </a:txBody>
-                  <a:tcPr marL="45720" marR="45720" marT="18288" marB="18288" anchor="t"/>
-                </a:tc>
-                <a:tc>
-                  <a:txBody>
-                    <a:bodyPr wrap="square"/>
-                    <a:lstStyle/>
-                    <a:p>
-                      <a:r>
-                        <a:rPr sz="900" b="0" i="0">
-                          <a:solidFill>
-                            <a:srgbClr val="1A1A1A"/>
-                          </a:solidFill>
-                          <a:latin typeface="Helvetica Neue"/>
-                        </a:rPr>
-                        <a:t>Frontiers Artif. Intell.</a:t>
-                      </a:r>
-                    </a:p>
-                  </a:txBody>
-                  <a:tcPr marL="45720" marR="45720" marT="18288" marB="18288" anchor="t"/>
-                </a:tc>
-                <a:tc>
-                  <a:txBody>
-                    <a:bodyPr wrap="square"/>
-                    <a:lstStyle/>
-                    <a:p>
-                      <a:r>
-                        <a:rPr sz="900" b="0" i="1">
-                          <a:solidFill>
-                            <a:srgbClr val="1A1A1A"/>
-                          </a:solidFill>
-                          <a:latin typeface="Helvetica Neue"/>
-                        </a:rPr>
-                        <a:t>oncology</a:t>
-                      </a:r>
-                    </a:p>
-                  </a:txBody>
-                  <a:tcPr marL="45720" marR="45720" marT="18288" marB="18288" anchor="t"/>
-                </a:tc>
-              </a:tr>
-              <a:tr h="329184">
-                <a:tc>
-                  <a:txBody>
-                    <a:bodyPr wrap="square"/>
-                    <a:lstStyle/>
-                    <a:p>
-                      <a:pPr algn="r"/>
-                      <a:r>
-                        <a:rPr sz="900" b="0" i="0">
-                          <a:solidFill>
-                            <a:srgbClr val="1A1A1A"/>
-                          </a:solidFill>
-                          <a:latin typeface="Helvetica Neue"/>
-                        </a:rPr>
-                        <a:t>13</a:t>
-                      </a:r>
-                    </a:p>
-                  </a:txBody>
-                  <a:tcPr marL="45720" marR="45720" marT="18288" marB="18288" anchor="t"/>
-                </a:tc>
-                <a:tc>
-                  <a:txBody>
-                    <a:bodyPr wrap="square"/>
-                    <a:lstStyle/>
-                    <a:p>
-                      <a:pPr algn="r"/>
-                      <a:r>
-                        <a:rPr sz="900" b="0" i="0">
-                          <a:solidFill>
-                            <a:srgbClr val="1A1A1A"/>
-                          </a:solidFill>
-                          <a:latin typeface="Helvetica Neue"/>
-                        </a:rPr>
-                        <a:t>46.0</a:t>
-                      </a:r>
-                    </a:p>
-                  </a:txBody>
-                  <a:tcPr marL="45720" marR="45720" marT="18288" marB="18288" anchor="t"/>
-                </a:tc>
-                <a:tc>
-                  <a:txBody>
-                    <a:bodyPr wrap="square"/>
-                    <a:lstStyle/>
-                    <a:p>
-                      <a:r>
-                        <a:rPr sz="900" b="0" i="0">
-                          <a:solidFill>
-                            <a:srgbClr val="1A1A1A"/>
-                          </a:solidFill>
-                          <a:latin typeface="Helvetica Neue"/>
-                        </a:rPr>
-                        <a:t>A deep learning framework for breast cancer diagnosis using Swin Transformer and Dual-Attention Multi-scale Fusion Network</a:t>
-                      </a:r>
-                    </a:p>
-                  </a:txBody>
-                  <a:tcPr marL="45720" marR="45720" marT="18288" marB="18288" anchor="t"/>
-                </a:tc>
-                <a:tc>
-                  <a:txBody>
-                    <a:bodyPr wrap="square"/>
-                    <a:lstStyle/>
-                    <a:p>
-                      <a:r>
-                        <a:rPr sz="900" b="0" i="0">
-                          <a:solidFill>
-                            <a:srgbClr val="1A1A1A"/>
-                          </a:solidFill>
-                          <a:latin typeface="Helvetica Neue"/>
-                        </a:rPr>
-                        <a:t>Scientific Reports</a:t>
-                      </a:r>
-                    </a:p>
-                  </a:txBody>
-                  <a:tcPr marL="45720" marR="45720" marT="18288" marB="18288" anchor="t"/>
-                </a:tc>
-                <a:tc>
-                  <a:txBody>
-                    <a:bodyPr wrap="square"/>
-                    <a:lstStyle/>
-                    <a:p>
-                      <a:r>
-                        <a:rPr sz="900" b="0" i="1">
-                          <a:solidFill>
-                            <a:srgbClr val="1A1A1A"/>
-                          </a:solidFill>
-                          <a:latin typeface="Helvetica Neue"/>
-                        </a:rPr>
-                        <a:t>oncology</a:t>
-                      </a:r>
-                    </a:p>
-                  </a:txBody>
-                  <a:tcPr marL="45720" marR="45720" marT="18288" marB="18288" anchor="t"/>
-                </a:tc>
-              </a:tr>
-              <a:tr h="329184">
-                <a:tc>
-                  <a:txBody>
-                    <a:bodyPr wrap="square"/>
-                    <a:lstStyle/>
-                    <a:p>
-                      <a:pPr algn="r"/>
-                      <a:r>
-                        <a:rPr sz="900" b="0" i="0">
-                          <a:solidFill>
-                            <a:srgbClr val="1A1A1A"/>
-                          </a:solidFill>
-                          <a:latin typeface="Helvetica Neue"/>
-                        </a:rPr>
-                        <a:t>13</a:t>
-                      </a:r>
-                    </a:p>
-                  </a:txBody>
-                  <a:tcPr marL="45720" marR="45720" marT="18288" marB="18288" anchor="t"/>
-                </a:tc>
-                <a:tc>
-                  <a:txBody>
-                    <a:bodyPr wrap="square"/>
-                    <a:lstStyle/>
-                    <a:p>
-                      <a:pPr algn="r"/>
-                      <a:r>
-                        <a:rPr sz="900" b="0" i="0">
-                          <a:solidFill>
-                            <a:srgbClr val="1A1A1A"/>
-                          </a:solidFill>
-                          <a:latin typeface="Helvetica Neue"/>
-                        </a:rPr>
-                        <a:t>44.2</a:t>
-                      </a:r>
-                    </a:p>
-                  </a:txBody>
-                  <a:tcPr marL="45720" marR="45720" marT="18288" marB="18288" anchor="t"/>
-                </a:tc>
-                <a:tc>
-                  <a:txBody>
-                    <a:bodyPr wrap="square"/>
-                    <a:lstStyle/>
-                    <a:p>
-                      <a:r>
-                        <a:rPr sz="900" b="0" i="0">
-                          <a:solidFill>
-                            <a:srgbClr val="1A1A1A"/>
-                          </a:solidFill>
-                          <a:latin typeface="Helvetica Neue"/>
-                        </a:rPr>
-                        <a:t>Multi-class eye disease classification using deep learning EfficientNetB0 fusion techniques</a:t>
-                      </a:r>
-                    </a:p>
-                  </a:txBody>
-                  <a:tcPr marL="45720" marR="45720" marT="18288" marB="18288" anchor="t"/>
-                </a:tc>
-                <a:tc>
-                  <a:txBody>
-                    <a:bodyPr wrap="square"/>
-                    <a:lstStyle/>
-                    <a:p>
-                      <a:r>
-                        <a:rPr sz="900" b="0" i="0">
-                          <a:solidFill>
-                            <a:srgbClr val="1A1A1A"/>
-                          </a:solidFill>
-                          <a:latin typeface="Helvetica Neue"/>
-                        </a:rPr>
-                        <a:t>Scientific Reports</a:t>
-                      </a:r>
-                    </a:p>
-                  </a:txBody>
-                  <a:tcPr marL="45720" marR="45720" marT="18288" marB="18288" anchor="t"/>
-                </a:tc>
-                <a:tc>
-                  <a:txBody>
-                    <a:bodyPr wrap="square"/>
-                    <a:lstStyle/>
-                    <a:p>
-                      <a:r>
-                        <a:rPr sz="900" b="0" i="1">
-                          <a:solidFill>
-                            <a:srgbClr val="1A1A1A"/>
-                          </a:solidFill>
-                          <a:latin typeface="Helvetica Neue"/>
-                        </a:rPr>
-                        <a:t>classification</a:t>
-                      </a:r>
-                    </a:p>
-                  </a:txBody>
-                  <a:tcPr marL="45720" marR="45720" marT="18288" marB="18288" anchor="t"/>
-                </a:tc>
-              </a:tr>
-              <a:tr h="329184">
-                <a:tc>
-                  <a:txBody>
-                    <a:bodyPr wrap="square"/>
-                    <a:lstStyle/>
-                    <a:p>
-                      <a:pPr algn="r"/>
-                      <a:r>
-                        <a:rPr sz="900" b="0" i="0">
-                          <a:solidFill>
-                            <a:srgbClr val="1A1A1A"/>
-                          </a:solidFill>
-                          <a:latin typeface="Helvetica Neue"/>
-                        </a:rPr>
-                        <a:t>12</a:t>
-                      </a:r>
-                    </a:p>
-                  </a:txBody>
-                  <a:tcPr marL="45720" marR="45720" marT="18288" marB="18288" anchor="t"/>
-                </a:tc>
-                <a:tc>
-                  <a:txBody>
-                    <a:bodyPr wrap="square"/>
-                    <a:lstStyle/>
-                    <a:p>
-                      <a:pPr algn="r"/>
-                      <a:r>
-                        <a:rPr sz="900" b="0" i="0">
-                          <a:solidFill>
-                            <a:srgbClr val="1A1A1A"/>
-                          </a:solidFill>
-                          <a:latin typeface="Helvetica Neue"/>
-                        </a:rPr>
-                        <a:t>39.6</a:t>
-                      </a:r>
-                    </a:p>
-                  </a:txBody>
-                  <a:tcPr marL="45720" marR="45720" marT="18288" marB="18288" anchor="t"/>
-                </a:tc>
-                <a:tc>
-                  <a:txBody>
-                    <a:bodyPr wrap="square"/>
-                    <a:lstStyle/>
-                    <a:p>
-                      <a:r>
-                        <a:rPr sz="900" b="0" i="0">
-                          <a:solidFill>
-                            <a:srgbClr val="1A1A1A"/>
-                          </a:solidFill>
-                          <a:latin typeface="Helvetica Neue"/>
-                        </a:rPr>
-                        <a:t>3D-UNet+: An enhanced 3D U-Net framework for brain tumor segmentation with systematic hyperparameter tuning</a:t>
-                      </a:r>
-                    </a:p>
-                  </a:txBody>
-                  <a:tcPr marL="45720" marR="45720" marT="18288" marB="18288" anchor="t"/>
-                </a:tc>
-                <a:tc>
-                  <a:txBody>
-                    <a:bodyPr wrap="square"/>
-                    <a:lstStyle/>
-                    <a:p>
-                      <a:r>
-                        <a:rPr sz="900" b="0" i="0">
-                          <a:solidFill>
-                            <a:srgbClr val="1A1A1A"/>
-                          </a:solidFill>
-                          <a:latin typeface="Helvetica Neue"/>
-                        </a:rPr>
-                        <a:t>Neural computing &amp; applications (Print)</a:t>
-                      </a:r>
-                    </a:p>
-                  </a:txBody>
-                  <a:tcPr marL="45720" marR="45720" marT="18288" marB="18288" anchor="t"/>
-                </a:tc>
-                <a:tc>
-                  <a:txBody>
-                    <a:bodyPr wrap="square"/>
-                    <a:lstStyle/>
-                    <a:p>
-                      <a:r>
-                        <a:rPr sz="900" b="0" i="1">
-                          <a:solidFill>
-                            <a:srgbClr val="1A1A1A"/>
-                          </a:solidFill>
-                          <a:latin typeface="Helvetica Neue"/>
-                        </a:rPr>
-                        <a:t>segmentation</a:t>
-                      </a:r>
-                    </a:p>
-                  </a:txBody>
-                  <a:tcPr marL="45720" marR="45720" marT="18288" marB="18288" anchor="t"/>
-                </a:tc>
-              </a:tr>
-              <a:tr h="329184">
-                <a:tc>
-                  <a:txBody>
-                    <a:bodyPr wrap="square"/>
-                    <a:lstStyle/>
-                    <a:p>
-                      <a:pPr algn="r"/>
-                      <a:r>
-                        <a:rPr sz="900" b="0" i="0">
-                          <a:solidFill>
-                            <a:srgbClr val="1A1A1A"/>
-                          </a:solidFill>
-                          <a:latin typeface="Helvetica Neue"/>
-                        </a:rPr>
-                        <a:t>13</a:t>
-                      </a:r>
-                    </a:p>
-                  </a:txBody>
-                  <a:tcPr marL="45720" marR="45720" marT="18288" marB="18288" anchor="t"/>
-                </a:tc>
-                <a:tc>
-                  <a:txBody>
-                    <a:bodyPr wrap="square"/>
-                    <a:lstStyle/>
-                    <a:p>
-                      <a:pPr algn="r"/>
-                      <a:r>
-                        <a:rPr sz="900" b="0" i="0">
-                          <a:solidFill>
-                            <a:srgbClr val="1A1A1A"/>
-                          </a:solidFill>
-                          <a:latin typeface="Helvetica Neue"/>
-                        </a:rPr>
-                        <a:t>30.9</a:t>
-                      </a:r>
-                    </a:p>
-                  </a:txBody>
-                  <a:tcPr marL="45720" marR="45720" marT="18288" marB="18288" anchor="t"/>
-                </a:tc>
-                <a:tc>
-                  <a:txBody>
-                    <a:bodyPr wrap="square"/>
-                    <a:lstStyle/>
-                    <a:p>
-                      <a:r>
-                        <a:rPr sz="900" b="0" i="0">
-                          <a:solidFill>
-                            <a:srgbClr val="1A1A1A"/>
-                          </a:solidFill>
-                          <a:latin typeface="Helvetica Neue"/>
-                        </a:rPr>
-                        <a:t>Deep Learning Approaches for Brain Tumor Classification in MRI Scans: An Analysis of Model Interpretability</a:t>
-                      </a:r>
-                    </a:p>
-                  </a:txBody>
-                  <a:tcPr marL="45720" marR="45720" marT="18288" marB="18288" anchor="t"/>
-                </a:tc>
-                <a:tc>
-                  <a:txBody>
-                    <a:bodyPr wrap="square"/>
-                    <a:lstStyle/>
-                    <a:p>
-                      <a:r>
-                        <a:rPr sz="900" b="0" i="0">
-                          <a:solidFill>
-                            <a:srgbClr val="1A1A1A"/>
-                          </a:solidFill>
-                          <a:latin typeface="Helvetica Neue"/>
-                        </a:rPr>
-                        <a:t>Applied Sciences</a:t>
-                      </a:r>
-                    </a:p>
-                  </a:txBody>
-                  <a:tcPr marL="45720" marR="45720" marT="18288" marB="18288" anchor="t"/>
-                </a:tc>
-                <a:tc>
-                  <a:txBody>
-                    <a:bodyPr wrap="square"/>
-                    <a:lstStyle/>
-                    <a:p>
-                      <a:r>
-                        <a:rPr sz="900" b="0" i="1">
-                          <a:solidFill>
-                            <a:srgbClr val="1A1A1A"/>
-                          </a:solidFill>
-                          <a:latin typeface="Helvetica Neue"/>
-                        </a:rPr>
-                        <a:t>oncology</a:t>
-                      </a:r>
-                    </a:p>
-                  </a:txBody>
-                  <a:tcPr marL="45720" marR="45720" marT="18288" marB="18288" anchor="t"/>
-                </a:tc>
-              </a:tr>
-              <a:tr h="329184">
-                <a:tc>
-                  <a:txBody>
-                    <a:bodyPr wrap="square"/>
-                    <a:lstStyle/>
-                    <a:p>
-                      <a:pPr algn="r"/>
-                      <a:r>
-                        <a:rPr sz="900" b="0" i="0">
-                          <a:solidFill>
-                            <a:srgbClr val="1A1A1A"/>
-                          </a:solidFill>
-                          <a:latin typeface="Helvetica Neue"/>
-                        </a:rPr>
-                        <a:t>19</a:t>
-                      </a:r>
-                    </a:p>
-                  </a:txBody>
-                  <a:tcPr marL="45720" marR="45720" marT="18288" marB="18288" anchor="t"/>
-                </a:tc>
-                <a:tc>
-                  <a:txBody>
-                    <a:bodyPr wrap="square"/>
-                    <a:lstStyle/>
-                    <a:p>
-                      <a:pPr algn="r"/>
-                      <a:r>
-                        <a:rPr sz="900" b="0" i="0">
-                          <a:solidFill>
-                            <a:srgbClr val="1A1A1A"/>
-                          </a:solidFill>
-                          <a:latin typeface="Helvetica Neue"/>
-                        </a:rPr>
-                        <a:t>27.1</a:t>
-                      </a:r>
-                    </a:p>
-                  </a:txBody>
-                  <a:tcPr marL="45720" marR="45720" marT="18288" marB="18288" anchor="t"/>
-                </a:tc>
-                <a:tc>
-                  <a:txBody>
-                    <a:bodyPr wrap="square"/>
-                    <a:lstStyle/>
-                    <a:p>
-                      <a:r>
-                        <a:rPr sz="900" b="0" i="0">
-                          <a:solidFill>
-                            <a:srgbClr val="1A1A1A"/>
-                          </a:solidFill>
-                          <a:latin typeface="Helvetica Neue"/>
-                        </a:rPr>
-                        <a:t>BIBSNet: A deep learning baby image brain segmentation network for MRI scans</a:t>
-                      </a:r>
-                    </a:p>
-                  </a:txBody>
-                  <a:tcPr marL="45720" marR="45720" marT="18288" marB="18288" anchor="t"/>
-                </a:tc>
-                <a:tc>
-                  <a:txBody>
-                    <a:bodyPr wrap="square"/>
-                    <a:lstStyle/>
-                    <a:p>
-                      <a:r>
-                        <a:rPr sz="900" b="0" i="0">
-                          <a:solidFill>
-                            <a:srgbClr val="1A1A1A"/>
-                          </a:solidFill>
-                          <a:latin typeface="Helvetica Neue"/>
-                        </a:rPr>
-                        <a:t>Developmental Cognitive Neuroscience</a:t>
-                      </a:r>
-                    </a:p>
-                  </a:txBody>
-                  <a:tcPr marL="45720" marR="45720" marT="18288" marB="18288" anchor="t"/>
-                </a:tc>
-                <a:tc>
-                  <a:txBody>
-                    <a:bodyPr wrap="square"/>
-                    <a:lstStyle/>
-                    <a:p>
-                      <a:r>
-                        <a:rPr sz="900" b="0" i="1">
-                          <a:solidFill>
-                            <a:srgbClr val="1A1A1A"/>
-                          </a:solidFill>
-                          <a:latin typeface="Helvetica Neue"/>
-                        </a:rPr>
-                        <a:t>segmentation</a:t>
-                      </a:r>
-                      <a:r>
-                        <a:rPr sz="900" b="0" i="0">
-                          <a:solidFill>
-                            <a:srgbClr val="1A1A1A"/>
-                          </a:solidFill>
-                          <a:latin typeface="Helvetica Neue"/>
-                        </a:rPr>
-                        <a:t>: Can one network segment infant brain MRI across the first years of life? (BIBSNet)</a:t>
+                      <a:r>
+                        <a:rPr sz="900" b="0" i="0">
+                          <a:solidFill>
+                            <a:srgbClr val="1A1A1A"/>
+                          </a:solidFill>
+                          <a:latin typeface="Helvetica Neue"/>
+                        </a:rPr>
+                        <a:t>: Can one network segment infant brain MRI (gray and white matter, deep structures) across the first years of life, when tissue contrast is still changing? (BIBSNet, open source)</a:t>
                       </a:r>
                     </a:p>
                   </a:txBody>
@@ -8112,7 +8392,7 @@
                 </a:solidFill>
                 <a:latin typeface="Helvetica Neue"/>
               </a:rPr>
-              <a:t>10 / 34</a:t>
+              <a:t>10 / 36</a:t>
             </a:r>
           </a:p>
         </p:txBody>
@@ -8232,7 +8512,7 @@
         </p:nvGraphicFramePr>
         <p:xfrm>
           <a:off x="411480" y="877824"/>
-          <a:ext cx="11368734" cy="3483864"/>
+          <a:ext cx="11368733" cy="4992622"/>
         </p:xfrm>
         <a:graphic>
           <a:graphicData uri="http://schemas.openxmlformats.org/drawingml/2006/table">
@@ -8243,9 +8523,10 @@
               <a:tblGrid>
                 <a:gridCol w="480060"/>
                 <a:gridCol w="448056"/>
-                <a:gridCol w="4792244"/>
-                <a:gridCol w="2119445"/>
-                <a:gridCol w="3528929"/>
+                <a:gridCol w="3413279"/>
+                <a:gridCol w="1505858"/>
+                <a:gridCol w="1505858"/>
+                <a:gridCol w="4015622"/>
               </a:tblGrid>
               <a:tr h="192024">
                 <a:tc>
@@ -8334,7 +8615,993 @@
                           </a:solidFill>
                           <a:latin typeface="Helvetica Neue"/>
                         </a:rPr>
+                        <a:t>Clinical problem</a:t>
+                      </a:r>
+                    </a:p>
+                  </a:txBody>
+                  <a:tcPr marL="45720" marR="45720" marT="18288" marB="18288" anchor="t"/>
+                </a:tc>
+                <a:tc>
+                  <a:txBody>
+                    <a:bodyPr wrap="square"/>
+                    <a:lstStyle/>
+                    <a:p>
+                      <a:r>
+                        <a:rPr sz="900" b="1" i="0">
+                          <a:solidFill>
+                            <a:srgbClr val="FFFFFF"/>
+                          </a:solidFill>
+                          <a:latin typeface="Helvetica Neue"/>
+                        </a:rPr>
                         <a:t>What it answers</a:t>
+                      </a:r>
+                    </a:p>
+                  </a:txBody>
+                  <a:tcPr marL="45720" marR="45720" marT="18288" marB="18288" anchor="t"/>
+                </a:tc>
+              </a:tr>
+              <a:tr h="466344">
+                <a:tc>
+                  <a:txBody>
+                    <a:bodyPr wrap="square"/>
+                    <a:lstStyle/>
+                    <a:p>
+                      <a:pPr algn="r"/>
+                      <a:r>
+                        <a:rPr sz="900" b="0" i="0">
+                          <a:solidFill>
+                            <a:srgbClr val="1A1A1A"/>
+                          </a:solidFill>
+                          <a:latin typeface="Helvetica Neue"/>
+                        </a:rPr>
+                        <a:t>426</a:t>
+                      </a:r>
+                    </a:p>
+                  </a:txBody>
+                  <a:tcPr marL="45720" marR="45720" marT="18288" marB="18288" anchor="t"/>
+                </a:tc>
+                <a:tc>
+                  <a:txBody>
+                    <a:bodyPr wrap="square"/>
+                    <a:lstStyle/>
+                    <a:p>
+                      <a:pPr algn="r"/>
+                      <a:r>
+                        <a:rPr sz="900" b="0" i="0">
+                          <a:solidFill>
+                            <a:srgbClr val="1A1A1A"/>
+                          </a:solidFill>
+                          <a:latin typeface="Helvetica Neue"/>
+                        </a:rPr>
+                        <a:t>310.7</a:t>
+                      </a:r>
+                    </a:p>
+                  </a:txBody>
+                  <a:tcPr marL="45720" marR="45720" marT="18288" marB="18288" anchor="t"/>
+                </a:tc>
+                <a:tc>
+                  <a:txBody>
+                    <a:bodyPr wrap="square"/>
+                    <a:lstStyle/>
+                    <a:p>
+                      <a:r>
+                        <a:rPr sz="900" b="0" i="0">
+                          <a:solidFill>
+                            <a:srgbClr val="1A1A1A"/>
+                          </a:solidFill>
+                          <a:latin typeface="Helvetica Neue"/>
+                        </a:rPr>
+                        <a:t>Performance of a Deep-Learning Neural Network Model in Assessing Skeletal Maturity on Pediatric Hand Radiographs. (2017)</a:t>
+                      </a:r>
+                    </a:p>
+                  </a:txBody>
+                  <a:tcPr marL="45720" marR="45720" marT="18288" marB="18288" anchor="t"/>
+                </a:tc>
+                <a:tc>
+                  <a:txBody>
+                    <a:bodyPr wrap="square"/>
+                    <a:lstStyle/>
+                    <a:p>
+                      <a:r>
+                        <a:rPr sz="900" b="0" i="0">
+                          <a:solidFill>
+                            <a:srgbClr val="1A1A1A"/>
+                          </a:solidFill>
+                          <a:latin typeface="Helvetica Neue"/>
+                        </a:rPr>
+                        <a:t>Radiology</a:t>
+                      </a:r>
+                    </a:p>
+                  </a:txBody>
+                  <a:tcPr marL="45720" marR="45720" marT="18288" marB="18288" anchor="t"/>
+                </a:tc>
+                <a:tc>
+                  <a:txBody>
+                    <a:bodyPr wrap="square"/>
+                    <a:lstStyle/>
+                    <a:p>
+                      <a:r>
+                        <a:rPr sz="900" b="0" i="0">
+                          <a:solidFill>
+                            <a:srgbClr val="1A1A1A"/>
+                          </a:solidFill>
+                          <a:latin typeface="Helvetica Neue"/>
+                        </a:rPr>
+                        <a:t>bone age / skeletal maturity</a:t>
+                      </a:r>
+                    </a:p>
+                  </a:txBody>
+                  <a:tcPr marL="45720" marR="45720" marT="18288" marB="18288" anchor="t"/>
+                </a:tc>
+                <a:tc>
+                  <a:txBody>
+                    <a:bodyPr wrap="square"/>
+                    <a:lstStyle/>
+                    <a:p>
+                      <a:r>
+                        <a:rPr sz="900" b="0" i="1">
+                          <a:solidFill>
+                            <a:srgbClr val="1A1A1A"/>
+                          </a:solidFill>
+                          <a:latin typeface="Helvetica Neue"/>
+                        </a:rPr>
+                        <a:t>measurement</a:t>
+                      </a:r>
+                      <a:r>
+                        <a:rPr sz="900" b="0" i="0">
+                          <a:solidFill>
+                            <a:srgbClr val="1A1A1A"/>
+                          </a:solidFill>
+                          <a:latin typeface="Helvetica Neue"/>
+                        </a:rPr>
+                        <a:t>: Can a CNN read bone age from a hand radiograph as accurately as pediatric radiologists using the Greulich–Pyle atlas?</a:t>
+                      </a:r>
+                    </a:p>
+                  </a:txBody>
+                  <a:tcPr marL="45720" marR="45720" marT="18288" marB="18288" anchor="t"/>
+                </a:tc>
+              </a:tr>
+              <a:tr h="466344">
+                <a:tc>
+                  <a:txBody>
+                    <a:bodyPr wrap="square"/>
+                    <a:lstStyle/>
+                    <a:p>
+                      <a:pPr algn="r"/>
+                      <a:r>
+                        <a:rPr sz="900" b="0" i="0">
+                          <a:solidFill>
+                            <a:srgbClr val="1A1A1A"/>
+                          </a:solidFill>
+                          <a:latin typeface="Helvetica Neue"/>
+                        </a:rPr>
+                        <a:t>432</a:t>
+                      </a:r>
+                    </a:p>
+                  </a:txBody>
+                  <a:tcPr marL="45720" marR="45720" marT="18288" marB="18288" anchor="t"/>
+                </a:tc>
+                <a:tc>
+                  <a:txBody>
+                    <a:bodyPr wrap="square"/>
+                    <a:lstStyle/>
+                    <a:p>
+                      <a:pPr algn="r"/>
+                      <a:r>
+                        <a:rPr sz="900" b="0" i="0">
+                          <a:solidFill>
+                            <a:srgbClr val="1A1A1A"/>
+                          </a:solidFill>
+                          <a:latin typeface="Helvetica Neue"/>
+                        </a:rPr>
+                        <a:t>305.5</a:t>
+                      </a:r>
+                    </a:p>
+                  </a:txBody>
+                  <a:tcPr marL="45720" marR="45720" marT="18288" marB="18288" anchor="t"/>
+                </a:tc>
+                <a:tc>
+                  <a:txBody>
+                    <a:bodyPr wrap="square"/>
+                    <a:lstStyle/>
+                    <a:p>
+                      <a:r>
+                        <a:rPr sz="900" b="0" i="0">
+                          <a:solidFill>
+                            <a:srgbClr val="1A1A1A"/>
+                          </a:solidFill>
+                          <a:latin typeface="Helvetica Neue"/>
+                        </a:rPr>
+                        <a:t>Fully Automated Deep Learning System for Bone Age Assessment (2017)</a:t>
+                      </a:r>
+                    </a:p>
+                  </a:txBody>
+                  <a:tcPr marL="45720" marR="45720" marT="18288" marB="18288" anchor="t"/>
+                </a:tc>
+                <a:tc>
+                  <a:txBody>
+                    <a:bodyPr wrap="square"/>
+                    <a:lstStyle/>
+                    <a:p>
+                      <a:r>
+                        <a:rPr sz="900" b="0" i="0">
+                          <a:solidFill>
+                            <a:srgbClr val="1A1A1A"/>
+                          </a:solidFill>
+                          <a:latin typeface="Helvetica Neue"/>
+                        </a:rPr>
+                        <a:t>Journal of digital imaging</a:t>
+                      </a:r>
+                    </a:p>
+                  </a:txBody>
+                  <a:tcPr marL="45720" marR="45720" marT="18288" marB="18288" anchor="t"/>
+                </a:tc>
+                <a:tc>
+                  <a:txBody>
+                    <a:bodyPr wrap="square"/>
+                    <a:lstStyle/>
+                    <a:p>
+                      <a:r>
+                        <a:rPr sz="900" b="0" i="0">
+                          <a:solidFill>
+                            <a:srgbClr val="1A1A1A"/>
+                          </a:solidFill>
+                          <a:latin typeface="Helvetica Neue"/>
+                        </a:rPr>
+                        <a:t>bone age / skeletal maturity</a:t>
+                      </a:r>
+                    </a:p>
+                  </a:txBody>
+                  <a:tcPr marL="45720" marR="45720" marT="18288" marB="18288" anchor="t"/>
+                </a:tc>
+                <a:tc>
+                  <a:txBody>
+                    <a:bodyPr wrap="square"/>
+                    <a:lstStyle/>
+                    <a:p>
+                      <a:r>
+                        <a:rPr sz="900" b="0" i="1">
+                          <a:solidFill>
+                            <a:srgbClr val="1A1A1A"/>
+                          </a:solidFill>
+                          <a:latin typeface="Helvetica Neue"/>
+                        </a:rPr>
+                        <a:t>measurement</a:t>
+                      </a:r>
+                      <a:r>
+                        <a:rPr sz="900" b="0" i="0">
+                          <a:solidFill>
+                            <a:srgbClr val="1A1A1A"/>
+                          </a:solidFill>
+                          <a:latin typeface="Helvetica Neue"/>
+                        </a:rPr>
+                        <a:t>: Can a fully automated pipeline (find the hand, standardize the image, read it) assign bone age with no manual steps, fast enough for clinical use?</a:t>
+                      </a:r>
+                    </a:p>
+                  </a:txBody>
+                  <a:tcPr marL="45720" marR="45720" marT="18288" marB="18288" anchor="t"/>
+                </a:tc>
+              </a:tr>
+              <a:tr h="466344">
+                <a:tc>
+                  <a:txBody>
+                    <a:bodyPr wrap="square"/>
+                    <a:lstStyle/>
+                    <a:p>
+                      <a:pPr algn="r"/>
+                      <a:r>
+                        <a:rPr sz="900" b="0" i="0">
+                          <a:solidFill>
+                            <a:srgbClr val="1A1A1A"/>
+                          </a:solidFill>
+                          <a:latin typeface="Helvetica Neue"/>
+                        </a:rPr>
+                        <a:t>407</a:t>
+                      </a:r>
+                    </a:p>
+                  </a:txBody>
+                  <a:tcPr marL="45720" marR="45720" marT="18288" marB="18288" anchor="t"/>
+                </a:tc>
+                <a:tc>
+                  <a:txBody>
+                    <a:bodyPr wrap="square"/>
+                    <a:lstStyle/>
+                    <a:p>
+                      <a:pPr algn="r"/>
+                      <a:r>
+                        <a:rPr sz="900" b="0" i="0">
+                          <a:solidFill>
+                            <a:srgbClr val="1A1A1A"/>
+                          </a:solidFill>
+                          <a:latin typeface="Helvetica Neue"/>
+                        </a:rPr>
+                        <a:t>206.8</a:t>
+                      </a:r>
+                    </a:p>
+                  </a:txBody>
+                  <a:tcPr marL="45720" marR="45720" marT="18288" marB="18288" anchor="t"/>
+                </a:tc>
+                <a:tc>
+                  <a:txBody>
+                    <a:bodyPr wrap="square"/>
+                    <a:lstStyle/>
+                    <a:p>
+                      <a:r>
+                        <a:rPr sz="900" b="0" i="0">
+                          <a:solidFill>
+                            <a:srgbClr val="1A1A1A"/>
+                          </a:solidFill>
+                          <a:latin typeface="Helvetica Neue"/>
+                        </a:rPr>
+                        <a:t>Deep learning for automated skeletal bone age assessment in X-ray images (2017)</a:t>
+                      </a:r>
+                    </a:p>
+                  </a:txBody>
+                  <a:tcPr marL="45720" marR="45720" marT="18288" marB="18288" anchor="t"/>
+                </a:tc>
+                <a:tc>
+                  <a:txBody>
+                    <a:bodyPr wrap="square"/>
+                    <a:lstStyle/>
+                    <a:p>
+                      <a:r>
+                        <a:rPr sz="900" b="0" i="0">
+                          <a:solidFill>
+                            <a:srgbClr val="1A1A1A"/>
+                          </a:solidFill>
+                          <a:latin typeface="Helvetica Neue"/>
+                        </a:rPr>
+                        <a:t>Medical Image Anal.</a:t>
+                      </a:r>
+                    </a:p>
+                  </a:txBody>
+                  <a:tcPr marL="45720" marR="45720" marT="18288" marB="18288" anchor="t"/>
+                </a:tc>
+                <a:tc>
+                  <a:txBody>
+                    <a:bodyPr wrap="square"/>
+                    <a:lstStyle/>
+                    <a:p>
+                      <a:r>
+                        <a:rPr sz="900" b="0" i="0">
+                          <a:solidFill>
+                            <a:srgbClr val="1A1A1A"/>
+                          </a:solidFill>
+                          <a:latin typeface="Helvetica Neue"/>
+                        </a:rPr>
+                        <a:t>bone age / skeletal maturity</a:t>
+                      </a:r>
+                    </a:p>
+                  </a:txBody>
+                  <a:tcPr marL="45720" marR="45720" marT="18288" marB="18288" anchor="t"/>
+                </a:tc>
+                <a:tc>
+                  <a:txBody>
+                    <a:bodyPr wrap="square"/>
+                    <a:lstStyle/>
+                    <a:p>
+                      <a:r>
+                        <a:rPr sz="900" b="0" i="1">
+                          <a:solidFill>
+                            <a:srgbClr val="1A1A1A"/>
+                          </a:solidFill>
+                          <a:latin typeface="Helvetica Neue"/>
+                        </a:rPr>
+                        <a:t>measurement</a:t>
+                      </a:r>
+                      <a:r>
+                        <a:rPr sz="900" b="0" i="0">
+                          <a:solidFill>
+                            <a:srgbClr val="1A1A1A"/>
+                          </a:solidFill>
+                          <a:latin typeface="Helvetica Neue"/>
+                        </a:rPr>
+                        <a:t>: Can a deep network estimate bone age directly from radiographs, without hand-crafted features, across sexes and ethnicities? (BoNet)</a:t>
+                      </a:r>
+                    </a:p>
+                  </a:txBody>
+                  <a:tcPr marL="45720" marR="45720" marT="18288" marB="18288" anchor="t"/>
+                </a:tc>
+              </a:tr>
+              <a:tr h="466344">
+                <a:tc>
+                  <a:txBody>
+                    <a:bodyPr wrap="square"/>
+                    <a:lstStyle/>
+                    <a:p>
+                      <a:pPr algn="r"/>
+                      <a:r>
+                        <a:rPr sz="900" b="0" i="0">
+                          <a:solidFill>
+                            <a:srgbClr val="1A1A1A"/>
+                          </a:solidFill>
+                          <a:latin typeface="Helvetica Neue"/>
+                        </a:rPr>
+                        <a:t>144</a:t>
+                      </a:r>
+                    </a:p>
+                  </a:txBody>
+                  <a:tcPr marL="45720" marR="45720" marT="18288" marB="18288" anchor="t"/>
+                </a:tc>
+                <a:tc>
+                  <a:txBody>
+                    <a:bodyPr wrap="square"/>
+                    <a:lstStyle/>
+                    <a:p>
+                      <a:pPr algn="r"/>
+                      <a:r>
+                        <a:rPr sz="900" b="0" i="0">
+                          <a:solidFill>
+                            <a:srgbClr val="1A1A1A"/>
+                          </a:solidFill>
+                          <a:latin typeface="Helvetica Neue"/>
+                        </a:rPr>
+                        <a:t>69.0</a:t>
+                      </a:r>
+                    </a:p>
+                  </a:txBody>
+                  <a:tcPr marL="45720" marR="45720" marT="18288" marB="18288" anchor="t"/>
+                </a:tc>
+                <a:tc>
+                  <a:txBody>
+                    <a:bodyPr wrap="square"/>
+                    <a:lstStyle/>
+                    <a:p>
+                      <a:r>
+                        <a:rPr sz="900" b="0" i="0">
+                          <a:solidFill>
+                            <a:srgbClr val="1A1A1A"/>
+                          </a:solidFill>
+                          <a:latin typeface="Helvetica Neue"/>
+                        </a:rPr>
+                        <a:t>Computerized Bone Age Estimation Using Deep Learning Based Program: Evaluation of the Accuracy and Efficiency. (2017)</a:t>
+                      </a:r>
+                    </a:p>
+                  </a:txBody>
+                  <a:tcPr marL="45720" marR="45720" marT="18288" marB="18288" anchor="t"/>
+                </a:tc>
+                <a:tc>
+                  <a:txBody>
+                    <a:bodyPr wrap="square"/>
+                    <a:lstStyle/>
+                    <a:p>
+                      <a:r>
+                        <a:rPr sz="900" b="0" i="0">
+                          <a:solidFill>
+                            <a:srgbClr val="1A1A1A"/>
+                          </a:solidFill>
+                          <a:latin typeface="Helvetica Neue"/>
+                        </a:rPr>
+                        <a:t>AJR. American journal of roentgenology</a:t>
+                      </a:r>
+                    </a:p>
+                  </a:txBody>
+                  <a:tcPr marL="45720" marR="45720" marT="18288" marB="18288" anchor="t"/>
+                </a:tc>
+                <a:tc>
+                  <a:txBody>
+                    <a:bodyPr wrap="square"/>
+                    <a:lstStyle/>
+                    <a:p>
+                      <a:r>
+                        <a:rPr sz="900" b="0" i="0">
+                          <a:solidFill>
+                            <a:srgbClr val="1A1A1A"/>
+                          </a:solidFill>
+                          <a:latin typeface="Helvetica Neue"/>
+                        </a:rPr>
+                        <a:t>bone age / skeletal maturity</a:t>
+                      </a:r>
+                    </a:p>
+                  </a:txBody>
+                  <a:tcPr marL="45720" marR="45720" marT="18288" marB="18288" anchor="t"/>
+                </a:tc>
+                <a:tc>
+                  <a:txBody>
+                    <a:bodyPr wrap="square"/>
+                    <a:lstStyle/>
+                    <a:p>
+                      <a:r>
+                        <a:rPr sz="900" b="0" i="1">
+                          <a:solidFill>
+                            <a:srgbClr val="1A1A1A"/>
+                          </a:solidFill>
+                          <a:latin typeface="Helvetica Neue"/>
+                        </a:rPr>
+                        <a:t>measurement</a:t>
+                      </a:r>
+                      <a:r>
+                        <a:rPr sz="900" b="0" i="0">
+                          <a:solidFill>
+                            <a:srgbClr val="1A1A1A"/>
+                          </a:solidFill>
+                          <a:latin typeface="Helvetica Neue"/>
+                        </a:rPr>
+                        <a:t>: Is a commercial deep-learning bone-age program (VUNO) accurate, and does it shorten radiologist reading time?</a:t>
+                      </a:r>
+                    </a:p>
+                  </a:txBody>
+                  <a:tcPr marL="45720" marR="45720" marT="18288" marB="18288" anchor="t"/>
+                </a:tc>
+              </a:tr>
+              <a:tr h="603503">
+                <a:tc>
+                  <a:txBody>
+                    <a:bodyPr wrap="square"/>
+                    <a:lstStyle/>
+                    <a:p>
+                      <a:pPr algn="r"/>
+                      <a:r>
+                        <a:rPr sz="900" b="0" i="0">
+                          <a:solidFill>
+                            <a:srgbClr val="1A1A1A"/>
+                          </a:solidFill>
+                          <a:latin typeface="Helvetica Neue"/>
+                        </a:rPr>
+                        <a:t>353</a:t>
+                      </a:r>
+                    </a:p>
+                  </a:txBody>
+                  <a:tcPr marL="45720" marR="45720" marT="18288" marB="18288" anchor="t"/>
+                </a:tc>
+                <a:tc>
+                  <a:txBody>
+                    <a:bodyPr wrap="square"/>
+                    <a:lstStyle/>
+                    <a:p>
+                      <a:pPr algn="r"/>
+                      <a:r>
+                        <a:rPr sz="900" b="0" i="0">
+                          <a:solidFill>
+                            <a:srgbClr val="1A1A1A"/>
+                          </a:solidFill>
+                          <a:latin typeface="Helvetica Neue"/>
+                        </a:rPr>
+                        <a:t>55.0</a:t>
+                      </a:r>
+                    </a:p>
+                  </a:txBody>
+                  <a:tcPr marL="45720" marR="45720" marT="18288" marB="18288" anchor="t"/>
+                </a:tc>
+                <a:tc>
+                  <a:txBody>
+                    <a:bodyPr wrap="square"/>
+                    <a:lstStyle/>
+                    <a:p>
+                      <a:r>
+                        <a:rPr sz="900" b="0" i="0">
+                          <a:solidFill>
+                            <a:srgbClr val="1A1A1A"/>
+                          </a:solidFill>
+                          <a:latin typeface="Helvetica Neue"/>
+                        </a:rPr>
+                        <a:t>Standard Plane Localization in Fetal Ultrasound via Domain Transferred Deep Neural Networks (2015)</a:t>
+                      </a:r>
+                    </a:p>
+                  </a:txBody>
+                  <a:tcPr marL="45720" marR="45720" marT="18288" marB="18288" anchor="t"/>
+                </a:tc>
+                <a:tc>
+                  <a:txBody>
+                    <a:bodyPr wrap="square"/>
+                    <a:lstStyle/>
+                    <a:p>
+                      <a:r>
+                        <a:rPr sz="900" b="0" i="0">
+                          <a:solidFill>
+                            <a:srgbClr val="1A1A1A"/>
+                          </a:solidFill>
+                          <a:latin typeface="Helvetica Neue"/>
+                        </a:rPr>
+                        <a:t>IEEE journal of biomedical and health informatics</a:t>
+                      </a:r>
+                    </a:p>
+                  </a:txBody>
+                  <a:tcPr marL="45720" marR="45720" marT="18288" marB="18288" anchor="t"/>
+                </a:tc>
+                <a:tc>
+                  <a:txBody>
+                    <a:bodyPr wrap="square"/>
+                    <a:lstStyle/>
+                    <a:p>
+                      <a:r>
+                        <a:rPr sz="900" b="0" i="0">
+                          <a:solidFill>
+                            <a:srgbClr val="1A1A1A"/>
+                          </a:solidFill>
+                          <a:latin typeface="Helvetica Neue"/>
+                        </a:rPr>
+                        <a:t>fetal anomalies / prenatal</a:t>
+                      </a:r>
+                    </a:p>
+                  </a:txBody>
+                  <a:tcPr marL="45720" marR="45720" marT="18288" marB="18288" anchor="t"/>
+                </a:tc>
+                <a:tc>
+                  <a:txBody>
+                    <a:bodyPr wrap="square"/>
+                    <a:lstStyle/>
+                    <a:p>
+                      <a:r>
+                        <a:rPr sz="900" b="0" i="1">
+                          <a:solidFill>
+                            <a:srgbClr val="1A1A1A"/>
+                          </a:solidFill>
+                          <a:latin typeface="Helvetica Neue"/>
+                        </a:rPr>
+                        <a:t>detection</a:t>
+                      </a:r>
+                      <a:r>
+                        <a:rPr sz="900" b="0" i="0">
+                          <a:solidFill>
+                            <a:srgbClr val="1A1A1A"/>
+                          </a:solidFill>
+                          <a:latin typeface="Helvetica Neue"/>
+                        </a:rPr>
+                        <a:t>: Can a CNN find the frame showing the fetal abdominal standard plane (where biometry is measured) in an ultrasound video, using layers transferred from a photo-trained network to cope with little data?</a:t>
+                      </a:r>
+                    </a:p>
+                  </a:txBody>
+                  <a:tcPr marL="45720" marR="45720" marT="18288" marB="18288" anchor="t"/>
+                </a:tc>
+              </a:tr>
+              <a:tr h="466344">
+                <a:tc>
+                  <a:txBody>
+                    <a:bodyPr wrap="square"/>
+                    <a:lstStyle/>
+                    <a:p>
+                      <a:pPr algn="r"/>
+                      <a:r>
+                        <a:rPr sz="900" b="0" i="0">
+                          <a:solidFill>
+                            <a:srgbClr val="1A1A1A"/>
+                          </a:solidFill>
+                          <a:latin typeface="Helvetica Neue"/>
+                        </a:rPr>
+                        <a:t>196</a:t>
+                      </a:r>
+                    </a:p>
+                  </a:txBody>
+                  <a:tcPr marL="45720" marR="45720" marT="18288" marB="18288" anchor="t"/>
+                </a:tc>
+                <a:tc>
+                  <a:txBody>
+                    <a:bodyPr wrap="square"/>
+                    <a:lstStyle/>
+                    <a:p>
+                      <a:pPr algn="r"/>
+                      <a:r>
+                        <a:rPr sz="900" b="0" i="0">
+                          <a:solidFill>
+                            <a:srgbClr val="1A1A1A"/>
+                          </a:solidFill>
+                          <a:latin typeface="Helvetica Neue"/>
+                        </a:rPr>
+                        <a:t>54.4</a:t>
+                      </a:r>
+                    </a:p>
+                  </a:txBody>
+                  <a:tcPr marL="45720" marR="45720" marT="18288" marB="18288" anchor="t"/>
+                </a:tc>
+                <a:tc>
+                  <a:txBody>
+                    <a:bodyPr wrap="square"/>
+                    <a:lstStyle/>
+                    <a:p>
+                      <a:r>
+                        <a:rPr sz="900" b="0" i="0">
+                          <a:solidFill>
+                            <a:srgbClr val="1A1A1A"/>
+                          </a:solidFill>
+                          <a:latin typeface="Helvetica Neue"/>
+                        </a:rPr>
+                        <a:t>Automatic Fetal Ultrasound Standard Plane Recognition Based on Deep Learning and IIoT (2021)</a:t>
+                      </a:r>
+                    </a:p>
+                  </a:txBody>
+                  <a:tcPr marL="45720" marR="45720" marT="18288" marB="18288" anchor="t"/>
+                </a:tc>
+                <a:tc>
+                  <a:txBody>
+                    <a:bodyPr wrap="square"/>
+                    <a:lstStyle/>
+                    <a:p>
+                      <a:r>
+                        <a:rPr sz="900" b="0" i="0">
+                          <a:solidFill>
+                            <a:srgbClr val="1A1A1A"/>
+                          </a:solidFill>
+                          <a:latin typeface="Helvetica Neue"/>
+                        </a:rPr>
+                        <a:t>IEEE Transactions on Industrial Informatics</a:t>
+                      </a:r>
+                    </a:p>
+                  </a:txBody>
+                  <a:tcPr marL="45720" marR="45720" marT="18288" marB="18288" anchor="t"/>
+                </a:tc>
+                <a:tc>
+                  <a:txBody>
+                    <a:bodyPr wrap="square"/>
+                    <a:lstStyle/>
+                    <a:p>
+                      <a:r>
+                        <a:rPr sz="900" b="0" i="0">
+                          <a:solidFill>
+                            <a:srgbClr val="1A1A1A"/>
+                          </a:solidFill>
+                          <a:latin typeface="Helvetica Neue"/>
+                        </a:rPr>
+                        <a:t>fetal anomalies / prenatal</a:t>
+                      </a:r>
+                    </a:p>
+                  </a:txBody>
+                  <a:tcPr marL="45720" marR="45720" marT="18288" marB="18288" anchor="t"/>
+                </a:tc>
+                <a:tc>
+                  <a:txBody>
+                    <a:bodyPr wrap="square"/>
+                    <a:lstStyle/>
+                    <a:p>
+                      <a:r>
+                        <a:rPr sz="900" b="0" i="1">
+                          <a:solidFill>
+                            <a:srgbClr val="1A1A1A"/>
+                          </a:solidFill>
+                          <a:latin typeface="Helvetica Neue"/>
+                        </a:rPr>
+                        <a:t>detection</a:t>
+                      </a:r>
+                      <a:r>
+                        <a:rPr sz="900" b="0" i="0">
+                          <a:solidFill>
+                            <a:srgbClr val="1A1A1A"/>
+                          </a:solidFill>
+                          <a:latin typeface="Helvetica Neue"/>
+                        </a:rPr>
+                        <a:t>: Can deep learning recognize the standard fetal ultrasound views automatically, reducing dependence on sonographer experience?</a:t>
+                      </a:r>
+                    </a:p>
+                  </a:txBody>
+                  <a:tcPr marL="45720" marR="45720" marT="18288" marB="18288" anchor="t"/>
+                </a:tc>
+              </a:tr>
+              <a:tr h="466344">
+                <a:tc>
+                  <a:txBody>
+                    <a:bodyPr wrap="square"/>
+                    <a:lstStyle/>
+                    <a:p>
+                      <a:pPr algn="r"/>
+                      <a:r>
+                        <a:rPr sz="900" b="0" i="0">
+                          <a:solidFill>
+                            <a:srgbClr val="1A1A1A"/>
+                          </a:solidFill>
+                          <a:latin typeface="Helvetica Neue"/>
+                        </a:rPr>
+                        <a:t>449</a:t>
+                      </a:r>
+                    </a:p>
+                  </a:txBody>
+                  <a:tcPr marL="45720" marR="45720" marT="18288" marB="18288" anchor="t"/>
+                </a:tc>
+                <a:tc>
+                  <a:txBody>
+                    <a:bodyPr wrap="square"/>
+                    <a:lstStyle/>
+                    <a:p>
+                      <a:pPr algn="r"/>
+                      <a:r>
+                        <a:rPr sz="900" b="0" i="0">
+                          <a:solidFill>
+                            <a:srgbClr val="1A1A1A"/>
+                          </a:solidFill>
+                          <a:latin typeface="Helvetica Neue"/>
+                        </a:rPr>
+                        <a:t>35.4</a:t>
+                      </a:r>
+                    </a:p>
+                  </a:txBody>
+                  <a:tcPr marL="45720" marR="45720" marT="18288" marB="18288" anchor="t"/>
+                </a:tc>
+                <a:tc>
+                  <a:txBody>
+                    <a:bodyPr wrap="square"/>
+                    <a:lstStyle/>
+                    <a:p>
+                      <a:r>
+                        <a:rPr sz="900" b="0" i="0">
+                          <a:solidFill>
+                            <a:srgbClr val="1A1A1A"/>
+                          </a:solidFill>
+                          <a:latin typeface="Helvetica Neue"/>
+                        </a:rPr>
+                        <a:t>A transfer learning method with deep residual network for pediatric pneumonia diagnosis (2020)</a:t>
+                      </a:r>
+                    </a:p>
+                  </a:txBody>
+                  <a:tcPr marL="45720" marR="45720" marT="18288" marB="18288" anchor="t"/>
+                </a:tc>
+                <a:tc>
+                  <a:txBody>
+                    <a:bodyPr wrap="square"/>
+                    <a:lstStyle/>
+                    <a:p>
+                      <a:r>
+                        <a:rPr sz="900" b="0" i="0">
+                          <a:solidFill>
+                            <a:srgbClr val="1A1A1A"/>
+                          </a:solidFill>
+                          <a:latin typeface="Helvetica Neue"/>
+                        </a:rPr>
+                        <a:t>Comput. Methods Programs Biomed.</a:t>
+                      </a:r>
+                    </a:p>
+                  </a:txBody>
+                  <a:tcPr marL="45720" marR="45720" marT="18288" marB="18288" anchor="t"/>
+                </a:tc>
+                <a:tc>
+                  <a:txBody>
+                    <a:bodyPr wrap="square"/>
+                    <a:lstStyle/>
+                    <a:p>
+                      <a:r>
+                        <a:rPr sz="900" b="0" i="0">
+                          <a:solidFill>
+                            <a:srgbClr val="1A1A1A"/>
+                          </a:solidFill>
+                          <a:latin typeface="Helvetica Neue"/>
+                        </a:rPr>
+                        <a:t>pneumonia / bronchiolitis / RSV / TB</a:t>
+                      </a:r>
+                    </a:p>
+                  </a:txBody>
+                  <a:tcPr marL="45720" marR="45720" marT="18288" marB="18288" anchor="t"/>
+                </a:tc>
+                <a:tc>
+                  <a:txBody>
+                    <a:bodyPr wrap="square"/>
+                    <a:lstStyle/>
+                    <a:p>
+                      <a:r>
+                        <a:rPr sz="900" b="0" i="1">
+                          <a:solidFill>
+                            <a:srgbClr val="1A1A1A"/>
+                          </a:solidFill>
+                          <a:latin typeface="Helvetica Neue"/>
+                        </a:rPr>
+                        <a:t>diagnosis</a:t>
+                      </a:r>
+                      <a:r>
+                        <a:rPr sz="900" b="0" i="0">
+                          <a:solidFill>
+                            <a:srgbClr val="1A1A1A"/>
+                          </a:solidFill>
+                          <a:latin typeface="Helvetica Neue"/>
+                        </a:rPr>
+                        <a:t>: Can a residual CNN with transfer learning diagnose pneumonia on pediatric chest X-rays (children aged 1–5, Guangzhou dataset)?</a:t>
+                      </a:r>
+                    </a:p>
+                  </a:txBody>
+                  <a:tcPr marL="45720" marR="45720" marT="18288" marB="18288" anchor="t"/>
+                </a:tc>
+              </a:tr>
+              <a:tr h="603503">
+                <a:tc>
+                  <a:txBody>
+                    <a:bodyPr wrap="square"/>
+                    <a:lstStyle/>
+                    <a:p>
+                      <a:pPr algn="r"/>
+                      <a:r>
+                        <a:rPr sz="900" b="0" i="0">
+                          <a:solidFill>
+                            <a:srgbClr val="1A1A1A"/>
+                          </a:solidFill>
+                          <a:latin typeface="Helvetica Neue"/>
+                        </a:rPr>
+                        <a:t>236</a:t>
+                      </a:r>
+                    </a:p>
+                  </a:txBody>
+                  <a:tcPr marL="45720" marR="45720" marT="18288" marB="18288" anchor="t"/>
+                </a:tc>
+                <a:tc>
+                  <a:txBody>
+                    <a:bodyPr wrap="square"/>
+                    <a:lstStyle/>
+                    <a:p>
+                      <a:pPr algn="r"/>
+                      <a:r>
+                        <a:rPr sz="900" b="0" i="0">
+                          <a:solidFill>
+                            <a:srgbClr val="1A1A1A"/>
+                          </a:solidFill>
+                          <a:latin typeface="Helvetica Neue"/>
+                        </a:rPr>
+                        <a:t>28.9</a:t>
+                      </a:r>
+                    </a:p>
+                  </a:txBody>
+                  <a:tcPr marL="45720" marR="45720" marT="18288" marB="18288" anchor="t"/>
+                </a:tc>
+                <a:tc>
+                  <a:txBody>
+                    <a:bodyPr wrap="square"/>
+                    <a:lstStyle/>
+                    <a:p>
+                      <a:r>
+                        <a:rPr sz="900" b="0" i="0">
+                          <a:solidFill>
+                            <a:srgbClr val="1A1A1A"/>
+                          </a:solidFill>
+                          <a:latin typeface="Helvetica Neue"/>
+                        </a:rPr>
+                        <a:t>Evaluation of deep convolutional neural networks for automatic classification of common maternal fetal ultrasound planes (2020)</a:t>
+                      </a:r>
+                    </a:p>
+                  </a:txBody>
+                  <a:tcPr marL="45720" marR="45720" marT="18288" marB="18288" anchor="t"/>
+                </a:tc>
+                <a:tc>
+                  <a:txBody>
+                    <a:bodyPr wrap="square"/>
+                    <a:lstStyle/>
+                    <a:p>
+                      <a:r>
+                        <a:rPr sz="900" b="0" i="0">
+                          <a:solidFill>
+                            <a:srgbClr val="1A1A1A"/>
+                          </a:solidFill>
+                          <a:latin typeface="Helvetica Neue"/>
+                        </a:rPr>
+                        <a:t>Scientific Reports</a:t>
+                      </a:r>
+                    </a:p>
+                  </a:txBody>
+                  <a:tcPr marL="45720" marR="45720" marT="18288" marB="18288" anchor="t"/>
+                </a:tc>
+                <a:tc>
+                  <a:txBody>
+                    <a:bodyPr wrap="square"/>
+                    <a:lstStyle/>
+                    <a:p>
+                      <a:r>
+                        <a:rPr sz="900" b="0" i="0">
+                          <a:solidFill>
+                            <a:srgbClr val="1A1A1A"/>
+                          </a:solidFill>
+                          <a:latin typeface="Helvetica Neue"/>
+                        </a:rPr>
+                        <a:t>fetal anomalies / prenatal</a:t>
+                      </a:r>
+                    </a:p>
+                  </a:txBody>
+                  <a:tcPr marL="45720" marR="45720" marT="18288" marB="18288" anchor="t"/>
+                </a:tc>
+                <a:tc>
+                  <a:txBody>
+                    <a:bodyPr wrap="square"/>
+                    <a:lstStyle/>
+                    <a:p>
+                      <a:r>
+                        <a:rPr sz="900" b="0" i="1">
+                          <a:solidFill>
+                            <a:srgbClr val="1A1A1A"/>
+                          </a:solidFill>
+                          <a:latin typeface="Helvetica Neue"/>
+                        </a:rPr>
+                        <a:t>detection</a:t>
+                      </a:r>
+                      <a:r>
+                        <a:rPr sz="900" b="0" i="0">
+                          <a:solidFill>
+                            <a:srgbClr val="1A1A1A"/>
+                          </a:solidFill>
+                          <a:latin typeface="Helvetica Neue"/>
+                        </a:rPr>
+                        <a:t>: Can CNNs sort routine maternal–fetal ultrasound images into the standard planes (fetal brain, abdomen, femur, thorax, cervix) as well as a sonographer? (public FETAL_PLANES_DB)</a:t>
                       </a:r>
                     </a:p>
                   </a:txBody>
@@ -8355,44 +9622,44 @@
                           </a:solidFill>
                           <a:latin typeface="Helvetica Neue"/>
                         </a:rPr>
-                        <a:t>426</a:t>
-                      </a:r>
-                    </a:p>
-                  </a:txBody>
-                  <a:tcPr marL="45720" marR="45720" marT="18288" marB="18288" anchor="t"/>
-                </a:tc>
-                <a:tc>
-                  <a:txBody>
-                    <a:bodyPr wrap="square"/>
-                    <a:lstStyle/>
-                    <a:p>
-                      <a:pPr algn="r"/>
-                      <a:r>
-                        <a:rPr sz="900" b="0" i="0">
-                          <a:solidFill>
-                            <a:srgbClr val="1A1A1A"/>
-                          </a:solidFill>
-                          <a:latin typeface="Helvetica Neue"/>
-                        </a:rPr>
-                        <a:t>310.7</a:t>
-                      </a:r>
-                    </a:p>
-                  </a:txBody>
-                  <a:tcPr marL="45720" marR="45720" marT="18288" marB="18288" anchor="t"/>
-                </a:tc>
-                <a:tc>
-                  <a:txBody>
-                    <a:bodyPr wrap="square"/>
-                    <a:lstStyle/>
-                    <a:p>
-                      <a:r>
-                        <a:rPr sz="900" b="0" i="0">
-                          <a:solidFill>
-                            <a:srgbClr val="1A1A1A"/>
-                          </a:solidFill>
-                          <a:latin typeface="Helvetica Neue"/>
-                        </a:rPr>
-                        <a:t>Performance of a Deep-Learning Neural Network Model in Assessing Skeletal Maturity on Pediatric Hand Radiographs. (2017)</a:t>
+                        <a:t>460</a:t>
+                      </a:r>
+                    </a:p>
+                  </a:txBody>
+                  <a:tcPr marL="45720" marR="45720" marT="18288" marB="18288" anchor="t"/>
+                </a:tc>
+                <a:tc>
+                  <a:txBody>
+                    <a:bodyPr wrap="square"/>
+                    <a:lstStyle/>
+                    <a:p>
+                      <a:pPr algn="r"/>
+                      <a:r>
+                        <a:rPr sz="900" b="0" i="0">
+                          <a:solidFill>
+                            <a:srgbClr val="1A1A1A"/>
+                          </a:solidFill>
+                          <a:latin typeface="Helvetica Neue"/>
+                        </a:rPr>
+                        <a:t>26.4</a:t>
+                      </a:r>
+                    </a:p>
+                  </a:txBody>
+                  <a:tcPr marL="45720" marR="45720" marT="18288" marB="18288" anchor="t"/>
+                </a:tc>
+                <a:tc>
+                  <a:txBody>
+                    <a:bodyPr wrap="square"/>
+                    <a:lstStyle/>
+                    <a:p>
+                      <a:r>
+                        <a:rPr sz="900" b="0" i="0">
+                          <a:solidFill>
+                            <a:srgbClr val="1A1A1A"/>
+                          </a:solidFill>
+                          <a:latin typeface="Helvetica Neue"/>
+                        </a:rPr>
+                        <a:t>The RSNA Pediatric Bone Age Machine Learning Challenge. (2019)</a:t>
                       </a:r>
                     </a:p>
                   </a:txBody>
@@ -8422,6 +9689,24 @@
                     <a:lstStyle/>
                     <a:p>
                       <a:r>
+                        <a:rPr sz="900" b="0" i="0">
+                          <a:solidFill>
+                            <a:srgbClr val="1A1A1A"/>
+                          </a:solidFill>
+                          <a:latin typeface="Helvetica Neue"/>
+                        </a:rPr>
+                        <a:t>bone age / skeletal maturity</a:t>
+                      </a:r>
+                    </a:p>
+                  </a:txBody>
+                  <a:tcPr marL="45720" marR="45720" marT="18288" marB="18288" anchor="t"/>
+                </a:tc>
+                <a:tc>
+                  <a:txBody>
+                    <a:bodyPr wrap="square"/>
+                    <a:lstStyle/>
+                    <a:p>
+                      <a:r>
                         <a:rPr sz="900" b="0" i="1">
                           <a:solidFill>
                             <a:srgbClr val="1A1A1A"/>
@@ -8437,83 +9722,101 @@
                           </a:solidFill>
                           <a:latin typeface="Helvetica Neue"/>
                         </a:rPr>
-                        <a:t>: Can a CNN assess skeletal maturity as accurately as radiologists?</a:t>
+                        <a:t>: How well can crowdsourced AI estimate bone age? (RSNA challenge, 260 teams)</a:t>
                       </a:r>
                     </a:p>
                   </a:txBody>
                   <a:tcPr marL="45720" marR="45720" marT="18288" marB="18288" anchor="t"/>
                 </a:tc>
               </a:tr>
-              <a:tr h="329184">
-                <a:tc>
-                  <a:txBody>
-                    <a:bodyPr wrap="square"/>
-                    <a:lstStyle/>
-                    <a:p>
-                      <a:pPr algn="r"/>
-                      <a:r>
-                        <a:rPr sz="900" b="0" i="0">
-                          <a:solidFill>
-                            <a:srgbClr val="1A1A1A"/>
-                          </a:solidFill>
-                          <a:latin typeface="Helvetica Neue"/>
-                        </a:rPr>
-                        <a:t>432</a:t>
-                      </a:r>
-                    </a:p>
-                  </a:txBody>
-                  <a:tcPr marL="45720" marR="45720" marT="18288" marB="18288" anchor="t"/>
-                </a:tc>
-                <a:tc>
-                  <a:txBody>
-                    <a:bodyPr wrap="square"/>
-                    <a:lstStyle/>
-                    <a:p>
-                      <a:pPr algn="r"/>
-                      <a:r>
-                        <a:rPr sz="900" b="0" i="0">
-                          <a:solidFill>
-                            <a:srgbClr val="1A1A1A"/>
-                          </a:solidFill>
-                          <a:latin typeface="Helvetica Neue"/>
-                        </a:rPr>
-                        <a:t>305.5</a:t>
-                      </a:r>
-                    </a:p>
-                  </a:txBody>
-                  <a:tcPr marL="45720" marR="45720" marT="18288" marB="18288" anchor="t"/>
-                </a:tc>
-                <a:tc>
-                  <a:txBody>
-                    <a:bodyPr wrap="square"/>
-                    <a:lstStyle/>
-                    <a:p>
-                      <a:r>
-                        <a:rPr sz="900" b="0" i="0">
-                          <a:solidFill>
-                            <a:srgbClr val="1A1A1A"/>
-                          </a:solidFill>
-                          <a:latin typeface="Helvetica Neue"/>
-                        </a:rPr>
-                        <a:t>Fully Automated Deep Learning System for Bone Age Assessment (2017)</a:t>
-                      </a:r>
-                    </a:p>
-                  </a:txBody>
-                  <a:tcPr marL="45720" marR="45720" marT="18288" marB="18288" anchor="t"/>
-                </a:tc>
-                <a:tc>
-                  <a:txBody>
-                    <a:bodyPr wrap="square"/>
-                    <a:lstStyle/>
-                    <a:p>
-                      <a:r>
-                        <a:rPr sz="900" b="0" i="0">
-                          <a:solidFill>
-                            <a:srgbClr val="1A1A1A"/>
-                          </a:solidFill>
-                          <a:latin typeface="Helvetica Neue"/>
-                        </a:rPr>
-                        <a:t>Journal of digital imaging</a:t>
+              <a:tr h="466344">
+                <a:tc>
+                  <a:txBody>
+                    <a:bodyPr wrap="square"/>
+                    <a:lstStyle/>
+                    <a:p>
+                      <a:pPr algn="r"/>
+                      <a:r>
+                        <a:rPr sz="900" b="0" i="0">
+                          <a:solidFill>
+                            <a:srgbClr val="1A1A1A"/>
+                          </a:solidFill>
+                          <a:latin typeface="Helvetica Neue"/>
+                        </a:rPr>
+                        <a:t>258</a:t>
+                      </a:r>
+                    </a:p>
+                  </a:txBody>
+                  <a:tcPr marL="45720" marR="45720" marT="18288" marB="18288" anchor="t"/>
+                </a:tc>
+                <a:tc>
+                  <a:txBody>
+                    <a:bodyPr wrap="square"/>
+                    <a:lstStyle/>
+                    <a:p>
+                      <a:pPr algn="r"/>
+                      <a:r>
+                        <a:rPr sz="900" b="0" i="0">
+                          <a:solidFill>
+                            <a:srgbClr val="1A1A1A"/>
+                          </a:solidFill>
+                          <a:latin typeface="Helvetica Neue"/>
+                        </a:rPr>
+                        <a:t>25.8</a:t>
+                      </a:r>
+                    </a:p>
+                  </a:txBody>
+                  <a:tcPr marL="45720" marR="45720" marT="18288" marB="18288" anchor="t"/>
+                </a:tc>
+                <a:tc>
+                  <a:txBody>
+                    <a:bodyPr wrap="square"/>
+                    <a:lstStyle/>
+                    <a:p>
+                      <a:r>
+                        <a:rPr sz="900" b="0" i="0">
+                          <a:solidFill>
+                            <a:srgbClr val="1A1A1A"/>
+                          </a:solidFill>
+                          <a:latin typeface="Helvetica Neue"/>
+                        </a:rPr>
+                        <a:t>An ensemble of neural networks provides expert-level prenatal detection of complex congenital heart disease (2021)</a:t>
+                      </a:r>
+                    </a:p>
+                  </a:txBody>
+                  <a:tcPr marL="45720" marR="45720" marT="18288" marB="18288" anchor="t"/>
+                </a:tc>
+                <a:tc>
+                  <a:txBody>
+                    <a:bodyPr wrap="square"/>
+                    <a:lstStyle/>
+                    <a:p>
+                      <a:r>
+                        <a:rPr sz="900" b="0" i="0">
+                          <a:solidFill>
+                            <a:srgbClr val="1A1A1A"/>
+                          </a:solidFill>
+                          <a:latin typeface="Helvetica Neue"/>
+                        </a:rPr>
+                        <a:t>Nature Medicine</a:t>
+                      </a:r>
+                    </a:p>
+                  </a:txBody>
+                  <a:tcPr marL="45720" marR="45720" marT="18288" marB="18288" anchor="t"/>
+                </a:tc>
+                <a:tc>
+                  <a:txBody>
+                    <a:bodyPr wrap="square"/>
+                    <a:lstStyle/>
+                    <a:p>
+                      <a:r>
+                        <a:rPr sz="900" b="0" i="0">
+                          <a:solidFill>
+                            <a:srgbClr val="1A1A1A"/>
+                          </a:solidFill>
+                          <a:latin typeface="Helvetica Neue"/>
+                        </a:rPr>
+                        <a:t>congenital heart disease / cardiac</a:t>
                       </a:r>
                     </a:p>
                   </a:txBody>
@@ -8531,795 +9834,16 @@
                           </a:solidFill>
                           <a:latin typeface="Helvetica Neue"/>
                         </a:rPr>
-                        <a:t>bone age</a:t>
-                      </a:r>
-                      <a:r>
-                        <a:rPr sz="900" b="0" i="0">
-                          <a:solidFill>
-                            <a:srgbClr val="1A1A1A"/>
-                          </a:solidFill>
-                          <a:latin typeface="Helvetica Neue"/>
-                        </a:rPr>
-                        <a:t>: Fully automated bone age from hand radiographs</a:t>
-                      </a:r>
-                    </a:p>
-                  </a:txBody>
-                  <a:tcPr marL="45720" marR="45720" marT="18288" marB="18288" anchor="t"/>
-                </a:tc>
-              </a:tr>
-              <a:tr h="329184">
-                <a:tc>
-                  <a:txBody>
-                    <a:bodyPr wrap="square"/>
-                    <a:lstStyle/>
-                    <a:p>
-                      <a:pPr algn="r"/>
-                      <a:r>
-                        <a:rPr sz="900" b="0" i="0">
-                          <a:solidFill>
-                            <a:srgbClr val="1A1A1A"/>
-                          </a:solidFill>
-                          <a:latin typeface="Helvetica Neue"/>
-                        </a:rPr>
-                        <a:t>407</a:t>
-                      </a:r>
-                    </a:p>
-                  </a:txBody>
-                  <a:tcPr marL="45720" marR="45720" marT="18288" marB="18288" anchor="t"/>
-                </a:tc>
-                <a:tc>
-                  <a:txBody>
-                    <a:bodyPr wrap="square"/>
-                    <a:lstStyle/>
-                    <a:p>
-                      <a:pPr algn="r"/>
-                      <a:r>
-                        <a:rPr sz="900" b="0" i="0">
-                          <a:solidFill>
-                            <a:srgbClr val="1A1A1A"/>
-                          </a:solidFill>
-                          <a:latin typeface="Helvetica Neue"/>
-                        </a:rPr>
-                        <a:t>206.8</a:t>
-                      </a:r>
-                    </a:p>
-                  </a:txBody>
-                  <a:tcPr marL="45720" marR="45720" marT="18288" marB="18288" anchor="t"/>
-                </a:tc>
-                <a:tc>
-                  <a:txBody>
-                    <a:bodyPr wrap="square"/>
-                    <a:lstStyle/>
-                    <a:p>
-                      <a:r>
-                        <a:rPr sz="900" b="0" i="0">
-                          <a:solidFill>
-                            <a:srgbClr val="1A1A1A"/>
-                          </a:solidFill>
-                          <a:latin typeface="Helvetica Neue"/>
-                        </a:rPr>
-                        <a:t>Deep learning for automated skeletal bone age assessment in X-ray images (2017)</a:t>
-                      </a:r>
-                    </a:p>
-                  </a:txBody>
-                  <a:tcPr marL="45720" marR="45720" marT="18288" marB="18288" anchor="t"/>
-                </a:tc>
-                <a:tc>
-                  <a:txBody>
-                    <a:bodyPr wrap="square"/>
-                    <a:lstStyle/>
-                    <a:p>
-                      <a:r>
-                        <a:rPr sz="900" b="0" i="0">
-                          <a:solidFill>
-                            <a:srgbClr val="1A1A1A"/>
-                          </a:solidFill>
-                          <a:latin typeface="Helvetica Neue"/>
-                        </a:rPr>
-                        <a:t>Medical Image Anal.</a:t>
-                      </a:r>
-                    </a:p>
-                  </a:txBody>
-                  <a:tcPr marL="45720" marR="45720" marT="18288" marB="18288" anchor="t"/>
-                </a:tc>
-                <a:tc>
-                  <a:txBody>
-                    <a:bodyPr wrap="square"/>
-                    <a:lstStyle/>
-                    <a:p>
-                      <a:r>
-                        <a:rPr sz="900" b="0" i="1">
-                          <a:solidFill>
-                            <a:srgbClr val="1A1A1A"/>
-                          </a:solidFill>
-                          <a:latin typeface="Helvetica Neue"/>
-                        </a:rPr>
-                        <a:t>bone age</a:t>
-                      </a:r>
-                      <a:r>
-                        <a:rPr sz="900" b="0" i="0">
-                          <a:solidFill>
-                            <a:srgbClr val="1A1A1A"/>
-                          </a:solidFill>
-                          <a:latin typeface="Helvetica Neue"/>
-                        </a:rPr>
-                        <a:t>: Deep learning for automated bone age (BoNet)</a:t>
-                      </a:r>
-                    </a:p>
-                  </a:txBody>
-                  <a:tcPr marL="45720" marR="45720" marT="18288" marB="18288" anchor="t"/>
-                </a:tc>
-              </a:tr>
-              <a:tr h="329184">
-                <a:tc>
-                  <a:txBody>
-                    <a:bodyPr wrap="square"/>
-                    <a:lstStyle/>
-                    <a:p>
-                      <a:pPr algn="r"/>
-                      <a:r>
-                        <a:rPr sz="900" b="0" i="0">
-                          <a:solidFill>
-                            <a:srgbClr val="1A1A1A"/>
-                          </a:solidFill>
-                          <a:latin typeface="Helvetica Neue"/>
-                        </a:rPr>
-                        <a:t>144</a:t>
-                      </a:r>
-                    </a:p>
-                  </a:txBody>
-                  <a:tcPr marL="45720" marR="45720" marT="18288" marB="18288" anchor="t"/>
-                </a:tc>
-                <a:tc>
-                  <a:txBody>
-                    <a:bodyPr wrap="square"/>
-                    <a:lstStyle/>
-                    <a:p>
-                      <a:pPr algn="r"/>
-                      <a:r>
-                        <a:rPr sz="900" b="0" i="0">
-                          <a:solidFill>
-                            <a:srgbClr val="1A1A1A"/>
-                          </a:solidFill>
-                          <a:latin typeface="Helvetica Neue"/>
-                        </a:rPr>
-                        <a:t>69.0</a:t>
-                      </a:r>
-                    </a:p>
-                  </a:txBody>
-                  <a:tcPr marL="45720" marR="45720" marT="18288" marB="18288" anchor="t"/>
-                </a:tc>
-                <a:tc>
-                  <a:txBody>
-                    <a:bodyPr wrap="square"/>
-                    <a:lstStyle/>
-                    <a:p>
-                      <a:r>
-                        <a:rPr sz="900" b="0" i="0">
-                          <a:solidFill>
-                            <a:srgbClr val="1A1A1A"/>
-                          </a:solidFill>
-                          <a:latin typeface="Helvetica Neue"/>
-                        </a:rPr>
-                        <a:t>Computerized Bone Age Estimation Using Deep Learning Based Program: Evaluation of the Accuracy and Efficiency. (2017)</a:t>
-                      </a:r>
-                    </a:p>
-                  </a:txBody>
-                  <a:tcPr marL="45720" marR="45720" marT="18288" marB="18288" anchor="t"/>
-                </a:tc>
-                <a:tc>
-                  <a:txBody>
-                    <a:bodyPr wrap="square"/>
-                    <a:lstStyle/>
-                    <a:p>
-                      <a:r>
-                        <a:rPr sz="900" b="0" i="0">
-                          <a:solidFill>
-                            <a:srgbClr val="1A1A1A"/>
-                          </a:solidFill>
-                          <a:latin typeface="Helvetica Neue"/>
-                        </a:rPr>
-                        <a:t>AJR. American journal of roentgenology</a:t>
-                      </a:r>
-                    </a:p>
-                  </a:txBody>
-                  <a:tcPr marL="45720" marR="45720" marT="18288" marB="18288" anchor="t"/>
-                </a:tc>
-                <a:tc>
-                  <a:txBody>
-                    <a:bodyPr wrap="square"/>
-                    <a:lstStyle/>
-                    <a:p>
-                      <a:r>
-                        <a:rPr sz="900" b="0" i="1">
-                          <a:solidFill>
-                            <a:srgbClr val="1A1A1A"/>
-                          </a:solidFill>
-                          <a:latin typeface="Helvetica Neue"/>
-                        </a:rPr>
-                        <a:t>bone age</a:t>
-                      </a:r>
-                      <a:r>
-                        <a:rPr sz="900" b="0" i="0">
-                          <a:solidFill>
-                            <a:srgbClr val="1A1A1A"/>
-                          </a:solidFill>
-                          <a:latin typeface="Helvetica Neue"/>
-                        </a:rPr>
-                        <a:t>: Is a commercial deep-learning bone-age program accurate and faster in practice?</a:t>
-                      </a:r>
-                    </a:p>
-                  </a:txBody>
-                  <a:tcPr marL="45720" marR="45720" marT="18288" marB="18288" anchor="t"/>
-                </a:tc>
-              </a:tr>
-              <a:tr h="329184">
-                <a:tc>
-                  <a:txBody>
-                    <a:bodyPr wrap="square"/>
-                    <a:lstStyle/>
-                    <a:p>
-                      <a:pPr algn="r"/>
-                      <a:r>
-                        <a:rPr sz="900" b="0" i="0">
-                          <a:solidFill>
-                            <a:srgbClr val="1A1A1A"/>
-                          </a:solidFill>
-                          <a:latin typeface="Helvetica Neue"/>
-                        </a:rPr>
-                        <a:t>353</a:t>
-                      </a:r>
-                    </a:p>
-                  </a:txBody>
-                  <a:tcPr marL="45720" marR="45720" marT="18288" marB="18288" anchor="t"/>
-                </a:tc>
-                <a:tc>
-                  <a:txBody>
-                    <a:bodyPr wrap="square"/>
-                    <a:lstStyle/>
-                    <a:p>
-                      <a:pPr algn="r"/>
-                      <a:r>
-                        <a:rPr sz="900" b="0" i="0">
-                          <a:solidFill>
-                            <a:srgbClr val="1A1A1A"/>
-                          </a:solidFill>
-                          <a:latin typeface="Helvetica Neue"/>
-                        </a:rPr>
-                        <a:t>55.0</a:t>
-                      </a:r>
-                    </a:p>
-                  </a:txBody>
-                  <a:tcPr marL="45720" marR="45720" marT="18288" marB="18288" anchor="t"/>
-                </a:tc>
-                <a:tc>
-                  <a:txBody>
-                    <a:bodyPr wrap="square"/>
-                    <a:lstStyle/>
-                    <a:p>
-                      <a:r>
-                        <a:rPr sz="900" b="0" i="0">
-                          <a:solidFill>
-                            <a:srgbClr val="1A1A1A"/>
-                          </a:solidFill>
-                          <a:latin typeface="Helvetica Neue"/>
-                        </a:rPr>
-                        <a:t>Standard Plane Localization in Fetal Ultrasound via Domain Transferred Deep Neural Networks (2015)</a:t>
-                      </a:r>
-                    </a:p>
-                  </a:txBody>
-                  <a:tcPr marL="45720" marR="45720" marT="18288" marB="18288" anchor="t"/>
-                </a:tc>
-                <a:tc>
-                  <a:txBody>
-                    <a:bodyPr wrap="square"/>
-                    <a:lstStyle/>
-                    <a:p>
-                      <a:r>
-                        <a:rPr sz="900" b="0" i="0">
-                          <a:solidFill>
-                            <a:srgbClr val="1A1A1A"/>
-                          </a:solidFill>
-                          <a:latin typeface="Helvetica Neue"/>
-                        </a:rPr>
-                        <a:t>IEEE journal of biomedical and health informatics</a:t>
-                      </a:r>
-                    </a:p>
-                  </a:txBody>
-                  <a:tcPr marL="45720" marR="45720" marT="18288" marB="18288" anchor="t"/>
-                </a:tc>
-                <a:tc>
-                  <a:txBody>
-                    <a:bodyPr wrap="square"/>
-                    <a:lstStyle/>
-                    <a:p>
-                      <a:r>
-                        <a:rPr sz="900" b="0" i="1">
-                          <a:solidFill>
-                            <a:srgbClr val="1A1A1A"/>
-                          </a:solidFill>
-                          <a:latin typeface="Helvetica Neue"/>
-                        </a:rPr>
-                        <a:t>fetal MRI</a:t>
-                      </a:r>
-                    </a:p>
-                  </a:txBody>
-                  <a:tcPr marL="45720" marR="45720" marT="18288" marB="18288" anchor="t"/>
-                </a:tc>
-              </a:tr>
-              <a:tr h="329184">
-                <a:tc>
-                  <a:txBody>
-                    <a:bodyPr wrap="square"/>
-                    <a:lstStyle/>
-                    <a:p>
-                      <a:pPr algn="r"/>
-                      <a:r>
-                        <a:rPr sz="900" b="0" i="0">
-                          <a:solidFill>
-                            <a:srgbClr val="1A1A1A"/>
-                          </a:solidFill>
-                          <a:latin typeface="Helvetica Neue"/>
-                        </a:rPr>
-                        <a:t>196</a:t>
-                      </a:r>
-                    </a:p>
-                  </a:txBody>
-                  <a:tcPr marL="45720" marR="45720" marT="18288" marB="18288" anchor="t"/>
-                </a:tc>
-                <a:tc>
-                  <a:txBody>
-                    <a:bodyPr wrap="square"/>
-                    <a:lstStyle/>
-                    <a:p>
-                      <a:pPr algn="r"/>
-                      <a:r>
-                        <a:rPr sz="900" b="0" i="0">
-                          <a:solidFill>
-                            <a:srgbClr val="1A1A1A"/>
-                          </a:solidFill>
-                          <a:latin typeface="Helvetica Neue"/>
-                        </a:rPr>
-                        <a:t>54.4</a:t>
-                      </a:r>
-                    </a:p>
-                  </a:txBody>
-                  <a:tcPr marL="45720" marR="45720" marT="18288" marB="18288" anchor="t"/>
-                </a:tc>
-                <a:tc>
-                  <a:txBody>
-                    <a:bodyPr wrap="square"/>
-                    <a:lstStyle/>
-                    <a:p>
-                      <a:r>
-                        <a:rPr sz="900" b="0" i="0">
-                          <a:solidFill>
-                            <a:srgbClr val="1A1A1A"/>
-                          </a:solidFill>
-                          <a:latin typeface="Helvetica Neue"/>
-                        </a:rPr>
-                        <a:t>Automatic Fetal Ultrasound Standard Plane Recognition Based on Deep Learning and IIoT (2021)</a:t>
-                      </a:r>
-                    </a:p>
-                  </a:txBody>
-                  <a:tcPr marL="45720" marR="45720" marT="18288" marB="18288" anchor="t"/>
-                </a:tc>
-                <a:tc>
-                  <a:txBody>
-                    <a:bodyPr wrap="square"/>
-                    <a:lstStyle/>
-                    <a:p>
-                      <a:r>
-                        <a:rPr sz="900" b="0" i="0">
-                          <a:solidFill>
-                            <a:srgbClr val="1A1A1A"/>
-                          </a:solidFill>
-                          <a:latin typeface="Helvetica Neue"/>
-                        </a:rPr>
-                        <a:t>IEEE Transactions on Industrial Informatics</a:t>
-                      </a:r>
-                    </a:p>
-                  </a:txBody>
-                  <a:tcPr marL="45720" marR="45720" marT="18288" marB="18288" anchor="t"/>
-                </a:tc>
-                <a:tc>
-                  <a:txBody>
-                    <a:bodyPr wrap="square"/>
-                    <a:lstStyle/>
-                    <a:p>
-                      <a:r>
-                        <a:rPr sz="900" b="0" i="1">
-                          <a:solidFill>
-                            <a:srgbClr val="1A1A1A"/>
-                          </a:solidFill>
-                          <a:latin typeface="Helvetica Neue"/>
-                        </a:rPr>
-                        <a:t>fetal MRI</a:t>
-                      </a:r>
-                    </a:p>
-                  </a:txBody>
-                  <a:tcPr marL="45720" marR="45720" marT="18288" marB="18288" anchor="t"/>
-                </a:tc>
-              </a:tr>
-              <a:tr h="329184">
-                <a:tc>
-                  <a:txBody>
-                    <a:bodyPr wrap="square"/>
-                    <a:lstStyle/>
-                    <a:p>
-                      <a:pPr algn="r"/>
-                      <a:r>
-                        <a:rPr sz="900" b="0" i="0">
-                          <a:solidFill>
-                            <a:srgbClr val="1A1A1A"/>
-                          </a:solidFill>
-                          <a:latin typeface="Helvetica Neue"/>
-                        </a:rPr>
-                        <a:t>449</a:t>
-                      </a:r>
-                    </a:p>
-                  </a:txBody>
-                  <a:tcPr marL="45720" marR="45720" marT="18288" marB="18288" anchor="t"/>
-                </a:tc>
-                <a:tc>
-                  <a:txBody>
-                    <a:bodyPr wrap="square"/>
-                    <a:lstStyle/>
-                    <a:p>
-                      <a:pPr algn="r"/>
-                      <a:r>
-                        <a:rPr sz="900" b="0" i="0">
-                          <a:solidFill>
-                            <a:srgbClr val="1A1A1A"/>
-                          </a:solidFill>
-                          <a:latin typeface="Helvetica Neue"/>
-                        </a:rPr>
-                        <a:t>35.4</a:t>
-                      </a:r>
-                    </a:p>
-                  </a:txBody>
-                  <a:tcPr marL="45720" marR="45720" marT="18288" marB="18288" anchor="t"/>
-                </a:tc>
-                <a:tc>
-                  <a:txBody>
-                    <a:bodyPr wrap="square"/>
-                    <a:lstStyle/>
-                    <a:p>
-                      <a:r>
-                        <a:rPr sz="900" b="0" i="0">
-                          <a:solidFill>
-                            <a:srgbClr val="1A1A1A"/>
-                          </a:solidFill>
-                          <a:latin typeface="Helvetica Neue"/>
-                        </a:rPr>
-                        <a:t>A transfer learning method with deep residual network for pediatric pneumonia diagnosis (2020)</a:t>
-                      </a:r>
-                    </a:p>
-                  </a:txBody>
-                  <a:tcPr marL="45720" marR="45720" marT="18288" marB="18288" anchor="t"/>
-                </a:tc>
-                <a:tc>
-                  <a:txBody>
-                    <a:bodyPr wrap="square"/>
-                    <a:lstStyle/>
-                    <a:p>
-                      <a:r>
-                        <a:rPr sz="900" b="0" i="0">
-                          <a:solidFill>
-                            <a:srgbClr val="1A1A1A"/>
-                          </a:solidFill>
-                          <a:latin typeface="Helvetica Neue"/>
-                        </a:rPr>
-                        <a:t>Comput. Methods Programs Biomed.</a:t>
-                      </a:r>
-                    </a:p>
-                  </a:txBody>
-                  <a:tcPr marL="45720" marR="45720" marT="18288" marB="18288" anchor="t"/>
-                </a:tc>
-                <a:tc>
-                  <a:txBody>
-                    <a:bodyPr wrap="square"/>
-                    <a:lstStyle/>
-                    <a:p>
-                      <a:r>
-                        <a:rPr sz="900" b="0" i="1">
-                          <a:solidFill>
-                            <a:srgbClr val="1A1A1A"/>
-                          </a:solidFill>
-                          <a:latin typeface="Helvetica Neue"/>
-                        </a:rPr>
-                        <a:t>pneumonia / COVID</a:t>
-                      </a:r>
-                    </a:p>
-                  </a:txBody>
-                  <a:tcPr marL="45720" marR="45720" marT="18288" marB="18288" anchor="t"/>
-                </a:tc>
-              </a:tr>
-              <a:tr h="329184">
-                <a:tc>
-                  <a:txBody>
-                    <a:bodyPr wrap="square"/>
-                    <a:lstStyle/>
-                    <a:p>
-                      <a:pPr algn="r"/>
-                      <a:r>
-                        <a:rPr sz="900" b="0" i="0">
-                          <a:solidFill>
-                            <a:srgbClr val="1A1A1A"/>
-                          </a:solidFill>
-                          <a:latin typeface="Helvetica Neue"/>
-                        </a:rPr>
-                        <a:t>236</a:t>
-                      </a:r>
-                    </a:p>
-                  </a:txBody>
-                  <a:tcPr marL="45720" marR="45720" marT="18288" marB="18288" anchor="t"/>
-                </a:tc>
-                <a:tc>
-                  <a:txBody>
-                    <a:bodyPr wrap="square"/>
-                    <a:lstStyle/>
-                    <a:p>
-                      <a:pPr algn="r"/>
-                      <a:r>
-                        <a:rPr sz="900" b="0" i="0">
-                          <a:solidFill>
-                            <a:srgbClr val="1A1A1A"/>
-                          </a:solidFill>
-                          <a:latin typeface="Helvetica Neue"/>
-                        </a:rPr>
-                        <a:t>28.9</a:t>
-                      </a:r>
-                    </a:p>
-                  </a:txBody>
-                  <a:tcPr marL="45720" marR="45720" marT="18288" marB="18288" anchor="t"/>
-                </a:tc>
-                <a:tc>
-                  <a:txBody>
-                    <a:bodyPr wrap="square"/>
-                    <a:lstStyle/>
-                    <a:p>
-                      <a:r>
-                        <a:rPr sz="900" b="0" i="0">
-                          <a:solidFill>
-                            <a:srgbClr val="1A1A1A"/>
-                          </a:solidFill>
-                          <a:latin typeface="Helvetica Neue"/>
-                        </a:rPr>
-                        <a:t>Evaluation of deep convolutional neural networks for automatic classification of common maternal fetal ultrasound planes (2020)</a:t>
-                      </a:r>
-                    </a:p>
-                  </a:txBody>
-                  <a:tcPr marL="45720" marR="45720" marT="18288" marB="18288" anchor="t"/>
-                </a:tc>
-                <a:tc>
-                  <a:txBody>
-                    <a:bodyPr wrap="square"/>
-                    <a:lstStyle/>
-                    <a:p>
-                      <a:r>
-                        <a:rPr sz="900" b="0" i="0">
-                          <a:solidFill>
-                            <a:srgbClr val="1A1A1A"/>
-                          </a:solidFill>
-                          <a:latin typeface="Helvetica Neue"/>
-                        </a:rPr>
-                        <a:t>Scientific Reports</a:t>
-                      </a:r>
-                    </a:p>
-                  </a:txBody>
-                  <a:tcPr marL="45720" marR="45720" marT="18288" marB="18288" anchor="t"/>
-                </a:tc>
-                <a:tc>
-                  <a:txBody>
-                    <a:bodyPr wrap="square"/>
-                    <a:lstStyle/>
-                    <a:p>
-                      <a:r>
-                        <a:rPr sz="900" b="0" i="1">
-                          <a:solidFill>
-                            <a:srgbClr val="1A1A1A"/>
-                          </a:solidFill>
-                          <a:latin typeface="Helvetica Neue"/>
-                        </a:rPr>
-                        <a:t>fetal MRI</a:t>
-                      </a:r>
-                    </a:p>
-                  </a:txBody>
-                  <a:tcPr marL="45720" marR="45720" marT="18288" marB="18288" anchor="t"/>
-                </a:tc>
-              </a:tr>
-              <a:tr h="329184">
-                <a:tc>
-                  <a:txBody>
-                    <a:bodyPr wrap="square"/>
-                    <a:lstStyle/>
-                    <a:p>
-                      <a:pPr algn="r"/>
-                      <a:r>
-                        <a:rPr sz="900" b="0" i="0">
-                          <a:solidFill>
-                            <a:srgbClr val="1A1A1A"/>
-                          </a:solidFill>
-                          <a:latin typeface="Helvetica Neue"/>
-                        </a:rPr>
-                        <a:t>460</a:t>
-                      </a:r>
-                    </a:p>
-                  </a:txBody>
-                  <a:tcPr marL="45720" marR="45720" marT="18288" marB="18288" anchor="t"/>
-                </a:tc>
-                <a:tc>
-                  <a:txBody>
-                    <a:bodyPr wrap="square"/>
-                    <a:lstStyle/>
-                    <a:p>
-                      <a:pPr algn="r"/>
-                      <a:r>
-                        <a:rPr sz="900" b="0" i="0">
-                          <a:solidFill>
-                            <a:srgbClr val="1A1A1A"/>
-                          </a:solidFill>
-                          <a:latin typeface="Helvetica Neue"/>
-                        </a:rPr>
-                        <a:t>26.4</a:t>
-                      </a:r>
-                    </a:p>
-                  </a:txBody>
-                  <a:tcPr marL="45720" marR="45720" marT="18288" marB="18288" anchor="t"/>
-                </a:tc>
-                <a:tc>
-                  <a:txBody>
-                    <a:bodyPr wrap="square"/>
-                    <a:lstStyle/>
-                    <a:p>
-                      <a:r>
-                        <a:rPr sz="900" b="0" i="0">
-                          <a:solidFill>
-                            <a:srgbClr val="1A1A1A"/>
-                          </a:solidFill>
-                          <a:latin typeface="Helvetica Neue"/>
-                        </a:rPr>
-                        <a:t>The RSNA Pediatric Bone Age Machine Learning Challenge. (2019)</a:t>
-                      </a:r>
-                    </a:p>
-                  </a:txBody>
-                  <a:tcPr marL="45720" marR="45720" marT="18288" marB="18288" anchor="t"/>
-                </a:tc>
-                <a:tc>
-                  <a:txBody>
-                    <a:bodyPr wrap="square"/>
-                    <a:lstStyle/>
-                    <a:p>
-                      <a:r>
-                        <a:rPr sz="900" b="0" i="0">
-                          <a:solidFill>
-                            <a:srgbClr val="1A1A1A"/>
-                          </a:solidFill>
-                          <a:latin typeface="Helvetica Neue"/>
-                        </a:rPr>
-                        <a:t>Radiology</a:t>
-                      </a:r>
-                    </a:p>
-                  </a:txBody>
-                  <a:tcPr marL="45720" marR="45720" marT="18288" marB="18288" anchor="t"/>
-                </a:tc>
-                <a:tc>
-                  <a:txBody>
-                    <a:bodyPr wrap="square"/>
-                    <a:lstStyle/>
-                    <a:p>
-                      <a:r>
-                        <a:rPr sz="900" b="0" i="1">
-                          <a:solidFill>
-                            <a:srgbClr val="1A1A1A"/>
-                          </a:solidFill>
-                          <a:latin typeface="Helvetica Neue"/>
-                        </a:rPr>
-                        <a:t>bone age</a:t>
-                      </a:r>
-                      <a:r>
-                        <a:rPr sz="900" b="0" i="0">
-                          <a:solidFill>
-                            <a:srgbClr val="1A1A1A"/>
-                          </a:solidFill>
-                          <a:latin typeface="Helvetica Neue"/>
-                        </a:rPr>
-                        <a:t>: How well can crowdsourced AI estimate bone age? (RSNA challenge, 260 teams)</a:t>
-                      </a:r>
-                    </a:p>
-                  </a:txBody>
-                  <a:tcPr marL="45720" marR="45720" marT="18288" marB="18288" anchor="t"/>
-                </a:tc>
-              </a:tr>
-              <a:tr h="329184">
-                <a:tc>
-                  <a:txBody>
-                    <a:bodyPr wrap="square"/>
-                    <a:lstStyle/>
-                    <a:p>
-                      <a:pPr algn="r"/>
-                      <a:r>
-                        <a:rPr sz="900" b="0" i="0">
-                          <a:solidFill>
-                            <a:srgbClr val="1A1A1A"/>
-                          </a:solidFill>
-                          <a:latin typeface="Helvetica Neue"/>
-                        </a:rPr>
-                        <a:t>258</a:t>
-                      </a:r>
-                    </a:p>
-                  </a:txBody>
-                  <a:tcPr marL="45720" marR="45720" marT="18288" marB="18288" anchor="t"/>
-                </a:tc>
-                <a:tc>
-                  <a:txBody>
-                    <a:bodyPr wrap="square"/>
-                    <a:lstStyle/>
-                    <a:p>
-                      <a:pPr algn="r"/>
-                      <a:r>
-                        <a:rPr sz="900" b="0" i="0">
-                          <a:solidFill>
-                            <a:srgbClr val="1A1A1A"/>
-                          </a:solidFill>
-                          <a:latin typeface="Helvetica Neue"/>
-                        </a:rPr>
-                        <a:t>25.8</a:t>
-                      </a:r>
-                    </a:p>
-                  </a:txBody>
-                  <a:tcPr marL="45720" marR="45720" marT="18288" marB="18288" anchor="t"/>
-                </a:tc>
-                <a:tc>
-                  <a:txBody>
-                    <a:bodyPr wrap="square"/>
-                    <a:lstStyle/>
-                    <a:p>
-                      <a:r>
-                        <a:rPr sz="900" b="0" i="0">
-                          <a:solidFill>
-                            <a:srgbClr val="1A1A1A"/>
-                          </a:solidFill>
-                          <a:latin typeface="Helvetica Neue"/>
-                        </a:rPr>
-                        <a:t>An ensemble of neural networks provides expert-level prenatal detection of complex congenital heart disease (2021)</a:t>
-                      </a:r>
-                    </a:p>
-                  </a:txBody>
-                  <a:tcPr marL="45720" marR="45720" marT="18288" marB="18288" anchor="t"/>
-                </a:tc>
-                <a:tc>
-                  <a:txBody>
-                    <a:bodyPr wrap="square"/>
-                    <a:lstStyle/>
-                    <a:p>
-                      <a:r>
-                        <a:rPr sz="900" b="0" i="0">
-                          <a:solidFill>
-                            <a:srgbClr val="1A1A1A"/>
-                          </a:solidFill>
-                          <a:latin typeface="Helvetica Neue"/>
-                        </a:rPr>
-                        <a:t>Nature Medicine</a:t>
-                      </a:r>
-                    </a:p>
-                  </a:txBody>
-                  <a:tcPr marL="45720" marR="45720" marT="18288" marB="18288" anchor="t"/>
-                </a:tc>
-                <a:tc>
-                  <a:txBody>
-                    <a:bodyPr wrap="square"/>
-                    <a:lstStyle/>
-                    <a:p>
-                      <a:r>
-                        <a:rPr sz="900" b="0" i="1">
-                          <a:solidFill>
-                            <a:srgbClr val="1A1A1A"/>
-                          </a:solidFill>
-                          <a:latin typeface="Helvetica Neue"/>
-                        </a:rPr>
                         <a:t>detection</a:t>
+                      </a:r>
+                      <a:r>
+                        <a:rPr sz="900" b="0" i="0">
+                          <a:solidFill>
+                            <a:srgbClr val="1A1A1A"/>
+                          </a:solidFill>
+                          <a:latin typeface="Helvetica Neue"/>
+                        </a:rPr>
+                        <a:t>: Can an ensemble of networks flag complex congenital heart disease on routine fetal screening ultrasound views as well as fetal cardiologists?</a:t>
                       </a:r>
                     </a:p>
                   </a:txBody>
@@ -9360,7 +9884,7 @@
                 </a:solidFill>
                 <a:latin typeface="Helvetica Neue"/>
               </a:rPr>
-              <a:t>11 / 34</a:t>
+              <a:t>11 / 36</a:t>
             </a:r>
           </a:p>
         </p:txBody>
@@ -13038,7 +13562,7 @@
         </p:nvGraphicFramePr>
         <p:xfrm>
           <a:off x="411480" y="877824"/>
-          <a:ext cx="11368733" cy="3758184"/>
+          <a:ext cx="11368732" cy="5266940"/>
         </p:xfrm>
         <a:graphic>
           <a:graphicData uri="http://schemas.openxmlformats.org/drawingml/2006/table">
@@ -13049,9 +13573,10 @@
               <a:tblGrid>
                 <a:gridCol w="480060"/>
                 <a:gridCol w="409651"/>
-                <a:gridCol w="4814686"/>
-                <a:gridCol w="2124126"/>
-                <a:gridCol w="3540210"/>
+                <a:gridCol w="3425834"/>
+                <a:gridCol w="1511397"/>
+                <a:gridCol w="1511397"/>
+                <a:gridCol w="4030393"/>
               </a:tblGrid>
               <a:tr h="192024">
                 <a:tc>
@@ -13140,7 +13665,1114 @@
                           </a:solidFill>
                           <a:latin typeface="Helvetica Neue"/>
                         </a:rPr>
+                        <a:t>Clinical problem</a:t>
+                      </a:r>
+                    </a:p>
+                  </a:txBody>
+                  <a:tcPr marL="45720" marR="45720" marT="18288" marB="18288" anchor="t"/>
+                </a:tc>
+                <a:tc>
+                  <a:txBody>
+                    <a:bodyPr wrap="square"/>
+                    <a:lstStyle/>
+                    <a:p>
+                      <a:r>
+                        <a:rPr sz="900" b="1" i="0">
+                          <a:solidFill>
+                            <a:srgbClr val="FFFFFF"/>
+                          </a:solidFill>
+                          <a:latin typeface="Helvetica Neue"/>
+                        </a:rPr>
                         <a:t>What it answers</a:t>
+                      </a:r>
+                    </a:p>
+                  </a:txBody>
+                  <a:tcPr marL="45720" marR="45720" marT="18288" marB="18288" anchor="t"/>
+                </a:tc>
+              </a:tr>
+              <a:tr h="466344">
+                <a:tc>
+                  <a:txBody>
+                    <a:bodyPr wrap="square"/>
+                    <a:lstStyle/>
+                    <a:p>
+                      <a:pPr algn="r"/>
+                      <a:r>
+                        <a:rPr sz="900" b="0" i="0">
+                          <a:solidFill>
+                            <a:srgbClr val="1A1A1A"/>
+                          </a:solidFill>
+                          <a:latin typeface="Helvetica Neue"/>
+                        </a:rPr>
+                        <a:t>3</a:t>
+                      </a:r>
+                    </a:p>
+                  </a:txBody>
+                  <a:tcPr marL="45720" marR="45720" marT="18288" marB="18288" anchor="t"/>
+                </a:tc>
+                <a:tc>
+                  <a:txBody>
+                    <a:bodyPr wrap="square"/>
+                    <a:lstStyle/>
+                    <a:p>
+                      <a:pPr algn="r"/>
+                      <a:r>
+                        <a:rPr sz="900" b="0" i="0">
+                          <a:solidFill>
+                            <a:srgbClr val="1A1A1A"/>
+                          </a:solidFill>
+                          <a:latin typeface="Helvetica Neue"/>
+                        </a:rPr>
+                        <a:t>45.1</a:t>
+                      </a:r>
+                    </a:p>
+                  </a:txBody>
+                  <a:tcPr marL="45720" marR="45720" marT="18288" marB="18288" anchor="t"/>
+                </a:tc>
+                <a:tc>
+                  <a:txBody>
+                    <a:bodyPr wrap="square"/>
+                    <a:lstStyle/>
+                    <a:p>
+                      <a:r>
+                        <a:rPr sz="900" b="0" i="0">
+                          <a:solidFill>
+                            <a:srgbClr val="1A1A1A"/>
+                          </a:solidFill>
+                          <a:latin typeface="Helvetica Neue"/>
+                        </a:rPr>
+                        <a:t>Wavelet-Based Frequency Replacement and Edge Enhancement for Semi-Supervised Fetal Ultrasound Image Segmentation</a:t>
+                      </a:r>
+                    </a:p>
+                  </a:txBody>
+                  <a:tcPr marL="45720" marR="45720" marT="18288" marB="18288" anchor="t"/>
+                </a:tc>
+                <a:tc>
+                  <a:txBody>
+                    <a:bodyPr wrap="square"/>
+                    <a:lstStyle/>
+                    <a:p>
+                      <a:r>
+                        <a:rPr sz="900" b="0" i="0">
+                          <a:solidFill>
+                            <a:srgbClr val="1A1A1A"/>
+                          </a:solidFill>
+                          <a:latin typeface="Helvetica Neue"/>
+                        </a:rPr>
+                        <a:t>Journal of ultrasound in medicine</a:t>
+                      </a:r>
+                    </a:p>
+                  </a:txBody>
+                  <a:tcPr marL="45720" marR="45720" marT="18288" marB="18288" anchor="t"/>
+                </a:tc>
+                <a:tc>
+                  <a:txBody>
+                    <a:bodyPr wrap="square"/>
+                    <a:lstStyle/>
+                    <a:p>
+                      <a:r>
+                        <a:rPr sz="900" b="0" i="0">
+                          <a:solidFill>
+                            <a:srgbClr val="1A1A1A"/>
+                          </a:solidFill>
+                          <a:latin typeface="Helvetica Neue"/>
+                        </a:rPr>
+                        <a:t>fetal anomalies / prenatal</a:t>
+                      </a:r>
+                    </a:p>
+                  </a:txBody>
+                  <a:tcPr marL="45720" marR="45720" marT="18288" marB="18288" anchor="t"/>
+                </a:tc>
+                <a:tc>
+                  <a:txBody>
+                    <a:bodyPr wrap="square"/>
+                    <a:lstStyle/>
+                    <a:p>
+                      <a:r>
+                        <a:rPr sz="900" b="0" i="1">
+                          <a:solidFill>
+                            <a:srgbClr val="1A1A1A"/>
+                          </a:solidFill>
+                          <a:latin typeface="Helvetica Neue"/>
+                        </a:rPr>
+                        <a:t>segmentation</a:t>
+                      </a:r>
+                      <a:r>
+                        <a:rPr sz="900" b="0" i="0">
+                          <a:solidFill>
+                            <a:srgbClr val="1A1A1A"/>
+                          </a:solidFill>
+                          <a:latin typeface="Helvetica Neue"/>
+                        </a:rPr>
+                        <a:t>: Can fetal head and pubic symphysis be segmented on ultrasound from only a few labeled images, using frequency and edge cues to learn from unlabeled ones?</a:t>
+                      </a:r>
+                    </a:p>
+                  </a:txBody>
+                  <a:tcPr marL="45720" marR="45720" marT="18288" marB="18288" anchor="t"/>
+                </a:tc>
+              </a:tr>
+              <a:tr h="603503">
+                <a:tc>
+                  <a:txBody>
+                    <a:bodyPr wrap="square"/>
+                    <a:lstStyle/>
+                    <a:p>
+                      <a:pPr algn="r"/>
+                      <a:r>
+                        <a:rPr sz="900" b="0" i="0">
+                          <a:solidFill>
+                            <a:srgbClr val="1A1A1A"/>
+                          </a:solidFill>
+                          <a:latin typeface="Helvetica Neue"/>
+                        </a:rPr>
+                        <a:t>19</a:t>
+                      </a:r>
+                    </a:p>
+                  </a:txBody>
+                  <a:tcPr marL="45720" marR="45720" marT="18288" marB="18288" anchor="t"/>
+                </a:tc>
+                <a:tc>
+                  <a:txBody>
+                    <a:bodyPr wrap="square"/>
+                    <a:lstStyle/>
+                    <a:p>
+                      <a:pPr algn="r"/>
+                      <a:r>
+                        <a:rPr sz="900" b="0" i="0">
+                          <a:solidFill>
+                            <a:srgbClr val="1A1A1A"/>
+                          </a:solidFill>
+                          <a:latin typeface="Helvetica Neue"/>
+                        </a:rPr>
+                        <a:t>27.1</a:t>
+                      </a:r>
+                    </a:p>
+                  </a:txBody>
+                  <a:tcPr marL="45720" marR="45720" marT="18288" marB="18288" anchor="t"/>
+                </a:tc>
+                <a:tc>
+                  <a:txBody>
+                    <a:bodyPr wrap="square"/>
+                    <a:lstStyle/>
+                    <a:p>
+                      <a:r>
+                        <a:rPr sz="900" b="0" i="0">
+                          <a:solidFill>
+                            <a:srgbClr val="1A1A1A"/>
+                          </a:solidFill>
+                          <a:latin typeface="Helvetica Neue"/>
+                        </a:rPr>
+                        <a:t>BIBSNet: A deep learning baby image brain segmentation network for MRI scans</a:t>
+                      </a:r>
+                    </a:p>
+                  </a:txBody>
+                  <a:tcPr marL="45720" marR="45720" marT="18288" marB="18288" anchor="t"/>
+                </a:tc>
+                <a:tc>
+                  <a:txBody>
+                    <a:bodyPr wrap="square"/>
+                    <a:lstStyle/>
+                    <a:p>
+                      <a:r>
+                        <a:rPr sz="900" b="0" i="0">
+                          <a:solidFill>
+                            <a:srgbClr val="1A1A1A"/>
+                          </a:solidFill>
+                          <a:latin typeface="Helvetica Neue"/>
+                        </a:rPr>
+                        <a:t>Developmental Cognitive Neuroscience</a:t>
+                      </a:r>
+                    </a:p>
+                  </a:txBody>
+                  <a:tcPr marL="45720" marR="45720" marT="18288" marB="18288" anchor="t"/>
+                </a:tc>
+                <a:tc>
+                  <a:txBody>
+                    <a:bodyPr wrap="square"/>
+                    <a:lstStyle/>
+                    <a:p>
+                      <a:r>
+                        <a:rPr sz="900" b="0" i="0">
+                          <a:solidFill>
+                            <a:srgbClr val="1A1A1A"/>
+                          </a:solidFill>
+                          <a:latin typeface="Helvetica Neue"/>
+                        </a:rPr>
+                        <a:t>neurodevelopment (infant brain)</a:t>
+                      </a:r>
+                    </a:p>
+                  </a:txBody>
+                  <a:tcPr marL="45720" marR="45720" marT="18288" marB="18288" anchor="t"/>
+                </a:tc>
+                <a:tc>
+                  <a:txBody>
+                    <a:bodyPr wrap="square"/>
+                    <a:lstStyle/>
+                    <a:p>
+                      <a:r>
+                        <a:rPr sz="900" b="0" i="1">
+                          <a:solidFill>
+                            <a:srgbClr val="1A1A1A"/>
+                          </a:solidFill>
+                          <a:latin typeface="Helvetica Neue"/>
+                        </a:rPr>
+                        <a:t>segmentation</a:t>
+                      </a:r>
+                      <a:r>
+                        <a:rPr sz="900" b="0" i="0">
+                          <a:solidFill>
+                            <a:srgbClr val="1A1A1A"/>
+                          </a:solidFill>
+                          <a:latin typeface="Helvetica Neue"/>
+                        </a:rPr>
+                        <a:t>: Can one network segment infant brain MRI (gray and white matter, deep structures) across the first years of life, when tissue contrast is still changing? (BIBSNet, open source)</a:t>
+                      </a:r>
+                    </a:p>
+                  </a:txBody>
+                  <a:tcPr marL="45720" marR="45720" marT="18288" marB="18288" anchor="t"/>
+                </a:tc>
+              </a:tr>
+              <a:tr h="603503">
+                <a:tc>
+                  <a:txBody>
+                    <a:bodyPr wrap="square"/>
+                    <a:lstStyle/>
+                    <a:p>
+                      <a:pPr algn="r"/>
+                      <a:r>
+                        <a:rPr sz="900" b="0" i="0">
+                          <a:solidFill>
+                            <a:srgbClr val="1A1A1A"/>
+                          </a:solidFill>
+                          <a:latin typeface="Helvetica Neue"/>
+                        </a:rPr>
+                        <a:t>4</a:t>
+                      </a:r>
+                    </a:p>
+                  </a:txBody>
+                  <a:tcPr marL="45720" marR="45720" marT="18288" marB="18288" anchor="t"/>
+                </a:tc>
+                <a:tc>
+                  <a:txBody>
+                    <a:bodyPr wrap="square"/>
+                    <a:lstStyle/>
+                    <a:p>
+                      <a:pPr algn="r"/>
+                      <a:r>
+                        <a:rPr sz="900" b="0" i="0">
+                          <a:solidFill>
+                            <a:srgbClr val="1A1A1A"/>
+                          </a:solidFill>
+                          <a:latin typeface="Helvetica Neue"/>
+                        </a:rPr>
+                        <a:t>27.1</a:t>
+                      </a:r>
+                    </a:p>
+                  </a:txBody>
+                  <a:tcPr marL="45720" marR="45720" marT="18288" marB="18288" anchor="t"/>
+                </a:tc>
+                <a:tc>
+                  <a:txBody>
+                    <a:bodyPr wrap="square"/>
+                    <a:lstStyle/>
+                    <a:p>
+                      <a:r>
+                        <a:rPr sz="900" b="0" i="0">
+                          <a:solidFill>
+                            <a:srgbClr val="1A1A1A"/>
+                          </a:solidFill>
+                          <a:latin typeface="Helvetica Neue"/>
+                        </a:rPr>
+                        <a:t>Beyond Benchmarks of IUGC: Rethinking Requirements of Deep Learning Methods for Intrapartum Ultrasound Biometry from Fetal Ultrasound Videos</a:t>
+                      </a:r>
+                    </a:p>
+                  </a:txBody>
+                  <a:tcPr marL="45720" marR="45720" marT="18288" marB="18288" anchor="t"/>
+                </a:tc>
+                <a:tc>
+                  <a:txBody>
+                    <a:bodyPr wrap="square"/>
+                    <a:lstStyle/>
+                    <a:p>
+                      <a:r>
+                        <a:rPr sz="900" b="0" i="0">
+                          <a:solidFill>
+                            <a:srgbClr val="1A1A1A"/>
+                          </a:solidFill>
+                          <a:latin typeface="Helvetica Neue"/>
+                        </a:rPr>
+                        <a:t>Medical Image Anal.</a:t>
+                      </a:r>
+                    </a:p>
+                  </a:txBody>
+                  <a:tcPr marL="45720" marR="45720" marT="18288" marB="18288" anchor="t"/>
+                </a:tc>
+                <a:tc>
+                  <a:txBody>
+                    <a:bodyPr wrap="square"/>
+                    <a:lstStyle/>
+                    <a:p>
+                      <a:r>
+                        <a:rPr sz="900" b="0" i="0">
+                          <a:solidFill>
+                            <a:srgbClr val="1A1A1A"/>
+                          </a:solidFill>
+                          <a:latin typeface="Helvetica Neue"/>
+                        </a:rPr>
+                        <a:t>labor / intrapartum (prenatal)</a:t>
+                      </a:r>
+                    </a:p>
+                  </a:txBody>
+                  <a:tcPr marL="45720" marR="45720" marT="18288" marB="18288" anchor="t"/>
+                </a:tc>
+                <a:tc>
+                  <a:txBody>
+                    <a:bodyPr wrap="square"/>
+                    <a:lstStyle/>
+                    <a:p>
+                      <a:r>
+                        <a:rPr sz="900" b="0" i="1">
+                          <a:solidFill>
+                            <a:srgbClr val="1A1A1A"/>
+                          </a:solidFill>
+                          <a:latin typeface="Helvetica Neue"/>
+                        </a:rPr>
+                        <a:t>measurement</a:t>
+                      </a:r>
+                      <a:r>
+                        <a:rPr sz="900" b="0" i="0">
+                          <a:solidFill>
+                            <a:srgbClr val="1A1A1A"/>
+                          </a:solidFill>
+                          <a:latin typeface="Helvetica Neue"/>
+                        </a:rPr>
+                        <a:t>: What do deep-learning methods need to measure labor progress automatically from intrapartum ultrasound video where trained sonographers are scarce? (IUGC challenge, 774 videos)</a:t>
+                      </a:r>
+                    </a:p>
+                  </a:txBody>
+                  <a:tcPr marL="45720" marR="45720" marT="18288" marB="18288" anchor="t"/>
+                </a:tc>
+              </a:tr>
+              <a:tr h="603503">
+                <a:tc>
+                  <a:txBody>
+                    <a:bodyPr wrap="square"/>
+                    <a:lstStyle/>
+                    <a:p>
+                      <a:pPr algn="r"/>
+                      <a:r>
+                        <a:rPr sz="900" b="0" i="0">
+                          <a:solidFill>
+                            <a:srgbClr val="1A1A1A"/>
+                          </a:solidFill>
+                          <a:latin typeface="Helvetica Neue"/>
+                        </a:rPr>
+                        <a:t>3</a:t>
+                      </a:r>
+                    </a:p>
+                  </a:txBody>
+                  <a:tcPr marL="45720" marR="45720" marT="18288" marB="18288" anchor="t"/>
+                </a:tc>
+                <a:tc>
+                  <a:txBody>
+                    <a:bodyPr wrap="square"/>
+                    <a:lstStyle/>
+                    <a:p>
+                      <a:pPr algn="r"/>
+                      <a:r>
+                        <a:rPr sz="900" b="0" i="0">
+                          <a:solidFill>
+                            <a:srgbClr val="1A1A1A"/>
+                          </a:solidFill>
+                          <a:latin typeface="Helvetica Neue"/>
+                        </a:rPr>
+                        <a:t>26.2</a:t>
+                      </a:r>
+                    </a:p>
+                  </a:txBody>
+                  <a:tcPr marL="45720" marR="45720" marT="18288" marB="18288" anchor="t"/>
+                </a:tc>
+                <a:tc>
+                  <a:txBody>
+                    <a:bodyPr wrap="square"/>
+                    <a:lstStyle/>
+                    <a:p>
+                      <a:r>
+                        <a:rPr sz="900" b="0" i="0">
+                          <a:solidFill>
+                            <a:srgbClr val="1A1A1A"/>
+                          </a:solidFill>
+                          <a:latin typeface="Helvetica Neue"/>
+                        </a:rPr>
+                        <a:t>Zero-shot performance of a general-purpose vision-language model for pediatric appendicitis diagnosis.</a:t>
+                      </a:r>
+                    </a:p>
+                  </a:txBody>
+                  <a:tcPr marL="45720" marR="45720" marT="18288" marB="18288" anchor="t"/>
+                </a:tc>
+                <a:tc>
+                  <a:txBody>
+                    <a:bodyPr wrap="square"/>
+                    <a:lstStyle/>
+                    <a:p>
+                      <a:r>
+                        <a:rPr sz="900" b="0" i="0">
+                          <a:solidFill>
+                            <a:srgbClr val="1A1A1A"/>
+                          </a:solidFill>
+                          <a:latin typeface="Helvetica Neue"/>
+                        </a:rPr>
+                        <a:t>Pediatric Radiology</a:t>
+                      </a:r>
+                    </a:p>
+                  </a:txBody>
+                  <a:tcPr marL="45720" marR="45720" marT="18288" marB="18288" anchor="t"/>
+                </a:tc>
+                <a:tc>
+                  <a:txBody>
+                    <a:bodyPr wrap="square"/>
+                    <a:lstStyle/>
+                    <a:p>
+                      <a:r>
+                        <a:rPr sz="900" b="0" i="0">
+                          <a:solidFill>
+                            <a:srgbClr val="1A1A1A"/>
+                          </a:solidFill>
+                          <a:latin typeface="Helvetica Neue"/>
+                        </a:rPr>
+                        <a:t>appendicitis / intussusception / NEC</a:t>
+                      </a:r>
+                    </a:p>
+                  </a:txBody>
+                  <a:tcPr marL="45720" marR="45720" marT="18288" marB="18288" anchor="t"/>
+                </a:tc>
+                <a:tc>
+                  <a:txBody>
+                    <a:bodyPr wrap="square"/>
+                    <a:lstStyle/>
+                    <a:p>
+                      <a:r>
+                        <a:rPr sz="900" b="0" i="1">
+                          <a:solidFill>
+                            <a:srgbClr val="1A1A1A"/>
+                          </a:solidFill>
+                          <a:latin typeface="Helvetica Neue"/>
+                        </a:rPr>
+                        <a:t>vision-language</a:t>
+                      </a:r>
+                      <a:r>
+                        <a:rPr sz="900" b="0" i="0">
+                          <a:solidFill>
+                            <a:srgbClr val="1A1A1A"/>
+                          </a:solidFill>
+                          <a:latin typeface="Helvetica Neue"/>
+                        </a:rPr>
+                        <a:t>: Can a general-purpose vision-language model (Llama 4), with no task-specific training, diagnose pediatric appendicitis from ultrasound images, report text and clinical data? (294 patients)</a:t>
+                      </a:r>
+                    </a:p>
+                  </a:txBody>
+                  <a:tcPr marL="45720" marR="45720" marT="18288" marB="18288" anchor="t"/>
+                </a:tc>
+              </a:tr>
+              <a:tr h="466344">
+                <a:tc>
+                  <a:txBody>
+                    <a:bodyPr wrap="square"/>
+                    <a:lstStyle/>
+                    <a:p>
+                      <a:pPr algn="r"/>
+                      <a:r>
+                        <a:rPr sz="900" b="0" i="0">
+                          <a:solidFill>
+                            <a:srgbClr val="1A1A1A"/>
+                          </a:solidFill>
+                          <a:latin typeface="Helvetica Neue"/>
+                        </a:rPr>
+                        <a:t>5</a:t>
+                      </a:r>
+                    </a:p>
+                  </a:txBody>
+                  <a:tcPr marL="45720" marR="45720" marT="18288" marB="18288" anchor="t"/>
+                </a:tc>
+                <a:tc>
+                  <a:txBody>
+                    <a:bodyPr wrap="square"/>
+                    <a:lstStyle/>
+                    <a:p>
+                      <a:pPr algn="r"/>
+                      <a:r>
+                        <a:rPr sz="900" b="0" i="0">
+                          <a:solidFill>
+                            <a:srgbClr val="1A1A1A"/>
+                          </a:solidFill>
+                          <a:latin typeface="Helvetica Neue"/>
+                        </a:rPr>
+                        <a:t>24.1</a:t>
+                      </a:r>
+                    </a:p>
+                  </a:txBody>
+                  <a:tcPr marL="45720" marR="45720" marT="18288" marB="18288" anchor="t"/>
+                </a:tc>
+                <a:tc>
+                  <a:txBody>
+                    <a:bodyPr wrap="square"/>
+                    <a:lstStyle/>
+                    <a:p>
+                      <a:r>
+                        <a:rPr sz="900" b="0" i="0">
+                          <a:solidFill>
+                            <a:srgbClr val="1A1A1A"/>
+                          </a:solidFill>
+                          <a:latin typeface="Helvetica Neue"/>
+                        </a:rPr>
+                        <a:t>Deep learning assessment of fetal brain maturation on 3D ultrasound volumes in early-onset fetal growth restriction</a:t>
+                      </a:r>
+                    </a:p>
+                  </a:txBody>
+                  <a:tcPr marL="45720" marR="45720" marT="18288" marB="18288" anchor="t"/>
+                </a:tc>
+                <a:tc>
+                  <a:txBody>
+                    <a:bodyPr wrap="square"/>
+                    <a:lstStyle/>
+                    <a:p>
+                      <a:r>
+                        <a:rPr sz="900" b="0" i="0">
+                          <a:solidFill>
+                            <a:srgbClr val="1A1A1A"/>
+                          </a:solidFill>
+                          <a:latin typeface="Helvetica Neue"/>
+                        </a:rPr>
+                        <a:t>Ultrasound in Obstetrics and Gynecology</a:t>
+                      </a:r>
+                    </a:p>
+                  </a:txBody>
+                  <a:tcPr marL="45720" marR="45720" marT="18288" marB="18288" anchor="t"/>
+                </a:tc>
+                <a:tc>
+                  <a:txBody>
+                    <a:bodyPr wrap="square"/>
+                    <a:lstStyle/>
+                    <a:p>
+                      <a:r>
+                        <a:rPr sz="900" b="0" i="0">
+                          <a:solidFill>
+                            <a:srgbClr val="1A1A1A"/>
+                          </a:solidFill>
+                          <a:latin typeface="Helvetica Neue"/>
+                        </a:rPr>
+                        <a:t>fetal anomalies / prenatal</a:t>
+                      </a:r>
+                    </a:p>
+                  </a:txBody>
+                  <a:tcPr marL="45720" marR="45720" marT="18288" marB="18288" anchor="t"/>
+                </a:tc>
+                <a:tc>
+                  <a:txBody>
+                    <a:bodyPr wrap="square"/>
+                    <a:lstStyle/>
+                    <a:p>
+                      <a:r>
+                        <a:rPr sz="900" b="0" i="1">
+                          <a:solidFill>
+                            <a:srgbClr val="1A1A1A"/>
+                          </a:solidFill>
+                          <a:latin typeface="Helvetica Neue"/>
+                        </a:rPr>
+                        <a:t>measurement</a:t>
+                      </a:r>
+                      <a:r>
+                        <a:rPr sz="900" b="0" i="0">
+                          <a:solidFill>
+                            <a:srgbClr val="1A1A1A"/>
+                          </a:solidFill>
+                          <a:latin typeface="Helvetica Neue"/>
+                        </a:rPr>
+                        <a:t>: Can deep learning grade fetal brain maturation on 3D ultrasound in early-onset growth restriction, and does a maturation delay predict neonatal complications?</a:t>
+                      </a:r>
+                    </a:p>
+                  </a:txBody>
+                  <a:tcPr marL="45720" marR="45720" marT="18288" marB="18288" anchor="t"/>
+                </a:tc>
+              </a:tr>
+              <a:tr h="466344">
+                <a:tc>
+                  <a:txBody>
+                    <a:bodyPr wrap="square"/>
+                    <a:lstStyle/>
+                    <a:p>
+                      <a:pPr algn="r"/>
+                      <a:r>
+                        <a:rPr sz="900" b="0" i="0">
+                          <a:solidFill>
+                            <a:srgbClr val="1A1A1A"/>
+                          </a:solidFill>
+                          <a:latin typeface="Helvetica Neue"/>
+                        </a:rPr>
+                        <a:t>3</a:t>
+                      </a:r>
+                    </a:p>
+                  </a:txBody>
+                  <a:tcPr marL="45720" marR="45720" marT="18288" marB="18288" anchor="t"/>
+                </a:tc>
+                <a:tc>
+                  <a:txBody>
+                    <a:bodyPr wrap="square"/>
+                    <a:lstStyle/>
+                    <a:p>
+                      <a:pPr algn="r"/>
+                      <a:r>
+                        <a:rPr sz="900" b="0" i="0">
+                          <a:solidFill>
+                            <a:srgbClr val="1A1A1A"/>
+                          </a:solidFill>
+                          <a:latin typeface="Helvetica Neue"/>
+                        </a:rPr>
+                        <a:t>18.1</a:t>
+                      </a:r>
+                    </a:p>
+                  </a:txBody>
+                  <a:tcPr marL="45720" marR="45720" marT="18288" marB="18288" anchor="t"/>
+                </a:tc>
+                <a:tc>
+                  <a:txBody>
+                    <a:bodyPr wrap="square"/>
+                    <a:lstStyle/>
+                    <a:p>
+                      <a:r>
+                        <a:rPr sz="900" b="0" i="0">
+                          <a:solidFill>
+                            <a:srgbClr val="1A1A1A"/>
+                          </a:solidFill>
+                          <a:latin typeface="Helvetica Neue"/>
+                        </a:rPr>
+                        <a:t>A multi-task deep learning and radiomics framework for fetal anatomical structure detection and classification in ultrasound imaging</a:t>
+                      </a:r>
+                    </a:p>
+                  </a:txBody>
+                  <a:tcPr marL="45720" marR="45720" marT="18288" marB="18288" anchor="t"/>
+                </a:tc>
+                <a:tc>
+                  <a:txBody>
+                    <a:bodyPr wrap="square"/>
+                    <a:lstStyle/>
+                    <a:p>
+                      <a:r>
+                        <a:rPr sz="900" b="0" i="0">
+                          <a:solidFill>
+                            <a:srgbClr val="1A1A1A"/>
+                          </a:solidFill>
+                          <a:latin typeface="Helvetica Neue"/>
+                        </a:rPr>
+                        <a:t>Scientific Reports</a:t>
+                      </a:r>
+                    </a:p>
+                  </a:txBody>
+                  <a:tcPr marL="45720" marR="45720" marT="18288" marB="18288" anchor="t"/>
+                </a:tc>
+                <a:tc>
+                  <a:txBody>
+                    <a:bodyPr wrap="square"/>
+                    <a:lstStyle/>
+                    <a:p>
+                      <a:r>
+                        <a:rPr sz="900" b="0" i="0">
+                          <a:solidFill>
+                            <a:srgbClr val="1A1A1A"/>
+                          </a:solidFill>
+                          <a:latin typeface="Helvetica Neue"/>
+                        </a:rPr>
+                        <a:t>fetal anomalies / prenatal</a:t>
+                      </a:r>
+                    </a:p>
+                  </a:txBody>
+                  <a:tcPr marL="45720" marR="45720" marT="18288" marB="18288" anchor="t"/>
+                </a:tc>
+                <a:tc>
+                  <a:txBody>
+                    <a:bodyPr wrap="square"/>
+                    <a:lstStyle/>
+                    <a:p>
+                      <a:r>
+                        <a:rPr sz="900" b="0" i="1">
+                          <a:solidFill>
+                            <a:srgbClr val="1A1A1A"/>
+                          </a:solidFill>
+                          <a:latin typeface="Helvetica Neue"/>
+                        </a:rPr>
+                        <a:t>detection</a:t>
+                      </a:r>
+                      <a:r>
+                        <a:rPr sz="900" b="0" i="0">
+                          <a:solidFill>
+                            <a:srgbClr val="1A1A1A"/>
+                          </a:solidFill>
+                          <a:latin typeface="Helvetica Neue"/>
+                        </a:rPr>
+                        <a:t>: Can one model locate and label nine fetal brain and craniofacial structures on first-trimester ultrasound to support early anomaly screening? (4,532 scans, 9 centers)</a:t>
+                      </a:r>
+                    </a:p>
+                  </a:txBody>
+                  <a:tcPr marL="45720" marR="45720" marT="18288" marB="18288" anchor="t"/>
+                </a:tc>
+              </a:tr>
+              <a:tr h="603503">
+                <a:tc>
+                  <a:txBody>
+                    <a:bodyPr wrap="square"/>
+                    <a:lstStyle/>
+                    <a:p>
+                      <a:pPr algn="r"/>
+                      <a:r>
+                        <a:rPr sz="900" b="0" i="0">
+                          <a:solidFill>
+                            <a:srgbClr val="1A1A1A"/>
+                          </a:solidFill>
+                          <a:latin typeface="Helvetica Neue"/>
+                        </a:rPr>
+                        <a:t>2</a:t>
+                      </a:r>
+                    </a:p>
+                  </a:txBody>
+                  <a:tcPr marL="45720" marR="45720" marT="18288" marB="18288" anchor="t"/>
+                </a:tc>
+                <a:tc>
+                  <a:txBody>
+                    <a:bodyPr wrap="square"/>
+                    <a:lstStyle/>
+                    <a:p>
+                      <a:pPr algn="r"/>
+                      <a:r>
+                        <a:rPr sz="900" b="0" i="0">
+                          <a:solidFill>
+                            <a:srgbClr val="1A1A1A"/>
+                          </a:solidFill>
+                          <a:latin typeface="Helvetica Neue"/>
+                        </a:rPr>
+                        <a:t>18.1</a:t>
+                      </a:r>
+                    </a:p>
+                  </a:txBody>
+                  <a:tcPr marL="45720" marR="45720" marT="18288" marB="18288" anchor="t"/>
+                </a:tc>
+                <a:tc>
+                  <a:txBody>
+                    <a:bodyPr wrap="square"/>
+                    <a:lstStyle/>
+                    <a:p>
+                      <a:r>
+                        <a:rPr sz="900" b="0" i="0">
+                          <a:solidFill>
+                            <a:srgbClr val="1A1A1A"/>
+                          </a:solidFill>
+                          <a:latin typeface="Helvetica Neue"/>
+                        </a:rPr>
+                        <a:t>Deep learning-based cerebellar segmentation on T2-weighted fluid-attenuated inversion recovery magnetic resonance imaging for detecting cerebellar hypoplasia/atrophy in infants</a:t>
+                      </a:r>
+                    </a:p>
+                  </a:txBody>
+                  <a:tcPr marL="45720" marR="45720" marT="18288" marB="18288" anchor="t"/>
+                </a:tc>
+                <a:tc>
+                  <a:txBody>
+                    <a:bodyPr wrap="square"/>
+                    <a:lstStyle/>
+                    <a:p>
+                      <a:r>
+                        <a:rPr sz="900" b="0" i="0">
+                          <a:solidFill>
+                            <a:srgbClr val="1A1A1A"/>
+                          </a:solidFill>
+                          <a:latin typeface="Helvetica Neue"/>
+                        </a:rPr>
+                        <a:t>Pediatric Radiology</a:t>
+                      </a:r>
+                    </a:p>
+                  </a:txBody>
+                  <a:tcPr marL="45720" marR="45720" marT="18288" marB="18288" anchor="t"/>
+                </a:tc>
+                <a:tc>
+                  <a:txBody>
+                    <a:bodyPr wrap="square"/>
+                    <a:lstStyle/>
+                    <a:p>
+                      <a:r>
+                        <a:rPr sz="900" b="0" i="0">
+                          <a:solidFill>
+                            <a:srgbClr val="1A1A1A"/>
+                          </a:solidFill>
+                          <a:latin typeface="Helvetica Neue"/>
+                        </a:rPr>
+                        <a:t>neurodevelopment (cerebellar hypoplasia / atrophy)</a:t>
+                      </a:r>
+                    </a:p>
+                  </a:txBody>
+                  <a:tcPr marL="45720" marR="45720" marT="18288" marB="18288" anchor="t"/>
+                </a:tc>
+                <a:tc>
+                  <a:txBody>
+                    <a:bodyPr wrap="square"/>
+                    <a:lstStyle/>
+                    <a:p>
+                      <a:r>
+                        <a:rPr sz="900" b="0" i="1">
+                          <a:solidFill>
+                            <a:srgbClr val="1A1A1A"/>
+                          </a:solidFill>
+                          <a:latin typeface="Helvetica Neue"/>
+                        </a:rPr>
+                        <a:t>segmentation</a:t>
+                      </a:r>
+                      <a:r>
+                        <a:rPr sz="900" b="0" i="0">
+                          <a:solidFill>
+                            <a:srgbClr val="1A1A1A"/>
+                          </a:solidFill>
+                          <a:latin typeface="Helvetica Neue"/>
+                        </a:rPr>
+                        <a:t>: Can automated cerebellar volume on infant T2-FLAIR MRI flag cerebellar hypoplasia or atrophy against age-expected size?</a:t>
+                      </a:r>
+                    </a:p>
+                  </a:txBody>
+                  <a:tcPr marL="45720" marR="45720" marT="18288" marB="18288" anchor="t"/>
+                </a:tc>
+              </a:tr>
+              <a:tr h="466344">
+                <a:tc>
+                  <a:txBody>
+                    <a:bodyPr wrap="square"/>
+                    <a:lstStyle/>
+                    <a:p>
+                      <a:pPr algn="r"/>
+                      <a:r>
+                        <a:rPr sz="900" b="0" i="0">
+                          <a:solidFill>
+                            <a:srgbClr val="1A1A1A"/>
+                          </a:solidFill>
+                          <a:latin typeface="Helvetica Neue"/>
+                        </a:rPr>
+                        <a:t>3</a:t>
+                      </a:r>
+                    </a:p>
+                  </a:txBody>
+                  <a:tcPr marL="45720" marR="45720" marT="18288" marB="18288" anchor="t"/>
+                </a:tc>
+                <a:tc>
+                  <a:txBody>
+                    <a:bodyPr wrap="square"/>
+                    <a:lstStyle/>
+                    <a:p>
+                      <a:pPr algn="r"/>
+                      <a:r>
+                        <a:rPr sz="900" b="0" i="0">
+                          <a:solidFill>
+                            <a:srgbClr val="1A1A1A"/>
+                          </a:solidFill>
+                          <a:latin typeface="Helvetica Neue"/>
+                        </a:rPr>
+                        <a:t>14.6</a:t>
+                      </a:r>
+                    </a:p>
+                  </a:txBody>
+                  <a:tcPr marL="45720" marR="45720" marT="18288" marB="18288" anchor="t"/>
+                </a:tc>
+                <a:tc>
+                  <a:txBody>
+                    <a:bodyPr wrap="square"/>
+                    <a:lstStyle/>
+                    <a:p>
+                      <a:r>
+                        <a:rPr sz="900" b="0" i="0">
+                          <a:solidFill>
+                            <a:srgbClr val="1A1A1A"/>
+                          </a:solidFill>
+                          <a:latin typeface="Helvetica Neue"/>
+                        </a:rPr>
+                        <a:t>Deep Learning-Based Multi-Class Pediatric Wrist Fracture Subtype Classification: A Pilot Study Comparing Convolutional Neural Network Architectures</a:t>
+                      </a:r>
+                    </a:p>
+                  </a:txBody>
+                  <a:tcPr marL="45720" marR="45720" marT="18288" marB="18288" anchor="t"/>
+                </a:tc>
+                <a:tc>
+                  <a:txBody>
+                    <a:bodyPr wrap="square"/>
+                    <a:lstStyle/>
+                    <a:p>
+                      <a:r>
+                        <a:rPr sz="900" b="0" i="0">
+                          <a:solidFill>
+                            <a:srgbClr val="1A1A1A"/>
+                          </a:solidFill>
+                          <a:latin typeface="Helvetica Neue"/>
+                        </a:rPr>
+                        <a:t>Journal of Imaging</a:t>
+                      </a:r>
+                    </a:p>
+                  </a:txBody>
+                  <a:tcPr marL="45720" marR="45720" marT="18288" marB="18288" anchor="t"/>
+                </a:tc>
+                <a:tc>
+                  <a:txBody>
+                    <a:bodyPr wrap="square"/>
+                    <a:lstStyle/>
+                    <a:p>
+                      <a:r>
+                        <a:rPr sz="900" b="0" i="0">
+                          <a:solidFill>
+                            <a:srgbClr val="1A1A1A"/>
+                          </a:solidFill>
+                          <a:latin typeface="Helvetica Neue"/>
+                        </a:rPr>
+                        <a:t>fracture / trauma / abuse</a:t>
+                      </a:r>
+                    </a:p>
+                  </a:txBody>
+                  <a:tcPr marL="45720" marR="45720" marT="18288" marB="18288" anchor="t"/>
+                </a:tc>
+                <a:tc>
+                  <a:txBody>
+                    <a:bodyPr wrap="square"/>
+                    <a:lstStyle/>
+                    <a:p>
+                      <a:r>
+                        <a:rPr sz="900" b="0" i="1">
+                          <a:solidFill>
+                            <a:srgbClr val="1A1A1A"/>
+                          </a:solidFill>
+                          <a:latin typeface="Helvetica Neue"/>
+                        </a:rPr>
+                        <a:t>diagnosis</a:t>
+                      </a:r>
+                      <a:r>
+                        <a:rPr sz="900" b="0" i="0">
+                          <a:solidFill>
+                            <a:srgbClr val="1A1A1A"/>
+                          </a:solidFill>
+                          <a:latin typeface="Helvetica Neue"/>
+                        </a:rPr>
+                        <a:t>: Which CNN architecture best tells pediatric wrist fracture subtypes (buckle, greenstick, Salter–Harris) apart on radiographs? (pilot, 940 images)</a:t>
+                      </a:r>
+                    </a:p>
+                  </a:txBody>
+                  <a:tcPr marL="45720" marR="45720" marT="18288" marB="18288" anchor="t"/>
+                </a:tc>
+              </a:tr>
+              <a:tr h="466344">
+                <a:tc>
+                  <a:txBody>
+                    <a:bodyPr wrap="square"/>
+                    <a:lstStyle/>
+                    <a:p>
+                      <a:pPr algn="r"/>
+                      <a:r>
+                        <a:rPr sz="900" b="0" i="0">
+                          <a:solidFill>
+                            <a:srgbClr val="1A1A1A"/>
+                          </a:solidFill>
+                          <a:latin typeface="Helvetica Neue"/>
+                        </a:rPr>
+                        <a:t>4</a:t>
+                      </a:r>
+                    </a:p>
+                  </a:txBody>
+                  <a:tcPr marL="45720" marR="45720" marT="18288" marB="18288" anchor="t"/>
+                </a:tc>
+                <a:tc>
+                  <a:txBody>
+                    <a:bodyPr wrap="square"/>
+                    <a:lstStyle/>
+                    <a:p>
+                      <a:pPr algn="r"/>
+                      <a:r>
+                        <a:rPr sz="900" b="0" i="0">
+                          <a:solidFill>
+                            <a:srgbClr val="1A1A1A"/>
+                          </a:solidFill>
+                          <a:latin typeface="Helvetica Neue"/>
+                        </a:rPr>
+                        <a:t>9.8</a:t>
+                      </a:r>
+                    </a:p>
+                  </a:txBody>
+                  <a:tcPr marL="45720" marR="45720" marT="18288" marB="18288" anchor="t"/>
+                </a:tc>
+                <a:tc>
+                  <a:txBody>
+                    <a:bodyPr wrap="square"/>
+                    <a:lstStyle/>
+                    <a:p>
+                      <a:r>
+                        <a:rPr sz="900" b="0" i="0">
+                          <a:solidFill>
+                            <a:srgbClr val="1A1A1A"/>
+                          </a:solidFill>
+                          <a:latin typeface="Helvetica Neue"/>
+                        </a:rPr>
+                        <a:t>Deep learning super-resolution of paediatric ultra-low-field MRI without paired high-field scans</a:t>
+                      </a:r>
+                    </a:p>
+                  </a:txBody>
+                  <a:tcPr marL="45720" marR="45720" marT="18288" marB="18288" anchor="t"/>
+                </a:tc>
+                <a:tc>
+                  <a:txBody>
+                    <a:bodyPr wrap="square"/>
+                    <a:lstStyle/>
+                    <a:p>
+                      <a:r>
+                        <a:rPr sz="900" b="0" i="0">
+                          <a:solidFill>
+                            <a:srgbClr val="1A1A1A"/>
+                          </a:solidFill>
+                          <a:latin typeface="Helvetica Neue"/>
+                        </a:rPr>
+                        <a:t>bioRxiv</a:t>
+                      </a:r>
+                    </a:p>
+                  </a:txBody>
+                  <a:tcPr marL="45720" marR="45720" marT="18288" marB="18288" anchor="t"/>
+                </a:tc>
+                <a:tc>
+                  <a:txBody>
+                    <a:bodyPr wrap="square"/>
+                    <a:lstStyle/>
+                    <a:p>
+                      <a:r>
+                        <a:rPr sz="900" b="0" i="0">
+                          <a:solidFill>
+                            <a:srgbClr val="1A1A1A"/>
+                          </a:solidFill>
+                          <a:latin typeface="Helvetica Neue"/>
+                        </a:rPr>
+                        <a:t>brain MRI access (portable low-field)</a:t>
+                      </a:r>
+                    </a:p>
+                  </a:txBody>
+                  <a:tcPr marL="45720" marR="45720" marT="18288" marB="18288" anchor="t"/>
+                </a:tc>
+                <a:tc>
+                  <a:txBody>
+                    <a:bodyPr wrap="square"/>
+                    <a:lstStyle/>
+                    <a:p>
+                      <a:r>
+                        <a:rPr sz="900" b="0" i="1">
+                          <a:solidFill>
+                            <a:srgbClr val="1A1A1A"/>
+                          </a:solidFill>
+                          <a:latin typeface="Helvetica Neue"/>
+                        </a:rPr>
+                        <a:t>reconstruction</a:t>
+                      </a:r>
+                      <a:r>
+                        <a:rPr sz="900" b="0" i="0">
+                          <a:solidFill>
+                            <a:srgbClr val="1A1A1A"/>
+                          </a:solidFill>
+                          <a:latin typeface="Helvetica Neue"/>
+                        </a:rPr>
+                        <a:t>: Can deep learning sharpen affordable ultra-low-field pediatric brain MRI toward high-field quality without paired high-field scans to train on?</a:t>
                       </a:r>
                     </a:p>
                   </a:txBody>
@@ -13161,588 +14793,6 @@
                           </a:solidFill>
                           <a:latin typeface="Helvetica Neue"/>
                         </a:rPr>
-                        <a:t>3</a:t>
-                      </a:r>
-                    </a:p>
-                  </a:txBody>
-                  <a:tcPr marL="45720" marR="45720" marT="18288" marB="18288" anchor="t"/>
-                </a:tc>
-                <a:tc>
-                  <a:txBody>
-                    <a:bodyPr wrap="square"/>
-                    <a:lstStyle/>
-                    <a:p>
-                      <a:pPr algn="r"/>
-                      <a:r>
-                        <a:rPr sz="900" b="0" i="0">
-                          <a:solidFill>
-                            <a:srgbClr val="1A1A1A"/>
-                          </a:solidFill>
-                          <a:latin typeface="Helvetica Neue"/>
-                        </a:rPr>
-                        <a:t>45.1</a:t>
-                      </a:r>
-                    </a:p>
-                  </a:txBody>
-                  <a:tcPr marL="45720" marR="45720" marT="18288" marB="18288" anchor="t"/>
-                </a:tc>
-                <a:tc>
-                  <a:txBody>
-                    <a:bodyPr wrap="square"/>
-                    <a:lstStyle/>
-                    <a:p>
-                      <a:r>
-                        <a:rPr sz="900" b="0" i="0">
-                          <a:solidFill>
-                            <a:srgbClr val="1A1A1A"/>
-                          </a:solidFill>
-                          <a:latin typeface="Helvetica Neue"/>
-                        </a:rPr>
-                        <a:t>Wavelet-Based Frequency Replacement and Edge Enhancement for Semi-Supervised Fetal Ultrasound Image Segmentation</a:t>
-                      </a:r>
-                    </a:p>
-                  </a:txBody>
-                  <a:tcPr marL="45720" marR="45720" marT="18288" marB="18288" anchor="t"/>
-                </a:tc>
-                <a:tc>
-                  <a:txBody>
-                    <a:bodyPr wrap="square"/>
-                    <a:lstStyle/>
-                    <a:p>
-                      <a:r>
-                        <a:rPr sz="900" b="0" i="0">
-                          <a:solidFill>
-                            <a:srgbClr val="1A1A1A"/>
-                          </a:solidFill>
-                          <a:latin typeface="Helvetica Neue"/>
-                        </a:rPr>
-                        <a:t>Journal of ultrasound in medicine</a:t>
-                      </a:r>
-                    </a:p>
-                  </a:txBody>
-                  <a:tcPr marL="45720" marR="45720" marT="18288" marB="18288" anchor="t"/>
-                </a:tc>
-                <a:tc>
-                  <a:txBody>
-                    <a:bodyPr wrap="square"/>
-                    <a:lstStyle/>
-                    <a:p>
-                      <a:r>
-                        <a:rPr sz="900" b="0" i="1">
-                          <a:solidFill>
-                            <a:srgbClr val="1A1A1A"/>
-                          </a:solidFill>
-                          <a:latin typeface="Helvetica Neue"/>
-                        </a:rPr>
-                        <a:t>segmentation</a:t>
-                      </a:r>
-                    </a:p>
-                  </a:txBody>
-                  <a:tcPr marL="45720" marR="45720" marT="18288" marB="18288" anchor="t"/>
-                </a:tc>
-              </a:tr>
-              <a:tr h="329184">
-                <a:tc>
-                  <a:txBody>
-                    <a:bodyPr wrap="square"/>
-                    <a:lstStyle/>
-                    <a:p>
-                      <a:pPr algn="r"/>
-                      <a:r>
-                        <a:rPr sz="900" b="0" i="0">
-                          <a:solidFill>
-                            <a:srgbClr val="1A1A1A"/>
-                          </a:solidFill>
-                          <a:latin typeface="Helvetica Neue"/>
-                        </a:rPr>
-                        <a:t>19</a:t>
-                      </a:r>
-                    </a:p>
-                  </a:txBody>
-                  <a:tcPr marL="45720" marR="45720" marT="18288" marB="18288" anchor="t"/>
-                </a:tc>
-                <a:tc>
-                  <a:txBody>
-                    <a:bodyPr wrap="square"/>
-                    <a:lstStyle/>
-                    <a:p>
-                      <a:pPr algn="r"/>
-                      <a:r>
-                        <a:rPr sz="900" b="0" i="0">
-                          <a:solidFill>
-                            <a:srgbClr val="1A1A1A"/>
-                          </a:solidFill>
-                          <a:latin typeface="Helvetica Neue"/>
-                        </a:rPr>
-                        <a:t>27.1</a:t>
-                      </a:r>
-                    </a:p>
-                  </a:txBody>
-                  <a:tcPr marL="45720" marR="45720" marT="18288" marB="18288" anchor="t"/>
-                </a:tc>
-                <a:tc>
-                  <a:txBody>
-                    <a:bodyPr wrap="square"/>
-                    <a:lstStyle/>
-                    <a:p>
-                      <a:r>
-                        <a:rPr sz="900" b="0" i="0">
-                          <a:solidFill>
-                            <a:srgbClr val="1A1A1A"/>
-                          </a:solidFill>
-                          <a:latin typeface="Helvetica Neue"/>
-                        </a:rPr>
-                        <a:t>BIBSNet: A deep learning baby image brain segmentation network for MRI scans</a:t>
-                      </a:r>
-                    </a:p>
-                  </a:txBody>
-                  <a:tcPr marL="45720" marR="45720" marT="18288" marB="18288" anchor="t"/>
-                </a:tc>
-                <a:tc>
-                  <a:txBody>
-                    <a:bodyPr wrap="square"/>
-                    <a:lstStyle/>
-                    <a:p>
-                      <a:r>
-                        <a:rPr sz="900" b="0" i="0">
-                          <a:solidFill>
-                            <a:srgbClr val="1A1A1A"/>
-                          </a:solidFill>
-                          <a:latin typeface="Helvetica Neue"/>
-                        </a:rPr>
-                        <a:t>Developmental Cognitive Neuroscience</a:t>
-                      </a:r>
-                    </a:p>
-                  </a:txBody>
-                  <a:tcPr marL="45720" marR="45720" marT="18288" marB="18288" anchor="t"/>
-                </a:tc>
-                <a:tc>
-                  <a:txBody>
-                    <a:bodyPr wrap="square"/>
-                    <a:lstStyle/>
-                    <a:p>
-                      <a:r>
-                        <a:rPr sz="900" b="0" i="1">
-                          <a:solidFill>
-                            <a:srgbClr val="1A1A1A"/>
-                          </a:solidFill>
-                          <a:latin typeface="Helvetica Neue"/>
-                        </a:rPr>
-                        <a:t>segmentation</a:t>
-                      </a:r>
-                      <a:r>
-                        <a:rPr sz="900" b="0" i="0">
-                          <a:solidFill>
-                            <a:srgbClr val="1A1A1A"/>
-                          </a:solidFill>
-                          <a:latin typeface="Helvetica Neue"/>
-                        </a:rPr>
-                        <a:t>: Can one network segment infant brain MRI across the first years of life? (BIBSNet)</a:t>
-                      </a:r>
-                    </a:p>
-                  </a:txBody>
-                  <a:tcPr marL="45720" marR="45720" marT="18288" marB="18288" anchor="t"/>
-                </a:tc>
-              </a:tr>
-              <a:tr h="329184">
-                <a:tc>
-                  <a:txBody>
-                    <a:bodyPr wrap="square"/>
-                    <a:lstStyle/>
-                    <a:p>
-                      <a:pPr algn="r"/>
-                      <a:r>
-                        <a:rPr sz="900" b="0" i="0">
-                          <a:solidFill>
-                            <a:srgbClr val="1A1A1A"/>
-                          </a:solidFill>
-                          <a:latin typeface="Helvetica Neue"/>
-                        </a:rPr>
-                        <a:t>4</a:t>
-                      </a:r>
-                    </a:p>
-                  </a:txBody>
-                  <a:tcPr marL="45720" marR="45720" marT="18288" marB="18288" anchor="t"/>
-                </a:tc>
-                <a:tc>
-                  <a:txBody>
-                    <a:bodyPr wrap="square"/>
-                    <a:lstStyle/>
-                    <a:p>
-                      <a:pPr algn="r"/>
-                      <a:r>
-                        <a:rPr sz="900" b="0" i="0">
-                          <a:solidFill>
-                            <a:srgbClr val="1A1A1A"/>
-                          </a:solidFill>
-                          <a:latin typeface="Helvetica Neue"/>
-                        </a:rPr>
-                        <a:t>27.1</a:t>
-                      </a:r>
-                    </a:p>
-                  </a:txBody>
-                  <a:tcPr marL="45720" marR="45720" marT="18288" marB="18288" anchor="t"/>
-                </a:tc>
-                <a:tc>
-                  <a:txBody>
-                    <a:bodyPr wrap="square"/>
-                    <a:lstStyle/>
-                    <a:p>
-                      <a:r>
-                        <a:rPr sz="900" b="0" i="0">
-                          <a:solidFill>
-                            <a:srgbClr val="1A1A1A"/>
-                          </a:solidFill>
-                          <a:latin typeface="Helvetica Neue"/>
-                        </a:rPr>
-                        <a:t>Beyond Benchmarks of IUGC: Rethinking Requirements of Deep Learning Methods for Intrapartum Ultrasound Biometry from Fetal Ultrasound Videos</a:t>
-                      </a:r>
-                    </a:p>
-                  </a:txBody>
-                  <a:tcPr marL="45720" marR="45720" marT="18288" marB="18288" anchor="t"/>
-                </a:tc>
-                <a:tc>
-                  <a:txBody>
-                    <a:bodyPr wrap="square"/>
-                    <a:lstStyle/>
-                    <a:p>
-                      <a:r>
-                        <a:rPr sz="900" b="0" i="0">
-                          <a:solidFill>
-                            <a:srgbClr val="1A1A1A"/>
-                          </a:solidFill>
-                          <a:latin typeface="Helvetica Neue"/>
-                        </a:rPr>
-                        <a:t>Medical Image Anal.</a:t>
-                      </a:r>
-                    </a:p>
-                  </a:txBody>
-                  <a:tcPr marL="45720" marR="45720" marT="18288" marB="18288" anchor="t"/>
-                </a:tc>
-                <a:tc>
-                  <a:txBody>
-                    <a:bodyPr wrap="square"/>
-                    <a:lstStyle/>
-                    <a:p>
-                      <a:r>
-                        <a:rPr sz="900" b="0" i="1">
-                          <a:solidFill>
-                            <a:srgbClr val="1A1A1A"/>
-                          </a:solidFill>
-                          <a:latin typeface="Helvetica Neue"/>
-                        </a:rPr>
-                        <a:t>fetal MRI</a:t>
-                      </a:r>
-                    </a:p>
-                  </a:txBody>
-                  <a:tcPr marL="45720" marR="45720" marT="18288" marB="18288" anchor="t"/>
-                </a:tc>
-              </a:tr>
-              <a:tr h="329184">
-                <a:tc>
-                  <a:txBody>
-                    <a:bodyPr wrap="square"/>
-                    <a:lstStyle/>
-                    <a:p>
-                      <a:pPr algn="r"/>
-                      <a:r>
-                        <a:rPr sz="900" b="0" i="0">
-                          <a:solidFill>
-                            <a:srgbClr val="1A1A1A"/>
-                          </a:solidFill>
-                          <a:latin typeface="Helvetica Neue"/>
-                        </a:rPr>
-                        <a:t>3</a:t>
-                      </a:r>
-                    </a:p>
-                  </a:txBody>
-                  <a:tcPr marL="45720" marR="45720" marT="18288" marB="18288" anchor="t"/>
-                </a:tc>
-                <a:tc>
-                  <a:txBody>
-                    <a:bodyPr wrap="square"/>
-                    <a:lstStyle/>
-                    <a:p>
-                      <a:pPr algn="r"/>
-                      <a:r>
-                        <a:rPr sz="900" b="0" i="0">
-                          <a:solidFill>
-                            <a:srgbClr val="1A1A1A"/>
-                          </a:solidFill>
-                          <a:latin typeface="Helvetica Neue"/>
-                        </a:rPr>
-                        <a:t>26.2</a:t>
-                      </a:r>
-                    </a:p>
-                  </a:txBody>
-                  <a:tcPr marL="45720" marR="45720" marT="18288" marB="18288" anchor="t"/>
-                </a:tc>
-                <a:tc>
-                  <a:txBody>
-                    <a:bodyPr wrap="square"/>
-                    <a:lstStyle/>
-                    <a:p>
-                      <a:r>
-                        <a:rPr sz="900" b="0" i="0">
-                          <a:solidFill>
-                            <a:srgbClr val="1A1A1A"/>
-                          </a:solidFill>
-                          <a:latin typeface="Helvetica Neue"/>
-                        </a:rPr>
-                        <a:t>Zero-shot performance of a general-purpose vision-language model for pediatric appendicitis diagnosis.</a:t>
-                      </a:r>
-                    </a:p>
-                  </a:txBody>
-                  <a:tcPr marL="45720" marR="45720" marT="18288" marB="18288" anchor="t"/>
-                </a:tc>
-                <a:tc>
-                  <a:txBody>
-                    <a:bodyPr wrap="square"/>
-                    <a:lstStyle/>
-                    <a:p>
-                      <a:r>
-                        <a:rPr sz="900" b="0" i="0">
-                          <a:solidFill>
-                            <a:srgbClr val="1A1A1A"/>
-                          </a:solidFill>
-                          <a:latin typeface="Helvetica Neue"/>
-                        </a:rPr>
-                        <a:t>Pediatric Radiology</a:t>
-                      </a:r>
-                    </a:p>
-                  </a:txBody>
-                  <a:tcPr marL="45720" marR="45720" marT="18288" marB="18288" anchor="t"/>
-                </a:tc>
-                <a:tc>
-                  <a:txBody>
-                    <a:bodyPr wrap="square"/>
-                    <a:lstStyle/>
-                    <a:p>
-                      <a:r>
-                        <a:rPr sz="900" b="0" i="1">
-                          <a:solidFill>
-                            <a:srgbClr val="1A1A1A"/>
-                          </a:solidFill>
-                          <a:latin typeface="Helvetica Neue"/>
-                        </a:rPr>
-                        <a:t>classification</a:t>
-                      </a:r>
-                    </a:p>
-                  </a:txBody>
-                  <a:tcPr marL="45720" marR="45720" marT="18288" marB="18288" anchor="t"/>
-                </a:tc>
-              </a:tr>
-              <a:tr h="329184">
-                <a:tc>
-                  <a:txBody>
-                    <a:bodyPr wrap="square"/>
-                    <a:lstStyle/>
-                    <a:p>
-                      <a:pPr algn="r"/>
-                      <a:r>
-                        <a:rPr sz="900" b="0" i="0">
-                          <a:solidFill>
-                            <a:srgbClr val="1A1A1A"/>
-                          </a:solidFill>
-                          <a:latin typeface="Helvetica Neue"/>
-                        </a:rPr>
-                        <a:t>5</a:t>
-                      </a:r>
-                    </a:p>
-                  </a:txBody>
-                  <a:tcPr marL="45720" marR="45720" marT="18288" marB="18288" anchor="t"/>
-                </a:tc>
-                <a:tc>
-                  <a:txBody>
-                    <a:bodyPr wrap="square"/>
-                    <a:lstStyle/>
-                    <a:p>
-                      <a:pPr algn="r"/>
-                      <a:r>
-                        <a:rPr sz="900" b="0" i="0">
-                          <a:solidFill>
-                            <a:srgbClr val="1A1A1A"/>
-                          </a:solidFill>
-                          <a:latin typeface="Helvetica Neue"/>
-                        </a:rPr>
-                        <a:t>24.1</a:t>
-                      </a:r>
-                    </a:p>
-                  </a:txBody>
-                  <a:tcPr marL="45720" marR="45720" marT="18288" marB="18288" anchor="t"/>
-                </a:tc>
-                <a:tc>
-                  <a:txBody>
-                    <a:bodyPr wrap="square"/>
-                    <a:lstStyle/>
-                    <a:p>
-                      <a:r>
-                        <a:rPr sz="900" b="0" i="0">
-                          <a:solidFill>
-                            <a:srgbClr val="1A1A1A"/>
-                          </a:solidFill>
-                          <a:latin typeface="Helvetica Neue"/>
-                        </a:rPr>
-                        <a:t>Deep learning assessment of fetal brain maturation on 3D ultrasound volumes in early-onset fetal growth restriction</a:t>
-                      </a:r>
-                    </a:p>
-                  </a:txBody>
-                  <a:tcPr marL="45720" marR="45720" marT="18288" marB="18288" anchor="t"/>
-                </a:tc>
-                <a:tc>
-                  <a:txBody>
-                    <a:bodyPr wrap="square"/>
-                    <a:lstStyle/>
-                    <a:p>
-                      <a:r>
-                        <a:rPr sz="900" b="0" i="0">
-                          <a:solidFill>
-                            <a:srgbClr val="1A1A1A"/>
-                          </a:solidFill>
-                          <a:latin typeface="Helvetica Neue"/>
-                        </a:rPr>
-                        <a:t>Ultrasound in Obstetrics and Gynecology</a:t>
-                      </a:r>
-                    </a:p>
-                  </a:txBody>
-                  <a:tcPr marL="45720" marR="45720" marT="18288" marB="18288" anchor="t"/>
-                </a:tc>
-                <a:tc>
-                  <a:txBody>
-                    <a:bodyPr wrap="square"/>
-                    <a:lstStyle/>
-                    <a:p>
-                      <a:r>
-                        <a:rPr sz="900" b="0" i="1">
-                          <a:solidFill>
-                            <a:srgbClr val="1A1A1A"/>
-                          </a:solidFill>
-                          <a:latin typeface="Helvetica Neue"/>
-                        </a:rPr>
-                        <a:t>fetal ultrasound</a:t>
-                      </a:r>
-                      <a:r>
-                        <a:rPr sz="900" b="0" i="0">
-                          <a:solidFill>
-                            <a:srgbClr val="1A1A1A"/>
-                          </a:solidFill>
-                          <a:latin typeface="Helvetica Neue"/>
-                        </a:rPr>
-                        <a:t>: Can deep learning grade fetal brain maturation on 3D ultrasound in growth restriction?</a:t>
-                      </a:r>
-                    </a:p>
-                  </a:txBody>
-                  <a:tcPr marL="45720" marR="45720" marT="18288" marB="18288" anchor="t"/>
-                </a:tc>
-              </a:tr>
-              <a:tr h="329184">
-                <a:tc>
-                  <a:txBody>
-                    <a:bodyPr wrap="square"/>
-                    <a:lstStyle/>
-                    <a:p>
-                      <a:pPr algn="r"/>
-                      <a:r>
-                        <a:rPr sz="900" b="0" i="0">
-                          <a:solidFill>
-                            <a:srgbClr val="1A1A1A"/>
-                          </a:solidFill>
-                          <a:latin typeface="Helvetica Neue"/>
-                        </a:rPr>
-                        <a:t>3</a:t>
-                      </a:r>
-                    </a:p>
-                  </a:txBody>
-                  <a:tcPr marL="45720" marR="45720" marT="18288" marB="18288" anchor="t"/>
-                </a:tc>
-                <a:tc>
-                  <a:txBody>
-                    <a:bodyPr wrap="square"/>
-                    <a:lstStyle/>
-                    <a:p>
-                      <a:pPr algn="r"/>
-                      <a:r>
-                        <a:rPr sz="900" b="0" i="0">
-                          <a:solidFill>
-                            <a:srgbClr val="1A1A1A"/>
-                          </a:solidFill>
-                          <a:latin typeface="Helvetica Neue"/>
-                        </a:rPr>
-                        <a:t>18.1</a:t>
-                      </a:r>
-                    </a:p>
-                  </a:txBody>
-                  <a:tcPr marL="45720" marR="45720" marT="18288" marB="18288" anchor="t"/>
-                </a:tc>
-                <a:tc>
-                  <a:txBody>
-                    <a:bodyPr wrap="square"/>
-                    <a:lstStyle/>
-                    <a:p>
-                      <a:r>
-                        <a:rPr sz="900" b="0" i="0">
-                          <a:solidFill>
-                            <a:srgbClr val="1A1A1A"/>
-                          </a:solidFill>
-                          <a:latin typeface="Helvetica Neue"/>
-                        </a:rPr>
-                        <a:t>A multi-task deep learning and radiomics framework for fetal anatomical structure detection and classification in ultrasound imaging</a:t>
-                      </a:r>
-                    </a:p>
-                  </a:txBody>
-                  <a:tcPr marL="45720" marR="45720" marT="18288" marB="18288" anchor="t"/>
-                </a:tc>
-                <a:tc>
-                  <a:txBody>
-                    <a:bodyPr wrap="square"/>
-                    <a:lstStyle/>
-                    <a:p>
-                      <a:r>
-                        <a:rPr sz="900" b="0" i="0">
-                          <a:solidFill>
-                            <a:srgbClr val="1A1A1A"/>
-                          </a:solidFill>
-                          <a:latin typeface="Helvetica Neue"/>
-                        </a:rPr>
-                        <a:t>Scientific Reports</a:t>
-                      </a:r>
-                    </a:p>
-                  </a:txBody>
-                  <a:tcPr marL="45720" marR="45720" marT="18288" marB="18288" anchor="t"/>
-                </a:tc>
-                <a:tc>
-                  <a:txBody>
-                    <a:bodyPr wrap="square"/>
-                    <a:lstStyle/>
-                    <a:p>
-                      <a:r>
-                        <a:rPr sz="900" b="0" i="1">
-                          <a:solidFill>
-                            <a:srgbClr val="1A1A1A"/>
-                          </a:solidFill>
-                          <a:latin typeface="Helvetica Neue"/>
-                        </a:rPr>
-                        <a:t>radiomics</a:t>
-                      </a:r>
-                    </a:p>
-                  </a:txBody>
-                  <a:tcPr marL="45720" marR="45720" marT="18288" marB="18288" anchor="t"/>
-                </a:tc>
-              </a:tr>
-              <a:tr h="466344">
-                <a:tc>
-                  <a:txBody>
-                    <a:bodyPr wrap="square"/>
-                    <a:lstStyle/>
-                    <a:p>
-                      <a:pPr algn="r"/>
-                      <a:r>
-                        <a:rPr sz="900" b="0" i="0">
-                          <a:solidFill>
-                            <a:srgbClr val="1A1A1A"/>
-                          </a:solidFill>
-                          <a:latin typeface="Helvetica Neue"/>
-                        </a:rPr>
                         <a:t>2</a:t>
                       </a:r>
                     </a:p>
@@ -13762,194 +14812,6 @@
                           </a:solidFill>
                           <a:latin typeface="Helvetica Neue"/>
                         </a:rPr>
-                        <a:t>18.1</a:t>
-                      </a:r>
-                    </a:p>
-                  </a:txBody>
-                  <a:tcPr marL="45720" marR="45720" marT="18288" marB="18288" anchor="t"/>
-                </a:tc>
-                <a:tc>
-                  <a:txBody>
-                    <a:bodyPr wrap="square"/>
-                    <a:lstStyle/>
-                    <a:p>
-                      <a:r>
-                        <a:rPr sz="900" b="0" i="0">
-                          <a:solidFill>
-                            <a:srgbClr val="1A1A1A"/>
-                          </a:solidFill>
-                          <a:latin typeface="Helvetica Neue"/>
-                        </a:rPr>
-                        <a:t>Deep learning-based cerebellar segmentation on T2-weighted fluid-attenuated inversion recovery magnetic resonance imaging for detecting cerebellar hypoplasia/atrophy in infants</a:t>
-                      </a:r>
-                    </a:p>
-                  </a:txBody>
-                  <a:tcPr marL="45720" marR="45720" marT="18288" marB="18288" anchor="t"/>
-                </a:tc>
-                <a:tc>
-                  <a:txBody>
-                    <a:bodyPr wrap="square"/>
-                    <a:lstStyle/>
-                    <a:p>
-                      <a:r>
-                        <a:rPr sz="900" b="0" i="0">
-                          <a:solidFill>
-                            <a:srgbClr val="1A1A1A"/>
-                          </a:solidFill>
-                          <a:latin typeface="Helvetica Neue"/>
-                        </a:rPr>
-                        <a:t>Pediatric Radiology</a:t>
-                      </a:r>
-                    </a:p>
-                  </a:txBody>
-                  <a:tcPr marL="45720" marR="45720" marT="18288" marB="18288" anchor="t"/>
-                </a:tc>
-                <a:tc>
-                  <a:txBody>
-                    <a:bodyPr wrap="square"/>
-                    <a:lstStyle/>
-                    <a:p>
-                      <a:r>
-                        <a:rPr sz="900" b="0" i="1">
-                          <a:solidFill>
-                            <a:srgbClr val="1A1A1A"/>
-                          </a:solidFill>
-                          <a:latin typeface="Helvetica Neue"/>
-                        </a:rPr>
-                        <a:t>segmentation</a:t>
-                      </a:r>
-                    </a:p>
-                  </a:txBody>
-                  <a:tcPr marL="45720" marR="45720" marT="18288" marB="18288" anchor="t"/>
-                </a:tc>
-              </a:tr>
-              <a:tr h="466344">
-                <a:tc>
-                  <a:txBody>
-                    <a:bodyPr wrap="square"/>
-                    <a:lstStyle/>
-                    <a:p>
-                      <a:pPr algn="r"/>
-                      <a:r>
-                        <a:rPr sz="900" b="0" i="0">
-                          <a:solidFill>
-                            <a:srgbClr val="1A1A1A"/>
-                          </a:solidFill>
-                          <a:latin typeface="Helvetica Neue"/>
-                        </a:rPr>
-                        <a:t>3</a:t>
-                      </a:r>
-                    </a:p>
-                  </a:txBody>
-                  <a:tcPr marL="45720" marR="45720" marT="18288" marB="18288" anchor="t"/>
-                </a:tc>
-                <a:tc>
-                  <a:txBody>
-                    <a:bodyPr wrap="square"/>
-                    <a:lstStyle/>
-                    <a:p>
-                      <a:pPr algn="r"/>
-                      <a:r>
-                        <a:rPr sz="900" b="0" i="0">
-                          <a:solidFill>
-                            <a:srgbClr val="1A1A1A"/>
-                          </a:solidFill>
-                          <a:latin typeface="Helvetica Neue"/>
-                        </a:rPr>
-                        <a:t>14.6</a:t>
-                      </a:r>
-                    </a:p>
-                  </a:txBody>
-                  <a:tcPr marL="45720" marR="45720" marT="18288" marB="18288" anchor="t"/>
-                </a:tc>
-                <a:tc>
-                  <a:txBody>
-                    <a:bodyPr wrap="square"/>
-                    <a:lstStyle/>
-                    <a:p>
-                      <a:r>
-                        <a:rPr sz="900" b="0" i="0">
-                          <a:solidFill>
-                            <a:srgbClr val="1A1A1A"/>
-                          </a:solidFill>
-                          <a:latin typeface="Helvetica Neue"/>
-                        </a:rPr>
-                        <a:t>Deep Learning-Based Multi-Class Pediatric Wrist Fracture Subtype Classification: A Pilot Study Comparing Convolutional Neural Network Architectures</a:t>
-                      </a:r>
-                    </a:p>
-                  </a:txBody>
-                  <a:tcPr marL="45720" marR="45720" marT="18288" marB="18288" anchor="t"/>
-                </a:tc>
-                <a:tc>
-                  <a:txBody>
-                    <a:bodyPr wrap="square"/>
-                    <a:lstStyle/>
-                    <a:p>
-                      <a:r>
-                        <a:rPr sz="900" b="0" i="0">
-                          <a:solidFill>
-                            <a:srgbClr val="1A1A1A"/>
-                          </a:solidFill>
-                          <a:latin typeface="Helvetica Neue"/>
-                        </a:rPr>
-                        <a:t>Journal of Imaging</a:t>
-                      </a:r>
-                    </a:p>
-                  </a:txBody>
-                  <a:tcPr marL="45720" marR="45720" marT="18288" marB="18288" anchor="t"/>
-                </a:tc>
-                <a:tc>
-                  <a:txBody>
-                    <a:bodyPr wrap="square"/>
-                    <a:lstStyle/>
-                    <a:p>
-                      <a:r>
-                        <a:rPr sz="900" b="0" i="1">
-                          <a:solidFill>
-                            <a:srgbClr val="1A1A1A"/>
-                          </a:solidFill>
-                          <a:latin typeface="Helvetica Neue"/>
-                        </a:rPr>
-                        <a:t>fracture</a:t>
-                      </a:r>
-                    </a:p>
-                  </a:txBody>
-                  <a:tcPr marL="45720" marR="45720" marT="18288" marB="18288" anchor="t"/>
-                </a:tc>
-              </a:tr>
-              <a:tr h="329184">
-                <a:tc>
-                  <a:txBody>
-                    <a:bodyPr wrap="square"/>
-                    <a:lstStyle/>
-                    <a:p>
-                      <a:pPr algn="r"/>
-                      <a:r>
-                        <a:rPr sz="900" b="0" i="0">
-                          <a:solidFill>
-                            <a:srgbClr val="1A1A1A"/>
-                          </a:solidFill>
-                          <a:latin typeface="Helvetica Neue"/>
-                        </a:rPr>
-                        <a:t>4</a:t>
-                      </a:r>
-                    </a:p>
-                  </a:txBody>
-                  <a:tcPr marL="45720" marR="45720" marT="18288" marB="18288" anchor="t"/>
-                </a:tc>
-                <a:tc>
-                  <a:txBody>
-                    <a:bodyPr wrap="square"/>
-                    <a:lstStyle/>
-                    <a:p>
-                      <a:pPr algn="r"/>
-                      <a:r>
-                        <a:rPr sz="900" b="0" i="0">
-                          <a:solidFill>
-                            <a:srgbClr val="1A1A1A"/>
-                          </a:solidFill>
-                          <a:latin typeface="Helvetica Neue"/>
-                        </a:rPr>
                         <a:t>9.8</a:t>
                       </a:r>
                     </a:p>
@@ -13968,100 +14830,6 @@
                           </a:solidFill>
                           <a:latin typeface="Helvetica Neue"/>
                         </a:rPr>
-                        <a:t>Deep learning super-resolution of paediatric ultra-low-field MRI without paired high-field scans</a:t>
-                      </a:r>
-                    </a:p>
-                  </a:txBody>
-                  <a:tcPr marL="45720" marR="45720" marT="18288" marB="18288" anchor="t"/>
-                </a:tc>
-                <a:tc>
-                  <a:txBody>
-                    <a:bodyPr wrap="square"/>
-                    <a:lstStyle/>
-                    <a:p>
-                      <a:r>
-                        <a:rPr sz="900" b="0" i="0">
-                          <a:solidFill>
-                            <a:srgbClr val="1A1A1A"/>
-                          </a:solidFill>
-                          <a:latin typeface="Helvetica Neue"/>
-                        </a:rPr>
-                        <a:t>bioRxiv</a:t>
-                      </a:r>
-                    </a:p>
-                  </a:txBody>
-                  <a:tcPr marL="45720" marR="45720" marT="18288" marB="18288" anchor="t"/>
-                </a:tc>
-                <a:tc>
-                  <a:txBody>
-                    <a:bodyPr wrap="square"/>
-                    <a:lstStyle/>
-                    <a:p>
-                      <a:r>
-                        <a:rPr sz="900" b="0" i="1">
-                          <a:solidFill>
-                            <a:srgbClr val="1A1A1A"/>
-                          </a:solidFill>
-                          <a:latin typeface="Helvetica Neue"/>
-                        </a:rPr>
-                        <a:t>other</a:t>
-                      </a:r>
-                    </a:p>
-                  </a:txBody>
-                  <a:tcPr marL="45720" marR="45720" marT="18288" marB="18288" anchor="t"/>
-                </a:tc>
-              </a:tr>
-              <a:tr h="329184">
-                <a:tc>
-                  <a:txBody>
-                    <a:bodyPr wrap="square"/>
-                    <a:lstStyle/>
-                    <a:p>
-                      <a:pPr algn="r"/>
-                      <a:r>
-                        <a:rPr sz="900" b="0" i="0">
-                          <a:solidFill>
-                            <a:srgbClr val="1A1A1A"/>
-                          </a:solidFill>
-                          <a:latin typeface="Helvetica Neue"/>
-                        </a:rPr>
-                        <a:t>2</a:t>
-                      </a:r>
-                    </a:p>
-                  </a:txBody>
-                  <a:tcPr marL="45720" marR="45720" marT="18288" marB="18288" anchor="t"/>
-                </a:tc>
-                <a:tc>
-                  <a:txBody>
-                    <a:bodyPr wrap="square"/>
-                    <a:lstStyle/>
-                    <a:p>
-                      <a:pPr algn="r"/>
-                      <a:r>
-                        <a:rPr sz="900" b="0" i="0">
-                          <a:solidFill>
-                            <a:srgbClr val="1A1A1A"/>
-                          </a:solidFill>
-                          <a:latin typeface="Helvetica Neue"/>
-                        </a:rPr>
-                        <a:t>9.8</a:t>
-                      </a:r>
-                    </a:p>
-                  </a:txBody>
-                  <a:tcPr marL="45720" marR="45720" marT="18288" marB="18288" anchor="t"/>
-                </a:tc>
-                <a:tc>
-                  <a:txBody>
-                    <a:bodyPr wrap="square"/>
-                    <a:lstStyle/>
-                    <a:p>
-                      <a:r>
-                        <a:rPr sz="900" b="0" i="0">
-                          <a:solidFill>
-                            <a:srgbClr val="1A1A1A"/>
-                          </a:solidFill>
-                          <a:latin typeface="Helvetica Neue"/>
-                        </a:rPr>
                         <a:t>Acquisition time/dose reduction in pediatric PET imaging using patch-based deep learning</a:t>
                       </a:r>
                     </a:p>
@@ -14081,6 +14849,24 @@
                           <a:latin typeface="Helvetica Neue"/>
                         </a:rPr>
                         <a:t>EJNMMI Physics</a:t>
+                      </a:r>
+                    </a:p>
+                  </a:txBody>
+                  <a:tcPr marL="45720" marR="45720" marT="18288" marB="18288" anchor="t"/>
+                </a:tc>
+                <a:tc>
+                  <a:txBody>
+                    <a:bodyPr wrap="square"/>
+                    <a:lstStyle/>
+                    <a:p>
+                      <a:r>
+                        <a:rPr sz="900" b="0" i="0">
+                          <a:solidFill>
+                            <a:srgbClr val="1A1A1A"/>
+                          </a:solidFill>
+                          <a:latin typeface="Helvetica Neue"/>
+                        </a:rPr>
+                        <a:t>radiation dose reduction (PET)</a:t>
                       </a:r>
                     </a:p>
                   </a:txBody>
@@ -14148,7 +14934,7 @@
                 </a:solidFill>
                 <a:latin typeface="Helvetica Neue"/>
               </a:rPr>
-              <a:t>12 / 34</a:t>
+              <a:t>12 / 36</a:t>
             </a:r>
           </a:p>
         </p:txBody>
@@ -14312,7 +15098,7 @@
                 </a:solidFill>
                 <a:latin typeface="Helvetica Neue"/>
               </a:rPr>
-              <a:t>13 / 34</a:t>
+              <a:t>13 / 36</a:t>
             </a:r>
           </a:p>
         </p:txBody>
@@ -14474,7 +15260,7 @@
                 </a:solidFill>
                 <a:latin typeface="Helvetica Neue"/>
               </a:rPr>
-              <a:t>2 / 34</a:t>
+              <a:t>2 / 36</a:t>
             </a:r>
           </a:p>
         </p:txBody>
@@ -24757,7 +25543,7 @@
                 </a:solidFill>
                 <a:latin typeface="Helvetica Neue"/>
               </a:rPr>
-              <a:t>14 / 34</a:t>
+              <a:t>14 / 36</a:t>
             </a:r>
           </a:p>
         </p:txBody>
@@ -25191,7 +25977,7 @@
                 </a:solidFill>
                 <a:latin typeface="Helvetica Neue"/>
               </a:rPr>
-              <a:t>15 / 34</a:t>
+              <a:t>15 / 36</a:t>
             </a:r>
           </a:p>
         </p:txBody>
@@ -25603,7 +26389,7 @@
                 </a:solidFill>
                 <a:latin typeface="Helvetica Neue"/>
               </a:rPr>
-              <a:t>: (pediatric*[tiab] OR paediatric*[tiab] OR child*[tiab] OR infant*[tiab] OR neonat*[tiab] OR adolescen*[tiab] OR fetal[tiab] OR foetal[tiab] OR fetus*[tiab] OR foetus*[tiab] OR newborn*[tiab] OR preterm[tiab] OR "premature infant"[tiab] OR "premature infants"[tiab] OR "premature birth"[tiab] OR "premature neonate"[tiab] OR "premature neonates"[tiab] OR prenatal[tiab] OR antenatal[tiab] OR perinatal[tiab] OR youth[tiab] OR juvenile[tiab] OR "children's hospital"[tiab] OR schoolchild*[tiab] OR toddler*[tiab])</a:t>
+              <a:t>: (pediatric*[tiab] OR paediatric*[tiab] OR child*[tiab] OR infant*[tiab] OR neonat*[tiab] OR adolescen*[tiab] OR fetal[tiab] OR foetal[tiab] OR fetus*[tiab] OR foetus*[tiab] OR newborn*[tiab] OR preterm[tiab] OR "premature infant"[tiab] OR "premature infants"[tiab] OR "premature birth"[tiab] OR "premature neonate"[tiab] OR "premature neonates"[tiab] OR prenatal[tiab] OR antenatal[tiab] OR perinatal[tiab] OR youth[tiab] OR juvenile[tiab] OR "children's hospital"[tiab] OR schoolchild*[tiab] OR toddler*[tiab] OR baby[tiab] OR babies[tiab])</a:t>
             </a:r>
           </a:p>
         </p:txBody>
@@ -25638,7 +26424,7 @@
                 </a:solidFill>
                 <a:latin typeface="Helvetica Neue"/>
               </a:rPr>
-              <a:t>3 / 34</a:t>
+              <a:t>3 / 36</a:t>
             </a:r>
           </a:p>
         </p:txBody>
@@ -26072,7 +26858,7 @@
                 </a:solidFill>
                 <a:latin typeface="Helvetica Neue"/>
               </a:rPr>
-              <a:t>16 / 34</a:t>
+              <a:t>16 / 36</a:t>
             </a:r>
           </a:p>
         </p:txBody>
@@ -27304,7 +28090,7 @@
                 </a:solidFill>
                 <a:latin typeface="Helvetica Neue"/>
               </a:rPr>
-              <a:t>17 / 34</a:t>
+              <a:t>17 / 36</a:t>
             </a:r>
           </a:p>
         </p:txBody>
@@ -29028,7 +29814,7 @@
                 </a:solidFill>
                 <a:latin typeface="Helvetica Neue"/>
               </a:rPr>
-              <a:t>18 / 34</a:t>
+              <a:t>18 / 36</a:t>
             </a:r>
           </a:p>
         </p:txBody>
@@ -29192,7 +29978,7 @@
                 </a:solidFill>
                 <a:latin typeface="Helvetica Neue"/>
               </a:rPr>
-              <a:t>19 / 34</a:t>
+              <a:t>19 / 36</a:t>
             </a:r>
           </a:p>
         </p:txBody>
@@ -35727,7 +36513,7 @@
                 </a:solidFill>
                 <a:latin typeface="Helvetica Neue"/>
               </a:rPr>
-              <a:t>20 / 34</a:t>
+              <a:t>20 / 36</a:t>
             </a:r>
           </a:p>
         </p:txBody>
@@ -35891,7 +36677,7 @@
                 </a:solidFill>
                 <a:latin typeface="Helvetica Neue"/>
               </a:rPr>
-              <a:t>4 / 34</a:t>
+              <a:t>4 / 36</a:t>
             </a:r>
           </a:p>
         </p:txBody>
@@ -37009,7 +37795,7 @@
                 </a:solidFill>
                 <a:latin typeface="Helvetica Neue"/>
               </a:rPr>
-              <a:t>21 / 34</a:t>
+              <a:t>21 / 36</a:t>
             </a:r>
           </a:p>
         </p:txBody>
@@ -37788,7 +38574,7 @@
                 </a:solidFill>
                 <a:latin typeface="Helvetica Neue"/>
               </a:rPr>
-              <a:t>22 / 34</a:t>
+              <a:t>22 / 36</a:t>
             </a:r>
           </a:p>
         </p:txBody>
@@ -37991,7 +38777,7 @@
                 </a:solidFill>
                 <a:latin typeface="Helvetica Neue"/>
               </a:rPr>
-              <a:t>23 / 34</a:t>
+              <a:t>23 / 36</a:t>
             </a:r>
           </a:p>
         </p:txBody>
@@ -38284,7 +39070,7 @@
                 </a:solidFill>
                 <a:latin typeface="Helvetica Neue"/>
               </a:rPr>
-              <a:t>24 / 34</a:t>
+              <a:t>24 / 36</a:t>
             </a:r>
           </a:p>
         </p:txBody>
@@ -38298,7 +39084,7 @@
 </file>
 
 <file path=ppt/slides/slide48.xml><?xml version="1.0" encoding="utf-8"?>
-<p:sld xmlns:a="http://schemas.openxmlformats.org/drawingml/2006/main" xmlns:p="http://schemas.openxmlformats.org/presentationml/2006/main" xmlns:r="http://schemas.openxmlformats.org/officeDocument/2006/relationships" show="0">
+<p:sld xmlns:a="http://schemas.openxmlformats.org/drawingml/2006/main" xmlns:p="http://schemas.openxmlformats.org/presentationml/2006/main" xmlns:r="http://schemas.openxmlformats.org/officeDocument/2006/relationships">
   <p:cSld>
     <p:spTree>
       <p:nvGrpSpPr>
@@ -39893,6 +40679,41 @@
           </a:p>
         </p:txBody>
       </p:sp>
+      <p:sp>
+        <p:nvSpPr>
+          <p:cNvPr id="6" name="page number"/>
+          <p:cNvSpPr txBox="1"/>
+          <p:nvPr/>
+        </p:nvSpPr>
+        <p:spPr>
+          <a:xfrm>
+            <a:off x="10728655" y="6510528"/>
+            <a:ext cx="1188720" cy="274320"/>
+          </a:xfrm>
+          <a:prstGeom prst="rect">
+            <a:avLst/>
+          </a:prstGeom>
+          <a:noFill/>
+        </p:spPr>
+        <p:txBody>
+          <a:bodyPr wrap="none">
+            <a:spAutoFit/>
+          </a:bodyPr>
+          <a:lstStyle/>
+          <a:p>
+            <a:pPr algn="r"/>
+            <a:r>
+              <a:rPr sz="1000">
+                <a:solidFill>
+                  <a:srgbClr val="6B6B6B"/>
+                </a:solidFill>
+                <a:latin typeface="Helvetica Neue"/>
+              </a:rPr>
+              <a:t>25 / 36</a:t>
+            </a:r>
+          </a:p>
+        </p:txBody>
+      </p:sp>
     </p:spTree>
   </p:cSld>
   <p:clrMapOvr>
@@ -39902,7 +40723,7 @@
 </file>
 
 <file path=ppt/slides/slide49.xml><?xml version="1.0" encoding="utf-8"?>
-<p:sld xmlns:a="http://schemas.openxmlformats.org/drawingml/2006/main" xmlns:p="http://schemas.openxmlformats.org/presentationml/2006/main" xmlns:r="http://schemas.openxmlformats.org/officeDocument/2006/relationships" show="0">
+<p:sld xmlns:a="http://schemas.openxmlformats.org/drawingml/2006/main" xmlns:p="http://schemas.openxmlformats.org/presentationml/2006/main" xmlns:r="http://schemas.openxmlformats.org/officeDocument/2006/relationships">
   <p:cSld>
     <p:spTree>
       <p:nvGrpSpPr>
@@ -41493,6 +42314,41 @@
                 <a:latin typeface="Helvetica Neue"/>
               </a:rPr>
               <a:t>Square brackets give the FDA submission supporting the pediatric claim and its decision year; a blank means no US authorization was identified for that product. “Where it stands” is our reading of deployment, not a measured adoption rate. A company's total of FDA AI entries is not a pediatric credential — the large vendors' entries are mostly whole scanners whose labels list pediatric imaging as one clinical application (see the authorizations-per-company figure).</a:t>
+            </a:r>
+          </a:p>
+        </p:txBody>
+      </p:sp>
+      <p:sp>
+        <p:nvSpPr>
+          <p:cNvPr id="6" name="page number"/>
+          <p:cNvSpPr txBox="1"/>
+          <p:nvPr/>
+        </p:nvSpPr>
+        <p:spPr>
+          <a:xfrm>
+            <a:off x="10728655" y="6510528"/>
+            <a:ext cx="1188720" cy="274320"/>
+          </a:xfrm>
+          <a:prstGeom prst="rect">
+            <a:avLst/>
+          </a:prstGeom>
+          <a:noFill/>
+        </p:spPr>
+        <p:txBody>
+          <a:bodyPr wrap="none">
+            <a:spAutoFit/>
+          </a:bodyPr>
+          <a:lstStyle/>
+          <a:p>
+            <a:pPr algn="r"/>
+            <a:r>
+              <a:rPr sz="1000">
+                <a:solidFill>
+                  <a:srgbClr val="6B6B6B"/>
+                </a:solidFill>
+                <a:latin typeface="Helvetica Neue"/>
+              </a:rPr>
+              <a:t>26 / 36</a:t>
             </a:r>
           </a:p>
         </p:txBody>
@@ -41656,7 +42512,7 @@
                 </a:solidFill>
                 <a:latin typeface="Helvetica Neue"/>
               </a:rPr>
-              <a:t>5 / 34</a:t>
+              <a:t>5 / 36</a:t>
             </a:r>
           </a:p>
         </p:txBody>
@@ -42046,7 +42902,7 @@
                 </a:solidFill>
                 <a:latin typeface="Helvetica Neue"/>
               </a:rPr>
-              <a:t>25 / 34</a:t>
+              <a:t>27 / 36</a:t>
             </a:r>
           </a:p>
         </p:txBody>
@@ -42490,7 +43346,7 @@
                 </a:solidFill>
                 <a:latin typeface="Helvetica Neue"/>
               </a:rPr>
-              <a:t>26 / 34</a:t>
+              <a:t>28 / 36</a:t>
             </a:r>
           </a:p>
         </p:txBody>
@@ -42880,7 +43736,7 @@
                 </a:solidFill>
                 <a:latin typeface="Helvetica Neue"/>
               </a:rPr>
-              <a:t>27 / 34</a:t>
+              <a:t>29 / 36</a:t>
             </a:r>
           </a:p>
         </p:txBody>
@@ -43288,7 +44144,7 @@
                 </a:solidFill>
                 <a:latin typeface="Helvetica Neue"/>
               </a:rPr>
-              <a:t>28 / 34</a:t>
+              <a:t>30 / 36</a:t>
             </a:r>
           </a:p>
         </p:txBody>
@@ -43634,7 +44490,7 @@
                 </a:solidFill>
                 <a:latin typeface="Helvetica Neue"/>
               </a:rPr>
-              <a:t>29 / 34</a:t>
+              <a:t>31 / 36</a:t>
             </a:r>
           </a:p>
         </p:txBody>
@@ -44002,7 +44858,7 @@
                 </a:solidFill>
                 <a:latin typeface="Helvetica Neue"/>
               </a:rPr>
-              <a:t>30 / 34</a:t>
+              <a:t>32 / 36</a:t>
             </a:r>
           </a:p>
         </p:txBody>
@@ -44365,7 +45221,7 @@
                 </a:solidFill>
                 <a:latin typeface="Helvetica Neue"/>
               </a:rPr>
-              <a:t>31 / 34</a:t>
+              <a:t>33 / 36</a:t>
             </a:r>
           </a:p>
         </p:txBody>
@@ -44753,7 +45609,7 @@
                 </a:solidFill>
                 <a:latin typeface="Helvetica Neue"/>
               </a:rPr>
-              <a:t>32 / 34</a:t>
+              <a:t>34 / 36</a:t>
             </a:r>
           </a:p>
         </p:txBody>
@@ -44823,7 +45679,7 @@
                 </a:solidFill>
                 <a:latin typeface="Helvetica Neue"/>
               </a:rPr>
-              <a:t>Explore our database</a:t>
+              <a:t>Explore our database: https://pedrad-ai.vercel.app</a:t>
             </a:r>
           </a:p>
         </p:txBody>
@@ -44883,8 +45739,8 @@
         </p:blipFill>
         <p:spPr>
           <a:xfrm>
-            <a:off x="2103374" y="1357375"/>
-            <a:ext cx="7984946" cy="4491532"/>
+            <a:off x="2008831" y="1357375"/>
+            <a:ext cx="8174030" cy="4491532"/>
           </a:xfrm>
           <a:prstGeom prst="rect">
             <a:avLst/>
@@ -44921,7 +45777,7 @@
                 </a:solidFill>
                 <a:latin typeface="Helvetica Neue"/>
               </a:rPr>
-              <a:t>33 / 34</a:t>
+              <a:t>35 / 36</a:t>
             </a:r>
           </a:p>
         </p:txBody>
@@ -45134,7 +45990,7 @@
                 </a:solidFill>
                 <a:latin typeface="Helvetica Neue"/>
               </a:rPr>
-              <a:t>34 / 34</a:t>
+              <a:t>36 / 36</a:t>
             </a:r>
           </a:p>
         </p:txBody>
@@ -45270,46 +46126,7 @@
       </p:pic>
       <p:sp>
         <p:nvSpPr>
-          <p:cNvPr id="5" name="TextBox 4"/>
-          <p:cNvSpPr txBox="1"/>
-          <p:nvPr/>
-        </p:nvSpPr>
-        <p:spPr>
-          <a:xfrm>
-            <a:off x="411480" y="4656490"/>
-            <a:ext cx="11368735" cy="680084"/>
-          </a:xfrm>
-          <a:prstGeom prst="rect">
-            <a:avLst/>
-          </a:prstGeom>
-          <a:noFill/>
-        </p:spPr>
-        <p:txBody>
-          <a:bodyPr wrap="square" lIns="45720" rIns="45720" tIns="27432" bIns="27432" anchor="t">
-            <a:spAutoFit/>
-          </a:bodyPr>
-          <a:lstStyle/>
-          <a:p>
-            <a:pPr algn="l">
-              <a:spcAft>
-                <a:spcPts val="315"/>
-              </a:spcAft>
-            </a:pPr>
-            <a:r>
-              <a:rPr sz="900" b="0" i="0">
-                <a:solidFill>
-                  <a:srgbClr val="1A1A1A"/>
-                </a:solidFill>
-                <a:latin typeface="Helvetica Neue"/>
-              </a:rPr>
-              <a:t>x = OpenAlex 2-year mean citedness (a free JIF analogue; runs below the published JIF). y = cumulative pediatric radiology-AI papers 2015-2026 (PubMed, strict title/abstract query). The 29 journals with at least 25 of them are shown, carrying 1,511 of 4,399; the rest is a long tail. Largest: Scientific Reports (156); median impact 3.8, 1 at 10 or above – this work lands mostly in mid-impact specialty and technical journals. A further 3 conference proceedings and preprint servers clear the threshold (95 papers) but have no impact number of any kind and are not plotted. The same chart animated year by year: figures/journal_impact.gif.</a:t>
-            </a:r>
-          </a:p>
-        </p:txBody>
-      </p:sp>
-      <p:sp>
-        <p:nvSpPr>
-          <p:cNvPr id="6" name="page number"/>
+          <p:cNvPr id="5" name="page number"/>
           <p:cNvSpPr txBox="1"/>
           <p:nvPr/>
         </p:nvSpPr>
@@ -45337,7 +46154,7 @@
                 </a:solidFill>
                 <a:latin typeface="Helvetica Neue"/>
               </a:rPr>
-              <a:t>6 / 34</a:t>
+              <a:t>6 / 36</a:t>
             </a:r>
           </a:p>
         </p:txBody>
@@ -45480,45 +46297,6 @@
         <p:spPr>
           <a:xfrm>
             <a:off x="411480" y="3589751"/>
-            <a:ext cx="11368735" cy="405765"/>
-          </a:xfrm>
-          <a:prstGeom prst="rect">
-            <a:avLst/>
-          </a:prstGeom>
-          <a:noFill/>
-        </p:spPr>
-        <p:txBody>
-          <a:bodyPr wrap="square" lIns="45720" rIns="45720" tIns="27432" bIns="27432" anchor="t">
-            <a:spAutoFit/>
-          </a:bodyPr>
-          <a:lstStyle/>
-          <a:p>
-            <a:pPr algn="l">
-              <a:spcAft>
-                <a:spcPts val="315"/>
-              </a:spcAft>
-            </a:pPr>
-            <a:r>
-              <a:rPr sz="900" b="0" i="0">
-                <a:solidFill>
-                  <a:srgbClr val="1A1A1A"/>
-                </a:solidFill>
-                <a:latin typeface="Helvetica Neue"/>
-              </a:rPr>
-              <a:t>Same construction, restricted to the pediatric subset (9,762 papers incl. 608 preprints). Top pediatric modalities: MRI 41%, CT 16%, x-ray / radiography 13%, ultrasound 12%. Mammography is omitted: its 67 pediatric-query hits (of 9,762) are adult breast-imaging papers whose abstracts mention children.</a:t>
-            </a:r>
-          </a:p>
-        </p:txBody>
-      </p:sp>
-      <p:sp>
-        <p:nvSpPr>
-          <p:cNvPr id="6" name="TextBox 5"/>
-          <p:cNvSpPr txBox="1"/>
-          <p:nvPr/>
-        </p:nvSpPr>
-        <p:spPr>
-          <a:xfrm>
-            <a:off x="411480" y="4068668"/>
             <a:ext cx="3630981" cy="1034415"/>
           </a:xfrm>
           <a:prstGeom prst="rect">
@@ -45554,7 +46332,7 @@
                 </a:solidFill>
                 <a:latin typeface="Helvetica Neue"/>
               </a:rPr>
-              <a:t>: is a finding present now, and which one (label or box): fracture, pneumonia, tumor; includes triage and screening</a:t>
+              <a:t>: predict discrete disease labels (e.g., fracture, pneumonia, tumor, triage)</a:t>
             </a:r>
           </a:p>
           <a:p>
@@ -45580,7 +46358,7 @@
                 </a:solidFill>
                 <a:latin typeface="Helvetica Neue"/>
               </a:rPr>
-              <a:t>: outline a structure or lesion (a mask)</a:t>
+              <a:t>: outline a structure or lesion</a:t>
             </a:r>
           </a:p>
           <a:p>
@@ -45606,20 +46384,20 @@
                 </a:solidFill>
                 <a:latin typeface="Helvetica Neue"/>
               </a:rPr>
-              <a:t>: a number from the image: bone age, Cobb angle, organ volume, fetal biometry</a:t>
+              <a:t>: measure a number from the image (e.g., bone age, Cobb angle, organ volume, fetal biometry)</a:t>
             </a:r>
           </a:p>
         </p:txBody>
       </p:sp>
       <p:sp>
         <p:nvSpPr>
-          <p:cNvPr id="7" name="TextBox 6"/>
+          <p:cNvPr id="6" name="TextBox 5"/>
           <p:cNvSpPr txBox="1"/>
           <p:nvPr/>
         </p:nvSpPr>
         <p:spPr>
           <a:xfrm>
-            <a:off x="4225341" y="4068668"/>
+            <a:off x="4225341" y="3589751"/>
             <a:ext cx="3630981" cy="1171575"/>
           </a:xfrm>
           <a:prstGeom prst="rect">
@@ -45681,7 +46459,7 @@
                 </a:solidFill>
                 <a:latin typeface="Helvetica Neue"/>
               </a:rPr>
-              <a:t>: a better or missing image: lower dose, faster scans, denoising, synthetic CT/MR</a:t>
+              <a:t>: generate a better or missing image</a:t>
             </a:r>
           </a:p>
           <a:p>
@@ -45714,14 +46492,14 @@
       </p:sp>
       <p:sp>
         <p:nvSpPr>
-          <p:cNvPr id="8" name="TextBox 7"/>
+          <p:cNvPr id="7" name="TextBox 6"/>
           <p:cNvSpPr txBox="1"/>
           <p:nvPr/>
         </p:nvSpPr>
         <p:spPr>
           <a:xfrm>
-            <a:off x="8039203" y="4068668"/>
-            <a:ext cx="3630981" cy="1171575"/>
+            <a:off x="8039203" y="3589751"/>
+            <a:ext cx="3630981" cy="1034415"/>
           </a:xfrm>
           <a:prstGeom prst="rect">
             <a:avLst/>
@@ -45756,7 +46534,7 @@
                 </a:solidFill>
                 <a:latin typeface="Helvetica Neue"/>
               </a:rPr>
-              <a:t>: a large pretrained model reused across tasks (segment-anything, self-supervised)</a:t>
+              <a:t>: a large pretrained model reused across tasks</a:t>
             </a:r>
           </a:p>
           <a:p>
@@ -45815,7 +46593,7 @@
       </p:sp>
       <p:sp>
         <p:nvSpPr>
-          <p:cNvPr id="9" name="page number"/>
+          <p:cNvPr id="8" name="page number"/>
           <p:cNvSpPr txBox="1"/>
           <p:nvPr/>
         </p:nvSpPr>
@@ -45843,7 +46621,7 @@
                 </a:solidFill>
                 <a:latin typeface="Helvetica Neue"/>
               </a:rPr>
-              <a:t>7 / 34</a:t>
+              <a:t>7 / 36</a:t>
             </a:r>
           </a:p>
         </p:txBody>
@@ -46007,7 +46785,7 @@
                 </a:solidFill>
                 <a:latin typeface="Helvetica Neue"/>
               </a:rPr>
-              <a:t>8 / 34</a:t>
+              <a:t>8 / 36</a:t>
             </a:r>
           </a:p>
         </p:txBody>
@@ -46127,7 +46905,7 @@
         </p:nvGraphicFramePr>
         <p:xfrm>
           <a:off x="411480" y="877824"/>
-          <a:ext cx="11368733" cy="3483864"/>
+          <a:ext cx="11368733" cy="4581144"/>
         </p:xfrm>
         <a:graphic>
           <a:graphicData uri="http://schemas.openxmlformats.org/drawingml/2006/table">
@@ -46138,9 +46916,10 @@
               <a:tblGrid>
                 <a:gridCol w="512064"/>
                 <a:gridCol w="448056"/>
-                <a:gridCol w="4777554"/>
-                <a:gridCol w="2112948"/>
-                <a:gridCol w="3518111"/>
+                <a:gridCol w="3402816"/>
+                <a:gridCol w="1501242"/>
+                <a:gridCol w="1501242"/>
+                <a:gridCol w="4003313"/>
               </a:tblGrid>
               <a:tr h="192024">
                 <a:tc>
@@ -46229,7 +47008,509 @@
                           </a:solidFill>
                           <a:latin typeface="Helvetica Neue"/>
                         </a:rPr>
+                        <a:t>Clinical problem</a:t>
+                      </a:r>
+                    </a:p>
+                  </a:txBody>
+                  <a:tcPr marL="45720" marR="45720" marT="18288" marB="18288" anchor="t"/>
+                </a:tc>
+                <a:tc>
+                  <a:txBody>
+                    <a:bodyPr wrap="square"/>
+                    <a:lstStyle/>
+                    <a:p>
+                      <a:r>
+                        <a:rPr sz="900" b="1" i="0">
+                          <a:solidFill>
+                            <a:srgbClr val="FFFFFF"/>
+                          </a:solidFill>
+                          <a:latin typeface="Helvetica Neue"/>
+                        </a:rPr>
                         <a:t>What it answers</a:t>
+                      </a:r>
+                    </a:p>
+                  </a:txBody>
+                  <a:tcPr marL="45720" marR="45720" marT="18288" marB="18288" anchor="t"/>
+                </a:tc>
+              </a:tr>
+              <a:tr h="466344">
+                <a:tc>
+                  <a:txBody>
+                    <a:bodyPr wrap="square"/>
+                    <a:lstStyle/>
+                    <a:p>
+                      <a:pPr algn="r"/>
+                      <a:r>
+                        <a:rPr sz="900" b="0" i="0">
+                          <a:solidFill>
+                            <a:srgbClr val="1A1A1A"/>
+                          </a:solidFill>
+                          <a:latin typeface="Helvetica Neue"/>
+                        </a:rPr>
+                        <a:t>5,797</a:t>
+                      </a:r>
+                    </a:p>
+                  </a:txBody>
+                  <a:tcPr marL="45720" marR="45720" marT="18288" marB="18288" anchor="t"/>
+                </a:tc>
+                <a:tc>
+                  <a:txBody>
+                    <a:bodyPr wrap="square"/>
+                    <a:lstStyle/>
+                    <a:p>
+                      <a:pPr algn="r"/>
+                      <a:r>
+                        <a:rPr sz="900" b="0" i="0">
+                          <a:solidFill>
+                            <a:srgbClr val="1A1A1A"/>
+                          </a:solidFill>
+                          <a:latin typeface="Helvetica Neue"/>
+                        </a:rPr>
+                        <a:t>443.4</a:t>
+                      </a:r>
+                    </a:p>
+                  </a:txBody>
+                  <a:tcPr marL="45720" marR="45720" marT="18288" marB="18288" anchor="t"/>
+                </a:tc>
+                <a:tc>
+                  <a:txBody>
+                    <a:bodyPr wrap="square"/>
+                    <a:lstStyle/>
+                    <a:p>
+                      <a:r>
+                        <a:rPr sz="900" b="0" i="0">
+                          <a:solidFill>
+                            <a:srgbClr val="1A1A1A"/>
+                          </a:solidFill>
+                          <a:latin typeface="Helvetica Neue"/>
+                        </a:rPr>
+                        <a:t>Swin-Unet: Unet-like Pure Transformer for Medical Image Segmentation (2021)</a:t>
+                      </a:r>
+                    </a:p>
+                  </a:txBody>
+                  <a:tcPr marL="45720" marR="45720" marT="18288" marB="18288" anchor="t"/>
+                </a:tc>
+                <a:tc>
+                  <a:txBody>
+                    <a:bodyPr wrap="square"/>
+                    <a:lstStyle/>
+                    <a:p>
+                      <a:r>
+                        <a:rPr sz="900" b="0" i="0">
+                          <a:solidFill>
+                            <a:srgbClr val="1A1A1A"/>
+                          </a:solidFill>
+                          <a:latin typeface="Helvetica Neue"/>
+                        </a:rPr>
+                        <a:t>ECCV Workshops</a:t>
+                      </a:r>
+                    </a:p>
+                  </a:txBody>
+                  <a:tcPr marL="45720" marR="45720" marT="18288" marB="18288" anchor="t"/>
+                </a:tc>
+                <a:tc>
+                  <a:txBody>
+                    <a:bodyPr wrap="square"/>
+                    <a:lstStyle/>
+                    <a:p>
+                      <a:r>
+                        <a:rPr sz="900" b="0" i="0">
+                          <a:solidFill>
+                            <a:srgbClr val="1A1A1A"/>
+                          </a:solidFill>
+                          <a:latin typeface="Helvetica Neue"/>
+                        </a:rPr>
+                        <a:t>general (multi-organ CT, cardiac MRI)</a:t>
+                      </a:r>
+                    </a:p>
+                  </a:txBody>
+                  <a:tcPr marL="45720" marR="45720" marT="18288" marB="18288" anchor="t"/>
+                </a:tc>
+                <a:tc>
+                  <a:txBody>
+                    <a:bodyPr wrap="square"/>
+                    <a:lstStyle/>
+                    <a:p>
+                      <a:r>
+                        <a:rPr sz="900" b="0" i="1">
+                          <a:solidFill>
+                            <a:srgbClr val="1A1A1A"/>
+                          </a:solidFill>
+                          <a:latin typeface="Helvetica Neue"/>
+                        </a:rPr>
+                        <a:t>segmentation</a:t>
+                      </a:r>
+                      <a:r>
+                        <a:rPr sz="900" b="0" i="0">
+                          <a:solidFill>
+                            <a:srgbClr val="1A1A1A"/>
+                          </a:solidFill>
+                          <a:latin typeface="Helvetica Neue"/>
+                        </a:rPr>
+                        <a:t>: Can a pure transformer, with no convolutions, outline abdominal organs on CT and heart chambers on MRI as well as a U-Net?</a:t>
+                      </a:r>
+                    </a:p>
+                  </a:txBody>
+                  <a:tcPr marL="45720" marR="45720" marT="18288" marB="18288" anchor="t"/>
+                </a:tc>
+              </a:tr>
+              <a:tr h="466344">
+                <a:tc>
+                  <a:txBody>
+                    <a:bodyPr wrap="square"/>
+                    <a:lstStyle/>
+                    <a:p>
+                      <a:pPr algn="r"/>
+                      <a:r>
+                        <a:rPr sz="900" b="0" i="0">
+                          <a:solidFill>
+                            <a:srgbClr val="1A1A1A"/>
+                          </a:solidFill>
+                          <a:latin typeface="Helvetica Neue"/>
+                        </a:rPr>
+                        <a:t>2,628</a:t>
+                      </a:r>
+                    </a:p>
+                  </a:txBody>
+                  <a:tcPr marL="45720" marR="45720" marT="18288" marB="18288" anchor="t"/>
+                </a:tc>
+                <a:tc>
+                  <a:txBody>
+                    <a:bodyPr wrap="square"/>
+                    <a:lstStyle/>
+                    <a:p>
+                      <a:pPr algn="r"/>
+                      <a:r>
+                        <a:rPr sz="900" b="0" i="0">
+                          <a:solidFill>
+                            <a:srgbClr val="1A1A1A"/>
+                          </a:solidFill>
+                          <a:latin typeface="Helvetica Neue"/>
+                        </a:rPr>
+                        <a:t>288.8</a:t>
+                      </a:r>
+                    </a:p>
+                  </a:txBody>
+                  <a:tcPr marL="45720" marR="45720" marT="18288" marB="18288" anchor="t"/>
+                </a:tc>
+                <a:tc>
+                  <a:txBody>
+                    <a:bodyPr wrap="square"/>
+                    <a:lstStyle/>
+                    <a:p>
+                      <a:r>
+                        <a:rPr sz="900" b="0" i="0">
+                          <a:solidFill>
+                            <a:srgbClr val="1A1A1A"/>
+                          </a:solidFill>
+                          <a:latin typeface="Helvetica Neue"/>
+                        </a:rPr>
+                        <a:t>Swin UNETR: Swin Transformers for Semantic Segmentation of Brain Tumors in MRI Images (2022)</a:t>
+                      </a:r>
+                    </a:p>
+                  </a:txBody>
+                  <a:tcPr marL="45720" marR="45720" marT="18288" marB="18288" anchor="t"/>
+                </a:tc>
+                <a:tc>
+                  <a:txBody>
+                    <a:bodyPr wrap="square"/>
+                    <a:lstStyle/>
+                    <a:p>
+                      <a:r>
+                        <a:rPr sz="900" b="0" i="0">
+                          <a:solidFill>
+                            <a:srgbClr val="1A1A1A"/>
+                          </a:solidFill>
+                          <a:latin typeface="Helvetica Neue"/>
+                        </a:rPr>
+                        <a:t>BrainLes@MICCAI</a:t>
+                      </a:r>
+                    </a:p>
+                  </a:txBody>
+                  <a:tcPr marL="45720" marR="45720" marT="18288" marB="18288" anchor="t"/>
+                </a:tc>
+                <a:tc>
+                  <a:txBody>
+                    <a:bodyPr wrap="square"/>
+                    <a:lstStyle/>
+                    <a:p>
+                      <a:r>
+                        <a:rPr sz="900" b="0" i="0">
+                          <a:solidFill>
+                            <a:srgbClr val="1A1A1A"/>
+                          </a:solidFill>
+                          <a:latin typeface="Helvetica Neue"/>
+                        </a:rPr>
+                        <a:t>brain tumors (glioma)</a:t>
+                      </a:r>
+                    </a:p>
+                  </a:txBody>
+                  <a:tcPr marL="45720" marR="45720" marT="18288" marB="18288" anchor="t"/>
+                </a:tc>
+                <a:tc>
+                  <a:txBody>
+                    <a:bodyPr wrap="square"/>
+                    <a:lstStyle/>
+                    <a:p>
+                      <a:r>
+                        <a:rPr sz="900" b="0" i="1">
+                          <a:solidFill>
+                            <a:srgbClr val="1A1A1A"/>
+                          </a:solidFill>
+                          <a:latin typeface="Helvetica Neue"/>
+                        </a:rPr>
+                        <a:t>segmentation</a:t>
+                      </a:r>
+                      <a:r>
+                        <a:rPr sz="900" b="0" i="0">
+                          <a:solidFill>
+                            <a:srgbClr val="1A1A1A"/>
+                          </a:solidFill>
+                          <a:latin typeface="Helvetica Neue"/>
+                        </a:rPr>
+                        <a:t>: Can a transformer encoder outline glioma subregions (enhancing tumor, edema, necrotic core) on multiparametric brain MRI? (BraTS 2021)</a:t>
+                      </a:r>
+                    </a:p>
+                  </a:txBody>
+                  <a:tcPr marL="45720" marR="45720" marT="18288" marB="18288" anchor="t"/>
+                </a:tc>
+              </a:tr>
+              <a:tr h="466344">
+                <a:tc>
+                  <a:txBody>
+                    <a:bodyPr wrap="square"/>
+                    <a:lstStyle/>
+                    <a:p>
+                      <a:pPr algn="r"/>
+                      <a:r>
+                        <a:rPr sz="900" b="0" i="0">
+                          <a:solidFill>
+                            <a:srgbClr val="1A1A1A"/>
+                          </a:solidFill>
+                          <a:latin typeface="Helvetica Neue"/>
+                        </a:rPr>
+                        <a:t>2,782</a:t>
+                      </a:r>
+                    </a:p>
+                  </a:txBody>
+                  <a:tcPr marL="45720" marR="45720" marT="18288" marB="18288" anchor="t"/>
+                </a:tc>
+                <a:tc>
+                  <a:txBody>
+                    <a:bodyPr wrap="square"/>
+                    <a:lstStyle/>
+                    <a:p>
+                      <a:pPr algn="r"/>
+                      <a:r>
+                        <a:rPr sz="900" b="0" i="0">
+                          <a:solidFill>
+                            <a:srgbClr val="1A1A1A"/>
+                          </a:solidFill>
+                          <a:latin typeface="Helvetica Neue"/>
+                        </a:rPr>
+                        <a:t>262.1</a:t>
+                      </a:r>
+                    </a:p>
+                  </a:txBody>
+                  <a:tcPr marL="45720" marR="45720" marT="18288" marB="18288" anchor="t"/>
+                </a:tc>
+                <a:tc>
+                  <a:txBody>
+                    <a:bodyPr wrap="square"/>
+                    <a:lstStyle/>
+                    <a:p>
+                      <a:r>
+                        <a:rPr sz="900" b="0" i="0">
+                          <a:solidFill>
+                            <a:srgbClr val="1A1A1A"/>
+                          </a:solidFill>
+                          <a:latin typeface="Helvetica Neue"/>
+                        </a:rPr>
+                        <a:t>COVID-Net: a tailored deep convolutional neural network design for detection of COVID-19 cases from chest X-ray images (2020)</a:t>
+                      </a:r>
+                    </a:p>
+                  </a:txBody>
+                  <a:tcPr marL="45720" marR="45720" marT="18288" marB="18288" anchor="t"/>
+                </a:tc>
+                <a:tc>
+                  <a:txBody>
+                    <a:bodyPr wrap="square"/>
+                    <a:lstStyle/>
+                    <a:p>
+                      <a:r>
+                        <a:rPr sz="900" b="0" i="0">
+                          <a:solidFill>
+                            <a:srgbClr val="1A1A1A"/>
+                          </a:solidFill>
+                          <a:latin typeface="Helvetica Neue"/>
+                        </a:rPr>
+                        <a:t>Scientific Reports</a:t>
+                      </a:r>
+                    </a:p>
+                  </a:txBody>
+                  <a:tcPr marL="45720" marR="45720" marT="18288" marB="18288" anchor="t"/>
+                </a:tc>
+                <a:tc>
+                  <a:txBody>
+                    <a:bodyPr wrap="square"/>
+                    <a:lstStyle/>
+                    <a:p>
+                      <a:r>
+                        <a:rPr sz="900" b="0" i="0">
+                          <a:solidFill>
+                            <a:srgbClr val="1A1A1A"/>
+                          </a:solidFill>
+                          <a:latin typeface="Helvetica Neue"/>
+                        </a:rPr>
+                        <a:t>COVID-19 / pneumonia</a:t>
+                      </a:r>
+                    </a:p>
+                  </a:txBody>
+                  <a:tcPr marL="45720" marR="45720" marT="18288" marB="18288" anchor="t"/>
+                </a:tc>
+                <a:tc>
+                  <a:txBody>
+                    <a:bodyPr wrap="square"/>
+                    <a:lstStyle/>
+                    <a:p>
+                      <a:r>
+                        <a:rPr sz="900" b="0" i="1">
+                          <a:solidFill>
+                            <a:srgbClr val="1A1A1A"/>
+                          </a:solidFill>
+                          <a:latin typeface="Helvetica Neue"/>
+                        </a:rPr>
+                        <a:t>diagnosis</a:t>
+                      </a:r>
+                      <a:r>
+                        <a:rPr sz="900" b="0" i="0">
+                          <a:solidFill>
+                            <a:srgbClr val="1A1A1A"/>
+                          </a:solidFill>
+                          <a:latin typeface="Helvetica Neue"/>
+                        </a:rPr>
+                        <a:t>: Can a purpose-built CNN tell COVID-19 pneumonia from other pneumonia and normal chest X-rays? (COVID-Net, open source)</a:t>
+                      </a:r>
+                    </a:p>
+                  </a:txBody>
+                  <a:tcPr marL="45720" marR="45720" marT="18288" marB="18288" anchor="t"/>
+                </a:tc>
+              </a:tr>
+              <a:tr h="466344">
+                <a:tc>
+                  <a:txBody>
+                    <a:bodyPr wrap="square"/>
+                    <a:lstStyle/>
+                    <a:p>
+                      <a:pPr algn="r"/>
+                      <a:r>
+                        <a:rPr sz="900" b="0" i="0">
+                          <a:solidFill>
+                            <a:srgbClr val="1A1A1A"/>
+                          </a:solidFill>
+                          <a:latin typeface="Helvetica Neue"/>
+                        </a:rPr>
+                        <a:t>3,710</a:t>
+                      </a:r>
+                    </a:p>
+                  </a:txBody>
+                  <a:tcPr marL="45720" marR="45720" marT="18288" marB="18288" anchor="t"/>
+                </a:tc>
+                <a:tc>
+                  <a:txBody>
+                    <a:bodyPr wrap="square"/>
+                    <a:lstStyle/>
+                    <a:p>
+                      <a:pPr algn="r"/>
+                      <a:r>
+                        <a:rPr sz="900" b="0" i="0">
+                          <a:solidFill>
+                            <a:srgbClr val="1A1A1A"/>
+                          </a:solidFill>
+                          <a:latin typeface="Helvetica Neue"/>
+                        </a:rPr>
+                        <a:t>230.9</a:t>
+                      </a:r>
+                    </a:p>
+                  </a:txBody>
+                  <a:tcPr marL="45720" marR="45720" marT="18288" marB="18288" anchor="t"/>
+                </a:tc>
+                <a:tc>
+                  <a:txBody>
+                    <a:bodyPr wrap="square"/>
+                    <a:lstStyle/>
+                    <a:p>
+                      <a:r>
+                        <a:rPr sz="900" b="0" i="0">
+                          <a:solidFill>
+                            <a:srgbClr val="1A1A1A"/>
+                          </a:solidFill>
+                          <a:latin typeface="Helvetica Neue"/>
+                        </a:rPr>
+                        <a:t>ChestX-Ray8: Hospital-Scale Chest X-Ray Database and Benchmarks on Weakly-Supervised Classification and Localization of Common Thorax Diseases (2017)</a:t>
+                      </a:r>
+                    </a:p>
+                  </a:txBody>
+                  <a:tcPr marL="45720" marR="45720" marT="18288" marB="18288" anchor="t"/>
+                </a:tc>
+                <a:tc>
+                  <a:txBody>
+                    <a:bodyPr wrap="square"/>
+                    <a:lstStyle/>
+                    <a:p>
+                      <a:r>
+                        <a:rPr sz="900" b="0" i="0">
+                          <a:solidFill>
+                            <a:srgbClr val="1A1A1A"/>
+                          </a:solidFill>
+                          <a:latin typeface="Helvetica Neue"/>
+                        </a:rPr>
+                        <a:t>Computer Vision and Pattern Recognition</a:t>
+                      </a:r>
+                    </a:p>
+                  </a:txBody>
+                  <a:tcPr marL="45720" marR="45720" marT="18288" marB="18288" anchor="t"/>
+                </a:tc>
+                <a:tc>
+                  <a:txBody>
+                    <a:bodyPr wrap="square"/>
+                    <a:lstStyle/>
+                    <a:p>
+                      <a:r>
+                        <a:rPr sz="900" b="0" i="0">
+                          <a:solidFill>
+                            <a:srgbClr val="1A1A1A"/>
+                          </a:solidFill>
+                          <a:latin typeface="Helvetica Neue"/>
+                        </a:rPr>
+                        <a:t>thoracic disease on chest X-ray</a:t>
+                      </a:r>
+                    </a:p>
+                  </a:txBody>
+                  <a:tcPr marL="45720" marR="45720" marT="18288" marB="18288" anchor="t"/>
+                </a:tc>
+                <a:tc>
+                  <a:txBody>
+                    <a:bodyPr wrap="square"/>
+                    <a:lstStyle/>
+                    <a:p>
+                      <a:r>
+                        <a:rPr sz="900" b="0" i="1">
+                          <a:solidFill>
+                            <a:srgbClr val="1A1A1A"/>
+                          </a:solidFill>
+                          <a:latin typeface="Helvetica Neue"/>
+                        </a:rPr>
+                        <a:t>diagnosis</a:t>
+                      </a:r>
+                      <a:r>
+                        <a:rPr sz="900" b="0" i="0">
+                          <a:solidFill>
+                            <a:srgbClr val="1A1A1A"/>
+                          </a:solidFill>
+                          <a:latin typeface="Helvetica Neue"/>
+                        </a:rPr>
+                        <a:t>: Can labels mined automatically from radiology reports train a model to classify and localize eight common thoracic findings? (NIH ChestX-ray dataset, 108,948 images)</a:t>
                       </a:r>
                     </a:p>
                   </a:txBody>
@@ -46250,62 +47531,80 @@
                           </a:solidFill>
                           <a:latin typeface="Helvetica Neue"/>
                         </a:rPr>
-                        <a:t>5,797</a:t>
-                      </a:r>
-                    </a:p>
-                  </a:txBody>
-                  <a:tcPr marL="45720" marR="45720" marT="18288" marB="18288" anchor="t"/>
-                </a:tc>
-                <a:tc>
-                  <a:txBody>
-                    <a:bodyPr wrap="square"/>
-                    <a:lstStyle/>
-                    <a:p>
-                      <a:pPr algn="r"/>
-                      <a:r>
-                        <a:rPr sz="900" b="0" i="0">
-                          <a:solidFill>
-                            <a:srgbClr val="1A1A1A"/>
-                          </a:solidFill>
-                          <a:latin typeface="Helvetica Neue"/>
-                        </a:rPr>
-                        <a:t>443.4</a:t>
-                      </a:r>
-                    </a:p>
-                  </a:txBody>
-                  <a:tcPr marL="45720" marR="45720" marT="18288" marB="18288" anchor="t"/>
-                </a:tc>
-                <a:tc>
-                  <a:txBody>
-                    <a:bodyPr wrap="square"/>
-                    <a:lstStyle/>
-                    <a:p>
-                      <a:r>
-                        <a:rPr sz="900" b="0" i="0">
-                          <a:solidFill>
-                            <a:srgbClr val="1A1A1A"/>
-                          </a:solidFill>
-                          <a:latin typeface="Helvetica Neue"/>
-                        </a:rPr>
-                        <a:t>Swin-Unet: Unet-like Pure Transformer for Medical Image Segmentation (2021)</a:t>
-                      </a:r>
-                    </a:p>
-                  </a:txBody>
-                  <a:tcPr marL="45720" marR="45720" marT="18288" marB="18288" anchor="t"/>
-                </a:tc>
-                <a:tc>
-                  <a:txBody>
-                    <a:bodyPr wrap="square"/>
-                    <a:lstStyle/>
-                    <a:p>
-                      <a:r>
-                        <a:rPr sz="900" b="0" i="0">
-                          <a:solidFill>
-                            <a:srgbClr val="1A1A1A"/>
-                          </a:solidFill>
-                          <a:latin typeface="Helvetica Neue"/>
-                        </a:rPr>
-                        <a:t>ECCV Workshops</a:t>
+                        <a:t>10,389</a:t>
+                      </a:r>
+                    </a:p>
+                  </a:txBody>
+                  <a:tcPr marL="45720" marR="45720" marT="18288" marB="18288" anchor="t"/>
+                </a:tc>
+                <a:tc>
+                  <a:txBody>
+                    <a:bodyPr wrap="square"/>
+                    <a:lstStyle/>
+                    <a:p>
+                      <a:pPr algn="r"/>
+                      <a:r>
+                        <a:rPr sz="900" b="0" i="0">
+                          <a:solidFill>
+                            <a:srgbClr val="1A1A1A"/>
+                          </a:solidFill>
+                          <a:latin typeface="Helvetica Neue"/>
+                        </a:rPr>
+                        <a:t>219.2</a:t>
+                      </a:r>
+                    </a:p>
+                  </a:txBody>
+                  <a:tcPr marL="45720" marR="45720" marT="18288" marB="18288" anchor="t"/>
+                </a:tc>
+                <a:tc>
+                  <a:txBody>
+                    <a:bodyPr wrap="square"/>
+                    <a:lstStyle/>
+                    <a:p>
+                      <a:r>
+                        <a:rPr sz="900" b="0" i="0">
+                          <a:solidFill>
+                            <a:srgbClr val="1A1A1A"/>
+                          </a:solidFill>
+                          <a:latin typeface="Helvetica Neue"/>
+                        </a:rPr>
+                        <a:t>nnU-Net: a self-configuring method for deep learning-based biomedical image segmentation (2020)</a:t>
+                      </a:r>
+                    </a:p>
+                  </a:txBody>
+                  <a:tcPr marL="45720" marR="45720" marT="18288" marB="18288" anchor="t"/>
+                </a:tc>
+                <a:tc>
+                  <a:txBody>
+                    <a:bodyPr wrap="square"/>
+                    <a:lstStyle/>
+                    <a:p>
+                      <a:r>
+                        <a:rPr sz="900" b="0" i="0">
+                          <a:solidFill>
+                            <a:srgbClr val="1A1A1A"/>
+                          </a:solidFill>
+                          <a:latin typeface="Helvetica Neue"/>
+                        </a:rPr>
+                        <a:t>Nature Methods</a:t>
+                      </a:r>
+                    </a:p>
+                  </a:txBody>
+                  <a:tcPr marL="45720" marR="45720" marT="18288" marB="18288" anchor="t"/>
+                </a:tc>
+                <a:tc>
+                  <a:txBody>
+                    <a:bodyPr wrap="square"/>
+                    <a:lstStyle/>
+                    <a:p>
+                      <a:r>
+                        <a:rPr sz="900" b="0" i="0">
+                          <a:solidFill>
+                            <a:srgbClr val="1A1A1A"/>
+                          </a:solidFill>
+                          <a:latin typeface="Helvetica Neue"/>
+                        </a:rPr>
+                        <a:t>general (any organ or lesion)</a:t>
                       </a:r>
                     </a:p>
                   </a:txBody>
@@ -46324,6 +47623,257 @@
                           <a:latin typeface="Helvetica Neue"/>
                         </a:rPr>
                         <a:t>segmentation</a:t>
+                      </a:r>
+                      <a:r>
+                        <a:rPr sz="900" b="0" i="0">
+                          <a:solidFill>
+                            <a:srgbClr val="1A1A1A"/>
+                          </a:solidFill>
+                          <a:latin typeface="Helvetica Neue"/>
+                        </a:rPr>
+                        <a:t>: Can one self-configuring method segment any organ or lesion without hand tuning? (nnU-Net)</a:t>
+                      </a:r>
+                    </a:p>
+                  </a:txBody>
+                  <a:tcPr marL="45720" marR="45720" marT="18288" marB="18288" anchor="t"/>
+                </a:tc>
+              </a:tr>
+              <a:tr h="466344">
+                <a:tc>
+                  <a:txBody>
+                    <a:bodyPr wrap="square"/>
+                    <a:lstStyle/>
+                    <a:p>
+                      <a:pPr algn="r"/>
+                      <a:r>
+                        <a:rPr sz="900" b="0" i="0">
+                          <a:solidFill>
+                            <a:srgbClr val="1A1A1A"/>
+                          </a:solidFill>
+                          <a:latin typeface="Helvetica Neue"/>
+                        </a:rPr>
+                        <a:t>2,036</a:t>
+                      </a:r>
+                    </a:p>
+                  </a:txBody>
+                  <a:tcPr marL="45720" marR="45720" marT="18288" marB="18288" anchor="t"/>
+                </a:tc>
+                <a:tc>
+                  <a:txBody>
+                    <a:bodyPr wrap="square"/>
+                    <a:lstStyle/>
+                    <a:p>
+                      <a:pPr algn="r"/>
+                      <a:r>
+                        <a:rPr sz="900" b="0" i="0">
+                          <a:solidFill>
+                            <a:srgbClr val="1A1A1A"/>
+                          </a:solidFill>
+                          <a:latin typeface="Helvetica Neue"/>
+                        </a:rPr>
+                        <a:t>206.6</a:t>
+                      </a:r>
+                    </a:p>
+                  </a:txBody>
+                  <a:tcPr marL="45720" marR="45720" marT="18288" marB="18288" anchor="t"/>
+                </a:tc>
+                <a:tc>
+                  <a:txBody>
+                    <a:bodyPr wrap="square"/>
+                    <a:lstStyle/>
+                    <a:p>
+                      <a:r>
+                        <a:rPr sz="900" b="0" i="0">
+                          <a:solidFill>
+                            <a:srgbClr val="1A1A1A"/>
+                          </a:solidFill>
+                          <a:latin typeface="Helvetica Neue"/>
+                        </a:rPr>
+                        <a:t>Covid-19: automatic detection from X-ray images utilizing transfer learning with convolutional neural networks (2020)</a:t>
+                      </a:r>
+                    </a:p>
+                  </a:txBody>
+                  <a:tcPr marL="45720" marR="45720" marT="18288" marB="18288" anchor="t"/>
+                </a:tc>
+                <a:tc>
+                  <a:txBody>
+                    <a:bodyPr wrap="square"/>
+                    <a:lstStyle/>
+                    <a:p>
+                      <a:r>
+                        <a:rPr sz="900" b="0" i="0">
+                          <a:solidFill>
+                            <a:srgbClr val="1A1A1A"/>
+                          </a:solidFill>
+                          <a:latin typeface="Helvetica Neue"/>
+                        </a:rPr>
+                        <a:t>Physical and Engineering Sciences in Medicine</a:t>
+                      </a:r>
+                    </a:p>
+                  </a:txBody>
+                  <a:tcPr marL="45720" marR="45720" marT="18288" marB="18288" anchor="t"/>
+                </a:tc>
+                <a:tc>
+                  <a:txBody>
+                    <a:bodyPr wrap="square"/>
+                    <a:lstStyle/>
+                    <a:p>
+                      <a:r>
+                        <a:rPr sz="900" b="0" i="0">
+                          <a:solidFill>
+                            <a:srgbClr val="1A1A1A"/>
+                          </a:solidFill>
+                          <a:latin typeface="Helvetica Neue"/>
+                        </a:rPr>
+                        <a:t>COVID-19 / pneumonia</a:t>
+                      </a:r>
+                    </a:p>
+                  </a:txBody>
+                  <a:tcPr marL="45720" marR="45720" marT="18288" marB="18288" anchor="t"/>
+                </a:tc>
+                <a:tc>
+                  <a:txBody>
+                    <a:bodyPr wrap="square"/>
+                    <a:lstStyle/>
+                    <a:p>
+                      <a:r>
+                        <a:rPr sz="900" b="0" i="1">
+                          <a:solidFill>
+                            <a:srgbClr val="1A1A1A"/>
+                          </a:solidFill>
+                          <a:latin typeface="Helvetica Neue"/>
+                        </a:rPr>
+                        <a:t>diagnosis</a:t>
+                      </a:r>
+                      <a:r>
+                        <a:rPr sz="900" b="0" i="0">
+                          <a:solidFill>
+                            <a:srgbClr val="1A1A1A"/>
+                          </a:solidFill>
+                          <a:latin typeface="Helvetica Neue"/>
+                        </a:rPr>
+                        <a:t>: Can CNNs pretrained on everyday photographs detect COVID-19 on chest X-ray from only a few hundred positive cases?</a:t>
+                      </a:r>
+                    </a:p>
+                  </a:txBody>
+                  <a:tcPr marL="45720" marR="45720" marT="18288" marB="18288" anchor="t"/>
+                </a:tc>
+              </a:tr>
+              <a:tr h="466344">
+                <a:tc>
+                  <a:txBody>
+                    <a:bodyPr wrap="square"/>
+                    <a:lstStyle/>
+                    <a:p>
+                      <a:pPr algn="r"/>
+                      <a:r>
+                        <a:rPr sz="900" b="0" i="0">
+                          <a:solidFill>
+                            <a:srgbClr val="1A1A1A"/>
+                          </a:solidFill>
+                          <a:latin typeface="Helvetica Neue"/>
+                        </a:rPr>
+                        <a:t>5,662</a:t>
+                      </a:r>
+                    </a:p>
+                  </a:txBody>
+                  <a:tcPr marL="45720" marR="45720" marT="18288" marB="18288" anchor="t"/>
+                </a:tc>
+                <a:tc>
+                  <a:txBody>
+                    <a:bodyPr wrap="square"/>
+                    <a:lstStyle/>
+                    <a:p>
+                      <a:pPr algn="r"/>
+                      <a:r>
+                        <a:rPr sz="900" b="0" i="0">
+                          <a:solidFill>
+                            <a:srgbClr val="1A1A1A"/>
+                          </a:solidFill>
+                          <a:latin typeface="Helvetica Neue"/>
+                        </a:rPr>
+                        <a:t>156.0</a:t>
+                      </a:r>
+                    </a:p>
+                  </a:txBody>
+                  <a:tcPr marL="45720" marR="45720" marT="18288" marB="18288" anchor="t"/>
+                </a:tc>
+                <a:tc>
+                  <a:txBody>
+                    <a:bodyPr wrap="square"/>
+                    <a:lstStyle/>
+                    <a:p>
+                      <a:r>
+                        <a:rPr sz="900" b="0" i="0">
+                          <a:solidFill>
+                            <a:srgbClr val="1A1A1A"/>
+                          </a:solidFill>
+                          <a:latin typeface="Helvetica Neue"/>
+                        </a:rPr>
+                        <a:t>Computational Radiomics System to Decode the Radiographic Phenotype (2017)</a:t>
+                      </a:r>
+                    </a:p>
+                  </a:txBody>
+                  <a:tcPr marL="45720" marR="45720" marT="18288" marB="18288" anchor="t"/>
+                </a:tc>
+                <a:tc>
+                  <a:txBody>
+                    <a:bodyPr wrap="square"/>
+                    <a:lstStyle/>
+                    <a:p>
+                      <a:r>
+                        <a:rPr sz="900" b="0" i="0">
+                          <a:solidFill>
+                            <a:srgbClr val="1A1A1A"/>
+                          </a:solidFill>
+                          <a:latin typeface="Helvetica Neue"/>
+                        </a:rPr>
+                        <a:t>Cancer Research</a:t>
+                      </a:r>
+                    </a:p>
+                  </a:txBody>
+                  <a:tcPr marL="45720" marR="45720" marT="18288" marB="18288" anchor="t"/>
+                </a:tc>
+                <a:tc>
+                  <a:txBody>
+                    <a:bodyPr wrap="square"/>
+                    <a:lstStyle/>
+                    <a:p>
+                      <a:r>
+                        <a:rPr sz="900" b="0" i="0">
+                          <a:solidFill>
+                            <a:srgbClr val="1A1A1A"/>
+                          </a:solidFill>
+                          <a:latin typeface="Helvetica Neue"/>
+                        </a:rPr>
+                        <a:t>cancer (any site)</a:t>
+                      </a:r>
+                    </a:p>
+                  </a:txBody>
+                  <a:tcPr marL="45720" marR="45720" marT="18288" marB="18288" anchor="t"/>
+                </a:tc>
+                <a:tc>
+                  <a:txBody>
+                    <a:bodyPr wrap="square"/>
+                    <a:lstStyle/>
+                    <a:p>
+                      <a:r>
+                        <a:rPr sz="900" b="0" i="1">
+                          <a:solidFill>
+                            <a:srgbClr val="1A1A1A"/>
+                          </a:solidFill>
+                          <a:latin typeface="Helvetica Neue"/>
+                        </a:rPr>
+                        <a:t>radiomics</a:t>
+                      </a:r>
+                      <a:r>
+                        <a:rPr sz="900" b="0" i="0">
+                          <a:solidFill>
+                            <a:srgbClr val="1A1A1A"/>
+                          </a:solidFill>
+                          <a:latin typeface="Helvetica Neue"/>
+                        </a:rPr>
+                        <a:t>: Can quantitative image features (shape, intensity, texture) be extracted in a standardized, reproducible way across sites? (PyRadiomics, open source)</a:t>
                       </a:r>
                     </a:p>
                   </a:txBody>
@@ -46344,62 +47894,80 @@
                           </a:solidFill>
                           <a:latin typeface="Helvetica Neue"/>
                         </a:rPr>
-                        <a:t>2,628</a:t>
-                      </a:r>
-                    </a:p>
-                  </a:txBody>
-                  <a:tcPr marL="45720" marR="45720" marT="18288" marB="18288" anchor="t"/>
-                </a:tc>
-                <a:tc>
-                  <a:txBody>
-                    <a:bodyPr wrap="square"/>
-                    <a:lstStyle/>
-                    <a:p>
-                      <a:pPr algn="r"/>
-                      <a:r>
-                        <a:rPr sz="900" b="0" i="0">
-                          <a:solidFill>
-                            <a:srgbClr val="1A1A1A"/>
-                          </a:solidFill>
-                          <a:latin typeface="Helvetica Neue"/>
-                        </a:rPr>
-                        <a:t>288.8</a:t>
-                      </a:r>
-                    </a:p>
-                  </a:txBody>
-                  <a:tcPr marL="45720" marR="45720" marT="18288" marB="18288" anchor="t"/>
-                </a:tc>
-                <a:tc>
-                  <a:txBody>
-                    <a:bodyPr wrap="square"/>
-                    <a:lstStyle/>
-                    <a:p>
-                      <a:r>
-                        <a:rPr sz="900" b="0" i="0">
-                          <a:solidFill>
-                            <a:srgbClr val="1A1A1A"/>
-                          </a:solidFill>
-                          <a:latin typeface="Helvetica Neue"/>
-                        </a:rPr>
-                        <a:t>Swin UNETR: Swin Transformers for Semantic Segmentation of Brain Tumors in MRI Images (2022)</a:t>
-                      </a:r>
-                    </a:p>
-                  </a:txBody>
-                  <a:tcPr marL="45720" marR="45720" marT="18288" marB="18288" anchor="t"/>
-                </a:tc>
-                <a:tc>
-                  <a:txBody>
-                    <a:bodyPr wrap="square"/>
-                    <a:lstStyle/>
-                    <a:p>
-                      <a:r>
-                        <a:rPr sz="900" b="0" i="0">
-                          <a:solidFill>
-                            <a:srgbClr val="1A1A1A"/>
-                          </a:solidFill>
-                          <a:latin typeface="Helvetica Neue"/>
-                        </a:rPr>
-                        <a:t>BrainLes@MICCAI</a:t>
+                        <a:t>2,145</a:t>
+                      </a:r>
+                    </a:p>
+                  </a:txBody>
+                  <a:tcPr marL="45720" marR="45720" marT="18288" marB="18288" anchor="t"/>
+                </a:tc>
+                <a:tc>
+                  <a:txBody>
+                    <a:bodyPr wrap="square"/>
+                    <a:lstStyle/>
+                    <a:p>
+                      <a:pPr algn="r"/>
+                      <a:r>
+                        <a:rPr sz="900" b="0" i="0">
+                          <a:solidFill>
+                            <a:srgbClr val="1A1A1A"/>
+                          </a:solidFill>
+                          <a:latin typeface="Helvetica Neue"/>
+                        </a:rPr>
+                        <a:t>135.7</a:t>
+                      </a:r>
+                    </a:p>
+                  </a:txBody>
+                  <a:tcPr marL="45720" marR="45720" marT="18288" marB="18288" anchor="t"/>
+                </a:tc>
+                <a:tc>
+                  <a:txBody>
+                    <a:bodyPr wrap="square"/>
+                    <a:lstStyle/>
+                    <a:p>
+                      <a:r>
+                        <a:rPr sz="900" b="0" i="0">
+                          <a:solidFill>
+                            <a:srgbClr val="1A1A1A"/>
+                          </a:solidFill>
+                          <a:latin typeface="Helvetica Neue"/>
+                        </a:rPr>
+                        <a:t>MultiResUNet : Rethinking the U-Net Architecture for Multimodal Biomedical Image Segmentation (2019)</a:t>
+                      </a:r>
+                    </a:p>
+                  </a:txBody>
+                  <a:tcPr marL="45720" marR="45720" marT="18288" marB="18288" anchor="t"/>
+                </a:tc>
+                <a:tc>
+                  <a:txBody>
+                    <a:bodyPr wrap="square"/>
+                    <a:lstStyle/>
+                    <a:p>
+                      <a:r>
+                        <a:rPr sz="900" b="0" i="0">
+                          <a:solidFill>
+                            <a:srgbClr val="1A1A1A"/>
+                          </a:solidFill>
+                          <a:latin typeface="Helvetica Neue"/>
+                        </a:rPr>
+                        <a:t>Neural Networks</a:t>
+                      </a:r>
+                    </a:p>
+                  </a:txBody>
+                  <a:tcPr marL="45720" marR="45720" marT="18288" marB="18288" anchor="t"/>
+                </a:tc>
+                <a:tc>
+                  <a:txBody>
+                    <a:bodyPr wrap="square"/>
+                    <a:lstStyle/>
+                    <a:p>
+                      <a:r>
+                        <a:rPr sz="900" b="0" i="0">
+                          <a:solidFill>
+                            <a:srgbClr val="1A1A1A"/>
+                          </a:solidFill>
+                          <a:latin typeface="Helvetica Neue"/>
+                        </a:rPr>
+                        <a:t>general (multiple image types)</a:t>
                       </a:r>
                     </a:p>
                   </a:txBody>
@@ -46419,108 +47987,14 @@
                         </a:rPr>
                         <a:t>segmentation</a:t>
                       </a:r>
-                    </a:p>
-                  </a:txBody>
-                  <a:tcPr marL="45720" marR="45720" marT="18288" marB="18288" anchor="t"/>
-                </a:tc>
-              </a:tr>
-              <a:tr h="329184">
-                <a:tc>
-                  <a:txBody>
-                    <a:bodyPr wrap="square"/>
-                    <a:lstStyle/>
-                    <a:p>
-                      <a:pPr algn="r"/>
-                      <a:r>
-                        <a:rPr sz="900" b="0" i="0">
-                          <a:solidFill>
-                            <a:srgbClr val="1A1A1A"/>
-                          </a:solidFill>
-                          <a:latin typeface="Helvetica Neue"/>
-                        </a:rPr>
-                        <a:t>2,782</a:t>
-                      </a:r>
-                    </a:p>
-                  </a:txBody>
-                  <a:tcPr marL="45720" marR="45720" marT="18288" marB="18288" anchor="t"/>
-                </a:tc>
-                <a:tc>
-                  <a:txBody>
-                    <a:bodyPr wrap="square"/>
-                    <a:lstStyle/>
-                    <a:p>
-                      <a:pPr algn="r"/>
-                      <a:r>
-                        <a:rPr sz="900" b="0" i="0">
-                          <a:solidFill>
-                            <a:srgbClr val="1A1A1A"/>
-                          </a:solidFill>
-                          <a:latin typeface="Helvetica Neue"/>
-                        </a:rPr>
-                        <a:t>262.1</a:t>
-                      </a:r>
-                    </a:p>
-                  </a:txBody>
-                  <a:tcPr marL="45720" marR="45720" marT="18288" marB="18288" anchor="t"/>
-                </a:tc>
-                <a:tc>
-                  <a:txBody>
-                    <a:bodyPr wrap="square"/>
-                    <a:lstStyle/>
-                    <a:p>
-                      <a:r>
-                        <a:rPr sz="900" b="0" i="0">
-                          <a:solidFill>
-                            <a:srgbClr val="1A1A1A"/>
-                          </a:solidFill>
-                          <a:latin typeface="Helvetica Neue"/>
-                        </a:rPr>
-                        <a:t>COVID-Net: a tailored deep convolutional neural network design for detection of COVID-19 cases from chest X-ray images (2020)</a:t>
-                      </a:r>
-                    </a:p>
-                  </a:txBody>
-                  <a:tcPr marL="45720" marR="45720" marT="18288" marB="18288" anchor="t"/>
-                </a:tc>
-                <a:tc>
-                  <a:txBody>
-                    <a:bodyPr wrap="square"/>
-                    <a:lstStyle/>
-                    <a:p>
-                      <a:r>
-                        <a:rPr sz="900" b="0" i="0">
-                          <a:solidFill>
-                            <a:srgbClr val="1A1A1A"/>
-                          </a:solidFill>
-                          <a:latin typeface="Helvetica Neue"/>
-                        </a:rPr>
-                        <a:t>Scientific Reports</a:t>
-                      </a:r>
-                    </a:p>
-                  </a:txBody>
-                  <a:tcPr marL="45720" marR="45720" marT="18288" marB="18288" anchor="t"/>
-                </a:tc>
-                <a:tc>
-                  <a:txBody>
-                    <a:bodyPr wrap="square"/>
-                    <a:lstStyle/>
-                    <a:p>
-                      <a:r>
-                        <a:rPr sz="900" b="0" i="1">
-                          <a:solidFill>
-                            <a:srgbClr val="1A1A1A"/>
-                          </a:solidFill>
-                          <a:latin typeface="Helvetica Neue"/>
-                        </a:rPr>
-                        <a:t>classification</a:t>
-                      </a:r>
-                      <a:r>
-                        <a:rPr sz="900" b="0" i="0">
-                          <a:solidFill>
-                            <a:srgbClr val="1A1A1A"/>
-                          </a:solidFill>
-                          <a:latin typeface="Helvetica Neue"/>
-                        </a:rPr>
-                        <a:t>: Can a CNN detect COVID-19 on chest X-ray? (COVID-Net)</a:t>
+                      <a:r>
+                        <a:rPr sz="900" b="0" i="0">
+                          <a:solidFill>
+                            <a:srgbClr val="1A1A1A"/>
+                          </a:solidFill>
+                          <a:latin typeface="Helvetica Neue"/>
+                        </a:rPr>
+                        <a:t>: Does a redesigned U-Net segment more reliably across five biomedical image types, including brain MRI?</a:t>
                       </a:r>
                     </a:p>
                   </a:txBody>
@@ -46541,62 +48015,80 @@
                           </a:solidFill>
                           <a:latin typeface="Helvetica Neue"/>
                         </a:rPr>
-                        <a:t>3,710</a:t>
-                      </a:r>
-                    </a:p>
-                  </a:txBody>
-                  <a:tcPr marL="45720" marR="45720" marT="18288" marB="18288" anchor="t"/>
-                </a:tc>
-                <a:tc>
-                  <a:txBody>
-                    <a:bodyPr wrap="square"/>
-                    <a:lstStyle/>
-                    <a:p>
-                      <a:pPr algn="r"/>
-                      <a:r>
-                        <a:rPr sz="900" b="0" i="0">
-                          <a:solidFill>
-                            <a:srgbClr val="1A1A1A"/>
-                          </a:solidFill>
-                          <a:latin typeface="Helvetica Neue"/>
-                        </a:rPr>
-                        <a:t>230.9</a:t>
-                      </a:r>
-                    </a:p>
-                  </a:txBody>
-                  <a:tcPr marL="45720" marR="45720" marT="18288" marB="18288" anchor="t"/>
-                </a:tc>
-                <a:tc>
-                  <a:txBody>
-                    <a:bodyPr wrap="square"/>
-                    <a:lstStyle/>
-                    <a:p>
-                      <a:r>
-                        <a:rPr sz="900" b="0" i="0">
-                          <a:solidFill>
-                            <a:srgbClr val="1A1A1A"/>
-                          </a:solidFill>
-                          <a:latin typeface="Helvetica Neue"/>
-                        </a:rPr>
-                        <a:t>ChestX-Ray8: Hospital-Scale Chest X-Ray Database and Benchmarks on Weakly-Supervised Classification and Localization of Common Thorax Diseases (2017)</a:t>
-                      </a:r>
-                    </a:p>
-                  </a:txBody>
-                  <a:tcPr marL="45720" marR="45720" marT="18288" marB="18288" anchor="t"/>
-                </a:tc>
-                <a:tc>
-                  <a:txBody>
-                    <a:bodyPr wrap="square"/>
-                    <a:lstStyle/>
-                    <a:p>
-                      <a:r>
-                        <a:rPr sz="900" b="0" i="0">
-                          <a:solidFill>
-                            <a:srgbClr val="1A1A1A"/>
-                          </a:solidFill>
-                          <a:latin typeface="Helvetica Neue"/>
-                        </a:rPr>
-                        <a:t>Computer Vision and Pattern Recognition</a:t>
+                        <a:t>2,126</a:t>
+                      </a:r>
+                    </a:p>
+                  </a:txBody>
+                  <a:tcPr marL="45720" marR="45720" marT="18288" marB="18288" anchor="t"/>
+                </a:tc>
+                <a:tc>
+                  <a:txBody>
+                    <a:bodyPr wrap="square"/>
+                    <a:lstStyle/>
+                    <a:p>
+                      <a:pPr algn="r"/>
+                      <a:r>
+                        <a:rPr sz="900" b="0" i="0">
+                          <a:solidFill>
+                            <a:srgbClr val="1A1A1A"/>
+                          </a:solidFill>
+                          <a:latin typeface="Helvetica Neue"/>
+                        </a:rPr>
+                        <a:t>119.7</a:t>
+                      </a:r>
+                    </a:p>
+                  </a:txBody>
+                  <a:tcPr marL="45720" marR="45720" marT="18288" marB="18288" anchor="t"/>
+                </a:tc>
+                <a:tc>
+                  <a:txBody>
+                    <a:bodyPr wrap="square"/>
+                    <a:lstStyle/>
+                    <a:p>
+                      <a:r>
+                        <a:rPr sz="900" b="0" i="0">
+                          <a:solidFill>
+                            <a:srgbClr val="1A1A1A"/>
+                          </a:solidFill>
+                          <a:latin typeface="Helvetica Neue"/>
+                        </a:rPr>
+                        <a:t>CE-Net: Context Encoder Network for 2D Medical Image Segmentation (2019)</a:t>
+                      </a:r>
+                    </a:p>
+                  </a:txBody>
+                  <a:tcPr marL="45720" marR="45720" marT="18288" marB="18288" anchor="t"/>
+                </a:tc>
+                <a:tc>
+                  <a:txBody>
+                    <a:bodyPr wrap="square"/>
+                    <a:lstStyle/>
+                    <a:p>
+                      <a:r>
+                        <a:rPr sz="900" b="0" i="0">
+                          <a:solidFill>
+                            <a:srgbClr val="1A1A1A"/>
+                          </a:solidFill>
+                          <a:latin typeface="Helvetica Neue"/>
+                        </a:rPr>
+                        <a:t>IEEE Transactions on Medical Imaging</a:t>
+                      </a:r>
+                    </a:p>
+                  </a:txBody>
+                  <a:tcPr marL="45720" marR="45720" marT="18288" marB="18288" anchor="t"/>
+                </a:tc>
+                <a:tc>
+                  <a:txBody>
+                    <a:bodyPr wrap="square"/>
+                    <a:lstStyle/>
+                    <a:p>
+                      <a:r>
+                        <a:rPr sz="900" b="0" i="0">
+                          <a:solidFill>
+                            <a:srgbClr val="1A1A1A"/>
+                          </a:solidFill>
+                          <a:latin typeface="Helvetica Neue"/>
+                        </a:rPr>
+                        <a:t>general (2D images: lung CT, retina)</a:t>
                       </a:r>
                     </a:p>
                   </a:txBody>
@@ -46614,83 +48106,110 @@
                           </a:solidFill>
                           <a:latin typeface="Helvetica Neue"/>
                         </a:rPr>
-                        <a:t>classification</a:t>
+                        <a:t>segmentation</a:t>
+                      </a:r>
+                      <a:r>
+                        <a:rPr sz="900" b="0" i="0">
+                          <a:solidFill>
+                            <a:srgbClr val="1A1A1A"/>
+                          </a:solidFill>
+                          <a:latin typeface="Helvetica Neue"/>
+                        </a:rPr>
+                        <a:t>: Does adding a context-encoder module to a U-Net improve 2D segmentation of structures such as the lungs on CT and the optic disc and vessels on retinal images?</a:t>
                       </a:r>
                     </a:p>
                   </a:txBody>
                   <a:tcPr marL="45720" marR="45720" marT="18288" marB="18288" anchor="t"/>
                 </a:tc>
               </a:tr>
-              <a:tr h="329184">
-                <a:tc>
-                  <a:txBody>
-                    <a:bodyPr wrap="square"/>
-                    <a:lstStyle/>
-                    <a:p>
-                      <a:pPr algn="r"/>
-                      <a:r>
-                        <a:rPr sz="900" b="0" i="0">
-                          <a:solidFill>
-                            <a:srgbClr val="1A1A1A"/>
-                          </a:solidFill>
-                          <a:latin typeface="Helvetica Neue"/>
-                        </a:rPr>
-                        <a:t>10,389</a:t>
-                      </a:r>
-                    </a:p>
-                  </a:txBody>
-                  <a:tcPr marL="45720" marR="45720" marT="18288" marB="18288" anchor="t"/>
-                </a:tc>
-                <a:tc>
-                  <a:txBody>
-                    <a:bodyPr wrap="square"/>
-                    <a:lstStyle/>
-                    <a:p>
-                      <a:pPr algn="r"/>
-                      <a:r>
-                        <a:rPr sz="900" b="0" i="0">
-                          <a:solidFill>
-                            <a:srgbClr val="1A1A1A"/>
-                          </a:solidFill>
-                          <a:latin typeface="Helvetica Neue"/>
-                        </a:rPr>
-                        <a:t>219.2</a:t>
-                      </a:r>
-                    </a:p>
-                  </a:txBody>
-                  <a:tcPr marL="45720" marR="45720" marT="18288" marB="18288" anchor="t"/>
-                </a:tc>
-                <a:tc>
-                  <a:txBody>
-                    <a:bodyPr wrap="square"/>
-                    <a:lstStyle/>
-                    <a:p>
-                      <a:r>
-                        <a:rPr sz="900" b="0" i="0">
-                          <a:solidFill>
-                            <a:srgbClr val="1A1A1A"/>
-                          </a:solidFill>
-                          <a:latin typeface="Helvetica Neue"/>
-                        </a:rPr>
-                        <a:t>nnU-Net: a self-configuring method for deep learning-based biomedical image segmentation (2020)</a:t>
-                      </a:r>
-                    </a:p>
-                  </a:txBody>
-                  <a:tcPr marL="45720" marR="45720" marT="18288" marB="18288" anchor="t"/>
-                </a:tc>
-                <a:tc>
-                  <a:txBody>
-                    <a:bodyPr wrap="square"/>
-                    <a:lstStyle/>
-                    <a:p>
-                      <a:r>
-                        <a:rPr sz="900" b="0" i="0">
-                          <a:solidFill>
-                            <a:srgbClr val="1A1A1A"/>
-                          </a:solidFill>
-                          <a:latin typeface="Helvetica Neue"/>
-                        </a:rPr>
-                        <a:t>Nature Methods</a:t>
+              <a:tr h="466344">
+                <a:tc>
+                  <a:txBody>
+                    <a:bodyPr wrap="square"/>
+                    <a:lstStyle/>
+                    <a:p>
+                      <a:pPr algn="r"/>
+                      <a:r>
+                        <a:rPr sz="900" b="0" i="0">
+                          <a:solidFill>
+                            <a:srgbClr val="1A1A1A"/>
+                          </a:solidFill>
+                          <a:latin typeface="Helvetica Neue"/>
+                        </a:rPr>
+                        <a:t>9,731</a:t>
+                      </a:r>
+                    </a:p>
+                  </a:txBody>
+                  <a:tcPr marL="45720" marR="45720" marT="18288" marB="18288" anchor="t"/>
+                </a:tc>
+                <a:tc>
+                  <a:txBody>
+                    <a:bodyPr wrap="square"/>
+                    <a:lstStyle/>
+                    <a:p>
+                      <a:pPr algn="r"/>
+                      <a:r>
+                        <a:rPr sz="900" b="0" i="0">
+                          <a:solidFill>
+                            <a:srgbClr val="1A1A1A"/>
+                          </a:solidFill>
+                          <a:latin typeface="Helvetica Neue"/>
+                        </a:rPr>
+                        <a:t>86.7</a:t>
+                      </a:r>
+                    </a:p>
+                  </a:txBody>
+                  <a:tcPr marL="45720" marR="45720" marT="18288" marB="18288" anchor="t"/>
+                </a:tc>
+                <a:tc>
+                  <a:txBody>
+                    <a:bodyPr wrap="square"/>
+                    <a:lstStyle/>
+                    <a:p>
+                      <a:r>
+                        <a:rPr sz="900" b="0" i="0">
+                          <a:solidFill>
+                            <a:srgbClr val="1A1A1A"/>
+                          </a:solidFill>
+                          <a:latin typeface="Helvetica Neue"/>
+                        </a:rPr>
+                        <a:t>UNet++: A Nested U-Net Architecture for Medical Image Segmentation (2018)</a:t>
+                      </a:r>
+                    </a:p>
+                  </a:txBody>
+                  <a:tcPr marL="45720" marR="45720" marT="18288" marB="18288" anchor="t"/>
+                </a:tc>
+                <a:tc>
+                  <a:txBody>
+                    <a:bodyPr wrap="square"/>
+                    <a:lstStyle/>
+                    <a:p>
+                      <a:r>
+                        <a:rPr sz="900" b="0" i="0">
+                          <a:solidFill>
+                            <a:srgbClr val="1A1A1A"/>
+                          </a:solidFill>
+                          <a:latin typeface="Helvetica Neue"/>
+                        </a:rPr>
+                        <a:t>DLMIA/ML-CDS@MICCAI</a:t>
+                      </a:r>
+                    </a:p>
+                  </a:txBody>
+                  <a:tcPr marL="45720" marR="45720" marT="18288" marB="18288" anchor="t"/>
+                </a:tc>
+                <a:tc>
+                  <a:txBody>
+                    <a:bodyPr wrap="square"/>
+                    <a:lstStyle/>
+                    <a:p>
+                      <a:r>
+                        <a:rPr sz="900" b="0" i="0">
+                          <a:solidFill>
+                            <a:srgbClr val="1A1A1A"/>
+                          </a:solidFill>
+                          <a:latin typeface="Helvetica Neue"/>
+                        </a:rPr>
+                        <a:t>general (nodule, liver, polyp, nuclei)</a:t>
                       </a:r>
                     </a:p>
                   </a:txBody>
@@ -46717,513 +48236,7 @@
                           </a:solidFill>
                           <a:latin typeface="Helvetica Neue"/>
                         </a:rPr>
-                        <a:t>: Can one self-configuring method segment any organ or lesion without hand tuning? (nnU-Net)</a:t>
-                      </a:r>
-                    </a:p>
-                  </a:txBody>
-                  <a:tcPr marL="45720" marR="45720" marT="18288" marB="18288" anchor="t"/>
-                </a:tc>
-              </a:tr>
-              <a:tr h="329184">
-                <a:tc>
-                  <a:txBody>
-                    <a:bodyPr wrap="square"/>
-                    <a:lstStyle/>
-                    <a:p>
-                      <a:pPr algn="r"/>
-                      <a:r>
-                        <a:rPr sz="900" b="0" i="0">
-                          <a:solidFill>
-                            <a:srgbClr val="1A1A1A"/>
-                          </a:solidFill>
-                          <a:latin typeface="Helvetica Neue"/>
-                        </a:rPr>
-                        <a:t>2,036</a:t>
-                      </a:r>
-                    </a:p>
-                  </a:txBody>
-                  <a:tcPr marL="45720" marR="45720" marT="18288" marB="18288" anchor="t"/>
-                </a:tc>
-                <a:tc>
-                  <a:txBody>
-                    <a:bodyPr wrap="square"/>
-                    <a:lstStyle/>
-                    <a:p>
-                      <a:pPr algn="r"/>
-                      <a:r>
-                        <a:rPr sz="900" b="0" i="0">
-                          <a:solidFill>
-                            <a:srgbClr val="1A1A1A"/>
-                          </a:solidFill>
-                          <a:latin typeface="Helvetica Neue"/>
-                        </a:rPr>
-                        <a:t>206.6</a:t>
-                      </a:r>
-                    </a:p>
-                  </a:txBody>
-                  <a:tcPr marL="45720" marR="45720" marT="18288" marB="18288" anchor="t"/>
-                </a:tc>
-                <a:tc>
-                  <a:txBody>
-                    <a:bodyPr wrap="square"/>
-                    <a:lstStyle/>
-                    <a:p>
-                      <a:r>
-                        <a:rPr sz="900" b="0" i="0">
-                          <a:solidFill>
-                            <a:srgbClr val="1A1A1A"/>
-                          </a:solidFill>
-                          <a:latin typeface="Helvetica Neue"/>
-                        </a:rPr>
-                        <a:t>Covid-19: automatic detection from X-ray images utilizing transfer learning with convolutional neural networks (2020)</a:t>
-                      </a:r>
-                    </a:p>
-                  </a:txBody>
-                  <a:tcPr marL="45720" marR="45720" marT="18288" marB="18288" anchor="t"/>
-                </a:tc>
-                <a:tc>
-                  <a:txBody>
-                    <a:bodyPr wrap="square"/>
-                    <a:lstStyle/>
-                    <a:p>
-                      <a:r>
-                        <a:rPr sz="900" b="0" i="0">
-                          <a:solidFill>
-                            <a:srgbClr val="1A1A1A"/>
-                          </a:solidFill>
-                          <a:latin typeface="Helvetica Neue"/>
-                        </a:rPr>
-                        <a:t>Physical and Engineering Sciences in Medicine</a:t>
-                      </a:r>
-                    </a:p>
-                  </a:txBody>
-                  <a:tcPr marL="45720" marR="45720" marT="18288" marB="18288" anchor="t"/>
-                </a:tc>
-                <a:tc>
-                  <a:txBody>
-                    <a:bodyPr wrap="square"/>
-                    <a:lstStyle/>
-                    <a:p>
-                      <a:r>
-                        <a:rPr sz="900" b="0" i="1">
-                          <a:solidFill>
-                            <a:srgbClr val="1A1A1A"/>
-                          </a:solidFill>
-                          <a:latin typeface="Helvetica Neue"/>
-                        </a:rPr>
-                        <a:t>classification</a:t>
-                      </a:r>
-                      <a:r>
-                        <a:rPr sz="900" b="0" i="0">
-                          <a:solidFill>
-                            <a:srgbClr val="1A1A1A"/>
-                          </a:solidFill>
-                          <a:latin typeface="Helvetica Neue"/>
-                        </a:rPr>
-                        <a:t>: Can transfer learning detect COVID-19 on X-ray with small data?</a:t>
-                      </a:r>
-                    </a:p>
-                  </a:txBody>
-                  <a:tcPr marL="45720" marR="45720" marT="18288" marB="18288" anchor="t"/>
-                </a:tc>
-              </a:tr>
-              <a:tr h="329184">
-                <a:tc>
-                  <a:txBody>
-                    <a:bodyPr wrap="square"/>
-                    <a:lstStyle/>
-                    <a:p>
-                      <a:pPr algn="r"/>
-                      <a:r>
-                        <a:rPr sz="900" b="0" i="0">
-                          <a:solidFill>
-                            <a:srgbClr val="1A1A1A"/>
-                          </a:solidFill>
-                          <a:latin typeface="Helvetica Neue"/>
-                        </a:rPr>
-                        <a:t>5,662</a:t>
-                      </a:r>
-                    </a:p>
-                  </a:txBody>
-                  <a:tcPr marL="45720" marR="45720" marT="18288" marB="18288" anchor="t"/>
-                </a:tc>
-                <a:tc>
-                  <a:txBody>
-                    <a:bodyPr wrap="square"/>
-                    <a:lstStyle/>
-                    <a:p>
-                      <a:pPr algn="r"/>
-                      <a:r>
-                        <a:rPr sz="900" b="0" i="0">
-                          <a:solidFill>
-                            <a:srgbClr val="1A1A1A"/>
-                          </a:solidFill>
-                          <a:latin typeface="Helvetica Neue"/>
-                        </a:rPr>
-                        <a:t>156.0</a:t>
-                      </a:r>
-                    </a:p>
-                  </a:txBody>
-                  <a:tcPr marL="45720" marR="45720" marT="18288" marB="18288" anchor="t"/>
-                </a:tc>
-                <a:tc>
-                  <a:txBody>
-                    <a:bodyPr wrap="square"/>
-                    <a:lstStyle/>
-                    <a:p>
-                      <a:r>
-                        <a:rPr sz="900" b="0" i="0">
-                          <a:solidFill>
-                            <a:srgbClr val="1A1A1A"/>
-                          </a:solidFill>
-                          <a:latin typeface="Helvetica Neue"/>
-                        </a:rPr>
-                        <a:t>Computational Radiomics System to Decode the Radiographic Phenotype (2017)</a:t>
-                      </a:r>
-                    </a:p>
-                  </a:txBody>
-                  <a:tcPr marL="45720" marR="45720" marT="18288" marB="18288" anchor="t"/>
-                </a:tc>
-                <a:tc>
-                  <a:txBody>
-                    <a:bodyPr wrap="square"/>
-                    <a:lstStyle/>
-                    <a:p>
-                      <a:r>
-                        <a:rPr sz="900" b="0" i="0">
-                          <a:solidFill>
-                            <a:srgbClr val="1A1A1A"/>
-                          </a:solidFill>
-                          <a:latin typeface="Helvetica Neue"/>
-                        </a:rPr>
-                        <a:t>Cancer Research</a:t>
-                      </a:r>
-                    </a:p>
-                  </a:txBody>
-                  <a:tcPr marL="45720" marR="45720" marT="18288" marB="18288" anchor="t"/>
-                </a:tc>
-                <a:tc>
-                  <a:txBody>
-                    <a:bodyPr wrap="square"/>
-                    <a:lstStyle/>
-                    <a:p>
-                      <a:r>
-                        <a:rPr sz="900" b="0" i="1">
-                          <a:solidFill>
-                            <a:srgbClr val="1A1A1A"/>
-                          </a:solidFill>
-                          <a:latin typeface="Helvetica Neue"/>
-                        </a:rPr>
-                        <a:t>radiomics</a:t>
-                      </a:r>
-                      <a:r>
-                        <a:rPr sz="900" b="0" i="0">
-                          <a:solidFill>
-                            <a:srgbClr val="1A1A1A"/>
-                          </a:solidFill>
-                          <a:latin typeface="Helvetica Neue"/>
-                        </a:rPr>
-                        <a:t>: Can standardized image features (radiomics) be extracted reproducibly? (PyRadiomics)</a:t>
-                      </a:r>
-                    </a:p>
-                  </a:txBody>
-                  <a:tcPr marL="45720" marR="45720" marT="18288" marB="18288" anchor="t"/>
-                </a:tc>
-              </a:tr>
-              <a:tr h="329184">
-                <a:tc>
-                  <a:txBody>
-                    <a:bodyPr wrap="square"/>
-                    <a:lstStyle/>
-                    <a:p>
-                      <a:pPr algn="r"/>
-                      <a:r>
-                        <a:rPr sz="900" b="0" i="0">
-                          <a:solidFill>
-                            <a:srgbClr val="1A1A1A"/>
-                          </a:solidFill>
-                          <a:latin typeface="Helvetica Neue"/>
-                        </a:rPr>
-                        <a:t>2,145</a:t>
-                      </a:r>
-                    </a:p>
-                  </a:txBody>
-                  <a:tcPr marL="45720" marR="45720" marT="18288" marB="18288" anchor="t"/>
-                </a:tc>
-                <a:tc>
-                  <a:txBody>
-                    <a:bodyPr wrap="square"/>
-                    <a:lstStyle/>
-                    <a:p>
-                      <a:pPr algn="r"/>
-                      <a:r>
-                        <a:rPr sz="900" b="0" i="0">
-                          <a:solidFill>
-                            <a:srgbClr val="1A1A1A"/>
-                          </a:solidFill>
-                          <a:latin typeface="Helvetica Neue"/>
-                        </a:rPr>
-                        <a:t>135.7</a:t>
-                      </a:r>
-                    </a:p>
-                  </a:txBody>
-                  <a:tcPr marL="45720" marR="45720" marT="18288" marB="18288" anchor="t"/>
-                </a:tc>
-                <a:tc>
-                  <a:txBody>
-                    <a:bodyPr wrap="square"/>
-                    <a:lstStyle/>
-                    <a:p>
-                      <a:r>
-                        <a:rPr sz="900" b="0" i="0">
-                          <a:solidFill>
-                            <a:srgbClr val="1A1A1A"/>
-                          </a:solidFill>
-                          <a:latin typeface="Helvetica Neue"/>
-                        </a:rPr>
-                        <a:t>MultiResUNet : Rethinking the U-Net Architecture for Multimodal Biomedical Image Segmentation (2019)</a:t>
-                      </a:r>
-                    </a:p>
-                  </a:txBody>
-                  <a:tcPr marL="45720" marR="45720" marT="18288" marB="18288" anchor="t"/>
-                </a:tc>
-                <a:tc>
-                  <a:txBody>
-                    <a:bodyPr wrap="square"/>
-                    <a:lstStyle/>
-                    <a:p>
-                      <a:r>
-                        <a:rPr sz="900" b="0" i="0">
-                          <a:solidFill>
-                            <a:srgbClr val="1A1A1A"/>
-                          </a:solidFill>
-                          <a:latin typeface="Helvetica Neue"/>
-                        </a:rPr>
-                        <a:t>Neural Networks</a:t>
-                      </a:r>
-                    </a:p>
-                  </a:txBody>
-                  <a:tcPr marL="45720" marR="45720" marT="18288" marB="18288" anchor="t"/>
-                </a:tc>
-                <a:tc>
-                  <a:txBody>
-                    <a:bodyPr wrap="square"/>
-                    <a:lstStyle/>
-                    <a:p>
-                      <a:r>
-                        <a:rPr sz="900" b="0" i="1">
-                          <a:solidFill>
-                            <a:srgbClr val="1A1A1A"/>
-                          </a:solidFill>
-                          <a:latin typeface="Helvetica Neue"/>
-                        </a:rPr>
-                        <a:t>segmentation</a:t>
-                      </a:r>
-                      <a:r>
-                        <a:rPr sz="900" b="0" i="0">
-                          <a:solidFill>
-                            <a:srgbClr val="1A1A1A"/>
-                          </a:solidFill>
-                          <a:latin typeface="Helvetica Neue"/>
-                        </a:rPr>
-                        <a:t>: Architecture variant of U-Net for multimodal segmentation</a:t>
-                      </a:r>
-                    </a:p>
-                  </a:txBody>
-                  <a:tcPr marL="45720" marR="45720" marT="18288" marB="18288" anchor="t"/>
-                </a:tc>
-              </a:tr>
-              <a:tr h="329184">
-                <a:tc>
-                  <a:txBody>
-                    <a:bodyPr wrap="square"/>
-                    <a:lstStyle/>
-                    <a:p>
-                      <a:pPr algn="r"/>
-                      <a:r>
-                        <a:rPr sz="900" b="0" i="0">
-                          <a:solidFill>
-                            <a:srgbClr val="1A1A1A"/>
-                          </a:solidFill>
-                          <a:latin typeface="Helvetica Neue"/>
-                        </a:rPr>
-                        <a:t>2,126</a:t>
-                      </a:r>
-                    </a:p>
-                  </a:txBody>
-                  <a:tcPr marL="45720" marR="45720" marT="18288" marB="18288" anchor="t"/>
-                </a:tc>
-                <a:tc>
-                  <a:txBody>
-                    <a:bodyPr wrap="square"/>
-                    <a:lstStyle/>
-                    <a:p>
-                      <a:pPr algn="r"/>
-                      <a:r>
-                        <a:rPr sz="900" b="0" i="0">
-                          <a:solidFill>
-                            <a:srgbClr val="1A1A1A"/>
-                          </a:solidFill>
-                          <a:latin typeface="Helvetica Neue"/>
-                        </a:rPr>
-                        <a:t>119.7</a:t>
-                      </a:r>
-                    </a:p>
-                  </a:txBody>
-                  <a:tcPr marL="45720" marR="45720" marT="18288" marB="18288" anchor="t"/>
-                </a:tc>
-                <a:tc>
-                  <a:txBody>
-                    <a:bodyPr wrap="square"/>
-                    <a:lstStyle/>
-                    <a:p>
-                      <a:r>
-                        <a:rPr sz="900" b="0" i="0">
-                          <a:solidFill>
-                            <a:srgbClr val="1A1A1A"/>
-                          </a:solidFill>
-                          <a:latin typeface="Helvetica Neue"/>
-                        </a:rPr>
-                        <a:t>CE-Net: Context Encoder Network for 2D Medical Image Segmentation (2019)</a:t>
-                      </a:r>
-                    </a:p>
-                  </a:txBody>
-                  <a:tcPr marL="45720" marR="45720" marT="18288" marB="18288" anchor="t"/>
-                </a:tc>
-                <a:tc>
-                  <a:txBody>
-                    <a:bodyPr wrap="square"/>
-                    <a:lstStyle/>
-                    <a:p>
-                      <a:r>
-                        <a:rPr sz="900" b="0" i="0">
-                          <a:solidFill>
-                            <a:srgbClr val="1A1A1A"/>
-                          </a:solidFill>
-                          <a:latin typeface="Helvetica Neue"/>
-                        </a:rPr>
-                        <a:t>IEEE Transactions on Medical Imaging</a:t>
-                      </a:r>
-                    </a:p>
-                  </a:txBody>
-                  <a:tcPr marL="45720" marR="45720" marT="18288" marB="18288" anchor="t"/>
-                </a:tc>
-                <a:tc>
-                  <a:txBody>
-                    <a:bodyPr wrap="square"/>
-                    <a:lstStyle/>
-                    <a:p>
-                      <a:r>
-                        <a:rPr sz="900" b="0" i="1">
-                          <a:solidFill>
-                            <a:srgbClr val="1A1A1A"/>
-                          </a:solidFill>
-                          <a:latin typeface="Helvetica Neue"/>
-                        </a:rPr>
-                        <a:t>segmentation</a:t>
-                      </a:r>
-                      <a:r>
-                        <a:rPr sz="900" b="0" i="0">
-                          <a:solidFill>
-                            <a:srgbClr val="1A1A1A"/>
-                          </a:solidFill>
-                          <a:latin typeface="Helvetica Neue"/>
-                        </a:rPr>
-                        <a:t>: Architecture variant for 2D medical image segmentation (CE-Net)</a:t>
-                      </a:r>
-                    </a:p>
-                  </a:txBody>
-                  <a:tcPr marL="45720" marR="45720" marT="18288" marB="18288" anchor="t"/>
-                </a:tc>
-              </a:tr>
-              <a:tr h="192024">
-                <a:tc>
-                  <a:txBody>
-                    <a:bodyPr wrap="square"/>
-                    <a:lstStyle/>
-                    <a:p>
-                      <a:pPr algn="r"/>
-                      <a:r>
-                        <a:rPr sz="900" b="0" i="0">
-                          <a:solidFill>
-                            <a:srgbClr val="1A1A1A"/>
-                          </a:solidFill>
-                          <a:latin typeface="Helvetica Neue"/>
-                        </a:rPr>
-                        <a:t>9,731</a:t>
-                      </a:r>
-                    </a:p>
-                  </a:txBody>
-                  <a:tcPr marL="45720" marR="45720" marT="18288" marB="18288" anchor="t"/>
-                </a:tc>
-                <a:tc>
-                  <a:txBody>
-                    <a:bodyPr wrap="square"/>
-                    <a:lstStyle/>
-                    <a:p>
-                      <a:pPr algn="r"/>
-                      <a:r>
-                        <a:rPr sz="900" b="0" i="0">
-                          <a:solidFill>
-                            <a:srgbClr val="1A1A1A"/>
-                          </a:solidFill>
-                          <a:latin typeface="Helvetica Neue"/>
-                        </a:rPr>
-                        <a:t>86.7</a:t>
-                      </a:r>
-                    </a:p>
-                  </a:txBody>
-                  <a:tcPr marL="45720" marR="45720" marT="18288" marB="18288" anchor="t"/>
-                </a:tc>
-                <a:tc>
-                  <a:txBody>
-                    <a:bodyPr wrap="square"/>
-                    <a:lstStyle/>
-                    <a:p>
-                      <a:r>
-                        <a:rPr sz="900" b="0" i="0">
-                          <a:solidFill>
-                            <a:srgbClr val="1A1A1A"/>
-                          </a:solidFill>
-                          <a:latin typeface="Helvetica Neue"/>
-                        </a:rPr>
-                        <a:t>UNet++: A Nested U-Net Architecture for Medical Image Segmentation (2018)</a:t>
-                      </a:r>
-                    </a:p>
-                  </a:txBody>
-                  <a:tcPr marL="45720" marR="45720" marT="18288" marB="18288" anchor="t"/>
-                </a:tc>
-                <a:tc>
-                  <a:txBody>
-                    <a:bodyPr wrap="square"/>
-                    <a:lstStyle/>
-                    <a:p>
-                      <a:r>
-                        <a:rPr sz="900" b="0" i="0">
-                          <a:solidFill>
-                            <a:srgbClr val="1A1A1A"/>
-                          </a:solidFill>
-                          <a:latin typeface="Helvetica Neue"/>
-                        </a:rPr>
-                        <a:t>DLMIA/ML-CDS@MICCAI</a:t>
-                      </a:r>
-                    </a:p>
-                  </a:txBody>
-                  <a:tcPr marL="45720" marR="45720" marT="18288" marB="18288" anchor="t"/>
-                </a:tc>
-                <a:tc>
-                  <a:txBody>
-                    <a:bodyPr wrap="square"/>
-                    <a:lstStyle/>
-                    <a:p>
-                      <a:r>
-                        <a:rPr sz="900" b="0" i="1">
-                          <a:solidFill>
-                            <a:srgbClr val="1A1A1A"/>
-                          </a:solidFill>
-                          <a:latin typeface="Helvetica Neue"/>
-                        </a:rPr>
-                        <a:t>segmentation</a:t>
+                        <a:t>: Do nested, redesigned skip connections make U-Net more accurate on lung nodules, liver, colon polyps and cell nuclei?</a:t>
                       </a:r>
                     </a:p>
                   </a:txBody>
@@ -47242,7 +48255,7 @@
         </p:nvSpPr>
         <p:spPr>
           <a:xfrm>
-            <a:off x="411480" y="4434840"/>
+            <a:off x="411480" y="5532120"/>
             <a:ext cx="11368735" cy="268604"/>
           </a:xfrm>
           <a:prstGeom prst="rect">
@@ -47303,7 +48316,7 @@
                 </a:solidFill>
                 <a:latin typeface="Helvetica Neue"/>
               </a:rPr>
-              <a:t>9 / 34</a:t>
+              <a:t>9 / 36</a:t>
             </a:r>
           </a:p>
         </p:txBody>

--- a/slides/pedrad_ai_slides.pptx
+++ b/slides/pedrad_ai_slides.pptx
@@ -71,6 +71,8 @@
     <p:sldId id="319" r:id="rId70"/>
     <p:sldId id="320" r:id="rId71"/>
     <p:sldId id="321" r:id="rId72"/>
+    <p:sldId id="322" r:id="rId73"/>
+    <p:sldId id="323" r:id="rId74"/>
   </p:sldIdLst>
   <p:sldSz cx="12191695" cy="6858000" type="screen4x3"/>
   <p:notesSz cx="6858000" cy="9144000"/>
@@ -3340,7 +3342,7 @@
                 </a:solidFill>
                 <a:latin typeface="Helvetica Neue"/>
               </a:rPr>
-              <a:t>1 / 33</a:t>
+              <a:t>1 / 36</a:t>
             </a:r>
           </a:p>
         </p:txBody>
@@ -15257,7 +15259,7 @@
                 </a:solidFill>
                 <a:latin typeface="Helvetica Neue"/>
               </a:rPr>
-              <a:t>9 / 33</a:t>
+              <a:t>9 / 36</a:t>
             </a:r>
           </a:p>
         </p:txBody>
@@ -15419,7 +15421,7 @@
                 </a:solidFill>
                 <a:latin typeface="Helvetica Neue"/>
               </a:rPr>
-              <a:t>2 / 33</a:t>
+              <a:t>2 / 36</a:t>
             </a:r>
           </a:p>
         </p:txBody>
@@ -15840,7 +15842,7 @@
                 </a:solidFill>
                 <a:latin typeface="Helvetica Neue"/>
               </a:rPr>
-              <a:t>10 / 33</a:t>
+              <a:t>10 / 36</a:t>
             </a:r>
           </a:p>
         </p:txBody>
@@ -17419,7 +17421,7 @@
                 </a:solidFill>
                 <a:latin typeface="Helvetica Neue"/>
               </a:rPr>
-              <a:t>11 / 33</a:t>
+              <a:t>11 / 36</a:t>
             </a:r>
           </a:p>
         </p:txBody>
@@ -17583,7 +17585,7 @@
                 </a:solidFill>
                 <a:latin typeface="Helvetica Neue"/>
               </a:rPr>
-              <a:t>12 / 33</a:t>
+              <a:t>12 / 36</a:t>
             </a:r>
           </a:p>
         </p:txBody>
@@ -22989,7 +22991,7 @@
                 </a:solidFill>
                 <a:latin typeface="Helvetica Neue"/>
               </a:rPr>
-              <a:t>3 / 33</a:t>
+              <a:t>3 / 36</a:t>
             </a:r>
           </a:p>
         </p:txBody>
@@ -29603,7 +29605,7 @@
                 </a:solidFill>
                 <a:latin typeface="Helvetica Neue"/>
               </a:rPr>
-              <a:t>13 / 33</a:t>
+              <a:t>13 / 36</a:t>
             </a:r>
           </a:p>
         </p:txBody>
@@ -29767,7 +29769,7 @@
                 </a:solidFill>
                 <a:latin typeface="Helvetica Neue"/>
               </a:rPr>
-              <a:t>14 / 33</a:t>
+              <a:t>14 / 36</a:t>
             </a:r>
           </a:p>
         </p:txBody>
@@ -36302,7 +36304,7 @@
                 </a:solidFill>
                 <a:latin typeface="Helvetica Neue"/>
               </a:rPr>
-              <a:t>15 / 33</a:t>
+              <a:t>15 / 36</a:t>
             </a:r>
           </a:p>
         </p:txBody>
@@ -36466,7 +36468,7 @@
                 </a:solidFill>
                 <a:latin typeface="Helvetica Neue"/>
               </a:rPr>
-              <a:t>4 / 33</a:t>
+              <a:t>4 / 36</a:t>
             </a:r>
           </a:p>
         </p:txBody>
@@ -36480,7 +36482,7 @@
 </file>
 
 <file path=ppt/slides/slide40.xml><?xml version="1.0" encoding="utf-8"?>
-<p:sld xmlns:a="http://schemas.openxmlformats.org/drawingml/2006/main" xmlns:p="http://schemas.openxmlformats.org/presentationml/2006/main" xmlns:r="http://schemas.openxmlformats.org/officeDocument/2006/relationships" show="0">
+<p:sld xmlns:a="http://schemas.openxmlformats.org/drawingml/2006/main" xmlns:p="http://schemas.openxmlformats.org/presentationml/2006/main" xmlns:r="http://schemas.openxmlformats.org/officeDocument/2006/relationships">
   <p:cSld>
     <p:spTree>
       <p:nvGrpSpPr>
@@ -36536,7 +36538,7 @@
                 </a:solidFill>
                 <a:latin typeface="Helvetica Neue"/>
               </a:rPr>
-              <a:t>Story: a breakthrough designation is not a clearance</a:t>
+              <a:t>DeepEcho receives FDA Breakthrough Device Designation for blind sweep prenatal ultrasound platform</a:t>
             </a:r>
           </a:p>
         </p:txBody>
@@ -36643,7 +36645,7 @@
         <p:spPr>
           <a:xfrm>
             <a:off x="411480" y="1258951"/>
-            <a:ext cx="11368735" cy="2260600"/>
+            <a:ext cx="11368735" cy="1069340"/>
           </a:xfrm>
           <a:prstGeom prst="rect">
             <a:avLst/>
@@ -36663,22 +36665,13 @@
               <a:buChar char="•"/>
             </a:pPr>
             <a:r>
-              <a:rPr sz="1400" b="1" i="0">
+              <a:rPr sz="1400" b="0" i="0">
                 <a:solidFill>
                   <a:srgbClr val="1A1A1A"/>
                 </a:solidFill>
                 <a:latin typeface="Helvetica Neue"/>
               </a:rPr>
-              <a:t>What happened</a:t>
-            </a:r>
-            <a:r>
-              <a:rPr sz="1400" b="0" i="0">
-                <a:solidFill>
-                  <a:srgbClr val="1A1A1A"/>
-                </a:solidFill>
-                <a:latin typeface="Helvetica Neue"/>
-              </a:rPr>
-              <a:t>: the FDA granted </a:t>
+              <a:t>The FDA granted </a:t>
             </a:r>
             <a:r>
               <a:rPr sz="1400" b="1" i="0">
@@ -36707,88 +36700,27 @@
               <a:buChar char="•"/>
             </a:pPr>
             <a:r>
-              <a:rPr sz="1400" b="1" i="0">
+              <a:rPr sz="1400" b="0" i="0">
                 <a:solidFill>
                   <a:srgbClr val="1A1A1A"/>
                 </a:solidFill>
                 <a:latin typeface="Helvetica Neue"/>
               </a:rPr>
-              <a:t>What it does</a:t>
-            </a:r>
-            <a:r>
-              <a:rPr sz="1400" b="0" i="0">
-                <a:solidFill>
-                  <a:srgbClr val="1A1A1A"/>
-                </a:solidFill>
-                <a:latin typeface="Helvetica Neue"/>
-              </a:rPr>
-              <a:t>: from B-mode sweeps rather than expert-acquired standard planes, it automates fetal presentation, placental location and gestational age — the measurements that decide whether a pregnancy needs referral.</a:t>
-            </a:r>
-          </a:p>
-          <a:p>
-            <a:pPr algn="l" marL="256032" indent="-256032">
-              <a:spcAft>
-                <a:spcPts val="489"/>
-              </a:spcAft>
-              <a:buChar char="•"/>
-            </a:pPr>
-            <a:r>
-              <a:rPr sz="1400" b="1" i="0">
-                <a:solidFill>
-                  <a:srgbClr val="1A1A1A"/>
-                </a:solidFill>
-                <a:latin typeface="Helvetica Neue"/>
-              </a:rPr>
-              <a:t>Why the acquisition end matters</a:t>
-            </a:r>
-            <a:r>
-              <a:rPr sz="1400" b="0" i="0">
-                <a:solidFill>
-                  <a:srgbClr val="1A1A1A"/>
-                </a:solidFill>
-                <a:latin typeface="Helvetica Neue"/>
-              </a:rPr>
-              <a:t>: most fetal AI assumes a sonographer who can already find the view. Moving the AI into acquisition is what makes obstetric ultrasound possible where there is no sonographer, which is where most undetected pathology is.</a:t>
-            </a:r>
-          </a:p>
-          <a:p>
-            <a:pPr algn="l" marL="256032" indent="-256032">
-              <a:spcAft>
-                <a:spcPts val="489"/>
-              </a:spcAft>
-              <a:buChar char="•"/>
-            </a:pPr>
-            <a:r>
-              <a:rPr sz="1400" b="1" i="0">
-                <a:solidFill>
-                  <a:srgbClr val="1A1A1A"/>
-                </a:solidFill>
-                <a:latin typeface="Helvetica Neue"/>
-              </a:rPr>
-              <a:t>Read the regulatory word carefully</a:t>
-            </a:r>
-            <a:r>
-              <a:rPr sz="1400" b="0" i="0">
-                <a:solidFill>
-                  <a:srgbClr val="1A1A1A"/>
-                </a:solidFill>
-                <a:latin typeface="Helvetica Neue"/>
-              </a:rPr>
-              <a:t>: Breakthrough Designation buys priority FDA interaction, not market authorization. DeepEcho is still working toward clearance, following a separate prenatal algorithm cleared in 2025.</a:t>
+              <a:t>It automates fetal presentation, placental location, amniotic fluid, fetal heart rate, gestational age, and estimated fetal weight.</a:t>
             </a:r>
           </a:p>
         </p:txBody>
       </p:sp>
       <p:sp>
         <p:nvSpPr>
-          <p:cNvPr id="6" name="TextBox 5"/>
+          <p:cNvPr id="6" name="page number"/>
           <p:cNvSpPr txBox="1"/>
           <p:nvPr/>
         </p:nvSpPr>
         <p:spPr>
           <a:xfrm>
-            <a:off x="411480" y="3592703"/>
-            <a:ext cx="11368735" cy="580390"/>
+            <a:off x="10728655" y="6510528"/>
+            <a:ext cx="1188720" cy="274320"/>
           </a:xfrm>
           <a:prstGeom prst="rect">
             <a:avLst/>
@@ -36796,33 +36728,20 @@
           <a:noFill/>
         </p:spPr>
         <p:txBody>
-          <a:bodyPr wrap="square" lIns="45720" rIns="45720" tIns="27432" bIns="27432" anchor="t">
+          <a:bodyPr wrap="none">
             <a:spAutoFit/>
           </a:bodyPr>
           <a:lstStyle/>
           <a:p>
-            <a:pPr algn="l">
-              <a:spcAft>
-                <a:spcPts val="489"/>
-              </a:spcAft>
-            </a:pPr>
-            <a:r>
-              <a:rPr sz="1400" b="1" i="0">
-                <a:solidFill>
-                  <a:srgbClr val="1A1A1A"/>
-                </a:solidFill>
-                <a:latin typeface="Helvetica Neue"/>
-              </a:rPr>
-              <a:t>Take-home</a:t>
-            </a:r>
-            <a:r>
-              <a:rPr sz="1400" b="0" i="0">
-                <a:solidFill>
-                  <a:srgbClr val="1A1A1A"/>
-                </a:solidFill>
-                <a:latin typeface="Helvetica Neue"/>
-              </a:rPr>
-              <a:t>: trade-press headlines blur designation, clearance and CE mark. For a children's hospital, only clearance with a pediatric or fetal indication is deployable today.</a:t>
+            <a:pPr algn="r"/>
+            <a:r>
+              <a:rPr sz="1000">
+                <a:solidFill>
+                  <a:srgbClr val="6B6B6B"/>
+                </a:solidFill>
+                <a:latin typeface="Helvetica Neue"/>
+              </a:rPr>
+              <a:t>16 / 36</a:t>
             </a:r>
           </a:p>
         </p:txBody>
@@ -36892,7 +36811,7 @@
                 </a:solidFill>
                 <a:latin typeface="Helvetica Neue"/>
               </a:rPr>
-              <a:t>Story: fetal cardiac AI reaches the clinic</a:t>
+              <a:t>Fetal cardiac AI reaches the clinic</a:t>
             </a:r>
           </a:p>
         </p:txBody>
@@ -37409,7 +37328,7 @@
         <p:spPr>
           <a:xfrm>
             <a:off x="411480" y="1258951"/>
-            <a:ext cx="11368735" cy="1620520"/>
+            <a:ext cx="11368735" cy="1344930"/>
           </a:xfrm>
           <a:prstGeom prst="rect">
             <a:avLst/>
@@ -37517,23 +37436,6 @@
               <a:t>The main barriers were a lack of pediatric datasets (83.3%), PACS and workflow integration (66.7%), and cost (50%).</a:t>
             </a:r>
           </a:p>
-          <a:p>
-            <a:pPr algn="l" marL="256032" indent="-256032">
-              <a:spcAft>
-                <a:spcPts val="489"/>
-              </a:spcAft>
-              <a:buChar char="•"/>
-            </a:pPr>
-            <a:r>
-              <a:rPr sz="1400" b="0" i="0">
-                <a:solidFill>
-                  <a:srgbClr val="1A1A1A"/>
-                </a:solidFill>
-                <a:latin typeface="Helvetica Neue"/>
-              </a:rPr>
-              <a:t>Bone age is also the most common clinical application in our literature review and has an established commercial product.</a:t>
-            </a:r>
-          </a:p>
         </p:txBody>
       </p:sp>
       <p:sp>
@@ -37544,7 +37446,7 @@
         </p:nvSpPr>
         <p:spPr>
           <a:xfrm>
-            <a:off x="411480" y="2952623"/>
+            <a:off x="411480" y="2677033"/>
             <a:ext cx="11368735" cy="367030"/>
           </a:xfrm>
           <a:prstGeom prst="rect">
@@ -37605,7 +37507,7 @@
                 </a:solidFill>
                 <a:latin typeface="Helvetica Neue"/>
               </a:rPr>
-              <a:t>16 / 33</a:t>
+              <a:t>17 / 36</a:t>
             </a:r>
           </a:p>
         </p:txBody>
@@ -38315,7 +38217,7 @@
                 </a:solidFill>
                 <a:latin typeface="Helvetica Neue"/>
               </a:rPr>
-              <a:t>17 / 33</a:t>
+              <a:t>18 / 36</a:t>
             </a:r>
           </a:p>
         </p:txBody>
@@ -38741,7 +38643,7 @@
                 </a:solidFill>
                 <a:latin typeface="Helvetica Neue"/>
               </a:rPr>
-              <a:t>18 / 33</a:t>
+              <a:t>19 / 36</a:t>
             </a:r>
           </a:p>
         </p:txBody>
@@ -38944,7 +38846,7 @@
                 </a:solidFill>
                 <a:latin typeface="Helvetica Neue"/>
               </a:rPr>
-              <a:t>19 / 33</a:t>
+              <a:t>20 / 36</a:t>
             </a:r>
           </a:p>
         </p:txBody>
@@ -39237,7 +39139,7 @@
                 </a:solidFill>
                 <a:latin typeface="Helvetica Neue"/>
               </a:rPr>
-              <a:t>20 / 33</a:t>
+              <a:t>21 / 36</a:t>
             </a:r>
           </a:p>
         </p:txBody>
@@ -39357,7 +39259,7 @@
         </p:nvGraphicFramePr>
         <p:xfrm>
           <a:off x="411480" y="877824"/>
-          <a:ext cx="11368733" cy="4066027"/>
+          <a:ext cx="11368733" cy="2953512"/>
         </p:xfrm>
         <a:graphic>
           <a:graphicData uri="http://schemas.openxmlformats.org/drawingml/2006/table">
@@ -39370,14 +39272,14 @@
                 <a:gridCol w="3915897"/>
                 <a:gridCol w="4926451"/>
               </a:tblGrid>
-              <a:tr h="268224">
-                <a:tc>
-                  <a:txBody>
-                    <a:bodyPr wrap="square"/>
-                    <a:lstStyle/>
-                    <a:p>
-                      <a:r>
-                        <a:rPr sz="1400" b="1" i="0">
+              <a:tr h="222504">
+                <a:tc>
+                  <a:txBody>
+                    <a:bodyPr wrap="square"/>
+                    <a:lstStyle/>
+                    <a:p>
+                      <a:r>
+                        <a:rPr sz="1100" b="1" i="0">
                           <a:solidFill>
                             <a:srgbClr val="FFFFFF"/>
                           </a:solidFill>
@@ -39395,7 +39297,7 @@
                     <a:lstStyle/>
                     <a:p>
                       <a:r>
-                        <a:rPr sz="1400" b="1" i="0">
+                        <a:rPr sz="1100" b="1" i="0">
                           <a:solidFill>
                             <a:srgbClr val="FFFFFF"/>
                           </a:solidFill>
@@ -39413,7 +39315,7 @@
                     <a:lstStyle/>
                     <a:p>
                       <a:r>
-                        <a:rPr sz="1400" b="1" i="0">
+                        <a:rPr sz="1100" b="1" i="0">
                           <a:solidFill>
                             <a:srgbClr val="FFFFFF"/>
                           </a:solidFill>
@@ -39426,14 +39328,14 @@
                   <a:tcPr marL="45720" marR="45720" marT="18288" marB="18288" anchor="t"/>
                 </a:tc>
               </a:tr>
-              <a:tr h="481583">
-                <a:tc>
-                  <a:txBody>
-                    <a:bodyPr wrap="square"/>
-                    <a:lstStyle/>
-                    <a:p>
-                      <a:r>
-                        <a:rPr sz="1400" b="0" i="0">
+              <a:tr h="390144">
+                <a:tc>
+                  <a:txBody>
+                    <a:bodyPr wrap="square"/>
+                    <a:lstStyle/>
+                    <a:p>
+                      <a:r>
+                        <a:rPr sz="1100" b="0" i="0">
                           <a:solidFill>
                             <a:srgbClr val="1A1A1A"/>
                           </a:solidFill>
@@ -39451,7 +39353,7 @@
                     <a:lstStyle/>
                     <a:p>
                       <a:r>
-                        <a:rPr sz="1400" b="0" i="0">
+                        <a:rPr sz="1100" b="0" i="0">
                           <a:solidFill>
                             <a:srgbClr val="1A1A1A"/>
                           </a:solidFill>
@@ -39469,7 +39371,7 @@
                     <a:lstStyle/>
                     <a:p>
                       <a:r>
-                        <a:rPr sz="1400" b="0" i="0">
+                        <a:rPr sz="1100" b="0" i="0">
                           <a:solidFill>
                             <a:srgbClr val="1A1A1A"/>
                           </a:solidFill>
@@ -39482,14 +39384,14 @@
                   <a:tcPr marL="45720" marR="45720" marT="18288" marB="18288" anchor="t"/>
                 </a:tc>
               </a:tr>
-              <a:tr h="481583">
-                <a:tc>
-                  <a:txBody>
-                    <a:bodyPr wrap="square"/>
-                    <a:lstStyle/>
-                    <a:p>
-                      <a:r>
-                        <a:rPr sz="1400" b="0" i="0">
+              <a:tr h="390144">
+                <a:tc>
+                  <a:txBody>
+                    <a:bodyPr wrap="square"/>
+                    <a:lstStyle/>
+                    <a:p>
+                      <a:r>
+                        <a:rPr sz="1100" b="0" i="0">
                           <a:solidFill>
                             <a:srgbClr val="1A1A1A"/>
                           </a:solidFill>
@@ -39507,7 +39409,7 @@
                     <a:lstStyle/>
                     <a:p>
                       <a:r>
-                        <a:rPr sz="1400" b="0" i="0">
+                        <a:rPr sz="1100" b="0" i="0">
                           <a:solidFill>
                             <a:srgbClr val="1A1A1A"/>
                           </a:solidFill>
@@ -39525,7 +39427,7 @@
                     <a:lstStyle/>
                     <a:p>
                       <a:r>
-                        <a:rPr sz="1400" b="0" i="0">
+                        <a:rPr sz="1100" b="0" i="0">
                           <a:solidFill>
                             <a:srgbClr val="1A1A1A"/>
                           </a:solidFill>
@@ -39538,14 +39440,14 @@
                   <a:tcPr marL="45720" marR="45720" marT="18288" marB="18288" anchor="t"/>
                 </a:tc>
               </a:tr>
-              <a:tr h="481583">
-                <a:tc>
-                  <a:txBody>
-                    <a:bodyPr wrap="square"/>
-                    <a:lstStyle/>
-                    <a:p>
-                      <a:r>
-                        <a:rPr sz="1400" b="0" i="0">
+              <a:tr h="390144">
+                <a:tc>
+                  <a:txBody>
+                    <a:bodyPr wrap="square"/>
+                    <a:lstStyle/>
+                    <a:p>
+                      <a:r>
+                        <a:rPr sz="1100" b="0" i="0">
                           <a:solidFill>
                             <a:srgbClr val="1A1A1A"/>
                           </a:solidFill>
@@ -39563,7 +39465,7 @@
                     <a:lstStyle/>
                     <a:p>
                       <a:r>
-                        <a:rPr sz="1400" b="0" i="0">
+                        <a:rPr sz="1100" b="0" i="0">
                           <a:solidFill>
                             <a:srgbClr val="1A1A1A"/>
                           </a:solidFill>
@@ -39581,7 +39483,7 @@
                     <a:lstStyle/>
                     <a:p>
                       <a:r>
-                        <a:rPr sz="1400" b="0" i="0">
+                        <a:rPr sz="1100" b="0" i="0">
                           <a:solidFill>
                             <a:srgbClr val="1A1A1A"/>
                           </a:solidFill>
@@ -39594,14 +39496,14 @@
                   <a:tcPr marL="45720" marR="45720" marT="18288" marB="18288" anchor="t"/>
                 </a:tc>
               </a:tr>
-              <a:tr h="481583">
-                <a:tc>
-                  <a:txBody>
-                    <a:bodyPr wrap="square"/>
-                    <a:lstStyle/>
-                    <a:p>
-                      <a:r>
-                        <a:rPr sz="1400" b="0" i="0">
+              <a:tr h="390144">
+                <a:tc>
+                  <a:txBody>
+                    <a:bodyPr wrap="square"/>
+                    <a:lstStyle/>
+                    <a:p>
+                      <a:r>
+                        <a:rPr sz="1100" b="0" i="0">
                           <a:solidFill>
                             <a:srgbClr val="1A1A1A"/>
                           </a:solidFill>
@@ -39619,7 +39521,7 @@
                     <a:lstStyle/>
                     <a:p>
                       <a:r>
-                        <a:rPr sz="1400" b="0" i="0">
+                        <a:rPr sz="1100" b="0" i="0">
                           <a:solidFill>
                             <a:srgbClr val="1A1A1A"/>
                           </a:solidFill>
@@ -39637,7 +39539,7 @@
                     <a:lstStyle/>
                     <a:p>
                       <a:r>
-                        <a:rPr sz="1400" b="0" i="0">
+                        <a:rPr sz="1100" b="0" i="0">
                           <a:solidFill>
                             <a:srgbClr val="1A1A1A"/>
                           </a:solidFill>
@@ -39650,14 +39552,14 @@
                   <a:tcPr marL="45720" marR="45720" marT="18288" marB="18288" anchor="t"/>
                 </a:tc>
               </a:tr>
-              <a:tr h="694944">
-                <a:tc>
-                  <a:txBody>
-                    <a:bodyPr wrap="square"/>
-                    <a:lstStyle/>
-                    <a:p>
-                      <a:r>
-                        <a:rPr sz="1400" b="0" i="0">
+              <a:tr h="390144">
+                <a:tc>
+                  <a:txBody>
+                    <a:bodyPr wrap="square"/>
+                    <a:lstStyle/>
+                    <a:p>
+                      <a:r>
+                        <a:rPr sz="1100" b="0" i="0">
                           <a:solidFill>
                             <a:srgbClr val="1A1A1A"/>
                           </a:solidFill>
@@ -39675,7 +39577,7 @@
                     <a:lstStyle/>
                     <a:p>
                       <a:r>
-                        <a:rPr sz="1400" b="0" i="0">
+                        <a:rPr sz="1100" b="0" i="0">
                           <a:solidFill>
                             <a:srgbClr val="1A1A1A"/>
                           </a:solidFill>
@@ -39693,7 +39595,7 @@
                     <a:lstStyle/>
                     <a:p>
                       <a:r>
-                        <a:rPr sz="1400" b="0" i="0">
+                        <a:rPr sz="1100" b="0" i="0">
                           <a:solidFill>
                             <a:srgbClr val="1A1A1A"/>
                           </a:solidFill>
@@ -39706,14 +39608,14 @@
                   <a:tcPr marL="45720" marR="45720" marT="18288" marB="18288" anchor="t"/>
                 </a:tc>
               </a:tr>
-              <a:tr h="694944">
-                <a:tc>
-                  <a:txBody>
-                    <a:bodyPr wrap="square"/>
-                    <a:lstStyle/>
-                    <a:p>
-                      <a:r>
-                        <a:rPr sz="1400" b="0" i="0">
+              <a:tr h="390144">
+                <a:tc>
+                  <a:txBody>
+                    <a:bodyPr wrap="square"/>
+                    <a:lstStyle/>
+                    <a:p>
+                      <a:r>
+                        <a:rPr sz="1100" b="0" i="0">
                           <a:solidFill>
                             <a:srgbClr val="1A1A1A"/>
                           </a:solidFill>
@@ -39731,7 +39633,7 @@
                     <a:lstStyle/>
                     <a:p>
                       <a:r>
-                        <a:rPr sz="1400" b="0" i="0">
+                        <a:rPr sz="1100" b="0" i="0">
                           <a:solidFill>
                             <a:srgbClr val="1A1A1A"/>
                           </a:solidFill>
@@ -39749,7 +39651,7 @@
                     <a:lstStyle/>
                     <a:p>
                       <a:r>
-                        <a:rPr sz="1400" b="0" i="0">
+                        <a:rPr sz="1100" b="0" i="0">
                           <a:solidFill>
                             <a:srgbClr val="1A1A1A"/>
                           </a:solidFill>
@@ -39762,14 +39664,14 @@
                   <a:tcPr marL="45720" marR="45720" marT="18288" marB="18288" anchor="t"/>
                 </a:tc>
               </a:tr>
-              <a:tr h="481583">
-                <a:tc>
-                  <a:txBody>
-                    <a:bodyPr wrap="square"/>
-                    <a:lstStyle/>
-                    <a:p>
-                      <a:r>
-                        <a:rPr sz="1400" b="0" i="0">
+              <a:tr h="390144">
+                <a:tc>
+                  <a:txBody>
+                    <a:bodyPr wrap="square"/>
+                    <a:lstStyle/>
+                    <a:p>
+                      <a:r>
+                        <a:rPr sz="1100" b="0" i="0">
                           <a:solidFill>
                             <a:srgbClr val="1A1A1A"/>
                           </a:solidFill>
@@ -39787,7 +39689,7 @@
                     <a:lstStyle/>
                     <a:p>
                       <a:r>
-                        <a:rPr sz="1400" b="0" i="0">
+                        <a:rPr sz="1100" b="0" i="0">
                           <a:solidFill>
                             <a:srgbClr val="1A1A1A"/>
                           </a:solidFill>
@@ -39805,7 +39707,7 @@
                     <a:lstStyle/>
                     <a:p>
                       <a:r>
-                        <a:rPr sz="1400" b="0" i="0">
+                        <a:rPr sz="1100" b="0" i="0">
                           <a:solidFill>
                             <a:srgbClr val="1A1A1A"/>
                           </a:solidFill>
@@ -39830,8 +39732,8 @@
         </p:nvSpPr>
         <p:spPr>
           <a:xfrm>
-            <a:off x="411480" y="5017008"/>
-            <a:ext cx="11368735" cy="510539"/>
+            <a:off x="411480" y="3904487"/>
+            <a:ext cx="11368735" cy="307975"/>
           </a:xfrm>
           <a:prstGeom prst="rect">
             <a:avLst/>
@@ -39846,17 +39748,17 @@
           <a:p>
             <a:pPr algn="l">
               <a:spcAft>
-                <a:spcPts val="419"/>
+                <a:spcPts val="384"/>
               </a:spcAft>
             </a:pPr>
             <a:r>
-              <a:rPr sz="1200" b="0" i="0">
+              <a:rPr sz="1100" b="0" i="0">
                 <a:solidFill>
                   <a:srgbClr val="1A1A1A"/>
                 </a:solidFill>
                 <a:latin typeface="Helvetica Neue"/>
               </a:rPr>
-              <a:t>Selected examples. Pediatric applicability depends on the exact product, version, age, and anatomy. Full product details and FDA references are in the backup tables.</a:t>
+              <a:t>Selected examples; scope varies by product/version, age, and anatomy. Full inventory and FDA references: PowerPoint backup slides.</a:t>
             </a:r>
           </a:p>
         </p:txBody>
@@ -39891,7 +39793,7 @@
                 </a:solidFill>
                 <a:latin typeface="Helvetica Neue"/>
               </a:rPr>
-              <a:t>21 / 33</a:t>
+              <a:t>22 / 36</a:t>
             </a:r>
           </a:p>
         </p:txBody>
@@ -40055,7 +39957,7 @@
                 </a:solidFill>
                 <a:latin typeface="Helvetica Neue"/>
               </a:rPr>
-              <a:t>5 / 33</a:t>
+              <a:t>5 / 36</a:t>
             </a:r>
           </a:p>
         </p:txBody>
@@ -40456,7 +40358,7 @@
                 </a:solidFill>
                 <a:latin typeface="Helvetica Neue"/>
               </a:rPr>
-              <a:t>22 / 33</a:t>
+              <a:t>23 / 36</a:t>
             </a:r>
           </a:p>
         </p:txBody>
@@ -40910,7 +40812,7 @@
                 </a:solidFill>
                 <a:latin typeface="Helvetica Neue"/>
               </a:rPr>
-              <a:t>23 / 33</a:t>
+              <a:t>24 / 36</a:t>
             </a:r>
           </a:p>
         </p:txBody>
@@ -42340,7 +42242,7 @@
                 </a:solidFill>
                 <a:latin typeface="Helvetica Neue"/>
               </a:rPr>
-              <a:t>24 / 33</a:t>
+              <a:t>25 / 36</a:t>
             </a:r>
           </a:p>
         </p:txBody>
@@ -42727,7 +42629,7 @@
                 </a:solidFill>
                 <a:latin typeface="Helvetica Neue"/>
               </a:rPr>
-              <a:t>25 / 33</a:t>
+              <a:t>26 / 36</a:t>
             </a:r>
           </a:p>
         </p:txBody>
@@ -43109,7 +43011,7 @@
                 </a:solidFill>
                 <a:latin typeface="Helvetica Neue"/>
               </a:rPr>
-              <a:t>26 / 33</a:t>
+              <a:t>27 / 36</a:t>
             </a:r>
           </a:p>
         </p:txBody>
@@ -43373,7 +43275,7 @@
                 </a:solidFill>
                 <a:latin typeface="Helvetica Neue"/>
               </a:rPr>
-              <a:t>27 / 33</a:t>
+              <a:t>28 / 36</a:t>
             </a:r>
           </a:p>
         </p:txBody>
@@ -43824,7 +43726,7 @@
                 </a:solidFill>
                 <a:latin typeface="Helvetica Neue"/>
               </a:rPr>
-              <a:t>28 / 33</a:t>
+              <a:t>29 / 36</a:t>
             </a:r>
           </a:p>
         </p:txBody>
@@ -43988,7 +43890,7 @@
                 </a:solidFill>
                 <a:latin typeface="Helvetica Neue"/>
               </a:rPr>
-              <a:t>6 / 33</a:t>
+              <a:t>6 / 36</a:t>
             </a:r>
           </a:p>
         </p:txBody>
@@ -44241,7 +44143,7 @@
                 </a:solidFill>
                 <a:latin typeface="Helvetica Neue"/>
               </a:rPr>
-              <a:t>29 / 33</a:t>
+              <a:t>30 / 36</a:t>
             </a:r>
           </a:p>
         </p:txBody>
@@ -44409,7 +44311,7 @@
                 </a:solidFill>
                 <a:latin typeface="Helvetica Neue"/>
               </a:rPr>
-              <a:t>30 / 33</a:t>
+              <a:t>31 / 36</a:t>
             </a:r>
           </a:p>
         </p:txBody>
@@ -44853,7 +44755,7 @@
                 </a:solidFill>
                 <a:latin typeface="Helvetica Neue"/>
               </a:rPr>
-              <a:t>31 / 33</a:t>
+              <a:t>32 / 36</a:t>
             </a:r>
           </a:p>
         </p:txBody>
@@ -44982,7 +44884,7 @@
                 </a:solidFill>
                 <a:latin typeface="Helvetica Neue"/>
               </a:rPr>
-              <a:t>32 / 33</a:t>
+              <a:t>33 / 36</a:t>
             </a:r>
           </a:p>
         </p:txBody>
@@ -45195,7 +45097,7 @@
                 </a:solidFill>
                 <a:latin typeface="Helvetica Neue"/>
               </a:rPr>
-              <a:t>33 / 33</a:t>
+              <a:t>34 / 36</a:t>
             </a:r>
           </a:p>
         </p:txBody>
@@ -45209,7 +45111,7 @@
 </file>
 
 <file path=ppt/slides/slide65.xml><?xml version="1.0" encoding="utf-8"?>
-<p:sld xmlns:a="http://schemas.openxmlformats.org/drawingml/2006/main" xmlns:p="http://schemas.openxmlformats.org/presentationml/2006/main" xmlns:r="http://schemas.openxmlformats.org/officeDocument/2006/relationships" show="0">
+<p:sld xmlns:a="http://schemas.openxmlformats.org/drawingml/2006/main" xmlns:p="http://schemas.openxmlformats.org/presentationml/2006/main" xmlns:r="http://schemas.openxmlformats.org/officeDocument/2006/relationships">
   <p:cSld>
     <p:spTree>
       <p:nvGrpSpPr>
@@ -45265,1516 +45167,21 @@
                 </a:solidFill>
                 <a:latin typeface="Helvetica Neue"/>
               </a:rPr>
-              <a:t>Commercial product inventory: backup (part 1)</a:t>
+              <a:t>Will pediatric radiologists be replaced by AI?</a:t>
             </a:r>
           </a:p>
         </p:txBody>
       </p:sp>
       <p:sp>
         <p:nvSpPr>
-          <p:cNvPr id="3" name="category"/>
+          <p:cNvPr id="3" name="TextBox 2"/>
           <p:cNvSpPr txBox="1"/>
           <p:nvPr/>
         </p:nvSpPr>
         <p:spPr>
           <a:xfrm>
-            <a:off x="8259775" y="18288"/>
-            <a:ext cx="3657600" cy="274320"/>
-          </a:xfrm>
-          <a:prstGeom prst="rect">
-            <a:avLst/>
-          </a:prstGeom>
-          <a:noFill/>
-        </p:spPr>
-        <p:txBody>
-          <a:bodyPr wrap="none">
-            <a:spAutoFit/>
-          </a:bodyPr>
-          <a:lstStyle/>
-          <a:p>
-            <a:pPr algn="r"/>
-            <a:r>
-              <a:rPr sz="1100" b="1">
-                <a:solidFill>
-                  <a:srgbClr val="FFFFFF"/>
-                </a:solidFill>
-                <a:latin typeface="Helvetica Neue"/>
-              </a:rPr>
-              <a:t>COMMERCIAL SOFTWARE</a:t>
-            </a:r>
-          </a:p>
-        </p:txBody>
-      </p:sp>
-      <p:graphicFrame>
-        <p:nvGraphicFramePr>
-          <p:cNvPr id="4" name="Table 3"/>
-          <p:cNvGraphicFramePr>
-            <a:graphicFrameLocks noGrp="1"/>
-          </p:cNvGraphicFramePr>
-          <p:nvPr/>
-        </p:nvGraphicFramePr>
-        <p:xfrm>
-          <a:off x="411480" y="877824"/>
-          <a:ext cx="11368733" cy="5003590"/>
-        </p:xfrm>
-        <a:graphic>
-          <a:graphicData uri="http://schemas.openxmlformats.org/drawingml/2006/table">
-            <a:tbl>
-              <a:tblPr firstRow="1" bandRow="1">
-                <a:tableStyleId>{5C22544A-7EE6-4342-B048-85BDC9FD1C3A}</a:tableStyleId>
-              </a:tblPr>
-              <a:tblGrid>
-                <a:gridCol w="1278343"/>
-                <a:gridCol w="1107897"/>
-                <a:gridCol w="1499923"/>
-                <a:gridCol w="3221425"/>
-                <a:gridCol w="2761222"/>
-                <a:gridCol w="1499923"/>
-              </a:tblGrid>
-              <a:tr h="181051">
-                <a:tc>
-                  <a:txBody>
-                    <a:bodyPr wrap="square"/>
-                    <a:lstStyle/>
-                    <a:p>
-                      <a:r>
-                        <a:rPr sz="828" b="1" i="0">
-                          <a:solidFill>
-                            <a:srgbClr val="FFFFFF"/>
-                          </a:solidFill>
-                          <a:latin typeface="Helvetica Neue"/>
-                        </a:rPr>
-                        <a:t>Product</a:t>
-                      </a:r>
-                    </a:p>
-                  </a:txBody>
-                  <a:tcPr marL="45720" marR="45720" marT="18288" marB="18288" anchor="t"/>
-                </a:tc>
-                <a:tc>
-                  <a:txBody>
-                    <a:bodyPr wrap="square"/>
-                    <a:lstStyle/>
-                    <a:p>
-                      <a:r>
-                        <a:rPr sz="828" b="1" i="0">
-                          <a:solidFill>
-                            <a:srgbClr val="FFFFFF"/>
-                          </a:solidFill>
-                          <a:latin typeface="Helvetica Neue"/>
-                        </a:rPr>
-                        <a:t>Vendor</a:t>
-                      </a:r>
-                    </a:p>
-                  </a:txBody>
-                  <a:tcPr marL="45720" marR="45720" marT="18288" marB="18288" anchor="t"/>
-                </a:tc>
-                <a:tc>
-                  <a:txBody>
-                    <a:bodyPr wrap="square"/>
-                    <a:lstStyle/>
-                    <a:p>
-                      <a:r>
-                        <a:rPr sz="828" b="1" i="0">
-                          <a:solidFill>
-                            <a:srgbClr val="FFFFFF"/>
-                          </a:solidFill>
-                          <a:latin typeface="Helvetica Neue"/>
-                        </a:rPr>
-                        <a:t>Clinical problem</a:t>
-                      </a:r>
-                    </a:p>
-                  </a:txBody>
-                  <a:tcPr marL="45720" marR="45720" marT="18288" marB="18288" anchor="t"/>
-                </a:tc>
-                <a:tc>
-                  <a:txBody>
-                    <a:bodyPr wrap="square"/>
-                    <a:lstStyle/>
-                    <a:p>
-                      <a:r>
-                        <a:rPr sz="828" b="1" i="0">
-                          <a:solidFill>
-                            <a:srgbClr val="FFFFFF"/>
-                          </a:solidFill>
-                          <a:latin typeface="Helvetica Neue"/>
-                        </a:rPr>
-                        <a:t>What it does</a:t>
-                      </a:r>
-                    </a:p>
-                  </a:txBody>
-                  <a:tcPr marL="45720" marR="45720" marT="18288" marB="18288" anchor="t"/>
-                </a:tc>
-                <a:tc>
-                  <a:txBody>
-                    <a:bodyPr wrap="square"/>
-                    <a:lstStyle/>
-                    <a:p>
-                      <a:r>
-                        <a:rPr sz="828" b="1" i="0">
-                          <a:solidFill>
-                            <a:srgbClr val="FFFFFF"/>
-                          </a:solidFill>
-                          <a:latin typeface="Helvetica Neue"/>
-                        </a:rPr>
-                        <a:t>Pediatric scope</a:t>
-                      </a:r>
-                    </a:p>
-                  </a:txBody>
-                  <a:tcPr marL="45720" marR="45720" marT="18288" marB="18288" anchor="t"/>
-                </a:tc>
-                <a:tc>
-                  <a:txBody>
-                    <a:bodyPr wrap="square"/>
-                    <a:lstStyle/>
-                    <a:p>
-                      <a:r>
-                        <a:rPr sz="828" b="1" i="0">
-                          <a:solidFill>
-                            <a:srgbClr val="FFFFFF"/>
-                          </a:solidFill>
-                          <a:latin typeface="Helvetica Neue"/>
-                        </a:rPr>
-                        <a:t>Clinical use</a:t>
-                      </a:r>
-                    </a:p>
-                  </a:txBody>
-                  <a:tcPr marL="45720" marR="45720" marT="18288" marB="18288" anchor="t"/>
-                </a:tc>
-              </a:tr>
-              <a:tr h="433425">
-                <a:tc>
-                  <a:txBody>
-                    <a:bodyPr wrap="square"/>
-                    <a:lstStyle/>
-                    <a:p>
-                      <a:r>
-                        <a:rPr sz="828" b="0" i="0">
-                          <a:solidFill>
-                            <a:srgbClr val="1A1A1A"/>
-                          </a:solidFill>
-                          <a:latin typeface="Helvetica Neue"/>
-                        </a:rPr>
-                        <a:t>BoneXpert</a:t>
-                      </a:r>
-                    </a:p>
-                  </a:txBody>
-                  <a:tcPr marL="45720" marR="45720" marT="18288" marB="18288" anchor="t"/>
-                </a:tc>
-                <a:tc>
-                  <a:txBody>
-                    <a:bodyPr wrap="square"/>
-                    <a:lstStyle/>
-                    <a:p>
-                      <a:r>
-                        <a:rPr sz="828" b="0" i="0">
-                          <a:solidFill>
-                            <a:srgbClr val="1A1A1A"/>
-                          </a:solidFill>
-                          <a:latin typeface="Helvetica Neue"/>
-                        </a:rPr>
-                        <a:t>Visiana</a:t>
-                      </a:r>
-                    </a:p>
-                  </a:txBody>
-                  <a:tcPr marL="45720" marR="45720" marT="18288" marB="18288" anchor="t"/>
-                </a:tc>
-                <a:tc>
-                  <a:txBody>
-                    <a:bodyPr wrap="square"/>
-                    <a:lstStyle/>
-                    <a:p>
-                      <a:r>
-                        <a:rPr sz="828" b="0" i="0">
-                          <a:solidFill>
-                            <a:srgbClr val="1A1A1A"/>
-                          </a:solidFill>
-                          <a:latin typeface="Helvetica Neue"/>
-                        </a:rPr>
-                        <a:t>bone age / growth</a:t>
-                      </a:r>
-                    </a:p>
-                  </a:txBody>
-                  <a:tcPr marL="45720" marR="45720" marT="18288" marB="18288" anchor="t"/>
-                </a:tc>
-                <a:tc>
-                  <a:txBody>
-                    <a:bodyPr wrap="square"/>
-                    <a:lstStyle/>
-                    <a:p>
-                      <a:r>
-                        <a:rPr sz="828" b="0" i="0">
-                          <a:solidFill>
-                            <a:srgbClr val="1A1A1A"/>
-                          </a:solidFill>
-                          <a:latin typeface="Helvetica Neue"/>
-                        </a:rPr>
-                        <a:t>Automated Greulich–Pyle and Tanner–Whitehouse bone age plus a Bone Health Index, from a hand radiograph</a:t>
-                      </a:r>
-                    </a:p>
-                  </a:txBody>
-                  <a:tcPr marL="45720" marR="45720" marT="18288" marB="18288" anchor="t"/>
-                </a:tc>
-                <a:tc>
-                  <a:txBody>
-                    <a:bodyPr wrap="square"/>
-                    <a:lstStyle/>
-                    <a:p>
-                      <a:r>
-                        <a:rPr sz="828" b="0" i="0">
-                          <a:solidFill>
-                            <a:srgbClr val="1A1A1A"/>
-                          </a:solidFill>
-                          <a:latin typeface="Helvetica Neue"/>
-                        </a:rPr>
-                        <a:t>Built for children; CE-marked and in routine European use; FDA 510(k) cleared September 2026 [K262390, 2026]</a:t>
-                      </a:r>
-                    </a:p>
-                  </a:txBody>
-                  <a:tcPr marL="45720" marR="45720" marT="18288" marB="18288" anchor="t"/>
-                </a:tc>
-                <a:tc>
-                  <a:txBody>
-                    <a:bodyPr wrap="square"/>
-                    <a:lstStyle/>
-                    <a:p>
-                      <a:r>
-                        <a:rPr sz="828" b="0" i="0">
-                          <a:solidFill>
-                            <a:srgbClr val="1A1A1A"/>
-                          </a:solidFill>
-                          <a:latin typeface="Helvetica Neue"/>
-                        </a:rPr>
-                        <a:t>Widely deployed (Europe)</a:t>
-                      </a:r>
-                    </a:p>
-                  </a:txBody>
-                  <a:tcPr marL="45720" marR="45720" marT="18288" marB="18288" anchor="t"/>
-                </a:tc>
-              </a:tr>
-              <a:tr h="433425">
-                <a:tc>
-                  <a:txBody>
-                    <a:bodyPr wrap="square"/>
-                    <a:lstStyle/>
-                    <a:p>
-                      <a:r>
-                        <a:rPr sz="828" b="0" i="0">
-                          <a:solidFill>
-                            <a:srgbClr val="1A1A1A"/>
-                          </a:solidFill>
-                          <a:latin typeface="Helvetica Neue"/>
-                        </a:rPr>
-                        <a:t>BoneView</a:t>
-                      </a:r>
-                    </a:p>
-                  </a:txBody>
-                  <a:tcPr marL="45720" marR="45720" marT="18288" marB="18288" anchor="t"/>
-                </a:tc>
-                <a:tc>
-                  <a:txBody>
-                    <a:bodyPr wrap="square"/>
-                    <a:lstStyle/>
-                    <a:p>
-                      <a:r>
-                        <a:rPr sz="828" b="0" i="0">
-                          <a:solidFill>
-                            <a:srgbClr val="1A1A1A"/>
-                          </a:solidFill>
-                          <a:latin typeface="Helvetica Neue"/>
-                        </a:rPr>
-                        <a:t>Gleamer</a:t>
-                      </a:r>
-                    </a:p>
-                  </a:txBody>
-                  <a:tcPr marL="45720" marR="45720" marT="18288" marB="18288" anchor="t"/>
-                </a:tc>
-                <a:tc>
-                  <a:txBody>
-                    <a:bodyPr wrap="square"/>
-                    <a:lstStyle/>
-                    <a:p>
-                      <a:r>
-                        <a:rPr sz="828" b="0" i="0">
-                          <a:solidFill>
-                            <a:srgbClr val="1A1A1A"/>
-                          </a:solidFill>
-                          <a:latin typeface="Helvetica Neue"/>
-                        </a:rPr>
-                        <a:t>fracture / trauma</a:t>
-                      </a:r>
-                    </a:p>
-                  </a:txBody>
-                  <a:tcPr marL="45720" marR="45720" marT="18288" marB="18288" anchor="t"/>
-                </a:tc>
-                <a:tc>
-                  <a:txBody>
-                    <a:bodyPr wrap="square"/>
-                    <a:lstStyle/>
-                    <a:p>
-                      <a:r>
-                        <a:rPr sz="828" b="0" i="0">
-                          <a:solidFill>
-                            <a:srgbClr val="1A1A1A"/>
-                          </a:solidFill>
-                          <a:latin typeface="Helvetica Neue"/>
-                        </a:rPr>
-                        <a:t>Fracture detection on trauma radiographs, presented as regions of interest alongside the image</a:t>
-                      </a:r>
-                    </a:p>
-                  </a:txBody>
-                  <a:tcPr marL="45720" marR="45720" marT="18288" marB="18288" anchor="t"/>
-                </a:tc>
-                <a:tc>
-                  <a:txBody>
-                    <a:bodyPr wrap="square"/>
-                    <a:lstStyle/>
-                    <a:p>
-                      <a:r>
-                        <a:rPr sz="828" b="0" i="0">
-                          <a:solidFill>
-                            <a:srgbClr val="1A1A1A"/>
-                          </a:solidFill>
-                          <a:latin typeface="Helvetica Neue"/>
-                        </a:rPr>
-                        <a:t>US indication covers ages 2–21 for specified extremity views; pelvis, hip, femur, ribs and spine are adult-only [K222176, 2023]</a:t>
-                      </a:r>
-                    </a:p>
-                  </a:txBody>
-                  <a:tcPr marL="45720" marR="45720" marT="18288" marB="18288" anchor="t"/>
-                </a:tc>
-                <a:tc>
-                  <a:txBody>
-                    <a:bodyPr wrap="square"/>
-                    <a:lstStyle/>
-                    <a:p>
-                      <a:r>
-                        <a:rPr sz="828" b="0" i="0">
-                          <a:solidFill>
-                            <a:srgbClr val="1A1A1A"/>
-                          </a:solidFill>
-                          <a:latin typeface="Helvetica Neue"/>
-                        </a:rPr>
-                        <a:t>Widely deployed</a:t>
-                      </a:r>
-                    </a:p>
-                  </a:txBody>
-                  <a:tcPr marL="45720" marR="45720" marT="18288" marB="18288" anchor="t"/>
-                </a:tc>
-              </a:tr>
-              <a:tr h="433425">
-                <a:tc>
-                  <a:txBody>
-                    <a:bodyPr wrap="square"/>
-                    <a:lstStyle/>
-                    <a:p>
-                      <a:r>
-                        <a:rPr sz="828" b="0" i="0">
-                          <a:solidFill>
-                            <a:srgbClr val="1A1A1A"/>
-                          </a:solidFill>
-                          <a:latin typeface="Helvetica Neue"/>
-                        </a:rPr>
-                        <a:t>Rayvolve (AZtrauma)</a:t>
-                      </a:r>
-                    </a:p>
-                  </a:txBody>
-                  <a:tcPr marL="45720" marR="45720" marT="18288" marB="18288" anchor="t"/>
-                </a:tc>
-                <a:tc>
-                  <a:txBody>
-                    <a:bodyPr wrap="square"/>
-                    <a:lstStyle/>
-                    <a:p>
-                      <a:r>
-                        <a:rPr sz="828" b="0" i="0">
-                          <a:solidFill>
-                            <a:srgbClr val="1A1A1A"/>
-                          </a:solidFill>
-                          <a:latin typeface="Helvetica Neue"/>
-                        </a:rPr>
-                        <a:t>AZmed</a:t>
-                      </a:r>
-                    </a:p>
-                  </a:txBody>
-                  <a:tcPr marL="45720" marR="45720" marT="18288" marB="18288" anchor="t"/>
-                </a:tc>
-                <a:tc>
-                  <a:txBody>
-                    <a:bodyPr wrap="square"/>
-                    <a:lstStyle/>
-                    <a:p>
-                      <a:r>
-                        <a:rPr sz="828" b="0" i="0">
-                          <a:solidFill>
-                            <a:srgbClr val="1A1A1A"/>
-                          </a:solidFill>
-                          <a:latin typeface="Helvetica Neue"/>
-                        </a:rPr>
-                        <a:t>fracture / trauma</a:t>
-                      </a:r>
-                    </a:p>
-                  </a:txBody>
-                  <a:tcPr marL="45720" marR="45720" marT="18288" marB="18288" anchor="t"/>
-                </a:tc>
-                <a:tc>
-                  <a:txBody>
-                    <a:bodyPr wrap="square"/>
-                    <a:lstStyle/>
-                    <a:p>
-                      <a:r>
-                        <a:rPr sz="828" b="0" i="0">
-                          <a:solidFill>
-                            <a:srgbClr val="1A1A1A"/>
-                          </a:solidFill>
-                          <a:latin typeface="Helvetica Neue"/>
-                        </a:rPr>
-                        <a:t>Fracture and MSK finding detection on radiographs; sibling modules cover chest findings, measurements and bone age</a:t>
-                      </a:r>
-                    </a:p>
-                  </a:txBody>
-                  <a:tcPr marL="45720" marR="45720" marT="18288" marB="18288" anchor="t"/>
-                </a:tc>
-                <a:tc>
-                  <a:txBody>
-                    <a:bodyPr wrap="square"/>
-                    <a:lstStyle/>
-                    <a:p>
-                      <a:r>
-                        <a:rPr sz="828" b="0" i="0">
-                          <a:solidFill>
-                            <a:srgbClr val="1A1A1A"/>
-                          </a:solidFill>
-                          <a:latin typeface="Helvetica Neue"/>
-                        </a:rPr>
-                        <a:t>US fracture indication from age 2; the bone-age module is CE-marked only [K240845, 2024]</a:t>
-                      </a:r>
-                    </a:p>
-                  </a:txBody>
-                  <a:tcPr marL="45720" marR="45720" marT="18288" marB="18288" anchor="t"/>
-                </a:tc>
-                <a:tc>
-                  <a:txBody>
-                    <a:bodyPr wrap="square"/>
-                    <a:lstStyle/>
-                    <a:p>
-                      <a:r>
-                        <a:rPr sz="828" b="0" i="0">
-                          <a:solidFill>
-                            <a:srgbClr val="1A1A1A"/>
-                          </a:solidFill>
-                          <a:latin typeface="Helvetica Neue"/>
-                        </a:rPr>
-                        <a:t>Widely deployed</a:t>
-                      </a:r>
-                    </a:p>
-                  </a:txBody>
-                  <a:tcPr marL="45720" marR="45720" marT="18288" marB="18288" anchor="t"/>
-                </a:tc>
-              </a:tr>
-              <a:tr h="307238">
-                <a:tc>
-                  <a:txBody>
-                    <a:bodyPr wrap="square"/>
-                    <a:lstStyle/>
-                    <a:p>
-                      <a:r>
-                        <a:rPr sz="828" b="0" i="0">
-                          <a:solidFill>
-                            <a:srgbClr val="1A1A1A"/>
-                          </a:solidFill>
-                          <a:latin typeface="Helvetica Neue"/>
-                        </a:rPr>
-                        <a:t>TechCare Trauma</a:t>
-                      </a:r>
-                    </a:p>
-                  </a:txBody>
-                  <a:tcPr marL="45720" marR="45720" marT="18288" marB="18288" anchor="t"/>
-                </a:tc>
-                <a:tc>
-                  <a:txBody>
-                    <a:bodyPr wrap="square"/>
-                    <a:lstStyle/>
-                    <a:p>
-                      <a:r>
-                        <a:rPr sz="828" b="0" i="0">
-                          <a:solidFill>
-                            <a:srgbClr val="1A1A1A"/>
-                          </a:solidFill>
-                          <a:latin typeface="Helvetica Neue"/>
-                        </a:rPr>
-                        <a:t>Milvue</a:t>
-                      </a:r>
-                    </a:p>
-                  </a:txBody>
-                  <a:tcPr marL="45720" marR="45720" marT="18288" marB="18288" anchor="t"/>
-                </a:tc>
-                <a:tc>
-                  <a:txBody>
-                    <a:bodyPr wrap="square"/>
-                    <a:lstStyle/>
-                    <a:p>
-                      <a:r>
-                        <a:rPr sz="828" b="0" i="0">
-                          <a:solidFill>
-                            <a:srgbClr val="1A1A1A"/>
-                          </a:solidFill>
-                          <a:latin typeface="Helvetica Neue"/>
-                        </a:rPr>
-                        <a:t>fracture / trauma</a:t>
-                      </a:r>
-                    </a:p>
-                  </a:txBody>
-                  <a:tcPr marL="45720" marR="45720" marT="18288" marB="18288" anchor="t"/>
-                </a:tc>
-                <a:tc>
-                  <a:txBody>
-                    <a:bodyPr wrap="square"/>
-                    <a:lstStyle/>
-                    <a:p>
-                      <a:r>
-                        <a:rPr sz="828" b="0" i="0">
-                          <a:solidFill>
-                            <a:srgbClr val="1A1A1A"/>
-                          </a:solidFill>
-                          <a:latin typeface="Helvetica Neue"/>
-                        </a:rPr>
-                        <a:t>Trauma radiograph triage: fractures, effusions and dislocations flagged for the reader</a:t>
-                      </a:r>
-                    </a:p>
-                  </a:txBody>
-                  <a:tcPr marL="45720" marR="45720" marT="18288" marB="18288" anchor="t"/>
-                </a:tc>
-                <a:tc>
-                  <a:txBody>
-                    <a:bodyPr wrap="square"/>
-                    <a:lstStyle/>
-                    <a:p>
-                      <a:r>
-                        <a:rPr sz="828" b="0" i="0">
-                          <a:solidFill>
-                            <a:srgbClr val="1A1A1A"/>
-                          </a:solidFill>
-                          <a:latin typeface="Helvetica Neue"/>
-                        </a:rPr>
-                        <a:t>The decision summary states a pediatric population [K242171, 2025]</a:t>
-                      </a:r>
-                    </a:p>
-                  </a:txBody>
-                  <a:tcPr marL="45720" marR="45720" marT="18288" marB="18288" anchor="t"/>
-                </a:tc>
-                <a:tc>
-                  <a:txBody>
-                    <a:bodyPr wrap="square"/>
-                    <a:lstStyle/>
-                    <a:p>
-                      <a:r>
-                        <a:rPr sz="828" b="0" i="0">
-                          <a:solidFill>
-                            <a:srgbClr val="1A1A1A"/>
-                          </a:solidFill>
-                          <a:latin typeface="Helvetica Neue"/>
-                        </a:rPr>
-                        <a:t>Early US deployments</a:t>
-                      </a:r>
-                    </a:p>
-                  </a:txBody>
-                  <a:tcPr marL="45720" marR="45720" marT="18288" marB="18288" anchor="t"/>
-                </a:tc>
-              </a:tr>
-              <a:tr h="433425">
-                <a:tc>
-                  <a:txBody>
-                    <a:bodyPr wrap="square"/>
-                    <a:lstStyle/>
-                    <a:p>
-                      <a:r>
-                        <a:rPr sz="828" b="0" i="0">
-                          <a:solidFill>
-                            <a:srgbClr val="1A1A1A"/>
-                          </a:solidFill>
-                          <a:latin typeface="Helvetica Neue"/>
-                        </a:rPr>
-                        <a:t>EFAI Bonesuite XR Bone Age Pro</a:t>
-                      </a:r>
-                    </a:p>
-                  </a:txBody>
-                  <a:tcPr marL="45720" marR="45720" marT="18288" marB="18288" anchor="t"/>
-                </a:tc>
-                <a:tc>
-                  <a:txBody>
-                    <a:bodyPr wrap="square"/>
-                    <a:lstStyle/>
-                    <a:p>
-                      <a:r>
-                        <a:rPr sz="828" b="0" i="0">
-                          <a:solidFill>
-                            <a:srgbClr val="1A1A1A"/>
-                          </a:solidFill>
-                          <a:latin typeface="Helvetica Neue"/>
-                        </a:rPr>
-                        <a:t>Ever Fortune.AI</a:t>
-                      </a:r>
-                    </a:p>
-                  </a:txBody>
-                  <a:tcPr marL="45720" marR="45720" marT="18288" marB="18288" anchor="t"/>
-                </a:tc>
-                <a:tc>
-                  <a:txBody>
-                    <a:bodyPr wrap="square"/>
-                    <a:lstStyle/>
-                    <a:p>
-                      <a:r>
-                        <a:rPr sz="828" b="0" i="0">
-                          <a:solidFill>
-                            <a:srgbClr val="1A1A1A"/>
-                          </a:solidFill>
-                          <a:latin typeface="Helvetica Neue"/>
-                        </a:rPr>
-                        <a:t>bone age / growth</a:t>
-                      </a:r>
-                    </a:p>
-                  </a:txBody>
-                  <a:tcPr marL="45720" marR="45720" marT="18288" marB="18288" anchor="t"/>
-                </a:tc>
-                <a:tc>
-                  <a:txBody>
-                    <a:bodyPr wrap="square"/>
-                    <a:lstStyle/>
-                    <a:p>
-                      <a:r>
-                        <a:rPr sz="828" b="0" i="0">
-                          <a:solidFill>
-                            <a:srgbClr val="1A1A1A"/>
-                          </a:solidFill>
-                          <a:latin typeface="Helvetica Neue"/>
-                        </a:rPr>
-                        <a:t>Greulich–Pyle bone age from a PA left hand and wrist radiograph, as an adjunct to the radiologist</a:t>
-                      </a:r>
-                    </a:p>
-                  </a:txBody>
-                  <a:tcPr marL="45720" marR="45720" marT="18288" marB="18288" anchor="t"/>
-                </a:tc>
-                <a:tc>
-                  <a:txBody>
-                    <a:bodyPr wrap="square"/>
-                    <a:lstStyle/>
-                    <a:p>
-                      <a:r>
-                        <a:rPr sz="828" b="0" i="0">
-                          <a:solidFill>
-                            <a:srgbClr val="1A1A1A"/>
-                          </a:solidFill>
-                          <a:latin typeface="Helvetica Neue"/>
-                        </a:rPr>
-                        <a:t>FDA-cleared for ages 2–16 — a pediatric-specific US bone-age clearance [K234042, 2024]</a:t>
-                      </a:r>
-                    </a:p>
-                  </a:txBody>
-                  <a:tcPr marL="45720" marR="45720" marT="18288" marB="18288" anchor="t"/>
-                </a:tc>
-                <a:tc>
-                  <a:txBody>
-                    <a:bodyPr wrap="square"/>
-                    <a:lstStyle/>
-                    <a:p>
-                      <a:r>
-                        <a:rPr sz="828" b="0" i="0">
-                          <a:solidFill>
-                            <a:srgbClr val="1A1A1A"/>
-                          </a:solidFill>
-                          <a:latin typeface="Helvetica Neue"/>
-                        </a:rPr>
-                        <a:t>FDA-cleared, early adoption</a:t>
-                      </a:r>
-                    </a:p>
-                  </a:txBody>
-                  <a:tcPr marL="45720" marR="45720" marT="18288" marB="18288" anchor="t"/>
-                </a:tc>
-              </a:tr>
-              <a:tr h="307238">
-                <a:tc>
-                  <a:txBody>
-                    <a:bodyPr wrap="square"/>
-                    <a:lstStyle/>
-                    <a:p>
-                      <a:r>
-                        <a:rPr sz="828" b="0" i="0">
-                          <a:solidFill>
-                            <a:srgbClr val="1A1A1A"/>
-                          </a:solidFill>
-                          <a:latin typeface="Helvetica Neue"/>
-                        </a:rPr>
-                        <a:t>Physis</a:t>
-                      </a:r>
-                    </a:p>
-                  </a:txBody>
-                  <a:tcPr marL="45720" marR="45720" marT="18288" marB="18288" anchor="t"/>
-                </a:tc>
-                <a:tc>
-                  <a:txBody>
-                    <a:bodyPr wrap="square"/>
-                    <a:lstStyle/>
-                    <a:p>
-                      <a:r>
-                        <a:rPr sz="828" b="0" i="0">
-                          <a:solidFill>
-                            <a:srgbClr val="1A1A1A"/>
-                          </a:solidFill>
-                          <a:latin typeface="Helvetica Neue"/>
-                        </a:rPr>
-                        <a:t>16 Bit</a:t>
-                      </a:r>
-                    </a:p>
-                  </a:txBody>
-                  <a:tcPr marL="45720" marR="45720" marT="18288" marB="18288" anchor="t"/>
-                </a:tc>
-                <a:tc>
-                  <a:txBody>
-                    <a:bodyPr wrap="square"/>
-                    <a:lstStyle/>
-                    <a:p>
-                      <a:r>
-                        <a:rPr sz="828" b="0" i="0">
-                          <a:solidFill>
-                            <a:srgbClr val="1A1A1A"/>
-                          </a:solidFill>
-                          <a:latin typeface="Helvetica Neue"/>
-                        </a:rPr>
-                        <a:t>bone age / growth</a:t>
-                      </a:r>
-                    </a:p>
-                  </a:txBody>
-                  <a:tcPr marL="45720" marR="45720" marT="18288" marB="18288" anchor="t"/>
-                </a:tc>
-                <a:tc>
-                  <a:txBody>
-                    <a:bodyPr wrap="square"/>
-                    <a:lstStyle/>
-                    <a:p>
-                      <a:r>
-                        <a:rPr sz="828" b="0" i="0">
-                          <a:solidFill>
-                            <a:srgbClr val="1A1A1A"/>
-                          </a:solidFill>
-                          <a:latin typeface="Helvetica Neue"/>
-                        </a:rPr>
-                        <a:t>Bone-age estimation with Greulich–Pyle atlas matching and draft report text</a:t>
-                      </a:r>
-                    </a:p>
-                  </a:txBody>
-                  <a:tcPr marL="45720" marR="45720" marT="18288" marB="18288" anchor="t"/>
-                </a:tc>
-                <a:tc>
-                  <a:txBody>
-                    <a:bodyPr wrap="square"/>
-                    <a:lstStyle/>
-                    <a:p>
-                      <a:r>
-                        <a:rPr sz="828" b="0" i="0">
-                          <a:solidFill>
-                            <a:srgbClr val="1A1A1A"/>
-                          </a:solidFill>
-                          <a:latin typeface="Helvetica Neue"/>
-                        </a:rPr>
-                        <a:t>Pediatric tool; Health Canada licensed, no FDA authorization identified</a:t>
-                      </a:r>
-                    </a:p>
-                  </a:txBody>
-                  <a:tcPr marL="45720" marR="45720" marT="18288" marB="18288" anchor="t"/>
-                </a:tc>
-                <a:tc>
-                  <a:txBody>
-                    <a:bodyPr wrap="square"/>
-                    <a:lstStyle/>
-                    <a:p>
-                      <a:r>
-                        <a:rPr sz="828" b="0" i="0">
-                          <a:solidFill>
-                            <a:srgbClr val="1A1A1A"/>
-                          </a:solidFill>
-                          <a:latin typeface="Helvetica Neue"/>
-                        </a:rPr>
-                        <a:t>Limited US access</a:t>
-                      </a:r>
-                    </a:p>
-                  </a:txBody>
-                  <a:tcPr marL="45720" marR="45720" marT="18288" marB="18288" anchor="t"/>
-                </a:tc>
-              </a:tr>
-              <a:tr h="307238">
-                <a:tc>
-                  <a:txBody>
-                    <a:bodyPr wrap="square"/>
-                    <a:lstStyle/>
-                    <a:p>
-                      <a:r>
-                        <a:rPr sz="828" b="0" i="0">
-                          <a:solidFill>
-                            <a:srgbClr val="1A1A1A"/>
-                          </a:solidFill>
-                          <a:latin typeface="Helvetica Neue"/>
-                        </a:rPr>
-                        <a:t>Fetal EchoScan</a:t>
-                      </a:r>
-                    </a:p>
-                  </a:txBody>
-                  <a:tcPr marL="45720" marR="45720" marT="18288" marB="18288" anchor="t"/>
-                </a:tc>
-                <a:tc>
-                  <a:txBody>
-                    <a:bodyPr wrap="square"/>
-                    <a:lstStyle/>
-                    <a:p>
-                      <a:r>
-                        <a:rPr sz="828" b="0" i="0">
-                          <a:solidFill>
-                            <a:srgbClr val="1A1A1A"/>
-                          </a:solidFill>
-                          <a:latin typeface="Helvetica Neue"/>
-                        </a:rPr>
-                        <a:t>BrightHeart</a:t>
-                      </a:r>
-                    </a:p>
-                  </a:txBody>
-                  <a:tcPr marL="45720" marR="45720" marT="18288" marB="18288" anchor="t"/>
-                </a:tc>
-                <a:tc>
-                  <a:txBody>
-                    <a:bodyPr wrap="square"/>
-                    <a:lstStyle/>
-                    <a:p>
-                      <a:r>
-                        <a:rPr sz="828" b="0" i="0">
-                          <a:solidFill>
-                            <a:srgbClr val="1A1A1A"/>
-                          </a:solidFill>
-                          <a:latin typeface="Helvetica Neue"/>
-                        </a:rPr>
-                        <a:t>fetal / obstetric</a:t>
-                      </a:r>
-                    </a:p>
-                  </a:txBody>
-                  <a:tcPr marL="45720" marR="45720" marT="18288" marB="18288" anchor="t"/>
-                </a:tc>
-                <a:tc>
-                  <a:txBody>
-                    <a:bodyPr wrap="square"/>
-                    <a:lstStyle/>
-                    <a:p>
-                      <a:r>
-                        <a:rPr sz="828" b="0" i="0">
-                          <a:solidFill>
-                            <a:srgbClr val="1A1A1A"/>
-                          </a:solidFill>
-                          <a:latin typeface="Helvetica Neue"/>
-                        </a:rPr>
-                        <a:t>Flags eight morphological findings suspicious for congenital heart disease on second-trimester views</a:t>
-                      </a:r>
-                    </a:p>
-                  </a:txBody>
-                  <a:tcPr marL="45720" marR="45720" marT="18288" marB="18288" anchor="t"/>
-                </a:tc>
-                <a:tc>
-                  <a:txBody>
-                    <a:bodyPr wrap="square"/>
-                    <a:lstStyle/>
-                    <a:p>
-                      <a:r>
-                        <a:rPr sz="828" b="0" i="0">
-                          <a:solidFill>
-                            <a:srgbClr val="1A1A1A"/>
-                          </a:solidFill>
-                          <a:latin typeface="Helvetica Neue"/>
-                        </a:rPr>
-                        <a:t>Prenatal: second-trimester exams, maternal age 18+ [K252294, 2025]</a:t>
-                      </a:r>
-                    </a:p>
-                  </a:txBody>
-                  <a:tcPr marL="45720" marR="45720" marT="18288" marB="18288" anchor="t"/>
-                </a:tc>
-                <a:tc>
-                  <a:txBody>
-                    <a:bodyPr wrap="square"/>
-                    <a:lstStyle/>
-                    <a:p>
-                      <a:r>
-                        <a:rPr sz="828" b="0" i="0">
-                          <a:solidFill>
-                            <a:srgbClr val="1A1A1A"/>
-                          </a:solidFill>
-                          <a:latin typeface="Helvetica Neue"/>
-                        </a:rPr>
-                        <a:t>Early deployments / pilots</a:t>
-                      </a:r>
-                    </a:p>
-                  </a:txBody>
-                  <a:tcPr marL="45720" marR="45720" marT="18288" marB="18288" anchor="t"/>
-                </a:tc>
-              </a:tr>
-              <a:tr h="433425">
-                <a:tc>
-                  <a:txBody>
-                    <a:bodyPr wrap="square"/>
-                    <a:lstStyle/>
-                    <a:p>
-                      <a:r>
-                        <a:rPr sz="828" b="0" i="0">
-                          <a:solidFill>
-                            <a:srgbClr val="1A1A1A"/>
-                          </a:solidFill>
-                          <a:latin typeface="Helvetica Neue"/>
-                        </a:rPr>
-                        <a:t>Sonio Detect / Sonio Suspect</a:t>
-                      </a:r>
-                    </a:p>
-                  </a:txBody>
-                  <a:tcPr marL="45720" marR="45720" marT="18288" marB="18288" anchor="t"/>
-                </a:tc>
-                <a:tc>
-                  <a:txBody>
-                    <a:bodyPr wrap="square"/>
-                    <a:lstStyle/>
-                    <a:p>
-                      <a:r>
-                        <a:rPr sz="828" b="0" i="0">
-                          <a:solidFill>
-                            <a:srgbClr val="1A1A1A"/>
-                          </a:solidFill>
-                          <a:latin typeface="Helvetica Neue"/>
-                        </a:rPr>
-                        <a:t>Sonio</a:t>
-                      </a:r>
-                    </a:p>
-                  </a:txBody>
-                  <a:tcPr marL="45720" marR="45720" marT="18288" marB="18288" anchor="t"/>
-                </a:tc>
-                <a:tc>
-                  <a:txBody>
-                    <a:bodyPr wrap="square"/>
-                    <a:lstStyle/>
-                    <a:p>
-                      <a:r>
-                        <a:rPr sz="828" b="0" i="0">
-                          <a:solidFill>
-                            <a:srgbClr val="1A1A1A"/>
-                          </a:solidFill>
-                          <a:latin typeface="Helvetica Neue"/>
-                        </a:rPr>
-                        <a:t>fetal / obstetric</a:t>
-                      </a:r>
-                    </a:p>
-                  </a:txBody>
-                  <a:tcPr marL="45720" marR="45720" marT="18288" marB="18288" anchor="t"/>
-                </a:tc>
-                <a:tc>
-                  <a:txBody>
-                    <a:bodyPr wrap="square"/>
-                    <a:lstStyle/>
-                    <a:p>
-                      <a:r>
-                        <a:rPr sz="828" b="0" i="0">
-                          <a:solidFill>
-                            <a:srgbClr val="1A1A1A"/>
-                          </a:solidFill>
-                          <a:latin typeface="Helvetica Neue"/>
-                        </a:rPr>
-                        <a:t>Checks that the required fetal views were obtained and are of usable quality (Detect); flags images suspicious for anomalies (Suspect)</a:t>
-                      </a:r>
-                    </a:p>
-                  </a:txBody>
-                  <a:tcPr marL="45720" marR="45720" marT="18288" marB="18288" anchor="t"/>
-                </a:tc>
-                <a:tc>
-                  <a:txBody>
-                    <a:bodyPr wrap="square"/>
-                    <a:lstStyle/>
-                    <a:p>
-                      <a:r>
-                        <a:rPr sz="828" b="0" i="0">
-                          <a:solidFill>
-                            <a:srgbClr val="1A1A1A"/>
-                          </a:solidFill>
-                          <a:latin typeface="Helvetica Neue"/>
-                        </a:rPr>
-                        <a:t>Prenatal; every FDA entry states a fetal population [K252433, 2026]</a:t>
-                      </a:r>
-                    </a:p>
-                  </a:txBody>
-                  <a:tcPr marL="45720" marR="45720" marT="18288" marB="18288" anchor="t"/>
-                </a:tc>
-                <a:tc>
-                  <a:txBody>
-                    <a:bodyPr wrap="square"/>
-                    <a:lstStyle/>
-                    <a:p>
-                      <a:r>
-                        <a:rPr sz="828" b="0" i="0">
-                          <a:solidFill>
-                            <a:srgbClr val="1A1A1A"/>
-                          </a:solidFill>
-                          <a:latin typeface="Helvetica Neue"/>
-                        </a:rPr>
-                        <a:t>Early deployments / pilots</a:t>
-                      </a:r>
-                    </a:p>
-                  </a:txBody>
-                  <a:tcPr marL="45720" marR="45720" marT="18288" marB="18288" anchor="t"/>
-                </a:tc>
-              </a:tr>
-              <a:tr h="433425">
-                <a:tc>
-                  <a:txBody>
-                    <a:bodyPr wrap="square"/>
-                    <a:lstStyle/>
-                    <a:p>
-                      <a:r>
-                        <a:rPr sz="828" b="0" i="0">
-                          <a:solidFill>
-                            <a:srgbClr val="1A1A1A"/>
-                          </a:solidFill>
-                          <a:latin typeface="Helvetica Neue"/>
-                        </a:rPr>
-                        <a:t>Delivery Date AI</a:t>
-                      </a:r>
-                    </a:p>
-                  </a:txBody>
-                  <a:tcPr marL="45720" marR="45720" marT="18288" marB="18288" anchor="t"/>
-                </a:tc>
-                <a:tc>
-                  <a:txBody>
-                    <a:bodyPr wrap="square"/>
-                    <a:lstStyle/>
-                    <a:p>
-                      <a:r>
-                        <a:rPr sz="828" b="0" i="0">
-                          <a:solidFill>
-                            <a:srgbClr val="1A1A1A"/>
-                          </a:solidFill>
-                          <a:latin typeface="Helvetica Neue"/>
-                        </a:rPr>
-                        <a:t>Ultrasound AI</a:t>
-                      </a:r>
-                    </a:p>
-                  </a:txBody>
-                  <a:tcPr marL="45720" marR="45720" marT="18288" marB="18288" anchor="t"/>
-                </a:tc>
-                <a:tc>
-                  <a:txBody>
-                    <a:bodyPr wrap="square"/>
-                    <a:lstStyle/>
-                    <a:p>
-                      <a:r>
-                        <a:rPr sz="828" b="0" i="0">
-                          <a:solidFill>
-                            <a:srgbClr val="1A1A1A"/>
-                          </a:solidFill>
-                          <a:latin typeface="Helvetica Neue"/>
-                        </a:rPr>
-                        <a:t>fetal / obstetric</a:t>
-                      </a:r>
-                    </a:p>
-                  </a:txBody>
-                  <a:tcPr marL="45720" marR="45720" marT="18288" marB="18288" anchor="t"/>
-                </a:tc>
-                <a:tc>
-                  <a:txBody>
-                    <a:bodyPr wrap="square"/>
-                    <a:lstStyle/>
-                    <a:p>
-                      <a:r>
-                        <a:rPr sz="828" b="0" i="0">
-                          <a:solidFill>
-                            <a:srgbClr val="1A1A1A"/>
-                          </a:solidFill>
-                          <a:latin typeface="Helvetica Neue"/>
-                        </a:rPr>
-                        <a:t>Predicts the delivery date from a second- or third-trimester ultrasound when dating is unreliable</a:t>
-                      </a:r>
-                    </a:p>
-                  </a:txBody>
-                  <a:tcPr marL="45720" marR="45720" marT="18288" marB="18288" anchor="t"/>
-                </a:tc>
-                <a:tc>
-                  <a:txBody>
-                    <a:bodyPr wrap="square"/>
-                    <a:lstStyle/>
-                    <a:p>
-                      <a:r>
-                        <a:rPr sz="828" b="0" i="0">
-                          <a:solidFill>
-                            <a:srgbClr val="1A1A1A"/>
-                          </a:solidFill>
-                          <a:latin typeface="Helvetica Neue"/>
-                        </a:rPr>
-                        <a:t>Prenatal; the first De Novo of its kind (a new device class) [DEN250007, 2026]</a:t>
-                      </a:r>
-                    </a:p>
-                  </a:txBody>
-                  <a:tcPr marL="45720" marR="45720" marT="18288" marB="18288" anchor="t"/>
-                </a:tc>
-                <a:tc>
-                  <a:txBody>
-                    <a:bodyPr wrap="square"/>
-                    <a:lstStyle/>
-                    <a:p>
-                      <a:r>
-                        <a:rPr sz="828" b="0" i="0">
-                          <a:solidFill>
-                            <a:srgbClr val="1A1A1A"/>
-                          </a:solidFill>
-                          <a:latin typeface="Helvetica Neue"/>
-                        </a:rPr>
-                        <a:t>Newly authorized; clinical experience limited</a:t>
-                      </a:r>
-                    </a:p>
-                  </a:txBody>
-                  <a:tcPr marL="45720" marR="45720" marT="18288" marB="18288" anchor="t"/>
-                </a:tc>
-              </a:tr>
-              <a:tr h="559612">
-                <a:tc>
-                  <a:txBody>
-                    <a:bodyPr wrap="square"/>
-                    <a:lstStyle/>
-                    <a:p>
-                      <a:r>
-                        <a:rPr sz="828" b="0" i="0">
-                          <a:solidFill>
-                            <a:srgbClr val="1A1A1A"/>
-                          </a:solidFill>
-                          <a:latin typeface="Helvetica Neue"/>
-                        </a:rPr>
-                        <a:t>Swoop Portable MR + BrainInsight</a:t>
-                      </a:r>
-                    </a:p>
-                  </a:txBody>
-                  <a:tcPr marL="45720" marR="45720" marT="18288" marB="18288" anchor="t"/>
-                </a:tc>
-                <a:tc>
-                  <a:txBody>
-                    <a:bodyPr wrap="square"/>
-                    <a:lstStyle/>
-                    <a:p>
-                      <a:r>
-                        <a:rPr sz="828" b="0" i="0">
-                          <a:solidFill>
-                            <a:srgbClr val="1A1A1A"/>
-                          </a:solidFill>
-                          <a:latin typeface="Helvetica Neue"/>
-                        </a:rPr>
-                        <a:t>Hyperfine</a:t>
-                      </a:r>
-                    </a:p>
-                  </a:txBody>
-                  <a:tcPr marL="45720" marR="45720" marT="18288" marB="18288" anchor="t"/>
-                </a:tc>
-                <a:tc>
-                  <a:txBody>
-                    <a:bodyPr wrap="square"/>
-                    <a:lstStyle/>
-                    <a:p>
-                      <a:r>
-                        <a:rPr sz="828" b="0" i="0">
-                          <a:solidFill>
-                            <a:srgbClr val="1A1A1A"/>
-                          </a:solidFill>
-                          <a:latin typeface="Helvetica Neue"/>
-                        </a:rPr>
-                        <a:t>brain / neurologic</a:t>
-                      </a:r>
-                    </a:p>
-                  </a:txBody>
-                  <a:tcPr marL="45720" marR="45720" marT="18288" marB="18288" anchor="t"/>
-                </a:tc>
-                <a:tc>
-                  <a:txBody>
-                    <a:bodyPr wrap="square"/>
-                    <a:lstStyle/>
-                    <a:p>
-                      <a:r>
-                        <a:rPr sz="828" b="0" i="0">
-                          <a:solidFill>
-                            <a:srgbClr val="1A1A1A"/>
-                          </a:solidFill>
-                          <a:latin typeface="Helvetica Neue"/>
-                        </a:rPr>
-                        <a:t>Bedside low-field brain MRI with deep-learning reconstruction; BrainInsight measures brain volumes and midline shift</a:t>
-                      </a:r>
-                    </a:p>
-                  </a:txBody>
-                  <a:tcPr marL="45720" marR="45720" marT="18288" marB="18288" anchor="t"/>
-                </a:tc>
-                <a:tc>
-                  <a:txBody>
-                    <a:bodyPr wrap="square"/>
-                    <a:lstStyle/>
-                    <a:p>
-                      <a:r>
-                        <a:rPr sz="828" b="0" i="0">
-                          <a:solidFill>
-                            <a:srgbClr val="1A1A1A"/>
-                          </a:solidFill>
-                          <a:latin typeface="Helvetica Neue"/>
-                        </a:rPr>
-                        <a:t>Decision summaries state a pediatric population; bedside imaging may reduce transport risks in the NICU and PICU [K253489, 2025]</a:t>
-                      </a:r>
-                    </a:p>
-                  </a:txBody>
-                  <a:tcPr marL="45720" marR="45720" marT="18288" marB="18288" anchor="t"/>
-                </a:tc>
-                <a:tc>
-                  <a:txBody>
-                    <a:bodyPr wrap="square"/>
-                    <a:lstStyle/>
-                    <a:p>
-                      <a:r>
-                        <a:rPr sz="828" b="0" i="0">
-                          <a:solidFill>
-                            <a:srgbClr val="1A1A1A"/>
-                          </a:solidFill>
-                          <a:latin typeface="Helvetica Neue"/>
-                        </a:rPr>
-                        <a:t>In pediatric pilots</a:t>
-                      </a:r>
-                    </a:p>
-                  </a:txBody>
-                  <a:tcPr marL="45720" marR="45720" marT="18288" marB="18288" anchor="t"/>
-                </a:tc>
-              </a:tr>
-              <a:tr h="307238">
-                <a:tc>
-                  <a:txBody>
-                    <a:bodyPr wrap="square"/>
-                    <a:lstStyle/>
-                    <a:p>
-                      <a:r>
-                        <a:rPr sz="828" b="0" i="0">
-                          <a:solidFill>
-                            <a:srgbClr val="1A1A1A"/>
-                          </a:solidFill>
-                          <a:latin typeface="Helvetica Neue"/>
-                        </a:rPr>
-                        <a:t>spineEOS / VEA Align</a:t>
-                      </a:r>
-                    </a:p>
-                  </a:txBody>
-                  <a:tcPr marL="45720" marR="45720" marT="18288" marB="18288" anchor="t"/>
-                </a:tc>
-                <a:tc>
-                  <a:txBody>
-                    <a:bodyPr wrap="square"/>
-                    <a:lstStyle/>
-                    <a:p>
-                      <a:r>
-                        <a:rPr sz="828" b="0" i="0">
-                          <a:solidFill>
-                            <a:srgbClr val="1A1A1A"/>
-                          </a:solidFill>
-                          <a:latin typeface="Helvetica Neue"/>
-                        </a:rPr>
-                        <a:t>EOS imaging (Alphatec)</a:t>
-                      </a:r>
-                    </a:p>
-                  </a:txBody>
-                  <a:tcPr marL="45720" marR="45720" marT="18288" marB="18288" anchor="t"/>
-                </a:tc>
-                <a:tc>
-                  <a:txBody>
-                    <a:bodyPr wrap="square"/>
-                    <a:lstStyle/>
-                    <a:p>
-                      <a:r>
-                        <a:rPr sz="828" b="0" i="0">
-                          <a:solidFill>
-                            <a:srgbClr val="1A1A1A"/>
-                          </a:solidFill>
-                          <a:latin typeface="Helvetica Neue"/>
-                        </a:rPr>
-                        <a:t>spine / scoliosis</a:t>
-                      </a:r>
-                    </a:p>
-                  </a:txBody>
-                  <a:tcPr marL="45720" marR="45720" marT="18288" marB="18288" anchor="t"/>
-                </a:tc>
-                <a:tc>
-                  <a:txBody>
-                    <a:bodyPr wrap="square"/>
-                    <a:lstStyle/>
-                    <a:p>
-                      <a:r>
-                        <a:rPr sz="828" b="0" i="0">
-                          <a:solidFill>
-                            <a:srgbClr val="1A1A1A"/>
-                          </a:solidFill>
-                          <a:latin typeface="Helvetica Neue"/>
-                        </a:rPr>
-                        <a:t>Automated 3D spine and lower-limb modeling from biplanar low-dose full-body radiographs</a:t>
-                      </a:r>
-                    </a:p>
-                  </a:txBody>
-                  <a:tcPr marL="45720" marR="45720" marT="18288" marB="18288" anchor="t"/>
-                </a:tc>
-                <a:tc>
-                  <a:txBody>
-                    <a:bodyPr wrap="square"/>
-                    <a:lstStyle/>
-                    <a:p>
-                      <a:r>
-                        <a:rPr sz="828" b="0" i="0">
-                          <a:solidFill>
-                            <a:srgbClr val="1A1A1A"/>
-                          </a:solidFill>
-                          <a:latin typeface="Helvetica Neue"/>
-                        </a:rPr>
-                        <a:t>Lower-dose imaging for children who need repeated scoliosis follow-up [K251747, 2025]</a:t>
-                      </a:r>
-                    </a:p>
-                  </a:txBody>
-                  <a:tcPr marL="45720" marR="45720" marT="18288" marB="18288" anchor="t"/>
-                </a:tc>
-                <a:tc>
-                  <a:txBody>
-                    <a:bodyPr wrap="square"/>
-                    <a:lstStyle/>
-                    <a:p>
-                      <a:r>
-                        <a:rPr sz="828" b="0" i="0">
-                          <a:solidFill>
-                            <a:srgbClr val="1A1A1A"/>
-                          </a:solidFill>
-                          <a:latin typeface="Helvetica Neue"/>
-                        </a:rPr>
-                        <a:t>Widely deployed (pediatric orthopedics)</a:t>
-                      </a:r>
-                    </a:p>
-                  </a:txBody>
-                  <a:tcPr marL="45720" marR="45720" marT="18288" marB="18288" anchor="t"/>
-                </a:tc>
-              </a:tr>
-              <a:tr h="433425">
-                <a:tc>
-                  <a:txBody>
-                    <a:bodyPr wrap="square"/>
-                    <a:lstStyle/>
-                    <a:p>
-                      <a:r>
-                        <a:rPr sz="828" b="0" i="0">
-                          <a:solidFill>
-                            <a:srgbClr val="1A1A1A"/>
-                          </a:solidFill>
-                          <a:latin typeface="Helvetica Neue"/>
-                        </a:rPr>
-                        <a:t>CoLumbo</a:t>
-                      </a:r>
-                    </a:p>
-                  </a:txBody>
-                  <a:tcPr marL="45720" marR="45720" marT="18288" marB="18288" anchor="t"/>
-                </a:tc>
-                <a:tc>
-                  <a:txBody>
-                    <a:bodyPr wrap="square"/>
-                    <a:lstStyle/>
-                    <a:p>
-                      <a:r>
-                        <a:rPr sz="828" b="0" i="0">
-                          <a:solidFill>
-                            <a:srgbClr val="1A1A1A"/>
-                          </a:solidFill>
-                          <a:latin typeface="Helvetica Neue"/>
-                        </a:rPr>
-                        <a:t>Smart Soft Healthcare</a:t>
-                      </a:r>
-                    </a:p>
-                  </a:txBody>
-                  <a:tcPr marL="45720" marR="45720" marT="18288" marB="18288" anchor="t"/>
-                </a:tc>
-                <a:tc>
-                  <a:txBody>
-                    <a:bodyPr wrap="square"/>
-                    <a:lstStyle/>
-                    <a:p>
-                      <a:r>
-                        <a:rPr sz="828" b="0" i="0">
-                          <a:solidFill>
-                            <a:srgbClr val="1A1A1A"/>
-                          </a:solidFill>
-                          <a:latin typeface="Helvetica Neue"/>
-                        </a:rPr>
-                        <a:t>spine / scoliosis</a:t>
-                      </a:r>
-                    </a:p>
-                  </a:txBody>
-                  <a:tcPr marL="45720" marR="45720" marT="18288" marB="18288" anchor="t"/>
-                </a:tc>
-                <a:tc>
-                  <a:txBody>
-                    <a:bodyPr wrap="square"/>
-                    <a:lstStyle/>
-                    <a:p>
-                      <a:r>
-                        <a:rPr sz="828" b="0" i="0">
-                          <a:solidFill>
-                            <a:srgbClr val="1A1A1A"/>
-                          </a:solidFill>
-                          <a:latin typeface="Helvetica Neue"/>
-                        </a:rPr>
-                        <a:t>Spine MRI segmentation, measurement and structured reporting, lumbar and cervical</a:t>
-                      </a:r>
-                    </a:p>
-                  </a:txBody>
-                  <a:tcPr marL="45720" marR="45720" marT="18288" marB="18288" anchor="t"/>
-                </a:tc>
-                <a:tc>
-                  <a:txBody>
-                    <a:bodyPr wrap="square"/>
-                    <a:lstStyle/>
-                    <a:p>
-                      <a:r>
-                        <a:rPr sz="828" b="0" i="0">
-                          <a:solidFill>
-                            <a:srgbClr val="1A1A1A"/>
-                          </a:solidFill>
-                          <a:latin typeface="Helvetica Neue"/>
-                        </a:rPr>
-                        <a:t>Decision summaries state a pediatric population; no pediatric-specific performance reported [K254015, 2026]</a:t>
-                      </a:r>
-                    </a:p>
-                  </a:txBody>
-                  <a:tcPr marL="45720" marR="45720" marT="18288" marB="18288" anchor="t"/>
-                </a:tc>
-                <a:tc>
-                  <a:txBody>
-                    <a:bodyPr wrap="square"/>
-                    <a:lstStyle/>
-                    <a:p>
-                      <a:r>
-                        <a:rPr sz="828" b="0" i="0">
-                          <a:solidFill>
-                            <a:srgbClr val="1A1A1A"/>
-                          </a:solidFill>
-                          <a:latin typeface="Helvetica Neue"/>
-                        </a:rPr>
-                        <a:t>Early deployments</a:t>
-                      </a:r>
-                    </a:p>
-                  </a:txBody>
-                  <a:tcPr marL="45720" marR="45720" marT="18288" marB="18288" anchor="t"/>
-                </a:tc>
-              </a:tr>
-            </a:tbl>
-          </a:graphicData>
-        </a:graphic>
-      </p:graphicFrame>
-      <p:sp>
-        <p:nvSpPr>
-          <p:cNvPr id="5" name="TextBox 4"/>
-          <p:cNvSpPr txBox="1"/>
-          <p:nvPr/>
-        </p:nvSpPr>
-        <p:spPr>
-          <a:xfrm>
-            <a:off x="411480" y="5954572"/>
-            <a:ext cx="11368735" cy="444881"/>
+            <a:off x="411480" y="877824"/>
+            <a:ext cx="11368735" cy="406400"/>
           </a:xfrm>
           <a:prstGeom prst="rect">
             <a:avLst/>
@@ -46789,17 +45196,52 @@
           <a:p>
             <a:pPr algn="l">
               <a:spcAft>
-                <a:spcPts val="354"/>
+                <a:spcPts val="560"/>
               </a:spcAft>
             </a:pPr>
             <a:r>
-              <a:rPr sz="1012" b="0" i="0">
+              <a:rPr sz="1600" b="0" i="0">
                 <a:solidFill>
                   <a:srgbClr val="1A1A1A"/>
                 </a:solidFill>
                 <a:latin typeface="Helvetica Neue"/>
               </a:rPr>
-              <a:t>Square brackets identify the FDA submission and decision year supporting the pediatric description. No brackets means no US authorization was identified. Clinical use reflects our assessment, not measured adoption. Many large-vendor authorizations cover whole scanners with pediatric imaging listed as one application.</a:t>
+              <a:t>No</a:t>
+            </a:r>
+          </a:p>
+        </p:txBody>
+      </p:sp>
+      <p:sp>
+        <p:nvSpPr>
+          <p:cNvPr id="4" name="page number"/>
+          <p:cNvSpPr txBox="1"/>
+          <p:nvPr/>
+        </p:nvSpPr>
+        <p:spPr>
+          <a:xfrm>
+            <a:off x="10728655" y="6510528"/>
+            <a:ext cx="1188720" cy="274320"/>
+          </a:xfrm>
+          <a:prstGeom prst="rect">
+            <a:avLst/>
+          </a:prstGeom>
+          <a:noFill/>
+        </p:spPr>
+        <p:txBody>
+          <a:bodyPr wrap="none">
+            <a:spAutoFit/>
+          </a:bodyPr>
+          <a:lstStyle/>
+          <a:p>
+            <a:pPr algn="r"/>
+            <a:r>
+              <a:rPr sz="1000">
+                <a:solidFill>
+                  <a:srgbClr val="6B6B6B"/>
+                </a:solidFill>
+                <a:latin typeface="Helvetica Neue"/>
+              </a:rPr>
+              <a:t>35 / 36</a:t>
             </a:r>
           </a:p>
         </p:txBody>
@@ -46869,6 +45311,1610 @@
                 </a:solidFill>
                 <a:latin typeface="Helvetica Neue"/>
               </a:rPr>
+              <a:t>Commercial product inventory: backup (part 1)</a:t>
+            </a:r>
+          </a:p>
+        </p:txBody>
+      </p:sp>
+      <p:sp>
+        <p:nvSpPr>
+          <p:cNvPr id="3" name="category"/>
+          <p:cNvSpPr txBox="1"/>
+          <p:nvPr/>
+        </p:nvSpPr>
+        <p:spPr>
+          <a:xfrm>
+            <a:off x="8259775" y="18288"/>
+            <a:ext cx="3657600" cy="274320"/>
+          </a:xfrm>
+          <a:prstGeom prst="rect">
+            <a:avLst/>
+          </a:prstGeom>
+          <a:noFill/>
+        </p:spPr>
+        <p:txBody>
+          <a:bodyPr wrap="none">
+            <a:spAutoFit/>
+          </a:bodyPr>
+          <a:lstStyle/>
+          <a:p>
+            <a:pPr algn="r"/>
+            <a:r>
+              <a:rPr sz="1100" b="1">
+                <a:solidFill>
+                  <a:srgbClr val="FFFFFF"/>
+                </a:solidFill>
+                <a:latin typeface="Helvetica Neue"/>
+              </a:rPr>
+              <a:t>COMMERCIAL SOFTWARE</a:t>
+            </a:r>
+          </a:p>
+        </p:txBody>
+      </p:sp>
+      <p:graphicFrame>
+        <p:nvGraphicFramePr>
+          <p:cNvPr id="4" name="Table 3"/>
+          <p:cNvGraphicFramePr>
+            <a:graphicFrameLocks noGrp="1"/>
+          </p:cNvGraphicFramePr>
+          <p:nvPr/>
+        </p:nvGraphicFramePr>
+        <p:xfrm>
+          <a:off x="411480" y="877824"/>
+          <a:ext cx="11368733" cy="5003590"/>
+        </p:xfrm>
+        <a:graphic>
+          <a:graphicData uri="http://schemas.openxmlformats.org/drawingml/2006/table">
+            <a:tbl>
+              <a:tblPr firstRow="1" bandRow="1">
+                <a:tableStyleId>{5C22544A-7EE6-4342-B048-85BDC9FD1C3A}</a:tableStyleId>
+              </a:tblPr>
+              <a:tblGrid>
+                <a:gridCol w="1278343"/>
+                <a:gridCol w="1107897"/>
+                <a:gridCol w="1499923"/>
+                <a:gridCol w="3221425"/>
+                <a:gridCol w="2761222"/>
+                <a:gridCol w="1499923"/>
+              </a:tblGrid>
+              <a:tr h="181051">
+                <a:tc>
+                  <a:txBody>
+                    <a:bodyPr wrap="square"/>
+                    <a:lstStyle/>
+                    <a:p>
+                      <a:r>
+                        <a:rPr sz="828" b="1" i="0">
+                          <a:solidFill>
+                            <a:srgbClr val="FFFFFF"/>
+                          </a:solidFill>
+                          <a:latin typeface="Helvetica Neue"/>
+                        </a:rPr>
+                        <a:t>Product</a:t>
+                      </a:r>
+                    </a:p>
+                  </a:txBody>
+                  <a:tcPr marL="45720" marR="45720" marT="18288" marB="18288" anchor="t"/>
+                </a:tc>
+                <a:tc>
+                  <a:txBody>
+                    <a:bodyPr wrap="square"/>
+                    <a:lstStyle/>
+                    <a:p>
+                      <a:r>
+                        <a:rPr sz="828" b="1" i="0">
+                          <a:solidFill>
+                            <a:srgbClr val="FFFFFF"/>
+                          </a:solidFill>
+                          <a:latin typeface="Helvetica Neue"/>
+                        </a:rPr>
+                        <a:t>Vendor</a:t>
+                      </a:r>
+                    </a:p>
+                  </a:txBody>
+                  <a:tcPr marL="45720" marR="45720" marT="18288" marB="18288" anchor="t"/>
+                </a:tc>
+                <a:tc>
+                  <a:txBody>
+                    <a:bodyPr wrap="square"/>
+                    <a:lstStyle/>
+                    <a:p>
+                      <a:r>
+                        <a:rPr sz="828" b="1" i="0">
+                          <a:solidFill>
+                            <a:srgbClr val="FFFFFF"/>
+                          </a:solidFill>
+                          <a:latin typeface="Helvetica Neue"/>
+                        </a:rPr>
+                        <a:t>Clinical problem</a:t>
+                      </a:r>
+                    </a:p>
+                  </a:txBody>
+                  <a:tcPr marL="45720" marR="45720" marT="18288" marB="18288" anchor="t"/>
+                </a:tc>
+                <a:tc>
+                  <a:txBody>
+                    <a:bodyPr wrap="square"/>
+                    <a:lstStyle/>
+                    <a:p>
+                      <a:r>
+                        <a:rPr sz="828" b="1" i="0">
+                          <a:solidFill>
+                            <a:srgbClr val="FFFFFF"/>
+                          </a:solidFill>
+                          <a:latin typeface="Helvetica Neue"/>
+                        </a:rPr>
+                        <a:t>What it does</a:t>
+                      </a:r>
+                    </a:p>
+                  </a:txBody>
+                  <a:tcPr marL="45720" marR="45720" marT="18288" marB="18288" anchor="t"/>
+                </a:tc>
+                <a:tc>
+                  <a:txBody>
+                    <a:bodyPr wrap="square"/>
+                    <a:lstStyle/>
+                    <a:p>
+                      <a:r>
+                        <a:rPr sz="828" b="1" i="0">
+                          <a:solidFill>
+                            <a:srgbClr val="FFFFFF"/>
+                          </a:solidFill>
+                          <a:latin typeface="Helvetica Neue"/>
+                        </a:rPr>
+                        <a:t>Pediatric scope</a:t>
+                      </a:r>
+                    </a:p>
+                  </a:txBody>
+                  <a:tcPr marL="45720" marR="45720" marT="18288" marB="18288" anchor="t"/>
+                </a:tc>
+                <a:tc>
+                  <a:txBody>
+                    <a:bodyPr wrap="square"/>
+                    <a:lstStyle/>
+                    <a:p>
+                      <a:r>
+                        <a:rPr sz="828" b="1" i="0">
+                          <a:solidFill>
+                            <a:srgbClr val="FFFFFF"/>
+                          </a:solidFill>
+                          <a:latin typeface="Helvetica Neue"/>
+                        </a:rPr>
+                        <a:t>Clinical use</a:t>
+                      </a:r>
+                    </a:p>
+                  </a:txBody>
+                  <a:tcPr marL="45720" marR="45720" marT="18288" marB="18288" anchor="t"/>
+                </a:tc>
+              </a:tr>
+              <a:tr h="433425">
+                <a:tc>
+                  <a:txBody>
+                    <a:bodyPr wrap="square"/>
+                    <a:lstStyle/>
+                    <a:p>
+                      <a:r>
+                        <a:rPr sz="828" b="0" i="0">
+                          <a:solidFill>
+                            <a:srgbClr val="1A1A1A"/>
+                          </a:solidFill>
+                          <a:latin typeface="Helvetica Neue"/>
+                        </a:rPr>
+                        <a:t>BoneXpert</a:t>
+                      </a:r>
+                    </a:p>
+                  </a:txBody>
+                  <a:tcPr marL="45720" marR="45720" marT="18288" marB="18288" anchor="t"/>
+                </a:tc>
+                <a:tc>
+                  <a:txBody>
+                    <a:bodyPr wrap="square"/>
+                    <a:lstStyle/>
+                    <a:p>
+                      <a:r>
+                        <a:rPr sz="828" b="0" i="0">
+                          <a:solidFill>
+                            <a:srgbClr val="1A1A1A"/>
+                          </a:solidFill>
+                          <a:latin typeface="Helvetica Neue"/>
+                        </a:rPr>
+                        <a:t>Visiana</a:t>
+                      </a:r>
+                    </a:p>
+                  </a:txBody>
+                  <a:tcPr marL="45720" marR="45720" marT="18288" marB="18288" anchor="t"/>
+                </a:tc>
+                <a:tc>
+                  <a:txBody>
+                    <a:bodyPr wrap="square"/>
+                    <a:lstStyle/>
+                    <a:p>
+                      <a:r>
+                        <a:rPr sz="828" b="0" i="0">
+                          <a:solidFill>
+                            <a:srgbClr val="1A1A1A"/>
+                          </a:solidFill>
+                          <a:latin typeface="Helvetica Neue"/>
+                        </a:rPr>
+                        <a:t>bone age / growth</a:t>
+                      </a:r>
+                    </a:p>
+                  </a:txBody>
+                  <a:tcPr marL="45720" marR="45720" marT="18288" marB="18288" anchor="t"/>
+                </a:tc>
+                <a:tc>
+                  <a:txBody>
+                    <a:bodyPr wrap="square"/>
+                    <a:lstStyle/>
+                    <a:p>
+                      <a:r>
+                        <a:rPr sz="828" b="0" i="0">
+                          <a:solidFill>
+                            <a:srgbClr val="1A1A1A"/>
+                          </a:solidFill>
+                          <a:latin typeface="Helvetica Neue"/>
+                        </a:rPr>
+                        <a:t>Automated Greulich–Pyle and Tanner–Whitehouse bone age plus a Bone Health Index, from a hand radiograph</a:t>
+                      </a:r>
+                    </a:p>
+                  </a:txBody>
+                  <a:tcPr marL="45720" marR="45720" marT="18288" marB="18288" anchor="t"/>
+                </a:tc>
+                <a:tc>
+                  <a:txBody>
+                    <a:bodyPr wrap="square"/>
+                    <a:lstStyle/>
+                    <a:p>
+                      <a:r>
+                        <a:rPr sz="828" b="0" i="0">
+                          <a:solidFill>
+                            <a:srgbClr val="1A1A1A"/>
+                          </a:solidFill>
+                          <a:latin typeface="Helvetica Neue"/>
+                        </a:rPr>
+                        <a:t>Built for children; CE-marked and in routine European use; FDA 510(k) cleared September 2026 [K262390, 2026]</a:t>
+                      </a:r>
+                    </a:p>
+                  </a:txBody>
+                  <a:tcPr marL="45720" marR="45720" marT="18288" marB="18288" anchor="t"/>
+                </a:tc>
+                <a:tc>
+                  <a:txBody>
+                    <a:bodyPr wrap="square"/>
+                    <a:lstStyle/>
+                    <a:p>
+                      <a:r>
+                        <a:rPr sz="828" b="0" i="0">
+                          <a:solidFill>
+                            <a:srgbClr val="1A1A1A"/>
+                          </a:solidFill>
+                          <a:latin typeface="Helvetica Neue"/>
+                        </a:rPr>
+                        <a:t>Widely deployed (Europe)</a:t>
+                      </a:r>
+                    </a:p>
+                  </a:txBody>
+                  <a:tcPr marL="45720" marR="45720" marT="18288" marB="18288" anchor="t"/>
+                </a:tc>
+              </a:tr>
+              <a:tr h="433425">
+                <a:tc>
+                  <a:txBody>
+                    <a:bodyPr wrap="square"/>
+                    <a:lstStyle/>
+                    <a:p>
+                      <a:r>
+                        <a:rPr sz="828" b="0" i="0">
+                          <a:solidFill>
+                            <a:srgbClr val="1A1A1A"/>
+                          </a:solidFill>
+                          <a:latin typeface="Helvetica Neue"/>
+                        </a:rPr>
+                        <a:t>BoneView</a:t>
+                      </a:r>
+                    </a:p>
+                  </a:txBody>
+                  <a:tcPr marL="45720" marR="45720" marT="18288" marB="18288" anchor="t"/>
+                </a:tc>
+                <a:tc>
+                  <a:txBody>
+                    <a:bodyPr wrap="square"/>
+                    <a:lstStyle/>
+                    <a:p>
+                      <a:r>
+                        <a:rPr sz="828" b="0" i="0">
+                          <a:solidFill>
+                            <a:srgbClr val="1A1A1A"/>
+                          </a:solidFill>
+                          <a:latin typeface="Helvetica Neue"/>
+                        </a:rPr>
+                        <a:t>Gleamer</a:t>
+                      </a:r>
+                    </a:p>
+                  </a:txBody>
+                  <a:tcPr marL="45720" marR="45720" marT="18288" marB="18288" anchor="t"/>
+                </a:tc>
+                <a:tc>
+                  <a:txBody>
+                    <a:bodyPr wrap="square"/>
+                    <a:lstStyle/>
+                    <a:p>
+                      <a:r>
+                        <a:rPr sz="828" b="0" i="0">
+                          <a:solidFill>
+                            <a:srgbClr val="1A1A1A"/>
+                          </a:solidFill>
+                          <a:latin typeface="Helvetica Neue"/>
+                        </a:rPr>
+                        <a:t>fracture / trauma</a:t>
+                      </a:r>
+                    </a:p>
+                  </a:txBody>
+                  <a:tcPr marL="45720" marR="45720" marT="18288" marB="18288" anchor="t"/>
+                </a:tc>
+                <a:tc>
+                  <a:txBody>
+                    <a:bodyPr wrap="square"/>
+                    <a:lstStyle/>
+                    <a:p>
+                      <a:r>
+                        <a:rPr sz="828" b="0" i="0">
+                          <a:solidFill>
+                            <a:srgbClr val="1A1A1A"/>
+                          </a:solidFill>
+                          <a:latin typeface="Helvetica Neue"/>
+                        </a:rPr>
+                        <a:t>Fracture detection on trauma radiographs, presented as regions of interest alongside the image</a:t>
+                      </a:r>
+                    </a:p>
+                  </a:txBody>
+                  <a:tcPr marL="45720" marR="45720" marT="18288" marB="18288" anchor="t"/>
+                </a:tc>
+                <a:tc>
+                  <a:txBody>
+                    <a:bodyPr wrap="square"/>
+                    <a:lstStyle/>
+                    <a:p>
+                      <a:r>
+                        <a:rPr sz="828" b="0" i="0">
+                          <a:solidFill>
+                            <a:srgbClr val="1A1A1A"/>
+                          </a:solidFill>
+                          <a:latin typeface="Helvetica Neue"/>
+                        </a:rPr>
+                        <a:t>US indication covers ages 2–21 for specified extremity views; pelvis, hip, femur, ribs and spine are adult-only [K222176, 2023]</a:t>
+                      </a:r>
+                    </a:p>
+                  </a:txBody>
+                  <a:tcPr marL="45720" marR="45720" marT="18288" marB="18288" anchor="t"/>
+                </a:tc>
+                <a:tc>
+                  <a:txBody>
+                    <a:bodyPr wrap="square"/>
+                    <a:lstStyle/>
+                    <a:p>
+                      <a:r>
+                        <a:rPr sz="828" b="0" i="0">
+                          <a:solidFill>
+                            <a:srgbClr val="1A1A1A"/>
+                          </a:solidFill>
+                          <a:latin typeface="Helvetica Neue"/>
+                        </a:rPr>
+                        <a:t>Widely deployed</a:t>
+                      </a:r>
+                    </a:p>
+                  </a:txBody>
+                  <a:tcPr marL="45720" marR="45720" marT="18288" marB="18288" anchor="t"/>
+                </a:tc>
+              </a:tr>
+              <a:tr h="433425">
+                <a:tc>
+                  <a:txBody>
+                    <a:bodyPr wrap="square"/>
+                    <a:lstStyle/>
+                    <a:p>
+                      <a:r>
+                        <a:rPr sz="828" b="0" i="0">
+                          <a:solidFill>
+                            <a:srgbClr val="1A1A1A"/>
+                          </a:solidFill>
+                          <a:latin typeface="Helvetica Neue"/>
+                        </a:rPr>
+                        <a:t>Rayvolve (AZtrauma)</a:t>
+                      </a:r>
+                    </a:p>
+                  </a:txBody>
+                  <a:tcPr marL="45720" marR="45720" marT="18288" marB="18288" anchor="t"/>
+                </a:tc>
+                <a:tc>
+                  <a:txBody>
+                    <a:bodyPr wrap="square"/>
+                    <a:lstStyle/>
+                    <a:p>
+                      <a:r>
+                        <a:rPr sz="828" b="0" i="0">
+                          <a:solidFill>
+                            <a:srgbClr val="1A1A1A"/>
+                          </a:solidFill>
+                          <a:latin typeface="Helvetica Neue"/>
+                        </a:rPr>
+                        <a:t>AZmed</a:t>
+                      </a:r>
+                    </a:p>
+                  </a:txBody>
+                  <a:tcPr marL="45720" marR="45720" marT="18288" marB="18288" anchor="t"/>
+                </a:tc>
+                <a:tc>
+                  <a:txBody>
+                    <a:bodyPr wrap="square"/>
+                    <a:lstStyle/>
+                    <a:p>
+                      <a:r>
+                        <a:rPr sz="828" b="0" i="0">
+                          <a:solidFill>
+                            <a:srgbClr val="1A1A1A"/>
+                          </a:solidFill>
+                          <a:latin typeface="Helvetica Neue"/>
+                        </a:rPr>
+                        <a:t>fracture / trauma</a:t>
+                      </a:r>
+                    </a:p>
+                  </a:txBody>
+                  <a:tcPr marL="45720" marR="45720" marT="18288" marB="18288" anchor="t"/>
+                </a:tc>
+                <a:tc>
+                  <a:txBody>
+                    <a:bodyPr wrap="square"/>
+                    <a:lstStyle/>
+                    <a:p>
+                      <a:r>
+                        <a:rPr sz="828" b="0" i="0">
+                          <a:solidFill>
+                            <a:srgbClr val="1A1A1A"/>
+                          </a:solidFill>
+                          <a:latin typeface="Helvetica Neue"/>
+                        </a:rPr>
+                        <a:t>Fracture and MSK finding detection on radiographs; sibling modules cover chest findings, measurements and bone age</a:t>
+                      </a:r>
+                    </a:p>
+                  </a:txBody>
+                  <a:tcPr marL="45720" marR="45720" marT="18288" marB="18288" anchor="t"/>
+                </a:tc>
+                <a:tc>
+                  <a:txBody>
+                    <a:bodyPr wrap="square"/>
+                    <a:lstStyle/>
+                    <a:p>
+                      <a:r>
+                        <a:rPr sz="828" b="0" i="0">
+                          <a:solidFill>
+                            <a:srgbClr val="1A1A1A"/>
+                          </a:solidFill>
+                          <a:latin typeface="Helvetica Neue"/>
+                        </a:rPr>
+                        <a:t>US fracture indication from age 2; the bone-age module is CE-marked only [K240845, 2024]</a:t>
+                      </a:r>
+                    </a:p>
+                  </a:txBody>
+                  <a:tcPr marL="45720" marR="45720" marT="18288" marB="18288" anchor="t"/>
+                </a:tc>
+                <a:tc>
+                  <a:txBody>
+                    <a:bodyPr wrap="square"/>
+                    <a:lstStyle/>
+                    <a:p>
+                      <a:r>
+                        <a:rPr sz="828" b="0" i="0">
+                          <a:solidFill>
+                            <a:srgbClr val="1A1A1A"/>
+                          </a:solidFill>
+                          <a:latin typeface="Helvetica Neue"/>
+                        </a:rPr>
+                        <a:t>Widely deployed</a:t>
+                      </a:r>
+                    </a:p>
+                  </a:txBody>
+                  <a:tcPr marL="45720" marR="45720" marT="18288" marB="18288" anchor="t"/>
+                </a:tc>
+              </a:tr>
+              <a:tr h="307238">
+                <a:tc>
+                  <a:txBody>
+                    <a:bodyPr wrap="square"/>
+                    <a:lstStyle/>
+                    <a:p>
+                      <a:r>
+                        <a:rPr sz="828" b="0" i="0">
+                          <a:solidFill>
+                            <a:srgbClr val="1A1A1A"/>
+                          </a:solidFill>
+                          <a:latin typeface="Helvetica Neue"/>
+                        </a:rPr>
+                        <a:t>TechCare Trauma</a:t>
+                      </a:r>
+                    </a:p>
+                  </a:txBody>
+                  <a:tcPr marL="45720" marR="45720" marT="18288" marB="18288" anchor="t"/>
+                </a:tc>
+                <a:tc>
+                  <a:txBody>
+                    <a:bodyPr wrap="square"/>
+                    <a:lstStyle/>
+                    <a:p>
+                      <a:r>
+                        <a:rPr sz="828" b="0" i="0">
+                          <a:solidFill>
+                            <a:srgbClr val="1A1A1A"/>
+                          </a:solidFill>
+                          <a:latin typeface="Helvetica Neue"/>
+                        </a:rPr>
+                        <a:t>Milvue</a:t>
+                      </a:r>
+                    </a:p>
+                  </a:txBody>
+                  <a:tcPr marL="45720" marR="45720" marT="18288" marB="18288" anchor="t"/>
+                </a:tc>
+                <a:tc>
+                  <a:txBody>
+                    <a:bodyPr wrap="square"/>
+                    <a:lstStyle/>
+                    <a:p>
+                      <a:r>
+                        <a:rPr sz="828" b="0" i="0">
+                          <a:solidFill>
+                            <a:srgbClr val="1A1A1A"/>
+                          </a:solidFill>
+                          <a:latin typeface="Helvetica Neue"/>
+                        </a:rPr>
+                        <a:t>fracture / trauma</a:t>
+                      </a:r>
+                    </a:p>
+                  </a:txBody>
+                  <a:tcPr marL="45720" marR="45720" marT="18288" marB="18288" anchor="t"/>
+                </a:tc>
+                <a:tc>
+                  <a:txBody>
+                    <a:bodyPr wrap="square"/>
+                    <a:lstStyle/>
+                    <a:p>
+                      <a:r>
+                        <a:rPr sz="828" b="0" i="0">
+                          <a:solidFill>
+                            <a:srgbClr val="1A1A1A"/>
+                          </a:solidFill>
+                          <a:latin typeface="Helvetica Neue"/>
+                        </a:rPr>
+                        <a:t>Trauma radiograph triage: fractures, effusions and dislocations flagged for the reader</a:t>
+                      </a:r>
+                    </a:p>
+                  </a:txBody>
+                  <a:tcPr marL="45720" marR="45720" marT="18288" marB="18288" anchor="t"/>
+                </a:tc>
+                <a:tc>
+                  <a:txBody>
+                    <a:bodyPr wrap="square"/>
+                    <a:lstStyle/>
+                    <a:p>
+                      <a:r>
+                        <a:rPr sz="828" b="0" i="0">
+                          <a:solidFill>
+                            <a:srgbClr val="1A1A1A"/>
+                          </a:solidFill>
+                          <a:latin typeface="Helvetica Neue"/>
+                        </a:rPr>
+                        <a:t>The decision summary states a pediatric population [K242171, 2025]</a:t>
+                      </a:r>
+                    </a:p>
+                  </a:txBody>
+                  <a:tcPr marL="45720" marR="45720" marT="18288" marB="18288" anchor="t"/>
+                </a:tc>
+                <a:tc>
+                  <a:txBody>
+                    <a:bodyPr wrap="square"/>
+                    <a:lstStyle/>
+                    <a:p>
+                      <a:r>
+                        <a:rPr sz="828" b="0" i="0">
+                          <a:solidFill>
+                            <a:srgbClr val="1A1A1A"/>
+                          </a:solidFill>
+                          <a:latin typeface="Helvetica Neue"/>
+                        </a:rPr>
+                        <a:t>Early US deployments</a:t>
+                      </a:r>
+                    </a:p>
+                  </a:txBody>
+                  <a:tcPr marL="45720" marR="45720" marT="18288" marB="18288" anchor="t"/>
+                </a:tc>
+              </a:tr>
+              <a:tr h="433425">
+                <a:tc>
+                  <a:txBody>
+                    <a:bodyPr wrap="square"/>
+                    <a:lstStyle/>
+                    <a:p>
+                      <a:r>
+                        <a:rPr sz="828" b="0" i="0">
+                          <a:solidFill>
+                            <a:srgbClr val="1A1A1A"/>
+                          </a:solidFill>
+                          <a:latin typeface="Helvetica Neue"/>
+                        </a:rPr>
+                        <a:t>EFAI Bonesuite XR Bone Age Pro</a:t>
+                      </a:r>
+                    </a:p>
+                  </a:txBody>
+                  <a:tcPr marL="45720" marR="45720" marT="18288" marB="18288" anchor="t"/>
+                </a:tc>
+                <a:tc>
+                  <a:txBody>
+                    <a:bodyPr wrap="square"/>
+                    <a:lstStyle/>
+                    <a:p>
+                      <a:r>
+                        <a:rPr sz="828" b="0" i="0">
+                          <a:solidFill>
+                            <a:srgbClr val="1A1A1A"/>
+                          </a:solidFill>
+                          <a:latin typeface="Helvetica Neue"/>
+                        </a:rPr>
+                        <a:t>Ever Fortune.AI</a:t>
+                      </a:r>
+                    </a:p>
+                  </a:txBody>
+                  <a:tcPr marL="45720" marR="45720" marT="18288" marB="18288" anchor="t"/>
+                </a:tc>
+                <a:tc>
+                  <a:txBody>
+                    <a:bodyPr wrap="square"/>
+                    <a:lstStyle/>
+                    <a:p>
+                      <a:r>
+                        <a:rPr sz="828" b="0" i="0">
+                          <a:solidFill>
+                            <a:srgbClr val="1A1A1A"/>
+                          </a:solidFill>
+                          <a:latin typeface="Helvetica Neue"/>
+                        </a:rPr>
+                        <a:t>bone age / growth</a:t>
+                      </a:r>
+                    </a:p>
+                  </a:txBody>
+                  <a:tcPr marL="45720" marR="45720" marT="18288" marB="18288" anchor="t"/>
+                </a:tc>
+                <a:tc>
+                  <a:txBody>
+                    <a:bodyPr wrap="square"/>
+                    <a:lstStyle/>
+                    <a:p>
+                      <a:r>
+                        <a:rPr sz="828" b="0" i="0">
+                          <a:solidFill>
+                            <a:srgbClr val="1A1A1A"/>
+                          </a:solidFill>
+                          <a:latin typeface="Helvetica Neue"/>
+                        </a:rPr>
+                        <a:t>Greulich–Pyle bone age from a PA left hand and wrist radiograph, as an adjunct to the radiologist</a:t>
+                      </a:r>
+                    </a:p>
+                  </a:txBody>
+                  <a:tcPr marL="45720" marR="45720" marT="18288" marB="18288" anchor="t"/>
+                </a:tc>
+                <a:tc>
+                  <a:txBody>
+                    <a:bodyPr wrap="square"/>
+                    <a:lstStyle/>
+                    <a:p>
+                      <a:r>
+                        <a:rPr sz="828" b="0" i="0">
+                          <a:solidFill>
+                            <a:srgbClr val="1A1A1A"/>
+                          </a:solidFill>
+                          <a:latin typeface="Helvetica Neue"/>
+                        </a:rPr>
+                        <a:t>FDA-cleared for ages 2–16 — a pediatric-specific US bone-age clearance [K234042, 2024]</a:t>
+                      </a:r>
+                    </a:p>
+                  </a:txBody>
+                  <a:tcPr marL="45720" marR="45720" marT="18288" marB="18288" anchor="t"/>
+                </a:tc>
+                <a:tc>
+                  <a:txBody>
+                    <a:bodyPr wrap="square"/>
+                    <a:lstStyle/>
+                    <a:p>
+                      <a:r>
+                        <a:rPr sz="828" b="0" i="0">
+                          <a:solidFill>
+                            <a:srgbClr val="1A1A1A"/>
+                          </a:solidFill>
+                          <a:latin typeface="Helvetica Neue"/>
+                        </a:rPr>
+                        <a:t>FDA-cleared, early adoption</a:t>
+                      </a:r>
+                    </a:p>
+                  </a:txBody>
+                  <a:tcPr marL="45720" marR="45720" marT="18288" marB="18288" anchor="t"/>
+                </a:tc>
+              </a:tr>
+              <a:tr h="307238">
+                <a:tc>
+                  <a:txBody>
+                    <a:bodyPr wrap="square"/>
+                    <a:lstStyle/>
+                    <a:p>
+                      <a:r>
+                        <a:rPr sz="828" b="0" i="0">
+                          <a:solidFill>
+                            <a:srgbClr val="1A1A1A"/>
+                          </a:solidFill>
+                          <a:latin typeface="Helvetica Neue"/>
+                        </a:rPr>
+                        <a:t>Physis</a:t>
+                      </a:r>
+                    </a:p>
+                  </a:txBody>
+                  <a:tcPr marL="45720" marR="45720" marT="18288" marB="18288" anchor="t"/>
+                </a:tc>
+                <a:tc>
+                  <a:txBody>
+                    <a:bodyPr wrap="square"/>
+                    <a:lstStyle/>
+                    <a:p>
+                      <a:r>
+                        <a:rPr sz="828" b="0" i="0">
+                          <a:solidFill>
+                            <a:srgbClr val="1A1A1A"/>
+                          </a:solidFill>
+                          <a:latin typeface="Helvetica Neue"/>
+                        </a:rPr>
+                        <a:t>16 Bit</a:t>
+                      </a:r>
+                    </a:p>
+                  </a:txBody>
+                  <a:tcPr marL="45720" marR="45720" marT="18288" marB="18288" anchor="t"/>
+                </a:tc>
+                <a:tc>
+                  <a:txBody>
+                    <a:bodyPr wrap="square"/>
+                    <a:lstStyle/>
+                    <a:p>
+                      <a:r>
+                        <a:rPr sz="828" b="0" i="0">
+                          <a:solidFill>
+                            <a:srgbClr val="1A1A1A"/>
+                          </a:solidFill>
+                          <a:latin typeface="Helvetica Neue"/>
+                        </a:rPr>
+                        <a:t>bone age / growth</a:t>
+                      </a:r>
+                    </a:p>
+                  </a:txBody>
+                  <a:tcPr marL="45720" marR="45720" marT="18288" marB="18288" anchor="t"/>
+                </a:tc>
+                <a:tc>
+                  <a:txBody>
+                    <a:bodyPr wrap="square"/>
+                    <a:lstStyle/>
+                    <a:p>
+                      <a:r>
+                        <a:rPr sz="828" b="0" i="0">
+                          <a:solidFill>
+                            <a:srgbClr val="1A1A1A"/>
+                          </a:solidFill>
+                          <a:latin typeface="Helvetica Neue"/>
+                        </a:rPr>
+                        <a:t>Bone-age estimation with Greulich–Pyle atlas matching and draft report text</a:t>
+                      </a:r>
+                    </a:p>
+                  </a:txBody>
+                  <a:tcPr marL="45720" marR="45720" marT="18288" marB="18288" anchor="t"/>
+                </a:tc>
+                <a:tc>
+                  <a:txBody>
+                    <a:bodyPr wrap="square"/>
+                    <a:lstStyle/>
+                    <a:p>
+                      <a:r>
+                        <a:rPr sz="828" b="0" i="0">
+                          <a:solidFill>
+                            <a:srgbClr val="1A1A1A"/>
+                          </a:solidFill>
+                          <a:latin typeface="Helvetica Neue"/>
+                        </a:rPr>
+                        <a:t>Pediatric tool; Health Canada licensed, no FDA authorization identified</a:t>
+                      </a:r>
+                    </a:p>
+                  </a:txBody>
+                  <a:tcPr marL="45720" marR="45720" marT="18288" marB="18288" anchor="t"/>
+                </a:tc>
+                <a:tc>
+                  <a:txBody>
+                    <a:bodyPr wrap="square"/>
+                    <a:lstStyle/>
+                    <a:p>
+                      <a:r>
+                        <a:rPr sz="828" b="0" i="0">
+                          <a:solidFill>
+                            <a:srgbClr val="1A1A1A"/>
+                          </a:solidFill>
+                          <a:latin typeface="Helvetica Neue"/>
+                        </a:rPr>
+                        <a:t>Limited US access</a:t>
+                      </a:r>
+                    </a:p>
+                  </a:txBody>
+                  <a:tcPr marL="45720" marR="45720" marT="18288" marB="18288" anchor="t"/>
+                </a:tc>
+              </a:tr>
+              <a:tr h="307238">
+                <a:tc>
+                  <a:txBody>
+                    <a:bodyPr wrap="square"/>
+                    <a:lstStyle/>
+                    <a:p>
+                      <a:r>
+                        <a:rPr sz="828" b="0" i="0">
+                          <a:solidFill>
+                            <a:srgbClr val="1A1A1A"/>
+                          </a:solidFill>
+                          <a:latin typeface="Helvetica Neue"/>
+                        </a:rPr>
+                        <a:t>Fetal EchoScan</a:t>
+                      </a:r>
+                    </a:p>
+                  </a:txBody>
+                  <a:tcPr marL="45720" marR="45720" marT="18288" marB="18288" anchor="t"/>
+                </a:tc>
+                <a:tc>
+                  <a:txBody>
+                    <a:bodyPr wrap="square"/>
+                    <a:lstStyle/>
+                    <a:p>
+                      <a:r>
+                        <a:rPr sz="828" b="0" i="0">
+                          <a:solidFill>
+                            <a:srgbClr val="1A1A1A"/>
+                          </a:solidFill>
+                          <a:latin typeface="Helvetica Neue"/>
+                        </a:rPr>
+                        <a:t>BrightHeart</a:t>
+                      </a:r>
+                    </a:p>
+                  </a:txBody>
+                  <a:tcPr marL="45720" marR="45720" marT="18288" marB="18288" anchor="t"/>
+                </a:tc>
+                <a:tc>
+                  <a:txBody>
+                    <a:bodyPr wrap="square"/>
+                    <a:lstStyle/>
+                    <a:p>
+                      <a:r>
+                        <a:rPr sz="828" b="0" i="0">
+                          <a:solidFill>
+                            <a:srgbClr val="1A1A1A"/>
+                          </a:solidFill>
+                          <a:latin typeface="Helvetica Neue"/>
+                        </a:rPr>
+                        <a:t>fetal / obstetric</a:t>
+                      </a:r>
+                    </a:p>
+                  </a:txBody>
+                  <a:tcPr marL="45720" marR="45720" marT="18288" marB="18288" anchor="t"/>
+                </a:tc>
+                <a:tc>
+                  <a:txBody>
+                    <a:bodyPr wrap="square"/>
+                    <a:lstStyle/>
+                    <a:p>
+                      <a:r>
+                        <a:rPr sz="828" b="0" i="0">
+                          <a:solidFill>
+                            <a:srgbClr val="1A1A1A"/>
+                          </a:solidFill>
+                          <a:latin typeface="Helvetica Neue"/>
+                        </a:rPr>
+                        <a:t>Flags eight morphological findings suspicious for congenital heart disease on second-trimester views</a:t>
+                      </a:r>
+                    </a:p>
+                  </a:txBody>
+                  <a:tcPr marL="45720" marR="45720" marT="18288" marB="18288" anchor="t"/>
+                </a:tc>
+                <a:tc>
+                  <a:txBody>
+                    <a:bodyPr wrap="square"/>
+                    <a:lstStyle/>
+                    <a:p>
+                      <a:r>
+                        <a:rPr sz="828" b="0" i="0">
+                          <a:solidFill>
+                            <a:srgbClr val="1A1A1A"/>
+                          </a:solidFill>
+                          <a:latin typeface="Helvetica Neue"/>
+                        </a:rPr>
+                        <a:t>Prenatal: second-trimester exams, maternal age 18+ [K252294, 2025]</a:t>
+                      </a:r>
+                    </a:p>
+                  </a:txBody>
+                  <a:tcPr marL="45720" marR="45720" marT="18288" marB="18288" anchor="t"/>
+                </a:tc>
+                <a:tc>
+                  <a:txBody>
+                    <a:bodyPr wrap="square"/>
+                    <a:lstStyle/>
+                    <a:p>
+                      <a:r>
+                        <a:rPr sz="828" b="0" i="0">
+                          <a:solidFill>
+                            <a:srgbClr val="1A1A1A"/>
+                          </a:solidFill>
+                          <a:latin typeface="Helvetica Neue"/>
+                        </a:rPr>
+                        <a:t>Early deployments / pilots</a:t>
+                      </a:r>
+                    </a:p>
+                  </a:txBody>
+                  <a:tcPr marL="45720" marR="45720" marT="18288" marB="18288" anchor="t"/>
+                </a:tc>
+              </a:tr>
+              <a:tr h="433425">
+                <a:tc>
+                  <a:txBody>
+                    <a:bodyPr wrap="square"/>
+                    <a:lstStyle/>
+                    <a:p>
+                      <a:r>
+                        <a:rPr sz="828" b="0" i="0">
+                          <a:solidFill>
+                            <a:srgbClr val="1A1A1A"/>
+                          </a:solidFill>
+                          <a:latin typeface="Helvetica Neue"/>
+                        </a:rPr>
+                        <a:t>Sonio Detect / Sonio Suspect</a:t>
+                      </a:r>
+                    </a:p>
+                  </a:txBody>
+                  <a:tcPr marL="45720" marR="45720" marT="18288" marB="18288" anchor="t"/>
+                </a:tc>
+                <a:tc>
+                  <a:txBody>
+                    <a:bodyPr wrap="square"/>
+                    <a:lstStyle/>
+                    <a:p>
+                      <a:r>
+                        <a:rPr sz="828" b="0" i="0">
+                          <a:solidFill>
+                            <a:srgbClr val="1A1A1A"/>
+                          </a:solidFill>
+                          <a:latin typeface="Helvetica Neue"/>
+                        </a:rPr>
+                        <a:t>Sonio</a:t>
+                      </a:r>
+                    </a:p>
+                  </a:txBody>
+                  <a:tcPr marL="45720" marR="45720" marT="18288" marB="18288" anchor="t"/>
+                </a:tc>
+                <a:tc>
+                  <a:txBody>
+                    <a:bodyPr wrap="square"/>
+                    <a:lstStyle/>
+                    <a:p>
+                      <a:r>
+                        <a:rPr sz="828" b="0" i="0">
+                          <a:solidFill>
+                            <a:srgbClr val="1A1A1A"/>
+                          </a:solidFill>
+                          <a:latin typeface="Helvetica Neue"/>
+                        </a:rPr>
+                        <a:t>fetal / obstetric</a:t>
+                      </a:r>
+                    </a:p>
+                  </a:txBody>
+                  <a:tcPr marL="45720" marR="45720" marT="18288" marB="18288" anchor="t"/>
+                </a:tc>
+                <a:tc>
+                  <a:txBody>
+                    <a:bodyPr wrap="square"/>
+                    <a:lstStyle/>
+                    <a:p>
+                      <a:r>
+                        <a:rPr sz="828" b="0" i="0">
+                          <a:solidFill>
+                            <a:srgbClr val="1A1A1A"/>
+                          </a:solidFill>
+                          <a:latin typeface="Helvetica Neue"/>
+                        </a:rPr>
+                        <a:t>Checks that the required fetal views were obtained and are of usable quality (Detect); flags images suspicious for anomalies (Suspect)</a:t>
+                      </a:r>
+                    </a:p>
+                  </a:txBody>
+                  <a:tcPr marL="45720" marR="45720" marT="18288" marB="18288" anchor="t"/>
+                </a:tc>
+                <a:tc>
+                  <a:txBody>
+                    <a:bodyPr wrap="square"/>
+                    <a:lstStyle/>
+                    <a:p>
+                      <a:r>
+                        <a:rPr sz="828" b="0" i="0">
+                          <a:solidFill>
+                            <a:srgbClr val="1A1A1A"/>
+                          </a:solidFill>
+                          <a:latin typeface="Helvetica Neue"/>
+                        </a:rPr>
+                        <a:t>Prenatal; every FDA entry states a fetal population [K252433, 2026]</a:t>
+                      </a:r>
+                    </a:p>
+                  </a:txBody>
+                  <a:tcPr marL="45720" marR="45720" marT="18288" marB="18288" anchor="t"/>
+                </a:tc>
+                <a:tc>
+                  <a:txBody>
+                    <a:bodyPr wrap="square"/>
+                    <a:lstStyle/>
+                    <a:p>
+                      <a:r>
+                        <a:rPr sz="828" b="0" i="0">
+                          <a:solidFill>
+                            <a:srgbClr val="1A1A1A"/>
+                          </a:solidFill>
+                          <a:latin typeface="Helvetica Neue"/>
+                        </a:rPr>
+                        <a:t>Early deployments / pilots</a:t>
+                      </a:r>
+                    </a:p>
+                  </a:txBody>
+                  <a:tcPr marL="45720" marR="45720" marT="18288" marB="18288" anchor="t"/>
+                </a:tc>
+              </a:tr>
+              <a:tr h="433425">
+                <a:tc>
+                  <a:txBody>
+                    <a:bodyPr wrap="square"/>
+                    <a:lstStyle/>
+                    <a:p>
+                      <a:r>
+                        <a:rPr sz="828" b="0" i="0">
+                          <a:solidFill>
+                            <a:srgbClr val="1A1A1A"/>
+                          </a:solidFill>
+                          <a:latin typeface="Helvetica Neue"/>
+                        </a:rPr>
+                        <a:t>Delivery Date AI</a:t>
+                      </a:r>
+                    </a:p>
+                  </a:txBody>
+                  <a:tcPr marL="45720" marR="45720" marT="18288" marB="18288" anchor="t"/>
+                </a:tc>
+                <a:tc>
+                  <a:txBody>
+                    <a:bodyPr wrap="square"/>
+                    <a:lstStyle/>
+                    <a:p>
+                      <a:r>
+                        <a:rPr sz="828" b="0" i="0">
+                          <a:solidFill>
+                            <a:srgbClr val="1A1A1A"/>
+                          </a:solidFill>
+                          <a:latin typeface="Helvetica Neue"/>
+                        </a:rPr>
+                        <a:t>Ultrasound AI</a:t>
+                      </a:r>
+                    </a:p>
+                  </a:txBody>
+                  <a:tcPr marL="45720" marR="45720" marT="18288" marB="18288" anchor="t"/>
+                </a:tc>
+                <a:tc>
+                  <a:txBody>
+                    <a:bodyPr wrap="square"/>
+                    <a:lstStyle/>
+                    <a:p>
+                      <a:r>
+                        <a:rPr sz="828" b="0" i="0">
+                          <a:solidFill>
+                            <a:srgbClr val="1A1A1A"/>
+                          </a:solidFill>
+                          <a:latin typeface="Helvetica Neue"/>
+                        </a:rPr>
+                        <a:t>fetal / obstetric</a:t>
+                      </a:r>
+                    </a:p>
+                  </a:txBody>
+                  <a:tcPr marL="45720" marR="45720" marT="18288" marB="18288" anchor="t"/>
+                </a:tc>
+                <a:tc>
+                  <a:txBody>
+                    <a:bodyPr wrap="square"/>
+                    <a:lstStyle/>
+                    <a:p>
+                      <a:r>
+                        <a:rPr sz="828" b="0" i="0">
+                          <a:solidFill>
+                            <a:srgbClr val="1A1A1A"/>
+                          </a:solidFill>
+                          <a:latin typeface="Helvetica Neue"/>
+                        </a:rPr>
+                        <a:t>Predicts the delivery date from a second- or third-trimester ultrasound when dating is unreliable</a:t>
+                      </a:r>
+                    </a:p>
+                  </a:txBody>
+                  <a:tcPr marL="45720" marR="45720" marT="18288" marB="18288" anchor="t"/>
+                </a:tc>
+                <a:tc>
+                  <a:txBody>
+                    <a:bodyPr wrap="square"/>
+                    <a:lstStyle/>
+                    <a:p>
+                      <a:r>
+                        <a:rPr sz="828" b="0" i="0">
+                          <a:solidFill>
+                            <a:srgbClr val="1A1A1A"/>
+                          </a:solidFill>
+                          <a:latin typeface="Helvetica Neue"/>
+                        </a:rPr>
+                        <a:t>Prenatal; the first De Novo of its kind (a new device class) [DEN250007, 2026]</a:t>
+                      </a:r>
+                    </a:p>
+                  </a:txBody>
+                  <a:tcPr marL="45720" marR="45720" marT="18288" marB="18288" anchor="t"/>
+                </a:tc>
+                <a:tc>
+                  <a:txBody>
+                    <a:bodyPr wrap="square"/>
+                    <a:lstStyle/>
+                    <a:p>
+                      <a:r>
+                        <a:rPr sz="828" b="0" i="0">
+                          <a:solidFill>
+                            <a:srgbClr val="1A1A1A"/>
+                          </a:solidFill>
+                          <a:latin typeface="Helvetica Neue"/>
+                        </a:rPr>
+                        <a:t>Newly authorized; clinical experience limited</a:t>
+                      </a:r>
+                    </a:p>
+                  </a:txBody>
+                  <a:tcPr marL="45720" marR="45720" marT="18288" marB="18288" anchor="t"/>
+                </a:tc>
+              </a:tr>
+              <a:tr h="559612">
+                <a:tc>
+                  <a:txBody>
+                    <a:bodyPr wrap="square"/>
+                    <a:lstStyle/>
+                    <a:p>
+                      <a:r>
+                        <a:rPr sz="828" b="0" i="0">
+                          <a:solidFill>
+                            <a:srgbClr val="1A1A1A"/>
+                          </a:solidFill>
+                          <a:latin typeface="Helvetica Neue"/>
+                        </a:rPr>
+                        <a:t>Swoop Portable MR + BrainInsight</a:t>
+                      </a:r>
+                    </a:p>
+                  </a:txBody>
+                  <a:tcPr marL="45720" marR="45720" marT="18288" marB="18288" anchor="t"/>
+                </a:tc>
+                <a:tc>
+                  <a:txBody>
+                    <a:bodyPr wrap="square"/>
+                    <a:lstStyle/>
+                    <a:p>
+                      <a:r>
+                        <a:rPr sz="828" b="0" i="0">
+                          <a:solidFill>
+                            <a:srgbClr val="1A1A1A"/>
+                          </a:solidFill>
+                          <a:latin typeface="Helvetica Neue"/>
+                        </a:rPr>
+                        <a:t>Hyperfine</a:t>
+                      </a:r>
+                    </a:p>
+                  </a:txBody>
+                  <a:tcPr marL="45720" marR="45720" marT="18288" marB="18288" anchor="t"/>
+                </a:tc>
+                <a:tc>
+                  <a:txBody>
+                    <a:bodyPr wrap="square"/>
+                    <a:lstStyle/>
+                    <a:p>
+                      <a:r>
+                        <a:rPr sz="828" b="0" i="0">
+                          <a:solidFill>
+                            <a:srgbClr val="1A1A1A"/>
+                          </a:solidFill>
+                          <a:latin typeface="Helvetica Neue"/>
+                        </a:rPr>
+                        <a:t>brain / neurologic</a:t>
+                      </a:r>
+                    </a:p>
+                  </a:txBody>
+                  <a:tcPr marL="45720" marR="45720" marT="18288" marB="18288" anchor="t"/>
+                </a:tc>
+                <a:tc>
+                  <a:txBody>
+                    <a:bodyPr wrap="square"/>
+                    <a:lstStyle/>
+                    <a:p>
+                      <a:r>
+                        <a:rPr sz="828" b="0" i="0">
+                          <a:solidFill>
+                            <a:srgbClr val="1A1A1A"/>
+                          </a:solidFill>
+                          <a:latin typeface="Helvetica Neue"/>
+                        </a:rPr>
+                        <a:t>Bedside low-field brain MRI with deep-learning reconstruction; BrainInsight measures brain volumes and midline shift</a:t>
+                      </a:r>
+                    </a:p>
+                  </a:txBody>
+                  <a:tcPr marL="45720" marR="45720" marT="18288" marB="18288" anchor="t"/>
+                </a:tc>
+                <a:tc>
+                  <a:txBody>
+                    <a:bodyPr wrap="square"/>
+                    <a:lstStyle/>
+                    <a:p>
+                      <a:r>
+                        <a:rPr sz="828" b="0" i="0">
+                          <a:solidFill>
+                            <a:srgbClr val="1A1A1A"/>
+                          </a:solidFill>
+                          <a:latin typeface="Helvetica Neue"/>
+                        </a:rPr>
+                        <a:t>Decision summaries state a pediatric population; bedside imaging may reduce transport risks in the NICU and PICU [K253489, 2025]</a:t>
+                      </a:r>
+                    </a:p>
+                  </a:txBody>
+                  <a:tcPr marL="45720" marR="45720" marT="18288" marB="18288" anchor="t"/>
+                </a:tc>
+                <a:tc>
+                  <a:txBody>
+                    <a:bodyPr wrap="square"/>
+                    <a:lstStyle/>
+                    <a:p>
+                      <a:r>
+                        <a:rPr sz="828" b="0" i="0">
+                          <a:solidFill>
+                            <a:srgbClr val="1A1A1A"/>
+                          </a:solidFill>
+                          <a:latin typeface="Helvetica Neue"/>
+                        </a:rPr>
+                        <a:t>In pediatric pilots</a:t>
+                      </a:r>
+                    </a:p>
+                  </a:txBody>
+                  <a:tcPr marL="45720" marR="45720" marT="18288" marB="18288" anchor="t"/>
+                </a:tc>
+              </a:tr>
+              <a:tr h="307238">
+                <a:tc>
+                  <a:txBody>
+                    <a:bodyPr wrap="square"/>
+                    <a:lstStyle/>
+                    <a:p>
+                      <a:r>
+                        <a:rPr sz="828" b="0" i="0">
+                          <a:solidFill>
+                            <a:srgbClr val="1A1A1A"/>
+                          </a:solidFill>
+                          <a:latin typeface="Helvetica Neue"/>
+                        </a:rPr>
+                        <a:t>spineEOS / VEA Align</a:t>
+                      </a:r>
+                    </a:p>
+                  </a:txBody>
+                  <a:tcPr marL="45720" marR="45720" marT="18288" marB="18288" anchor="t"/>
+                </a:tc>
+                <a:tc>
+                  <a:txBody>
+                    <a:bodyPr wrap="square"/>
+                    <a:lstStyle/>
+                    <a:p>
+                      <a:r>
+                        <a:rPr sz="828" b="0" i="0">
+                          <a:solidFill>
+                            <a:srgbClr val="1A1A1A"/>
+                          </a:solidFill>
+                          <a:latin typeface="Helvetica Neue"/>
+                        </a:rPr>
+                        <a:t>EOS imaging (Alphatec)</a:t>
+                      </a:r>
+                    </a:p>
+                  </a:txBody>
+                  <a:tcPr marL="45720" marR="45720" marT="18288" marB="18288" anchor="t"/>
+                </a:tc>
+                <a:tc>
+                  <a:txBody>
+                    <a:bodyPr wrap="square"/>
+                    <a:lstStyle/>
+                    <a:p>
+                      <a:r>
+                        <a:rPr sz="828" b="0" i="0">
+                          <a:solidFill>
+                            <a:srgbClr val="1A1A1A"/>
+                          </a:solidFill>
+                          <a:latin typeface="Helvetica Neue"/>
+                        </a:rPr>
+                        <a:t>spine / scoliosis</a:t>
+                      </a:r>
+                    </a:p>
+                  </a:txBody>
+                  <a:tcPr marL="45720" marR="45720" marT="18288" marB="18288" anchor="t"/>
+                </a:tc>
+                <a:tc>
+                  <a:txBody>
+                    <a:bodyPr wrap="square"/>
+                    <a:lstStyle/>
+                    <a:p>
+                      <a:r>
+                        <a:rPr sz="828" b="0" i="0">
+                          <a:solidFill>
+                            <a:srgbClr val="1A1A1A"/>
+                          </a:solidFill>
+                          <a:latin typeface="Helvetica Neue"/>
+                        </a:rPr>
+                        <a:t>Automated 3D spine and lower-limb modeling from biplanar low-dose full-body radiographs</a:t>
+                      </a:r>
+                    </a:p>
+                  </a:txBody>
+                  <a:tcPr marL="45720" marR="45720" marT="18288" marB="18288" anchor="t"/>
+                </a:tc>
+                <a:tc>
+                  <a:txBody>
+                    <a:bodyPr wrap="square"/>
+                    <a:lstStyle/>
+                    <a:p>
+                      <a:r>
+                        <a:rPr sz="828" b="0" i="0">
+                          <a:solidFill>
+                            <a:srgbClr val="1A1A1A"/>
+                          </a:solidFill>
+                          <a:latin typeface="Helvetica Neue"/>
+                        </a:rPr>
+                        <a:t>Lower-dose imaging for children who need repeated scoliosis follow-up [K251747, 2025]</a:t>
+                      </a:r>
+                    </a:p>
+                  </a:txBody>
+                  <a:tcPr marL="45720" marR="45720" marT="18288" marB="18288" anchor="t"/>
+                </a:tc>
+                <a:tc>
+                  <a:txBody>
+                    <a:bodyPr wrap="square"/>
+                    <a:lstStyle/>
+                    <a:p>
+                      <a:r>
+                        <a:rPr sz="828" b="0" i="0">
+                          <a:solidFill>
+                            <a:srgbClr val="1A1A1A"/>
+                          </a:solidFill>
+                          <a:latin typeface="Helvetica Neue"/>
+                        </a:rPr>
+                        <a:t>Widely deployed (pediatric orthopedics)</a:t>
+                      </a:r>
+                    </a:p>
+                  </a:txBody>
+                  <a:tcPr marL="45720" marR="45720" marT="18288" marB="18288" anchor="t"/>
+                </a:tc>
+              </a:tr>
+              <a:tr h="433425">
+                <a:tc>
+                  <a:txBody>
+                    <a:bodyPr wrap="square"/>
+                    <a:lstStyle/>
+                    <a:p>
+                      <a:r>
+                        <a:rPr sz="828" b="0" i="0">
+                          <a:solidFill>
+                            <a:srgbClr val="1A1A1A"/>
+                          </a:solidFill>
+                          <a:latin typeface="Helvetica Neue"/>
+                        </a:rPr>
+                        <a:t>CoLumbo</a:t>
+                      </a:r>
+                    </a:p>
+                  </a:txBody>
+                  <a:tcPr marL="45720" marR="45720" marT="18288" marB="18288" anchor="t"/>
+                </a:tc>
+                <a:tc>
+                  <a:txBody>
+                    <a:bodyPr wrap="square"/>
+                    <a:lstStyle/>
+                    <a:p>
+                      <a:r>
+                        <a:rPr sz="828" b="0" i="0">
+                          <a:solidFill>
+                            <a:srgbClr val="1A1A1A"/>
+                          </a:solidFill>
+                          <a:latin typeface="Helvetica Neue"/>
+                        </a:rPr>
+                        <a:t>Smart Soft Healthcare</a:t>
+                      </a:r>
+                    </a:p>
+                  </a:txBody>
+                  <a:tcPr marL="45720" marR="45720" marT="18288" marB="18288" anchor="t"/>
+                </a:tc>
+                <a:tc>
+                  <a:txBody>
+                    <a:bodyPr wrap="square"/>
+                    <a:lstStyle/>
+                    <a:p>
+                      <a:r>
+                        <a:rPr sz="828" b="0" i="0">
+                          <a:solidFill>
+                            <a:srgbClr val="1A1A1A"/>
+                          </a:solidFill>
+                          <a:latin typeface="Helvetica Neue"/>
+                        </a:rPr>
+                        <a:t>spine / scoliosis</a:t>
+                      </a:r>
+                    </a:p>
+                  </a:txBody>
+                  <a:tcPr marL="45720" marR="45720" marT="18288" marB="18288" anchor="t"/>
+                </a:tc>
+                <a:tc>
+                  <a:txBody>
+                    <a:bodyPr wrap="square"/>
+                    <a:lstStyle/>
+                    <a:p>
+                      <a:r>
+                        <a:rPr sz="828" b="0" i="0">
+                          <a:solidFill>
+                            <a:srgbClr val="1A1A1A"/>
+                          </a:solidFill>
+                          <a:latin typeface="Helvetica Neue"/>
+                        </a:rPr>
+                        <a:t>Spine MRI segmentation, measurement and structured reporting, lumbar and cervical</a:t>
+                      </a:r>
+                    </a:p>
+                  </a:txBody>
+                  <a:tcPr marL="45720" marR="45720" marT="18288" marB="18288" anchor="t"/>
+                </a:tc>
+                <a:tc>
+                  <a:txBody>
+                    <a:bodyPr wrap="square"/>
+                    <a:lstStyle/>
+                    <a:p>
+                      <a:r>
+                        <a:rPr sz="828" b="0" i="0">
+                          <a:solidFill>
+                            <a:srgbClr val="1A1A1A"/>
+                          </a:solidFill>
+                          <a:latin typeface="Helvetica Neue"/>
+                        </a:rPr>
+                        <a:t>Decision summaries state a pediatric population; no pediatric-specific performance reported [K254015, 2026]</a:t>
+                      </a:r>
+                    </a:p>
+                  </a:txBody>
+                  <a:tcPr marL="45720" marR="45720" marT="18288" marB="18288" anchor="t"/>
+                </a:tc>
+                <a:tc>
+                  <a:txBody>
+                    <a:bodyPr wrap="square"/>
+                    <a:lstStyle/>
+                    <a:p>
+                      <a:r>
+                        <a:rPr sz="828" b="0" i="0">
+                          <a:solidFill>
+                            <a:srgbClr val="1A1A1A"/>
+                          </a:solidFill>
+                          <a:latin typeface="Helvetica Neue"/>
+                        </a:rPr>
+                        <a:t>Early deployments</a:t>
+                      </a:r>
+                    </a:p>
+                  </a:txBody>
+                  <a:tcPr marL="45720" marR="45720" marT="18288" marB="18288" anchor="t"/>
+                </a:tc>
+              </a:tr>
+            </a:tbl>
+          </a:graphicData>
+        </a:graphic>
+      </p:graphicFrame>
+      <p:sp>
+        <p:nvSpPr>
+          <p:cNvPr id="5" name="TextBox 4"/>
+          <p:cNvSpPr txBox="1"/>
+          <p:nvPr/>
+        </p:nvSpPr>
+        <p:spPr>
+          <a:xfrm>
+            <a:off x="411480" y="5954572"/>
+            <a:ext cx="11368735" cy="444881"/>
+          </a:xfrm>
+          <a:prstGeom prst="rect">
+            <a:avLst/>
+          </a:prstGeom>
+          <a:noFill/>
+        </p:spPr>
+        <p:txBody>
+          <a:bodyPr wrap="square" lIns="45720" rIns="45720" tIns="27432" bIns="27432" anchor="t">
+            <a:spAutoFit/>
+          </a:bodyPr>
+          <a:lstStyle/>
+          <a:p>
+            <a:pPr algn="l">
+              <a:spcAft>
+                <a:spcPts val="354"/>
+              </a:spcAft>
+            </a:pPr>
+            <a:r>
+              <a:rPr sz="1012" b="0" i="0">
+                <a:solidFill>
+                  <a:srgbClr val="1A1A1A"/>
+                </a:solidFill>
+                <a:latin typeface="Helvetica Neue"/>
+              </a:rPr>
+              <a:t>Square brackets identify the FDA submission and decision year supporting the pediatric description. No brackets means no US authorization was identified. Clinical use reflects our assessment, not measured adoption. Many large-vendor authorizations cover whole scanners with pediatric imaging listed as one application.</a:t>
+            </a:r>
+          </a:p>
+        </p:txBody>
+      </p:sp>
+    </p:spTree>
+  </p:cSld>
+  <p:clrMapOvr>
+    <a:masterClrMapping/>
+  </p:clrMapOvr>
+</p:sld>
+</file>
+
+<file path=ppt/slides/slide67.xml><?xml version="1.0" encoding="utf-8"?>
+<p:sld xmlns:a="http://schemas.openxmlformats.org/drawingml/2006/main" xmlns:p="http://schemas.openxmlformats.org/presentationml/2006/main" xmlns:r="http://schemas.openxmlformats.org/officeDocument/2006/relationships" show="0">
+  <p:cSld>
+    <p:spTree>
+      <p:nvGrpSpPr>
+        <p:cNvPr id="1" name=""/>
+        <p:cNvGrpSpPr/>
+        <p:nvPr/>
+      </p:nvGrpSpPr>
+      <p:grpSpPr/>
+      <p:sp>
+        <p:nvSpPr>
+          <p:cNvPr id="2" name="title band"/>
+          <p:cNvSpPr/>
+          <p:nvPr/>
+        </p:nvSpPr>
+        <p:spPr>
+          <a:xfrm>
+            <a:off x="0" y="0"/>
+            <a:ext cx="12191695" cy="713232"/>
+          </a:xfrm>
+          <a:prstGeom prst="rect">
+            <a:avLst/>
+          </a:prstGeom>
+          <a:solidFill>
+            <a:srgbClr val="3333B3"/>
+          </a:solidFill>
+          <a:ln>
+            <a:noFill/>
+          </a:ln>
+        </p:spPr>
+        <p:style>
+          <a:lnRef idx="1">
+            <a:schemeClr val="accent1"/>
+          </a:lnRef>
+          <a:fillRef idx="3">
+            <a:schemeClr val="accent1"/>
+          </a:fillRef>
+          <a:effectRef idx="2">
+            <a:schemeClr val="accent1"/>
+          </a:effectRef>
+          <a:fontRef idx="minor">
+            <a:schemeClr val="lt1"/>
+          </a:fontRef>
+        </p:style>
+        <p:txBody>
+          <a:bodyPr rtlCol="0" anchor="b" lIns="411480" bIns="73152" wrap="square"/>
+          <a:lstStyle/>
+          <a:p>
+            <a:pPr algn="l"/>
+            <a:r>
+              <a:rPr sz="2200">
+                <a:solidFill>
+                  <a:srgbClr val="FFFFFF"/>
+                </a:solidFill>
+                <a:latin typeface="Helvetica Neue"/>
+              </a:rPr>
               <a:t>Commercial product inventory: backup (part 2)</a:t>
             </a:r>
           </a:p>
@@ -48404,6 +48450,111 @@
                 <a:latin typeface="Helvetica Neue"/>
               </a:rPr>
               <a:t>Square brackets identify the FDA submission and decision year supporting the pediatric description. No brackets means no US authorization was identified. Clinical use reflects our assessment, not measured adoption. Many large-vendor authorizations cover whole scanners with pediatric imaging listed as one application.</a:t>
+            </a:r>
+          </a:p>
+        </p:txBody>
+      </p:sp>
+    </p:spTree>
+  </p:cSld>
+  <p:clrMapOvr>
+    <a:masterClrMapping/>
+  </p:clrMapOvr>
+</p:sld>
+</file>
+
+<file path=ppt/slides/slide68.xml><?xml version="1.0" encoding="utf-8"?>
+<p:sld xmlns:a="http://schemas.openxmlformats.org/drawingml/2006/main" xmlns:p="http://schemas.openxmlformats.org/presentationml/2006/main" xmlns:r="http://schemas.openxmlformats.org/officeDocument/2006/relationships">
+  <p:cSld>
+    <p:spTree>
+      <p:nvGrpSpPr>
+        <p:cNvPr id="1" name=""/>
+        <p:cNvGrpSpPr/>
+        <p:nvPr/>
+      </p:nvGrpSpPr>
+      <p:grpSpPr/>
+      <p:sp>
+        <p:nvSpPr>
+          <p:cNvPr id="2" name="title band"/>
+          <p:cNvSpPr/>
+          <p:nvPr/>
+        </p:nvSpPr>
+        <p:spPr>
+          <a:xfrm>
+            <a:off x="0" y="0"/>
+            <a:ext cx="12191695" cy="713232"/>
+          </a:xfrm>
+          <a:prstGeom prst="rect">
+            <a:avLst/>
+          </a:prstGeom>
+          <a:solidFill>
+            <a:srgbClr val="3333B3"/>
+          </a:solidFill>
+          <a:ln>
+            <a:noFill/>
+          </a:ln>
+        </p:spPr>
+        <p:style>
+          <a:lnRef idx="1">
+            <a:schemeClr val="accent1"/>
+          </a:lnRef>
+          <a:fillRef idx="3">
+            <a:schemeClr val="accent1"/>
+          </a:fillRef>
+          <a:effectRef idx="2">
+            <a:schemeClr val="accent1"/>
+          </a:effectRef>
+          <a:fontRef idx="minor">
+            <a:schemeClr val="lt1"/>
+          </a:fontRef>
+        </p:style>
+        <p:txBody>
+          <a:bodyPr rtlCol="0" anchor="b" lIns="411480" bIns="73152" wrap="square"/>
+          <a:lstStyle/>
+          <a:p>
+            <a:pPr algn="l"/>
+            <a:r>
+              <a:rPr sz="2200">
+                <a:solidFill>
+                  <a:srgbClr val="FFFFFF"/>
+                </a:solidFill>
+                <a:latin typeface="Helvetica Neue"/>
+              </a:rPr>
+              <a:t>Thank you!</a:t>
+            </a:r>
+          </a:p>
+        </p:txBody>
+      </p:sp>
+      <p:sp>
+        <p:nvSpPr>
+          <p:cNvPr id="3" name="page number"/>
+          <p:cNvSpPr txBox="1"/>
+          <p:nvPr/>
+        </p:nvSpPr>
+        <p:spPr>
+          <a:xfrm>
+            <a:off x="10728655" y="6510528"/>
+            <a:ext cx="1188720" cy="274320"/>
+          </a:xfrm>
+          <a:prstGeom prst="rect">
+            <a:avLst/>
+          </a:prstGeom>
+          <a:noFill/>
+        </p:spPr>
+        <p:txBody>
+          <a:bodyPr wrap="none">
+            <a:spAutoFit/>
+          </a:bodyPr>
+          <a:lstStyle/>
+          <a:p>
+            <a:pPr algn="r"/>
+            <a:r>
+              <a:rPr sz="1000">
+                <a:solidFill>
+                  <a:srgbClr val="6B6B6B"/>
+                </a:solidFill>
+                <a:latin typeface="Helvetica Neue"/>
+              </a:rPr>
+              <a:t>36 / 36</a:t>
             </a:r>
           </a:p>
         </p:txBody>
@@ -48870,7 +49021,7 @@
                 </a:solidFill>
                 <a:latin typeface="Helvetica Neue"/>
               </a:rPr>
-              <a:t>7 / 33</a:t>
+              <a:t>7 / 36</a:t>
             </a:r>
           </a:p>
         </p:txBody>
@@ -49034,7 +49185,7 @@
                 </a:solidFill>
                 <a:latin typeface="Helvetica Neue"/>
               </a:rPr>
-              <a:t>8 / 33</a:t>
+              <a:t>8 / 36</a:t>
             </a:r>
           </a:p>
         </p:txBody>
